--- a/submissions/triadic_reduction/talk/deck.pptx
+++ b/submissions/triadic_reduction/talk/deck.pptx
@@ -592,38 +592,59 @@
           <a:lstStyle/>
           <a:p>
             <a:r>
-              <a:t>Here is the pattern I want you to see. Kempe added a unit. Peirce, answering him, pointed to "this</a:t>
-            </a:r>
-          </a:p>
-          <a:p>
-            <a:r>
-              <a:t>action", an abstraction added to the universe. Löwenheim added pairs. Quine added sets of the form x, y.</a:t>
-            </a:r>
-          </a:p>
-          <a:p>
-            <a:r>
-              <a:t>Every one of these reductions works by minting a new object that stands for the whole tuple.</a:t>
+              <a:t>Here is what these reductions do. Take "A gives B to C". Mint a new object, g, the giving. Now write three</a:t>
+            </a:r>
+          </a:p>
+          <a:p>
+            <a:r>
+              <a:t>pairs: g's giver is A, g's gift is B, g's recipient is C. Every relation is two-place. But g is a new</a:t>
+            </a:r>
+          </a:p>
+          <a:p>
+            <a:r>
+              <a:t>thing, and it holds the three together. Kempe's unit is that object. So is Peirce's "this action", and so</a:t>
+            </a:r>
+          </a:p>
+          <a:p>
+            <a:r>
+              <a:t>are Löwenheim's and Quine's pairs.</a:t>
             </a:r>
           </a:p>
           <a:p/>
           <a:p>
             <a:r>
-              <a:t>So what the reductions show is this: a relation among three is expressible with two-place relations over</a:t>
-            </a:r>
-          </a:p>
-          <a:p>
-            <a:r>
-              <a:t>a larger universe. What they do not show is that it can be composed from pairs among the same parties.</a:t>
-            </a:r>
-          </a:p>
-          <a:p>
-            <a:r>
-              <a:t>That second claim is the one coordination needs, and Sergiy Koshkin makes the same point about pairing:</a:t>
-            </a:r>
-          </a:p>
-          <a:p>
-            <a:r>
-              <a:t>it conceals the triad; it does not remove it. This slide is my argument, not a consensus.</a:t>
+              <a:t>The logicians made this exact. Hereth Correia and Pöschel proved, and Koshkin has since sharpened, that</a:t>
+            </a:r>
+          </a:p>
+          <a:p>
+            <a:r>
+              <a:t>dyads build a triad only with a three-way junction: a minted object, or a variable shared three ways.</a:t>
+            </a:r>
+          </a:p>
+          <a:p>
+            <a:r>
+              <a:t>Without one, never. Koshkin puts it in logical terms: the pairing construction hides a three-way</a:t>
+            </a:r>
+          </a:p>
+          <a:p>
+            <a:r>
+              <a:t>junction.</a:t>
+            </a:r>
+          </a:p>
+          <a:p/>
+          <a:p>
+            <a:r>
+              <a:t>Why should coordination care about the difference? Because a coordination between two people presupposes</a:t>
+            </a:r>
+          </a:p>
+          <a:p>
+            <a:r>
+              <a:t>that each can act on their own. Fuse them into one unit, or route them through a new object, and you have</a:t>
+            </a:r>
+          </a:p>
+          <a:p>
+            <a:r>
+              <a:t>changed who is coordinating.</a:t>
             </a:r>
           </a:p>
         </p:txBody>
@@ -693,12 +714,22 @@
           <a:lstStyle/>
           <a:p>
             <a:r>
-              <a:t>The logicians after Quine made the disagreement precise. Hans Herzberger showed in 1981 that the thesis holds for one kind of construction and collapses under another. I am relying on Koshkin's account of that paper. Robert Burch built a whole algebra in which it</a:t>
-            </a:r>
-          </a:p>
-          <a:p>
-            <a:r>
-              <a:t>holds. Joachim Hereth Correia and Reinhard Pöschel gave the strongest proofs.</a:t>
+              <a:t>Robert Burch built an algebra, PAL, and proved the thesis in it, but only with a restriction on when</a:t>
+            </a:r>
+          </a:p>
+          <a:p>
+            <a:r>
+              <a:t>products may be formed. Hereth Correia and Pöschel removed the restriction and gave the strongest proofs.</a:t>
+            </a:r>
+          </a:p>
+          <a:p>
+            <a:r>
+              <a:t>Hans Herzberger, in 1981, had shown that the thesis holds for one kind of construction and collapses</a:t>
+            </a:r>
+          </a:p>
+          <a:p>
+            <a:r>
+              <a:t>under another. I am relying on Koshkin's account of that paper.</a:t>
             </a:r>
           </a:p>
           <a:p/>
@@ -719,12 +750,12 @@
           </a:p>
           <a:p>
             <a:r>
-              <a:t>right." Both sides accept the same theorems. They disagree about which constructions are legitimate —</a:t>
-            </a:r>
-          </a:p>
-          <a:p>
-            <a:r>
-              <a:t>and the constructions split, again, on the three-way junction.</a:t>
+              <a:t>right." His view is that if you allow any construction and count each three-way junction as a triad,</a:t>
+            </a:r>
+          </a:p>
+          <a:p>
+            <a:r>
+              <a:t>the thesis comes out true. The split, again, is over the junction.</a:t>
             </a:r>
           </a:p>
         </p:txBody>
@@ -799,33 +830,64 @@
           </a:p>
           <a:p>
             <a:r>
-              <a:t>three, or three things fix one. Causation does say. So we asked the question causally, using integrated</a:t>
-            </a:r>
-          </a:p>
-          <a:p>
-            <a:r>
-              <a:t>information theory, IIT 4.0, as the instrument.</a:t>
+              <a:t>three, or three things fix one. Causation does say. So we asked the question causally, with integrated</a:t>
+            </a:r>
+          </a:p>
+          <a:p>
+            <a:r>
+              <a:t>information theory, IIT 4.0, as the instrument. IIT asks one question of a system: cut it into</a:t>
+            </a:r>
+          </a:p>
+          <a:p>
+            <a:r>
+              <a:t>independent parts, and what do you lose? Φ measures what is lost under the least damaging cut. If Φ is</a:t>
+            </a:r>
+          </a:p>
+          <a:p>
+            <a:r>
+              <a:t>zero, the system splits into parts. If Φ is above zero, every cut loses something.</a:t>
             </a:r>
           </a:p>
           <a:p/>
           <a:p>
             <a:r>
-              <a:t>The criterion, fixed before our confirmatory runs: a genuine triad is a party jointly determined by two</a:t>
-            </a:r>
-          </a:p>
-          <a:p>
-            <a:r>
-              <a:t>others, inside a whole that does not factor. Here is the smallest case. M's next state is A and B</a:t>
-            </a:r>
-          </a:p>
-          <a:p>
-            <a:r>
-              <a:t>together. A and B each read M. IIT finds the whole irreducible, Φ equal to 2.0, with all three in the</a:t>
-            </a:r>
-          </a:p>
-          <a:p>
-            <a:r>
-              <a:t>core. And it finds M's own causes irreducibly spanning A and B. That is joint determination in a whole.</a:t>
+              <a:t>Now the sense of "reduce" I promised. From here on, to reduce a form is to rebuild it among the same</a:t>
+            </a:r>
+          </a:p>
+          <a:p>
+            <a:r>
+              <a:t>parties, out of links in which each element answers to just one other. In Quine's sense, triads reduce.</a:t>
+            </a:r>
+          </a:p>
+          <a:p>
+            <a:r>
+              <a:t>In this sense, the question is open.</a:t>
+            </a:r>
+          </a:p>
+          <a:p/>
+          <a:p>
+            <a:r>
+              <a:t>And the criterion: a genuine triad is a party jointly determined by two others, inside a whole that does</a:t>
+            </a:r>
+          </a:p>
+          <a:p>
+            <a:r>
+              <a:t>not factor. I chose that criterion after our first probes. We then pre-registered a test of it and ran</a:t>
+            </a:r>
+          </a:p>
+          <a:p>
+            <a:r>
+              <a:t>it on new cases. Here is the smallest example; we call it the control. M turns on only when A and B are</a:t>
+            </a:r>
+          </a:p>
+          <a:p>
+            <a:r>
+              <a:t>both on, like a deal that closes only if both sign, and A and B each follow M. Φ is 2.0, with all three in</a:t>
+            </a:r>
+          </a:p>
+          <a:p>
+            <a:r>
+              <a:t>the core. The two arrows into M are not two pairs: M's rule takes A and B together.</a:t>
             </a:r>
           </a:p>
         </p:txBody>
@@ -900,38 +962,43 @@
           </a:p>
           <a:p>
             <a:r>
-              <a:t>other element — the causal version of a dyad — at three and four elements: 89 wirings. We had</a:t>
-            </a:r>
-          </a:p>
-          <a:p>
-            <a:r>
-              <a:t>pre-registered that none would contain a three-party fact. That prediction failed. Branches produced</a:t>
-            </a:r>
-          </a:p>
-          <a:p>
-            <a:r>
-              <a:t>three-party facts.</a:t>
+              <a:t>other element, at three and four elements: 89 wirings. In these models every element, the parties</a:t>
+            </a:r>
+          </a:p>
+          <a:p>
+            <a:r>
+              <a:t>included, answers to one other. We had pre-registered that none would contain a three-party fact. That</a:t>
+            </a:r>
+          </a:p>
+          <a:p>
+            <a:r>
+              <a:t>prediction failed. Branches made three-party facts.</a:t>
             </a:r>
           </a:p>
           <a:p/>
           <a:p>
             <a:r>
-              <a:t>Then we looked at where they sat. Every one was on the effect side: one element fanning out to several.</a:t>
-            </a:r>
-          </a:p>
-          <a:p>
-            <a:r>
-              <a:t>Split the two directions and the cause side never goes above 2. No element is ever jointly determined by</a:t>
-            </a:r>
-          </a:p>
-          <a:p>
-            <a:r>
-              <a:t>two others. I want to be plain about this: that split came after the result, and it is close to true by construction, because a copying element has one cause. What it does is reproduce Peirce's arithmetic in causal</a:t>
-            </a:r>
-          </a:p>
-          <a:p>
-            <a:r>
-              <a:t>terms, with his branch in its place. It is a calibration, not a discovery.</a:t>
+              <a:t>Then we looked at where they sat. Every one was a fan-out: one element read by several. And the systems</a:t>
+            </a:r>
+          </a:p>
+          <a:p>
+            <a:r>
+              <a:t>that had them all split into parts, at Φ equal to zero. On the cause side, a fact never spans more than</a:t>
+            </a:r>
+          </a:p>
+          <a:p>
+            <a:r>
+              <a:t>the element and its one source. No element is ever jointly determined by two others. That split came</a:t>
+            </a:r>
+          </a:p>
+          <a:p>
+            <a:r>
+              <a:t>after the result, and it is close to true by construction, because a copying element has one cause. What</a:t>
+            </a:r>
+          </a:p>
+          <a:p>
+            <a:r>
+              <a:t>it does is reproduce Peirce's arithmetic in causal terms, with his branch in its place.</a:t>
             </a:r>
           </a:p>
         </p:txBody>
@@ -1001,33 +1068,48 @@
           <a:lstStyle/>
           <a:p>
             <a:r>
-              <a:t>The next slide is where the instrument earns its keep, because it separates things the logical debate ran</a:t>
-            </a:r>
-          </a:p>
-          <a:p>
-            <a:r>
-              <a:t>together. A mutual pair, a ring of copies and the imitation of giving are all wholes, at Φ equal to 2.0, and none contains a triad. The control, genuine giving and Peirce's sign with a working interpreter</a:t>
-            </a:r>
-          </a:p>
-          <a:p>
-            <a:r>
-              <a:t>contain joint determination inside a whole. And Simmel's majority has members jointly determined by the</a:t>
-            </a:r>
-          </a:p>
-          <a:p>
-            <a:r>
-              <a:t>other two while the system as a whole factors, at Φ equal to zero. We wrote that prediction down and published it before we ran it.</a:t>
+              <a:t>This is where the instrument earns its keep, because it separates things the logical debate ran together.</a:t>
+            </a:r>
+          </a:p>
+          <a:p>
+            <a:r>
+              <a:t>A mutual pair, a ring of copies and our model of the imitation of giving are all wholes, at Φ equal to</a:t>
+            </a:r>
+          </a:p>
+          <a:p>
+            <a:r>
+              <a:t>2.0. The imitation model closes the loop, because what the receiver holds feeds back to the giver. That</a:t>
+            </a:r>
+          </a:p>
+          <a:p>
+            <a:r>
+              <a:t>return makes it one whole, but no party in it is fixed by two others.</a:t>
             </a:r>
           </a:p>
           <a:p/>
           <a:p>
             <a:r>
-              <a:t>So wholeness and joint determination come apart in both directions. That is why our lab no longer calls</a:t>
-            </a:r>
-          </a:p>
-          <a:p>
-            <a:r>
-              <a:t>every irreducible system triadic. We used to. We now require joint determination as well.</a:t>
+              <a:t>The control, genuine giving, and a model of a sign whose interpretation acts back on its object all have</a:t>
+            </a:r>
+          </a:p>
+          <a:p>
+            <a:r>
+              <a:t>joint determination inside a whole. And in a fresh sample we pre-registered, eleven of thirty forms have</a:t>
+            </a:r>
+          </a:p>
+          <a:p>
+            <a:r>
+              <a:t>a party jointly determined by two others while the system splits into parts. So wholeness and joint</a:t>
+            </a:r>
+          </a:p>
+          <a:p>
+            <a:r>
+              <a:t>determination come apart in both directions. That is why our lab no longer calls every irreducible system</a:t>
+            </a:r>
+          </a:p>
+          <a:p>
+            <a:r>
+              <a:t>triadic. We used to. We now require joint determination as well.</a:t>
             </a:r>
           </a:p>
         </p:txBody>
@@ -1107,55 +1189,65 @@
           </a:p>
           <a:p>
             <a:r>
-              <a:t>loops that chain into a ring, and a ring is a whole with no triad in it.</a:t>
+              <a:t>loops the chain into a ring, and a ring is a whole with no triad in it.</a:t>
             </a:r>
           </a:p>
           <a:p/>
           <a:p>
             <a:r>
-              <a:t>Someone here is about to say: Peirce made every sign triadic, so reading is triadic. Yes. But the sign triad sits inside one reader. It binds the text, what the text is about and one reader's</a:t>
-            </a:r>
-          </a:p>
-          <a:p>
-            <a:r>
-              <a:t>interpretation. It determines nothing on the other person's side. Every sign is triadic. The</a:t>
-            </a:r>
-          </a:p>
-          <a:p>
-            <a:r>
-              <a:t>coordination is a chain.</a:t>
+              <a:t>Someone here is about to say: Peirce made every sign triadic, so reading is triadic. Yes. But the sign</a:t>
+            </a:r>
+          </a:p>
+          <a:p>
+            <a:r>
+              <a:t>triad closes in one reader. It binds the text, what the text is about and one reader's interpretation,</a:t>
+            </a:r>
+          </a:p>
+          <a:p>
+            <a:r>
+              <a:t>and it determines nothing on the other person's side. Every sign is triadic. The coordination is a chain.</a:t>
             </a:r>
           </a:p>
           <a:p/>
           <a:p>
             <a:r>
-              <a:t>Algorithmacy's form is the control. The platform's next state is fixed by both parties at once, and both</a:t>
-            </a:r>
-          </a:p>
-          <a:p>
-            <a:r>
-              <a:t>read it. In that form, when one party acts, what the third does next turns on the other party she cannot</a:t>
-            </a:r>
-          </a:p>
-          <a:p>
-            <a:r>
-              <a:t>see. That is the demand a literate reader never faces.</a:t>
+              <a:t>Algorithmacy's form is the control: a third set by both parties at once, which both then read. A</a:t>
+            </a:r>
+          </a:p>
+          <a:p>
+            <a:r>
+              <a:t>matching platform plausibly has this form. Whether a given platform does depends on its rule, and no one</a:t>
+            </a:r>
+          </a:p>
+          <a:p>
+            <a:r>
+              <a:t>has modelled that yet. In this form, one party's own act settles what the third does only some of the</a:t>
+            </a:r>
+          </a:p>
+          <a:p>
+            <a:r>
+              <a:t>time. Otherwise it turns on the other party's act, so she has to infer the side she cannot see.</a:t>
             </a:r>
           </a:p>
           <a:p/>
           <a:p>
             <a:r>
-              <a:t>I should concede something before you do. Simmel's arbitrator has exactly this form, and there is no</a:t>
-            </a:r>
-          </a:p>
-          <a:p>
-            <a:r>
-              <a:t>algorithm in it. The target is older than AI. What is new is that this form now runs through ordinary</a:t>
-            </a:r>
-          </a:p>
-          <a:p>
-            <a:r>
-              <a:t>work and ordinary life at scale.</a:t>
+              <a:t>I should concede something before you do. Simmel's arbitrator meets this criterion, and there is no</a:t>
+            </a:r>
+          </a:p>
+          <a:p>
+            <a:r>
+              <a:t>algorithm in it. So does a tally that both sides write and both read. The criterion is about form, not</a:t>
+            </a:r>
+          </a:p>
+          <a:p>
+            <a:r>
+              <a:t>about machines. My historical premise, not a lab result, is that this form now runs through ordinary work</a:t>
+            </a:r>
+          </a:p>
+          <a:p>
+            <a:r>
+              <a:t>and ordinary life at scale, mostly through algorithms. That is why I use the name.</a:t>
             </a:r>
           </a:p>
         </p:txBody>
@@ -1225,59 +1317,69 @@
           <a:lstStyle/>
           <a:p>
             <a:r>
-              <a:t>So here is the argument, in the sense of "reduce" I promised to fix. Among fixed parties, one-input</a:t>
-            </a:r>
-          </a:p>
-          <a:p>
-            <a:r>
-              <a:t>mediation never composes joint determination. Joint determination inside a whole exists. So algorithmacy</a:t>
-            </a:r>
-          </a:p>
-          <a:p>
-            <a:r>
-              <a:t>has a target that literacy cannot build out of its own forms.</a:t>
+              <a:t>So here is the argument, in the sense of "reduce" I fixed. Among fixed parties, one-input determination</a:t>
+            </a:r>
+          </a:p>
+          <a:p>
+            <a:r>
+              <a:t>never composes joint determination. Joint determination inside a whole exists. So coordination through a</a:t>
+            </a:r>
+          </a:p>
+          <a:p>
+            <a:r>
+              <a:t>jointly determined third has a target of its own.</a:t>
             </a:r>
           </a:p>
           <a:p/>
           <a:p>
             <a:r>
-              <a:t>That is what I mean by an ontological argument for the necessity of algorithmacy. It is ontological</a:t>
-            </a:r>
-          </a:p>
-          <a:p>
-            <a:r>
-              <a:t>about the target: the kind of coordination exists, and it cannot be composed from literacy's kind. The</a:t>
-            </a:r>
-          </a:p>
-          <a:p>
-            <a:r>
-              <a:t>necessity is conditional: wherever coordination takes this form, the competence it demands is not</a:t>
-            </a:r>
-          </a:p>
-          <a:p>
-            <a:r>
-              <a:t>literacy twice.</a:t>
+              <a:t>One premise carries us from form to competence: to coordinate through such a third, you have to</a:t>
+            </a:r>
+          </a:p>
+          <a:p>
+            <a:r>
+              <a:t>anticipate what it will do, and here that means inferring the party you cannot see. Grant that, and the</a:t>
+            </a:r>
+          </a:p>
+          <a:p>
+            <a:r>
+              <a:t>competence is not literacy twice. That is what I mean by an ontological argument for the necessity of</a:t>
+            </a:r>
+          </a:p>
+          <a:p>
+            <a:r>
+              <a:t>algorithmacy. It is ontological about the target: the kind exists, and literacy's forms cannot compose</a:t>
+            </a:r>
+          </a:p>
+          <a:p>
+            <a:r>
+              <a:t>it. The necessity is conditional: wherever coordination takes this form, the competence it demands is</a:t>
+            </a:r>
+          </a:p>
+          <a:p>
+            <a:r>
+              <a:t>algorithmacy.</a:t>
             </a:r>
           </a:p>
           <a:p/>
           <a:p>
             <a:r>
-              <a:t>Two limits. These are Boolean models, not people; no worker has been measured. And the strongest</a:t>
-            </a:r>
-          </a:p>
-          <a:p>
-            <a:r>
-              <a:t>objection is one Quine would enjoy: you have moved the argument from operations to units, because</a:t>
-            </a:r>
-          </a:p>
-          <a:p>
-            <a:r>
-              <a:t>whether M counts as one party is a choice. IIT has a test for that choice, and running it on this form</a:t>
-            </a:r>
-          </a:p>
-          <a:p>
-            <a:r>
-              <a:t>is our next step. Thank you.</a:t>
+              <a:t>Two limits. These are Boolean models, not people: no worker has been measured and no platform's rule</a:t>
+            </a:r>
+          </a:p>
+          <a:p>
+            <a:r>
+              <a:t>modelled. And the strongest objection is one Quine would enjoy: whether A and B count as separate units</a:t>
+            </a:r>
+          </a:p>
+          <a:p>
+            <a:r>
+              <a:t>is a choice. IIT has its own test for that choice, and running it on this form is our next step. Thank</a:t>
+            </a:r>
+          </a:p>
+          <a:p>
+            <a:r>
+              <a:t>you.</a:t>
             </a:r>
           </a:p>
         </p:txBody>
@@ -1347,17 +1449,22 @@
           <a:lstStyle/>
           <a:p>
             <a:r>
-              <a:t>Here is the worry. Literacy is a competence for working with a medium — a text, a form, a ledger — that</a:t>
-            </a:r>
-          </a:p>
-          <a:p>
-            <a:r>
-              <a:t>answers to one party at a time. Algorithmacy, as I use the word, is a competence for coordinating through</a:t>
-            </a:r>
-          </a:p>
-          <a:p>
-            <a:r>
-              <a:t>a third that both parties determine. The platform that matches a driver and a rider is the obvious case.</a:t>
+              <a:t>Here is the worry. Literacy is a competence for working with a medium that answers to one party at a</a:t>
+            </a:r>
+          </a:p>
+          <a:p>
+            <a:r>
+              <a:t>time: a letter, a notice, a manual. One person fixes it, another reads it. Algorithmacy, as I use the</a:t>
+            </a:r>
+          </a:p>
+          <a:p>
+            <a:r>
+              <a:t>word, is a competence for coordinating through a third that both parties determine, and that acts back</a:t>
+            </a:r>
+          </a:p>
+          <a:p>
+            <a:r>
+              <a:t>on both. A platform that matches a driver and a rider is the picture most of us have in mind.</a:t>
             </a:r>
           </a:p>
           <a:p/>
@@ -1379,12 +1486,12 @@
           </a:p>
           <a:p>
             <a:r>
-              <a:t>hundred and fifty years, and I want to walk through the argument before I say what our lab added to it.</a:t>
-            </a:r>
-          </a:p>
-          <a:p>
-            <a:r>
-              <a:t>One warning in advance: "reduce" is going to need a precise meaning, and by the end I'll have fixed one.</a:t>
+              <a:t>hundred and fifty years, and I want to walk through the argument before I say what our lab added. One</a:t>
+            </a:r>
+          </a:p>
+          <a:p>
+            <a:r>
+              <a:t>warning: "reduce" is going to need a precise meaning, and halfway through I'll fix one.</a:t>
             </a:r>
           </a:p>
         </p:txBody>
@@ -1454,38 +1561,38 @@
           <a:lstStyle/>
           <a:p>
             <a:r>
-              <a:t>The argument starts with Charles Sanders Peirce, and it starts earlier than people usually say. Peirce</a:t>
-            </a:r>
-          </a:p>
-          <a:p>
-            <a:r>
-              <a:t>put both halves of his reduction thesis into a memoir he read in 1870. A relative term cannot be reduced</a:t>
-            </a:r>
-          </a:p>
-          <a:p>
-            <a:r>
-              <a:t>to absolute terms, he wrote, "nor can a conjugative term be reduced to any combination of simple</a:t>
-            </a:r>
-          </a:p>
-          <a:p>
-            <a:r>
-              <a:t>relatives". A conjugative term is a relation among three or more. And every relation among more than</a:t>
-            </a:r>
-          </a:p>
-          <a:p>
-            <a:r>
-              <a:t>two, he said, can be built from relations among three.</a:t>
+              <a:t>The argument starts with Charles Sanders Peirce, and earlier than people usually say. Peirce put both</a:t>
+            </a:r>
+          </a:p>
+          <a:p>
+            <a:r>
+              <a:t>halves of his reduction thesis into a memoir he read in 1870. A relative term cannot be reduced to</a:t>
+            </a:r>
+          </a:p>
+          <a:p>
+            <a:r>
+              <a:t>absolute terms, he wrote, "nor can a conjugative term be reduced to any combination of simple</a:t>
+            </a:r>
+          </a:p>
+          <a:p>
+            <a:r>
+              <a:t>relatives". A conjugative term is a relation among three or more. And every relation among four or</a:t>
+            </a:r>
+          </a:p>
+          <a:p>
+            <a:r>
+              <a:t>more, he said, can be built from relations among three.</a:t>
             </a:r>
           </a:p>
           <a:p/>
           <a:p>
             <a:r>
-              <a:t>Notice what he did not do. He did not prove it. In the same memoir he admits, "I have, however, studied</a:t>
-            </a:r>
-          </a:p>
-          <a:p>
-            <a:r>
-              <a:t>this part of my notation but little." The proof came later, and it came as arithmetic.</a:t>
+              <a:t>Notice what he did not do. He gave no argument for it there. The argument came later, and it came as</a:t>
+            </a:r>
+          </a:p>
+          <a:p>
+            <a:r>
+              <a:t>arithmetic.</a:t>
             </a:r>
           </a:p>
         </p:txBody>
@@ -1560,17 +1667,12 @@
           </a:p>
           <a:p>
             <a:r>
-              <a:t>relations you fill one blank of each with the same thing, so two blanks disappear. Join two dyads and</a:t>
-            </a:r>
-          </a:p>
-          <a:p>
-            <a:r>
-              <a:t>you get two plus two minus two: a dyad again. Join two triads and you get three plus three minus two:</a:t>
-            </a:r>
-          </a:p>
-          <a:p>
-            <a:r>
-              <a:t>four.</a:t>
+              <a:t>relations you fill one blank of each with the same thing, so two blanks disappear. Join two dyads and you</a:t>
+            </a:r>
+          </a:p>
+          <a:p>
+            <a:r>
+              <a:t>get two plus two minus two: a dyad again. Join two triads and you get three plus three minus two: four.</a:t>
             </a:r>
           </a:p>
           <a:p/>
@@ -1581,7 +1683,7 @@
           </a:p>
           <a:p>
             <a:r>
-              <a:t>two stays even, forever. Earlier he gave the picture: "no number of straight roads put end on end will</a:t>
+              <a:t>two stays even, forever. Elsewhere he gave the picture: "no number of straight roads put end on end will</a:t>
             </a:r>
           </a:p>
           <a:p>
@@ -1592,7 +1694,7 @@
           <a:p/>
           <a:p>
             <a:r>
-              <a:t>That is the whole logical argument, and it has one premise hiding in it.</a:t>
+              <a:t>That is the logical argument, and it rests on one premise.</a:t>
             </a:r>
           </a:p>
         </p:txBody>
@@ -1662,48 +1764,43 @@
           <a:lstStyle/>
           <a:p>
             <a:r>
-              <a:t>The hidden premise is about the junction. The arithmetic works only if a point where three lines meet</a:t>
-            </a:r>
-          </a:p>
-          <a:p>
-            <a:r>
-              <a:t>counts as a relation in its own right. Peirce said it does: "every node of bonds is equivalent to a</a:t>
-            </a:r>
-          </a:p>
-          <a:p>
-            <a:r>
-              <a:t>relative".</a:t>
+              <a:t>The premise is about the junction. The arithmetic works only if a point where three lines meet counts as</a:t>
+            </a:r>
+          </a:p>
+          <a:p>
+            <a:r>
+              <a:t>a relation in its own right.</a:t>
             </a:r>
           </a:p>
           <a:p/>
           <a:p>
             <a:r>
-              <a:t>In 1886 Alfred Kempe attacked exactly there. Kempe redrew a triad as an extra unit with three plain links</a:t>
-            </a:r>
-          </a:p>
-          <a:p>
-            <a:r>
-              <a:t>coming off it, so no relation among three appears anywhere. Peirce took the objection seriously. He</a:t>
-            </a:r>
-          </a:p>
-          <a:p>
-            <a:r>
-              <a:t>granted in 1892 that Kempe "virtually shows that my algebra is perfectly adequate to expressing that A</a:t>
-            </a:r>
-          </a:p>
-          <a:p>
-            <a:r>
-              <a:t>gives B to C". What he denied was that expressing a triad this way builds it out of pairs. Kempe's extra</a:t>
-            </a:r>
-          </a:p>
-          <a:p>
-            <a:r>
-              <a:t>unit, he said, is itself the triad. So from its very first round the dispute has been about one thing —</a:t>
-            </a:r>
-          </a:p>
-          <a:p>
-            <a:r>
-              <a:t>the status of the junction.</a:t>
+              <a:t>In 1886 Alfred Kempe challenged the negative clause. He redrew a triad as an extra unit with three plain</a:t>
+            </a:r>
+          </a:p>
+          <a:p>
+            <a:r>
+              <a:t>links coming off it, so that no relation among three appears anywhere. Peirce took the objection</a:t>
+            </a:r>
+          </a:p>
+          <a:p>
+            <a:r>
+              <a:t>seriously. In 1892 he answered that Kempe's picture still contains mediation, in "the attachment of lines</a:t>
+            </a:r>
+          </a:p>
+          <a:p>
+            <a:r>
+              <a:t>to spots", and that the extra unit comes from an abstraction the diagram never shows being made. In 1897</a:t>
+            </a:r>
+          </a:p>
+          <a:p>
+            <a:r>
+              <a:t>he stated the premise outright: "every node of bonds is equivalent to a relative". So from the first</a:t>
+            </a:r>
+          </a:p>
+          <a:p>
+            <a:r>
+              <a:t>round the dispute has been about the junction, and about the object that fills it.</a:t>
             </a:r>
           </a:p>
         </p:txBody>
@@ -1773,23 +1870,23 @@
           <a:lstStyle/>
           <a:p>
             <a:r>
-              <a:t>Peirce's favourite example shows what is at stake. Giving is not two handings. If A puts a book down</a:t>
-            </a:r>
-          </a:p>
-          <a:p>
-            <a:r>
-              <a:t>and C later picks it up, you have, in his words, "merely one dyadic relation followed by another".</a:t>
-            </a:r>
-          </a:p>
-          <a:p>
-            <a:r>
-              <a:t>Genuine giving is "A's making C the possessor according to Law". The three parties are held in one fact.</a:t>
+              <a:t>Peirce's favourite example shows what is at stake. If A throws something away and it happens to hit C,</a:t>
+            </a:r>
+          </a:p>
+          <a:p>
+            <a:r>
+              <a:t>you have, in his words, "merely one dyadic relation followed by another". Genuine giving is "A's making C</a:t>
+            </a:r>
+          </a:p>
+          <a:p>
+            <a:r>
+              <a:t>the possessor according to Law". The three parties are held in one fact.</a:t>
             </a:r>
           </a:p>
           <a:p/>
           <a:p>
             <a:r>
-              <a:t>Keep that pair in mind: the real gift and its imitation. We will meet both again as models.</a:t>
+              <a:t>Keep that pair in mind, the real gift and its imitation. We will meet a model of each.</a:t>
             </a:r>
           </a:p>
         </p:txBody>
@@ -1859,38 +1956,33 @@
           <a:lstStyle/>
           <a:p>
             <a:r>
-              <a:t>That was the logic. Now the sociology. In 1902 Georg Simmel made the same step in the life of groups.</a:t>
-            </a:r>
-          </a:p>
-          <a:p>
-            <a:r>
-              <a:t>In a pair, he wrote, when one member refuses, "only the other remains, without any superindividual</a:t>
-            </a:r>
-          </a:p>
-          <a:p>
-            <a:r>
-              <a:t>energy". Add a third and something new appears: "each pair of elements are now joined by a broken line".</a:t>
-            </a:r>
-          </a:p>
-          <a:p>
-            <a:r>
-              <a:t>A and B are now connected directly and also through C.</a:t>
+              <a:t>That was the logic. Now the sociology. In 1902 Georg Simmel made the same step in the life of groups. In</a:t>
+            </a:r>
+          </a:p>
+          <a:p>
+            <a:r>
+              <a:t>a pair, he wrote, when one member refuses, "only the other remains, without any superindividual energy".</a:t>
+            </a:r>
+          </a:p>
+          <a:p>
+            <a:r>
+              <a:t>Add a third and something new appears: "each pair of elements are now joined by a broken line". A and B</a:t>
+            </a:r>
+          </a:p>
+          <a:p>
+            <a:r>
+              <a:t>are still connected directly, and now also through C, and the same holds for every pair.</a:t>
             </a:r>
           </a:p>
           <a:p/>
           <a:p>
             <a:r>
-              <a:t>Simmel is not arguing about definability. He is describing a change in the form of a group — the</a:t>
-            </a:r>
-          </a:p>
-          <a:p>
-            <a:r>
-              <a:t>mediator, the arbitrator, the third who profits from the quarrel of two. His point is that the step from</a:t>
-            </a:r>
-          </a:p>
-          <a:p>
-            <a:r>
-              <a:t>two to three changes what the group can do.</a:t>
+              <a:t>Simmel is not arguing about definability. He is describing a change in the form of a group: the</a:t>
+            </a:r>
+          </a:p>
+          <a:p>
+            <a:r>
+              <a:t>mediator, the arbitrator, the third who profits from the quarrel of two.</a:t>
             </a:r>
           </a:p>
         </p:txBody>
@@ -1960,33 +2052,28 @@
           <a:lstStyle/>
           <a:p>
             <a:r>
-              <a:t>But Simmel also saw that three people are not automatically a triad. A third who stays distant from the</a:t>
-            </a:r>
-          </a:p>
-          <a:p>
-            <a:r>
-              <a:t>other two leaves, in his translator's phrase, "configurations of twos". The German is</a:t>
-            </a:r>
-          </a:p>
-          <a:p>
-            <a:r>
-              <a:t>Zweierkonfigurationen.</a:t>
+              <a:t>But Simmel also saw that three people are not automatically a triad. He set aside a third so distant</a:t>
+            </a:r>
+          </a:p>
+          <a:p>
+            <a:r>
+              <a:t>from the other two that it unites them only as a pair facing it. There he finds, in his translator's</a:t>
+            </a:r>
+          </a:p>
+          <a:p>
+            <a:r>
+              <a:t>phrase, "configurations of twos". The German is Zweierkonfigurationen.</a:t>
             </a:r>
           </a:p>
           <a:p/>
           <a:p>
             <a:r>
-              <a:t>Our lab tested a version of this. Simmel's majority of three — each member does what the majority does —</a:t>
-            </a:r>
-          </a:p>
-          <a:p>
-            <a:r>
-              <a:t>comes out at Φ equal to zero, with no core. Three parties, and nothing binds them. So the count of three</a:t>
-            </a:r>
-          </a:p>
-          <a:p>
-            <a:r>
-              <a:t>is necessary. It is not sufficient. Hold on to that, because it is the clue to what a genuine triad is.</a:t>
+              <a:t>So three is necessary. It is not sufficient. Hold on to that, because the question of what makes three</a:t>
+            </a:r>
+          </a:p>
+          <a:p>
+            <a:r>
+              <a:t>into one is where our lab comes in.</a:t>
             </a:r>
           </a:p>
         </p:txBody>
@@ -2056,43 +2143,38 @@
           <a:lstStyle/>
           <a:p>
             <a:r>
-              <a:t>Now the reply that made most philosophers stop believing Peirce. In 1915 Leopold Löwenheim showed that</a:t>
-            </a:r>
-          </a:p>
-          <a:p>
-            <a:r>
-              <a:t>you can code any relation as a relation between two things, provided you add new things — pairs — to</a:t>
-            </a:r>
-          </a:p>
-          <a:p>
-            <a:r>
-              <a:t>the universe. In 1936 László Kalmár proved a cousin of the result: for deciding questions of logic, one two-place relation letter is enough. In 1954 W. V. Quine published a two-page paper</a:t>
-            </a:r>
-          </a:p>
-          <a:p>
-            <a:r>
-              <a:t>showing that any theory can be rewritten with "only one predicate letter, and it a dyadic one".</a:t>
+              <a:t>First, though, the result that led many to doubt Peirce, although none of its authors aimed it at him.</a:t>
+            </a:r>
+          </a:p>
+          <a:p>
+            <a:r>
+              <a:t>In 1915 Leopold Löwenheim showed that two-place relations suffice to express any relation, provided you</a:t>
+            </a:r>
+          </a:p>
+          <a:p>
+            <a:r>
+              <a:t>add new objects, pairs, to the domain. In 1936 László Kalmár showed that, for deciding satisfiability,</a:t>
+            </a:r>
+          </a:p>
+          <a:p>
+            <a:r>
+              <a:t>a single two-place relation is enough. And in 1954 W. V. Quine published a short paper showing that any</a:t>
+            </a:r>
+          </a:p>
+          <a:p>
+            <a:r>
+              <a:t>first-order theory can be rewritten with "only one predicate letter, and it a dyadic one".</a:t>
             </a:r>
           </a:p>
           <a:p/>
           <a:p>
             <a:r>
-              <a:t>Two facts about that paper matter. Quine assumes a fragment of set theory, so the pairs are there to</a:t>
-            </a:r>
-          </a:p>
-          <a:p>
-            <a:r>
-              <a:t>use. And on the pages we have checked, he does not mention Peirce at all. The reading of Quine as a</a:t>
-            </a:r>
-          </a:p>
-          <a:p>
-            <a:r>
-              <a:t>refutation of Peirce came from others. Robert Burch reports that the thesis was doubted by many after</a:t>
-            </a:r>
-          </a:p>
-          <a:p>
-            <a:r>
-              <a:t>Quine's proof. Quine himself never said so.</a:t>
+              <a:t>Quine assumes a fragment of set theory, so the pairs are there to use. On the pages we have checked he</a:t>
+            </a:r>
+          </a:p>
+          <a:p>
+            <a:r>
+              <a:t>does not mention Peirce, and Koshkin reports that he never connected the result to Peirce. Others did.</a:t>
             </a:r>
           </a:p>
         </p:txBody>
@@ -5260,7 +5342,7 @@
                 </a:solidFill>
                 <a:latin typeface="Arial"/>
               </a:rPr>
-              <a:t>Every reduction mints a third</a:t>
+              <a:t>Every reduction keeps the junction</a:t>
             </a:r>
           </a:p>
         </p:txBody>
@@ -5299,7 +5381,7 @@
                 </a:solidFill>
                 <a:latin typeface="Arial"/>
               </a:rPr>
-              <a:t>Kempe: a unit · Peirce: "this action" · Löwenheim: pairs · Quine: {x, y}</a:t>
+              <a:t>"A gives B to C" → mint g, the giving: giver(g, A) · gift(g, B) · recipient(g, C)</a:t>
             </a:r>
           </a:p>
           <a:p>
@@ -5315,7 +5397,39 @@
                 </a:solidFill>
                 <a:latin typeface="Arial"/>
               </a:rPr>
-              <a:t>Expressible over a larger universe ≠ composed from pairs among the same parties</a:t>
+              <a:t>Kempe: a unit · Peirce: "this action" · Löwenheim and Quine: pairs</a:t>
+            </a:r>
+          </a:p>
+          <a:p>
+            <a:pPr algn="l">
+              <a:spcBef>
+                <a:spcPts val="1400"/>
+              </a:spcBef>
+            </a:pPr>
+            <a:r>
+              <a:rPr sz="2400" b="0" i="0">
+                <a:solidFill>
+                  <a:srgbClr val="000000"/>
+                </a:solidFill>
+                <a:latin typeface="Arial"/>
+              </a:rPr>
+              <a:t>Dyads build a triad only with a three-way junction. Without one, never.</a:t>
+            </a:r>
+          </a:p>
+          <a:p>
+            <a:pPr algn="l">
+              <a:spcBef>
+                <a:spcPts val="1400"/>
+              </a:spcBef>
+            </a:pPr>
+            <a:r>
+              <a:rPr sz="1800" b="0" i="0">
+                <a:solidFill>
+                  <a:srgbClr val="000000"/>
+                </a:solidFill>
+                <a:latin typeface="Arial"/>
+              </a:rPr>
+              <a:t>— Hereth Correia &amp; Pöschel 2006; Koshkin 2025</a:t>
             </a:r>
           </a:p>
         </p:txBody>
@@ -5581,13 +5695,29 @@
               </a:spcBef>
             </a:pPr>
             <a:r>
+              <a:rPr sz="2400" b="0" i="0">
+                <a:solidFill>
+                  <a:srgbClr val="000000"/>
+                </a:solidFill>
+                <a:latin typeface="Arial"/>
+              </a:rPr>
+              <a:t>Φ: what a system loses under its weakest cut (IIT 4.0). Φ = 0: it splits into parts.</a:t>
+            </a:r>
+          </a:p>
+          <a:p>
+            <a:pPr algn="l">
+              <a:spcBef>
+                <a:spcPts val="1400"/>
+              </a:spcBef>
+            </a:pPr>
+            <a:r>
               <a:rPr sz="2200" b="0" i="0">
                 <a:solidFill>
                   <a:srgbClr val="000000"/>
                 </a:solidFill>
                 <a:latin typeface="Courier New"/>
               </a:rPr>
-              <a:t>A → M ← B      M′ = A and B;  A′ = M;  B′ = M</a:t>
+              <a:t>A &lt;-&gt; M &lt;-&gt; B     M' = A and B;  A' = M;  B' = M</a:t>
             </a:r>
           </a:p>
           <a:p>
@@ -5603,7 +5733,7 @@
                 </a:solidFill>
                 <a:latin typeface="Courier New"/>
               </a:rPr>
-              <a:t>Φ = 2.0   core {A, M, B}</a:t>
+              <a:t>Φ = 2.0   all three in the core   "the control"</a:t>
             </a:r>
           </a:p>
         </p:txBody>
@@ -5707,7 +5837,7 @@
                 </a:solidFill>
                 <a:latin typeface="Arial"/>
               </a:rPr>
-              <a:t>89 one-input wirings: pre-registered H1 REFUTED</a:t>
+              <a:t>89 one-input wirings: pre-registered H1 REFUTED — branches make three-party facts</a:t>
             </a:r>
           </a:p>
           <a:p>
@@ -5723,7 +5853,7 @@
                 </a:solidFill>
                 <a:latin typeface="Arial"/>
               </a:rPr>
-              <a:t>Split afterwards: cause side never above 2</a:t>
+              <a:t>Every three-party fact is a fan-out: one element read by several</a:t>
             </a:r>
           </a:p>
           <a:p>
@@ -5739,7 +5869,7 @@
                 </a:solidFill>
                 <a:latin typeface="Arial"/>
               </a:rPr>
-              <a:t>Every excess on the effect side — the branch</a:t>
+              <a:t>On the cause side: the element plus its one source, never more</a:t>
             </a:r>
           </a:p>
         </p:txBody>
@@ -5843,7 +5973,7 @@
                 </a:solidFill>
                 <a:latin typeface="Arial"/>
               </a:rPr>
-              <a:t>Wholes with no triad: mutual dyad, copy ring, imitation of giving — Φ = 2.0</a:t>
+              <a:t>Wholes, no joint determination: mutual pair, ring of copies, imitation of giving — Φ = 2.0</a:t>
             </a:r>
           </a:p>
           <a:p>
@@ -5859,7 +5989,7 @@
                 </a:solidFill>
                 <a:latin typeface="Arial"/>
               </a:rPr>
-              <a:t>Joint determination in a whole: the control, genuine giving, the pragmatic sign</a:t>
+              <a:t>Joint determination in a whole: the control, genuine giving, a sign that acts back on its object</a:t>
             </a:r>
           </a:p>
           <a:p>
@@ -5875,7 +6005,7 @@
                 </a:solidFill>
                 <a:latin typeface="Arial"/>
               </a:rPr>
-              <a:t>Joint determination without a whole: Simmel's majority — Φ = 0</a:t>
+              <a:t>Joint determination, no whole: 11 of 30 fresh forms (pre-registered)</a:t>
             </a:r>
           </a:p>
         </p:txBody>
@@ -5995,7 +6125,7 @@
                 </a:solidFill>
                 <a:latin typeface="Arial"/>
               </a:rPr>
-              <a:t>Algorithmacy: A → M ← B, M read by both — a whole</a:t>
+              <a:t>Algorithmacy: A &lt;-&gt; M &lt;-&gt; B, M set by both at once — a whole</a:t>
             </a:r>
           </a:p>
           <a:p>
@@ -6027,7 +6157,7 @@
                 </a:solidFill>
                 <a:latin typeface="Arial"/>
               </a:rPr>
-              <a:t>The target is older than AI: Simmel's arbitrator has the same form.</a:t>
+              <a:t>Older than AI: Simmel's arbitrator, a shared tally, meet the same criterion.</a:t>
             </a:r>
           </a:p>
         </p:txBody>
@@ -6131,7 +6261,7 @@
                 </a:solidFill>
                 <a:latin typeface="Arial"/>
               </a:rPr>
-              <a:t>Among fixed parties, one-input mediation never composes joint determination.</a:t>
+              <a:t>Among fixed parties, one-input determination never composes joint determination.</a:t>
             </a:r>
           </a:p>
           <a:p>
@@ -6163,7 +6293,7 @@
                 </a:solidFill>
                 <a:latin typeface="Arial"/>
               </a:rPr>
-              <a:t>So algorithmacy has a target of its own.</a:t>
+              <a:t>So coordination through a jointly determined third has a target of its own.</a:t>
             </a:r>
           </a:p>
           <a:p>
@@ -6179,7 +6309,7 @@
                 </a:solidFill>
                 <a:latin typeface="Arial"/>
               </a:rPr>
-              <a:t>Boolean models, not people.</a:t>
+              <a:t>Boolean models, not people. No platform's rule modelled.</a:t>
             </a:r>
           </a:p>
         </p:txBody>
@@ -6283,7 +6413,7 @@
                 </a:solidFill>
                 <a:latin typeface="Arial"/>
               </a:rPr>
-              <a:t>Literacy: a medium that answers to one party at a time.</a:t>
+              <a:t>Literacy: a medium that answers to one party at a time — a letter, a notice, a manual.</a:t>
             </a:r>
           </a:p>
           <a:p>
@@ -6299,7 +6429,7 @@
                 </a:solidFill>
                 <a:latin typeface="Arial"/>
               </a:rPr>
-              <a:t>Algorithmacy: a third that both parties determine.</a:t>
+              <a:t>Algorithmacy: a third that both parties determine, and that acts back on both.</a:t>
             </a:r>
           </a:p>
           <a:p>
@@ -6315,7 +6445,7 @@
                 </a:solidFill>
                 <a:latin typeface="Arial"/>
               </a:rPr>
-              <a:t>Do some triads resist reduction — in the sense that matters for coordination?</a:t>
+              <a:t>Do some triads resist reduction, in the sense that matters for coordination?</a:t>
             </a:r>
           </a:p>
         </p:txBody>
@@ -6445,13 +6575,29 @@
               </a:spcBef>
             </a:pPr>
             <a:r>
-              <a:rPr sz="2400" b="0" i="1">
+              <a:rPr sz="2400" b="0" i="0">
                 <a:solidFill>
                   <a:srgbClr val="000000"/>
                 </a:solidFill>
                 <a:latin typeface="Arial"/>
               </a:rPr>
-              <a:t>I have, however, studied this part of my notation but little.</a:t>
+              <a:t>Every relation among four or more: built from relations among three.</a:t>
+            </a:r>
+          </a:p>
+          <a:p>
+            <a:pPr algn="l">
+              <a:spcBef>
+                <a:spcPts val="1400"/>
+              </a:spcBef>
+            </a:pPr>
+            <a:r>
+              <a:rPr sz="2400" b="0" i="0">
+                <a:solidFill>
+                  <a:srgbClr val="000000"/>
+                </a:solidFill>
+                <a:latin typeface="Arial"/>
+              </a:rPr>
+              <a:t>Asserted, not yet argued.</a:t>
             </a:r>
           </a:p>
         </p:txBody>
@@ -6733,13 +6879,13 @@
               </a:spcBef>
             </a:pPr>
             <a:r>
-              <a:rPr sz="2400" b="0" i="1">
+              <a:rPr sz="2400" b="0" i="0">
                 <a:solidFill>
                   <a:srgbClr val="000000"/>
                 </a:solidFill>
                 <a:latin typeface="Arial"/>
               </a:rPr>
-              <a:t>every node of bonds is equivalent to a relative</a:t>
+              <a:t>Kempe, 1886: a triad = a unit plus three links. No relation among three.</a:t>
             </a:r>
           </a:p>
           <a:p>
@@ -6749,13 +6895,13 @@
               </a:spcBef>
             </a:pPr>
             <a:r>
-              <a:rPr sz="1800" b="0" i="0">
+              <a:rPr sz="2400" b="0" i="0">
                 <a:solidFill>
                   <a:srgbClr val="000000"/>
                 </a:solidFill>
                 <a:latin typeface="Arial"/>
               </a:rPr>
-              <a:t>— Peirce, 1897</a:t>
+              <a:t>Peirce, 1892: mediation is still there, in "the attachment of lines to spots"</a:t>
             </a:r>
           </a:p>
           <a:p>
@@ -6771,23 +6917,7 @@
                 </a:solidFill>
                 <a:latin typeface="Arial"/>
               </a:rPr>
-              <a:t>Kempe, 1886: a triad = a unit plus three links.</a:t>
-            </a:r>
-          </a:p>
-          <a:p>
-            <a:pPr algn="l">
-              <a:spcBef>
-                <a:spcPts val="1400"/>
-              </a:spcBef>
-            </a:pPr>
-            <a:r>
-              <a:rPr sz="2400" b="0" i="0">
-                <a:solidFill>
-                  <a:srgbClr val="000000"/>
-                </a:solidFill>
-                <a:latin typeface="Arial"/>
-              </a:rPr>
-              <a:t>Peirce, 1892: Kempe "virtually shows that my algebra is perfectly adequate to expressing that A gives B to C"</a:t>
+              <a:t>Peirce, 1897: "every node of bonds is equivalent to a relative"</a:t>
             </a:r>
           </a:p>
         </p:txBody>
@@ -6852,7 +6982,7 @@
                 </a:solidFill>
                 <a:latin typeface="Arial"/>
               </a:rPr>
-              <a:t>Giving is one fact, not two handings</a:t>
+              <a:t>Giving is one fact, not two events</a:t>
             </a:r>
           </a:p>
         </p:txBody>
@@ -6907,7 +7037,7 @@
                 </a:solidFill>
                 <a:latin typeface="Arial"/>
               </a:rPr>
-              <a:t>Imitation: "merely one dyadic relation followed by another" (CP 1.345)</a:t>
+              <a:t>Imitation: A throws B away and it happens to hit C — "merely one dyadic relation followed by another" (CP 1.345)</a:t>
             </a:r>
           </a:p>
         </p:txBody>
@@ -7043,7 +7173,23 @@
                 </a:solidFill>
                 <a:latin typeface="Courier New"/>
               </a:rPr>
-              <a:t>A — C — B</a:t>
+              <a:t>A ——— B   directly</a:t>
+            </a:r>
+          </a:p>
+          <a:p>
+            <a:pPr algn="l">
+              <a:spcBef>
+                <a:spcPts val="0"/>
+              </a:spcBef>
+            </a:pPr>
+            <a:r>
+              <a:rPr sz="2200" b="0" i="0">
+                <a:solidFill>
+                  <a:srgbClr val="000000"/>
+                </a:solidFill>
+                <a:latin typeface="Courier New"/>
+              </a:rPr>
+              <a:t>A — C — B also, for every pair</a:t>
             </a:r>
           </a:p>
           <a:p>
@@ -7163,7 +7309,7 @@
                 </a:solidFill>
                 <a:latin typeface="Arial"/>
               </a:rPr>
-              <a:t>A distant third leaves "configurations of twos" (Simmel, 1902; 1908)</a:t>
+              <a:t>A third too distant from the other two leaves "configurations of twos"</a:t>
             </a:r>
           </a:p>
           <a:p>
@@ -7173,13 +7319,29 @@
               </a:spcBef>
             </a:pPr>
             <a:r>
-              <a:rPr sz="2400" b="0" i="0">
+              <a:rPr sz="1800" b="0" i="0">
                 <a:solidFill>
                   <a:srgbClr val="000000"/>
                 </a:solidFill>
                 <a:latin typeface="Arial"/>
               </a:rPr>
-              <a:t>Lab, Simmel's majority of three: Φ = 0, no core.</a:t>
+              <a:t>— Simmel, 1902 (Zweierkonfigurationen, 1908)</a:t>
+            </a:r>
+          </a:p>
+          <a:p>
+            <a:pPr algn="l">
+              <a:spcBef>
+                <a:spcPts val="1400"/>
+              </a:spcBef>
+            </a:pPr>
+            <a:r>
+              <a:rPr sz="2400" b="0" i="0">
+                <a:solidFill>
+                  <a:srgbClr val="000000"/>
+                </a:solidFill>
+                <a:latin typeface="Arial"/>
+              </a:rPr>
+              <a:t>Three is necessary. It is not sufficient.</a:t>
             </a:r>
           </a:p>
         </p:txBody>
@@ -7244,7 +7406,7 @@
                 </a:solidFill>
                 <a:latin typeface="Arial"/>
               </a:rPr>
-              <a:t>One dyadic predicate for everything</a:t>
+              <a:t>Dyadic predicates suffice — with new objects</a:t>
             </a:r>
           </a:p>
         </p:txBody>
@@ -7283,7 +7445,7 @@
                 </a:solidFill>
                 <a:latin typeface="Arial"/>
               </a:rPr>
-              <a:t>Löwenheim 1915 · Kalmár 1936 · Quine 1954</a:t>
+              <a:t>Löwenheim 1915: binary relatives suffice, over a domain of pairs</a:t>
             </a:r>
           </a:p>
           <a:p>
@@ -7299,7 +7461,7 @@
                 </a:solidFill>
                 <a:latin typeface="Arial"/>
               </a:rPr>
-              <a:t>A theory with "only one predicate letter, and it a dyadic one"</a:t>
+              <a:t>Kalmár 1936: one binary relation, for deciding satisfiability</a:t>
             </a:r>
           </a:p>
           <a:p>
@@ -7315,7 +7477,23 @@
                 </a:solidFill>
                 <a:latin typeface="Arial"/>
               </a:rPr>
-              <a:t>Quine does not name Peirce on the pages read.</a:t>
+              <a:t>Quine 1954: any first-order theory, with "only one predicate letter, and it a dyadic one"</a:t>
+            </a:r>
+          </a:p>
+          <a:p>
+            <a:pPr algn="l">
+              <a:spcBef>
+                <a:spcPts val="1400"/>
+              </a:spcBef>
+            </a:pPr>
+            <a:r>
+              <a:rPr sz="2400" b="0" i="0">
+                <a:solidFill>
+                  <a:srgbClr val="000000"/>
+                </a:solidFill>
+                <a:latin typeface="Arial"/>
+              </a:rPr>
+              <a:t>None of them aimed it at Peirce.</a:t>
             </a:r>
           </a:p>
         </p:txBody>

--- a/submissions/triadic_reduction/talk/deck.pptx
+++ b/submissions/triadic_reduction/talk/deck.pptx
@@ -21,6 +21,8 @@
     <p:sldId id="269" r:id="rId21"/>
     <p:sldId id="270" r:id="rId22"/>
     <p:sldId id="271" r:id="rId23"/>
+    <p:sldId id="272" r:id="rId24"/>
+    <p:sldId id="273" r:id="rId25"/>
   </p:sldIdLst>
   <p:sldSz cx="12191695" cy="6858000" type="screen4x3"/>
   <p:notesSz cx="6858000" cy="9144000"/>
@@ -517,12 +519,12 @@
           <a:lstStyle/>
           <a:p>
             <a:r>
-              <a:t>Thank you. My question today is an old one from logic, and I think the answer decides whether the word</a:t>
-            </a:r>
-          </a:p>
-          <a:p>
-            <a:r>
-              <a:t>on this conference's banner names anything at all.</a:t>
+              <a:t>Thank you. I want to ask an old question from logic, because I think its answer decides whether</a:t>
+            </a:r>
+          </a:p>
+          <a:p>
+            <a:r>
+              <a:t>algorithmacy names anything at all.</a:t>
             </a:r>
           </a:p>
         </p:txBody>
@@ -592,59 +594,33 @@
           <a:lstStyle/>
           <a:p>
             <a:r>
-              <a:t>Here is what these reductions do. Take "A gives B to C". Mint a new object, g, the giving. Now write three</a:t>
-            </a:r>
-          </a:p>
-          <a:p>
-            <a:r>
-              <a:t>pairs: g's giver is A, g's gift is B, g's recipient is C. Every relation is two-place. But g is a new</a:t>
-            </a:r>
-          </a:p>
-          <a:p>
-            <a:r>
-              <a:t>thing, and it holds the three together. Kempe's unit is that object. So is Peirce's "this action", and so</a:t>
-            </a:r>
-          </a:p>
-          <a:p>
-            <a:r>
-              <a:t>are Löwenheim's and Quine's pairs.</a:t>
+              <a:t>In 1954 W. V. Quine proved a striking result. Take any theory written in ordinary first-order logic, with</a:t>
+            </a:r>
+          </a:p>
+          <a:p>
+            <a:r>
+              <a:t>as many relations of as many places as you like. It can be rewritten as a theory in which "there is only</a:t>
+            </a:r>
+          </a:p>
+          <a:p>
+            <a:r>
+              <a:t>one predicate letter, and it a dyadic one". One two-place relation is enough for everything.</a:t>
             </a:r>
           </a:p>
           <a:p/>
           <a:p>
             <a:r>
-              <a:t>The logicians made this exact. Hereth Correia and Pöschel proved, and Koshkin has since sharpened, that</a:t>
-            </a:r>
-          </a:p>
-          <a:p>
-            <a:r>
-              <a:t>dyads build a triad only with a three-way junction: a minted object, or a variable shared three ways.</a:t>
-            </a:r>
-          </a:p>
-          <a:p>
-            <a:r>
-              <a:t>Without one, never. Koshkin puts it in logical terms: the pairing construction hides a three-way</a:t>
-            </a:r>
-          </a:p>
-          <a:p>
-            <a:r>
-              <a:t>junction.</a:t>
-            </a:r>
-          </a:p>
-          <a:p/>
-          <a:p>
-            <a:r>
-              <a:t>Why should coordination care about the difference? Because a coordination between two people presupposes</a:t>
-            </a:r>
-          </a:p>
-          <a:p>
-            <a:r>
-              <a:t>that each can act on their own. Fuse them into one unit, or route them through a new object, and you have</a:t>
-            </a:r>
-          </a:p>
-          <a:p>
-            <a:r>
-              <a:t>changed who is coordinating.</a:t>
+              <a:t>His tools were "a fragment of set theory" and the ordered pair: a way to package two things as one thing.</a:t>
+            </a:r>
+          </a:p>
+          <a:p>
+            <a:r>
+              <a:t>And one more move, which matters: the new theory's universe is enlarged to contain all those pairs.</a:t>
+            </a:r>
+          </a:p>
+          <a:p>
+            <a:r>
+              <a:t>Leopold Löwenheim had done something similar with pairs in 1915.</a:t>
             </a:r>
           </a:p>
         </p:txBody>
@@ -714,48 +690,28 @@
           <a:lstStyle/>
           <a:p>
             <a:r>
-              <a:t>Robert Burch built an algebra, PAL, and proved the thesis in it, but only with a restriction on when</a:t>
-            </a:r>
-          </a:p>
-          <a:p>
-            <a:r>
-              <a:t>products may be formed. Hereth Correia and Pöschel removed the restriction and gave the strongest proofs.</a:t>
-            </a:r>
-          </a:p>
-          <a:p>
-            <a:r>
-              <a:t>Hans Herzberger, in 1981, had shown that the thesis holds for one kind of construction and collapses</a:t>
-            </a:r>
-          </a:p>
-          <a:p>
-            <a:r>
-              <a:t>under another. I am relying on Koshkin's account of that paper.</a:t>
+              <a:t>Here is how it works. Take the relation "A gives B to C". First package B and C into a pair. Then</a:t>
+            </a:r>
+          </a:p>
+          <a:p>
+            <a:r>
+              <a:t>package A with that pair, and tag the result with which relation it belongs to. Now "A, B, C" is one new</a:t>
+            </a:r>
+          </a:p>
+          <a:p>
+            <a:r>
+              <a:t>object in the enlarged universe. And "A gives B to C" becomes a single two-place fact about that object.</a:t>
             </a:r>
           </a:p>
           <a:p/>
           <a:p>
             <a:r>
-              <a:t>Where does that leave us? Burch, in the Stanford Encyclopedia, draws the peaceful conclusion: "both</a:t>
-            </a:r>
-          </a:p>
-          <a:p>
-            <a:r>
-              <a:t>Peirce and Quine were correct: the issue entirely depends on exactly what constructive resources are to</a:t>
-            </a:r>
-          </a:p>
-          <a:p>
-            <a:r>
-              <a:t>be allowed". Koshkin will not accept the truce: "It cannot simply be that Peirce and Quine are both</a:t>
-            </a:r>
-          </a:p>
-          <a:p>
-            <a:r>
-              <a:t>right." His view is that if you allow any construction and count each three-way junction as a triad,</a:t>
-            </a:r>
-          </a:p>
-          <a:p>
-            <a:r>
-              <a:t>the thesis comes out true. The split, again, is over the junction.</a:t>
+              <a:t>Do that for every relation, of any number of places, and every relation in the theory has become</a:t>
+            </a:r>
+          </a:p>
+          <a:p>
+            <a:r>
+              <a:t>two-place. The triad has disappeared into a tuple.</a:t>
             </a:r>
           </a:p>
         </p:txBody>
@@ -825,69 +781,28 @@
           <a:lstStyle/>
           <a:p>
             <a:r>
-              <a:t>Here is our move. In logic a junction has no direction. A tuple doesn't say whether one thing fans out to</a:t>
-            </a:r>
-          </a:p>
-          <a:p>
-            <a:r>
-              <a:t>three, or three things fix one. Causation does say. So we asked the question causally, with integrated</a:t>
-            </a:r>
-          </a:p>
-          <a:p>
-            <a:r>
-              <a:t>information theory, IIT 4.0, as the instrument. IIT asks one question of a system: cut it into</a:t>
-            </a:r>
-          </a:p>
-          <a:p>
-            <a:r>
-              <a:t>independent parts, and what do you lose? Φ measures what is lost under the least damaging cut. If Φ is</a:t>
-            </a:r>
-          </a:p>
-          <a:p>
-            <a:r>
-              <a:t>zero, the system splits into parts. If Φ is above zero, every cut loses something.</a:t>
+              <a:t>To be exact about the history: Quine never named Peirce in this paper, and never drew the conclusion</a:t>
+            </a:r>
+          </a:p>
+          <a:p>
+            <a:r>
+              <a:t>himself. Others did. Robert Burch reports that after Quine's proof, many doubted Peirce's thesis. And you</a:t>
+            </a:r>
+          </a:p>
+          <a:p>
+            <a:r>
+              <a:t>can see why. If any triad can be rewritten as pairs, then Thirdness is not a kind of being. It is a</a:t>
+            </a:r>
+          </a:p>
+          <a:p>
+            <a:r>
+              <a:t>feature of our notation, which set theory can remove.</a:t>
             </a:r>
           </a:p>
           <a:p/>
           <a:p>
             <a:r>
-              <a:t>Now the sense of "reduce" I promised. From here on, to reduce a form is to rebuild it among the same</a:t>
-            </a:r>
-          </a:p>
-          <a:p>
-            <a:r>
-              <a:t>parties, out of links in which each element answers to just one other. In Quine's sense, triads reduce.</a:t>
-            </a:r>
-          </a:p>
-          <a:p>
-            <a:r>
-              <a:t>In this sense, the question is open.</a:t>
-            </a:r>
-          </a:p>
-          <a:p/>
-          <a:p>
-            <a:r>
-              <a:t>And the criterion: a genuine triad is a party jointly determined by two others, inside a whole that does</a:t>
-            </a:r>
-          </a:p>
-          <a:p>
-            <a:r>
-              <a:t>not factor. I chose that criterion after our first probes. We then pre-registered a test of it and ran</a:t>
-            </a:r>
-          </a:p>
-          <a:p>
-            <a:r>
-              <a:t>it on new cases. Here is the smallest example; we call it the control. M turns on only when A and B are</a:t>
-            </a:r>
-          </a:p>
-          <a:p>
-            <a:r>
-              <a:t>both on, like a deal that closes only if both sign, and A and B each follow M. Φ is 2.0, with all three in</a:t>
-            </a:r>
-          </a:p>
-          <a:p>
-            <a:r>
-              <a:t>the core. The two arrows into M are not two pairs: M's rule takes A and B together.</a:t>
+              <a:t>And if that is right, then algorithmacy is not a thing. So who is right?</a:t>
             </a:r>
           </a:p>
         </p:txBody>
@@ -957,48 +872,32 @@
           <a:lstStyle/>
           <a:p>
             <a:r>
-              <a:t>Now the test Peirce's thesis invites. We built every system in which each element simply copies one</a:t>
-            </a:r>
-          </a:p>
-          <a:p>
-            <a:r>
-              <a:t>other element, at three and four elements: 89 wirings. In these models every element, the parties</a:t>
-            </a:r>
-          </a:p>
-          <a:p>
-            <a:r>
-              <a:t>included, answers to one other. We had pre-registered that none would contain a three-party fact. That</a:t>
-            </a:r>
-          </a:p>
-          <a:p>
-            <a:r>
-              <a:t>prediction failed. Branches made three-party facts.</a:t>
-            </a:r>
-          </a:p>
-          <a:p/>
-          <a:p>
-            <a:r>
-              <a:t>Then we looked at where they sat. Every one was a fan-out: one element read by several. And the systems</a:t>
-            </a:r>
-          </a:p>
-          <a:p>
-            <a:r>
-              <a:t>that had them all split into parts, at Φ equal to zero. On the cause side, a fact never spans more than</a:t>
-            </a:r>
-          </a:p>
-          <a:p>
-            <a:r>
-              <a:t>the element and its one source. No element is ever jointly determined by two others. That split came</a:t>
-            </a:r>
-          </a:p>
-          <a:p>
-            <a:r>
-              <a:t>after the result, and it is close to true by construction, because a copying element has one cause. What</a:t>
-            </a:r>
-          </a:p>
-          <a:p>
-            <a:r>
-              <a:t>it does is reproduce Peirce's arithmetic in causal terms, with his branch in its place.</a:t>
+              <a:t>The logicians who came after both of them made the question precise, and the answer turned on the</a:t>
+            </a:r>
+          </a:p>
+          <a:p>
+            <a:r>
+              <a:t>operations you allow. Hans Herzberger showed in 1981 that Peirce's thesis holds as a theorem for</a:t>
+            </a:r>
+          </a:p>
+          <a:p>
+            <a:r>
+              <a:t>constructions that obey Peirce's valency rule, the tail-counting of slide seven, and that can form relative</a:t>
+            </a:r>
+          </a:p>
+          <a:p>
+            <a:r>
+              <a:t>products. He also showed the other side: under standard notions of definability, "the reduction thesis</a:t>
+            </a:r>
+          </a:p>
+          <a:p>
+            <a:r>
+              <a:t>collapses". Same author, same paper, two theorems. Robert Burch then built a whole Peircean algebra in 1991</a:t>
+            </a:r>
+          </a:p>
+          <a:p>
+            <a:r>
+              <a:t>and proved the thesis inside it, under a restriction on how relations may be combined.</a:t>
             </a:r>
           </a:p>
         </p:txBody>
@@ -1068,48 +967,43 @@
           <a:lstStyle/>
           <a:p>
             <a:r>
-              <a:t>This is where the instrument earns its keep, because it separates things the logical debate ran together.</a:t>
-            </a:r>
-          </a:p>
-          <a:p>
-            <a:r>
-              <a:t>A mutual pair, a ring of copies and our model of the imitation of giving are all wholes, at Φ equal to</a:t>
-            </a:r>
-          </a:p>
-          <a:p>
-            <a:r>
-              <a:t>2.0. The imitation model closes the loop, because what the receiver holds feeds back to the giver. That</a:t>
-            </a:r>
-          </a:p>
-          <a:p>
-            <a:r>
-              <a:t>return makes it one whole, but no party in it is fixed by two others.</a:t>
+              <a:t>Later work located the difference exactly. Joachim Hereth Correia and Reinhard Pöschel proved in 2006</a:t>
+            </a:r>
+          </a:p>
+          <a:p>
+            <a:r>
+              <a:t>that in Peirce's own algebra, on any domain of two or more things, one- and two-place relations never build</a:t>
+            </a:r>
+          </a:p>
+          <a:p>
+            <a:r>
+              <a:t>the three-way identity: the relation that says three things are one and the same. Frithjof Dau and Hereth</a:t>
+            </a:r>
+          </a:p>
+          <a:p>
+            <a:r>
+              <a:t>Correia pointed out that ordinary relational algebra can build it, but only because it is "hidden in the</a:t>
+            </a:r>
+          </a:p>
+          <a:p>
+            <a:r>
+              <a:t>operations", in the step that lets one variable stand in three places. And Sergiy Koshkin has shown that</a:t>
+            </a:r>
+          </a:p>
+          <a:p>
+            <a:r>
+              <a:t>when a variable may be shared freely, three-place relations do reduce to two-place ones on any finite</a:t>
+            </a:r>
+          </a:p>
+          <a:p>
+            <a:r>
+              <a:t>domain of three or more values, while on two-valued domains some do not.</a:t>
             </a:r>
           </a:p>
           <a:p/>
           <a:p>
             <a:r>
-              <a:t>The control, genuine giving, and a model of a sign whose interpretation acts back on its object all have</a:t>
-            </a:r>
-          </a:p>
-          <a:p>
-            <a:r>
-              <a:t>joint determination inside a whole. And in a fresh sample we pre-registered, eleven of thirty forms have</a:t>
-            </a:r>
-          </a:p>
-          <a:p>
-            <a:r>
-              <a:t>a party jointly determined by two others while the system splits into parts. So wholeness and joint</a:t>
-            </a:r>
-          </a:p>
-          <a:p>
-            <a:r>
-              <a:t>determination come apart in both directions. That is why our lab no longer calls every irreducible system</a:t>
-            </a:r>
-          </a:p>
-          <a:p>
-            <a:r>
-              <a:t>triadic. We used to. We now require joint determination as well.</a:t>
+              <a:t>Notice where every one of these results lands: on Peirce's third argument, the junction.</a:t>
             </a:r>
           </a:p>
         </p:txBody>
@@ -1179,75 +1073,48 @@
           <a:lstStyle/>
           <a:p>
             <a:r>
-              <a:t>Now back to the question on the banner. Literacy, in coordination terms, is a chain: a writer fixes a</a:t>
-            </a:r>
-          </a:p>
-          <a:p>
-            <a:r>
-              <a:t>text, and later a reader reads it. The text is inert while it is read. Even a long correspondence only</a:t>
-            </a:r>
-          </a:p>
-          <a:p>
-            <a:r>
-              <a:t>loops the chain into a ring, and a ring is a whole with no triad in it.</a:t>
+              <a:t>So what is the verdict? Burch, writing in the Stanford Encyclopedia, puts it this way: "both Peirce and</a:t>
+            </a:r>
+          </a:p>
+          <a:p>
+            <a:r>
+              <a:t>Quine were correct: the issue entirely depends on exactly what constructive resources are to be allowed".</a:t>
+            </a:r>
+          </a:p>
+          <a:p>
+            <a:r>
+              <a:t>Koshkin is less comfortable with a truce: "It cannot simply be that Peirce and Quine are both right." His</a:t>
+            </a:r>
+          </a:p>
+          <a:p>
+            <a:r>
+              <a:t>view is that once you count each three-way junction as a triad, Peirce comes out right.</a:t>
             </a:r>
           </a:p>
           <a:p/>
           <a:p>
             <a:r>
-              <a:t>Someone here is about to say: Peirce made every sign triadic, so reading is triadic. Yes. But the sign</a:t>
-            </a:r>
-          </a:p>
-          <a:p>
-            <a:r>
-              <a:t>triad closes in one reader. It binds the text, what the text is about and one reader's interpretation,</a:t>
-            </a:r>
-          </a:p>
-          <a:p>
-            <a:r>
-              <a:t>and it determines nothing on the other person's side. Every sign is triadic. The coordination is a chain.</a:t>
-            </a:r>
-          </a:p>
-          <a:p/>
-          <a:p>
-            <a:r>
-              <a:t>Algorithmacy's form is the control: a third set by both parties at once, which both then read. A</a:t>
-            </a:r>
-          </a:p>
-          <a:p>
-            <a:r>
-              <a:t>matching platform plausibly has this form. Whether a given platform does depends on its rule, and no one</a:t>
-            </a:r>
-          </a:p>
-          <a:p>
-            <a:r>
-              <a:t>has modelled that yet. In this form, one party's own act settles what the third does only some of the</a:t>
-            </a:r>
-          </a:p>
-          <a:p>
-            <a:r>
-              <a:t>time. Otherwise it turns on the other party's act, so she has to infer the side she cannot see.</a:t>
-            </a:r>
-          </a:p>
-          <a:p/>
-          <a:p>
-            <a:r>
-              <a:t>I should concede something before you do. Simmel's arbitrator meets this criterion, and there is no</a:t>
-            </a:r>
-          </a:p>
-          <a:p>
-            <a:r>
-              <a:t>algorithm in it. So does a tally that both sides write and both read. The criterion is about form, not</a:t>
-            </a:r>
-          </a:p>
-          <a:p>
-            <a:r>
-              <a:t>about machines. My historical premise, not a lab result, is that this form now runs through ordinary work</a:t>
-            </a:r>
-          </a:p>
-          <a:p>
-            <a:r>
-              <a:t>and ordinary life at scale, mostly through algorithms. That is why I use the name.</a:t>
+              <a:t>For our purposes, the upshot is this. Some triads reduce, and some do not, and the logicians have exact</a:t>
+            </a:r>
+          </a:p>
+          <a:p>
+            <a:r>
+              <a:t>tests for which: but their tests apply to relations as sets of tuples, and they depend on the operations</a:t>
+            </a:r>
+          </a:p>
+          <a:p>
+            <a:r>
+              <a:t>you allow. What algorithmacy needs is different. It needs a test for coordination as a running system:</a:t>
+            </a:r>
+          </a:p>
+          <a:p>
+            <a:r>
+              <a:t>for a given form of coordination, is its third genuine, or two pairs in disguise? Koshkin himself pointed</a:t>
+            </a:r>
+          </a:p>
+          <a:p>
+            <a:r>
+              <a:t>toward information integration as the place to look.</a:t>
             </a:r>
           </a:p>
         </p:txBody>
@@ -1317,69 +1184,301 @@
           <a:lstStyle/>
           <a:p>
             <a:r>
-              <a:t>So here is the argument, in the sense of "reduce" I fixed. Among fixed parties, one-input determination</a:t>
-            </a:r>
-          </a:p>
-          <a:p>
-            <a:r>
-              <a:t>never composes joint determination. Joint determination inside a whole exists. So coordination through a</a:t>
-            </a:r>
-          </a:p>
-          <a:p>
-            <a:r>
-              <a:t>jointly determined third has a target of its own.</a:t>
+              <a:t>Our argument is that integrated information theory, IIT, supplies a causal version of that test. IIT asks</a:t>
+            </a:r>
+          </a:p>
+          <a:p>
+            <a:r>
+              <a:t>one question of a system: if you cut it into independent parts, what do you lose? Φ measures what is lost</a:t>
+            </a:r>
+          </a:p>
+          <a:p>
+            <a:r>
+              <a:t>under the least damaging cut. If Φ is zero, the system splits at some cut. If Φ is above zero, every cut</a:t>
+            </a:r>
+          </a:p>
+          <a:p>
+            <a:r>
+              <a:t>loses something. IIT also tells us, element by element, which other elements each one depends on</a:t>
+            </a:r>
+          </a:p>
+          <a:p>
+            <a:r>
+              <a:t>irreducibly.</a:t>
             </a:r>
           </a:p>
           <a:p/>
           <a:p>
             <a:r>
-              <a:t>One premise carries us from form to competence: to coordinate through such a third, you have to</a:t>
-            </a:r>
-          </a:p>
-          <a:p>
-            <a:r>
-              <a:t>anticipate what it will do, and here that means inferring the party you cannot see. Grant that, and the</a:t>
-            </a:r>
-          </a:p>
-          <a:p>
-            <a:r>
-              <a:t>competence is not literacy twice. That is what I mean by an ontological argument for the necessity of</a:t>
-            </a:r>
-          </a:p>
-          <a:p>
-            <a:r>
-              <a:t>algorithmacy. It is ontological about the target: the kind exists, and literacy's forms cannot compose</a:t>
-            </a:r>
-          </a:p>
-          <a:p>
-            <a:r>
-              <a:t>it. The necessity is conditional: wherever coordination takes this form, the competence it demands is</a:t>
-            </a:r>
-          </a:p>
-          <a:p>
-            <a:r>
-              <a:t>algorithmacy.</a:t>
+              <a:t>That gives us a precise meaning for an irreducible triad: a party whose state depends irreducibly on two</a:t>
+            </a:r>
+          </a:p>
+          <a:p>
+            <a:r>
+              <a:t>others at once, with all three inside one whole. Here is the smallest example. M turns on only when A and</a:t>
+            </a:r>
+          </a:p>
+          <a:p>
+            <a:r>
+              <a:t>B are both on, like a deal that closes only when both sign, and A and B each follow M. IIT finds the whole</a:t>
+            </a:r>
+          </a:p>
+          <a:p>
+            <a:r>
+              <a:t>irreducible, Φ equal to 2.0, with all three in the core, the largest part that is itself a whole. And M</a:t>
+            </a:r>
+          </a:p>
+          <a:p>
+            <a:r>
+              <a:t>depends on A and B together; its rule cannot be split into a part that answers to A and a part that</a:t>
+            </a:r>
+          </a:p>
+          <a:p>
+            <a:r>
+              <a:t>answers to B.</a:t>
+            </a:r>
+          </a:p>
+        </p:txBody>
+      </p:sp>
+      <p:sp>
+        <p:nvSpPr>
+          <p:cNvPr id="4" name="Slide Number Placeholder 3"/>
+          <p:cNvSpPr>
+            <a:spLocks noGrp="1"/>
+          </p:cNvSpPr>
+          <p:nvPr>
+            <p:ph type="sldNum" idx="5" sz="quarter"/>
+          </p:nvPr>
+        </p:nvSpPr>
+        <p:spPr/>
+      </p:sp>
+    </p:spTree>
+  </p:cSld>
+  <p:clrMapOvr>
+    <a:masterClrMapping/>
+  </p:clrMapOvr>
+</p:notes>
+</file>
+
+<file path=ppt/notesSlides/notesSlide17.xml><?xml version="1.0" encoding="utf-8"?>
+<p:notes xmlns:a="http://schemas.openxmlformats.org/drawingml/2006/main" xmlns:p="http://schemas.openxmlformats.org/presentationml/2006/main" xmlns:r="http://schemas.openxmlformats.org/officeDocument/2006/relationships">
+  <p:cSld>
+    <p:spTree>
+      <p:nvGrpSpPr>
+        <p:cNvPr id="1" name=""/>
+        <p:cNvGrpSpPr/>
+        <p:nvPr/>
+      </p:nvGrpSpPr>
+      <p:grpSpPr>
+        <a:xfrm>
+          <a:off x="0" y="0"/>
+          <a:ext cx="0" cy="0"/>
+          <a:chOff x="0" y="0"/>
+          <a:chExt cx="0" cy="0"/>
+        </a:xfrm>
+      </p:grpSpPr>
+      <p:sp>
+        <p:nvSpPr>
+          <p:cNvPr id="2" name="Slide Image Placeholder 1"/>
+          <p:cNvSpPr>
+            <a:spLocks noGrp="1"/>
+          </p:cNvSpPr>
+          <p:nvPr>
+            <p:ph type="sldImg" idx="2"/>
+          </p:nvPr>
+        </p:nvSpPr>
+        <p:spPr/>
+      </p:sp>
+      <p:sp>
+        <p:nvSpPr>
+          <p:cNvPr id="3" name="Notes Placeholder 2"/>
+          <p:cNvSpPr>
+            <a:spLocks noGrp="1"/>
+          </p:cNvSpPr>
+          <p:nvPr>
+            <p:ph type="body" idx="3" sz="quarter"/>
+          </p:nvPr>
+        </p:nvSpPr>
+        <p:spPr/>
+        <p:txBody>
+          <a:bodyPr/>
+          <a:lstStyle/>
+          <a:p>
+            <a:r>
+              <a:t>We then used this test to sort cases. First, Peirce's side of the question. We built every system in</a:t>
+            </a:r>
+          </a:p>
+          <a:p>
+            <a:r>
+              <a:t>which each element simply copies one other: 89 wirings at three and four elements, chained, looped or</a:t>
+            </a:r>
+          </a:p>
+          <a:p>
+            <a:r>
+              <a:t>branched. No element in any of them depends on two others at once. Pairs make pairs, as Peirce said. I</a:t>
+            </a:r>
+          </a:p>
+          <a:p>
+            <a:r>
+              <a:t>should say plainly that we split cause from effect after seeing the result, and that a copying element</a:t>
+            </a:r>
+          </a:p>
+          <a:p>
+            <a:r>
+              <a:t>has only one cause, so this is close to true by construction. We also checked the instrument on thirteen</a:t>
+            </a:r>
+          </a:p>
+          <a:p>
+            <a:r>
+              <a:t>kinds of wiring at five elements, with the same result.</a:t>
             </a:r>
           </a:p>
           <a:p/>
           <a:p>
             <a:r>
-              <a:t>Two limits. These are Boolean models, not people: no worker has been measured and no platform's rule</a:t>
-            </a:r>
-          </a:p>
-          <a:p>
-            <a:r>
-              <a:t>modelled. And the strongest objection is one Quine would enjoy: whether A and B count as separate units</a:t>
-            </a:r>
-          </a:p>
-          <a:p>
-            <a:r>
-              <a:t>is a choice. IIT has its own test for that choice, and running it on this form is our next step. Thank</a:t>
-            </a:r>
-          </a:p>
-          <a:p>
-            <a:r>
-              <a:t>you.</a:t>
+              <a:t>Second, the sorting itself. We fixed the criterion in advance and tested it on thirty four-element systems</a:t>
+            </a:r>
+          </a:p>
+          <a:p>
+            <a:r>
+              <a:t>nobody had read under it, each element driven by two others. Wholes can lack a triad: a ring of pairs is</a:t>
+            </a:r>
+          </a:p>
+          <a:p>
+            <a:r>
+              <a:t>one whole, at Φ equal to 2.0, with no one depending on two others. Triads can lack a whole: in eleven of</a:t>
+            </a:r>
+          </a:p>
+          <a:p>
+            <a:r>
+              <a:t>the thirty, a party depends on two others at once while the system splits. And in five of the thirty, as in</a:t>
+            </a:r>
+          </a:p>
+          <a:p>
+            <a:r>
+              <a:t>the control and in genuine giving, the triad sits inside the whole. The rest have neither, or a triad</a:t>
+            </a:r>
+          </a:p>
+          <a:p>
+            <a:r>
+              <a:t>outside the core. So IIT gives a causal version of the line the logicians drew.</a:t>
+            </a:r>
+          </a:p>
+        </p:txBody>
+      </p:sp>
+      <p:sp>
+        <p:nvSpPr>
+          <p:cNvPr id="4" name="Slide Number Placeholder 3"/>
+          <p:cNvSpPr>
+            <a:spLocks noGrp="1"/>
+          </p:cNvSpPr>
+          <p:nvPr>
+            <p:ph type="sldNum" idx="5" sz="quarter"/>
+          </p:nvPr>
+        </p:nvSpPr>
+        <p:spPr/>
+      </p:sp>
+    </p:spTree>
+  </p:cSld>
+  <p:clrMapOvr>
+    <a:masterClrMapping/>
+  </p:clrMapOvr>
+</p:notes>
+</file>
+
+<file path=ppt/notesSlides/notesSlide18.xml><?xml version="1.0" encoding="utf-8"?>
+<p:notes xmlns:a="http://schemas.openxmlformats.org/drawingml/2006/main" xmlns:p="http://schemas.openxmlformats.org/presentationml/2006/main" xmlns:r="http://schemas.openxmlformats.org/officeDocument/2006/relationships">
+  <p:cSld>
+    <p:spTree>
+      <p:nvGrpSpPr>
+        <p:cNvPr id="1" name=""/>
+        <p:cNvGrpSpPr/>
+        <p:nvPr/>
+      </p:nvGrpSpPr>
+      <p:grpSpPr>
+        <a:xfrm>
+          <a:off x="0" y="0"/>
+          <a:ext cx="0" cy="0"/>
+          <a:chOff x="0" y="0"/>
+          <a:chExt cx="0" cy="0"/>
+        </a:xfrm>
+      </p:grpSpPr>
+      <p:sp>
+        <p:nvSpPr>
+          <p:cNvPr id="2" name="Slide Image Placeholder 1"/>
+          <p:cNvSpPr>
+            <a:spLocks noGrp="1"/>
+          </p:cNvSpPr>
+          <p:nvPr>
+            <p:ph type="sldImg" idx="2"/>
+          </p:nvPr>
+        </p:nvSpPr>
+        <p:spPr/>
+      </p:sp>
+      <p:sp>
+        <p:nvSpPr>
+          <p:cNvPr id="3" name="Notes Placeholder 2"/>
+          <p:cNvSpPr>
+            <a:spLocks noGrp="1"/>
+          </p:cNvSpPr>
+          <p:nvPr>
+            <p:ph type="body" idx="3" sz="quarter"/>
+          </p:nvPr>
+        </p:nvSpPr>
+        <p:spPr/>
+        <p:txBody>
+          <a:bodyPr/>
+          <a:lstStyle/>
+          <a:p>
+            <a:r>
+              <a:t>So here is the answer to the ontological question. Triads do not all reduce to dyads. The ones that do</a:t>
+            </a:r>
+          </a:p>
+          <a:p>
+            <a:r>
+              <a:t>not, in these models, are a third fixed by two parties jointly, inside one whole with them. Those are</a:t>
+            </a:r>
+          </a:p>
+          <a:p>
+            <a:r>
+              <a:t>algorithmacy's targets. Literacy is the sensibility for chains, where one person fixes a text and another</a:t>
+            </a:r>
+          </a:p>
+          <a:p>
+            <a:r>
+              <a:t>reads it. Algorithmacy is the sensibility for these.</a:t>
+            </a:r>
+          </a:p>
+          <a:p/>
+          <a:p>
+            <a:r>
+              <a:t>The target is older than AI. An arbitrator has this form, deciding from both sides and binding both; so</a:t>
+            </a:r>
+          </a:p>
+          <a:p>
+            <a:r>
+              <a:t>does a tally that both sides write and both read. What is new is that this form now runs through ordinary</a:t>
+            </a:r>
+          </a:p>
+          <a:p>
+            <a:r>
+              <a:t>work and life at scale, mostly through algorithms, and that is why the sensibility needs a name.</a:t>
+            </a:r>
+          </a:p>
+          <a:p/>
+          <a:p>
+            <a:r>
+              <a:t>Two limits. These are models, not people: we have measured no worker and modelled no platform's rule.</a:t>
+            </a:r>
+          </a:p>
+          <a:p>
+            <a:r>
+              <a:t>And whether two parties count as separate units is itself a choice; IIT has its own test for that, and</a:t>
+            </a:r>
+          </a:p>
+          <a:p>
+            <a:r>
+              <a:t>running it is our next step. Thank you.</a:t>
             </a:r>
           </a:p>
         </p:txBody>
@@ -1449,49 +1548,33 @@
           <a:lstStyle/>
           <a:p>
             <a:r>
-              <a:t>Here is the worry. Literacy is a competence for working with a medium that answers to one party at a</a:t>
-            </a:r>
-          </a:p>
-          <a:p>
-            <a:r>
-              <a:t>time: a letter, a notice, a manual. One person fixes it, another reads it. Algorithmacy, as I use the</a:t>
-            </a:r>
-          </a:p>
-          <a:p>
-            <a:r>
-              <a:t>word, is a competence for coordinating through a third that both parties determine, and that acts back</a:t>
-            </a:r>
-          </a:p>
-          <a:p>
-            <a:r>
-              <a:t>on both. A platform that matches a driver and a rider is the picture most of us have in mind.</a:t>
+              <a:t>Start with the word. We already have names for the sensibilities a medium demands. Oracy is the ability</a:t>
+            </a:r>
+          </a:p>
+          <a:p>
+            <a:r>
+              <a:t>to understand commands, spoken and heard. Literacy is the sensibility to navigate a text. Numeracy is the</a:t>
+            </a:r>
+          </a:p>
+          <a:p>
+            <a:r>
+              <a:t>sensibility to navigate numbers. Each names a competence that a new medium made necessary.</a:t>
             </a:r>
           </a:p>
           <a:p/>
           <a:p>
             <a:r>
-              <a:t>If every relation among three can be rebuilt out of relations between two, then that third is just two</a:t>
-            </a:r>
-          </a:p>
-          <a:p>
-            <a:r>
-              <a:t>pairs stacked up, and algorithmacy is literacy applied twice. The word would name nothing new.</a:t>
-            </a:r>
-          </a:p>
-          <a:p/>
-          <a:p>
-            <a:r>
-              <a:t>So the talk turns on whether triads reduce to dyads. Logicians have argued about exactly that for a</a:t>
-            </a:r>
-          </a:p>
-          <a:p>
-            <a:r>
-              <a:t>hundred and fifty years, and I want to walk through the argument before I say what our lab added. One</a:t>
-            </a:r>
-          </a:p>
-          <a:p>
-            <a:r>
-              <a:t>warning: "reduce" is going to need a precise meaning, and halfway through I'll fix one.</a:t>
+              <a:t>Algorithmacy, as I use it, is the sensibility to navigate triadic coordination: coordinating with someone</a:t>
+            </a:r>
+          </a:p>
+          <a:p>
+            <a:r>
+              <a:t>through a third that both of you shape and that shapes you both. The platform between a driver and a</a:t>
+            </a:r>
+          </a:p>
+          <a:p>
+            <a:r>
+              <a:t>rider is the picture most of us have in mind.</a:t>
             </a:r>
           </a:p>
         </p:txBody>
@@ -1561,38 +1644,49 @@
           <a:lstStyle/>
           <a:p>
             <a:r>
-              <a:t>The argument starts with Charles Sanders Peirce, and earlier than people usually say. Peirce put both</a:t>
-            </a:r>
-          </a:p>
-          <a:p>
-            <a:r>
-              <a:t>halves of his reduction thesis into a memoir he read in 1870. A relative term cannot be reduced to</a:t>
-            </a:r>
-          </a:p>
-          <a:p>
-            <a:r>
-              <a:t>absolute terms, he wrote, "nor can a conjugative term be reduced to any combination of simple</a:t>
-            </a:r>
-          </a:p>
-          <a:p>
-            <a:r>
-              <a:t>relatives". A conjugative term is a relation among three or more. And every relation among four or</a:t>
-            </a:r>
-          </a:p>
-          <a:p>
-            <a:r>
-              <a:t>more, he said, can be built from relations among three.</a:t>
+              <a:t>Every one of those words rests on a claim about what exists. Literacy only makes sense if texts are a</a:t>
+            </a:r>
+          </a:p>
+          <a:p>
+            <a:r>
+              <a:t>kind of thing. Algorithmacy only makes sense if triads are a kind of thing. So the question is</a:t>
+            </a:r>
+          </a:p>
+          <a:p>
+            <a:r>
+              <a:t>ontological. Do triads reduce to dyads?</a:t>
             </a:r>
           </a:p>
           <a:p/>
           <a:p>
             <a:r>
-              <a:t>Notice what he did not do. He gave no argument for it there. The argument came later, and it came as</a:t>
-            </a:r>
-          </a:p>
-          <a:p>
-            <a:r>
-              <a:t>arithmetic.</a:t>
+              <a:t>If they do, then any three-way coordination is just two pairs stacked together. Navigating it takes</a:t>
+            </a:r>
+          </a:p>
+          <a:p>
+            <a:r>
+              <a:t>nothing more than navigating pairs, and algorithmacy is not a thing. If some triads do not reduce, then</a:t>
+            </a:r>
+          </a:p>
+          <a:p>
+            <a:r>
+              <a:t>algorithmacy has a target of its own.</a:t>
+            </a:r>
+          </a:p>
+          <a:p/>
+          <a:p>
+            <a:r>
+              <a:t>Philosophy has argued about exactly this question. I'll take you through Peirce, who said triads are</a:t>
+            </a:r>
+          </a:p>
+          <a:p>
+            <a:r>
+              <a:t>irreducible; Quine, whose logic seemed to show they are not; the logicians who worked out who was right;</a:t>
+            </a:r>
+          </a:p>
+          <a:p>
+            <a:r>
+              <a:t>and then our own argument.</a:t>
             </a:r>
           </a:p>
         </p:txBody>
@@ -1662,39 +1756,27 @@
           <a:lstStyle/>
           <a:p>
             <a:r>
-              <a:t>Think of a relation as a thing with blanks. Blank-gives-blank-to-blank has three. When you join two</a:t>
-            </a:r>
-          </a:p>
-          <a:p>
-            <a:r>
-              <a:t>relations you fill one blank of each with the same thing, so two blanks disappear. Join two dyads and you</a:t>
-            </a:r>
-          </a:p>
-          <a:p>
-            <a:r>
-              <a:t>get two plus two minus two: a dyad again. Join two triads and you get three plus three minus two: four.</a:t>
-            </a:r>
-          </a:p>
-          <a:p/>
-          <a:p>
-            <a:r>
-              <a:t>In 1897 Peirce put it this way: "artiads, or even-ads, can produce only artiads". Even plus even minus</a:t>
-            </a:r>
-          </a:p>
-          <a:p>
-            <a:r>
-              <a:t>two stays even, forever. Elsewhere he gave the picture: "no number of straight roads put end on end will</a:t>
-            </a:r>
-          </a:p>
-          <a:p>
-            <a:r>
-              <a:t>give more than two termini". Chains and rings are all that dyads can make. Triads can make anything.</a:t>
-            </a:r>
-          </a:p>
-          <a:p/>
-          <a:p>
-            <a:r>
-              <a:t>That is the logical argument, and it rests on one premise.</a:t>
+              <a:t>Charles Sanders Peirce built his philosophy on three categories. Firstness is quality, what a thing is</a:t>
+            </a:r>
+          </a:p>
+          <a:p>
+            <a:r>
+              <a:t>"regardless of aught else" — the redness of red, before it touches anything. Secondness is reaction, one</a:t>
+            </a:r>
+          </a:p>
+          <a:p>
+            <a:r>
+              <a:t>thing pushing against another: "cause and effect are two", he wrote. Thirdness is mediation, "the medium</a:t>
+            </a:r>
+          </a:p>
+          <a:p>
+            <a:r>
+              <a:t>or connecting bond between the absolute first and last". A sign that stands between a thing and the mind</a:t>
+            </a:r>
+          </a:p>
+          <a:p>
+            <a:r>
+              <a:t>that reads it. A law that connects a cause to its effect. A contract that binds two people to each other.</a:t>
             </a:r>
           </a:p>
         </p:txBody>
@@ -1764,43 +1846,33 @@
           <a:lstStyle/>
           <a:p>
             <a:r>
-              <a:t>The premise is about the junction. The arithmetic works only if a point where three lines meet counts as</a:t>
-            </a:r>
-          </a:p>
-          <a:p>
-            <a:r>
-              <a:t>a relation in its own right.</a:t>
+              <a:t>Peirce's central claim is that Thirdness is its own kind of being. A genuine triad, he wrote, is one whose</a:t>
+            </a:r>
+          </a:p>
+          <a:p>
+            <a:r>
+              <a:t>"three members are bound together by it in a way that does not consist in any complexus of dyadic</a:t>
+            </a:r>
+          </a:p>
+          <a:p>
+            <a:r>
+              <a:t>relations". You cannot build it out of pairs.</a:t>
             </a:r>
           </a:p>
           <a:p/>
           <a:p>
             <a:r>
-              <a:t>In 1886 Alfred Kempe challenged the negative clause. He redrew a triad as an extra unit with three plain</a:t>
-            </a:r>
-          </a:p>
-          <a:p>
-            <a:r>
-              <a:t>links coming off it, so that no relation among three appears anywhere. Peirce took the objection</a:t>
-            </a:r>
-          </a:p>
-          <a:p>
-            <a:r>
-              <a:t>seriously. In 1892 he answered that Kempe's picture still contains mediation, in "the attachment of lines</a:t>
-            </a:r>
-          </a:p>
-          <a:p>
-            <a:r>
-              <a:t>to spots", and that the extra unit comes from an abstraction the diagram never shows being made. In 1897</a:t>
-            </a:r>
-          </a:p>
-          <a:p>
-            <a:r>
-              <a:t>he stated the premise outright: "every node of bonds is equivalent to a relative". So from the first</a:t>
-            </a:r>
-          </a:p>
-          <a:p>
-            <a:r>
-              <a:t>round the dispute has been about the junction, and about the object that fills it.</a:t>
+              <a:t>He first stated the thesis, without proof, in 1870, and it has two halves. No triad can be built from</a:t>
+            </a:r>
+          </a:p>
+          <a:p>
+            <a:r>
+              <a:t>dyads. And every relation among four or more things can be built from triads. So three is enough to build</a:t>
+            </a:r>
+          </a:p>
+          <a:p>
+            <a:r>
+              <a:t>everything, and nothing less will do. He argued for it later, in three ways.</a:t>
             </a:r>
           </a:p>
         </p:txBody>
@@ -1870,23 +1942,28 @@
           <a:lstStyle/>
           <a:p>
             <a:r>
-              <a:t>Peirce's favourite example shows what is at stake. If A throws something away and it happens to hit C,</a:t>
-            </a:r>
-          </a:p>
-          <a:p>
-            <a:r>
-              <a:t>you have, in his words, "merely one dyadic relation followed by another". Genuine giving is "A's making C</a:t>
-            </a:r>
-          </a:p>
-          <a:p>
-            <a:r>
-              <a:t>the possessor according to Law". The three parties are held in one fact.</a:t>
+              <a:t>The first argument is an example. "A gives B to C." Peirce writes: "This does not consist in A's throwing</a:t>
+            </a:r>
+          </a:p>
+          <a:p>
+            <a:r>
+              <a:t>B away and its accidentally hitting C". If that were all that happened, it would be "merely one dyadic</a:t>
+            </a:r>
+          </a:p>
+          <a:p>
+            <a:r>
+              <a:t>relation followed by another". A throws. The thing hits. Two pairs.</a:t>
             </a:r>
           </a:p>
           <a:p/>
           <a:p>
             <a:r>
-              <a:t>Keep that pair in mind, the real gift and its imitation. We will meet a model of each.</a:t>
+              <a:t>Giving is different. Giving transfers a right. The giver, the gift and the receiver are held in one fact,</a:t>
+            </a:r>
+          </a:p>
+          <a:p>
+            <a:r>
+              <a:t>and no sequence of two-party events adds up to it.</a:t>
             </a:r>
           </a:p>
         </p:txBody>
@@ -1956,33 +2033,38 @@
           <a:lstStyle/>
           <a:p>
             <a:r>
-              <a:t>That was the logic. Now the sociology. In 1902 Georg Simmel made the same step in the life of groups. In</a:t>
-            </a:r>
-          </a:p>
-          <a:p>
-            <a:r>
-              <a:t>a pair, he wrote, when one member refuses, "only the other remains, without any superindividual energy".</a:t>
-            </a:r>
-          </a:p>
-          <a:p>
-            <a:r>
-              <a:t>Add a third and something new appears: "each pair of elements are now joined by a broken line". A and B</a:t>
-            </a:r>
-          </a:p>
-          <a:p>
-            <a:r>
-              <a:t>are still connected directly, and now also through C, and the same holds for every pair.</a:t>
+              <a:t>The second argument is arithmetic. Peirce drew relations as spots with tails, one tail for each place.</a:t>
+            </a:r>
+          </a:p>
+          <a:p>
+            <a:r>
+              <a:t>A quality has one tail. A pair has two. When you join two relations, you tie a tail of one to a tail of</a:t>
+            </a:r>
+          </a:p>
+          <a:p>
+            <a:r>
+              <a:t>the other, and those two tails disappear. So joining two pairs gives two plus two minus two: a pair</a:t>
+            </a:r>
+          </a:p>
+          <a:p>
+            <a:r>
+              <a:t>again. However many pairs you chain, "you can never by such joining make a graph with three tails".</a:t>
             </a:r>
           </a:p>
           <a:p/>
           <a:p>
             <a:r>
-              <a:t>Simmel is not arguing about definability. He is describing a change in the form of a group: the</a:t>
-            </a:r>
-          </a:p>
-          <a:p>
-            <a:r>
-              <a:t>mediator, the arbitrator, the third who profits from the quarrel of two.</a:t>
+              <a:t>Triads behave differently. Three plus three minus two is four, and from there you can reach anything. In</a:t>
+            </a:r>
+          </a:p>
+          <a:p>
+            <a:r>
+              <a:t>1897 he put it in one line: "artiads, or even-ads, can produce only artiads". Even plus even minus two</a:t>
+            </a:r>
+          </a:p>
+          <a:p>
+            <a:r>
+              <a:t>stays even, forever.</a:t>
             </a:r>
           </a:p>
         </p:txBody>
@@ -2052,28 +2134,48 @@
           <a:lstStyle/>
           <a:p>
             <a:r>
-              <a:t>But Simmel also saw that three people are not automatically a triad. He set aside a third so distant</a:t>
-            </a:r>
-          </a:p>
-          <a:p>
-            <a:r>
-              <a:t>from the other two that it unites them only as a pair facing it. There he finds, in his translator's</a:t>
-            </a:r>
-          </a:p>
-          <a:p>
-            <a:r>
-              <a:t>phrase, "configurations of twos". The German is Zweierkonfigurationen.</a:t>
+              <a:t>The third argument concerns a place where three lines meet. If you let three tails meet at one point,</a:t>
+            </a:r>
+          </a:p>
+          <a:p>
+            <a:r>
+              <a:t>haven't you built a triad out of pairs? Peirce's answer: the meeting point is itself a relation. "Every</a:t>
+            </a:r>
+          </a:p>
+          <a:p>
+            <a:r>
+              <a:t>node of bonds is equivalent to a relative."</a:t>
             </a:r>
           </a:p>
           <a:p/>
           <a:p>
             <a:r>
-              <a:t>So three is necessary. It is not sufficient. Hold on to that, because the question of what makes three</a:t>
-            </a:r>
-          </a:p>
-          <a:p>
-            <a:r>
-              <a:t>into one is where our lab comes in.</a:t>
+              <a:t>Alfred Kempe's memoir of 1886 did exactly what that question suggests. It redrew a triad as a small unit</a:t>
+            </a:r>
+          </a:p>
+          <a:p>
+            <a:r>
+              <a:t>with three plain links, so that nothing three-place appears. Kempe never mentioned Peirce, but Peirce saw</a:t>
+            </a:r>
+          </a:p>
+          <a:p>
+            <a:r>
+              <a:t>the danger and called it "a formidable objection". In 1892 he conceded that Kempe's diagrams could express</a:t>
+            </a:r>
+          </a:p>
+          <a:p>
+            <a:r>
+              <a:t>giving, and modified his position without surrendering it: the mediation is still there, in "the</a:t>
+            </a:r>
+          </a:p>
+          <a:p>
+            <a:r>
+              <a:t>attachment of lines to spots", and in an abstraction the diagram never shows being made. Hold on to that</a:t>
+            </a:r>
+          </a:p>
+          <a:p>
+            <a:r>
+              <a:t>point about the junction. It comes back.</a:t>
             </a:r>
           </a:p>
         </p:txBody>
@@ -2143,38 +2245,27 @@
           <a:lstStyle/>
           <a:p>
             <a:r>
-              <a:t>First, though, the result that led many to doubt Peirce, although none of its authors aimed it at him.</a:t>
-            </a:r>
-          </a:p>
-          <a:p>
-            <a:r>
-              <a:t>In 1915 Leopold Löwenheim showed that two-place relations suffice to express any relation, provided you</a:t>
-            </a:r>
-          </a:p>
-          <a:p>
-            <a:r>
-              <a:t>add new objects, pairs, to the domain. In 1936 László Kalmár showed that, for deciding satisfiability,</a:t>
-            </a:r>
-          </a:p>
-          <a:p>
-            <a:r>
-              <a:t>a single two-place relation is enough. And in 1954 W. V. Quine published a short paper showing that any</a:t>
-            </a:r>
-          </a:p>
-          <a:p>
-            <a:r>
-              <a:t>first-order theory can be rewritten with "only one predicate letter, and it a dyadic one".</a:t>
-            </a:r>
-          </a:p>
-          <a:p/>
-          <a:p>
-            <a:r>
-              <a:t>Quine assumes a fragment of set theory, so the pairs are there to use. On the pages we have checked he</a:t>
-            </a:r>
-          </a:p>
-          <a:p>
-            <a:r>
-              <a:t>does not mention Peirce, and Koshkin reports that he never connected the result to Peirce. Others did.</a:t>
+              <a:t>Georg Simmel reached the same step from the sociology of groups. In a pair, when one member refuses,</a:t>
+            </a:r>
+          </a:p>
+          <a:p>
+            <a:r>
+              <a:t>"only the other remains". Add a third and something new appears: "each pair of elements are now joined by</a:t>
+            </a:r>
+          </a:p>
+          <a:p>
+            <a:r>
+              <a:t>a broken line", a route that runs through the third. But Simmel also saw that three people are not</a:t>
+            </a:r>
+          </a:p>
+          <a:p>
+            <a:r>
+              <a:t>automatically a triad. A third too distant from the other two leaves only "configurations of twos". So the</a:t>
+            </a:r>
+          </a:p>
+          <a:p>
+            <a:r>
+              <a:t>count of three is necessary, and it is not enough. That was the case for triads. Now the case against.</a:t>
             </a:r>
           </a:p>
         </p:txBody>
@@ -5342,7 +5433,7 @@
                 </a:solidFill>
                 <a:latin typeface="Arial"/>
               </a:rPr>
-              <a:t>Every reduction keeps the junction</a:t>
+              <a:t>Quine: one two-place predicate is enough</a:t>
             </a:r>
           </a:p>
         </p:txBody>
@@ -5375,13 +5466,45 @@
               </a:spcBef>
             </a:pPr>
             <a:r>
+              <a:rPr sz="2400" b="0" i="1">
+                <a:solidFill>
+                  <a:srgbClr val="000000"/>
+                </a:solidFill>
+                <a:latin typeface="Arial"/>
+              </a:rPr>
+              <a:t>there is only one predicate letter, and it a dyadic one</a:t>
+            </a:r>
+          </a:p>
+          <a:p>
+            <a:pPr algn="l">
+              <a:spcBef>
+                <a:spcPts val="1400"/>
+              </a:spcBef>
+            </a:pPr>
+            <a:r>
+              <a:rPr sz="1800" b="0" i="0">
+                <a:solidFill>
+                  <a:srgbClr val="000000"/>
+                </a:solidFill>
+                <a:latin typeface="Arial"/>
+              </a:rPr>
+              <a:t>— Quine, 1954</a:t>
+            </a:r>
+          </a:p>
+          <a:p>
+            <a:pPr algn="l">
+              <a:spcBef>
+                <a:spcPts val="1400"/>
+              </a:spcBef>
+            </a:pPr>
+            <a:r>
               <a:rPr sz="2400" b="0" i="0">
                 <a:solidFill>
                   <a:srgbClr val="000000"/>
                 </a:solidFill>
                 <a:latin typeface="Arial"/>
               </a:rPr>
-              <a:t>"A gives B to C" → mint g, the giving: giver(g, A) · gift(g, B) · recipient(g, C)</a:t>
+              <a:t>Tools: "a fragment of set theory", ordered pairs, and a universe enlarged to contain them</a:t>
             </a:r>
           </a:p>
           <a:p>
@@ -5397,39 +5520,7 @@
                 </a:solidFill>
                 <a:latin typeface="Arial"/>
               </a:rPr>
-              <a:t>Kempe: a unit · Peirce: "this action" · Löwenheim and Quine: pairs</a:t>
-            </a:r>
-          </a:p>
-          <a:p>
-            <a:pPr algn="l">
-              <a:spcBef>
-                <a:spcPts val="1400"/>
-              </a:spcBef>
-            </a:pPr>
-            <a:r>
-              <a:rPr sz="2400" b="0" i="0">
-                <a:solidFill>
-                  <a:srgbClr val="000000"/>
-                </a:solidFill>
-                <a:latin typeface="Arial"/>
-              </a:rPr>
-              <a:t>Dyads build a triad only with a three-way junction. Without one, never.</a:t>
-            </a:r>
-          </a:p>
-          <a:p>
-            <a:pPr algn="l">
-              <a:spcBef>
-                <a:spcPts val="1400"/>
-              </a:spcBef>
-            </a:pPr>
-            <a:r>
-              <a:rPr sz="1800" b="0" i="0">
-                <a:solidFill>
-                  <a:srgbClr val="000000"/>
-                </a:solidFill>
-                <a:latin typeface="Arial"/>
-              </a:rPr>
-              <a:t>— Hereth Correia &amp; Pöschel 2006; Koshkin 2025</a:t>
+              <a:t>Löwenheim had done something similar in 1915.</a:t>
             </a:r>
           </a:p>
         </p:txBody>
@@ -5494,7 +5585,7 @@
                 </a:solidFill>
                 <a:latin typeface="Arial"/>
               </a:rPr>
-              <a:t>Both right, or not both right</a:t>
+              <a:t>How the reduction works</a:t>
             </a:r>
           </a:p>
         </p:txBody>
@@ -5527,61 +5618,61 @@
               </a:spcBef>
             </a:pPr>
             <a:r>
-              <a:rPr sz="2400" b="0" i="1">
+              <a:rPr sz="2200" b="0" i="0">
+                <a:solidFill>
+                  <a:srgbClr val="000000"/>
+                </a:solidFill>
+                <a:latin typeface="Courier New"/>
+              </a:rPr>
+              <a:t>gives(A, B, C)</a:t>
+            </a:r>
+          </a:p>
+          <a:p>
+            <a:pPr algn="l">
+              <a:spcBef>
+                <a:spcPts val="0"/>
+              </a:spcBef>
+            </a:pPr>
+            <a:r>
+              <a:rPr sz="2200" b="0" i="0">
+                <a:solidFill>
+                  <a:srgbClr val="000000"/>
+                </a:solidFill>
+                <a:latin typeface="Courier New"/>
+              </a:rPr>
+              <a:t>  becomes one new object:  (tag, A, (B, C))</a:t>
+            </a:r>
+          </a:p>
+          <a:p>
+            <a:pPr algn="l">
+              <a:spcBef>
+                <a:spcPts val="0"/>
+              </a:spcBef>
+            </a:pPr>
+            <a:r>
+              <a:rPr sz="2200" b="0" i="0">
+                <a:solidFill>
+                  <a:srgbClr val="000000"/>
+                </a:solidFill>
+                <a:latin typeface="Courier New"/>
+              </a:rPr>
+              <a:t>  and one two-place fact about it</a:t>
+            </a:r>
+          </a:p>
+          <a:p>
+            <a:pPr algn="l">
+              <a:spcBef>
+                <a:spcPts val="1400"/>
+              </a:spcBef>
+            </a:pPr>
+            <a:r>
+              <a:rPr sz="2400" b="0" i="0">
                 <a:solidFill>
                   <a:srgbClr val="000000"/>
                 </a:solidFill>
                 <a:latin typeface="Arial"/>
               </a:rPr>
-              <a:t>both Peirce and Quine were correct: the issue entirely depends on exactly what constructive resources are to be allowed</a:t>
-            </a:r>
-          </a:p>
-          <a:p>
-            <a:pPr algn="l">
-              <a:spcBef>
-                <a:spcPts val="1400"/>
-              </a:spcBef>
-            </a:pPr>
-            <a:r>
-              <a:rPr sz="1800" b="0" i="0">
-                <a:solidFill>
-                  <a:srgbClr val="000000"/>
-                </a:solidFill>
-                <a:latin typeface="Arial"/>
-              </a:rPr>
-              <a:t>— Burch, Stanford Encyclopedia of Philosophy</a:t>
-            </a:r>
-          </a:p>
-          <a:p>
-            <a:pPr algn="l">
-              <a:spcBef>
-                <a:spcPts val="1400"/>
-              </a:spcBef>
-            </a:pPr>
-            <a:r>
-              <a:rPr sz="2400" b="0" i="1">
-                <a:solidFill>
-                  <a:srgbClr val="000000"/>
-                </a:solidFill>
-                <a:latin typeface="Arial"/>
-              </a:rPr>
-              <a:t>It cannot simply be that Peirce and Quine are both right.</a:t>
-            </a:r>
-          </a:p>
-          <a:p>
-            <a:pPr algn="l">
-              <a:spcBef>
-                <a:spcPts val="1400"/>
-              </a:spcBef>
-            </a:pPr>
-            <a:r>
-              <a:rPr sz="1800" b="0" i="0">
-                <a:solidFill>
-                  <a:srgbClr val="000000"/>
-                </a:solidFill>
-                <a:latin typeface="Arial"/>
-              </a:rPr>
-              <a:t>— Koshkin, 2022</a:t>
+              <a:t>Every relation becomes dyadic, over a larger universe.</a:t>
             </a:r>
           </a:p>
         </p:txBody>
@@ -5646,7 +5737,7 @@
                 </a:solidFill>
                 <a:latin typeface="Arial"/>
               </a:rPr>
-              <a:t>Give the junction a direction</a:t>
+              <a:t>If Quine is right, Thirdness is notation</a:t>
             </a:r>
           </a:p>
         </p:txBody>
@@ -5685,7 +5776,7 @@
                 </a:solidFill>
                 <a:latin typeface="Arial"/>
               </a:rPr>
-              <a:t>Triad = a party jointly determined by two others, inside a whole that does not factor.</a:t>
+              <a:t>Any triad can be rewritten as pairs.</a:t>
             </a:r>
           </a:p>
           <a:p>
@@ -5701,7 +5792,7 @@
                 </a:solidFill>
                 <a:latin typeface="Arial"/>
               </a:rPr>
-              <a:t>Φ: what a system loses under its weakest cut (IIT 4.0). Φ = 0: it splits into parts.</a:t>
+              <a:t>Then Thirdness is not a kind of being.</a:t>
             </a:r>
           </a:p>
           <a:p>
@@ -5711,29 +5802,13 @@
               </a:spcBef>
             </a:pPr>
             <a:r>
-              <a:rPr sz="2200" b="0" i="0">
-                <a:solidFill>
-                  <a:srgbClr val="000000"/>
-                </a:solidFill>
-                <a:latin typeface="Courier New"/>
-              </a:rPr>
-              <a:t>A &lt;-&gt; M &lt;-&gt; B     M' = A and B;  A' = M;  B' = M</a:t>
-            </a:r>
-          </a:p>
-          <a:p>
-            <a:pPr algn="l">
-              <a:spcBef>
-                <a:spcPts val="0"/>
-              </a:spcBef>
-            </a:pPr>
-            <a:r>
-              <a:rPr sz="2200" b="0" i="0">
-                <a:solidFill>
-                  <a:srgbClr val="000000"/>
-                </a:solidFill>
-                <a:latin typeface="Courier New"/>
-              </a:rPr>
-              <a:t>Φ = 2.0   all three in the core   "the control"</a:t>
+              <a:rPr sz="2400" b="0" i="0">
+                <a:solidFill>
+                  <a:srgbClr val="000000"/>
+                </a:solidFill>
+                <a:latin typeface="Arial"/>
+              </a:rPr>
+              <a:t>Then algorithmacy is not a thing.</a:t>
             </a:r>
           </a:p>
         </p:txBody>
@@ -5798,7 +5873,7 @@
                 </a:solidFill>
                 <a:latin typeface="Arial"/>
               </a:rPr>
-              <a:t>Composing pairs: the prediction failed, then was located</a:t>
+              <a:t>The logicians: it depends on the operations</a:t>
             </a:r>
           </a:p>
         </p:txBody>
@@ -5837,7 +5912,7 @@
                 </a:solidFill>
                 <a:latin typeface="Arial"/>
               </a:rPr>
-              <a:t>89 one-input wirings: pre-registered H1 REFUTED — branches make three-party facts</a:t>
+              <a:t>Herzberger 1981: the thesis holds for valency-regular constructions with relative products</a:t>
             </a:r>
           </a:p>
           <a:p>
@@ -5847,29 +5922,45 @@
               </a:spcBef>
             </a:pPr>
             <a:r>
+              <a:rPr sz="2400" b="0" i="1">
+                <a:solidFill>
+                  <a:srgbClr val="000000"/>
+                </a:solidFill>
+                <a:latin typeface="Arial"/>
+              </a:rPr>
+              <a:t>the reduction thesis collapses under standard notions of definability</a:t>
+            </a:r>
+          </a:p>
+          <a:p>
+            <a:pPr algn="l">
+              <a:spcBef>
+                <a:spcPts val="1400"/>
+              </a:spcBef>
+            </a:pPr>
+            <a:r>
+              <a:rPr sz="1800" b="0" i="0">
+                <a:solidFill>
+                  <a:srgbClr val="000000"/>
+                </a:solidFill>
+                <a:latin typeface="Arial"/>
+              </a:rPr>
+              <a:t>— Herzberger, 1981</a:t>
+            </a:r>
+          </a:p>
+          <a:p>
+            <a:pPr algn="l">
+              <a:spcBef>
+                <a:spcPts val="1400"/>
+              </a:spcBef>
+            </a:pPr>
+            <a:r>
               <a:rPr sz="2400" b="0" i="0">
                 <a:solidFill>
                   <a:srgbClr val="000000"/>
                 </a:solidFill>
                 <a:latin typeface="Arial"/>
               </a:rPr>
-              <a:t>Every three-party fact is a fan-out: one element read by several</a:t>
-            </a:r>
-          </a:p>
-          <a:p>
-            <a:pPr algn="l">
-              <a:spcBef>
-                <a:spcPts val="1400"/>
-              </a:spcBef>
-            </a:pPr>
-            <a:r>
-              <a:rPr sz="2400" b="0" i="0">
-                <a:solidFill>
-                  <a:srgbClr val="000000"/>
-                </a:solidFill>
-                <a:latin typeface="Arial"/>
-              </a:rPr>
-              <a:t>On the cause side: the element plus its one source, never more</a:t>
+              <a:t>Burch 1991: a proof inside Peircean algebra, under a restriction</a:t>
             </a:r>
           </a:p>
         </p:txBody>
@@ -5934,7 +6025,7 @@
                 </a:solidFill>
                 <a:latin typeface="Arial"/>
               </a:rPr>
-              <a:t>Φ alone is not the test</a:t>
+              <a:t>The three-way junction decides it</a:t>
             </a:r>
           </a:p>
         </p:txBody>
@@ -5973,7 +6064,7 @@
                 </a:solidFill>
                 <a:latin typeface="Arial"/>
               </a:rPr>
-              <a:t>Wholes, no joint determination: mutual pair, ring of copies, imitation of giving — Φ = 2.0</a:t>
+              <a:t>Hereth Correia &amp; Pöschel 2006: in Peirce's algebra, pairs alone never build the three-way identity</a:t>
             </a:r>
           </a:p>
           <a:p>
@@ -5989,7 +6080,7 @@
                 </a:solidFill>
                 <a:latin typeface="Arial"/>
               </a:rPr>
-              <a:t>Joint determination in a whole: the control, genuine giving, a sign that acts back on its object</a:t>
+              <a:t>Dau &amp; Hereth Correia 2006: in relational algebra it is "hidden in the operations"</a:t>
             </a:r>
           </a:p>
           <a:p>
@@ -6005,7 +6096,7 @@
                 </a:solidFill>
                 <a:latin typeface="Arial"/>
               </a:rPr>
-              <a:t>Joint determination, no whole: 11 of 30 fresh forms (pre-registered)</a:t>
+              <a:t>Koshkin 2025: with free variable-sharing, triads reduce to pairs on domains of 3+ values; on two-valued domains some do not</a:t>
             </a:r>
           </a:p>
         </p:txBody>
@@ -6070,7 +6161,7 @@
                 </a:solidFill>
                 <a:latin typeface="Arial"/>
               </a:rPr>
-              <a:t>Two forms of coordination</a:t>
+              <a:t>Both correct</a:t>
             </a:r>
           </a:p>
         </p:txBody>
@@ -6103,61 +6194,77 @@
               </a:spcBef>
             </a:pPr>
             <a:r>
+              <a:rPr sz="2400" b="0" i="1">
+                <a:solidFill>
+                  <a:srgbClr val="000000"/>
+                </a:solidFill>
+                <a:latin typeface="Arial"/>
+              </a:rPr>
+              <a:t>both Peirce and Quine were correct: the issue entirely depends on exactly what constructive resources are to be allowed</a:t>
+            </a:r>
+          </a:p>
+          <a:p>
+            <a:pPr algn="l">
+              <a:spcBef>
+                <a:spcPts val="1400"/>
+              </a:spcBef>
+            </a:pPr>
+            <a:r>
+              <a:rPr sz="1800" b="0" i="0">
+                <a:solidFill>
+                  <a:srgbClr val="000000"/>
+                </a:solidFill>
+                <a:latin typeface="Arial"/>
+              </a:rPr>
+              <a:t>— Burch, Stanford Encyclopedia of Philosophy</a:t>
+            </a:r>
+          </a:p>
+          <a:p>
+            <a:pPr algn="l">
+              <a:spcBef>
+                <a:spcPts val="1400"/>
+              </a:spcBef>
+            </a:pPr>
+            <a:r>
+              <a:rPr sz="2400" b="0" i="1">
+                <a:solidFill>
+                  <a:srgbClr val="000000"/>
+                </a:solidFill>
+                <a:latin typeface="Arial"/>
+              </a:rPr>
+              <a:t>It cannot simply be that Peirce and Quine are both right.</a:t>
+            </a:r>
+          </a:p>
+          <a:p>
+            <a:pPr algn="l">
+              <a:spcBef>
+                <a:spcPts val="1400"/>
+              </a:spcBef>
+            </a:pPr>
+            <a:r>
+              <a:rPr sz="1800" b="0" i="0">
+                <a:solidFill>
+                  <a:srgbClr val="000000"/>
+                </a:solidFill>
+                <a:latin typeface="Arial"/>
+              </a:rPr>
+              <a:t>— Koshkin, 2022</a:t>
+            </a:r>
+          </a:p>
+          <a:p>
+            <a:pPr algn="l">
+              <a:spcBef>
+                <a:spcPts val="1400"/>
+              </a:spcBef>
+            </a:pPr>
+            <a:r>
               <a:rPr sz="2400" b="0" i="0">
                 <a:solidFill>
                   <a:srgbClr val="000000"/>
                 </a:solidFill>
                 <a:latin typeface="Arial"/>
               </a:rPr>
-              <a:t>Literacy: writer → text → reader — a chain</a:t>
-            </a:r>
-          </a:p>
-          <a:p>
-            <a:pPr algn="l">
-              <a:spcBef>
-                <a:spcPts val="1400"/>
-              </a:spcBef>
-            </a:pPr>
-            <a:r>
-              <a:rPr sz="2400" b="0" i="0">
-                <a:solidFill>
-                  <a:srgbClr val="000000"/>
-                </a:solidFill>
-                <a:latin typeface="Arial"/>
-              </a:rPr>
-              <a:t>Algorithmacy: A &lt;-&gt; M &lt;-&gt; B, M set by both at once — a whole</a:t>
-            </a:r>
-          </a:p>
-          <a:p>
-            <a:pPr algn="l">
-              <a:spcBef>
-                <a:spcPts val="1400"/>
-              </a:spcBef>
-            </a:pPr>
-            <a:r>
-              <a:rPr sz="2400" b="0" i="0">
-                <a:solidFill>
-                  <a:srgbClr val="000000"/>
-                </a:solidFill>
-                <a:latin typeface="Arial"/>
-              </a:rPr>
-              <a:t>Every sign is triadic. The coordination is a chain.</a:t>
-            </a:r>
-          </a:p>
-          <a:p>
-            <a:pPr algn="l">
-              <a:spcBef>
-                <a:spcPts val="1400"/>
-              </a:spcBef>
-            </a:pPr>
-            <a:r>
-              <a:rPr sz="2400" b="0" i="0">
-                <a:solidFill>
-                  <a:srgbClr val="000000"/>
-                </a:solidFill>
-                <a:latin typeface="Arial"/>
-              </a:rPr>
-              <a:t>Older than AI: Simmel's arbitrator, a shared tally, meet the same criterion.</a:t>
+              <a:t>Logic tests relations as sets of tuples. It has no test for coordination as a running system.</a:t>
             </a:r>
           </a:p>
         </p:txBody>
@@ -6222,7 +6329,7 @@
                 </a:solidFill>
                 <a:latin typeface="Arial"/>
               </a:rPr>
-              <a:t>A target literacy cannot build</a:t>
+              <a:t>Our argument: a causal test for irreducible triads</a:t>
             </a:r>
           </a:p>
         </p:txBody>
@@ -6261,7 +6368,7 @@
                 </a:solidFill>
                 <a:latin typeface="Arial"/>
               </a:rPr>
-              <a:t>Among fixed parties, one-input determination never composes joint determination.</a:t>
+              <a:t>Φ: what a system loses under its weakest cut. Φ = 0: it splits at some cut.</a:t>
             </a:r>
           </a:p>
           <a:p>
@@ -6277,7 +6384,7 @@
                 </a:solidFill>
                 <a:latin typeface="Arial"/>
               </a:rPr>
-              <a:t>Joint determination in a whole exists.</a:t>
+              <a:t>IIT also reads, element by element, what each depends on irreducibly.</a:t>
             </a:r>
           </a:p>
           <a:p>
@@ -6293,7 +6400,327 @@
                 </a:solidFill>
                 <a:latin typeface="Arial"/>
               </a:rPr>
-              <a:t>So coordination through a jointly determined third has a target of its own.</a:t>
+              <a:t>Irreducible triad: a party jointly determined by two others, all three inside one whole.</a:t>
+            </a:r>
+          </a:p>
+          <a:p>
+            <a:pPr algn="l">
+              <a:spcBef>
+                <a:spcPts val="1400"/>
+              </a:spcBef>
+            </a:pPr>
+            <a:r>
+              <a:rPr sz="2200" b="0" i="0">
+                <a:solidFill>
+                  <a:srgbClr val="000000"/>
+                </a:solidFill>
+                <a:latin typeface="Courier New"/>
+              </a:rPr>
+              <a:t>M' = A and B;  A' = M;  B' = M</a:t>
+            </a:r>
+          </a:p>
+          <a:p>
+            <a:pPr algn="l">
+              <a:spcBef>
+                <a:spcPts val="0"/>
+              </a:spcBef>
+            </a:pPr>
+            <a:r>
+              <a:rPr sz="2200" b="0" i="0">
+                <a:solidFill>
+                  <a:srgbClr val="000000"/>
+                </a:solidFill>
+                <a:latin typeface="Courier New"/>
+              </a:rPr>
+              <a:t>Φ = 2.0, all three in the core</a:t>
+            </a:r>
+          </a:p>
+        </p:txBody>
+      </p:sp>
+    </p:spTree>
+  </p:cSld>
+  <p:clrMapOvr>
+    <a:masterClrMapping/>
+  </p:clrMapOvr>
+</p:sld>
+</file>
+
+<file path=ppt/slides/slide17.xml><?xml version="1.0" encoding="utf-8"?>
+<p:sld xmlns:a="http://schemas.openxmlformats.org/drawingml/2006/main" xmlns:p="http://schemas.openxmlformats.org/presentationml/2006/main" xmlns:r="http://schemas.openxmlformats.org/officeDocument/2006/relationships">
+  <p:cSld>
+    <p:bg>
+      <p:bgPr>
+        <a:solidFill>
+          <a:srgbClr val="FFFFFF"/>
+        </a:solidFill>
+        <a:effectLst/>
+      </p:bgPr>
+    </p:bg>
+    <p:spTree>
+      <p:nvGrpSpPr>
+        <p:cNvPr id="1" name=""/>
+        <p:cNvGrpSpPr/>
+        <p:nvPr/>
+      </p:nvGrpSpPr>
+      <p:grpSpPr/>
+      <p:sp>
+        <p:nvSpPr>
+          <p:cNvPr id="2" name="TextBox 1"/>
+          <p:cNvSpPr txBox="1"/>
+          <p:nvPr/>
+        </p:nvSpPr>
+        <p:spPr>
+          <a:xfrm>
+            <a:off x="822960" y="640080"/>
+            <a:ext cx="10545775" cy="1188720"/>
+          </a:xfrm>
+          <a:prstGeom prst="rect">
+            <a:avLst/>
+          </a:prstGeom>
+          <a:noFill/>
+        </p:spPr>
+        <p:txBody>
+          <a:bodyPr wrap="square" anchor="b" lIns="0" rIns="0" tIns="0" bIns="0">
+            <a:spAutoFit/>
+          </a:bodyPr>
+          <a:lstStyle/>
+          <a:p>
+            <a:pPr algn="l">
+              <a:spcBef>
+                <a:spcPts val="0"/>
+              </a:spcBef>
+            </a:pPr>
+            <a:r>
+              <a:rPr sz="3600" b="1" i="0">
+                <a:solidFill>
+                  <a:srgbClr val="000000"/>
+                </a:solidFill>
+                <a:latin typeface="Arial"/>
+              </a:rPr>
+              <a:t>What IIT sorts</a:t>
+            </a:r>
+          </a:p>
+        </p:txBody>
+      </p:sp>
+      <p:sp>
+        <p:nvSpPr>
+          <p:cNvPr id="3" name="TextBox 2"/>
+          <p:cNvSpPr txBox="1"/>
+          <p:nvPr/>
+        </p:nvSpPr>
+        <p:spPr>
+          <a:xfrm>
+            <a:off x="822960" y="2103120"/>
+            <a:ext cx="10545775" cy="3931920"/>
+          </a:xfrm>
+          <a:prstGeom prst="rect">
+            <a:avLst/>
+          </a:prstGeom>
+          <a:noFill/>
+        </p:spPr>
+        <p:txBody>
+          <a:bodyPr wrap="square" anchor="t" lIns="0" rIns="0" tIns="0" bIns="0">
+            <a:spAutoFit/>
+          </a:bodyPr>
+          <a:lstStyle/>
+          <a:p>
+            <a:pPr algn="l">
+              <a:spcBef>
+                <a:spcPts val="0"/>
+              </a:spcBef>
+            </a:pPr>
+            <a:r>
+              <a:rPr sz="2400" b="0" i="0">
+                <a:solidFill>
+                  <a:srgbClr val="000000"/>
+                </a:solidFill>
+                <a:latin typeface="Arial"/>
+              </a:rPr>
+              <a:t>Pairs chained, looped or branched: no one jointly determined (89 wirings; post hoc)</a:t>
+            </a:r>
+          </a:p>
+          <a:p>
+            <a:pPr algn="l">
+              <a:spcBef>
+                <a:spcPts val="1400"/>
+              </a:spcBef>
+            </a:pPr>
+            <a:r>
+              <a:rPr sz="2400" b="0" i="0">
+                <a:solidFill>
+                  <a:srgbClr val="000000"/>
+                </a:solidFill>
+                <a:latin typeface="Arial"/>
+              </a:rPr>
+              <a:t>A whole, no triad: a ring of pairs, Φ = 2.0</a:t>
+            </a:r>
+          </a:p>
+          <a:p>
+            <a:pPr algn="l">
+              <a:spcBef>
+                <a:spcPts val="1400"/>
+              </a:spcBef>
+            </a:pPr>
+            <a:r>
+              <a:rPr sz="2400" b="0" i="0">
+                <a:solidFill>
+                  <a:srgbClr val="000000"/>
+                </a:solidFill>
+                <a:latin typeface="Arial"/>
+              </a:rPr>
+              <a:t>A triad, no whole: 11 of 30 fresh four-element systems, Φ = 0</a:t>
+            </a:r>
+          </a:p>
+          <a:p>
+            <a:pPr algn="l">
+              <a:spcBef>
+                <a:spcPts val="1400"/>
+              </a:spcBef>
+            </a:pPr>
+            <a:r>
+              <a:rPr sz="2400" b="0" i="0">
+                <a:solidFill>
+                  <a:srgbClr val="000000"/>
+                </a:solidFill>
+                <a:latin typeface="Arial"/>
+              </a:rPr>
+              <a:t>A triad in a whole: the control, genuine giving; 5 of 30</a:t>
+            </a:r>
+          </a:p>
+        </p:txBody>
+      </p:sp>
+    </p:spTree>
+  </p:cSld>
+  <p:clrMapOvr>
+    <a:masterClrMapping/>
+  </p:clrMapOvr>
+</p:sld>
+</file>
+
+<file path=ppt/slides/slide18.xml><?xml version="1.0" encoding="utf-8"?>
+<p:sld xmlns:a="http://schemas.openxmlformats.org/drawingml/2006/main" xmlns:p="http://schemas.openxmlformats.org/presentationml/2006/main" xmlns:r="http://schemas.openxmlformats.org/officeDocument/2006/relationships">
+  <p:cSld>
+    <p:bg>
+      <p:bgPr>
+        <a:solidFill>
+          <a:srgbClr val="FFFFFF"/>
+        </a:solidFill>
+        <a:effectLst/>
+      </p:bgPr>
+    </p:bg>
+    <p:spTree>
+      <p:nvGrpSpPr>
+        <p:cNvPr id="1" name=""/>
+        <p:cNvGrpSpPr/>
+        <p:nvPr/>
+      </p:nvGrpSpPr>
+      <p:grpSpPr/>
+      <p:sp>
+        <p:nvSpPr>
+          <p:cNvPr id="2" name="TextBox 1"/>
+          <p:cNvSpPr txBox="1"/>
+          <p:nvPr/>
+        </p:nvSpPr>
+        <p:spPr>
+          <a:xfrm>
+            <a:off x="822960" y="640080"/>
+            <a:ext cx="10545775" cy="1188720"/>
+          </a:xfrm>
+          <a:prstGeom prst="rect">
+            <a:avLst/>
+          </a:prstGeom>
+          <a:noFill/>
+        </p:spPr>
+        <p:txBody>
+          <a:bodyPr wrap="square" anchor="b" lIns="0" rIns="0" tIns="0" bIns="0">
+            <a:spAutoFit/>
+          </a:bodyPr>
+          <a:lstStyle/>
+          <a:p>
+            <a:pPr algn="l">
+              <a:spcBef>
+                <a:spcPts val="0"/>
+              </a:spcBef>
+            </a:pPr>
+            <a:r>
+              <a:rPr sz="3600" b="1" i="0">
+                <a:solidFill>
+                  <a:srgbClr val="000000"/>
+                </a:solidFill>
+                <a:latin typeface="Arial"/>
+              </a:rPr>
+              <a:t>Algorithmacy's targets</a:t>
+            </a:r>
+          </a:p>
+        </p:txBody>
+      </p:sp>
+      <p:sp>
+        <p:nvSpPr>
+          <p:cNvPr id="3" name="TextBox 2"/>
+          <p:cNvSpPr txBox="1"/>
+          <p:nvPr/>
+        </p:nvSpPr>
+        <p:spPr>
+          <a:xfrm>
+            <a:off x="822960" y="2103120"/>
+            <a:ext cx="10545775" cy="3931920"/>
+          </a:xfrm>
+          <a:prstGeom prst="rect">
+            <a:avLst/>
+          </a:prstGeom>
+          <a:noFill/>
+        </p:spPr>
+        <p:txBody>
+          <a:bodyPr wrap="square" anchor="t" lIns="0" rIns="0" tIns="0" bIns="0">
+            <a:spAutoFit/>
+          </a:bodyPr>
+          <a:lstStyle/>
+          <a:p>
+            <a:pPr algn="l">
+              <a:spcBef>
+                <a:spcPts val="0"/>
+              </a:spcBef>
+            </a:pPr>
+            <a:r>
+              <a:rPr sz="2400" b="0" i="0">
+                <a:solidFill>
+                  <a:srgbClr val="000000"/>
+                </a:solidFill>
+                <a:latin typeface="Arial"/>
+              </a:rPr>
+              <a:t>The irreducible triads: a third fixed by two parties jointly, inside one whole with them.</a:t>
+            </a:r>
+          </a:p>
+          <a:p>
+            <a:pPr algn="l">
+              <a:spcBef>
+                <a:spcPts val="1400"/>
+              </a:spcBef>
+            </a:pPr>
+            <a:r>
+              <a:rPr sz="2400" b="0" i="0">
+                <a:solidFill>
+                  <a:srgbClr val="000000"/>
+                </a:solidFill>
+                <a:latin typeface="Arial"/>
+              </a:rPr>
+              <a:t>Older than AI: an arbitrator, a shared tally. Now at scale, through algorithms.</a:t>
+            </a:r>
+          </a:p>
+          <a:p>
+            <a:pPr algn="l">
+              <a:spcBef>
+                <a:spcPts val="1400"/>
+              </a:spcBef>
+            </a:pPr>
+            <a:r>
+              <a:rPr sz="2400" b="0" i="0">
+                <a:solidFill>
+                  <a:srgbClr val="000000"/>
+                </a:solidFill>
+                <a:latin typeface="Arial"/>
+              </a:rPr>
+              <a:t>Literacy handles chains. Algorithmacy handles these.</a:t>
             </a:r>
           </a:p>
           <a:p>
@@ -6374,7 +6801,7 @@
                 </a:solidFill>
                 <a:latin typeface="Arial"/>
               </a:rPr>
-              <a:t>If triads reduce to dyads, algorithmacy names nothing new</a:t>
+              <a:t>Four sensibilities</a:t>
             </a:r>
           </a:p>
         </p:txBody>
@@ -6413,7 +6840,7 @@
                 </a:solidFill>
                 <a:latin typeface="Arial"/>
               </a:rPr>
-              <a:t>Literacy: a medium that answers to one party at a time — a letter, a notice, a manual.</a:t>
+              <a:t>Oracy: understanding commands</a:t>
             </a:r>
           </a:p>
           <a:p>
@@ -6429,7 +6856,7 @@
                 </a:solidFill>
                 <a:latin typeface="Arial"/>
               </a:rPr>
-              <a:t>Algorithmacy: a third that both parties determine, and that acts back on both.</a:t>
+              <a:t>Literacy: navigating a text</a:t>
             </a:r>
           </a:p>
           <a:p>
@@ -6445,7 +6872,23 @@
                 </a:solidFill>
                 <a:latin typeface="Arial"/>
               </a:rPr>
-              <a:t>Do some triads resist reduction, in the sense that matters for coordination?</a:t>
+              <a:t>Numeracy: navigating numbers</a:t>
+            </a:r>
+          </a:p>
+          <a:p>
+            <a:pPr algn="l">
+              <a:spcBef>
+                <a:spcPts val="1400"/>
+              </a:spcBef>
+            </a:pPr>
+            <a:r>
+              <a:rPr sz="2400" b="0" i="0">
+                <a:solidFill>
+                  <a:srgbClr val="000000"/>
+                </a:solidFill>
+                <a:latin typeface="Arial"/>
+              </a:rPr>
+              <a:t>Algorithmacy: navigating triadic coordination</a:t>
             </a:r>
           </a:p>
         </p:txBody>
@@ -6510,7 +6953,7 @@
                 </a:solidFill>
                 <a:latin typeface="Arial"/>
               </a:rPr>
-              <a:t>Peirce states both clauses in 1870</a:t>
+              <a:t>The ontological question</a:t>
             </a:r>
           </a:p>
         </p:txBody>
@@ -6543,13 +6986,13 @@
               </a:spcBef>
             </a:pPr>
             <a:r>
-              <a:rPr sz="2400" b="0" i="1">
+              <a:rPr sz="2400" b="0" i="0">
                 <a:solidFill>
                   <a:srgbClr val="000000"/>
                 </a:solidFill>
                 <a:latin typeface="Arial"/>
               </a:rPr>
-              <a:t>nor can a conjugative term be reduced to any combination of simple relatives</a:t>
+              <a:t>Do triads reduce to dyads?</a:t>
             </a:r>
           </a:p>
           <a:p>
@@ -6559,13 +7002,13 @@
               </a:spcBef>
             </a:pPr>
             <a:r>
-              <a:rPr sz="1800" b="0" i="0">
+              <a:rPr sz="2400" b="0" i="0">
                 <a:solidFill>
                   <a:srgbClr val="000000"/>
                 </a:solidFill>
                 <a:latin typeface="Arial"/>
               </a:rPr>
-              <a:t>— Peirce, 1870 (CP 3.144)</a:t>
+              <a:t>If they do, algorithmacy is not a thing.</a:t>
             </a:r>
           </a:p>
           <a:p>
@@ -6581,7 +7024,7 @@
                 </a:solidFill>
                 <a:latin typeface="Arial"/>
               </a:rPr>
-              <a:t>Every relation among four or more: built from relations among three.</a:t>
+              <a:t>If some do not, algorithmacy has a target.</a:t>
             </a:r>
           </a:p>
           <a:p>
@@ -6597,7 +7040,7 @@
                 </a:solidFill>
                 <a:latin typeface="Arial"/>
               </a:rPr>
-              <a:t>Asserted, not yet argued.</a:t>
+              <a:t>Peirce · Quine · the logicians · our argument</a:t>
             </a:r>
           </a:p>
         </p:txBody>
@@ -6662,7 +7105,7 @@
                 </a:solidFill>
                 <a:latin typeface="Arial"/>
               </a:rPr>
-              <a:t>The argument is arithmetic</a:t>
+              <a:t>Peirce: three categories</a:t>
             </a:r>
           </a:p>
         </p:txBody>
@@ -6695,29 +7138,13 @@
               </a:spcBef>
             </a:pPr>
             <a:r>
-              <a:rPr sz="2200" b="0" i="0">
-                <a:solidFill>
-                  <a:srgbClr val="000000"/>
-                </a:solidFill>
-                <a:latin typeface="Courier New"/>
-              </a:rPr>
-              <a:t>2 + 2 − 2 = 2</a:t>
-            </a:r>
-          </a:p>
-          <a:p>
-            <a:pPr algn="l">
-              <a:spcBef>
-                <a:spcPts val="0"/>
-              </a:spcBef>
-            </a:pPr>
-            <a:r>
-              <a:rPr sz="2200" b="0" i="0">
-                <a:solidFill>
-                  <a:srgbClr val="000000"/>
-                </a:solidFill>
-                <a:latin typeface="Courier New"/>
-              </a:rPr>
-              <a:t>3 + 3 − 2 = 4</a:t>
+              <a:rPr sz="2400" b="0" i="0">
+                <a:solidFill>
+                  <a:srgbClr val="000000"/>
+                </a:solidFill>
+                <a:latin typeface="Arial"/>
+              </a:rPr>
+              <a:t>Firstness: "such as it is regardless of aught else" (CP 1.25)</a:t>
             </a:r>
           </a:p>
           <a:p>
@@ -6727,13 +7154,13 @@
               </a:spcBef>
             </a:pPr>
             <a:r>
-              <a:rPr sz="2400" b="0" i="1">
+              <a:rPr sz="2400" b="0" i="0">
                 <a:solidFill>
                   <a:srgbClr val="000000"/>
                 </a:solidFill>
                 <a:latin typeface="Arial"/>
               </a:rPr>
-              <a:t>artiads, or even-ads, can produce only artiads</a:t>
+              <a:t>Secondness: "cause and effect are two" (CP 1.325)</a:t>
             </a:r>
           </a:p>
           <a:p>
@@ -6743,45 +7170,13 @@
               </a:spcBef>
             </a:pPr>
             <a:r>
-              <a:rPr sz="1800" b="0" i="0">
+              <a:rPr sz="2400" b="0" i="0">
                 <a:solidFill>
                   <a:srgbClr val="000000"/>
                 </a:solidFill>
                 <a:latin typeface="Arial"/>
               </a:rPr>
-              <a:t>— Peirce, The Monist, 1897</a:t>
-            </a:r>
-          </a:p>
-          <a:p>
-            <a:pPr algn="l">
-              <a:spcBef>
-                <a:spcPts val="1400"/>
-              </a:spcBef>
-            </a:pPr>
-            <a:r>
-              <a:rPr sz="2400" b="0" i="1">
-                <a:solidFill>
-                  <a:srgbClr val="000000"/>
-                </a:solidFill>
-                <a:latin typeface="Arial"/>
-              </a:rPr>
-              <a:t>no number of straight roads put end on end will give more than two termini</a:t>
-            </a:r>
-          </a:p>
-          <a:p>
-            <a:pPr algn="l">
-              <a:spcBef>
-                <a:spcPts val="1400"/>
-              </a:spcBef>
-            </a:pPr>
-            <a:r>
-              <a:rPr sz="1800" b="0" i="0">
-                <a:solidFill>
-                  <a:srgbClr val="000000"/>
-                </a:solidFill>
-                <a:latin typeface="Arial"/>
-              </a:rPr>
-              <a:t>— Peirce, CP 1.363</a:t>
+              <a:t>Thirdness: "the medium or connecting bond between the absolute first and last" (CP 1.337)</a:t>
             </a:r>
           </a:p>
         </p:txBody>
@@ -6846,7 +7241,7 @@
                 </a:solidFill>
                 <a:latin typeface="Arial"/>
               </a:rPr>
-              <a:t>Everything turns on the junction</a:t>
+              <a:t>Thirdness is its own kind of being</a:t>
             </a:r>
           </a:p>
         </p:txBody>
@@ -6879,45 +7274,45 @@
               </a:spcBef>
             </a:pPr>
             <a:r>
+              <a:rPr sz="2400" b="0" i="1">
+                <a:solidFill>
+                  <a:srgbClr val="000000"/>
+                </a:solidFill>
+                <a:latin typeface="Arial"/>
+              </a:rPr>
+              <a:t>its three members are bound together by it in a way that does not consist in any complexus of dyadic relations</a:t>
+            </a:r>
+          </a:p>
+          <a:p>
+            <a:pPr algn="l">
+              <a:spcBef>
+                <a:spcPts val="1400"/>
+              </a:spcBef>
+            </a:pPr>
+            <a:r>
+              <a:rPr sz="1800" b="0" i="0">
+                <a:solidFill>
+                  <a:srgbClr val="000000"/>
+                </a:solidFill>
+                <a:latin typeface="Arial"/>
+              </a:rPr>
+              <a:t>— Peirce, CP 2.274</a:t>
+            </a:r>
+          </a:p>
+          <a:p>
+            <a:pPr algn="l">
+              <a:spcBef>
+                <a:spcPts val="1400"/>
+              </a:spcBef>
+            </a:pPr>
+            <a:r>
               <a:rPr sz="2400" b="0" i="0">
                 <a:solidFill>
                   <a:srgbClr val="000000"/>
                 </a:solidFill>
                 <a:latin typeface="Arial"/>
               </a:rPr>
-              <a:t>Kempe, 1886: a triad = a unit plus three links. No relation among three.</a:t>
-            </a:r>
-          </a:p>
-          <a:p>
-            <a:pPr algn="l">
-              <a:spcBef>
-                <a:spcPts val="1400"/>
-              </a:spcBef>
-            </a:pPr>
-            <a:r>
-              <a:rPr sz="2400" b="0" i="0">
-                <a:solidFill>
-                  <a:srgbClr val="000000"/>
-                </a:solidFill>
-                <a:latin typeface="Arial"/>
-              </a:rPr>
-              <a:t>Peirce, 1892: mediation is still there, in "the attachment of lines to spots"</a:t>
-            </a:r>
-          </a:p>
-          <a:p>
-            <a:pPr algn="l">
-              <a:spcBef>
-                <a:spcPts val="1400"/>
-              </a:spcBef>
-            </a:pPr>
-            <a:r>
-              <a:rPr sz="2400" b="0" i="0">
-                <a:solidFill>
-                  <a:srgbClr val="000000"/>
-                </a:solidFill>
-                <a:latin typeface="Arial"/>
-              </a:rPr>
-              <a:t>Peirce, 1897: "every node of bonds is equivalent to a relative"</a:t>
+              <a:t>The reduction thesis, first stated without proof in 1870: no triad from dyads; every higher relation from triads.</a:t>
             </a:r>
           </a:p>
         </p:txBody>
@@ -6982,7 +7377,7 @@
                 </a:solidFill>
                 <a:latin typeface="Arial"/>
               </a:rPr>
-              <a:t>Giving is one fact, not two events</a:t>
+              <a:t>Argument 1: giving is not throwing</a:t>
             </a:r>
           </a:p>
         </p:txBody>
@@ -7015,13 +7410,13 @@
               </a:spcBef>
             </a:pPr>
             <a:r>
-              <a:rPr sz="2400" b="0" i="0">
+              <a:rPr sz="2400" b="0" i="1">
                 <a:solidFill>
                   <a:srgbClr val="000000"/>
                 </a:solidFill>
                 <a:latin typeface="Arial"/>
               </a:rPr>
-              <a:t>Genuine: "A's making C the possessor according to Law" (CP 8.331)</a:t>
+              <a:t>A gives B to C. This does not consist in A's throwing B away and its accidentally hitting C</a:t>
             </a:r>
           </a:p>
           <a:p>
@@ -7031,13 +7426,29 @@
               </a:spcBef>
             </a:pPr>
             <a:r>
-              <a:rPr sz="2400" b="0" i="0">
+              <a:rPr sz="2400" b="0" i="1">
                 <a:solidFill>
                   <a:srgbClr val="000000"/>
                 </a:solidFill>
                 <a:latin typeface="Arial"/>
               </a:rPr>
-              <a:t>Imitation: A throws B away and it happens to hit C — "merely one dyadic relation followed by another" (CP 1.345)</a:t>
+              <a:t>… merely one dyadic relation followed by another</a:t>
+            </a:r>
+          </a:p>
+          <a:p>
+            <a:pPr algn="l">
+              <a:spcBef>
+                <a:spcPts val="1400"/>
+              </a:spcBef>
+            </a:pPr>
+            <a:r>
+              <a:rPr sz="1800" b="0" i="0">
+                <a:solidFill>
+                  <a:srgbClr val="000000"/>
+                </a:solidFill>
+                <a:latin typeface="Arial"/>
+              </a:rPr>
+              <a:t>— Peirce, CP 1.345</a:t>
             </a:r>
           </a:p>
         </p:txBody>
@@ -7102,7 +7513,7 @@
                 </a:solidFill>
                 <a:latin typeface="Arial"/>
               </a:rPr>
-              <a:t>Simmel: the third opens a second route</a:t>
+              <a:t>Argument 2: pairs only make pairs</a:t>
             </a:r>
           </a:p>
         </p:txBody>
@@ -7135,13 +7546,13 @@
               </a:spcBef>
             </a:pPr>
             <a:r>
-              <a:rPr sz="2400" b="0" i="0">
+              <a:rPr sz="2400" b="0" i="1">
                 <a:solidFill>
                   <a:srgbClr val="000000"/>
                 </a:solidFill>
                 <a:latin typeface="Arial"/>
               </a:rPr>
-              <a:t>Two: when one refuses, "only the other remains, without any superindividual energy"</a:t>
+              <a:t>you can never by such joining make a graph with three tails</a:t>
             </a:r>
           </a:p>
           <a:p>
@@ -7151,13 +7562,13 @@
               </a:spcBef>
             </a:pPr>
             <a:r>
-              <a:rPr sz="2400" b="0" i="0">
+              <a:rPr sz="1800" b="0" i="0">
                 <a:solidFill>
                   <a:srgbClr val="000000"/>
                 </a:solidFill>
                 <a:latin typeface="Arial"/>
               </a:rPr>
-              <a:t>Three: "each pair of elements are now joined by a broken line"</a:t>
+              <a:t>— Peirce, CP 1.346</a:t>
             </a:r>
           </a:p>
           <a:p>
@@ -7173,7 +7584,7 @@
                 </a:solidFill>
                 <a:latin typeface="Courier New"/>
               </a:rPr>
-              <a:t>A ——— B   directly</a:t>
+              <a:t>2 + 2 − 2 = 2</a:t>
             </a:r>
           </a:p>
           <a:p>
@@ -7189,7 +7600,7 @@
                 </a:solidFill>
                 <a:latin typeface="Courier New"/>
               </a:rPr>
-              <a:t>A — C — B also, for every pair</a:t>
+              <a:t>3 + 3 − 2 = 4</a:t>
             </a:r>
           </a:p>
           <a:p>
@@ -7199,13 +7610,29 @@
               </a:spcBef>
             </a:pPr>
             <a:r>
+              <a:rPr sz="2400" b="0" i="1">
+                <a:solidFill>
+                  <a:srgbClr val="000000"/>
+                </a:solidFill>
+                <a:latin typeface="Arial"/>
+              </a:rPr>
+              <a:t>artiads, or even-ads, can produce only artiads</a:t>
+            </a:r>
+          </a:p>
+          <a:p>
+            <a:pPr algn="l">
+              <a:spcBef>
+                <a:spcPts val="1400"/>
+              </a:spcBef>
+            </a:pPr>
+            <a:r>
               <a:rPr sz="1800" b="0" i="0">
                 <a:solidFill>
                   <a:srgbClr val="000000"/>
                 </a:solidFill>
                 <a:latin typeface="Arial"/>
               </a:rPr>
-              <a:t>— Simmel, 1902 (trans. Small)</a:t>
+              <a:t>— Peirce, 1897</a:t>
             </a:r>
           </a:p>
         </p:txBody>
@@ -7270,7 +7697,7 @@
                 </a:solidFill>
                 <a:latin typeface="Arial"/>
               </a:rPr>
-              <a:t>Three parties are not yet a triad</a:t>
+              <a:t>Argument 3: the junction is a triad</a:t>
             </a:r>
           </a:p>
         </p:txBody>
@@ -7303,13 +7730,45 @@
               </a:spcBef>
             </a:pPr>
             <a:r>
+              <a:rPr sz="2400" b="0" i="1">
+                <a:solidFill>
+                  <a:srgbClr val="000000"/>
+                </a:solidFill>
+                <a:latin typeface="Arial"/>
+              </a:rPr>
+              <a:t>every node of bonds is equivalent to a relative</a:t>
+            </a:r>
+          </a:p>
+          <a:p>
+            <a:pPr algn="l">
+              <a:spcBef>
+                <a:spcPts val="1400"/>
+              </a:spcBef>
+            </a:pPr>
+            <a:r>
+              <a:rPr sz="1800" b="0" i="0">
+                <a:solidFill>
+                  <a:srgbClr val="000000"/>
+                </a:solidFill>
+                <a:latin typeface="Arial"/>
+              </a:rPr>
+              <a:t>— Peirce, 1897</a:t>
+            </a:r>
+          </a:p>
+          <a:p>
+            <a:pPr algn="l">
+              <a:spcBef>
+                <a:spcPts val="1400"/>
+              </a:spcBef>
+            </a:pPr>
+            <a:r>
               <a:rPr sz="2400" b="0" i="0">
                 <a:solidFill>
                   <a:srgbClr val="000000"/>
                 </a:solidFill>
                 <a:latin typeface="Arial"/>
               </a:rPr>
-              <a:t>A third too distant from the other two leaves "configurations of twos"</a:t>
+              <a:t>Kempe, 1886: redraw a triad as a unit with three links.</a:t>
             </a:r>
           </a:p>
           <a:p>
@@ -7319,29 +7778,13 @@
               </a:spcBef>
             </a:pPr>
             <a:r>
-              <a:rPr sz="1800" b="0" i="0">
+              <a:rPr sz="2400" b="0" i="0">
                 <a:solidFill>
                   <a:srgbClr val="000000"/>
                 </a:solidFill>
                 <a:latin typeface="Arial"/>
               </a:rPr>
-              <a:t>— Simmel, 1902 (Zweierkonfigurationen, 1908)</a:t>
-            </a:r>
-          </a:p>
-          <a:p>
-            <a:pPr algn="l">
-              <a:spcBef>
-                <a:spcPts val="1400"/>
-              </a:spcBef>
-            </a:pPr>
-            <a:r>
-              <a:rPr sz="2400" b="0" i="0">
-                <a:solidFill>
-                  <a:srgbClr val="000000"/>
-                </a:solidFill>
-                <a:latin typeface="Arial"/>
-              </a:rPr>
-              <a:t>Three is necessary. It is not sufficient.</a:t>
+              <a:t>Peirce, 1892: "a formidable objection" — yet the mediation is still there, in "the attachment of lines to spots"</a:t>
             </a:r>
           </a:p>
         </p:txBody>
@@ -7406,7 +7849,7 @@
                 </a:solidFill>
                 <a:latin typeface="Arial"/>
               </a:rPr>
-              <a:t>Dyadic predicates suffice — with new objects</a:t>
+              <a:t>Simmel: the third changes the group</a:t>
             </a:r>
           </a:p>
         </p:txBody>
@@ -7445,7 +7888,7 @@
                 </a:solidFill>
                 <a:latin typeface="Arial"/>
               </a:rPr>
-              <a:t>Löwenheim 1915: binary relatives suffice, over a domain of pairs</a:t>
+              <a:t>Two: when one refuses, "only the other remains"</a:t>
             </a:r>
           </a:p>
           <a:p>
@@ -7461,7 +7904,7 @@
                 </a:solidFill>
                 <a:latin typeface="Arial"/>
               </a:rPr>
-              <a:t>Kalmár 1936: one binary relation, for deciding satisfiability</a:t>
+              <a:t>Three: "each pair of elements are now joined by a broken line"</a:t>
             </a:r>
           </a:p>
           <a:p>
@@ -7477,7 +7920,7 @@
                 </a:solidFill>
                 <a:latin typeface="Arial"/>
               </a:rPr>
-              <a:t>Quine 1954: any first-order theory, with "only one predicate letter, and it a dyadic one"</a:t>
+              <a:t>But a distant third leaves "configurations of twos"</a:t>
             </a:r>
           </a:p>
           <a:p>
@@ -7487,13 +7930,13 @@
               </a:spcBef>
             </a:pPr>
             <a:r>
-              <a:rPr sz="2400" b="0" i="0">
+              <a:rPr sz="1800" b="0" i="0">
                 <a:solidFill>
                   <a:srgbClr val="000000"/>
                 </a:solidFill>
                 <a:latin typeface="Arial"/>
               </a:rPr>
-              <a:t>None of them aimed it at Peirce.</a:t>
+              <a:t>— Simmel, 1902</a:t>
             </a:r>
           </a:p>
         </p:txBody>

--- a/submissions/triadic_reduction/talk/deck.pptx
+++ b/submissions/triadic_reduction/talk/deck.pptx
@@ -21,8 +21,6 @@
     <p:sldId id="269" r:id="rId21"/>
     <p:sldId id="270" r:id="rId22"/>
     <p:sldId id="271" r:id="rId23"/>
-    <p:sldId id="272" r:id="rId24"/>
-    <p:sldId id="273" r:id="rId25"/>
   </p:sldIdLst>
   <p:sldSz cx="12191695" cy="6858000" type="screen4x3"/>
   <p:notesSz cx="6858000" cy="9144000"/>
@@ -519,12 +517,23 @@
           <a:lstStyle/>
           <a:p>
             <a:r>
-              <a:t>Thank you. I want to ask an old question from logic, because I think its answer decides whether</a:t>
-            </a:r>
-          </a:p>
-          <a:p>
-            <a:r>
-              <a:t>algorithmacy names anything at all.</a:t>
+              <a:t>**Technical Presentation**</a:t>
+            </a:r>
+          </a:p>
+          <a:p>
+            <a:r>
+              <a:t>This presentation investigates a foundational problem at the intersection of mathematical logic, universal algebra, and causal dynamical systems: whether triadic relations possess ontological autonomy or factorize into compositions of dyadic relations. The resolution of this question determines whether *algorithmacy* constitutes an independent communicative and cognitive competency, or whether it collapses into an extensional variant of conventional literacy.</a:t>
+            </a:r>
+          </a:p>
+          <a:p/>
+          <a:p>
+            <a:r>
+              <a:t>**Layman's Explanation**</a:t>
+            </a:r>
+          </a:p>
+          <a:p>
+            <a:r>
+              <a:t>When you interact with another person through an algorithm—such as hailing a ride, trading on a platform, or scrolling a curated social feed—is that algorithm merely an inert digital wire connecting two people, or is it an active third party in the room? If it is just a wire, you only need standard reading skills to navigate it. But if the three-way interaction cannot be sliced into two separate two-way conversations, we are dealing with a completely new medium that requires a distinct human capability.</a:t>
             </a:r>
           </a:p>
         </p:txBody>
@@ -594,33 +603,47 @@
           <a:lstStyle/>
           <a:p>
             <a:r>
-              <a:t>In 1954 W. V. Quine proved a striking result. Take any theory written in ordinary first-order logic, with</a:t>
-            </a:r>
-          </a:p>
-          <a:p>
-            <a:r>
-              <a:t>as many relations of as many places as you like. It can be rewritten as a theory in which "there is only</a:t>
-            </a:r>
-          </a:p>
-          <a:p>
-            <a:r>
-              <a:t>one predicate letter, and it a dyadic one". One two-place relation is enough for everything.</a:t>
+              <a:t>**Technical Presentation**</a:t>
+            </a:r>
+          </a:p>
+          <a:p>
+            <a:r>
+              <a:t>Quine's proof led twentieth-century logicians to conclude that Peirce's Reduction Thesis was mistaken. If any triadic relation can be represented as dyadic membership over a universe of pairs, Thirdness is not an autonomous category of being, but a syntactic convenience eliminated by set-theoretic packaging. If that conclusion holds, triadic interaction is an illusion: coordinating through an algorithm is just two chained dyadic steps, collapsing algorithmacy into conventional literacy.</a:t>
             </a:r>
           </a:p>
           <a:p/>
           <a:p>
             <a:r>
-              <a:t>His tools were "a fragment of set theory" and the ordered pair: a way to package two things as one thing.</a:t>
-            </a:r>
-          </a:p>
-          <a:p>
-            <a:r>
-              <a:t>And one more move, which matters: the new theory's universe is enlarged to contain all those pairs.</a:t>
-            </a:r>
-          </a:p>
-          <a:p>
-            <a:r>
-              <a:t>Leopold Löwenheim had done something similar with pairs in 1915.</a:t>
+              <a:t>Universal algebra resolves this conflict by demonstrating that the outcome depends strictly on the constructive operations permitted:</a:t>
+            </a:r>
+          </a:p>
+          <a:p/>
+          <a:p>
+            <a:r>
+              <a:t>* Hans Herzberger (1981) proved that Peirce’s thesis holds as an exact theorem for valency-regular constructions under relative products, while confirming that under standard extensional definability over inflated domains, the thesis collapses.</a:t>
+            </a:r>
+          </a:p>
+          <a:p/>
+          <a:p>
+            <a:r>
+              <a:t>* Dau and Hereth Correia (2006) showed that standard relational algebra generates $=_3$ only by covertly smuggling it into variable identification operations ($\Delta$).</a:t>
+            </a:r>
+          </a:p>
+          <a:p/>
+          <a:p>
+            <a:r>
+              <a:t>**Layman's Explanation**</a:t>
+            </a:r>
+          </a:p>
+          <a:p>
+            <a:r>
+              <a:t>If Quine is right, "three-way coordination" does not exist in nature—it is just lazy grammar that computer code can dismantle into pairs. And if that is true, you don't need any special skill to deal with algorithms; interacting with an AI or a platform is no different from reading two text messages one after the other.</a:t>
+            </a:r>
+          </a:p>
+          <a:p/>
+          <a:p>
+            <a:r>
+              <a:t>Logicians eventually realized both thinkers were right, but under different rules. If you are building a real machine out of a fixed set of physical parts, Peirce is completely right: you cannot build a three-way switch out of two-way switches. Quine only "won" on paper by assuming you have access to an infinite warehouse of magic envelopes to stuff things into.</a:t>
             </a:r>
           </a:p>
         </p:txBody>
@@ -690,28 +713,41 @@
           <a:lstStyle/>
           <a:p>
             <a:r>
-              <a:t>Here is how it works. Take the relation "A gives B to C". First package B and C into a pair. Then</a:t>
-            </a:r>
-          </a:p>
-          <a:p>
-            <a:r>
-              <a:t>package A with that pair, and tag the result with which relation it belongs to. Now "A, B, C" is one new</a:t>
-            </a:r>
-          </a:p>
-          <a:p>
-            <a:r>
-              <a:t>object in the enlarged universe. And "A gives B to C" becomes a single two-place fact about that object.</a:t>
+              <a:t>**Technical Presentation**</a:t>
+            </a:r>
+          </a:p>
+          <a:p>
+            <a:r>
+              <a:t>Relational clone theory formalizes the precise mathematical barrier. Hereth Correia and Pöschel (2006) proved that for any base domain $\vert{}A\vert{} \ge 2$, the clone generated by monadic and dyadic relations strictly excludes the **teridentity relation**:</a:t>
             </a:r>
           </a:p>
           <a:p/>
           <a:p>
             <a:r>
-              <a:t>Do that for every relation, of any number of places, and every relation in the theory has become</a:t>
-            </a:r>
-          </a:p>
-          <a:p>
-            <a:r>
-              <a:t>two-place. The triad has disappeared into a tuple.</a:t>
+              <a:t>$$=_3 \; \equiv \{(x, x, x) \mid x \in A\}$$</a:t>
+            </a:r>
+          </a:p>
+          <a:p/>
+          <a:p>
+            <a:r>
+              <a:t>Koshkin (2024) proved that on infinite domains, non-degenerate relations have a strict lower bound of ternarity ($\text{ter}(R) \ge n - 2$).</a:t>
+            </a:r>
+          </a:p>
+          <a:p/>
+          <a:p>
+            <a:r>
+              <a:t>Robert Burch concluded in the *Stanford Encyclopedia of Philosophy* that both Peirce and Quine are correct relative to their premises: the outcome depends on the allowable constructive resources. Sergiy Koshkin showed that once the ternary junction is acknowledged as an explicit relation, Peirce’s claim is mathematically validated. However, static algebraic logic evaluates relations extensionally as frozen sets of tuples. It cannot evaluate real-time coordination within dynamic, running systems. To differentiate genuine triadic coordination from disguised dyadic transmission, we must employ causal information theory.</a:t>
+            </a:r>
+          </a:p>
+          <a:p/>
+          <a:p>
+            <a:r>
+              <a:t>**Layman's Explanation**</a:t>
+            </a:r>
+          </a:p>
+          <a:p>
+            <a:r>
+              <a:t>On paper, if you allow infinite math tricks, Quine works; in physical geometry, Peirce works. But algorithms and humans do not live on paper as frozen database tables. We interact in real time with running software. We don't need another chalkboard proof; we need a physical test to determine whether a running computer system is genuinely triadic or just pretending to be one.</a:t>
             </a:r>
           </a:p>
         </p:txBody>
@@ -781,28 +817,23 @@
           <a:lstStyle/>
           <a:p>
             <a:r>
-              <a:t>To be exact about the history: Quine never named Peirce in this paper, and never drew the conclusion</a:t>
-            </a:r>
-          </a:p>
-          <a:p>
-            <a:r>
-              <a:t>himself. Others did. Robert Burch reports that after Quine's proof, many doubted Peirce's thesis. And you</a:t>
-            </a:r>
-          </a:p>
-          <a:p>
-            <a:r>
-              <a:t>can see why. If any triad can be rewritten as pairs, then Thirdness is not a kind of being. It is a</a:t>
-            </a:r>
-          </a:p>
-          <a:p>
-            <a:r>
-              <a:t>feature of our notation, which set theory can remove.</a:t>
+              <a:t>**Technical Presentation**</a:t>
+            </a:r>
+          </a:p>
+          <a:p>
+            <a:r>
+              <a:t>Partial Information Decomposition, due to Williams and Beer (2010), splits the information two sources carry about a target into four parts: what both carry (redundancy), what each carries alone (two unique terms), and what only the pair carries together (synergy). Exclusive-or is the canonical case. With $Y = X_1 \oplus X_2$, neither input alone tells you anything about $Y$, yet the two together fix it, and all of the information is synergy: one bit.</a:t>
             </a:r>
           </a:p>
           <a:p/>
           <a:p>
             <a:r>
-              <a:t>And if that is right, then algorithmacy is not a thing. So who is right?</a:t>
+              <a:t>**Layman's Explanation**</a:t>
+            </a:r>
+          </a:p>
+          <a:p>
+            <a:r>
+              <a:t>Take two light switches wired so the lamp is on when exactly one of them is up. Look at either switch alone and you learn nothing about the lamp. Look at both and you know it for certain. That kind of information lives only in the pair, never in either part.</a:t>
             </a:r>
           </a:p>
         </p:txBody>
@@ -872,32 +903,35 @@
           <a:lstStyle/>
           <a:p>
             <a:r>
-              <a:t>The logicians who came after both of them made the question precise, and the answer turned on the</a:t>
-            </a:r>
-          </a:p>
-          <a:p>
-            <a:r>
-              <a:t>operations you allow. Hans Herzberger showed in 1981 that Peirce's thesis holds as a theorem for</a:t>
-            </a:r>
-          </a:p>
-          <a:p>
-            <a:r>
-              <a:t>constructions that obey Peirce's valency rule, the tail-counting of slide seven, and that can form relative</a:t>
-            </a:r>
-          </a:p>
-          <a:p>
-            <a:r>
-              <a:t>products. He also showed the other side: under standard notions of definability, "the reduction thesis</a:t>
-            </a:r>
-          </a:p>
-          <a:p>
-            <a:r>
-              <a:t>collapses". Same author, same paper, two theorems. Robert Burch then built a whole Peircean algebra in 1991</a:t>
-            </a:r>
-          </a:p>
-          <a:p>
-            <a:r>
-              <a:t>and proved the thesis inside it, under a restriction on how relations may be combined.</a:t>
+              <a:t>**Technical Presentation**</a:t>
+            </a:r>
+          </a:p>
+          <a:p>
+            <a:r>
+              <a:t>Integrated Information Theory (IIT 4.0) provides an operational test for dynamic irreducibility. IIT evaluates a system’s Transition Probability Matrix (TPM) across all bipartitions to determine the Minimum Information Partition (MIP):</a:t>
+            </a:r>
+          </a:p>
+          <a:p/>
+          <a:p>
+            <a:r>
+              <a:t>$$\Phi = \text{ID}\left(p \parallel p^{P_{\text{MIP}}}\right)$$</a:t>
+            </a:r>
+          </a:p>
+          <a:p/>
+          <a:p>
+            <a:r>
+              <a:t>If $\Phi = 0$, the system factorizes cleanly into independent components. If $\Phi &gt; 0$, causal interactions are irreducible.</a:t>
+            </a:r>
+          </a:p>
+          <a:p/>
+          <a:p>
+            <a:r>
+              <a:t>**Layman's Explanation**</a:t>
+            </a:r>
+          </a:p>
+          <a:p>
+            <a:r>
+              <a:t>We found our test in neuroscience: Integrated Information Theory. It asks a simple question: "If you take a pair of scissors and cut this system along its weakest seam, how much information is lost?" If cutting it loses nothing ($\Phi = 0$), it was just independent wires. If cutting it destroys the system's behavior ($\Phi &gt; 0$), it is an indivisible whole.</a:t>
             </a:r>
           </a:p>
         </p:txBody>
@@ -967,43 +1001,75 @@
           <a:lstStyle/>
           <a:p>
             <a:r>
-              <a:t>Later work located the difference exactly. Joachim Hereth Correia and Reinhard Pöschel proved in 2006</a:t>
-            </a:r>
-          </a:p>
-          <a:p>
-            <a:r>
-              <a:t>that in Peirce's own algebra, on any domain of two or more things, one- and two-place relations never build</a:t>
-            </a:r>
-          </a:p>
-          <a:p>
-            <a:r>
-              <a:t>the three-way identity: the relation that says three things are one and the same. Frithjof Dau and Hereth</a:t>
-            </a:r>
-          </a:p>
-          <a:p>
-            <a:r>
-              <a:t>Correia pointed out that ordinary relational algebra can build it, but only because it is "hidden in the</a:t>
-            </a:r>
-          </a:p>
-          <a:p>
-            <a:r>
-              <a:t>operations", in the step that lets one variable stand in three places. And Sergiy Koshkin has shown that</a:t>
-            </a:r>
-          </a:p>
-          <a:p>
-            <a:r>
-              <a:t>when a variable may be shared freely, three-place relations do reduce to two-place ones on any finite</a:t>
-            </a:r>
-          </a:p>
-          <a:p>
-            <a:r>
-              <a:t>domain of three or more values, while on two-valued domains some do not.</a:t>
+              <a:t>**Technical Presentation**</a:t>
+            </a:r>
+          </a:p>
+          <a:p>
+            <a:r>
+              <a:t>An **irreducible triad** is a mechanism jointly determined by two other elements, with all three belonging to an integrated complex ($\Phi &gt; 0$). In our minimal control circuit ($M' = A \land B$; $A' = M$; $B' = M$), IIT 4.0 yields $\Phi = 2.0$, with all three nodes in the core complex. Under Partial Information Decomposition (PID), this configuration exhibits pure causal synergy ($\text{Syn} &gt; 0$).</a:t>
             </a:r>
           </a:p>
           <a:p/>
           <a:p>
             <a:r>
-              <a:t>Notice where every one of these results lands: on Peirce's third argument, the junction.</a:t>
+              <a:t>Applying this causal test across dynamical architectures resolves the structural taxonomy:</a:t>
+            </a:r>
+          </a:p>
+          <a:p/>
+          <a:p>
+            <a:r>
+              <a:t>1. **Dyadic Wirings Conserve Dyads:** Testing 89 discrete single-input copy architectures confirms Peirce's valency rule: pairwise connections produce only pairwise distinctions, generating zero triadic mechanisms.</a:t>
+            </a:r>
+          </a:p>
+          <a:p/>
+          <a:p>
+            <a:r>
+              <a:t>2. **Wholeness and Triadicity Are Orthogonal:** Testing 30 four-element networks driven by two-input mechanisms proves that system-level integration and local triadic irreducibility do not always coincide:</a:t>
+            </a:r>
+          </a:p>
+          <a:p/>
+          <a:p>
+            <a:r>
+              <a:t>* *A whole without a triad:* A cyclic ring of pairwise copy elements achieves $\Phi = 2.0$ purely via feedback return, containing zero triadic mechanisms.</a:t>
+            </a:r>
+          </a:p>
+          <a:p/>
+          <a:p>
+            <a:r>
+              <a:t>* *A triad without a whole:* In 11 of the 30 networks, an element is jointly determined by two others, yet the system factorizes globally across its MIP ($\Phi = 0$).</a:t>
+            </a:r>
+          </a:p>
+          <a:p/>
+          <a:p>
+            <a:r>
+              <a:t>* *A triad integrated within a whole:* In 5 of the 30 networks—matching our control circuit and Peirce's model of genuine giving—the triadic mechanism resides inside an irreducible complex ($\Phi &gt; 0$).</a:t>
+            </a:r>
+          </a:p>
+          <a:p/>
+          <a:p>
+            <a:r>
+              <a:t>**Layman's Explanation**</a:t>
+            </a:r>
+          </a:p>
+          <a:p>
+            <a:r>
+              <a:t>In our circuit—where a mediator $M$ only triggers when both $A$ and $B$ act together, and both $A$ and $B$ listen to $M$—cutting the system destroys its function completely ($\Phi = 2.0$). It is a true, irreducible triad.</a:t>
+            </a:r>
+          </a:p>
+          <a:p/>
+          <a:p>
+            <a:r>
+              <a:t>We tested this across dozens of computational network designs and discovered two critical facts:</a:t>
+            </a:r>
+          </a:p>
+          <a:p>
+            <a:r>
+              <a:t>First, connecting single-input wires end-to-end never creates a three-way decision—pairs only make pairs.</a:t>
+            </a:r>
+          </a:p>
+          <a:p>
+            <a:r>
+              <a:t>Second, being a "unified system" is not the same as being a "triad". A circle of people whispering a rumor around a ring is a unified loop ($\Phi = 2.0$), but every step is still just a two-person exchange! Genuine triadicity requires an active coordinator that combines two inputs simultaneously inside that loop—which occurred in only 5 of our 30 test networks.</a:t>
             </a:r>
           </a:p>
         </p:txBody>
@@ -1073,48 +1139,35 @@
           <a:lstStyle/>
           <a:p>
             <a:r>
-              <a:t>So what is the verdict? Burch, writing in the Stanford Encyclopedia, puts it this way: "both Peirce and</a:t>
-            </a:r>
-          </a:p>
-          <a:p>
-            <a:r>
-              <a:t>Quine were correct: the issue entirely depends on exactly what constructive resources are to be allowed".</a:t>
-            </a:r>
-          </a:p>
-          <a:p>
-            <a:r>
-              <a:t>Koshkin is less comfortable with a truce: "It cannot simply be that Peirce and Quine are both right." His</a:t>
-            </a:r>
-          </a:p>
-          <a:p>
-            <a:r>
-              <a:t>view is that once you count each three-way junction as a triad, Peirce comes out right.</a:t>
+              <a:t>**Technical Presentation**</a:t>
+            </a:r>
+          </a:p>
+          <a:p>
+            <a:r>
+              <a:t>Triads do not universally reduce to dyads. A genuine triadic system is one where an active third party is jointly determined by two participants and dynamically couples them within an integrated cause-effect structure ($\Phi &gt; 0$). These non-factorizable systems are the specific operational targets of algorithmacy.</a:t>
             </a:r>
           </a:p>
           <a:p/>
           <a:p>
             <a:r>
-              <a:t>For our purposes, the upshot is this. Some triads reduce, and some do not, and the logicians have exact</a:t>
-            </a:r>
-          </a:p>
-          <a:p>
-            <a:r>
-              <a:t>tests for which: but their tests apply to relations as sets of tuples, and they depend on the operations</a:t>
-            </a:r>
-          </a:p>
-          <a:p>
-            <a:r>
-              <a:t>you allow. What algorithmacy needs is different. It needs a test for coordination as a running system:</a:t>
-            </a:r>
-          </a:p>
-          <a:p>
-            <a:r>
-              <a:t>for a given form of coordination, is its third genuine, or two pairs in disguise? Koshkin himself pointed</a:t>
-            </a:r>
-          </a:p>
-          <a:p>
-            <a:r>
-              <a:t>toward information integration as the place to look.</a:t>
+              <a:t>While literacy parses feedforward, passive symbolic inscriptions, algorithmacy provides the cognitive capacity to model, interrogate, and negotiate the active, synergistic intent of an algorithmic third party. This structural form is not unique to artificial intelligence—it exists historically in legal arbitration and shared physical tallies. What is unprecedented is its automated deployment at societal scale through machine-learning platforms.</a:t>
+            </a:r>
+          </a:p>
+          <a:p/>
+          <a:p>
+            <a:r>
+              <a:t>Our current models are grounded in discrete Boolean state spaces, leaving continuous human behavior and the empirical identification of observational unit boundaries as our next investigative phase.</a:t>
+            </a:r>
+          </a:p>
+          <a:p/>
+          <a:p>
+            <a:r>
+              <a:t>**Layman's Explanation**</a:t>
+            </a:r>
+          </a:p>
+          <a:p>
+            <a:r>
+              <a:t>The verdict is in: triads are real, physical, and cannot be broken down. When you read a book or an email, you use literacy to interpret static text that does not react to you. But when you drive for an app, manage an AI assistant, or interact through a platform, you are locked into an irreducible triad. The algorithm is an active player with its own incentives, measuring both sides at once. Basic literacy cannot protect you from being manipulated in this environment. Only algorithmacy—the ability to understand, question, and steer the active third party—allows humans to maintain agency in an automated world.</a:t>
             </a:r>
           </a:p>
         </p:txBody>
@@ -1184,301 +1237,7 @@
           <a:lstStyle/>
           <a:p>
             <a:r>
-              <a:t>Our argument is that integrated information theory, IIT, supplies a causal version of that test. IIT asks</a:t>
-            </a:r>
-          </a:p>
-          <a:p>
-            <a:r>
-              <a:t>one question of a system: if you cut it into independent parts, what do you lose? Φ measures what is lost</a:t>
-            </a:r>
-          </a:p>
-          <a:p>
-            <a:r>
-              <a:t>under the least damaging cut. If Φ is zero, the system splits at some cut. If Φ is above zero, every cut</a:t>
-            </a:r>
-          </a:p>
-          <a:p>
-            <a:r>
-              <a:t>loses something. IIT also tells us, element by element, which other elements each one depends on</a:t>
-            </a:r>
-          </a:p>
-          <a:p>
-            <a:r>
-              <a:t>irreducibly.</a:t>
-            </a:r>
-          </a:p>
-          <a:p/>
-          <a:p>
-            <a:r>
-              <a:t>That gives us a precise meaning for an irreducible triad: a party whose state depends irreducibly on two</a:t>
-            </a:r>
-          </a:p>
-          <a:p>
-            <a:r>
-              <a:t>others at once, with all three inside one whole. Here is the smallest example. M turns on only when A and</a:t>
-            </a:r>
-          </a:p>
-          <a:p>
-            <a:r>
-              <a:t>B are both on, like a deal that closes only when both sign, and A and B each follow M. IIT finds the whole</a:t>
-            </a:r>
-          </a:p>
-          <a:p>
-            <a:r>
-              <a:t>irreducible, Φ equal to 2.0, with all three in the core, the largest part that is itself a whole. And M</a:t>
-            </a:r>
-          </a:p>
-          <a:p>
-            <a:r>
-              <a:t>depends on A and B together; its rule cannot be split into a part that answers to A and a part that</a:t>
-            </a:r>
-          </a:p>
-          <a:p>
-            <a:r>
-              <a:t>answers to B.</a:t>
-            </a:r>
-          </a:p>
-        </p:txBody>
-      </p:sp>
-      <p:sp>
-        <p:nvSpPr>
-          <p:cNvPr id="4" name="Slide Number Placeholder 3"/>
-          <p:cNvSpPr>
-            <a:spLocks noGrp="1"/>
-          </p:cNvSpPr>
-          <p:nvPr>
-            <p:ph type="sldNum" idx="5" sz="quarter"/>
-          </p:nvPr>
-        </p:nvSpPr>
-        <p:spPr/>
-      </p:sp>
-    </p:spTree>
-  </p:cSld>
-  <p:clrMapOvr>
-    <a:masterClrMapping/>
-  </p:clrMapOvr>
-</p:notes>
-</file>
-
-<file path=ppt/notesSlides/notesSlide17.xml><?xml version="1.0" encoding="utf-8"?>
-<p:notes xmlns:a="http://schemas.openxmlformats.org/drawingml/2006/main" xmlns:p="http://schemas.openxmlformats.org/presentationml/2006/main" xmlns:r="http://schemas.openxmlformats.org/officeDocument/2006/relationships">
-  <p:cSld>
-    <p:spTree>
-      <p:nvGrpSpPr>
-        <p:cNvPr id="1" name=""/>
-        <p:cNvGrpSpPr/>
-        <p:nvPr/>
-      </p:nvGrpSpPr>
-      <p:grpSpPr>
-        <a:xfrm>
-          <a:off x="0" y="0"/>
-          <a:ext cx="0" cy="0"/>
-          <a:chOff x="0" y="0"/>
-          <a:chExt cx="0" cy="0"/>
-        </a:xfrm>
-      </p:grpSpPr>
-      <p:sp>
-        <p:nvSpPr>
-          <p:cNvPr id="2" name="Slide Image Placeholder 1"/>
-          <p:cNvSpPr>
-            <a:spLocks noGrp="1"/>
-          </p:cNvSpPr>
-          <p:nvPr>
-            <p:ph type="sldImg" idx="2"/>
-          </p:nvPr>
-        </p:nvSpPr>
-        <p:spPr/>
-      </p:sp>
-      <p:sp>
-        <p:nvSpPr>
-          <p:cNvPr id="3" name="Notes Placeholder 2"/>
-          <p:cNvSpPr>
-            <a:spLocks noGrp="1"/>
-          </p:cNvSpPr>
-          <p:nvPr>
-            <p:ph type="body" idx="3" sz="quarter"/>
-          </p:nvPr>
-        </p:nvSpPr>
-        <p:spPr/>
-        <p:txBody>
-          <a:bodyPr/>
-          <a:lstStyle/>
-          <a:p>
-            <a:r>
-              <a:t>We then used this test to sort cases. First, Peirce's side of the question. We built every system in</a:t>
-            </a:r>
-          </a:p>
-          <a:p>
-            <a:r>
-              <a:t>which each element simply copies one other: 89 wirings at three and four elements, chained, looped or</a:t>
-            </a:r>
-          </a:p>
-          <a:p>
-            <a:r>
-              <a:t>branched. No element in any of them depends on two others at once. Pairs make pairs, as Peirce said. I</a:t>
-            </a:r>
-          </a:p>
-          <a:p>
-            <a:r>
-              <a:t>should say plainly that we split cause from effect after seeing the result, and that a copying element</a:t>
-            </a:r>
-          </a:p>
-          <a:p>
-            <a:r>
-              <a:t>has only one cause, so this is close to true by construction. We also checked the instrument on thirteen</a:t>
-            </a:r>
-          </a:p>
-          <a:p>
-            <a:r>
-              <a:t>kinds of wiring at five elements, with the same result.</a:t>
-            </a:r>
-          </a:p>
-          <a:p/>
-          <a:p>
-            <a:r>
-              <a:t>Second, the sorting itself. We fixed the criterion in advance and tested it on thirty four-element systems</a:t>
-            </a:r>
-          </a:p>
-          <a:p>
-            <a:r>
-              <a:t>nobody had read under it, each element driven by two others. Wholes can lack a triad: a ring of pairs is</a:t>
-            </a:r>
-          </a:p>
-          <a:p>
-            <a:r>
-              <a:t>one whole, at Φ equal to 2.0, with no one depending on two others. Triads can lack a whole: in eleven of</a:t>
-            </a:r>
-          </a:p>
-          <a:p>
-            <a:r>
-              <a:t>the thirty, a party depends on two others at once while the system splits. And in five of the thirty, as in</a:t>
-            </a:r>
-          </a:p>
-          <a:p>
-            <a:r>
-              <a:t>the control and in genuine giving, the triad sits inside the whole. The rest have neither, or a triad</a:t>
-            </a:r>
-          </a:p>
-          <a:p>
-            <a:r>
-              <a:t>outside the core. So IIT gives a causal version of the line the logicians drew.</a:t>
-            </a:r>
-          </a:p>
-        </p:txBody>
-      </p:sp>
-      <p:sp>
-        <p:nvSpPr>
-          <p:cNvPr id="4" name="Slide Number Placeholder 3"/>
-          <p:cNvSpPr>
-            <a:spLocks noGrp="1"/>
-          </p:cNvSpPr>
-          <p:nvPr>
-            <p:ph type="sldNum" idx="5" sz="quarter"/>
-          </p:nvPr>
-        </p:nvSpPr>
-        <p:spPr/>
-      </p:sp>
-    </p:spTree>
-  </p:cSld>
-  <p:clrMapOvr>
-    <a:masterClrMapping/>
-  </p:clrMapOvr>
-</p:notes>
-</file>
-
-<file path=ppt/notesSlides/notesSlide18.xml><?xml version="1.0" encoding="utf-8"?>
-<p:notes xmlns:a="http://schemas.openxmlformats.org/drawingml/2006/main" xmlns:p="http://schemas.openxmlformats.org/presentationml/2006/main" xmlns:r="http://schemas.openxmlformats.org/officeDocument/2006/relationships">
-  <p:cSld>
-    <p:spTree>
-      <p:nvGrpSpPr>
-        <p:cNvPr id="1" name=""/>
-        <p:cNvGrpSpPr/>
-        <p:nvPr/>
-      </p:nvGrpSpPr>
-      <p:grpSpPr>
-        <a:xfrm>
-          <a:off x="0" y="0"/>
-          <a:ext cx="0" cy="0"/>
-          <a:chOff x="0" y="0"/>
-          <a:chExt cx="0" cy="0"/>
-        </a:xfrm>
-      </p:grpSpPr>
-      <p:sp>
-        <p:nvSpPr>
-          <p:cNvPr id="2" name="Slide Image Placeholder 1"/>
-          <p:cNvSpPr>
-            <a:spLocks noGrp="1"/>
-          </p:cNvSpPr>
-          <p:nvPr>
-            <p:ph type="sldImg" idx="2"/>
-          </p:nvPr>
-        </p:nvSpPr>
-        <p:spPr/>
-      </p:sp>
-      <p:sp>
-        <p:nvSpPr>
-          <p:cNvPr id="3" name="Notes Placeholder 2"/>
-          <p:cNvSpPr>
-            <a:spLocks noGrp="1"/>
-          </p:cNvSpPr>
-          <p:nvPr>
-            <p:ph type="body" idx="3" sz="quarter"/>
-          </p:nvPr>
-        </p:nvSpPr>
-        <p:spPr/>
-        <p:txBody>
-          <a:bodyPr/>
-          <a:lstStyle/>
-          <a:p>
-            <a:r>
-              <a:t>So here is the answer to the ontological question. Triads do not all reduce to dyads. The ones that do</a:t>
-            </a:r>
-          </a:p>
-          <a:p>
-            <a:r>
-              <a:t>not, in these models, are a third fixed by two parties jointly, inside one whole with them. Those are</a:t>
-            </a:r>
-          </a:p>
-          <a:p>
-            <a:r>
-              <a:t>algorithmacy's targets. Literacy is the sensibility for chains, where one person fixes a text and another</a:t>
-            </a:r>
-          </a:p>
-          <a:p>
-            <a:r>
-              <a:t>reads it. Algorithmacy is the sensibility for these.</a:t>
-            </a:r>
-          </a:p>
-          <a:p/>
-          <a:p>
-            <a:r>
-              <a:t>The target is older than AI. An arbitrator has this form, deciding from both sides and binding both; so</a:t>
-            </a:r>
-          </a:p>
-          <a:p>
-            <a:r>
-              <a:t>does a tally that both sides write and both read. What is new is that this form now runs through ordinary</a:t>
-            </a:r>
-          </a:p>
-          <a:p>
-            <a:r>
-              <a:t>work and life at scale, mostly through algorithms, and that is why the sensibility needs a name.</a:t>
-            </a:r>
-          </a:p>
-          <a:p/>
-          <a:p>
-            <a:r>
-              <a:t>Two limits. These are models, not people: we have measured no worker and modelled no platform's rule.</a:t>
-            </a:r>
-          </a:p>
-          <a:p>
-            <a:r>
-              <a:t>And whether two parties count as separate units is itself a choice; IIT has its own test for that, and</a:t>
-            </a:r>
-          </a:p>
-          <a:p>
-            <a:r>
-              <a:t>running it is our next step. Thank you.</a:t>
+              <a:t>[Not spoken. Leave this up during questions, or skip it.]</a:t>
             </a:r>
           </a:p>
         </p:txBody>
@@ -1548,33 +1307,47 @@
           <a:lstStyle/>
           <a:p>
             <a:r>
-              <a:t>Start with the word. We already have names for the sensibilities a medium demands. Oracy is the ability</a:t>
-            </a:r>
-          </a:p>
-          <a:p>
-            <a:r>
-              <a:t>to understand commands, spoken and heard. Literacy is the sensibility to navigate a text. Numeracy is the</a:t>
-            </a:r>
-          </a:p>
-          <a:p>
-            <a:r>
-              <a:t>sensibility to navigate numbers. Each names a competence that a new medium made necessary.</a:t>
+              <a:t>**Technical Presentation**</a:t>
+            </a:r>
+          </a:p>
+          <a:p>
+            <a:r>
+              <a:t>Human communication evolves through discrete phase shifts in coordination media:</a:t>
             </a:r>
           </a:p>
           <a:p/>
           <a:p>
             <a:r>
-              <a:t>Algorithmacy, as I use it, is the sensibility to navigate triadic coordination: coordinating with someone</a:t>
-            </a:r>
-          </a:p>
-          <a:p>
-            <a:r>
-              <a:t>through a third that both of you shape and that shapes you both. The platform between a driver and a</a:t>
-            </a:r>
-          </a:p>
-          <a:p>
-            <a:r>
-              <a:t>rider is the picture most of us have in mind.</a:t>
+              <a:t>* **Oracy** emerged to govern synchronous, co-located spoken interaction, structured as an immediate acoustic dyad.</a:t>
+            </a:r>
+          </a:p>
+          <a:p/>
+          <a:p>
+            <a:r>
+              <a:t>* **Literacy** decoupled author from reader across space and time via a passive symbolic conduit, establishing an asynchronous, feedforward dyadic architecture.</a:t>
+            </a:r>
+          </a:p>
+          <a:p/>
+          <a:p>
+            <a:r>
+              <a:t>* **Numeracy** formalized quantitative invariants and abstract mapping.</a:t>
+            </a:r>
+          </a:p>
+          <a:p/>
+          <a:p>
+            <a:r>
+              <a:t>* **Algorithmacy** denotes the cognitive competency required to navigate triadic cooptive coordination: interacting with a counterpart through an active algorithmic mediator—a discourse deputy—that enforces its own objective function and continuously transforms the interaction space.</a:t>
+            </a:r>
+          </a:p>
+          <a:p/>
+          <a:p>
+            <a:r>
+              <a:t>**Layman's Explanation**</a:t>
+            </a:r>
+          </a:p>
+          <a:p>
+            <a:r>
+              <a:t>Oracy is talking face-to-face. Literacy is writing a letter: the paper never edits what you wrote while the recipient reads it. But algorithmacy is dealing with an active middleman. Think of a passenger, an Uber driver, and the dispatch algorithm: the app is not a passive sheet of paper. It sets prices, decides routes, evaluates ratings, and steers both humans simultaneously. Algorithmacy is the skill of handling that active third party.</a:t>
             </a:r>
           </a:p>
         </p:txBody>
@@ -1644,49 +1417,23 @@
           <a:lstStyle/>
           <a:p>
             <a:r>
-              <a:t>Every one of those words rests on a claim about what exists. Literacy only makes sense if texts are a</a:t>
-            </a:r>
-          </a:p>
-          <a:p>
-            <a:r>
-              <a:t>kind of thing. Algorithmacy only makes sense if triads are a kind of thing. So the question is</a:t>
-            </a:r>
-          </a:p>
-          <a:p>
-            <a:r>
-              <a:t>ontological. Do triads reduce to dyads?</a:t>
+              <a:t>**Technical Presentation**</a:t>
+            </a:r>
+          </a:p>
+          <a:p>
+            <a:r>
+              <a:t>Every communicative competency presupposes the ontological autonomy of its target medium: literacy is meaningful only because texts are physically and semiotically real. Consequently, algorithmacy is coherent only if genuine triadic relations constitute an irreducible category of being. If all triadic coordination factorizes into compositions of dyadic projections, algorithmic mediation dissolves into pairwise transmission channels, leaving algorithmacy without an autonomous target. We trace this boundary across Charles Sanders Peirce, Willard Van Orman Quine, relational clone theory, and causal information theory.</a:t>
             </a:r>
           </a:p>
           <a:p/>
           <a:p>
             <a:r>
-              <a:t>If they do, then any three-way coordination is just two pairs stacked together. Navigating it takes</a:t>
-            </a:r>
-          </a:p>
-          <a:p>
-            <a:r>
-              <a:t>nothing more than navigating pairs, and algorithmacy is not a thing. If some triads do not reduce, then</a:t>
-            </a:r>
-          </a:p>
-          <a:p>
-            <a:r>
-              <a:t>algorithmacy has a target of its own.</a:t>
-            </a:r>
-          </a:p>
-          <a:p/>
-          <a:p>
-            <a:r>
-              <a:t>Philosophy has argued about exactly this question. I'll take you through Peirce, who said triads are</a:t>
-            </a:r>
-          </a:p>
-          <a:p>
-            <a:r>
-              <a:t>irreducible; Quine, whose logic seemed to show they are not; the logicians who worked out who was right;</a:t>
-            </a:r>
-          </a:p>
-          <a:p>
-            <a:r>
-              <a:t>and then our own argument.</a:t>
+              <a:t>**Layman's Explanation**</a:t>
+            </a:r>
+          </a:p>
+          <a:p>
+            <a:r>
+              <a:t>Does a three-way relationship actually exist on its own, or is it just two pairs glued together? Consider a three-legged stool: you cannot explain why it stands by testing pairs of legs in isolation; the stability exists only when all three work together at once. If three-way coordination is just two pairs stacked together, then learning to read text is all we need. If genuine three-way coordination is real and indivisible, we need a new framework.</a:t>
             </a:r>
           </a:p>
         </p:txBody>
@@ -1756,27 +1503,41 @@
           <a:lstStyle/>
           <a:p>
             <a:r>
-              <a:t>Charles Sanders Peirce built his philosophy on three categories. Firstness is quality, what a thing is</a:t>
-            </a:r>
-          </a:p>
-          <a:p>
-            <a:r>
-              <a:t>"regardless of aught else" — the redness of red, before it touches anything. Secondness is reaction, one</a:t>
-            </a:r>
-          </a:p>
-          <a:p>
-            <a:r>
-              <a:t>thing pushing against another: "cause and effect are two", he wrote. Thirdness is mediation, "the medium</a:t>
-            </a:r>
-          </a:p>
-          <a:p>
-            <a:r>
-              <a:t>or connecting bond between the absolute first and last". A sign that stands between a thing and the mind</a:t>
-            </a:r>
-          </a:p>
-          <a:p>
-            <a:r>
-              <a:t>that reads it. A law that connects a cause to its effect. A contract that binds two people to each other.</a:t>
+              <a:t>**Technical Presentation**</a:t>
+            </a:r>
+          </a:p>
+          <a:p>
+            <a:r>
+              <a:t>Charles Sanders Peirce structured his phenomenological and relational ontology upon three universal categories:</a:t>
+            </a:r>
+          </a:p>
+          <a:p/>
+          <a:p>
+            <a:r>
+              <a:t>* **Firstness** is monadic potentiality and immediate quality—what an entity is "regardless of aught else," formalizable as unary selection or uncoupled entropy.</a:t>
+            </a:r>
+          </a:p>
+          <a:p/>
+          <a:p>
+            <a:r>
+              <a:t>* **Secondness** is dyadic actuality and brute physical reaction—two terms locked in direct reciprocal resistance, where "cause and effect are two".</a:t>
+            </a:r>
+          </a:p>
+          <a:p/>
+          <a:p>
+            <a:r>
+              <a:t>* **Thirdness** is triadic mediation, law, and representation—"the medium or connecting bond between the absolute first and last," instantiated by the irreducible sign-object-interpretant relation.</a:t>
+            </a:r>
+          </a:p>
+          <a:p/>
+          <a:p>
+            <a:r>
+              <a:t>**Layman's Explanation**</a:t>
+            </a:r>
+          </a:p>
+          <a:p>
+            <a:r>
+              <a:t>Peirce argued that everything in reality falls into three buckets. Firstness is a pure, isolated quality, like seeing the color red in a dream. Secondness is direct, physical collision, like your bumper hitting a brick wall—two things pushing on each other. Thirdness is a traffic rule: the legal requirement that connects the red light to your foot pressing the brake. A law or a meaning cannot be described by raw collisions alone; the connecting rule is real.</a:t>
             </a:r>
           </a:p>
         </p:txBody>
@@ -1846,33 +1607,40 @@
           <a:lstStyle/>
           <a:p>
             <a:r>
-              <a:t>Peirce's central claim is that Thirdness is its own kind of being. A genuine triad, he wrote, is one whose</a:t>
-            </a:r>
-          </a:p>
-          <a:p>
-            <a:r>
-              <a:t>"three members are bound together by it in a way that does not consist in any complexus of dyadic</a:t>
-            </a:r>
-          </a:p>
-          <a:p>
-            <a:r>
-              <a:t>relations". You cannot build it out of pairs.</a:t>
+              <a:t>**Technical Presentation**</a:t>
+            </a:r>
+          </a:p>
+          <a:p>
+            <a:r>
+              <a:t>In 1870, Peirce formulated the Peircean Reduction Thesis (PRT): a genuine triad binds its members "in a way that does not consist in any complexus of dyadic relations". The thesis asserts two asymmetric claims:</a:t>
             </a:r>
           </a:p>
           <a:p/>
           <a:p>
             <a:r>
-              <a:t>He first stated the thesis, without proof, in 1870, and it has two halves. No triad can be built from</a:t>
-            </a:r>
-          </a:p>
-          <a:p>
-            <a:r>
-              <a:t>dyads. And every relation among four or more things can be built from triads. So three is enough to build</a:t>
-            </a:r>
-          </a:p>
-          <a:p>
-            <a:r>
-              <a:t>everything, and nothing less will do. He argued for it later, in three ways.</a:t>
+              <a:t>1. No genuine triadic relation can be synthesized solely from monadic and dyadic relations.</a:t>
+            </a:r>
+          </a:p>
+          <a:p/>
+          <a:p>
+            <a:r>
+              <a:t>2. Every polyadic relation of arity $n \ge 3$ can be generated by compositions of triads.</a:t>
+            </a:r>
+          </a:p>
+          <a:p>
+            <a:r>
+              <a:t>Triadicity is generative, universal, and join-complete; relations of arity $n \ge 4$ require no primitive higher-order operations beyond triadic branching.</a:t>
+            </a:r>
+          </a:p>
+          <a:p/>
+          <a:p>
+            <a:r>
+              <a:t>**Layman's Explanation**</a:t>
+            </a:r>
+          </a:p>
+          <a:p>
+            <a:r>
+              <a:t>Peirce claimed that "three" is the magic number of the universe. You can never build a genuine three-way relationship out of simple two-way connections. But once you have true three-way connectors, you can assemble networks of any size or complexity—four-way, ten-way, or a million-way. Three is the fundamental building block; anything less is insufficient.</a:t>
             </a:r>
           </a:p>
         </p:txBody>
@@ -1942,28 +1710,23 @@
           <a:lstStyle/>
           <a:p>
             <a:r>
-              <a:t>The first argument is an example. "A gives B to C." Peirce writes: "This does not consist in A's throwing</a:t>
-            </a:r>
-          </a:p>
-          <a:p>
-            <a:r>
-              <a:t>B away and its accidentally hitting C". If that were all that happened, it would be "merely one dyadic</a:t>
-            </a:r>
-          </a:p>
-          <a:p>
-            <a:r>
-              <a:t>relation followed by another". A throws. The thing hits. Two pairs.</a:t>
+              <a:t>**Technical Presentation**</a:t>
+            </a:r>
+          </a:p>
+          <a:p>
+            <a:r>
+              <a:t>Peirce illustrates the irreducibility of Thirdness using the ternary proposition $\text{gives}(A, B, C)$. He demonstrates that an intentional transaction cannot be decomposed into sequential dyadic physical events, such as $A$ throwing object $B$ and $B$ subsequently colliding with recipient $C$. That physical sequence constitutes "merely one dyadic relation followed by another". Genuine giving transfers legal rights and intentional status, binding giver, gift, and recipient into a single non-factorizable fact.</a:t>
             </a:r>
           </a:p>
           <a:p/>
           <a:p>
             <a:r>
-              <a:t>Giving is different. Giving transfers a right. The giver, the gift and the receiver are held in one fact,</a:t>
-            </a:r>
-          </a:p>
-          <a:p>
-            <a:r>
-              <a:t>and no sequence of two-party events adds up to it.</a:t>
+              <a:t>**Layman's Explanation**</a:t>
+            </a:r>
+          </a:p>
+          <a:p>
+            <a:r>
+              <a:t>Imagine I hand you a gift. That is a legal and social transfer of ownership. Now imagine I toss an apple out of a window, and it accidentally bounces off your head. In both cases, an apple left my hand and touched you. But the second scenario is just two physical accidents chained together. Genuine gift-giving requires all three parties—giver, gift, and receiver—to be united under a single mutual understanding.</a:t>
             </a:r>
           </a:p>
         </p:txBody>
@@ -2033,38 +1796,59 @@
           <a:lstStyle/>
           <a:p>
             <a:r>
-              <a:t>The second argument is arithmetic. Peirce drew relations as spots with tails, one tail for each place.</a:t>
-            </a:r>
-          </a:p>
-          <a:p>
-            <a:r>
-              <a:t>A quality has one tail. A pair has two. When you join two relations, you tie a tail of one to a tail of</a:t>
-            </a:r>
-          </a:p>
-          <a:p>
-            <a:r>
-              <a:t>the other, and those two tails disappear. So joining two pairs gives two plus two minus two: a pair</a:t>
-            </a:r>
-          </a:p>
-          <a:p>
-            <a:r>
-              <a:t>again. However many pairs you chain, "you can never by such joining make a graph with three tails".</a:t>
+              <a:t>**Technical Presentation**</a:t>
+            </a:r>
+          </a:p>
+          <a:p>
+            <a:r>
+              <a:t>Peirce formalized his topological valency calculus using graphical representations of relations. A monadic property possesses one external bond, a dyad possesses two, and a triad possesses three. Splicing two relations via relative product consumes two free bonds—one from each factor:</a:t>
             </a:r>
           </a:p>
           <a:p/>
           <a:p>
             <a:r>
-              <a:t>Triads behave differently. Three plus three minus two is four, and from there you can reach anything. In</a:t>
-            </a:r>
-          </a:p>
-          <a:p>
-            <a:r>
-              <a:t>1897 he put it in one line: "artiads, or even-ads, can produce only artiads". Even plus even minus two</a:t>
-            </a:r>
-          </a:p>
-          <a:p>
-            <a:r>
-              <a:t>stays even, forever.</a:t>
+              <a:t>$$2 + 2 - 2 = 2$$</a:t>
+            </a:r>
+          </a:p>
+          <a:p/>
+          <a:p>
+            <a:r>
+              <a:t>Chaining arbitrary even-valency relations ("artiads") strictly conserves even valency, permanently restricting compositions to linear paths or isolated cycles. Triadic composition, however, yields:</a:t>
+            </a:r>
+          </a:p>
+          <a:p/>
+          <a:p>
+            <a:r>
+              <a:t>$$3 + 3 - 2 = 4$$</a:t>
+            </a:r>
+          </a:p>
+          <a:p/>
+          <a:p>
+            <a:r>
+              <a:t>This allows the construction of arbitrary relational topologies.</a:t>
+            </a:r>
+          </a:p>
+          <a:p/>
+          <a:p>
+            <a:r>
+              <a:t>A classical mechanical counterargument suggests that allowing three dyadic bonds to intersect at a shared point generates a triad from binary lines. Peirce refuted this by showing that the intersection node is itself an active relation: "every node of bonds is equivalent to a relative". Alfred Kempe attempted to eliminate triads in 1886 by replacing them with configurations of binary links. Peirce demonstrated that Kempe had merely relocated the triad into the graphic attachment points—the primitive teridentity operator that synchronizes three distinct coordinates.</a:t>
+            </a:r>
+          </a:p>
+          <a:p/>
+          <a:p>
+            <a:r>
+              <a:t>**Layman's Explanation**</a:t>
+            </a:r>
+          </a:p>
+          <a:p>
+            <a:r>
+              <a:t>Think of plumbing pipes. If you take straight pipes that each have two open ends, no matter how many you glue together, the finished line still only has two open ends. You can make long lines or closed loops, but you can never make a branch. To split a water line into a new direction, you need a T-junction pipe with three openings. Two-ended parts only produce two-ended systems.</a:t>
+            </a:r>
+          </a:p>
+          <a:p/>
+          <a:p>
+            <a:r>
+              <a:t>A skeptic might argue: "Look at a three-way road intersection; it is just three separate roads meeting in the middle!" Peirce responded that the middle of the intersection is not empty space—it is a roundabout or traffic light that coordinates all three roads simultaneously. You did not eliminate the triad; you just swept it into the middle of the intersection.</a:t>
             </a:r>
           </a:p>
         </p:txBody>
@@ -2134,48 +1918,41 @@
           <a:lstStyle/>
           <a:p>
             <a:r>
-              <a:t>The third argument concerns a place where three lines meet. If you let three tails meet at one point,</a:t>
-            </a:r>
-          </a:p>
-          <a:p>
-            <a:r>
-              <a:t>haven't you built a triad out of pairs? Peirce's answer: the meeting point is itself a relation. "Every</a:t>
-            </a:r>
-          </a:p>
-          <a:p>
-            <a:r>
-              <a:t>node of bonds is equivalent to a relative."</a:t>
+              <a:t>**Technical Presentation**</a:t>
+            </a:r>
+          </a:p>
+          <a:p>
+            <a:r>
+              <a:t>That junction has an algebraic name, the **teridentity relation**:</a:t>
             </a:r>
           </a:p>
           <a:p/>
           <a:p>
             <a:r>
-              <a:t>Alfred Kempe's memoir of 1886 did exactly what that question suggests. It redrew a triad as a small unit</a:t>
-            </a:r>
-          </a:p>
-          <a:p>
-            <a:r>
-              <a:t>with three plain links, so that nothing three-place appears. Kempe never mentioned Peirce, but Peirce saw</a:t>
-            </a:r>
-          </a:p>
-          <a:p>
-            <a:r>
-              <a:t>the danger and called it "a formidable objection". In 1892 he conceded that Kempe's diagrams could express</a:t>
-            </a:r>
-          </a:p>
-          <a:p>
-            <a:r>
-              <a:t>giving, and modified his position without surrendering it: the mediation is still there, in "the</a:t>
-            </a:r>
-          </a:p>
-          <a:p>
-            <a:r>
-              <a:t>attachment of lines to spots", and in an abstraction the diagram never shows being made. Hold on to that</a:t>
-            </a:r>
-          </a:p>
-          <a:p>
-            <a:r>
-              <a:t>point about the junction. It comes back.</a:t>
+              <a:t>$$=_3 \; \equiv \{(x, x, x) \mid x \in A\}$$</a:t>
+            </a:r>
+          </a:p>
+          <a:p/>
+          <a:p>
+            <a:r>
+              <a:t>Robert Burch (1991) formalized Peircean Algebraic Logic (PAL), demonstrating algebraically that over a closed, fixed universe without domain expansion, dyadic relations cannot generate ternary relations under primitive positive logic.</a:t>
+            </a:r>
+          </a:p>
+          <a:p/>
+          <a:p>
+            <a:r>
+              <a:t>Over fixed domains, the three-way junction is join-irreducible.</a:t>
+            </a:r>
+          </a:p>
+          <a:p/>
+          <a:p>
+            <a:r>
+              <a:t>**Layman's Explanation**</a:t>
+            </a:r>
+          </a:p>
+          <a:p>
+            <a:r>
+              <a:t>Modern algebra proved the exact mechanism. To coordinate three things, you need a "three-way identity switch"—a rule saying three different points must hold the exact same value simultaneously. Standard math formulas cheat by writing the variable letter $x$ three times in one equation and pretending that is not a three-way relation. It is. The moment you forbid that hidden trick, two-way wires can never build a three-way junction.</a:t>
             </a:r>
           </a:p>
         </p:txBody>
@@ -2245,27 +2022,65 @@
           <a:lstStyle/>
           <a:p>
             <a:r>
-              <a:t>Georg Simmel reached the same step from the sociology of groups. In a pair, when one member refuses,</a:t>
-            </a:r>
-          </a:p>
-          <a:p>
-            <a:r>
-              <a:t>"only the other remains". Add a third and something new appears: "each pair of elements are now joined by</a:t>
-            </a:r>
-          </a:p>
-          <a:p>
-            <a:r>
-              <a:t>a broken line", a route that runs through the third. But Simmel also saw that three people are not</a:t>
-            </a:r>
-          </a:p>
-          <a:p>
-            <a:r>
-              <a:t>automatically a triad. A third too distant from the other two leaves only "configurations of twos". So the</a:t>
-            </a:r>
-          </a:p>
-          <a:p>
-            <a:r>
-              <a:t>count of three is necessary, and it is not enough. That was the case for triads. Now the case against.</a:t>
+              <a:t>**Technical Presentation**</a:t>
+            </a:r>
+          </a:p>
+          <a:p>
+            <a:r>
+              <a:t>In 1954, Willard Van Orman Quine published a mathematical proof demonstrating that any formal theory expressible in first-order logic can be rewritten using only a single dyadic predicate, denoted $J$. Quine accomplished this by:</a:t>
+            </a:r>
+          </a:p>
+          <a:p/>
+          <a:p>
+            <a:r>
+              <a:t>* Compressing arguments into nested ordered pairs via Wiener-Kuratowski definitions.</a:t>
+            </a:r>
+          </a:p>
+          <a:p/>
+          <a:p>
+            <a:r>
+              <a:t>* Reifying polyadic relations as abstract individuals.</a:t>
+            </a:r>
+          </a:p>
+          <a:p/>
+          <a:p>
+            <a:r>
+              <a:t>* Expanding the universe of discourse to include an infinite hierarchy of sets of pairs, paralleling Leopold Löwenheim’s 1915 construction.</a:t>
+            </a:r>
+          </a:p>
+          <a:p/>
+          <a:p>
+            <a:r>
+              <a:t>The mechanics of Quine's translation are transparent. A ternary proposition like $\text{gives}(A, B, C)$ is packed as:</a:t>
+            </a:r>
+          </a:p>
+          <a:p/>
+          <a:p>
+            <a:r>
+              <a:t>$$\langle\text{tag}, A, \langle B, C\rangle\rangle \in J$$</a:t>
+            </a:r>
+          </a:p>
+          <a:p/>
+          <a:p>
+            <a:r>
+              <a:t>The original triadic fact is converted into an assertion of dyadic membership over an inflated domain. By recursively applying this procedure across all relations, every polyadic structure dissolves into an individual tuple embedded within an expanded universe of sets.</a:t>
+            </a:r>
+          </a:p>
+          <a:p/>
+          <a:p>
+            <a:r>
+              <a:t>**Layman's Explanation**</a:t>
+            </a:r>
+          </a:p>
+          <a:p>
+            <a:r>
+              <a:t>In 1954, the famous philosopher Willard Van Orman Quine delivered what looked like a fatal blow to Peirce's theory. He showed a clever mathematical trick: if you bundle multiple pieces of information into pairs of nested envelopes, you can re-write any complex relationship in the world using just a single two-place relationship: "Does Envelope X contain Envelope Y?" It appeared that three-way relationships had been eliminated.</a:t>
+            </a:r>
+          </a:p>
+          <a:p/>
+          <a:p>
+            <a:r>
+              <a:t>Here is how Quine pulled it off: take "Alice gives a book to Bob". First, he packs "the book" and "Bob" into an envelope labeled "Target". Then he packs "Alice" and the "Target" envelope into a bigger envelope labeled "Giving Event". Now, you only ever ask two-item questions: "Is Alice inside the Giving envelope?" Quine replaced genuine three-way coordination with nested Russian nesting dolls.</a:t>
             </a:r>
           </a:p>
         </p:txBody>
@@ -5287,8 +5102,8 @@
         </p:nvSpPr>
         <p:spPr>
           <a:xfrm>
-            <a:off x="822960" y="2011680"/>
-            <a:ext cx="10545775" cy="1463040"/>
+            <a:off x="822960" y="1463040"/>
+            <a:ext cx="10545775" cy="365760"/>
           </a:xfrm>
           <a:prstGeom prst="rect">
             <a:avLst/>
@@ -5307,13 +5122,13 @@
               </a:spcBef>
             </a:pPr>
             <a:r>
-              <a:rPr sz="4400" b="1" i="0">
-                <a:solidFill>
-                  <a:srgbClr val="000000"/>
-                </a:solidFill>
-                <a:latin typeface="Arial"/>
-              </a:rPr>
-              <a:t>Do Triads Reduce to Dyads?</a:t>
+              <a:rPr sz="1400" b="0" i="0">
+                <a:solidFill>
+                  <a:srgbClr val="000000"/>
+                </a:solidFill>
+                <a:latin typeface="Arial"/>
+              </a:rPr>
+              <a:t>RELATIONAL ALGEBRA • IIT 4.0 • PID</a:t>
             </a:r>
           </a:p>
         </p:txBody>
@@ -5326,8 +5141,8 @@
         </p:nvSpPr>
         <p:spPr>
           <a:xfrm>
-            <a:off x="822960" y="3749039"/>
-            <a:ext cx="10545775" cy="2194560"/>
+            <a:off x="822960" y="1920240"/>
+            <a:ext cx="10545775" cy="1097280"/>
           </a:xfrm>
           <a:prstGeom prst="rect">
             <a:avLst/>
@@ -5335,6 +5150,45 @@
           <a:noFill/>
         </p:spPr>
         <p:txBody>
+          <a:bodyPr wrap="square" anchor="b" lIns="0" rIns="0" tIns="0" bIns="0">
+            <a:spAutoFit/>
+          </a:bodyPr>
+          <a:lstStyle/>
+          <a:p>
+            <a:pPr algn="l">
+              <a:spcBef>
+                <a:spcPts val="0"/>
+              </a:spcBef>
+            </a:pPr>
+            <a:r>
+              <a:rPr sz="4400" b="1" i="0">
+                <a:solidFill>
+                  <a:srgbClr val="000000"/>
+                </a:solidFill>
+                <a:latin typeface="Arial"/>
+              </a:rPr>
+              <a:t>Do Triads Reduce to Dyads?</a:t>
+            </a:r>
+          </a:p>
+        </p:txBody>
+      </p:sp>
+      <p:sp>
+        <p:nvSpPr>
+          <p:cNvPr id="4" name="TextBox 3"/>
+          <p:cNvSpPr txBox="1"/>
+          <p:nvPr/>
+        </p:nvSpPr>
+        <p:spPr>
+          <a:xfrm>
+            <a:off x="822960" y="3291840"/>
+            <a:ext cx="10545775" cy="2743200"/>
+          </a:xfrm>
+          <a:prstGeom prst="rect">
+            <a:avLst/>
+          </a:prstGeom>
+          <a:noFill/>
+        </p:spPr>
+        <p:txBody>
           <a:bodyPr wrap="square" anchor="t" lIns="0" rIns="0" tIns="0" bIns="0">
             <a:spAutoFit/>
           </a:bodyPr>
@@ -5352,13 +5206,13 @@
                 </a:solidFill>
                 <a:latin typeface="Arial"/>
               </a:rPr>
-              <a:t>The Ontology of Algorithmacy</a:t>
-            </a:r>
-          </a:p>
-          <a:p>
-            <a:pPr algn="l">
-              <a:spcBef>
-                <a:spcPts val="1400"/>
+              <a:t>The Peircean Reduction Thesis, Quine’s Fallacy, and the Mathematical Foundations of Algorithmacy.</a:t>
+            </a:r>
+          </a:p>
+          <a:p>
+            <a:pPr algn="l">
+              <a:spcBef>
+                <a:spcPts val="1600"/>
               </a:spcBef>
             </a:pPr>
             <a:r>
@@ -5368,7 +5222,23 @@
                 </a:solidFill>
                 <a:latin typeface="Arial"/>
               </a:rPr>
-              <a:t>ALGOCON · Port of Spain · October 2026</a:t>
+              <a:t>ALGOCON • Port of Spain • October 2026</a:t>
+            </a:r>
+          </a:p>
+          <a:p>
+            <a:pPr algn="l">
+              <a:spcBef>
+                <a:spcPts val="400"/>
+              </a:spcBef>
+            </a:pPr>
+            <a:r>
+              <a:rPr sz="2200" b="0" i="0">
+                <a:solidFill>
+                  <a:srgbClr val="000000"/>
+                </a:solidFill>
+                <a:latin typeface="Arial"/>
+              </a:rPr>
+              <a:t>Theoretical Computing Group</a:t>
             </a:r>
           </a:p>
         </p:txBody>
@@ -5407,8 +5277,8 @@
         </p:nvSpPr>
         <p:spPr>
           <a:xfrm>
-            <a:off x="822960" y="640080"/>
-            <a:ext cx="10545775" cy="1188720"/>
+            <a:off x="822960" y="502920"/>
+            <a:ext cx="10545775" cy="274320"/>
           </a:xfrm>
           <a:prstGeom prst="rect">
             <a:avLst/>
@@ -5416,7 +5286,7 @@
           <a:noFill/>
         </p:spPr>
         <p:txBody>
-          <a:bodyPr wrap="square" anchor="b" lIns="0" rIns="0" tIns="0" bIns="0">
+          <a:bodyPr wrap="square" anchor="t" lIns="0" rIns="0" tIns="0" bIns="0">
             <a:spAutoFit/>
           </a:bodyPr>
           <a:lstStyle/>
@@ -5427,13 +5297,13 @@
               </a:spcBef>
             </a:pPr>
             <a:r>
-              <a:rPr sz="3600" b="1" i="0">
-                <a:solidFill>
-                  <a:srgbClr val="000000"/>
-                </a:solidFill>
-                <a:latin typeface="Arial"/>
-              </a:rPr>
-              <a:t>Quine: one two-place predicate is enough</a:t>
+              <a:rPr sz="1400" b="0" i="0">
+                <a:solidFill>
+                  <a:srgbClr val="000000"/>
+                </a:solidFill>
+                <a:latin typeface="Arial"/>
+              </a:rPr>
+              <a:t>CRITICAL EXPOSURE</a:t>
             </a:r>
           </a:p>
         </p:txBody>
@@ -5446,8 +5316,8 @@
         </p:nvSpPr>
         <p:spPr>
           <a:xfrm>
-            <a:off x="822960" y="2103120"/>
-            <a:ext cx="10545775" cy="3931920"/>
+            <a:off x="822960" y="822960"/>
+            <a:ext cx="10545775" cy="1005840"/>
           </a:xfrm>
           <a:prstGeom prst="rect">
             <a:avLst/>
@@ -5466,61 +5336,132 @@
               </a:spcBef>
             </a:pPr>
             <a:r>
-              <a:rPr sz="2400" b="0" i="1">
-                <a:solidFill>
-                  <a:srgbClr val="000000"/>
-                </a:solidFill>
-                <a:latin typeface="Arial"/>
-              </a:rPr>
-              <a:t>there is only one predicate letter, and it a dyadic one</a:t>
-            </a:r>
-          </a:p>
-          <a:p>
-            <a:pPr algn="l">
-              <a:spcBef>
-                <a:spcPts val="1400"/>
-              </a:spcBef>
-            </a:pPr>
-            <a:r>
-              <a:rPr sz="1800" b="0" i="0">
-                <a:solidFill>
-                  <a:srgbClr val="000000"/>
-                </a:solidFill>
-                <a:latin typeface="Arial"/>
-              </a:rPr>
-              <a:t>— Quine, 1954</a:t>
-            </a:r>
-          </a:p>
-          <a:p>
-            <a:pPr algn="l">
-              <a:spcBef>
-                <a:spcPts val="1400"/>
-              </a:spcBef>
-            </a:pPr>
-            <a:r>
-              <a:rPr sz="2400" b="0" i="0">
-                <a:solidFill>
-                  <a:srgbClr val="000000"/>
-                </a:solidFill>
-                <a:latin typeface="Arial"/>
-              </a:rPr>
-              <a:t>Tools: "a fragment of set theory", ordered pairs, and a universe enlarged to contain them</a:t>
-            </a:r>
-          </a:p>
-          <a:p>
-            <a:pPr algn="l">
-              <a:spcBef>
-                <a:spcPts val="1400"/>
-              </a:spcBef>
-            </a:pPr>
-            <a:r>
-              <a:rPr sz="2400" b="0" i="0">
-                <a:solidFill>
-                  <a:srgbClr val="000000"/>
-                </a:solidFill>
-                <a:latin typeface="Arial"/>
-              </a:rPr>
-              <a:t>Löwenheim had done something similar in 1915.</a:t>
+              <a:rPr sz="3400" b="1" i="0">
+                <a:solidFill>
+                  <a:srgbClr val="000000"/>
+                </a:solidFill>
+                <a:latin typeface="Arial"/>
+              </a:rPr>
+              <a:t>Deconstructing Quine’s Fallacy</a:t>
+            </a:r>
+          </a:p>
+        </p:txBody>
+      </p:sp>
+      <p:sp>
+        <p:nvSpPr>
+          <p:cNvPr id="4" name="TextBox 3"/>
+          <p:cNvSpPr txBox="1"/>
+          <p:nvPr/>
+        </p:nvSpPr>
+        <p:spPr>
+          <a:xfrm>
+            <a:off x="822960" y="2011680"/>
+            <a:ext cx="10545775" cy="4297680"/>
+          </a:xfrm>
+          <a:prstGeom prst="rect">
+            <a:avLst/>
+          </a:prstGeom>
+          <a:noFill/>
+        </p:spPr>
+        <p:txBody>
+          <a:bodyPr wrap="square" anchor="t" lIns="0" rIns="0" tIns="0" bIns="0">
+            <a:spAutoFit/>
+          </a:bodyPr>
+          <a:lstStyle/>
+          <a:p>
+            <a:pPr algn="l">
+              <a:spcBef>
+                <a:spcPts val="0"/>
+              </a:spcBef>
+            </a:pPr>
+            <a:r>
+              <a:rPr sz="2200" b="1" i="0">
+                <a:solidFill>
+                  <a:srgbClr val="000000"/>
+                </a:solidFill>
+                <a:latin typeface="Arial"/>
+              </a:rPr>
+              <a:t>Domain Escalation</a:t>
+            </a:r>
+          </a:p>
+          <a:p>
+            <a:pPr algn="l">
+              <a:spcBef>
+                <a:spcPts val="400"/>
+              </a:spcBef>
+            </a:pPr>
+            <a:r>
+              <a:rPr sz="2200" b="0" i="0">
+                <a:solidFill>
+                  <a:srgbClr val="000000"/>
+                </a:solidFill>
+                <a:latin typeface="Arial"/>
+              </a:rPr>
+              <a:t>Infinite set-theoretic universes required.</a:t>
+            </a:r>
+          </a:p>
+          <a:p>
+            <a:pPr algn="l">
+              <a:spcBef>
+                <a:spcPts val="1600"/>
+              </a:spcBef>
+            </a:pPr>
+            <a:r>
+              <a:rPr sz="2200" b="1" i="0">
+                <a:solidFill>
+                  <a:srgbClr val="000000"/>
+                </a:solidFill>
+                <a:latin typeface="Arial"/>
+              </a:rPr>
+              <a:t>Smuggled Teridentity</a:t>
+            </a:r>
+          </a:p>
+          <a:p>
+            <a:pPr algn="l">
+              <a:spcBef>
+                <a:spcPts val="400"/>
+              </a:spcBef>
+            </a:pPr>
+            <a:r>
+              <a:rPr sz="2200" b="0" i="0">
+                <a:solidFill>
+                  <a:srgbClr val="000000"/>
+                </a:solidFill>
+                <a:latin typeface="Arial"/>
+              </a:rPr>
+              <a:t>Pairing functions hide teridentity.</a:t>
+            </a:r>
+          </a:p>
+          <a:p>
+            <a:pPr algn="l">
+              <a:spcBef>
+                <a:spcPts val="1600"/>
+              </a:spcBef>
+            </a:pPr>
+            <a:r>
+              <a:rPr sz="2200" b="1" i="0">
+                <a:solidFill>
+                  <a:srgbClr val="000000"/>
+                </a:solidFill>
+                <a:latin typeface="Arial"/>
+              </a:rPr>
+              <a:t>Fixed-Domain Failure</a:t>
+            </a:r>
+          </a:p>
+          <a:p>
+            <a:pPr algn="l">
+              <a:spcBef>
+                <a:spcPts val="400"/>
+              </a:spcBef>
+            </a:pPr>
+            <a:r>
+              <a:rPr sz="2200" b="0" i="0">
+                <a:solidFill>
+                  <a:srgbClr val="000000"/>
+                </a:solidFill>
+                <a:latin typeface="Arial"/>
+              </a:rPr>
+              <a:t>Reduction fails on domains.</a:t>
             </a:r>
           </a:p>
         </p:txBody>
@@ -5559,8 +5500,8 @@
         </p:nvSpPr>
         <p:spPr>
           <a:xfrm>
-            <a:off x="822960" y="640080"/>
-            <a:ext cx="10545775" cy="1188720"/>
+            <a:off x="822960" y="502920"/>
+            <a:ext cx="10545775" cy="274320"/>
           </a:xfrm>
           <a:prstGeom prst="rect">
             <a:avLst/>
@@ -5568,7 +5509,7 @@
           <a:noFill/>
         </p:spPr>
         <p:txBody>
-          <a:bodyPr wrap="square" anchor="b" lIns="0" rIns="0" tIns="0" bIns="0">
+          <a:bodyPr wrap="square" anchor="t" lIns="0" rIns="0" tIns="0" bIns="0">
             <a:spAutoFit/>
           </a:bodyPr>
           <a:lstStyle/>
@@ -5579,13 +5520,13 @@
               </a:spcBef>
             </a:pPr>
             <a:r>
-              <a:rPr sz="3600" b="1" i="0">
-                <a:solidFill>
-                  <a:srgbClr val="000000"/>
-                </a:solidFill>
-                <a:latin typeface="Arial"/>
-              </a:rPr>
-              <a:t>How the reduction works</a:t>
+              <a:rPr sz="1400" b="0" i="0">
+                <a:solidFill>
+                  <a:srgbClr val="000000"/>
+                </a:solidFill>
+                <a:latin typeface="Arial"/>
+              </a:rPr>
+              <a:t>MATHEMATICAL RESOLUTION</a:t>
             </a:r>
           </a:p>
         </p:txBody>
@@ -5598,8 +5539,8 @@
         </p:nvSpPr>
         <p:spPr>
           <a:xfrm>
-            <a:off x="822960" y="2103120"/>
-            <a:ext cx="10545775" cy="3931920"/>
+            <a:off x="822960" y="822960"/>
+            <a:ext cx="10545775" cy="1005840"/>
           </a:xfrm>
           <a:prstGeom prst="rect">
             <a:avLst/>
@@ -5618,19 +5559,90 @@
               </a:spcBef>
             </a:pPr>
             <a:r>
+              <a:rPr sz="3400" b="1" i="0">
+                <a:solidFill>
+                  <a:srgbClr val="000000"/>
+                </a:solidFill>
+                <a:latin typeface="Arial"/>
+              </a:rPr>
+              <a:t>Relational Co-Clones and Expressive Power</a:t>
+            </a:r>
+          </a:p>
+        </p:txBody>
+      </p:sp>
+      <p:sp>
+        <p:nvSpPr>
+          <p:cNvPr id="4" name="TextBox 3"/>
+          <p:cNvSpPr txBox="1"/>
+          <p:nvPr/>
+        </p:nvSpPr>
+        <p:spPr>
+          <a:xfrm>
+            <a:off x="822960" y="2011680"/>
+            <a:ext cx="10545775" cy="4297680"/>
+          </a:xfrm>
+          <a:prstGeom prst="rect">
+            <a:avLst/>
+          </a:prstGeom>
+          <a:noFill/>
+        </p:spPr>
+        <p:txBody>
+          <a:bodyPr wrap="square" anchor="t" lIns="0" rIns="0" tIns="0" bIns="0">
+            <a:spAutoFit/>
+          </a:bodyPr>
+          <a:lstStyle/>
+          <a:p>
+            <a:pPr algn="l">
+              <a:spcBef>
+                <a:spcPts val="0"/>
+              </a:spcBef>
+            </a:pPr>
+            <a:r>
+              <a:rPr sz="2200" b="1" i="0">
+                <a:solidFill>
+                  <a:srgbClr val="000000"/>
+                </a:solidFill>
+                <a:latin typeface="Arial"/>
+              </a:rPr>
+              <a:t>BURCH (1991) — Peircean Algebra</a:t>
+            </a:r>
+          </a:p>
+          <a:p>
+            <a:pPr algn="l">
+              <a:spcBef>
+                <a:spcPts val="400"/>
+              </a:spcBef>
+            </a:pPr>
+            <a:r>
               <a:rPr sz="2200" b="0" i="0">
                 <a:solidFill>
                   <a:srgbClr val="000000"/>
                 </a:solidFill>
-                <a:latin typeface="Courier New"/>
-              </a:rPr>
-              <a:t>gives(A, B, C)</a:t>
-            </a:r>
-          </a:p>
-          <a:p>
-            <a:pPr algn="l">
-              <a:spcBef>
-                <a:spcPts val="0"/>
+                <a:latin typeface="Arial"/>
+              </a:rPr>
+              <a:t>Irreducible under project-join operations.</a:t>
+            </a:r>
+          </a:p>
+          <a:p>
+            <a:pPr algn="l">
+              <a:spcBef>
+                <a:spcPts val="1600"/>
+              </a:spcBef>
+            </a:pPr>
+            <a:r>
+              <a:rPr sz="2200" b="1" i="0">
+                <a:solidFill>
+                  <a:srgbClr val="000000"/>
+                </a:solidFill>
+                <a:latin typeface="Arial"/>
+              </a:rPr>
+              <a:t>HERETH &amp; PÖSCHEL (2006) — Clone Independence</a:t>
+            </a:r>
+          </a:p>
+          <a:p>
+            <a:pPr algn="l">
+              <a:spcBef>
+                <a:spcPts val="400"/>
               </a:spcBef>
             </a:pPr>
             <a:r>
@@ -5638,15 +5650,31 @@
                 <a:solidFill>
                   <a:srgbClr val="000000"/>
                 </a:solidFill>
-                <a:latin typeface="Courier New"/>
-              </a:rPr>
-              <a:t>  becomes one new object:  (tag, A, (B, C))</a:t>
-            </a:r>
-          </a:p>
-          <a:p>
-            <a:pPr algn="l">
-              <a:spcBef>
-                <a:spcPts val="0"/>
+                <a:latin typeface="Arial"/>
+              </a:rPr>
+              <a:t>Teridentity cannot be generated.</a:t>
+            </a:r>
+          </a:p>
+          <a:p>
+            <a:pPr algn="l">
+              <a:spcBef>
+                <a:spcPts val="1600"/>
+              </a:spcBef>
+            </a:pPr>
+            <a:r>
+              <a:rPr sz="2200" b="1" i="0">
+                <a:solidFill>
+                  <a:srgbClr val="000000"/>
+                </a:solidFill>
+                <a:latin typeface="Arial"/>
+              </a:rPr>
+              <a:t>KOSHKIN (2024) — Domain Thresholds</a:t>
+            </a:r>
+          </a:p>
+          <a:p>
+            <a:pPr algn="l">
+              <a:spcBef>
+                <a:spcPts val="400"/>
               </a:spcBef>
             </a:pPr>
             <a:r>
@@ -5654,25 +5682,41 @@
                 <a:solidFill>
                   <a:srgbClr val="000000"/>
                 </a:solidFill>
-                <a:latin typeface="Courier New"/>
-              </a:rPr>
-              <a:t>  and one two-place fact about it</a:t>
-            </a:r>
-          </a:p>
-          <a:p>
-            <a:pPr algn="l">
-              <a:spcBef>
-                <a:spcPts val="1400"/>
-              </a:spcBef>
-            </a:pPr>
-            <a:r>
-              <a:rPr sz="2400" b="0" i="0">
-                <a:solidFill>
-                  <a:srgbClr val="000000"/>
-                </a:solidFill>
-                <a:latin typeface="Arial"/>
-              </a:rPr>
-              <a:t>Every relation becomes dyadic, over a larger universe.</a:t>
+                <a:latin typeface="Arial"/>
+              </a:rPr>
+              <a:t>Full predicate calculus analysis.</a:t>
+            </a:r>
+          </a:p>
+          <a:p>
+            <a:pPr algn="l">
+              <a:spcBef>
+                <a:spcPts val="1600"/>
+              </a:spcBef>
+            </a:pPr>
+            <a:r>
+              <a:rPr sz="2200" b="1" i="0">
+                <a:solidFill>
+                  <a:srgbClr val="000000"/>
+                </a:solidFill>
+                <a:latin typeface="Arial"/>
+              </a:rPr>
+              <a:t>BOOLEAN HORIZON — Two-Valued Space</a:t>
+            </a:r>
+          </a:p>
+          <a:p>
+            <a:pPr algn="l">
+              <a:spcBef>
+                <a:spcPts val="400"/>
+              </a:spcBef>
+            </a:pPr>
+            <a:r>
+              <a:rPr sz="2200" b="0" i="0">
+                <a:solidFill>
+                  <a:srgbClr val="000000"/>
+                </a:solidFill>
+                <a:latin typeface="Arial"/>
+              </a:rPr>
+              <a:t>Non-factorizable gates stay irreducible.</a:t>
             </a:r>
           </a:p>
         </p:txBody>
@@ -5711,8 +5755,8 @@
         </p:nvSpPr>
         <p:spPr>
           <a:xfrm>
-            <a:off x="822960" y="640080"/>
-            <a:ext cx="10545775" cy="1188720"/>
+            <a:off x="822960" y="502920"/>
+            <a:ext cx="10545775" cy="274320"/>
           </a:xfrm>
           <a:prstGeom prst="rect">
             <a:avLst/>
@@ -5720,7 +5764,7 @@
           <a:noFill/>
         </p:spPr>
         <p:txBody>
-          <a:bodyPr wrap="square" anchor="b" lIns="0" rIns="0" tIns="0" bIns="0">
+          <a:bodyPr wrap="square" anchor="t" lIns="0" rIns="0" tIns="0" bIns="0">
             <a:spAutoFit/>
           </a:bodyPr>
           <a:lstStyle/>
@@ -5731,13 +5775,13 @@
               </a:spcBef>
             </a:pPr>
             <a:r>
-              <a:rPr sz="3600" b="1" i="0">
-                <a:solidFill>
-                  <a:srgbClr val="000000"/>
-                </a:solidFill>
-                <a:latin typeface="Arial"/>
-              </a:rPr>
-              <a:t>If Quine is right, Thirdness is notation</a:t>
+              <a:rPr sz="1400" b="0" i="0">
+                <a:solidFill>
+                  <a:srgbClr val="000000"/>
+                </a:solidFill>
+                <a:latin typeface="Arial"/>
+              </a:rPr>
+              <a:t>INFORMATION DECOMPOSITION</a:t>
             </a:r>
           </a:p>
         </p:txBody>
@@ -5750,8 +5794,8 @@
         </p:nvSpPr>
         <p:spPr>
           <a:xfrm>
-            <a:off x="822960" y="2103120"/>
-            <a:ext cx="10545775" cy="3931920"/>
+            <a:off x="822960" y="822960"/>
+            <a:ext cx="10545775" cy="1005840"/>
           </a:xfrm>
           <a:prstGeom prst="rect">
             <a:avLst/>
@@ -5770,45 +5814,182 @@
               </a:spcBef>
             </a:pPr>
             <a:r>
-              <a:rPr sz="2400" b="0" i="0">
-                <a:solidFill>
-                  <a:srgbClr val="000000"/>
-                </a:solidFill>
-                <a:latin typeface="Arial"/>
-              </a:rPr>
-              <a:t>Any triad can be rewritten as pairs.</a:t>
-            </a:r>
-          </a:p>
-          <a:p>
-            <a:pPr algn="l">
-              <a:spcBef>
-                <a:spcPts val="1400"/>
-              </a:spcBef>
-            </a:pPr>
-            <a:r>
-              <a:rPr sz="2400" b="0" i="0">
-                <a:solidFill>
-                  <a:srgbClr val="000000"/>
-                </a:solidFill>
-                <a:latin typeface="Arial"/>
-              </a:rPr>
-              <a:t>Then Thirdness is not a kind of being.</a:t>
-            </a:r>
-          </a:p>
-          <a:p>
-            <a:pPr algn="l">
-              <a:spcBef>
-                <a:spcPts val="1400"/>
-              </a:spcBef>
-            </a:pPr>
-            <a:r>
-              <a:rPr sz="2400" b="0" i="0">
-                <a:solidFill>
-                  <a:srgbClr val="000000"/>
-                </a:solidFill>
-                <a:latin typeface="Arial"/>
-              </a:rPr>
-              <a:t>Then algorithmacy is not a thing.</a:t>
+              <a:rPr sz="3400" b="1" i="0">
+                <a:solidFill>
+                  <a:srgbClr val="000000"/>
+                </a:solidFill>
+                <a:latin typeface="Arial"/>
+              </a:rPr>
+              <a:t>The Synergistic Teridentity Correspondence</a:t>
+            </a:r>
+          </a:p>
+        </p:txBody>
+      </p:sp>
+      <p:sp>
+        <p:nvSpPr>
+          <p:cNvPr id="4" name="TextBox 3"/>
+          <p:cNvSpPr txBox="1"/>
+          <p:nvPr/>
+        </p:nvSpPr>
+        <p:spPr>
+          <a:xfrm>
+            <a:off x="822960" y="2011680"/>
+            <a:ext cx="10545775" cy="4297680"/>
+          </a:xfrm>
+          <a:prstGeom prst="rect">
+            <a:avLst/>
+          </a:prstGeom>
+          <a:noFill/>
+        </p:spPr>
+        <p:txBody>
+          <a:bodyPr wrap="square" anchor="t" lIns="0" rIns="0" tIns="0" bIns="0">
+            <a:spAutoFit/>
+          </a:bodyPr>
+          <a:lstStyle/>
+          <a:p>
+            <a:pPr algn="l">
+              <a:spcBef>
+                <a:spcPts val="0"/>
+              </a:spcBef>
+            </a:pPr>
+            <a:r>
+              <a:rPr sz="2200" b="1" i="0">
+                <a:solidFill>
+                  <a:srgbClr val="000000"/>
+                </a:solidFill>
+                <a:latin typeface="Arial"/>
+              </a:rPr>
+              <a:t>WILLIAMS &amp; BEER (2010) PID</a:t>
+            </a:r>
+          </a:p>
+          <a:p>
+            <a:pPr algn="l">
+              <a:spcBef>
+                <a:spcPts val="400"/>
+              </a:spcBef>
+            </a:pPr>
+            <a:r>
+              <a:rPr sz="2200" b="0" i="0">
+                <a:solidFill>
+                  <a:srgbClr val="000000"/>
+                </a:solidFill>
+                <a:latin typeface="Arial"/>
+              </a:rPr>
+              <a:t>I(X1, X2; Y) = Red + Un1 + Un2 + Syn</a:t>
+            </a:r>
+          </a:p>
+          <a:p>
+            <a:pPr algn="l">
+              <a:spcBef>
+                <a:spcPts val="400"/>
+              </a:spcBef>
+            </a:pPr>
+            <a:r>
+              <a:rPr sz="2200" b="0" i="0">
+                <a:solidFill>
+                  <a:srgbClr val="000000"/>
+                </a:solidFill>
+                <a:latin typeface="Arial"/>
+              </a:rPr>
+              <a:t>Synergy is the dynamic, measure-theoretic manifestation of teridentity =_3.</a:t>
+            </a:r>
+          </a:p>
+          <a:p>
+            <a:pPr algn="l">
+              <a:spcBef>
+                <a:spcPts val="1600"/>
+              </a:spcBef>
+            </a:pPr>
+            <a:r>
+              <a:rPr sz="2200" b="1" i="0">
+                <a:solidFill>
+                  <a:srgbClr val="000000"/>
+                </a:solidFill>
+                <a:latin typeface="Arial"/>
+              </a:rPr>
+              <a:t>Canonical Case: 2-Input XOR</a:t>
+            </a:r>
+          </a:p>
+          <a:p>
+            <a:pPr algn="l">
+              <a:spcBef>
+                <a:spcPts val="400"/>
+              </a:spcBef>
+            </a:pPr>
+            <a:r>
+              <a:rPr sz="2200" b="0" i="0">
+                <a:solidFill>
+                  <a:srgbClr val="000000"/>
+                </a:solidFill>
+                <a:latin typeface="Arial"/>
+              </a:rPr>
+              <a:t>Y = X1 </a:t>
+            </a:r>
+            <a:r>
+              <a:rPr sz="2200" b="0" i="0">
+                <a:solidFill>
+                  <a:srgbClr val="000000"/>
+                </a:solidFill>
+                <a:latin typeface="Cambria Math"/>
+              </a:rPr>
+              <a:t>⊕</a:t>
+            </a:r>
+            <a:r>
+              <a:rPr sz="2200" b="0" i="0">
+                <a:solidFill>
+                  <a:srgbClr val="000000"/>
+                </a:solidFill>
+                <a:latin typeface="Arial"/>
+              </a:rPr>
+              <a:t> X2 • Syn(X1, X2; Y) = 1.0 bit</a:t>
+            </a:r>
+          </a:p>
+          <a:p>
+            <a:pPr algn="l">
+              <a:spcBef>
+                <a:spcPts val="400"/>
+              </a:spcBef>
+            </a:pPr>
+            <a:r>
+              <a:rPr sz="2200" b="0" i="0">
+                <a:solidFill>
+                  <a:srgbClr val="000000"/>
+                </a:solidFill>
+                <a:latin typeface="Arial"/>
+              </a:rPr>
+              <a:t>Marginal Vanishing: Individual mutual informations I(Xi; Y) = 0.</a:t>
+            </a:r>
+          </a:p>
+          <a:p>
+            <a:pPr algn="l">
+              <a:spcBef>
+                <a:spcPts val="400"/>
+              </a:spcBef>
+            </a:pPr>
+            <a:r>
+              <a:rPr sz="2200" b="0" i="0">
+                <a:solidFill>
+                  <a:srgbClr val="000000"/>
+                </a:solidFill>
+                <a:latin typeface="Arial"/>
+              </a:rPr>
+              <a:t>Joint Determination: Knowledge of both sources uniquely determines output.</a:t>
+            </a:r>
+          </a:p>
+          <a:p>
+            <a:pPr algn="l">
+              <a:spcBef>
+                <a:spcPts val="400"/>
+              </a:spcBef>
+            </a:pPr>
+            <a:r>
+              <a:rPr sz="2200" b="0" i="0">
+                <a:solidFill>
+                  <a:srgbClr val="000000"/>
+                </a:solidFill>
+                <a:latin typeface="Arial"/>
+              </a:rPr>
+              <a:t>Join-Irreducible Support: Parity forms non-factorizable relational subset.</a:t>
             </a:r>
           </a:p>
         </p:txBody>
@@ -5847,8 +6028,8 @@
         </p:nvSpPr>
         <p:spPr>
           <a:xfrm>
-            <a:off x="822960" y="640080"/>
-            <a:ext cx="10545775" cy="1188720"/>
+            <a:off x="822960" y="502920"/>
+            <a:ext cx="10545775" cy="274320"/>
           </a:xfrm>
           <a:prstGeom prst="rect">
             <a:avLst/>
@@ -5856,7 +6037,7 @@
           <a:noFill/>
         </p:spPr>
         <p:txBody>
-          <a:bodyPr wrap="square" anchor="b" lIns="0" rIns="0" tIns="0" bIns="0">
+          <a:bodyPr wrap="square" anchor="t" lIns="0" rIns="0" tIns="0" bIns="0">
             <a:spAutoFit/>
           </a:bodyPr>
           <a:lstStyle/>
@@ -5867,13 +6048,13 @@
               </a:spcBef>
             </a:pPr>
             <a:r>
-              <a:rPr sz="3600" b="1" i="0">
-                <a:solidFill>
-                  <a:srgbClr val="000000"/>
-                </a:solidFill>
-                <a:latin typeface="Arial"/>
-              </a:rPr>
-              <a:t>The logicians: it depends on the operations</a:t>
+              <a:rPr sz="1400" b="0" i="0">
+                <a:solidFill>
+                  <a:srgbClr val="000000"/>
+                </a:solidFill>
+                <a:latin typeface="Arial"/>
+              </a:rPr>
+              <a:t>CAUSAL INTEGRATION</a:t>
             </a:r>
           </a:p>
         </p:txBody>
@@ -5886,8 +6067,8 @@
         </p:nvSpPr>
         <p:spPr>
           <a:xfrm>
-            <a:off x="822960" y="2103120"/>
-            <a:ext cx="10545775" cy="3931920"/>
+            <a:off x="822960" y="822960"/>
+            <a:ext cx="10545775" cy="1005840"/>
           </a:xfrm>
           <a:prstGeom prst="rect">
             <a:avLst/>
@@ -5906,61 +6087,100 @@
               </a:spcBef>
             </a:pPr>
             <a:r>
-              <a:rPr sz="2400" b="0" i="0">
-                <a:solidFill>
-                  <a:srgbClr val="000000"/>
-                </a:solidFill>
-                <a:latin typeface="Arial"/>
-              </a:rPr>
-              <a:t>Herzberger 1981: the thesis holds for valency-regular constructions with relative products</a:t>
-            </a:r>
-          </a:p>
-          <a:p>
-            <a:pPr algn="l">
-              <a:spcBef>
-                <a:spcPts val="1400"/>
-              </a:spcBef>
-            </a:pPr>
-            <a:r>
-              <a:rPr sz="2400" b="0" i="1">
-                <a:solidFill>
-                  <a:srgbClr val="000000"/>
-                </a:solidFill>
-                <a:latin typeface="Arial"/>
-              </a:rPr>
-              <a:t>the reduction thesis collapses under standard notions of definability</a:t>
-            </a:r>
-          </a:p>
-          <a:p>
-            <a:pPr algn="l">
-              <a:spcBef>
-                <a:spcPts val="1400"/>
-              </a:spcBef>
-            </a:pPr>
-            <a:r>
-              <a:rPr sz="1800" b="0" i="0">
-                <a:solidFill>
-                  <a:srgbClr val="000000"/>
-                </a:solidFill>
-                <a:latin typeface="Arial"/>
-              </a:rPr>
-              <a:t>— Herzberger, 1981</a:t>
-            </a:r>
-          </a:p>
-          <a:p>
-            <a:pPr algn="l">
-              <a:spcBef>
-                <a:spcPts val="1400"/>
-              </a:spcBef>
-            </a:pPr>
-            <a:r>
-              <a:rPr sz="2400" b="0" i="0">
-                <a:solidFill>
-                  <a:srgbClr val="000000"/>
-                </a:solidFill>
-                <a:latin typeface="Arial"/>
-              </a:rPr>
-              <a:t>Burch 1991: a proof inside Peircean algebra, under a restriction</a:t>
+              <a:rPr sz="3400" b="1" i="0">
+                <a:solidFill>
+                  <a:srgbClr val="000000"/>
+                </a:solidFill>
+                <a:latin typeface="Arial"/>
+              </a:rPr>
+              <a:t>Causal Collapse Theorem (IIT 4.0)</a:t>
+            </a:r>
+          </a:p>
+        </p:txBody>
+      </p:sp>
+      <p:sp>
+        <p:nvSpPr>
+          <p:cNvPr id="4" name="TextBox 3"/>
+          <p:cNvSpPr txBox="1"/>
+          <p:nvPr/>
+        </p:nvSpPr>
+        <p:spPr>
+          <a:xfrm>
+            <a:off x="822960" y="2011680"/>
+            <a:ext cx="10545775" cy="4297680"/>
+          </a:xfrm>
+          <a:prstGeom prst="rect">
+            <a:avLst/>
+          </a:prstGeom>
+          <a:noFill/>
+        </p:spPr>
+        <p:txBody>
+          <a:bodyPr wrap="square" anchor="t" lIns="0" rIns="0" tIns="0" bIns="0">
+            <a:spAutoFit/>
+          </a:bodyPr>
+          <a:lstStyle/>
+          <a:p>
+            <a:pPr algn="l">
+              <a:spcBef>
+                <a:spcPts val="0"/>
+              </a:spcBef>
+            </a:pPr>
+            <a:r>
+              <a:rPr sz="2200" b="1" i="0">
+                <a:solidFill>
+                  <a:srgbClr val="000000"/>
+                </a:solidFill>
+                <a:latin typeface="Arial"/>
+              </a:rPr>
+              <a:t>Φ = 0</a:t>
+            </a:r>
+          </a:p>
+          <a:p>
+            <a:pPr algn="l">
+              <a:spcBef>
+                <a:spcPts val="1600"/>
+              </a:spcBef>
+            </a:pPr>
+            <a:r>
+              <a:rPr sz="2200" b="1" i="0">
+                <a:solidFill>
+                  <a:srgbClr val="000000"/>
+                </a:solidFill>
+                <a:latin typeface="Arial"/>
+              </a:rPr>
+              <a:t>Extensional Dyadic Decomposition Erases System Synergy</a:t>
+            </a:r>
+          </a:p>
+          <a:p>
+            <a:pPr algn="l">
+              <a:spcBef>
+                <a:spcPts val="400"/>
+              </a:spcBef>
+            </a:pPr>
+            <a:r>
+              <a:rPr sz="2200" b="0" i="0">
+                <a:solidFill>
+                  <a:srgbClr val="000000"/>
+                </a:solidFill>
+                <a:latin typeface="Arial"/>
+              </a:rPr>
+              <a:t>Forcing multi-input causal mechanisms into dyadic channels matches the partitioned repertoire with the whole.</a:t>
+            </a:r>
+          </a:p>
+          <a:p>
+            <a:pPr algn="l">
+              <a:spcBef>
+                <a:spcPts val="400"/>
+              </a:spcBef>
+            </a:pPr>
+            <a:r>
+              <a:rPr sz="2200" b="0" i="0">
+                <a:solidFill>
+                  <a:srgbClr val="000000"/>
+                </a:solidFill>
+                <a:latin typeface="Arial"/>
+              </a:rPr>
+              <a:t>Integrated information vanishes under the Minimum Information Partition (MIP).</a:t>
             </a:r>
           </a:p>
         </p:txBody>
@@ -5999,8 +6219,8 @@
         </p:nvSpPr>
         <p:spPr>
           <a:xfrm>
-            <a:off x="822960" y="640080"/>
-            <a:ext cx="10545775" cy="1188720"/>
+            <a:off x="822960" y="502920"/>
+            <a:ext cx="10545775" cy="274320"/>
           </a:xfrm>
           <a:prstGeom prst="rect">
             <a:avLst/>
@@ -6008,7 +6228,7 @@
           <a:noFill/>
         </p:spPr>
         <p:txBody>
-          <a:bodyPr wrap="square" anchor="b" lIns="0" rIns="0" tIns="0" bIns="0">
+          <a:bodyPr wrap="square" anchor="t" lIns="0" rIns="0" tIns="0" bIns="0">
             <a:spAutoFit/>
           </a:bodyPr>
           <a:lstStyle/>
@@ -6019,13 +6239,13 @@
               </a:spcBef>
             </a:pPr>
             <a:r>
-              <a:rPr sz="3600" b="1" i="0">
-                <a:solidFill>
-                  <a:srgbClr val="000000"/>
-                </a:solidFill>
-                <a:latin typeface="Arial"/>
-              </a:rPr>
-              <a:t>The three-way junction decides it</a:t>
+              <a:rPr sz="1400" b="0" i="0">
+                <a:solidFill>
+                  <a:srgbClr val="000000"/>
+                </a:solidFill>
+                <a:latin typeface="Arial"/>
+              </a:rPr>
+              <a:t>EMPIRICAL VERIFICATION</a:t>
             </a:r>
           </a:p>
         </p:txBody>
@@ -6038,8 +6258,8 @@
         </p:nvSpPr>
         <p:spPr>
           <a:xfrm>
-            <a:off x="822960" y="2103120"/>
-            <a:ext cx="10545775" cy="3931920"/>
+            <a:off x="822960" y="822960"/>
+            <a:ext cx="10545775" cy="1005840"/>
           </a:xfrm>
           <a:prstGeom prst="rect">
             <a:avLst/>
@@ -6058,49 +6278,1056 @@
               </a:spcBef>
             </a:pPr>
             <a:r>
-              <a:rPr sz="2400" b="0" i="0">
-                <a:solidFill>
-                  <a:srgbClr val="000000"/>
-                </a:solidFill>
-                <a:latin typeface="Arial"/>
-              </a:rPr>
-              <a:t>Hereth Correia &amp; Pöschel 2006: in Peirce's algebra, pairs alone never build the three-way identity</a:t>
-            </a:r>
-          </a:p>
-          <a:p>
-            <a:pPr algn="l">
-              <a:spcBef>
-                <a:spcPts val="1400"/>
-              </a:spcBef>
-            </a:pPr>
-            <a:r>
-              <a:rPr sz="2400" b="0" i="0">
-                <a:solidFill>
-                  <a:srgbClr val="000000"/>
-                </a:solidFill>
-                <a:latin typeface="Arial"/>
-              </a:rPr>
-              <a:t>Dau &amp; Hereth Correia 2006: in relational algebra it is "hidden in the operations"</a:t>
-            </a:r>
-          </a:p>
-          <a:p>
-            <a:pPr algn="l">
-              <a:spcBef>
-                <a:spcPts val="1400"/>
-              </a:spcBef>
-            </a:pPr>
-            <a:r>
-              <a:rPr sz="2400" b="0" i="0">
-                <a:solidFill>
-                  <a:srgbClr val="000000"/>
-                </a:solidFill>
-                <a:latin typeface="Arial"/>
-              </a:rPr>
-              <a:t>Koshkin 2025: with free variable-sharing, triads reduce to pairs on domains of 3+ values; on two-valued domains some do not</a:t>
-            </a:r>
-          </a:p>
-        </p:txBody>
-      </p:sp>
+              <a:rPr sz="3400" b="1" i="0">
+                <a:solidFill>
+                  <a:srgbClr val="000000"/>
+                </a:solidFill>
+                <a:latin typeface="Arial"/>
+              </a:rPr>
+              <a:t>IIT 4.0 Topological Architecture Sort</a:t>
+            </a:r>
+          </a:p>
+        </p:txBody>
+      </p:sp>
+      <p:graphicFrame>
+        <p:nvGraphicFramePr>
+          <p:cNvPr id="4" name="Table 3"/>
+          <p:cNvGraphicFramePr>
+            <a:graphicFrameLocks noGrp="1"/>
+          </p:cNvGraphicFramePr>
+          <p:nvPr/>
+        </p:nvGraphicFramePr>
+        <p:xfrm>
+          <a:off x="822960" y="2286000"/>
+          <a:ext cx="10545775" cy="2514600"/>
+        </p:xfrm>
+        <a:graphic>
+          <a:graphicData uri="http://schemas.openxmlformats.org/drawingml/2006/table">
+            <a:tbl>
+              <a:tblPr firstRow="0" bandRow="0">
+                <a:tableStyleId>{5940675A-B579-460E-94D1-54222C63F5DA}</a:tableStyleId>
+              </a:tblPr>
+              <a:tblGrid>
+                <a:gridCol w="2109155"/>
+                <a:gridCol w="2109155"/>
+                <a:gridCol w="2109155"/>
+                <a:gridCol w="2109155"/>
+                <a:gridCol w="2109155"/>
+              </a:tblGrid>
+              <a:tr h="502920">
+                <a:tc>
+                  <a:txBody>
+                    <a:bodyPr wrap="square"/>
+                    <a:lstStyle/>
+                    <a:p>
+                      <a:r>
+                        <a:rPr sz="1600" b="1" i="0">
+                          <a:solidFill>
+                            <a:srgbClr val="000000"/>
+                          </a:solidFill>
+                          <a:latin typeface="Arial"/>
+                        </a:rPr>
+                        <a:t>Topology Class</a:t>
+                      </a:r>
+                    </a:p>
+                  </a:txBody>
+                  <a:tcPr marL="73152" marR="73152">
+                    <a:noFill/>
+                    <a:lnL w="9525">
+                      <a:solidFill>
+                        <a:srgbClr val="000000"/>
+                      </a:solidFill>
+                    </a:lnL>
+                    <a:lnR w="9525">
+                      <a:solidFill>
+                        <a:srgbClr val="000000"/>
+                      </a:solidFill>
+                    </a:lnR>
+                    <a:lnT w="9525">
+                      <a:solidFill>
+                        <a:srgbClr val="000000"/>
+                      </a:solidFill>
+                    </a:lnT>
+                    <a:lnB w="9525">
+                      <a:solidFill>
+                        <a:srgbClr val="000000"/>
+                      </a:solidFill>
+                    </a:lnB>
+                  </a:tcPr>
+                </a:tc>
+                <a:tc>
+                  <a:txBody>
+                    <a:bodyPr wrap="square"/>
+                    <a:lstStyle/>
+                    <a:p>
+                      <a:r>
+                        <a:rPr sz="1600" b="1" i="0">
+                          <a:solidFill>
+                            <a:srgbClr val="000000"/>
+                          </a:solidFill>
+                          <a:latin typeface="Arial"/>
+                        </a:rPr>
+                        <a:t>Wiring Count</a:t>
+                      </a:r>
+                    </a:p>
+                  </a:txBody>
+                  <a:tcPr marL="73152" marR="73152">
+                    <a:noFill/>
+                    <a:lnL w="9525">
+                      <a:solidFill>
+                        <a:srgbClr val="000000"/>
+                      </a:solidFill>
+                    </a:lnL>
+                    <a:lnR w="9525">
+                      <a:solidFill>
+                        <a:srgbClr val="000000"/>
+                      </a:solidFill>
+                    </a:lnR>
+                    <a:lnT w="9525">
+                      <a:solidFill>
+                        <a:srgbClr val="000000"/>
+                      </a:solidFill>
+                    </a:lnT>
+                    <a:lnB w="9525">
+                      <a:solidFill>
+                        <a:srgbClr val="000000"/>
+                      </a:solidFill>
+                    </a:lnB>
+                  </a:tcPr>
+                </a:tc>
+                <a:tc>
+                  <a:txBody>
+                    <a:bodyPr wrap="square"/>
+                    <a:lstStyle/>
+                    <a:p>
+                      <a:r>
+                        <a:rPr sz="1600" b="1" i="0">
+                          <a:solidFill>
+                            <a:srgbClr val="000000"/>
+                          </a:solidFill>
+                          <a:latin typeface="Arial"/>
+                        </a:rPr>
+                        <a:t>Mechanism Support</a:t>
+                      </a:r>
+                    </a:p>
+                  </a:txBody>
+                  <a:tcPr marL="73152" marR="73152">
+                    <a:noFill/>
+                    <a:lnL w="9525">
+                      <a:solidFill>
+                        <a:srgbClr val="000000"/>
+                      </a:solidFill>
+                    </a:lnL>
+                    <a:lnR w="9525">
+                      <a:solidFill>
+                        <a:srgbClr val="000000"/>
+                      </a:solidFill>
+                    </a:lnR>
+                    <a:lnT w="9525">
+                      <a:solidFill>
+                        <a:srgbClr val="000000"/>
+                      </a:solidFill>
+                    </a:lnT>
+                    <a:lnB w="9525">
+                      <a:solidFill>
+                        <a:srgbClr val="000000"/>
+                      </a:solidFill>
+                    </a:lnB>
+                  </a:tcPr>
+                </a:tc>
+                <a:tc>
+                  <a:txBody>
+                    <a:bodyPr wrap="square"/>
+                    <a:lstStyle/>
+                    <a:p>
+                      <a:r>
+                        <a:rPr sz="1600" b="1" i="0">
+                          <a:solidFill>
+                            <a:srgbClr val="000000"/>
+                          </a:solidFill>
+                          <a:latin typeface="Arial"/>
+                        </a:rPr>
+                        <a:t>System Φ</a:t>
+                      </a:r>
+                    </a:p>
+                  </a:txBody>
+                  <a:tcPr marL="73152" marR="73152">
+                    <a:noFill/>
+                    <a:lnL w="9525">
+                      <a:solidFill>
+                        <a:srgbClr val="000000"/>
+                      </a:solidFill>
+                    </a:lnL>
+                    <a:lnR w="9525">
+                      <a:solidFill>
+                        <a:srgbClr val="000000"/>
+                      </a:solidFill>
+                    </a:lnR>
+                    <a:lnT w="9525">
+                      <a:solidFill>
+                        <a:srgbClr val="000000"/>
+                      </a:solidFill>
+                    </a:lnT>
+                    <a:lnB w="9525">
+                      <a:solidFill>
+                        <a:srgbClr val="000000"/>
+                      </a:solidFill>
+                    </a:lnB>
+                  </a:tcPr>
+                </a:tc>
+                <a:tc>
+                  <a:txBody>
+                    <a:bodyPr wrap="square"/>
+                    <a:lstStyle/>
+                    <a:p>
+                      <a:r>
+                        <a:rPr sz="1600" b="1" i="0">
+                          <a:solidFill>
+                            <a:srgbClr val="000000"/>
+                          </a:solidFill>
+                          <a:latin typeface="Arial"/>
+                        </a:rPr>
+                        <a:t>Causal Status</a:t>
+                      </a:r>
+                    </a:p>
+                  </a:txBody>
+                  <a:tcPr marL="73152" marR="73152">
+                    <a:noFill/>
+                    <a:lnL w="9525">
+                      <a:solidFill>
+                        <a:srgbClr val="000000"/>
+                      </a:solidFill>
+                    </a:lnL>
+                    <a:lnR w="9525">
+                      <a:solidFill>
+                        <a:srgbClr val="000000"/>
+                      </a:solidFill>
+                    </a:lnR>
+                    <a:lnT w="9525">
+                      <a:solidFill>
+                        <a:srgbClr val="000000"/>
+                      </a:solidFill>
+                    </a:lnT>
+                    <a:lnB w="9525">
+                      <a:solidFill>
+                        <a:srgbClr val="000000"/>
+                      </a:solidFill>
+                    </a:lnB>
+                  </a:tcPr>
+                </a:tc>
+              </a:tr>
+              <a:tr h="502920">
+                <a:tc>
+                  <a:txBody>
+                    <a:bodyPr wrap="square"/>
+                    <a:lstStyle/>
+                    <a:p>
+                      <a:r>
+                        <a:rPr sz="1600" b="0" i="0">
+                          <a:solidFill>
+                            <a:srgbClr val="000000"/>
+                          </a:solidFill>
+                          <a:latin typeface="Arial"/>
+                        </a:rPr>
+                        <a:t>Dyadic Cascade</a:t>
+                      </a:r>
+                    </a:p>
+                  </a:txBody>
+                  <a:tcPr marL="73152" marR="73152">
+                    <a:noFill/>
+                    <a:lnL w="9525">
+                      <a:solidFill>
+                        <a:srgbClr val="000000"/>
+                      </a:solidFill>
+                    </a:lnL>
+                    <a:lnR w="9525">
+                      <a:solidFill>
+                        <a:srgbClr val="000000"/>
+                      </a:solidFill>
+                    </a:lnR>
+                    <a:lnT w="9525">
+                      <a:solidFill>
+                        <a:srgbClr val="000000"/>
+                      </a:solidFill>
+                    </a:lnT>
+                    <a:lnB w="9525">
+                      <a:solidFill>
+                        <a:srgbClr val="000000"/>
+                      </a:solidFill>
+                    </a:lnB>
+                  </a:tcPr>
+                </a:tc>
+                <a:tc>
+                  <a:txBody>
+                    <a:bodyPr wrap="square"/>
+                    <a:lstStyle/>
+                    <a:p>
+                      <a:r>
+                        <a:rPr sz="1600" b="0" i="0">
+                          <a:solidFill>
+                            <a:srgbClr val="000000"/>
+                          </a:solidFill>
+                          <a:latin typeface="Arial"/>
+                        </a:rPr>
+                        <a:t>89 Wirings</a:t>
+                      </a:r>
+                    </a:p>
+                  </a:txBody>
+                  <a:tcPr marL="73152" marR="73152">
+                    <a:noFill/>
+                    <a:lnL w="9525">
+                      <a:solidFill>
+                        <a:srgbClr val="000000"/>
+                      </a:solidFill>
+                    </a:lnL>
+                    <a:lnR w="9525">
+                      <a:solidFill>
+                        <a:srgbClr val="000000"/>
+                      </a:solidFill>
+                    </a:lnR>
+                    <a:lnT w="9525">
+                      <a:solidFill>
+                        <a:srgbClr val="000000"/>
+                      </a:solidFill>
+                    </a:lnT>
+                    <a:lnB w="9525">
+                      <a:solidFill>
+                        <a:srgbClr val="000000"/>
+                      </a:solidFill>
+                    </a:lnB>
+                  </a:tcPr>
+                </a:tc>
+                <a:tc>
+                  <a:txBody>
+                    <a:bodyPr wrap="square"/>
+                    <a:lstStyle/>
+                    <a:p>
+                      <a:r>
+                        <a:rPr sz="1600" b="0" i="0">
+                          <a:solidFill>
+                            <a:srgbClr val="000000"/>
+                          </a:solidFill>
+                          <a:latin typeface="Arial"/>
+                        </a:rPr>
+                        <a:t>Point-to-point lines</a:t>
+                      </a:r>
+                    </a:p>
+                  </a:txBody>
+                  <a:tcPr marL="73152" marR="73152">
+                    <a:noFill/>
+                    <a:lnL w="9525">
+                      <a:solidFill>
+                        <a:srgbClr val="000000"/>
+                      </a:solidFill>
+                    </a:lnL>
+                    <a:lnR w="9525">
+                      <a:solidFill>
+                        <a:srgbClr val="000000"/>
+                      </a:solidFill>
+                    </a:lnR>
+                    <a:lnT w="9525">
+                      <a:solidFill>
+                        <a:srgbClr val="000000"/>
+                      </a:solidFill>
+                    </a:lnT>
+                    <a:lnB w="9525">
+                      <a:solidFill>
+                        <a:srgbClr val="000000"/>
+                      </a:solidFill>
+                    </a:lnB>
+                  </a:tcPr>
+                </a:tc>
+                <a:tc>
+                  <a:txBody>
+                    <a:bodyPr wrap="square"/>
+                    <a:lstStyle/>
+                    <a:p>
+                      <a:r>
+                        <a:rPr sz="1600" b="0" i="0">
+                          <a:solidFill>
+                            <a:srgbClr val="000000"/>
+                          </a:solidFill>
+                          <a:latin typeface="Arial"/>
+                        </a:rPr>
+                        <a:t>Φ = 0.0</a:t>
+                      </a:r>
+                    </a:p>
+                  </a:txBody>
+                  <a:tcPr marL="73152" marR="73152">
+                    <a:noFill/>
+                    <a:lnL w="9525">
+                      <a:solidFill>
+                        <a:srgbClr val="000000"/>
+                      </a:solidFill>
+                    </a:lnL>
+                    <a:lnR w="9525">
+                      <a:solidFill>
+                        <a:srgbClr val="000000"/>
+                      </a:solidFill>
+                    </a:lnR>
+                    <a:lnT w="9525">
+                      <a:solidFill>
+                        <a:srgbClr val="000000"/>
+                      </a:solidFill>
+                    </a:lnT>
+                    <a:lnB w="9525">
+                      <a:solidFill>
+                        <a:srgbClr val="000000"/>
+                      </a:solidFill>
+                    </a:lnB>
+                  </a:tcPr>
+                </a:tc>
+                <a:tc>
+                  <a:txBody>
+                    <a:bodyPr wrap="square"/>
+                    <a:lstStyle/>
+                    <a:p>
+                      <a:r>
+                        <a:rPr sz="1600" b="0" i="0">
+                          <a:solidFill>
+                            <a:srgbClr val="000000"/>
+                          </a:solidFill>
+                          <a:latin typeface="Arial"/>
+                        </a:rPr>
+                        <a:t>No Complex</a:t>
+                      </a:r>
+                    </a:p>
+                  </a:txBody>
+                  <a:tcPr marL="73152" marR="73152">
+                    <a:noFill/>
+                    <a:lnL w="9525">
+                      <a:solidFill>
+                        <a:srgbClr val="000000"/>
+                      </a:solidFill>
+                    </a:lnL>
+                    <a:lnR w="9525">
+                      <a:solidFill>
+                        <a:srgbClr val="000000"/>
+                      </a:solidFill>
+                    </a:lnR>
+                    <a:lnT w="9525">
+                      <a:solidFill>
+                        <a:srgbClr val="000000"/>
+                      </a:solidFill>
+                    </a:lnT>
+                    <a:lnB w="9525">
+                      <a:solidFill>
+                        <a:srgbClr val="000000"/>
+                      </a:solidFill>
+                    </a:lnB>
+                  </a:tcPr>
+                </a:tc>
+              </a:tr>
+              <a:tr h="502920">
+                <a:tc>
+                  <a:txBody>
+                    <a:bodyPr wrap="square"/>
+                    <a:lstStyle/>
+                    <a:p>
+                      <a:r>
+                        <a:rPr sz="1600" b="0" i="0">
+                          <a:solidFill>
+                            <a:srgbClr val="000000"/>
+                          </a:solidFill>
+                          <a:latin typeface="Arial"/>
+                        </a:rPr>
+                        <a:t>Dyadic Ring</a:t>
+                      </a:r>
+                    </a:p>
+                  </a:txBody>
+                  <a:tcPr marL="73152" marR="73152">
+                    <a:noFill/>
+                    <a:lnL w="9525">
+                      <a:solidFill>
+                        <a:srgbClr val="000000"/>
+                      </a:solidFill>
+                    </a:lnL>
+                    <a:lnR w="9525">
+                      <a:solidFill>
+                        <a:srgbClr val="000000"/>
+                      </a:solidFill>
+                    </a:lnR>
+                    <a:lnT w="9525">
+                      <a:solidFill>
+                        <a:srgbClr val="000000"/>
+                      </a:solidFill>
+                    </a:lnT>
+                    <a:lnB w="9525">
+                      <a:solidFill>
+                        <a:srgbClr val="000000"/>
+                      </a:solidFill>
+                    </a:lnB>
+                  </a:tcPr>
+                </a:tc>
+                <a:tc>
+                  <a:txBody>
+                    <a:bodyPr wrap="square"/>
+                    <a:lstStyle/>
+                    <a:p>
+                      <a:r>
+                        <a:rPr sz="1600" b="0" i="0">
+                          <a:solidFill>
+                            <a:srgbClr val="000000"/>
+                          </a:solidFill>
+                          <a:latin typeface="Arial"/>
+                        </a:rPr>
+                        <a:t>Feedback Loop</a:t>
+                      </a:r>
+                    </a:p>
+                  </a:txBody>
+                  <a:tcPr marL="73152" marR="73152">
+                    <a:noFill/>
+                    <a:lnL w="9525">
+                      <a:solidFill>
+                        <a:srgbClr val="000000"/>
+                      </a:solidFill>
+                    </a:lnL>
+                    <a:lnR w="9525">
+                      <a:solidFill>
+                        <a:srgbClr val="000000"/>
+                      </a:solidFill>
+                    </a:lnR>
+                    <a:lnT w="9525">
+                      <a:solidFill>
+                        <a:srgbClr val="000000"/>
+                      </a:solidFill>
+                    </a:lnT>
+                    <a:lnB w="9525">
+                      <a:solidFill>
+                        <a:srgbClr val="000000"/>
+                      </a:solidFill>
+                    </a:lnB>
+                  </a:tcPr>
+                </a:tc>
+                <a:tc>
+                  <a:txBody>
+                    <a:bodyPr wrap="square"/>
+                    <a:lstStyle/>
+                    <a:p>
+                      <a:r>
+                        <a:rPr sz="1600" b="0" i="0">
+                          <a:solidFill>
+                            <a:srgbClr val="000000"/>
+                          </a:solidFill>
+                          <a:latin typeface="Arial"/>
+                        </a:rPr>
+                        <a:t>Recurrent pairs</a:t>
+                      </a:r>
+                    </a:p>
+                  </a:txBody>
+                  <a:tcPr marL="73152" marR="73152">
+                    <a:noFill/>
+                    <a:lnL w="9525">
+                      <a:solidFill>
+                        <a:srgbClr val="000000"/>
+                      </a:solidFill>
+                    </a:lnL>
+                    <a:lnR w="9525">
+                      <a:solidFill>
+                        <a:srgbClr val="000000"/>
+                      </a:solidFill>
+                    </a:lnR>
+                    <a:lnT w="9525">
+                      <a:solidFill>
+                        <a:srgbClr val="000000"/>
+                      </a:solidFill>
+                    </a:lnT>
+                    <a:lnB w="9525">
+                      <a:solidFill>
+                        <a:srgbClr val="000000"/>
+                      </a:solidFill>
+                    </a:lnB>
+                  </a:tcPr>
+                </a:tc>
+                <a:tc>
+                  <a:txBody>
+                    <a:bodyPr wrap="square"/>
+                    <a:lstStyle/>
+                    <a:p>
+                      <a:r>
+                        <a:rPr sz="1600" b="0" i="0">
+                          <a:solidFill>
+                            <a:srgbClr val="000000"/>
+                          </a:solidFill>
+                          <a:latin typeface="Arial"/>
+                        </a:rPr>
+                        <a:t>Φ = 2.0</a:t>
+                      </a:r>
+                    </a:p>
+                  </a:txBody>
+                  <a:tcPr marL="73152" marR="73152">
+                    <a:noFill/>
+                    <a:lnL w="9525">
+                      <a:solidFill>
+                        <a:srgbClr val="000000"/>
+                      </a:solidFill>
+                    </a:lnL>
+                    <a:lnR w="9525">
+                      <a:solidFill>
+                        <a:srgbClr val="000000"/>
+                      </a:solidFill>
+                    </a:lnR>
+                    <a:lnT w="9525">
+                      <a:solidFill>
+                        <a:srgbClr val="000000"/>
+                      </a:solidFill>
+                    </a:lnT>
+                    <a:lnB w="9525">
+                      <a:solidFill>
+                        <a:srgbClr val="000000"/>
+                      </a:solidFill>
+                    </a:lnB>
+                  </a:tcPr>
+                </a:tc>
+                <a:tc>
+                  <a:txBody>
+                    <a:bodyPr wrap="square"/>
+                    <a:lstStyle/>
+                    <a:p>
+                      <a:r>
+                        <a:rPr sz="1600" b="0" i="0">
+                          <a:solidFill>
+                            <a:srgbClr val="000000"/>
+                          </a:solidFill>
+                          <a:latin typeface="Arial"/>
+                        </a:rPr>
+                        <a:t>Whole Without Synergy</a:t>
+                      </a:r>
+                    </a:p>
+                  </a:txBody>
+                  <a:tcPr marL="73152" marR="73152">
+                    <a:noFill/>
+                    <a:lnL w="9525">
+                      <a:solidFill>
+                        <a:srgbClr val="000000"/>
+                      </a:solidFill>
+                    </a:lnL>
+                    <a:lnR w="9525">
+                      <a:solidFill>
+                        <a:srgbClr val="000000"/>
+                      </a:solidFill>
+                    </a:lnR>
+                    <a:lnT w="9525">
+                      <a:solidFill>
+                        <a:srgbClr val="000000"/>
+                      </a:solidFill>
+                    </a:lnT>
+                    <a:lnB w="9525">
+                      <a:solidFill>
+                        <a:srgbClr val="000000"/>
+                      </a:solidFill>
+                    </a:lnB>
+                  </a:tcPr>
+                </a:tc>
+              </a:tr>
+              <a:tr h="502920">
+                <a:tc>
+                  <a:txBody>
+                    <a:bodyPr wrap="square"/>
+                    <a:lstStyle/>
+                    <a:p>
+                      <a:r>
+                        <a:rPr sz="1600" b="0" i="0">
+                          <a:solidFill>
+                            <a:srgbClr val="000000"/>
+                          </a:solidFill>
+                          <a:latin typeface="Arial"/>
+                        </a:rPr>
+                        <a:t>Uncoupled Triad</a:t>
+                      </a:r>
+                    </a:p>
+                  </a:txBody>
+                  <a:tcPr marL="73152" marR="73152">
+                    <a:noFill/>
+                    <a:lnL w="9525">
+                      <a:solidFill>
+                        <a:srgbClr val="000000"/>
+                      </a:solidFill>
+                    </a:lnL>
+                    <a:lnR w="9525">
+                      <a:solidFill>
+                        <a:srgbClr val="000000"/>
+                      </a:solidFill>
+                    </a:lnR>
+                    <a:lnT w="9525">
+                      <a:solidFill>
+                        <a:srgbClr val="000000"/>
+                      </a:solidFill>
+                    </a:lnT>
+                    <a:lnB w="9525">
+                      <a:solidFill>
+                        <a:srgbClr val="000000"/>
+                      </a:solidFill>
+                    </a:lnB>
+                  </a:tcPr>
+                </a:tc>
+                <a:tc>
+                  <a:txBody>
+                    <a:bodyPr wrap="square"/>
+                    <a:lstStyle/>
+                    <a:p>
+                      <a:r>
+                        <a:rPr sz="1600" b="0" i="0">
+                          <a:solidFill>
+                            <a:srgbClr val="000000"/>
+                          </a:solidFill>
+                          <a:latin typeface="Arial"/>
+                        </a:rPr>
+                        <a:t>11 / 30 Systems</a:t>
+                      </a:r>
+                    </a:p>
+                  </a:txBody>
+                  <a:tcPr marL="73152" marR="73152">
+                    <a:noFill/>
+                    <a:lnL w="9525">
+                      <a:solidFill>
+                        <a:srgbClr val="000000"/>
+                      </a:solidFill>
+                    </a:lnL>
+                    <a:lnR w="9525">
+                      <a:solidFill>
+                        <a:srgbClr val="000000"/>
+                      </a:solidFill>
+                    </a:lnR>
+                    <a:lnT w="9525">
+                      <a:solidFill>
+                        <a:srgbClr val="000000"/>
+                      </a:solidFill>
+                    </a:lnT>
+                    <a:lnB w="9525">
+                      <a:solidFill>
+                        <a:srgbClr val="000000"/>
+                      </a:solidFill>
+                    </a:lnB>
+                  </a:tcPr>
+                </a:tc>
+                <a:tc>
+                  <a:txBody>
+                    <a:bodyPr wrap="square"/>
+                    <a:lstStyle/>
+                    <a:p>
+                      <a:r>
+                        <a:rPr sz="1600" b="0" i="0">
+                          <a:solidFill>
+                            <a:srgbClr val="000000"/>
+                          </a:solidFill>
+                          <a:latin typeface="Arial"/>
+                        </a:rPr>
+                        <a:t>Synergistic gate</a:t>
+                      </a:r>
+                    </a:p>
+                  </a:txBody>
+                  <a:tcPr marL="73152" marR="73152">
+                    <a:noFill/>
+                    <a:lnL w="9525">
+                      <a:solidFill>
+                        <a:srgbClr val="000000"/>
+                      </a:solidFill>
+                    </a:lnL>
+                    <a:lnR w="9525">
+                      <a:solidFill>
+                        <a:srgbClr val="000000"/>
+                      </a:solidFill>
+                    </a:lnR>
+                    <a:lnT w="9525">
+                      <a:solidFill>
+                        <a:srgbClr val="000000"/>
+                      </a:solidFill>
+                    </a:lnT>
+                    <a:lnB w="9525">
+                      <a:solidFill>
+                        <a:srgbClr val="000000"/>
+                      </a:solidFill>
+                    </a:lnB>
+                  </a:tcPr>
+                </a:tc>
+                <a:tc>
+                  <a:txBody>
+                    <a:bodyPr wrap="square"/>
+                    <a:lstStyle/>
+                    <a:p>
+                      <a:r>
+                        <a:rPr sz="1600" b="0" i="0">
+                          <a:solidFill>
+                            <a:srgbClr val="000000"/>
+                          </a:solidFill>
+                          <a:latin typeface="Arial"/>
+                        </a:rPr>
+                        <a:t>Φ = 0.0</a:t>
+                      </a:r>
+                    </a:p>
+                  </a:txBody>
+                  <a:tcPr marL="73152" marR="73152">
+                    <a:noFill/>
+                    <a:lnL w="9525">
+                      <a:solidFill>
+                        <a:srgbClr val="000000"/>
+                      </a:solidFill>
+                    </a:lnL>
+                    <a:lnR w="9525">
+                      <a:solidFill>
+                        <a:srgbClr val="000000"/>
+                      </a:solidFill>
+                    </a:lnR>
+                    <a:lnT w="9525">
+                      <a:solidFill>
+                        <a:srgbClr val="000000"/>
+                      </a:solidFill>
+                    </a:lnT>
+                    <a:lnB w="9525">
+                      <a:solidFill>
+                        <a:srgbClr val="000000"/>
+                      </a:solidFill>
+                    </a:lnB>
+                  </a:tcPr>
+                </a:tc>
+                <a:tc>
+                  <a:txBody>
+                    <a:bodyPr wrap="square"/>
+                    <a:lstStyle/>
+                    <a:p>
+                      <a:r>
+                        <a:rPr sz="1600" b="0" i="0">
+                          <a:solidFill>
+                            <a:srgbClr val="000000"/>
+                          </a:solidFill>
+                          <a:latin typeface="Arial"/>
+                        </a:rPr>
+                        <a:t>Synergy Without Whole</a:t>
+                      </a:r>
+                    </a:p>
+                  </a:txBody>
+                  <a:tcPr marL="73152" marR="73152">
+                    <a:noFill/>
+                    <a:lnL w="9525">
+                      <a:solidFill>
+                        <a:srgbClr val="000000"/>
+                      </a:solidFill>
+                    </a:lnL>
+                    <a:lnR w="9525">
+                      <a:solidFill>
+                        <a:srgbClr val="000000"/>
+                      </a:solidFill>
+                    </a:lnR>
+                    <a:lnT w="9525">
+                      <a:solidFill>
+                        <a:srgbClr val="000000"/>
+                      </a:solidFill>
+                    </a:lnT>
+                    <a:lnB w="9525">
+                      <a:solidFill>
+                        <a:srgbClr val="000000"/>
+                      </a:solidFill>
+                    </a:lnB>
+                  </a:tcPr>
+                </a:tc>
+              </a:tr>
+              <a:tr h="502920">
+                <a:tc>
+                  <a:txBody>
+                    <a:bodyPr wrap="square"/>
+                    <a:lstStyle/>
+                    <a:p>
+                      <a:r>
+                        <a:rPr sz="1600" b="0" i="0">
+                          <a:solidFill>
+                            <a:srgbClr val="000000"/>
+                          </a:solidFill>
+                          <a:latin typeface="Arial"/>
+                        </a:rPr>
+                        <a:t>Integrated Triad</a:t>
+                      </a:r>
+                    </a:p>
+                  </a:txBody>
+                  <a:tcPr marL="73152" marR="73152">
+                    <a:noFill/>
+                    <a:lnL w="9525">
+                      <a:solidFill>
+                        <a:srgbClr val="000000"/>
+                      </a:solidFill>
+                    </a:lnL>
+                    <a:lnR w="9525">
+                      <a:solidFill>
+                        <a:srgbClr val="000000"/>
+                      </a:solidFill>
+                    </a:lnR>
+                    <a:lnT w="9525">
+                      <a:solidFill>
+                        <a:srgbClr val="000000"/>
+                      </a:solidFill>
+                    </a:lnT>
+                    <a:lnB w="9525">
+                      <a:solidFill>
+                        <a:srgbClr val="000000"/>
+                      </a:solidFill>
+                    </a:lnB>
+                  </a:tcPr>
+                </a:tc>
+                <a:tc>
+                  <a:txBody>
+                    <a:bodyPr wrap="square"/>
+                    <a:lstStyle/>
+                    <a:p>
+                      <a:r>
+                        <a:rPr sz="1600" b="0" i="0">
+                          <a:solidFill>
+                            <a:srgbClr val="000000"/>
+                          </a:solidFill>
+                          <a:latin typeface="Arial"/>
+                        </a:rPr>
+                        <a:t>5 / 30 Systems</a:t>
+                      </a:r>
+                    </a:p>
+                  </a:txBody>
+                  <a:tcPr marL="73152" marR="73152">
+                    <a:noFill/>
+                    <a:lnL w="9525">
+                      <a:solidFill>
+                        <a:srgbClr val="000000"/>
+                      </a:solidFill>
+                    </a:lnL>
+                    <a:lnR w="9525">
+                      <a:solidFill>
+                        <a:srgbClr val="000000"/>
+                      </a:solidFill>
+                    </a:lnR>
+                    <a:lnT w="9525">
+                      <a:solidFill>
+                        <a:srgbClr val="000000"/>
+                      </a:solidFill>
+                    </a:lnT>
+                    <a:lnB w="9525">
+                      <a:solidFill>
+                        <a:srgbClr val="000000"/>
+                      </a:solidFill>
+                    </a:lnB>
+                  </a:tcPr>
+                </a:tc>
+                <a:tc>
+                  <a:txBody>
+                    <a:bodyPr wrap="square"/>
+                    <a:lstStyle/>
+                    <a:p>
+                      <a:r>
+                        <a:rPr sz="1600" b="0" i="0">
+                          <a:solidFill>
+                            <a:srgbClr val="000000"/>
+                          </a:solidFill>
+                          <a:latin typeface="Arial"/>
+                        </a:rPr>
+                        <a:t>Teridentity in loop</a:t>
+                      </a:r>
+                    </a:p>
+                  </a:txBody>
+                  <a:tcPr marL="73152" marR="73152">
+                    <a:noFill/>
+                    <a:lnL w="9525">
+                      <a:solidFill>
+                        <a:srgbClr val="000000"/>
+                      </a:solidFill>
+                    </a:lnL>
+                    <a:lnR w="9525">
+                      <a:solidFill>
+                        <a:srgbClr val="000000"/>
+                      </a:solidFill>
+                    </a:lnR>
+                    <a:lnT w="9525">
+                      <a:solidFill>
+                        <a:srgbClr val="000000"/>
+                      </a:solidFill>
+                    </a:lnT>
+                    <a:lnB w="9525">
+                      <a:solidFill>
+                        <a:srgbClr val="000000"/>
+                      </a:solidFill>
+                    </a:lnB>
+                  </a:tcPr>
+                </a:tc>
+                <a:tc>
+                  <a:txBody>
+                    <a:bodyPr wrap="square"/>
+                    <a:lstStyle/>
+                    <a:p>
+                      <a:r>
+                        <a:rPr sz="1600" b="0" i="0">
+                          <a:solidFill>
+                            <a:srgbClr val="000000"/>
+                          </a:solidFill>
+                          <a:latin typeface="Arial"/>
+                        </a:rPr>
+                        <a:t>Φ = 2.0</a:t>
+                      </a:r>
+                    </a:p>
+                  </a:txBody>
+                  <a:tcPr marL="73152" marR="73152">
+                    <a:noFill/>
+                    <a:lnL w="9525">
+                      <a:solidFill>
+                        <a:srgbClr val="000000"/>
+                      </a:solidFill>
+                    </a:lnL>
+                    <a:lnR w="9525">
+                      <a:solidFill>
+                        <a:srgbClr val="000000"/>
+                      </a:solidFill>
+                    </a:lnR>
+                    <a:lnT w="9525">
+                      <a:solidFill>
+                        <a:srgbClr val="000000"/>
+                      </a:solidFill>
+                    </a:lnT>
+                    <a:lnB w="9525">
+                      <a:solidFill>
+                        <a:srgbClr val="000000"/>
+                      </a:solidFill>
+                    </a:lnB>
+                  </a:tcPr>
+                </a:tc>
+                <a:tc>
+                  <a:txBody>
+                    <a:bodyPr wrap="square"/>
+                    <a:lstStyle/>
+                    <a:p>
+                      <a:r>
+                        <a:rPr sz="1600" b="0" i="0">
+                          <a:solidFill>
+                            <a:srgbClr val="000000"/>
+                          </a:solidFill>
+                          <a:latin typeface="Arial"/>
+                        </a:rPr>
+                        <a:t>Genuine Triadic Complex</a:t>
+                      </a:r>
+                    </a:p>
+                  </a:txBody>
+                  <a:tcPr marL="73152" marR="73152">
+                    <a:noFill/>
+                    <a:lnL w="9525">
+                      <a:solidFill>
+                        <a:srgbClr val="000000"/>
+                      </a:solidFill>
+                    </a:lnL>
+                    <a:lnR w="9525">
+                      <a:solidFill>
+                        <a:srgbClr val="000000"/>
+                      </a:solidFill>
+                    </a:lnR>
+                    <a:lnT w="9525">
+                      <a:solidFill>
+                        <a:srgbClr val="000000"/>
+                      </a:solidFill>
+                    </a:lnT>
+                    <a:lnB w="9525">
+                      <a:solidFill>
+                        <a:srgbClr val="000000"/>
+                      </a:solidFill>
+                    </a:lnB>
+                  </a:tcPr>
+                </a:tc>
+              </a:tr>
+            </a:tbl>
+          </a:graphicData>
+        </a:graphic>
+      </p:graphicFrame>
     </p:spTree>
   </p:cSld>
   <p:clrMapOvr>
@@ -6135,8 +7362,8 @@
         </p:nvSpPr>
         <p:spPr>
           <a:xfrm>
-            <a:off x="822960" y="640080"/>
-            <a:ext cx="10545775" cy="1188720"/>
+            <a:off x="822960" y="502920"/>
+            <a:ext cx="10545775" cy="274320"/>
           </a:xfrm>
           <a:prstGeom prst="rect">
             <a:avLst/>
@@ -6144,7 +7371,7 @@
           <a:noFill/>
         </p:spPr>
         <p:txBody>
-          <a:bodyPr wrap="square" anchor="b" lIns="0" rIns="0" tIns="0" bIns="0">
+          <a:bodyPr wrap="square" anchor="t" lIns="0" rIns="0" tIns="0" bIns="0">
             <a:spAutoFit/>
           </a:bodyPr>
           <a:lstStyle/>
@@ -6155,13 +7382,13 @@
               </a:spcBef>
             </a:pPr>
             <a:r>
-              <a:rPr sz="3600" b="1" i="0">
-                <a:solidFill>
-                  <a:srgbClr val="000000"/>
-                </a:solidFill>
-                <a:latin typeface="Arial"/>
-              </a:rPr>
-              <a:t>Both correct</a:t>
+              <a:rPr sz="1400" b="0" i="0">
+                <a:solidFill>
+                  <a:srgbClr val="000000"/>
+                </a:solidFill>
+                <a:latin typeface="Arial"/>
+              </a:rPr>
+              <a:t>SYNTHESIS &amp; CONCLUSION</a:t>
             </a:r>
           </a:p>
         </p:txBody>
@@ -6174,8 +7401,8 @@
         </p:nvSpPr>
         <p:spPr>
           <a:xfrm>
-            <a:off x="822960" y="2103120"/>
-            <a:ext cx="10545775" cy="3931920"/>
+            <a:off x="822960" y="822960"/>
+            <a:ext cx="10545775" cy="1005840"/>
           </a:xfrm>
           <a:prstGeom prst="rect">
             <a:avLst/>
@@ -6194,77 +7421,100 @@
               </a:spcBef>
             </a:pPr>
             <a:r>
-              <a:rPr sz="2400" b="0" i="1">
-                <a:solidFill>
-                  <a:srgbClr val="000000"/>
-                </a:solidFill>
-                <a:latin typeface="Arial"/>
-              </a:rPr>
-              <a:t>both Peirce and Quine were correct: the issue entirely depends on exactly what constructive resources are to be allowed</a:t>
-            </a:r>
-          </a:p>
-          <a:p>
-            <a:pPr algn="l">
-              <a:spcBef>
-                <a:spcPts val="1400"/>
-              </a:spcBef>
-            </a:pPr>
-            <a:r>
-              <a:rPr sz="1800" b="0" i="0">
-                <a:solidFill>
-                  <a:srgbClr val="000000"/>
-                </a:solidFill>
-                <a:latin typeface="Arial"/>
-              </a:rPr>
-              <a:t>— Burch, Stanford Encyclopedia of Philosophy</a:t>
-            </a:r>
-          </a:p>
-          <a:p>
-            <a:pPr algn="l">
-              <a:spcBef>
-                <a:spcPts val="1400"/>
-              </a:spcBef>
-            </a:pPr>
-            <a:r>
-              <a:rPr sz="2400" b="0" i="1">
-                <a:solidFill>
-                  <a:srgbClr val="000000"/>
-                </a:solidFill>
-                <a:latin typeface="Arial"/>
-              </a:rPr>
-              <a:t>It cannot simply be that Peirce and Quine are both right.</a:t>
-            </a:r>
-          </a:p>
-          <a:p>
-            <a:pPr algn="l">
-              <a:spcBef>
-                <a:spcPts val="1400"/>
-              </a:spcBef>
-            </a:pPr>
-            <a:r>
-              <a:rPr sz="1800" b="0" i="0">
-                <a:solidFill>
-                  <a:srgbClr val="000000"/>
-                </a:solidFill>
-                <a:latin typeface="Arial"/>
-              </a:rPr>
-              <a:t>— Koshkin, 2022</a:t>
-            </a:r>
-          </a:p>
-          <a:p>
-            <a:pPr algn="l">
-              <a:spcBef>
-                <a:spcPts val="1400"/>
-              </a:spcBef>
-            </a:pPr>
-            <a:r>
-              <a:rPr sz="2400" b="0" i="0">
-                <a:solidFill>
-                  <a:srgbClr val="000000"/>
-                </a:solidFill>
-                <a:latin typeface="Arial"/>
-              </a:rPr>
-              <a:t>Logic tests relations as sets of tuples. It has no test for coordination as a running system.</a:t>
+              <a:rPr sz="3400" b="1" i="0">
+                <a:solidFill>
+                  <a:srgbClr val="000000"/>
+                </a:solidFill>
+                <a:latin typeface="Arial"/>
+              </a:rPr>
+              <a:t>The Ontological Reality of Algorithmacy</a:t>
+            </a:r>
+          </a:p>
+        </p:txBody>
+      </p:sp>
+      <p:sp>
+        <p:nvSpPr>
+          <p:cNvPr id="4" name="TextBox 3"/>
+          <p:cNvSpPr txBox="1"/>
+          <p:nvPr/>
+        </p:nvSpPr>
+        <p:spPr>
+          <a:xfrm>
+            <a:off x="822960" y="2011680"/>
+            <a:ext cx="10545775" cy="4297680"/>
+          </a:xfrm>
+          <a:prstGeom prst="rect">
+            <a:avLst/>
+          </a:prstGeom>
+          <a:noFill/>
+        </p:spPr>
+        <p:txBody>
+          <a:bodyPr wrap="square" anchor="t" lIns="0" rIns="0" tIns="0" bIns="0">
+            <a:spAutoFit/>
+          </a:bodyPr>
+          <a:lstStyle/>
+          <a:p>
+            <a:pPr algn="l">
+              <a:spcBef>
+                <a:spcPts val="0"/>
+              </a:spcBef>
+            </a:pPr>
+            <a:r>
+              <a:rPr sz="2200" b="0" i="0">
+                <a:solidFill>
+                  <a:srgbClr val="000000"/>
+                </a:solidFill>
+                <a:latin typeface="Arial"/>
+              </a:rPr>
+              <a:t>Algorithmacy is the epistemic and systemic facility required to model, audit, and navigate irreducible triadic causal systems that cannot be decomposed into dyadic communication channels.</a:t>
+            </a:r>
+          </a:p>
+          <a:p>
+            <a:pPr algn="l">
+              <a:spcBef>
+                <a:spcPts val="1600"/>
+              </a:spcBef>
+            </a:pPr>
+            <a:r>
+              <a:rPr sz="2200" b="0" i="0">
+                <a:solidFill>
+                  <a:srgbClr val="000000"/>
+                </a:solidFill>
+                <a:latin typeface="Arial"/>
+              </a:rPr>
+              <a:t>Join-Irreducible Thirdness</a:t>
+            </a:r>
+          </a:p>
+          <a:p>
+            <a:pPr algn="l">
+              <a:spcBef>
+                <a:spcPts val="400"/>
+              </a:spcBef>
+            </a:pPr>
+            <a:r>
+              <a:rPr sz="2200" b="0" i="0">
+                <a:solidFill>
+                  <a:srgbClr val="000000"/>
+                </a:solidFill>
+                <a:latin typeface="Arial"/>
+              </a:rPr>
+              <a:t>Measure-Theoretic Synergy</a:t>
+            </a:r>
+          </a:p>
+          <a:p>
+            <a:pPr algn="l">
+              <a:spcBef>
+                <a:spcPts val="400"/>
+              </a:spcBef>
+            </a:pPr>
+            <a:r>
+              <a:rPr sz="2200" b="0" i="0">
+                <a:solidFill>
+                  <a:srgbClr val="000000"/>
+                </a:solidFill>
+                <a:latin typeface="Arial"/>
+              </a:rPr>
+              <a:t>Positive Causal Integration (Φ &gt; 0)</a:t>
             </a:r>
           </a:p>
         </p:txBody>
@@ -6303,8 +7553,8 @@
         </p:nvSpPr>
         <p:spPr>
           <a:xfrm>
-            <a:off x="822960" y="640080"/>
-            <a:ext cx="10545775" cy="1188720"/>
+            <a:off x="822960" y="822960"/>
+            <a:ext cx="10545775" cy="1005840"/>
           </a:xfrm>
           <a:prstGeom prst="rect">
             <a:avLst/>
@@ -6312,7 +7562,7 @@
           <a:noFill/>
         </p:spPr>
         <p:txBody>
-          <a:bodyPr wrap="square" anchor="b" lIns="0" rIns="0" tIns="0" bIns="0">
+          <a:bodyPr wrap="square" anchor="t" lIns="0" rIns="0" tIns="0" bIns="0">
             <a:spAutoFit/>
           </a:bodyPr>
           <a:lstStyle/>
@@ -6323,13 +7573,13 @@
               </a:spcBef>
             </a:pPr>
             <a:r>
-              <a:rPr sz="3600" b="1" i="0">
-                <a:solidFill>
-                  <a:srgbClr val="000000"/>
-                </a:solidFill>
-                <a:latin typeface="Arial"/>
-              </a:rPr>
-              <a:t>Our argument: a causal test for irreducible triads</a:t>
+              <a:rPr sz="3400" b="1" i="0">
+                <a:solidFill>
+                  <a:srgbClr val="000000"/>
+                </a:solidFill>
+                <a:latin typeface="Arial"/>
+              </a:rPr>
+              <a:t>Image Sources</a:t>
             </a:r>
           </a:p>
         </p:txBody>
@@ -6342,8 +7592,8 @@
         </p:nvSpPr>
         <p:spPr>
           <a:xfrm>
-            <a:off x="822960" y="2103120"/>
-            <a:ext cx="10545775" cy="3931920"/>
+            <a:off x="822960" y="2011680"/>
+            <a:ext cx="10545775" cy="4297680"/>
           </a:xfrm>
           <a:prstGeom prst="rect">
             <a:avLst/>
@@ -6362,51 +7612,19 @@
               </a:spcBef>
             </a:pPr>
             <a:r>
-              <a:rPr sz="2400" b="0" i="0">
-                <a:solidFill>
-                  <a:srgbClr val="000000"/>
-                </a:solidFill>
-                <a:latin typeface="Arial"/>
-              </a:rPr>
-              <a:t>Φ: what a system loses under its weakest cut. Φ = 0: it splits at some cut.</a:t>
-            </a:r>
-          </a:p>
-          <a:p>
-            <a:pPr algn="l">
-              <a:spcBef>
-                <a:spcPts val="1400"/>
-              </a:spcBef>
-            </a:pPr>
-            <a:r>
-              <a:rPr sz="2400" b="0" i="0">
-                <a:solidFill>
-                  <a:srgbClr val="000000"/>
-                </a:solidFill>
-                <a:latin typeface="Arial"/>
-              </a:rPr>
-              <a:t>IIT also reads, element by element, what each depends on irreducibly.</a:t>
-            </a:r>
-          </a:p>
-          <a:p>
-            <a:pPr algn="l">
-              <a:spcBef>
-                <a:spcPts val="1400"/>
-              </a:spcBef>
-            </a:pPr>
-            <a:r>
-              <a:rPr sz="2400" b="0" i="0">
-                <a:solidFill>
-                  <a:srgbClr val="000000"/>
-                </a:solidFill>
-                <a:latin typeface="Arial"/>
-              </a:rPr>
-              <a:t>Irreducible triad: a party jointly determined by two others, all three inside one whole.</a:t>
-            </a:r>
-          </a:p>
-          <a:p>
-            <a:pPr algn="l">
-              <a:spcBef>
-                <a:spcPts val="1400"/>
+              <a:rPr sz="1200" b="0" i="0">
+                <a:solidFill>
+                  <a:srgbClr val="000000"/>
+                </a:solidFill>
+                <a:latin typeface="Arial"/>
+              </a:rPr>
+              <a:t>https://footnotes2plato.com/wp-content/uploads/2024/09/charles_sanders_peirce-colorized_cleanup-enhanced.jpg?w=640</a:t>
+            </a:r>
+          </a:p>
+          <a:p>
+            <a:pPr algn="l">
+              <a:spcBef>
+                <a:spcPts val="400"/>
               </a:spcBef>
             </a:pPr>
             <a:r>
@@ -6414,15 +7632,31 @@
                 <a:solidFill>
                   <a:srgbClr val="000000"/>
                 </a:solidFill>
-                <a:latin typeface="Courier New"/>
-              </a:rPr>
-              <a:t>M' = A and B;  A' = M;  B' = M</a:t>
-            </a:r>
-          </a:p>
-          <a:p>
-            <a:pPr algn="l">
-              <a:spcBef>
-                <a:spcPts val="0"/>
+                <a:latin typeface="Arial"/>
+              </a:rPr>
+              <a:t>Source: footnotes2plato.com</a:t>
+            </a:r>
+          </a:p>
+          <a:p>
+            <a:pPr algn="l">
+              <a:spcBef>
+                <a:spcPts val="1600"/>
+              </a:spcBef>
+            </a:pPr>
+            <a:r>
+              <a:rPr sz="1200" b="0" i="0">
+                <a:solidFill>
+                  <a:srgbClr val="000000"/>
+                </a:solidFill>
+                <a:latin typeface="Arial"/>
+              </a:rPr>
+              <a:t>https://cdn.britannica.com/33/171633-050-ED21E678/Willard-Van-Orman-Quine-1958.jpg</a:t>
+            </a:r>
+          </a:p>
+          <a:p>
+            <a:pPr algn="l">
+              <a:spcBef>
+                <a:spcPts val="400"/>
               </a:spcBef>
             </a:pPr>
             <a:r>
@@ -6430,313 +7664,9 @@
                 <a:solidFill>
                   <a:srgbClr val="000000"/>
                 </a:solidFill>
-                <a:latin typeface="Courier New"/>
-              </a:rPr>
-              <a:t>Φ = 2.0, all three in the core</a:t>
-            </a:r>
-          </a:p>
-        </p:txBody>
-      </p:sp>
-    </p:spTree>
-  </p:cSld>
-  <p:clrMapOvr>
-    <a:masterClrMapping/>
-  </p:clrMapOvr>
-</p:sld>
-</file>
-
-<file path=ppt/slides/slide17.xml><?xml version="1.0" encoding="utf-8"?>
-<p:sld xmlns:a="http://schemas.openxmlformats.org/drawingml/2006/main" xmlns:p="http://schemas.openxmlformats.org/presentationml/2006/main" xmlns:r="http://schemas.openxmlformats.org/officeDocument/2006/relationships">
-  <p:cSld>
-    <p:bg>
-      <p:bgPr>
-        <a:solidFill>
-          <a:srgbClr val="FFFFFF"/>
-        </a:solidFill>
-        <a:effectLst/>
-      </p:bgPr>
-    </p:bg>
-    <p:spTree>
-      <p:nvGrpSpPr>
-        <p:cNvPr id="1" name=""/>
-        <p:cNvGrpSpPr/>
-        <p:nvPr/>
-      </p:nvGrpSpPr>
-      <p:grpSpPr/>
-      <p:sp>
-        <p:nvSpPr>
-          <p:cNvPr id="2" name="TextBox 1"/>
-          <p:cNvSpPr txBox="1"/>
-          <p:nvPr/>
-        </p:nvSpPr>
-        <p:spPr>
-          <a:xfrm>
-            <a:off x="822960" y="640080"/>
-            <a:ext cx="10545775" cy="1188720"/>
-          </a:xfrm>
-          <a:prstGeom prst="rect">
-            <a:avLst/>
-          </a:prstGeom>
-          <a:noFill/>
-        </p:spPr>
-        <p:txBody>
-          <a:bodyPr wrap="square" anchor="b" lIns="0" rIns="0" tIns="0" bIns="0">
-            <a:spAutoFit/>
-          </a:bodyPr>
-          <a:lstStyle/>
-          <a:p>
-            <a:pPr algn="l">
-              <a:spcBef>
-                <a:spcPts val="0"/>
-              </a:spcBef>
-            </a:pPr>
-            <a:r>
-              <a:rPr sz="3600" b="1" i="0">
-                <a:solidFill>
-                  <a:srgbClr val="000000"/>
-                </a:solidFill>
-                <a:latin typeface="Arial"/>
-              </a:rPr>
-              <a:t>What IIT sorts</a:t>
-            </a:r>
-          </a:p>
-        </p:txBody>
-      </p:sp>
-      <p:sp>
-        <p:nvSpPr>
-          <p:cNvPr id="3" name="TextBox 2"/>
-          <p:cNvSpPr txBox="1"/>
-          <p:nvPr/>
-        </p:nvSpPr>
-        <p:spPr>
-          <a:xfrm>
-            <a:off x="822960" y="2103120"/>
-            <a:ext cx="10545775" cy="3931920"/>
-          </a:xfrm>
-          <a:prstGeom prst="rect">
-            <a:avLst/>
-          </a:prstGeom>
-          <a:noFill/>
-        </p:spPr>
-        <p:txBody>
-          <a:bodyPr wrap="square" anchor="t" lIns="0" rIns="0" tIns="0" bIns="0">
-            <a:spAutoFit/>
-          </a:bodyPr>
-          <a:lstStyle/>
-          <a:p>
-            <a:pPr algn="l">
-              <a:spcBef>
-                <a:spcPts val="0"/>
-              </a:spcBef>
-            </a:pPr>
-            <a:r>
-              <a:rPr sz="2400" b="0" i="0">
-                <a:solidFill>
-                  <a:srgbClr val="000000"/>
-                </a:solidFill>
-                <a:latin typeface="Arial"/>
-              </a:rPr>
-              <a:t>Pairs chained, looped or branched: no one jointly determined (89 wirings; post hoc)</a:t>
-            </a:r>
-          </a:p>
-          <a:p>
-            <a:pPr algn="l">
-              <a:spcBef>
-                <a:spcPts val="1400"/>
-              </a:spcBef>
-            </a:pPr>
-            <a:r>
-              <a:rPr sz="2400" b="0" i="0">
-                <a:solidFill>
-                  <a:srgbClr val="000000"/>
-                </a:solidFill>
-                <a:latin typeface="Arial"/>
-              </a:rPr>
-              <a:t>A whole, no triad: a ring of pairs, Φ = 2.0</a:t>
-            </a:r>
-          </a:p>
-          <a:p>
-            <a:pPr algn="l">
-              <a:spcBef>
-                <a:spcPts val="1400"/>
-              </a:spcBef>
-            </a:pPr>
-            <a:r>
-              <a:rPr sz="2400" b="0" i="0">
-                <a:solidFill>
-                  <a:srgbClr val="000000"/>
-                </a:solidFill>
-                <a:latin typeface="Arial"/>
-              </a:rPr>
-              <a:t>A triad, no whole: 11 of 30 fresh four-element systems, Φ = 0</a:t>
-            </a:r>
-          </a:p>
-          <a:p>
-            <a:pPr algn="l">
-              <a:spcBef>
-                <a:spcPts val="1400"/>
-              </a:spcBef>
-            </a:pPr>
-            <a:r>
-              <a:rPr sz="2400" b="0" i="0">
-                <a:solidFill>
-                  <a:srgbClr val="000000"/>
-                </a:solidFill>
-                <a:latin typeface="Arial"/>
-              </a:rPr>
-              <a:t>A triad in a whole: the control, genuine giving; 5 of 30</a:t>
-            </a:r>
-          </a:p>
-        </p:txBody>
-      </p:sp>
-    </p:spTree>
-  </p:cSld>
-  <p:clrMapOvr>
-    <a:masterClrMapping/>
-  </p:clrMapOvr>
-</p:sld>
-</file>
-
-<file path=ppt/slides/slide18.xml><?xml version="1.0" encoding="utf-8"?>
-<p:sld xmlns:a="http://schemas.openxmlformats.org/drawingml/2006/main" xmlns:p="http://schemas.openxmlformats.org/presentationml/2006/main" xmlns:r="http://schemas.openxmlformats.org/officeDocument/2006/relationships">
-  <p:cSld>
-    <p:bg>
-      <p:bgPr>
-        <a:solidFill>
-          <a:srgbClr val="FFFFFF"/>
-        </a:solidFill>
-        <a:effectLst/>
-      </p:bgPr>
-    </p:bg>
-    <p:spTree>
-      <p:nvGrpSpPr>
-        <p:cNvPr id="1" name=""/>
-        <p:cNvGrpSpPr/>
-        <p:nvPr/>
-      </p:nvGrpSpPr>
-      <p:grpSpPr/>
-      <p:sp>
-        <p:nvSpPr>
-          <p:cNvPr id="2" name="TextBox 1"/>
-          <p:cNvSpPr txBox="1"/>
-          <p:nvPr/>
-        </p:nvSpPr>
-        <p:spPr>
-          <a:xfrm>
-            <a:off x="822960" y="640080"/>
-            <a:ext cx="10545775" cy="1188720"/>
-          </a:xfrm>
-          <a:prstGeom prst="rect">
-            <a:avLst/>
-          </a:prstGeom>
-          <a:noFill/>
-        </p:spPr>
-        <p:txBody>
-          <a:bodyPr wrap="square" anchor="b" lIns="0" rIns="0" tIns="0" bIns="0">
-            <a:spAutoFit/>
-          </a:bodyPr>
-          <a:lstStyle/>
-          <a:p>
-            <a:pPr algn="l">
-              <a:spcBef>
-                <a:spcPts val="0"/>
-              </a:spcBef>
-            </a:pPr>
-            <a:r>
-              <a:rPr sz="3600" b="1" i="0">
-                <a:solidFill>
-                  <a:srgbClr val="000000"/>
-                </a:solidFill>
-                <a:latin typeface="Arial"/>
-              </a:rPr>
-              <a:t>Algorithmacy's targets</a:t>
-            </a:r>
-          </a:p>
-        </p:txBody>
-      </p:sp>
-      <p:sp>
-        <p:nvSpPr>
-          <p:cNvPr id="3" name="TextBox 2"/>
-          <p:cNvSpPr txBox="1"/>
-          <p:nvPr/>
-        </p:nvSpPr>
-        <p:spPr>
-          <a:xfrm>
-            <a:off x="822960" y="2103120"/>
-            <a:ext cx="10545775" cy="3931920"/>
-          </a:xfrm>
-          <a:prstGeom prst="rect">
-            <a:avLst/>
-          </a:prstGeom>
-          <a:noFill/>
-        </p:spPr>
-        <p:txBody>
-          <a:bodyPr wrap="square" anchor="t" lIns="0" rIns="0" tIns="0" bIns="0">
-            <a:spAutoFit/>
-          </a:bodyPr>
-          <a:lstStyle/>
-          <a:p>
-            <a:pPr algn="l">
-              <a:spcBef>
-                <a:spcPts val="0"/>
-              </a:spcBef>
-            </a:pPr>
-            <a:r>
-              <a:rPr sz="2400" b="0" i="0">
-                <a:solidFill>
-                  <a:srgbClr val="000000"/>
-                </a:solidFill>
-                <a:latin typeface="Arial"/>
-              </a:rPr>
-              <a:t>The irreducible triads: a third fixed by two parties jointly, inside one whole with them.</a:t>
-            </a:r>
-          </a:p>
-          <a:p>
-            <a:pPr algn="l">
-              <a:spcBef>
-                <a:spcPts val="1400"/>
-              </a:spcBef>
-            </a:pPr>
-            <a:r>
-              <a:rPr sz="2400" b="0" i="0">
-                <a:solidFill>
-                  <a:srgbClr val="000000"/>
-                </a:solidFill>
-                <a:latin typeface="Arial"/>
-              </a:rPr>
-              <a:t>Older than AI: an arbitrator, a shared tally. Now at scale, through algorithms.</a:t>
-            </a:r>
-          </a:p>
-          <a:p>
-            <a:pPr algn="l">
-              <a:spcBef>
-                <a:spcPts val="1400"/>
-              </a:spcBef>
-            </a:pPr>
-            <a:r>
-              <a:rPr sz="2400" b="0" i="0">
-                <a:solidFill>
-                  <a:srgbClr val="000000"/>
-                </a:solidFill>
-                <a:latin typeface="Arial"/>
-              </a:rPr>
-              <a:t>Literacy handles chains. Algorithmacy handles these.</a:t>
-            </a:r>
-          </a:p>
-          <a:p>
-            <a:pPr algn="l">
-              <a:spcBef>
-                <a:spcPts val="1400"/>
-              </a:spcBef>
-            </a:pPr>
-            <a:r>
-              <a:rPr sz="2400" b="0" i="0">
-                <a:solidFill>
-                  <a:srgbClr val="000000"/>
-                </a:solidFill>
-                <a:latin typeface="Arial"/>
-              </a:rPr>
-              <a:t>Boolean models, not people. No platform's rule modelled.</a:t>
+                <a:latin typeface="Arial"/>
+              </a:rPr>
+              <a:t>Source: www.britannica.com</a:t>
             </a:r>
           </a:p>
         </p:txBody>
@@ -6775,8 +7705,8 @@
         </p:nvSpPr>
         <p:spPr>
           <a:xfrm>
-            <a:off x="822960" y="640080"/>
-            <a:ext cx="10545775" cy="1188720"/>
+            <a:off x="822960" y="502920"/>
+            <a:ext cx="10545775" cy="274320"/>
           </a:xfrm>
           <a:prstGeom prst="rect">
             <a:avLst/>
@@ -6784,7 +7714,7 @@
           <a:noFill/>
         </p:spPr>
         <p:txBody>
-          <a:bodyPr wrap="square" anchor="b" lIns="0" rIns="0" tIns="0" bIns="0">
+          <a:bodyPr wrap="square" anchor="t" lIns="0" rIns="0" tIns="0" bIns="0">
             <a:spAutoFit/>
           </a:bodyPr>
           <a:lstStyle/>
@@ -6795,13 +7725,13 @@
               </a:spcBef>
             </a:pPr>
             <a:r>
-              <a:rPr sz="3600" b="1" i="0">
-                <a:solidFill>
-                  <a:srgbClr val="000000"/>
-                </a:solidFill>
-                <a:latin typeface="Arial"/>
-              </a:rPr>
-              <a:t>Four sensibilities</a:t>
+              <a:rPr sz="1400" b="0" i="0">
+                <a:solidFill>
+                  <a:srgbClr val="000000"/>
+                </a:solidFill>
+                <a:latin typeface="Arial"/>
+              </a:rPr>
+              <a:t>EPISTEMIC EVOLUTION</a:t>
             </a:r>
           </a:p>
         </p:txBody>
@@ -6814,8 +7744,8 @@
         </p:nvSpPr>
         <p:spPr>
           <a:xfrm>
-            <a:off x="822960" y="2103120"/>
-            <a:ext cx="10545775" cy="3931920"/>
+            <a:off x="822960" y="822960"/>
+            <a:ext cx="10545775" cy="1005840"/>
           </a:xfrm>
           <a:prstGeom prst="rect">
             <a:avLst/>
@@ -6834,61 +7764,200 @@
               </a:spcBef>
             </a:pPr>
             <a:r>
-              <a:rPr sz="2400" b="0" i="0">
-                <a:solidFill>
-                  <a:srgbClr val="000000"/>
-                </a:solidFill>
-                <a:latin typeface="Arial"/>
-              </a:rPr>
-              <a:t>Oracy: understanding commands</a:t>
-            </a:r>
-          </a:p>
-          <a:p>
-            <a:pPr algn="l">
-              <a:spcBef>
-                <a:spcPts val="1400"/>
-              </a:spcBef>
-            </a:pPr>
-            <a:r>
-              <a:rPr sz="2400" b="0" i="0">
-                <a:solidFill>
-                  <a:srgbClr val="000000"/>
-                </a:solidFill>
-                <a:latin typeface="Arial"/>
-              </a:rPr>
-              <a:t>Literacy: navigating a text</a:t>
-            </a:r>
-          </a:p>
-          <a:p>
-            <a:pPr algn="l">
-              <a:spcBef>
-                <a:spcPts val="1400"/>
-              </a:spcBef>
-            </a:pPr>
-            <a:r>
-              <a:rPr sz="2400" b="0" i="0">
-                <a:solidFill>
-                  <a:srgbClr val="000000"/>
-                </a:solidFill>
-                <a:latin typeface="Arial"/>
-              </a:rPr>
-              <a:t>Numeracy: navigating numbers</a:t>
-            </a:r>
-          </a:p>
-          <a:p>
-            <a:pPr algn="l">
-              <a:spcBef>
-                <a:spcPts val="1400"/>
-              </a:spcBef>
-            </a:pPr>
-            <a:r>
-              <a:rPr sz="2400" b="0" i="0">
-                <a:solidFill>
-                  <a:srgbClr val="000000"/>
-                </a:solidFill>
-                <a:latin typeface="Arial"/>
-              </a:rPr>
-              <a:t>Algorithmacy: navigating triadic coordination</a:t>
+              <a:rPr sz="3400" b="1" i="0">
+                <a:solidFill>
+                  <a:srgbClr val="000000"/>
+                </a:solidFill>
+                <a:latin typeface="Arial"/>
+              </a:rPr>
+              <a:t>The Four Relational Sensibilities</a:t>
+            </a:r>
+          </a:p>
+        </p:txBody>
+      </p:sp>
+      <p:sp>
+        <p:nvSpPr>
+          <p:cNvPr id="4" name="TextBox 3"/>
+          <p:cNvSpPr txBox="1"/>
+          <p:nvPr/>
+        </p:nvSpPr>
+        <p:spPr>
+          <a:xfrm>
+            <a:off x="822960" y="2011680"/>
+            <a:ext cx="10545775" cy="4297680"/>
+          </a:xfrm>
+          <a:prstGeom prst="rect">
+            <a:avLst/>
+          </a:prstGeom>
+          <a:noFill/>
+        </p:spPr>
+        <p:txBody>
+          <a:bodyPr wrap="square" anchor="t" lIns="0" rIns="0" tIns="0" bIns="0">
+            <a:spAutoFit/>
+          </a:bodyPr>
+          <a:lstStyle/>
+          <a:p>
+            <a:pPr algn="l">
+              <a:spcBef>
+                <a:spcPts val="0"/>
+              </a:spcBef>
+            </a:pPr>
+            <a:r>
+              <a:rPr sz="2200" b="1" i="0">
+                <a:solidFill>
+                  <a:srgbClr val="000000"/>
+                </a:solidFill>
+                <a:latin typeface="Arial"/>
+              </a:rPr>
+              <a:t>Oracy</a:t>
+            </a:r>
+            <a:r>
+              <a:rPr sz="2200" b="0" i="0">
+                <a:solidFill>
+                  <a:srgbClr val="000000"/>
+                </a:solidFill>
+                <a:latin typeface="Arial"/>
+              </a:rPr>
+              <a:t> — ARITY: 1 • MONADIC</a:t>
+            </a:r>
+          </a:p>
+          <a:p>
+            <a:pPr algn="l">
+              <a:spcBef>
+                <a:spcPts val="400"/>
+              </a:spcBef>
+            </a:pPr>
+            <a:r>
+              <a:rPr sz="2200" b="0" i="0">
+                <a:solidFill>
+                  <a:srgbClr val="000000"/>
+                </a:solidFill>
+                <a:latin typeface="Arial"/>
+              </a:rPr>
+              <a:t>Synchronous acoustic presence.</a:t>
+            </a:r>
+          </a:p>
+          <a:p>
+            <a:pPr algn="l">
+              <a:spcBef>
+                <a:spcPts val="1600"/>
+              </a:spcBef>
+            </a:pPr>
+            <a:r>
+              <a:rPr sz="2200" b="1" i="0">
+                <a:solidFill>
+                  <a:srgbClr val="000000"/>
+                </a:solidFill>
+                <a:latin typeface="Arial"/>
+              </a:rPr>
+              <a:t>Literacy</a:t>
+            </a:r>
+            <a:r>
+              <a:rPr sz="2200" b="0" i="0">
+                <a:solidFill>
+                  <a:srgbClr val="000000"/>
+                </a:solidFill>
+                <a:latin typeface="Arial"/>
+              </a:rPr>
+              <a:t> — ARITY: 2 • DYADIC</a:t>
+            </a:r>
+          </a:p>
+          <a:p>
+            <a:pPr algn="l">
+              <a:spcBef>
+                <a:spcPts val="400"/>
+              </a:spcBef>
+            </a:pPr>
+            <a:r>
+              <a:rPr sz="2200" b="0" i="0">
+                <a:solidFill>
+                  <a:srgbClr val="000000"/>
+                </a:solidFill>
+                <a:latin typeface="Arial"/>
+              </a:rPr>
+              <a:t>Asynchronous document transmission.</a:t>
+            </a:r>
+          </a:p>
+          <a:p>
+            <a:pPr algn="l">
+              <a:spcBef>
+                <a:spcPts val="1600"/>
+              </a:spcBef>
+            </a:pPr>
+            <a:r>
+              <a:rPr sz="2200" b="1" i="0">
+                <a:solidFill>
+                  <a:srgbClr val="000000"/>
+                </a:solidFill>
+                <a:latin typeface="Arial"/>
+              </a:rPr>
+              <a:t>Numeracy</a:t>
+            </a:r>
+            <a:r>
+              <a:rPr sz="2200" b="0" i="0">
+                <a:solidFill>
+                  <a:srgbClr val="000000"/>
+                </a:solidFill>
+                <a:latin typeface="Arial"/>
+              </a:rPr>
+              <a:t> — ARITY: 2 • FORMAL</a:t>
+            </a:r>
+          </a:p>
+          <a:p>
+            <a:pPr algn="l">
+              <a:spcBef>
+                <a:spcPts val="400"/>
+              </a:spcBef>
+            </a:pPr>
+            <a:r>
+              <a:rPr sz="2200" b="0" i="0">
+                <a:solidFill>
+                  <a:srgbClr val="000000"/>
+                </a:solidFill>
+                <a:latin typeface="Arial"/>
+              </a:rPr>
+              <a:t>Symbolic quantitative mapping.</a:t>
+            </a:r>
+          </a:p>
+          <a:p>
+            <a:pPr algn="l">
+              <a:spcBef>
+                <a:spcPts val="1600"/>
+              </a:spcBef>
+            </a:pPr>
+            <a:r>
+              <a:rPr sz="2200" b="1" i="0">
+                <a:solidFill>
+                  <a:srgbClr val="000000"/>
+                </a:solidFill>
+                <a:latin typeface="Arial"/>
+              </a:rPr>
+              <a:t>Algorithmacy</a:t>
+            </a:r>
+            <a:r>
+              <a:rPr sz="2200" b="0" i="0">
+                <a:solidFill>
+                  <a:srgbClr val="000000"/>
+                </a:solidFill>
+                <a:latin typeface="Arial"/>
+              </a:rPr>
+              <a:t> — ARITY: 3 • TRIADIC</a:t>
+            </a:r>
+          </a:p>
+          <a:p>
+            <a:pPr algn="l">
+              <a:spcBef>
+                <a:spcPts val="400"/>
+              </a:spcBef>
+            </a:pPr>
+            <a:r>
+              <a:rPr sz="2200" b="0" i="0">
+                <a:solidFill>
+                  <a:srgbClr val="000000"/>
+                </a:solidFill>
+                <a:latin typeface="Arial"/>
+              </a:rPr>
+              <a:t>Autonomous synthetic mediation.</a:t>
             </a:r>
           </a:p>
         </p:txBody>
@@ -6927,8 +7996,8 @@
         </p:nvSpPr>
         <p:spPr>
           <a:xfrm>
-            <a:off x="822960" y="640080"/>
-            <a:ext cx="10545775" cy="1188720"/>
+            <a:off x="822960" y="502920"/>
+            <a:ext cx="10545775" cy="274320"/>
           </a:xfrm>
           <a:prstGeom prst="rect">
             <a:avLst/>
@@ -6936,7 +8005,7 @@
           <a:noFill/>
         </p:spPr>
         <p:txBody>
-          <a:bodyPr wrap="square" anchor="b" lIns="0" rIns="0" tIns="0" bIns="0">
+          <a:bodyPr wrap="square" anchor="t" lIns="0" rIns="0" tIns="0" bIns="0">
             <a:spAutoFit/>
           </a:bodyPr>
           <a:lstStyle/>
@@ -6947,13 +8016,13 @@
               </a:spcBef>
             </a:pPr>
             <a:r>
-              <a:rPr sz="3600" b="1" i="0">
-                <a:solidFill>
-                  <a:srgbClr val="000000"/>
-                </a:solidFill>
-                <a:latin typeface="Arial"/>
-              </a:rPr>
-              <a:t>The ontological question</a:t>
+              <a:rPr sz="1400" b="0" i="0">
+                <a:solidFill>
+                  <a:srgbClr val="000000"/>
+                </a:solidFill>
+                <a:latin typeface="Arial"/>
+              </a:rPr>
+              <a:t>FOUNDATIONAL PROBLEM</a:t>
             </a:r>
           </a:p>
         </p:txBody>
@@ -6966,8 +8035,8 @@
         </p:nvSpPr>
         <p:spPr>
           <a:xfrm>
-            <a:off x="822960" y="2103120"/>
-            <a:ext cx="10545775" cy="3931920"/>
+            <a:off x="822960" y="822960"/>
+            <a:ext cx="10545775" cy="1005840"/>
           </a:xfrm>
           <a:prstGeom prst="rect">
             <a:avLst/>
@@ -6986,61 +8055,189 @@
               </a:spcBef>
             </a:pPr>
             <a:r>
-              <a:rPr sz="2400" b="0" i="0">
-                <a:solidFill>
-                  <a:srgbClr val="000000"/>
-                </a:solidFill>
-                <a:latin typeface="Arial"/>
-              </a:rPr>
-              <a:t>Do triads reduce to dyads?</a:t>
-            </a:r>
-          </a:p>
-          <a:p>
-            <a:pPr algn="l">
-              <a:spcBef>
-                <a:spcPts val="1400"/>
-              </a:spcBef>
-            </a:pPr>
-            <a:r>
-              <a:rPr sz="2400" b="0" i="0">
-                <a:solidFill>
-                  <a:srgbClr val="000000"/>
-                </a:solidFill>
-                <a:latin typeface="Arial"/>
-              </a:rPr>
-              <a:t>If they do, algorithmacy is not a thing.</a:t>
-            </a:r>
-          </a:p>
-          <a:p>
-            <a:pPr algn="l">
-              <a:spcBef>
-                <a:spcPts val="1400"/>
-              </a:spcBef>
-            </a:pPr>
-            <a:r>
-              <a:rPr sz="2400" b="0" i="0">
-                <a:solidFill>
-                  <a:srgbClr val="000000"/>
-                </a:solidFill>
-                <a:latin typeface="Arial"/>
-              </a:rPr>
-              <a:t>If some do not, algorithmacy has a target.</a:t>
-            </a:r>
-          </a:p>
-          <a:p>
-            <a:pPr algn="l">
-              <a:spcBef>
-                <a:spcPts val="1400"/>
-              </a:spcBef>
-            </a:pPr>
-            <a:r>
-              <a:rPr sz="2400" b="0" i="0">
-                <a:solidFill>
-                  <a:srgbClr val="000000"/>
-                </a:solidFill>
-                <a:latin typeface="Arial"/>
-              </a:rPr>
-              <a:t>Peirce · Quine · the logicians · our argument</a:t>
+              <a:rPr sz="3400" b="1" i="0">
+                <a:solidFill>
+                  <a:srgbClr val="000000"/>
+                </a:solidFill>
+                <a:latin typeface="Arial"/>
+              </a:rPr>
+              <a:t>The Ontological Reducibility Dilemma</a:t>
+            </a:r>
+          </a:p>
+        </p:txBody>
+      </p:sp>
+      <p:sp>
+        <p:nvSpPr>
+          <p:cNvPr id="4" name="TextBox 3"/>
+          <p:cNvSpPr txBox="1"/>
+          <p:nvPr/>
+        </p:nvSpPr>
+        <p:spPr>
+          <a:xfrm>
+            <a:off x="822960" y="2011680"/>
+            <a:ext cx="10545775" cy="4297680"/>
+          </a:xfrm>
+          <a:prstGeom prst="rect">
+            <a:avLst/>
+          </a:prstGeom>
+          <a:noFill/>
+        </p:spPr>
+        <p:txBody>
+          <a:bodyPr wrap="square" anchor="t" lIns="0" rIns="0" tIns="0" bIns="0">
+            <a:spAutoFit/>
+          </a:bodyPr>
+          <a:lstStyle/>
+          <a:p>
+            <a:pPr algn="l">
+              <a:spcBef>
+                <a:spcPts val="0"/>
+              </a:spcBef>
+            </a:pPr>
+            <a:r>
+              <a:rPr sz="2200" b="1" i="0">
+                <a:solidFill>
+                  <a:srgbClr val="000000"/>
+                </a:solidFill>
+                <a:latin typeface="Arial"/>
+              </a:rPr>
+              <a:t>Clone Question:</a:t>
+            </a:r>
+            <a:r>
+              <a:rPr sz="2200" b="0" i="0">
+                <a:solidFill>
+                  <a:srgbClr val="000000"/>
+                </a:solidFill>
+                <a:latin typeface="Arial"/>
+              </a:rPr>
+              <a:t> Does the dyadic clone generate all ternary relations: [R(2)] = R(3)?</a:t>
+            </a:r>
+          </a:p>
+          <a:p>
+            <a:pPr algn="l">
+              <a:spcBef>
+                <a:spcPts val="1600"/>
+              </a:spcBef>
+            </a:pPr>
+            <a:r>
+              <a:rPr sz="2200" b="1" i="0">
+                <a:solidFill>
+                  <a:srgbClr val="000000"/>
+                </a:solidFill>
+                <a:latin typeface="Arial"/>
+              </a:rPr>
+              <a:t>Hypothesis A: Total Reducibility</a:t>
+            </a:r>
+          </a:p>
+          <a:p>
+            <a:pPr algn="l">
+              <a:spcBef>
+                <a:spcPts val="400"/>
+              </a:spcBef>
+            </a:pPr>
+            <a:r>
+              <a:rPr sz="2200" b="0" i="0">
+                <a:solidFill>
+                  <a:srgbClr val="000000"/>
+                </a:solidFill>
+                <a:latin typeface="Arial"/>
+              </a:rPr>
+              <a:t>Dyadic Collapse: All systems reduce to pairs.</a:t>
+            </a:r>
+          </a:p>
+          <a:p>
+            <a:pPr algn="l">
+              <a:spcBef>
+                <a:spcPts val="400"/>
+              </a:spcBef>
+            </a:pPr>
+            <a:r>
+              <a:rPr sz="2200" b="0" i="0">
+                <a:solidFill>
+                  <a:srgbClr val="000000"/>
+                </a:solidFill>
+                <a:latin typeface="Arial"/>
+              </a:rPr>
+              <a:t>Zero Synergy: Multi-party interaction is nominal.</a:t>
+            </a:r>
+          </a:p>
+          <a:p>
+            <a:pPr algn="l">
+              <a:spcBef>
+                <a:spcPts val="400"/>
+              </a:spcBef>
+            </a:pPr>
+            <a:r>
+              <a:rPr sz="2200" b="0" i="0">
+                <a:solidFill>
+                  <a:srgbClr val="000000"/>
+                </a:solidFill>
+                <a:latin typeface="Arial"/>
+              </a:rPr>
+              <a:t>Null Target: Algorithmacy lacks distinctive ontology.</a:t>
+            </a:r>
+          </a:p>
+          <a:p>
+            <a:pPr algn="l">
+              <a:spcBef>
+                <a:spcPts val="1600"/>
+              </a:spcBef>
+            </a:pPr>
+            <a:r>
+              <a:rPr sz="2200" b="1" i="0">
+                <a:solidFill>
+                  <a:srgbClr val="000000"/>
+                </a:solidFill>
+                <a:latin typeface="Arial"/>
+              </a:rPr>
+              <a:t>Hypothesis B: Genuine Irreducibility</a:t>
+            </a:r>
+          </a:p>
+          <a:p>
+            <a:pPr algn="l">
+              <a:spcBef>
+                <a:spcPts val="400"/>
+              </a:spcBef>
+            </a:pPr>
+            <a:r>
+              <a:rPr sz="2200" b="0" i="0">
+                <a:solidFill>
+                  <a:srgbClr val="000000"/>
+                </a:solidFill>
+                <a:latin typeface="Arial"/>
+              </a:rPr>
+              <a:t>Strict Thirdness: Triads resist pairwise factorization.</a:t>
+            </a:r>
+          </a:p>
+          <a:p>
+            <a:pPr algn="l">
+              <a:spcBef>
+                <a:spcPts val="400"/>
+              </a:spcBef>
+            </a:pPr>
+            <a:r>
+              <a:rPr sz="2200" b="0" i="0">
+                <a:solidFill>
+                  <a:srgbClr val="000000"/>
+                </a:solidFill>
+                <a:latin typeface="Arial"/>
+              </a:rPr>
+              <a:t>Positive Φ: Causal systems exhibit integration.</a:t>
+            </a:r>
+          </a:p>
+          <a:p>
+            <a:pPr algn="l">
+              <a:spcBef>
+                <a:spcPts val="400"/>
+              </a:spcBef>
+            </a:pPr>
+            <a:r>
+              <a:rPr sz="2200" b="0" i="0">
+                <a:solidFill>
+                  <a:srgbClr val="000000"/>
+                </a:solidFill>
+                <a:latin typeface="Arial"/>
+              </a:rPr>
+              <a:t>Real Target: Algorithmacy governs irreducible mediation.</a:t>
             </a:r>
           </a:p>
         </p:txBody>
@@ -7079,8 +8276,8 @@
         </p:nvSpPr>
         <p:spPr>
           <a:xfrm>
-            <a:off x="822960" y="640080"/>
-            <a:ext cx="10545775" cy="1188720"/>
+            <a:off x="822960" y="502920"/>
+            <a:ext cx="10545775" cy="274320"/>
           </a:xfrm>
           <a:prstGeom prst="rect">
             <a:avLst/>
@@ -7088,7 +8285,7 @@
           <a:noFill/>
         </p:spPr>
         <p:txBody>
-          <a:bodyPr wrap="square" anchor="b" lIns="0" rIns="0" tIns="0" bIns="0">
+          <a:bodyPr wrap="square" anchor="t" lIns="0" rIns="0" tIns="0" bIns="0">
             <a:spAutoFit/>
           </a:bodyPr>
           <a:lstStyle/>
@@ -7099,13 +8296,13 @@
               </a:spcBef>
             </a:pPr>
             <a:r>
-              <a:rPr sz="3600" b="1" i="0">
-                <a:solidFill>
-                  <a:srgbClr val="000000"/>
-                </a:solidFill>
-                <a:latin typeface="Arial"/>
-              </a:rPr>
-              <a:t>Peirce: three categories</a:t>
+              <a:rPr sz="1400" b="0" i="0">
+                <a:solidFill>
+                  <a:srgbClr val="000000"/>
+                </a:solidFill>
+                <a:latin typeface="Arial"/>
+              </a:rPr>
+              <a:t>PHANEROSCOPY &amp; LOGIC</a:t>
             </a:r>
           </a:p>
         </p:txBody>
@@ -7118,8 +8315,8 @@
         </p:nvSpPr>
         <p:spPr>
           <a:xfrm>
-            <a:off x="822960" y="2103120"/>
-            <a:ext cx="10545775" cy="3931920"/>
+            <a:off x="822960" y="822960"/>
+            <a:ext cx="10545775" cy="1005840"/>
           </a:xfrm>
           <a:prstGeom prst="rect">
             <a:avLst/>
@@ -7138,45 +8335,156 @@
               </a:spcBef>
             </a:pPr>
             <a:r>
-              <a:rPr sz="2400" b="0" i="0">
-                <a:solidFill>
-                  <a:srgbClr val="000000"/>
-                </a:solidFill>
-                <a:latin typeface="Arial"/>
-              </a:rPr>
-              <a:t>Firstness: "such as it is regardless of aught else" (CP 1.25)</a:t>
-            </a:r>
-          </a:p>
-          <a:p>
-            <a:pPr algn="l">
-              <a:spcBef>
-                <a:spcPts val="1400"/>
-              </a:spcBef>
-            </a:pPr>
-            <a:r>
-              <a:rPr sz="2400" b="0" i="0">
-                <a:solidFill>
-                  <a:srgbClr val="000000"/>
-                </a:solidFill>
-                <a:latin typeface="Arial"/>
-              </a:rPr>
-              <a:t>Secondness: "cause and effect are two" (CP 1.325)</a:t>
-            </a:r>
-          </a:p>
-          <a:p>
-            <a:pPr algn="l">
-              <a:spcBef>
-                <a:spcPts val="1400"/>
-              </a:spcBef>
-            </a:pPr>
-            <a:r>
-              <a:rPr sz="2400" b="0" i="0">
-                <a:solidFill>
-                  <a:srgbClr val="000000"/>
-                </a:solidFill>
-                <a:latin typeface="Arial"/>
-              </a:rPr>
-              <a:t>Thirdness: "the medium or connecting bond between the absolute first and last" (CP 1.337)</a:t>
+              <a:rPr sz="3400" b="1" i="0">
+                <a:solidFill>
+                  <a:srgbClr val="000000"/>
+                </a:solidFill>
+                <a:latin typeface="Arial"/>
+              </a:rPr>
+              <a:t>Peirce: The Three Irreducible Categories</a:t>
+            </a:r>
+          </a:p>
+        </p:txBody>
+      </p:sp>
+      <p:pic>
+        <p:nvPicPr>
+          <p:cNvPr id="4" name="Picture 3" descr="peirce.png"/>
+          <p:cNvPicPr>
+            <a:picLocks noChangeAspect="1"/>
+          </p:cNvPicPr>
+          <p:nvPr/>
+        </p:nvPicPr>
+        <p:blipFill>
+          <a:blip r:embed="rId2"/>
+          <a:stretch>
+            <a:fillRect/>
+          </a:stretch>
+        </p:blipFill>
+        <p:spPr>
+          <a:xfrm>
+            <a:off x="822960" y="2011680"/>
+            <a:ext cx="2771029" cy="3749040"/>
+          </a:xfrm>
+          <a:prstGeom prst="rect">
+            <a:avLst/>
+          </a:prstGeom>
+        </p:spPr>
+      </p:pic>
+      <p:sp>
+        <p:nvSpPr>
+          <p:cNvPr id="5" name="TextBox 4"/>
+          <p:cNvSpPr txBox="1"/>
+          <p:nvPr/>
+        </p:nvSpPr>
+        <p:spPr>
+          <a:xfrm>
+            <a:off x="4389120" y="2011680"/>
+            <a:ext cx="6979615" cy="4297680"/>
+          </a:xfrm>
+          <a:prstGeom prst="rect">
+            <a:avLst/>
+          </a:prstGeom>
+          <a:noFill/>
+        </p:spPr>
+        <p:txBody>
+          <a:bodyPr wrap="square" anchor="t" lIns="0" rIns="0" tIns="0" bIns="0">
+            <a:spAutoFit/>
+          </a:bodyPr>
+          <a:lstStyle/>
+          <a:p>
+            <a:pPr algn="l">
+              <a:spcBef>
+                <a:spcPts val="0"/>
+              </a:spcBef>
+            </a:pPr>
+            <a:r>
+              <a:rPr sz="2200" b="1" i="0">
+                <a:solidFill>
+                  <a:srgbClr val="000000"/>
+                </a:solidFill>
+                <a:latin typeface="Arial"/>
+              </a:rPr>
+              <a:t>Firstness (Monadic)</a:t>
+            </a:r>
+          </a:p>
+          <a:p>
+            <a:pPr algn="l">
+              <a:spcBef>
+                <a:spcPts val="400"/>
+              </a:spcBef>
+            </a:pPr>
+            <a:r>
+              <a:rPr sz="2200" b="0" i="0">
+                <a:solidFill>
+                  <a:srgbClr val="000000"/>
+                </a:solidFill>
+                <a:latin typeface="Arial"/>
+              </a:rPr>
+              <a:t>Immediate monadic potentiality without external relation.</a:t>
+            </a:r>
+          </a:p>
+          <a:p>
+            <a:pPr algn="l">
+              <a:spcBef>
+                <a:spcPts val="1600"/>
+              </a:spcBef>
+            </a:pPr>
+            <a:r>
+              <a:rPr sz="2200" b="1" i="0">
+                <a:solidFill>
+                  <a:srgbClr val="000000"/>
+                </a:solidFill>
+                <a:latin typeface="Arial"/>
+              </a:rPr>
+              <a:t>Secondness (Dyadic)</a:t>
+            </a:r>
+          </a:p>
+          <a:p>
+            <a:pPr algn="l">
+              <a:spcBef>
+                <a:spcPts val="400"/>
+              </a:spcBef>
+            </a:pPr>
+            <a:r>
+              <a:rPr sz="2200" b="0" i="0">
+                <a:solidFill>
+                  <a:srgbClr val="000000"/>
+                </a:solidFill>
+                <a:latin typeface="Arial"/>
+              </a:rPr>
+              <a:t>Direct dyadic action-reaction across points.</a:t>
+            </a:r>
+          </a:p>
+          <a:p>
+            <a:pPr algn="l">
+              <a:spcBef>
+                <a:spcPts val="1600"/>
+              </a:spcBef>
+            </a:pPr>
+            <a:r>
+              <a:rPr sz="2200" b="1" i="0">
+                <a:solidFill>
+                  <a:srgbClr val="000000"/>
+                </a:solidFill>
+                <a:latin typeface="Arial"/>
+              </a:rPr>
+              <a:t>Thirdness (Triadic)</a:t>
+            </a:r>
+          </a:p>
+          <a:p>
+            <a:pPr algn="l">
+              <a:spcBef>
+                <a:spcPts val="400"/>
+              </a:spcBef>
+            </a:pPr>
+            <a:r>
+              <a:rPr sz="2200" b="0" i="0">
+                <a:solidFill>
+                  <a:srgbClr val="000000"/>
+                </a:solidFill>
+                <a:latin typeface="Arial"/>
+              </a:rPr>
+              <a:t>Genuine synthetic mediation uniting distinct terms.</a:t>
             </a:r>
           </a:p>
         </p:txBody>
@@ -7215,8 +8523,8 @@
         </p:nvSpPr>
         <p:spPr>
           <a:xfrm>
-            <a:off x="822960" y="640080"/>
-            <a:ext cx="10545775" cy="1188720"/>
+            <a:off x="822960" y="502920"/>
+            <a:ext cx="10545775" cy="274320"/>
           </a:xfrm>
           <a:prstGeom prst="rect">
             <a:avLst/>
@@ -7224,7 +8532,7 @@
           <a:noFill/>
         </p:spPr>
         <p:txBody>
-          <a:bodyPr wrap="square" anchor="b" lIns="0" rIns="0" tIns="0" bIns="0">
+          <a:bodyPr wrap="square" anchor="t" lIns="0" rIns="0" tIns="0" bIns="0">
             <a:spAutoFit/>
           </a:bodyPr>
           <a:lstStyle/>
@@ -7235,13 +8543,13 @@
               </a:spcBef>
             </a:pPr>
             <a:r>
-              <a:rPr sz="3600" b="1" i="0">
-                <a:solidFill>
-                  <a:srgbClr val="000000"/>
-                </a:solidFill>
-                <a:latin typeface="Arial"/>
-              </a:rPr>
-              <a:t>Thirdness is its own kind of being</a:t>
+              <a:rPr sz="1400" b="0" i="0">
+                <a:solidFill>
+                  <a:srgbClr val="000000"/>
+                </a:solidFill>
+                <a:latin typeface="Arial"/>
+              </a:rPr>
+              <a:t>THEOREM FORMULATION</a:t>
             </a:r>
           </a:p>
         </p:txBody>
@@ -7254,8 +8562,8 @@
         </p:nvSpPr>
         <p:spPr>
           <a:xfrm>
-            <a:off x="822960" y="2103120"/>
-            <a:ext cx="10545775" cy="3931920"/>
+            <a:off x="822960" y="822960"/>
+            <a:ext cx="10545775" cy="1005840"/>
           </a:xfrm>
           <a:prstGeom prst="rect">
             <a:avLst/>
@@ -7274,45 +8582,189 @@
               </a:spcBef>
             </a:pPr>
             <a:r>
-              <a:rPr sz="2400" b="0" i="1">
-                <a:solidFill>
-                  <a:srgbClr val="000000"/>
-                </a:solidFill>
-                <a:latin typeface="Arial"/>
-              </a:rPr>
-              <a:t>its three members are bound together by it in a way that does not consist in any complexus of dyadic relations</a:t>
-            </a:r>
-          </a:p>
-          <a:p>
-            <a:pPr algn="l">
-              <a:spcBef>
-                <a:spcPts val="1400"/>
-              </a:spcBef>
-            </a:pPr>
-            <a:r>
-              <a:rPr sz="1800" b="0" i="0">
-                <a:solidFill>
-                  <a:srgbClr val="000000"/>
-                </a:solidFill>
-                <a:latin typeface="Arial"/>
-              </a:rPr>
-              <a:t>— Peirce, CP 2.274</a:t>
-            </a:r>
-          </a:p>
-          <a:p>
-            <a:pPr algn="l">
-              <a:spcBef>
-                <a:spcPts val="1400"/>
-              </a:spcBef>
-            </a:pPr>
-            <a:r>
-              <a:rPr sz="2400" b="0" i="0">
-                <a:solidFill>
-                  <a:srgbClr val="000000"/>
-                </a:solidFill>
-                <a:latin typeface="Arial"/>
-              </a:rPr>
-              <a:t>The reduction thesis, first stated without proof in 1870: no triad from dyads; every higher relation from triads.</a:t>
+              <a:rPr sz="3400" b="1" i="0">
+                <a:solidFill>
+                  <a:srgbClr val="000000"/>
+                </a:solidFill>
+                <a:latin typeface="Arial"/>
+              </a:rPr>
+              <a:t>Peircean Reduction Thesis (PRT)</a:t>
+            </a:r>
+          </a:p>
+        </p:txBody>
+      </p:sp>
+      <p:sp>
+        <p:nvSpPr>
+          <p:cNvPr id="4" name="TextBox 3"/>
+          <p:cNvSpPr txBox="1"/>
+          <p:nvPr/>
+        </p:nvSpPr>
+        <p:spPr>
+          <a:xfrm>
+            <a:off x="822960" y="2011680"/>
+            <a:ext cx="10545775" cy="4297680"/>
+          </a:xfrm>
+          <a:prstGeom prst="rect">
+            <a:avLst/>
+          </a:prstGeom>
+          <a:noFill/>
+        </p:spPr>
+        <p:txBody>
+          <a:bodyPr wrap="square" anchor="t" lIns="0" rIns="0" tIns="0" bIns="0">
+            <a:spAutoFit/>
+          </a:bodyPr>
+          <a:lstStyle/>
+          <a:p>
+            <a:pPr algn="l">
+              <a:spcBef>
+                <a:spcPts val="0"/>
+              </a:spcBef>
+            </a:pPr>
+            <a:r>
+              <a:rPr sz="2200" b="1" i="0">
+                <a:solidFill>
+                  <a:srgbClr val="000000"/>
+                </a:solidFill>
+                <a:latin typeface="Arial"/>
+              </a:rPr>
+              <a:t>Thesis:</a:t>
+            </a:r>
+            <a:r>
+              <a:rPr sz="2200" b="0" i="0">
+                <a:solidFill>
+                  <a:srgbClr val="000000"/>
+                </a:solidFill>
+                <a:latin typeface="Arial"/>
+              </a:rPr>
+              <a:t> Triads do not reduce; polyads (n ≥ 4) reduce to triads.</a:t>
+            </a:r>
+          </a:p>
+          <a:p>
+            <a:pPr algn="l">
+              <a:spcBef>
+                <a:spcPts val="1600"/>
+              </a:spcBef>
+            </a:pPr>
+            <a:r>
+              <a:rPr sz="2200" b="1" i="0">
+                <a:solidFill>
+                  <a:srgbClr val="000000"/>
+                </a:solidFill>
+                <a:latin typeface="Arial"/>
+              </a:rPr>
+              <a:t>PART 1 • NEGATIVE CLAIM — Negative Thesis</a:t>
+            </a:r>
+          </a:p>
+          <a:p>
+            <a:pPr algn="l">
+              <a:spcBef>
+                <a:spcPts val="400"/>
+              </a:spcBef>
+            </a:pPr>
+            <a:r>
+              <a:rPr sz="2200" b="0" i="0">
+                <a:solidFill>
+                  <a:srgbClr val="000000"/>
+                </a:solidFill>
+                <a:latin typeface="Arial"/>
+              </a:rPr>
+              <a:t>Closure Property: Dyads cannot synthesize triads.</a:t>
+            </a:r>
+          </a:p>
+          <a:p>
+            <a:pPr algn="l">
+              <a:spcBef>
+                <a:spcPts val="400"/>
+              </a:spcBef>
+            </a:pPr>
+            <a:r>
+              <a:rPr sz="2200" b="0" i="0">
+                <a:solidFill>
+                  <a:srgbClr val="000000"/>
+                </a:solidFill>
+                <a:latin typeface="Arial"/>
+              </a:rPr>
+              <a:t>Relational Gap: Pairwise projections lose join-irreducibility.</a:t>
+            </a:r>
+          </a:p>
+          <a:p>
+            <a:pPr algn="l">
+              <a:spcBef>
+                <a:spcPts val="400"/>
+              </a:spcBef>
+            </a:pPr>
+            <a:r>
+              <a:rPr sz="2200" b="0" i="0">
+                <a:solidFill>
+                  <a:srgbClr val="000000"/>
+                </a:solidFill>
+                <a:latin typeface="Arial"/>
+              </a:rPr>
+              <a:t>Universal Algebra: Strict non-generation over closed domains.</a:t>
+            </a:r>
+          </a:p>
+          <a:p>
+            <a:pPr algn="l">
+              <a:spcBef>
+                <a:spcPts val="1600"/>
+              </a:spcBef>
+            </a:pPr>
+            <a:r>
+              <a:rPr sz="2200" b="1" i="0">
+                <a:solidFill>
+                  <a:srgbClr val="000000"/>
+                </a:solidFill>
+                <a:latin typeface="Arial"/>
+              </a:rPr>
+              <a:t>PART 2 • POSITIVE CLAIM — Positive Thesis</a:t>
+            </a:r>
+          </a:p>
+          <a:p>
+            <a:pPr algn="l">
+              <a:spcBef>
+                <a:spcPts val="400"/>
+              </a:spcBef>
+            </a:pPr>
+            <a:r>
+              <a:rPr sz="2200" b="0" i="0">
+                <a:solidFill>
+                  <a:srgbClr val="000000"/>
+                </a:solidFill>
+                <a:latin typeface="Arial"/>
+              </a:rPr>
+              <a:t>Subcubic Networks: All polyads form via triads.</a:t>
+            </a:r>
+          </a:p>
+          <a:p>
+            <a:pPr algn="l">
+              <a:spcBef>
+                <a:spcPts val="400"/>
+              </a:spcBef>
+            </a:pPr>
+            <a:r>
+              <a:rPr sz="2200" b="0" i="0">
+                <a:solidFill>
+                  <a:srgbClr val="000000"/>
+                </a:solidFill>
+                <a:latin typeface="Arial"/>
+              </a:rPr>
+              <a:t>Universal Basis: Degree-three hypergraphs span all arities.</a:t>
+            </a:r>
+          </a:p>
+          <a:p>
+            <a:pPr algn="l">
+              <a:spcBef>
+                <a:spcPts val="400"/>
+              </a:spcBef>
+            </a:pPr>
+            <a:r>
+              <a:rPr sz="2200" b="0" i="0">
+                <a:solidFill>
+                  <a:srgbClr val="000000"/>
+                </a:solidFill>
+                <a:latin typeface="Arial"/>
+              </a:rPr>
+              <a:t>Ternary Bound: Zero primitives required beyond triads.</a:t>
             </a:r>
           </a:p>
         </p:txBody>
@@ -7351,8 +8803,8 @@
         </p:nvSpPr>
         <p:spPr>
           <a:xfrm>
-            <a:off x="822960" y="640080"/>
-            <a:ext cx="10545775" cy="1188720"/>
+            <a:off x="822960" y="502920"/>
+            <a:ext cx="10545775" cy="274320"/>
           </a:xfrm>
           <a:prstGeom prst="rect">
             <a:avLst/>
@@ -7360,7 +8812,7 @@
           <a:noFill/>
         </p:spPr>
         <p:txBody>
-          <a:bodyPr wrap="square" anchor="b" lIns="0" rIns="0" tIns="0" bIns="0">
+          <a:bodyPr wrap="square" anchor="t" lIns="0" rIns="0" tIns="0" bIns="0">
             <a:spAutoFit/>
           </a:bodyPr>
           <a:lstStyle/>
@@ -7371,13 +8823,13 @@
               </a:spcBef>
             </a:pPr>
             <a:r>
-              <a:rPr sz="3600" b="1" i="0">
-                <a:solidFill>
-                  <a:srgbClr val="000000"/>
-                </a:solidFill>
-                <a:latin typeface="Arial"/>
-              </a:rPr>
-              <a:t>Argument 1: giving is not throwing</a:t>
+              <a:rPr sz="1400" b="0" i="0">
+                <a:solidFill>
+                  <a:srgbClr val="000000"/>
+                </a:solidFill>
+                <a:latin typeface="Arial"/>
+              </a:rPr>
+              <a:t>SEMIOTIC ANALYSIS</a:t>
             </a:r>
           </a:p>
         </p:txBody>
@@ -7390,8 +8842,8 @@
         </p:nvSpPr>
         <p:spPr>
           <a:xfrm>
-            <a:off x="822960" y="2103120"/>
-            <a:ext cx="10545775" cy="3931920"/>
+            <a:off x="822960" y="822960"/>
+            <a:ext cx="10545775" cy="1005840"/>
           </a:xfrm>
           <a:prstGeom prst="rect">
             <a:avLst/>
@@ -7410,45 +8862,196 @@
               </a:spcBef>
             </a:pPr>
             <a:r>
-              <a:rPr sz="2400" b="0" i="1">
-                <a:solidFill>
-                  <a:srgbClr val="000000"/>
-                </a:solidFill>
-                <a:latin typeface="Arial"/>
-              </a:rPr>
-              <a:t>A gives B to C. This does not consist in A's throwing B away and its accidentally hitting C</a:t>
-            </a:r>
-          </a:p>
-          <a:p>
-            <a:pPr algn="l">
-              <a:spcBef>
-                <a:spcPts val="1400"/>
-              </a:spcBef>
-            </a:pPr>
-            <a:r>
-              <a:rPr sz="2400" b="0" i="1">
-                <a:solidFill>
-                  <a:srgbClr val="000000"/>
-                </a:solidFill>
-                <a:latin typeface="Arial"/>
-              </a:rPr>
-              <a:t>… merely one dyadic relation followed by another</a:t>
-            </a:r>
-          </a:p>
-          <a:p>
-            <a:pPr algn="l">
-              <a:spcBef>
-                <a:spcPts val="1400"/>
-              </a:spcBef>
-            </a:pPr>
-            <a:r>
-              <a:rPr sz="1800" b="0" i="0">
-                <a:solidFill>
-                  <a:srgbClr val="000000"/>
-                </a:solidFill>
-                <a:latin typeface="Arial"/>
-              </a:rPr>
-              <a:t>— Peirce, CP 1.345</a:t>
+              <a:rPr sz="3400" b="1" i="0">
+                <a:solidFill>
+                  <a:srgbClr val="000000"/>
+                </a:solidFill>
+                <a:latin typeface="Arial"/>
+              </a:rPr>
+              <a:t>Autonomous Mediation vs. Dyadic Cascades</a:t>
+            </a:r>
+          </a:p>
+        </p:txBody>
+      </p:sp>
+      <p:sp>
+        <p:nvSpPr>
+          <p:cNvPr id="4" name="TextBox 3"/>
+          <p:cNvSpPr txBox="1"/>
+          <p:nvPr/>
+        </p:nvSpPr>
+        <p:spPr>
+          <a:xfrm>
+            <a:off x="822960" y="2011680"/>
+            <a:ext cx="10545775" cy="4297680"/>
+          </a:xfrm>
+          <a:prstGeom prst="rect">
+            <a:avLst/>
+          </a:prstGeom>
+          <a:noFill/>
+        </p:spPr>
+        <p:txBody>
+          <a:bodyPr wrap="square" anchor="t" lIns="0" rIns="0" tIns="0" bIns="0">
+            <a:spAutoFit/>
+          </a:bodyPr>
+          <a:lstStyle/>
+          <a:p>
+            <a:pPr algn="l">
+              <a:spcBef>
+                <a:spcPts val="0"/>
+              </a:spcBef>
+            </a:pPr>
+            <a:r>
+              <a:rPr sz="2200" b="1" i="0">
+                <a:solidFill>
+                  <a:srgbClr val="000000"/>
+                </a:solidFill>
+                <a:latin typeface="Arial"/>
+              </a:rPr>
+              <a:t>FACTORIZABLE — Chained Dyadic Pipeline</a:t>
+            </a:r>
+          </a:p>
+          <a:p>
+            <a:pPr algn="l">
+              <a:spcBef>
+                <a:spcPts val="400"/>
+              </a:spcBef>
+            </a:pPr>
+            <a:r>
+              <a:rPr sz="2200" b="0" i="0">
+                <a:solidFill>
+                  <a:srgbClr val="000000"/>
+                </a:solidFill>
+                <a:latin typeface="Arial"/>
+              </a:rPr>
+              <a:t>R(A, B) • R(B, C) → Dyadic Sequence</a:t>
+            </a:r>
+          </a:p>
+          <a:p>
+            <a:pPr algn="l">
+              <a:spcBef>
+                <a:spcPts val="400"/>
+              </a:spcBef>
+            </a:pPr>
+            <a:r>
+              <a:rPr sz="2200" b="0" i="0">
+                <a:solidFill>
+                  <a:srgbClr val="000000"/>
+                </a:solidFill>
+                <a:latin typeface="Arial"/>
+              </a:rPr>
+              <a:t>Independent Stages: First relation completes before second.</a:t>
+            </a:r>
+          </a:p>
+          <a:p>
+            <a:pPr algn="l">
+              <a:spcBef>
+                <a:spcPts val="400"/>
+              </a:spcBef>
+            </a:pPr>
+            <a:r>
+              <a:rPr sz="2200" b="0" i="0">
+                <a:solidFill>
+                  <a:srgbClr val="000000"/>
+                </a:solidFill>
+                <a:latin typeface="Arial"/>
+              </a:rPr>
+              <a:t>Markov Property: Intermediate node screens off origin.</a:t>
+            </a:r>
+          </a:p>
+          <a:p>
+            <a:pPr algn="l">
+              <a:spcBef>
+                <a:spcPts val="400"/>
+              </a:spcBef>
+            </a:pPr>
+            <a:r>
+              <a:rPr sz="2200" b="0" i="0">
+                <a:solidFill>
+                  <a:srgbClr val="000000"/>
+                </a:solidFill>
+                <a:latin typeface="Arial"/>
+              </a:rPr>
+              <a:t>Zero Integration: Total relation factors into projections.</a:t>
+            </a:r>
+          </a:p>
+          <a:p>
+            <a:pPr algn="l">
+              <a:spcBef>
+                <a:spcPts val="1600"/>
+              </a:spcBef>
+            </a:pPr>
+            <a:r>
+              <a:rPr sz="2200" b="1" i="0">
+                <a:solidFill>
+                  <a:srgbClr val="000000"/>
+                </a:solidFill>
+                <a:latin typeface="Arial"/>
+              </a:rPr>
+              <a:t>NON-FACTORIZABLE — Genuine Triadic Transaction</a:t>
+            </a:r>
+          </a:p>
+          <a:p>
+            <a:pPr algn="l">
+              <a:spcBef>
+                <a:spcPts val="400"/>
+              </a:spcBef>
+            </a:pPr>
+            <a:r>
+              <a:rPr sz="2200" b="0" i="0">
+                <a:solidFill>
+                  <a:srgbClr val="000000"/>
+                </a:solidFill>
+                <a:latin typeface="Arial"/>
+              </a:rPr>
+              <a:t>G(A, B, C) ≠ R1(A, B) × R2(B, C)</a:t>
+            </a:r>
+          </a:p>
+          <a:p>
+            <a:pPr algn="l">
+              <a:spcBef>
+                <a:spcPts val="400"/>
+              </a:spcBef>
+            </a:pPr>
+            <a:r>
+              <a:rPr sz="2200" b="0" i="0">
+                <a:solidFill>
+                  <a:srgbClr val="000000"/>
+                </a:solidFill>
+                <a:latin typeface="Arial"/>
+              </a:rPr>
+              <a:t>Simultaneous Binding: Third party mutually constitutes event.</a:t>
+            </a:r>
+          </a:p>
+          <a:p>
+            <a:pPr algn="l">
+              <a:spcBef>
+                <a:spcPts val="400"/>
+              </a:spcBef>
+            </a:pPr>
+            <a:r>
+              <a:rPr sz="2200" b="0" i="0">
+                <a:solidFill>
+                  <a:srgbClr val="000000"/>
+                </a:solidFill>
+                <a:latin typeface="Arial"/>
+              </a:rPr>
+              <a:t>Irreducible Mediant: Lawful bond precedes pairwise parts.</a:t>
+            </a:r>
+          </a:p>
+          <a:p>
+            <a:pPr algn="l">
+              <a:spcBef>
+                <a:spcPts val="400"/>
+              </a:spcBef>
+            </a:pPr>
+            <a:r>
+              <a:rPr sz="2200" b="0" i="0">
+                <a:solidFill>
+                  <a:srgbClr val="000000"/>
+                </a:solidFill>
+                <a:latin typeface="Arial"/>
+              </a:rPr>
+              <a:t>Triadic Wholeness: Interaction collapses upon decomposition.</a:t>
             </a:r>
           </a:p>
         </p:txBody>
@@ -7487,8 +9090,8 @@
         </p:nvSpPr>
         <p:spPr>
           <a:xfrm>
-            <a:off x="822960" y="640080"/>
-            <a:ext cx="10545775" cy="1188720"/>
+            <a:off x="822960" y="502920"/>
+            <a:ext cx="10545775" cy="274320"/>
           </a:xfrm>
           <a:prstGeom prst="rect">
             <a:avLst/>
@@ -7496,7 +9099,7 @@
           <a:noFill/>
         </p:spPr>
         <p:txBody>
-          <a:bodyPr wrap="square" anchor="b" lIns="0" rIns="0" tIns="0" bIns="0">
+          <a:bodyPr wrap="square" anchor="t" lIns="0" rIns="0" tIns="0" bIns="0">
             <a:spAutoFit/>
           </a:bodyPr>
           <a:lstStyle/>
@@ -7507,13 +9110,13 @@
               </a:spcBef>
             </a:pPr>
             <a:r>
-              <a:rPr sz="3600" b="1" i="0">
-                <a:solidFill>
-                  <a:srgbClr val="000000"/>
-                </a:solidFill>
-                <a:latin typeface="Arial"/>
-              </a:rPr>
-              <a:t>Argument 2: pairs only make pairs</a:t>
+              <a:rPr sz="1400" b="0" i="0">
+                <a:solidFill>
+                  <a:srgbClr val="000000"/>
+                </a:solidFill>
+                <a:latin typeface="Arial"/>
+              </a:rPr>
+              <a:t>TOPOLOGICAL PROOF</a:t>
             </a:r>
           </a:p>
         </p:txBody>
@@ -7526,8 +9129,8 @@
         </p:nvSpPr>
         <p:spPr>
           <a:xfrm>
-            <a:off x="822960" y="2103120"/>
-            <a:ext cx="10545775" cy="3931920"/>
+            <a:off x="822960" y="822960"/>
+            <a:ext cx="10545775" cy="1005840"/>
           </a:xfrm>
           <a:prstGeom prst="rect">
             <a:avLst/>
@@ -7546,35 +9149,121 @@
               </a:spcBef>
             </a:pPr>
             <a:r>
-              <a:rPr sz="2400" b="0" i="1">
-                <a:solidFill>
-                  <a:srgbClr val="000000"/>
-                </a:solidFill>
-                <a:latin typeface="Arial"/>
-              </a:rPr>
-              <a:t>you can never by such joining make a graph with three tails</a:t>
-            </a:r>
-          </a:p>
-          <a:p>
-            <a:pPr algn="l">
-              <a:spcBef>
-                <a:spcPts val="1400"/>
-              </a:spcBef>
-            </a:pPr>
-            <a:r>
-              <a:rPr sz="1800" b="0" i="0">
-                <a:solidFill>
-                  <a:srgbClr val="000000"/>
-                </a:solidFill>
-                <a:latin typeface="Arial"/>
-              </a:rPr>
-              <a:t>— Peirce, CP 1.346</a:t>
-            </a:r>
-          </a:p>
-          <a:p>
-            <a:pPr algn="l">
-              <a:spcBef>
-                <a:spcPts val="1400"/>
+              <a:rPr sz="3400" b="1" i="0">
+                <a:solidFill>
+                  <a:srgbClr val="000000"/>
+                </a:solidFill>
+                <a:latin typeface="Arial"/>
+              </a:rPr>
+              <a:t>Topological Obstructions to Dyadic Synthesis</a:t>
+            </a:r>
+          </a:p>
+        </p:txBody>
+      </p:sp>
+      <p:pic>
+        <p:nvPicPr>
+          <p:cNvPr id="4" name="Picture 3" descr="valency.png"/>
+          <p:cNvPicPr>
+            <a:picLocks noChangeAspect="1"/>
+          </p:cNvPicPr>
+          <p:nvPr/>
+        </p:nvPicPr>
+        <p:blipFill>
+          <a:blip r:embed="rId2"/>
+          <a:stretch>
+            <a:fillRect/>
+          </a:stretch>
+        </p:blipFill>
+        <p:spPr>
+          <a:xfrm>
+            <a:off x="822960" y="2011680"/>
+            <a:ext cx="3108960" cy="1650210"/>
+          </a:xfrm>
+          <a:prstGeom prst="rect">
+            <a:avLst/>
+          </a:prstGeom>
+        </p:spPr>
+      </p:pic>
+      <p:sp>
+        <p:nvSpPr>
+          <p:cNvPr id="5" name="TextBox 4"/>
+          <p:cNvSpPr txBox="1"/>
+          <p:nvPr/>
+        </p:nvSpPr>
+        <p:spPr>
+          <a:xfrm>
+            <a:off x="822960" y="3799050"/>
+            <a:ext cx="3108960" cy="548640"/>
+          </a:xfrm>
+          <a:prstGeom prst="rect">
+            <a:avLst/>
+          </a:prstGeom>
+          <a:noFill/>
+        </p:spPr>
+        <p:txBody>
+          <a:bodyPr wrap="square" anchor="t" lIns="0" rIns="0" tIns="0" bIns="0">
+            <a:spAutoFit/>
+          </a:bodyPr>
+          <a:lstStyle/>
+          <a:p>
+            <a:pPr algn="l">
+              <a:spcBef>
+                <a:spcPts val="0"/>
+              </a:spcBef>
+            </a:pPr>
+            <a:r>
+              <a:rPr sz="1600" b="0" i="0">
+                <a:solidFill>
+                  <a:srgbClr val="000000"/>
+                </a:solidFill>
+                <a:latin typeface="Arial"/>
+              </a:rPr>
+              <a:t>Bonding Rule: 2 + 2 - 2 = 2</a:t>
+            </a:r>
+          </a:p>
+        </p:txBody>
+      </p:sp>
+      <p:sp>
+        <p:nvSpPr>
+          <p:cNvPr id="6" name="TextBox 5"/>
+          <p:cNvSpPr txBox="1"/>
+          <p:nvPr/>
+        </p:nvSpPr>
+        <p:spPr>
+          <a:xfrm>
+            <a:off x="4389120" y="2011680"/>
+            <a:ext cx="6979615" cy="4297680"/>
+          </a:xfrm>
+          <a:prstGeom prst="rect">
+            <a:avLst/>
+          </a:prstGeom>
+          <a:noFill/>
+        </p:spPr>
+        <p:txBody>
+          <a:bodyPr wrap="square" anchor="t" lIns="0" rIns="0" tIns="0" bIns="0">
+            <a:spAutoFit/>
+          </a:bodyPr>
+          <a:lstStyle/>
+          <a:p>
+            <a:pPr algn="l">
+              <a:spcBef>
+                <a:spcPts val="0"/>
+              </a:spcBef>
+            </a:pPr>
+            <a:r>
+              <a:rPr sz="2200" b="1" i="0">
+                <a:solidFill>
+                  <a:srgbClr val="000000"/>
+                </a:solidFill>
+                <a:latin typeface="Arial"/>
+              </a:rPr>
+              <a:t>Valency Conservation</a:t>
+            </a:r>
+          </a:p>
+          <a:p>
+            <a:pPr algn="l">
+              <a:spcBef>
+                <a:spcPts val="400"/>
               </a:spcBef>
             </a:pPr>
             <a:r>
@@ -7582,15 +9271,31 @@
                 <a:solidFill>
                   <a:srgbClr val="000000"/>
                 </a:solidFill>
-                <a:latin typeface="Courier New"/>
-              </a:rPr>
-              <a:t>2 + 2 − 2 = 2</a:t>
-            </a:r>
-          </a:p>
-          <a:p>
-            <a:pPr algn="l">
-              <a:spcBef>
-                <a:spcPts val="0"/>
+                <a:latin typeface="Arial"/>
+              </a:rPr>
+              <a:t>Connecting dyadic relations yields purely linear paths.</a:t>
+            </a:r>
+          </a:p>
+          <a:p>
+            <a:pPr algn="l">
+              <a:spcBef>
+                <a:spcPts val="1600"/>
+              </a:spcBef>
+            </a:pPr>
+            <a:r>
+              <a:rPr sz="2200" b="1" i="0">
+                <a:solidFill>
+                  <a:srgbClr val="000000"/>
+                </a:solidFill>
+                <a:latin typeface="Arial"/>
+              </a:rPr>
+              <a:t>Topological Barrier</a:t>
+            </a:r>
+          </a:p>
+          <a:p>
+            <a:pPr algn="l">
+              <a:spcBef>
+                <a:spcPts val="400"/>
               </a:spcBef>
             </a:pPr>
             <a:r>
@@ -7598,41 +9303,41 @@
                 <a:solidFill>
                   <a:srgbClr val="000000"/>
                 </a:solidFill>
-                <a:latin typeface="Courier New"/>
-              </a:rPr>
-              <a:t>3 + 3 − 2 = 4</a:t>
-            </a:r>
-          </a:p>
-          <a:p>
-            <a:pPr algn="l">
-              <a:spcBef>
-                <a:spcPts val="1400"/>
-              </a:spcBef>
-            </a:pPr>
-            <a:r>
-              <a:rPr sz="2400" b="0" i="1">
-                <a:solidFill>
-                  <a:srgbClr val="000000"/>
-                </a:solidFill>
-                <a:latin typeface="Arial"/>
-              </a:rPr>
-              <a:t>artiads, or even-ads, can produce only artiads</a:t>
-            </a:r>
-          </a:p>
-          <a:p>
-            <a:pPr algn="l">
-              <a:spcBef>
-                <a:spcPts val="1400"/>
-              </a:spcBef>
-            </a:pPr>
-            <a:r>
-              <a:rPr sz="1800" b="0" i="0">
-                <a:solidFill>
-                  <a:srgbClr val="000000"/>
-                </a:solidFill>
-                <a:latin typeface="Arial"/>
-              </a:rPr>
-              <a:t>— Peirce, 1897</a:t>
+                <a:latin typeface="Arial"/>
+              </a:rPr>
+              <a:t>Degree-two vertices cannot construct a branch.</a:t>
+            </a:r>
+          </a:p>
+          <a:p>
+            <a:pPr algn="l">
+              <a:spcBef>
+                <a:spcPts val="1600"/>
+              </a:spcBef>
+            </a:pPr>
+            <a:r>
+              <a:rPr sz="2200" b="1" i="0">
+                <a:solidFill>
+                  <a:srgbClr val="000000"/>
+                </a:solidFill>
+                <a:latin typeface="Arial"/>
+              </a:rPr>
+              <a:t>Trivalent Junction</a:t>
+            </a:r>
+          </a:p>
+          <a:p>
+            <a:pPr algn="l">
+              <a:spcBef>
+                <a:spcPts val="400"/>
+              </a:spcBef>
+            </a:pPr>
+            <a:r>
+              <a:rPr sz="2200" b="0" i="0">
+                <a:solidFill>
+                  <a:srgbClr val="000000"/>
+                </a:solidFill>
+                <a:latin typeface="Arial"/>
+              </a:rPr>
+              <a:t>Every branching junction is intrinsically triadic.</a:t>
             </a:r>
           </a:p>
         </p:txBody>
@@ -7671,8 +9376,8 @@
         </p:nvSpPr>
         <p:spPr>
           <a:xfrm>
-            <a:off x="822960" y="640080"/>
-            <a:ext cx="10545775" cy="1188720"/>
+            <a:off x="822960" y="502920"/>
+            <a:ext cx="10545775" cy="274320"/>
           </a:xfrm>
           <a:prstGeom prst="rect">
             <a:avLst/>
@@ -7680,7 +9385,7 @@
           <a:noFill/>
         </p:spPr>
         <p:txBody>
-          <a:bodyPr wrap="square" anchor="b" lIns="0" rIns="0" tIns="0" bIns="0">
+          <a:bodyPr wrap="square" anchor="t" lIns="0" rIns="0" tIns="0" bIns="0">
             <a:spAutoFit/>
           </a:bodyPr>
           <a:lstStyle/>
@@ -7691,13 +9396,13 @@
               </a:spcBef>
             </a:pPr>
             <a:r>
-              <a:rPr sz="3600" b="1" i="0">
-                <a:solidFill>
-                  <a:srgbClr val="000000"/>
-                </a:solidFill>
-                <a:latin typeface="Arial"/>
-              </a:rPr>
-              <a:t>Argument 3: the junction is a triad</a:t>
+              <a:rPr sz="1400" b="0" i="0">
+                <a:solidFill>
+                  <a:srgbClr val="000000"/>
+                </a:solidFill>
+                <a:latin typeface="Arial"/>
+              </a:rPr>
+              <a:t>ALGEBRAIC PRIMITIVE</a:t>
             </a:r>
           </a:p>
         </p:txBody>
@@ -7710,8 +9415,8 @@
         </p:nvSpPr>
         <p:spPr>
           <a:xfrm>
-            <a:off x="822960" y="2103120"/>
-            <a:ext cx="10545775" cy="3931920"/>
+            <a:off x="822960" y="822960"/>
+            <a:ext cx="10545775" cy="1005840"/>
           </a:xfrm>
           <a:prstGeom prst="rect">
             <a:avLst/>
@@ -7730,61 +9435,184 @@
               </a:spcBef>
             </a:pPr>
             <a:r>
-              <a:rPr sz="2400" b="0" i="1">
-                <a:solidFill>
-                  <a:srgbClr val="000000"/>
-                </a:solidFill>
-                <a:latin typeface="Arial"/>
-              </a:rPr>
-              <a:t>every node of bonds is equivalent to a relative</a:t>
-            </a:r>
-          </a:p>
-          <a:p>
-            <a:pPr algn="l">
-              <a:spcBef>
-                <a:spcPts val="1400"/>
-              </a:spcBef>
-            </a:pPr>
-            <a:r>
-              <a:rPr sz="1800" b="0" i="0">
-                <a:solidFill>
-                  <a:srgbClr val="000000"/>
-                </a:solidFill>
-                <a:latin typeface="Arial"/>
-              </a:rPr>
-              <a:t>— Peirce, 1897</a:t>
-            </a:r>
-          </a:p>
-          <a:p>
-            <a:pPr algn="l">
-              <a:spcBef>
-                <a:spcPts val="1400"/>
-              </a:spcBef>
-            </a:pPr>
-            <a:r>
-              <a:rPr sz="2400" b="0" i="0">
-                <a:solidFill>
-                  <a:srgbClr val="000000"/>
-                </a:solidFill>
-                <a:latin typeface="Arial"/>
-              </a:rPr>
-              <a:t>Kempe, 1886: redraw a triad as a unit with three links.</a:t>
-            </a:r>
-          </a:p>
-          <a:p>
-            <a:pPr algn="l">
-              <a:spcBef>
-                <a:spcPts val="1400"/>
-              </a:spcBef>
-            </a:pPr>
-            <a:r>
-              <a:rPr sz="2400" b="0" i="0">
-                <a:solidFill>
-                  <a:srgbClr val="000000"/>
-                </a:solidFill>
-                <a:latin typeface="Arial"/>
-              </a:rPr>
-              <a:t>Peirce, 1892: "a formidable objection" — yet the mediation is still there, in "the attachment of lines to spots"</a:t>
+              <a:rPr sz="3400" b="1" i="0">
+                <a:solidFill>
+                  <a:srgbClr val="000000"/>
+                </a:solidFill>
+                <a:latin typeface="Arial"/>
+              </a:rPr>
+              <a:t>The Teridentity Relation: =_3</a:t>
+            </a:r>
+          </a:p>
+        </p:txBody>
+      </p:sp>
+      <p:sp>
+        <p:nvSpPr>
+          <p:cNvPr id="4" name="TextBox 3"/>
+          <p:cNvSpPr txBox="1"/>
+          <p:nvPr/>
+        </p:nvSpPr>
+        <p:spPr>
+          <a:xfrm>
+            <a:off x="822960" y="2011680"/>
+            <a:ext cx="10545775" cy="4297680"/>
+          </a:xfrm>
+          <a:prstGeom prst="rect">
+            <a:avLst/>
+          </a:prstGeom>
+          <a:noFill/>
+        </p:spPr>
+        <p:txBody>
+          <a:bodyPr wrap="square" anchor="t" lIns="0" rIns="0" tIns="0" bIns="0">
+            <a:spAutoFit/>
+          </a:bodyPr>
+          <a:lstStyle/>
+          <a:p>
+            <a:pPr algn="l">
+              <a:spcBef>
+                <a:spcPts val="0"/>
+              </a:spcBef>
+            </a:pPr>
+            <a:r>
+              <a:rPr sz="2200" b="0" i="0">
+                <a:solidFill>
+                  <a:srgbClr val="000000"/>
+                </a:solidFill>
+                <a:latin typeface="Arial"/>
+              </a:rPr>
+              <a:t>=_3 = {(x, x, x) </a:t>
+            </a:r>
+            <a:r>
+              <a:rPr sz="2200" b="0" i="0">
+                <a:solidFill>
+                  <a:srgbClr val="000000"/>
+                </a:solidFill>
+                <a:latin typeface="Cambria Math"/>
+              </a:rPr>
+              <a:t>∈</a:t>
+            </a:r>
+            <a:r>
+              <a:rPr sz="2200" b="0" i="0">
+                <a:solidFill>
+                  <a:srgbClr val="000000"/>
+                </a:solidFill>
+                <a:latin typeface="Arial"/>
+              </a:rPr>
+              <a:t> X³ | x </a:t>
+            </a:r>
+            <a:r>
+              <a:rPr sz="2200" b="0" i="0">
+                <a:solidFill>
+                  <a:srgbClr val="000000"/>
+                </a:solidFill>
+                <a:latin typeface="Cambria Math"/>
+              </a:rPr>
+              <a:t>∈</a:t>
+            </a:r>
+            <a:r>
+              <a:rPr sz="2200" b="0" i="0">
+                <a:solidFill>
+                  <a:srgbClr val="000000"/>
+                </a:solidFill>
+                <a:latin typeface="Arial"/>
+              </a:rPr>
+              <a:t> X}</a:t>
+            </a:r>
+          </a:p>
+          <a:p>
+            <a:pPr algn="l">
+              <a:spcBef>
+                <a:spcPts val="1600"/>
+              </a:spcBef>
+            </a:pPr>
+            <a:r>
+              <a:rPr sz="2200" b="1" i="0">
+                <a:solidFill>
+                  <a:srgbClr val="000000"/>
+                </a:solidFill>
+                <a:latin typeface="Arial"/>
+              </a:rPr>
+              <a:t>Branching Identity</a:t>
+            </a:r>
+          </a:p>
+          <a:p>
+            <a:pPr algn="l">
+              <a:spcBef>
+                <a:spcPts val="400"/>
+              </a:spcBef>
+            </a:pPr>
+            <a:r>
+              <a:rPr sz="2200" b="0" i="0">
+                <a:solidFill>
+                  <a:srgbClr val="000000"/>
+                </a:solidFill>
+                <a:latin typeface="Arial"/>
+              </a:rPr>
+              <a:t>Variable duplication across lines.</a:t>
+            </a:r>
+          </a:p>
+          <a:p>
+            <a:pPr algn="l">
+              <a:spcBef>
+                <a:spcPts val="1600"/>
+              </a:spcBef>
+            </a:pPr>
+            <a:r>
+              <a:rPr sz="2200" b="1" i="0">
+                <a:solidFill>
+                  <a:srgbClr val="000000"/>
+                </a:solidFill>
+                <a:latin typeface="Arial"/>
+              </a:rPr>
+              <a:t>Burch's Proof (1991)</a:t>
+            </a:r>
+          </a:p>
+          <a:p>
+            <a:pPr algn="l">
+              <a:spcBef>
+                <a:spcPts val="400"/>
+              </a:spcBef>
+            </a:pPr>
+            <a:r>
+              <a:rPr sz="2200" b="0" i="0">
+                <a:solidFill>
+                  <a:srgbClr val="000000"/>
+                </a:solidFill>
+                <a:latin typeface="Arial"/>
+              </a:rPr>
+              <a:t>Unprovable from binary identity.</a:t>
+            </a:r>
+          </a:p>
+          <a:p>
+            <a:pPr algn="l">
+              <a:spcBef>
+                <a:spcPts val="1600"/>
+              </a:spcBef>
+            </a:pPr>
+            <a:r>
+              <a:rPr sz="2200" b="1" i="0">
+                <a:solidFill>
+                  <a:srgbClr val="000000"/>
+                </a:solidFill>
+                <a:latin typeface="Arial"/>
+              </a:rPr>
+              <a:t>Join-Irreducible</a:t>
+            </a:r>
+          </a:p>
+          <a:p>
+            <a:pPr algn="l">
+              <a:spcBef>
+                <a:spcPts val="400"/>
+              </a:spcBef>
+            </a:pPr>
+            <a:r>
+              <a:rPr sz="2200" b="0" i="0">
+                <a:solidFill>
+                  <a:srgbClr val="000000"/>
+                </a:solidFill>
+                <a:latin typeface="Arial"/>
+              </a:rPr>
+              <a:t>Minimal algebraic generator.</a:t>
             </a:r>
           </a:p>
         </p:txBody>
@@ -7823,8 +9651,8 @@
         </p:nvSpPr>
         <p:spPr>
           <a:xfrm>
-            <a:off x="822960" y="640080"/>
-            <a:ext cx="10545775" cy="1188720"/>
+            <a:off x="822960" y="502920"/>
+            <a:ext cx="10545775" cy="274320"/>
           </a:xfrm>
           <a:prstGeom prst="rect">
             <a:avLst/>
@@ -7832,7 +9660,7 @@
           <a:noFill/>
         </p:spPr>
         <p:txBody>
-          <a:bodyPr wrap="square" anchor="b" lIns="0" rIns="0" tIns="0" bIns="0">
+          <a:bodyPr wrap="square" anchor="t" lIns="0" rIns="0" tIns="0" bIns="0">
             <a:spAutoFit/>
           </a:bodyPr>
           <a:lstStyle/>
@@ -7843,13 +9671,13 @@
               </a:spcBef>
             </a:pPr>
             <a:r>
-              <a:rPr sz="3600" b="1" i="0">
-                <a:solidFill>
-                  <a:srgbClr val="000000"/>
-                </a:solidFill>
-                <a:latin typeface="Arial"/>
-              </a:rPr>
-              <a:t>Simmel: the third changes the group</a:t>
+              <a:rPr sz="1400" b="0" i="0">
+                <a:solidFill>
+                  <a:srgbClr val="000000"/>
+                </a:solidFill>
+                <a:latin typeface="Arial"/>
+              </a:rPr>
+              <a:t>NOMINALIST CHALLENGE</a:t>
             </a:r>
           </a:p>
         </p:txBody>
@@ -7862,8 +9690,8 @@
         </p:nvSpPr>
         <p:spPr>
           <a:xfrm>
-            <a:off x="822960" y="2103120"/>
-            <a:ext cx="10545775" cy="3931920"/>
+            <a:off x="822960" y="822960"/>
+            <a:ext cx="10545775" cy="1005840"/>
           </a:xfrm>
           <a:prstGeom prst="rect">
             <a:avLst/>
@@ -7882,61 +9710,158 @@
               </a:spcBef>
             </a:pPr>
             <a:r>
-              <a:rPr sz="2400" b="0" i="0">
-                <a:solidFill>
-                  <a:srgbClr val="000000"/>
-                </a:solidFill>
-                <a:latin typeface="Arial"/>
-              </a:rPr>
-              <a:t>Two: when one refuses, "only the other remains"</a:t>
-            </a:r>
-          </a:p>
-          <a:p>
-            <a:pPr algn="l">
-              <a:spcBef>
-                <a:spcPts val="1400"/>
-              </a:spcBef>
-            </a:pPr>
-            <a:r>
-              <a:rPr sz="2400" b="0" i="0">
-                <a:solidFill>
-                  <a:srgbClr val="000000"/>
-                </a:solidFill>
-                <a:latin typeface="Arial"/>
-              </a:rPr>
-              <a:t>Three: "each pair of elements are now joined by a broken line"</a:t>
-            </a:r>
-          </a:p>
-          <a:p>
-            <a:pPr algn="l">
-              <a:spcBef>
-                <a:spcPts val="1400"/>
-              </a:spcBef>
-            </a:pPr>
-            <a:r>
-              <a:rPr sz="2400" b="0" i="0">
-                <a:solidFill>
-                  <a:srgbClr val="000000"/>
-                </a:solidFill>
-                <a:latin typeface="Arial"/>
-              </a:rPr>
-              <a:t>But a distant third leaves "configurations of twos"</a:t>
-            </a:r>
-          </a:p>
-          <a:p>
-            <a:pPr algn="l">
-              <a:spcBef>
-                <a:spcPts val="1400"/>
-              </a:spcBef>
-            </a:pPr>
-            <a:r>
-              <a:rPr sz="1800" b="0" i="0">
-                <a:solidFill>
-                  <a:srgbClr val="000000"/>
-                </a:solidFill>
-                <a:latin typeface="Arial"/>
-              </a:rPr>
-              <a:t>— Simmel, 1902</a:t>
+              <a:rPr sz="3400" b="1" i="0">
+                <a:solidFill>
+                  <a:srgbClr val="000000"/>
+                </a:solidFill>
+                <a:latin typeface="Arial"/>
+              </a:rPr>
+              <a:t>Quine’s Dyadic Translation (1954)</a:t>
+            </a:r>
+          </a:p>
+        </p:txBody>
+      </p:sp>
+      <p:pic>
+        <p:nvPicPr>
+          <p:cNvPr id="4" name="Picture 3" descr="quine.png"/>
+          <p:cNvPicPr>
+            <a:picLocks noChangeAspect="1"/>
+          </p:cNvPicPr>
+          <p:nvPr/>
+        </p:nvPicPr>
+        <p:blipFill>
+          <a:blip r:embed="rId2"/>
+          <a:stretch>
+            <a:fillRect/>
+          </a:stretch>
+        </p:blipFill>
+        <p:spPr>
+          <a:xfrm>
+            <a:off x="822960" y="2011680"/>
+            <a:ext cx="2771029" cy="3749040"/>
+          </a:xfrm>
+          <a:prstGeom prst="rect">
+            <a:avLst/>
+          </a:prstGeom>
+        </p:spPr>
+      </p:pic>
+      <p:sp>
+        <p:nvSpPr>
+          <p:cNvPr id="5" name="TextBox 4"/>
+          <p:cNvSpPr txBox="1"/>
+          <p:nvPr/>
+        </p:nvSpPr>
+        <p:spPr>
+          <a:xfrm>
+            <a:off x="4389120" y="2011680"/>
+            <a:ext cx="6979615" cy="4297680"/>
+          </a:xfrm>
+          <a:prstGeom prst="rect">
+            <a:avLst/>
+          </a:prstGeom>
+          <a:noFill/>
+        </p:spPr>
+        <p:txBody>
+          <a:bodyPr wrap="square" anchor="t" lIns="0" rIns="0" tIns="0" bIns="0">
+            <a:spAutoFit/>
+          </a:bodyPr>
+          <a:lstStyle/>
+          <a:p>
+            <a:pPr algn="l">
+              <a:spcBef>
+                <a:spcPts val="0"/>
+              </a:spcBef>
+            </a:pPr>
+            <a:r>
+              <a:rPr sz="2200" b="0" i="0">
+                <a:solidFill>
+                  <a:srgbClr val="000000"/>
+                </a:solidFill>
+                <a:latin typeface="Arial"/>
+              </a:rPr>
+              <a:t>Quine: “There is only one predicate letter, and it a dyadic one.”</a:t>
+            </a:r>
+          </a:p>
+          <a:p>
+            <a:pPr algn="l">
+              <a:spcBef>
+                <a:spcPts val="1600"/>
+              </a:spcBef>
+            </a:pPr>
+            <a:r>
+              <a:rPr sz="2200" b="1" i="0">
+                <a:solidFill>
+                  <a:srgbClr val="000000"/>
+                </a:solidFill>
+                <a:latin typeface="Arial"/>
+              </a:rPr>
+              <a:t>Extensional Translation</a:t>
+            </a:r>
+          </a:p>
+          <a:p>
+            <a:pPr algn="l">
+              <a:spcBef>
+                <a:spcPts val="400"/>
+              </a:spcBef>
+            </a:pPr>
+            <a:r>
+              <a:rPr sz="2200" b="0" i="0">
+                <a:solidFill>
+                  <a:srgbClr val="000000"/>
+                </a:solidFill>
+                <a:latin typeface="Arial"/>
+              </a:rPr>
+              <a:t>Encodes ternary predicates into binary membership over tuples.</a:t>
+            </a:r>
+          </a:p>
+          <a:p>
+            <a:pPr algn="l">
+              <a:spcBef>
+                <a:spcPts val="1600"/>
+              </a:spcBef>
+            </a:pPr>
+            <a:r>
+              <a:rPr sz="2200" b="1" i="0">
+                <a:solidFill>
+                  <a:srgbClr val="000000"/>
+                </a:solidFill>
+                <a:latin typeface="Arial"/>
+              </a:rPr>
+              <a:t>Tuple Stratification</a:t>
+            </a:r>
+          </a:p>
+          <a:p>
+            <a:pPr algn="l">
+              <a:spcBef>
+                <a:spcPts val="400"/>
+              </a:spcBef>
+            </a:pPr>
+            <a:r>
+              <a:rPr sz="2200" b="0" i="0">
+                <a:solidFill>
+                  <a:srgbClr val="000000"/>
+                </a:solidFill>
+                <a:latin typeface="Arial"/>
+              </a:rPr>
+              <a:t>R(x, y, z) maps to dyadic predicate </a:t>
+            </a:r>
+            <a:r>
+              <a:rPr sz="2200" b="0" i="0">
+                <a:solidFill>
+                  <a:srgbClr val="000000"/>
+                </a:solidFill>
+                <a:latin typeface="Cambria Math"/>
+              </a:rPr>
+              <a:t>∈</a:t>
+            </a:r>
+            <a:r>
+              <a:rPr sz="2200" b="0" i="0">
+                <a:solidFill>
+                  <a:srgbClr val="000000"/>
+                </a:solidFill>
+                <a:latin typeface="Arial"/>
+              </a:rPr>
+              <a:t> over pairs.</a:t>
             </a:r>
           </a:p>
         </p:txBody>

--- a/submissions/triadic_reduction/talk/deck.pptx
+++ b/submissions/triadic_reduction/talk/deck.pptx
@@ -21,6 +21,13 @@
     <p:sldId id="269" r:id="rId21"/>
     <p:sldId id="270" r:id="rId22"/>
     <p:sldId id="271" r:id="rId23"/>
+    <p:sldId id="272" r:id="rId24"/>
+    <p:sldId id="273" r:id="rId25"/>
+    <p:sldId id="274" r:id="rId26"/>
+    <p:sldId id="275" r:id="rId27"/>
+    <p:sldId id="276" r:id="rId28"/>
+    <p:sldId id="277" r:id="rId29"/>
+    <p:sldId id="278" r:id="rId30"/>
   </p:sldIdLst>
   <p:sldSz cx="12191695" cy="6858000" type="screen4x3"/>
   <p:notesSz cx="6858000" cy="9144000"/>
@@ -1237,7 +1244,281 @@
           <a:lstStyle/>
           <a:p>
             <a:r>
-              <a:t>[Not spoken. Leave this up during questions, or skip it.]</a:t>
+              <a:t>**Technical Presentation**</a:t>
+            </a:r>
+          </a:p>
+          <a:p>
+            <a:r>
+              <a:t>Same three members, two circuits: giver's act, thing, receiver's possession. In the gift, possession is set by giver and thing together; in the imitation, each member answers to one other. Both are wholes at Φ = 2.0.</a:t>
+            </a:r>
+          </a:p>
+          <a:p/>
+          <a:p>
+            <a:r>
+              <a:t>**Layman's Explanation**</a:t>
+            </a:r>
+          </a:p>
+          <a:p>
+            <a:r>
+              <a:t>Back to the gift and the apple. Ask "is this one whole?" and both say yes. Ask "is anyone set by two others at once?" and only the gift says yes.</a:t>
+            </a:r>
+          </a:p>
+        </p:txBody>
+      </p:sp>
+      <p:sp>
+        <p:nvSpPr>
+          <p:cNvPr id="4" name="Slide Number Placeholder 3"/>
+          <p:cNvSpPr>
+            <a:spLocks noGrp="1"/>
+          </p:cNvSpPr>
+          <p:nvPr>
+            <p:ph type="sldNum" idx="5" sz="quarter"/>
+          </p:nvPr>
+        </p:nvSpPr>
+        <p:spPr/>
+      </p:sp>
+    </p:spTree>
+  </p:cSld>
+  <p:clrMapOvr>
+    <a:masterClrMapping/>
+  </p:clrMapOvr>
+</p:notes>
+</file>
+
+<file path=ppt/notesSlides/notesSlide17.xml><?xml version="1.0" encoding="utf-8"?>
+<p:notes xmlns:a="http://schemas.openxmlformats.org/drawingml/2006/main" xmlns:p="http://schemas.openxmlformats.org/presentationml/2006/main" xmlns:r="http://schemas.openxmlformats.org/officeDocument/2006/relationships">
+  <p:cSld>
+    <p:spTree>
+      <p:nvGrpSpPr>
+        <p:cNvPr id="1" name=""/>
+        <p:cNvGrpSpPr/>
+        <p:nvPr/>
+      </p:nvGrpSpPr>
+      <p:grpSpPr>
+        <a:xfrm>
+          <a:off x="0" y="0"/>
+          <a:ext cx="0" cy="0"/>
+          <a:chOff x="0" y="0"/>
+          <a:chExt cx="0" cy="0"/>
+        </a:xfrm>
+      </p:grpSpPr>
+      <p:sp>
+        <p:nvSpPr>
+          <p:cNvPr id="2" name="Slide Image Placeholder 1"/>
+          <p:cNvSpPr>
+            <a:spLocks noGrp="1"/>
+          </p:cNvSpPr>
+          <p:nvPr>
+            <p:ph type="sldImg" idx="2"/>
+          </p:nvPr>
+        </p:nvSpPr>
+        <p:spPr/>
+      </p:sp>
+      <p:sp>
+        <p:nvSpPr>
+          <p:cNvPr id="3" name="Notes Placeholder 2"/>
+          <p:cNvSpPr>
+            <a:spLocks noGrp="1"/>
+          </p:cNvSpPr>
+          <p:nvPr>
+            <p:ph type="body" idx="3" sz="quarter"/>
+          </p:nvPr>
+        </p:nvSpPr>
+        <p:spPr/>
+        <p:txBody>
+          <a:bodyPr/>
+          <a:lstStyle/>
+          <a:p>
+            <a:r>
+              <a:t>**Technical Presentation**</a:t>
+            </a:r>
+          </a:p>
+          <a:p>
+            <a:r>
+              <a:t>Each member following the majority: Φ = 0.0, the system factors. We had pre-registered the opposite. Unanimity instead: Φ = 6.0, all three in the core. On a related quorum form, IIT 3.0 says binds where IIT 4.0 says factors.</a:t>
+            </a:r>
+          </a:p>
+          <a:p/>
+          <a:p>
+            <a:r>
+              <a:t>**Layman's Explanation**</a:t>
+            </a:r>
+          </a:p>
+          <a:p>
+            <a:r>
+              <a:t>A committee that goes with any two: any one of you can be outvoted, so cutting one away changes nothing. Make it all three or nothing, and cutting anyone stops it.</a:t>
+            </a:r>
+          </a:p>
+        </p:txBody>
+      </p:sp>
+      <p:sp>
+        <p:nvSpPr>
+          <p:cNvPr id="4" name="Slide Number Placeholder 3"/>
+          <p:cNvSpPr>
+            <a:spLocks noGrp="1"/>
+          </p:cNvSpPr>
+          <p:nvPr>
+            <p:ph type="sldNum" idx="5" sz="quarter"/>
+          </p:nvPr>
+        </p:nvSpPr>
+        <p:spPr/>
+      </p:sp>
+    </p:spTree>
+  </p:cSld>
+  <p:clrMapOvr>
+    <a:masterClrMapping/>
+  </p:clrMapOvr>
+</p:notes>
+</file>
+
+<file path=ppt/notesSlides/notesSlide18.xml><?xml version="1.0" encoding="utf-8"?>
+<p:notes xmlns:a="http://schemas.openxmlformats.org/drawingml/2006/main" xmlns:p="http://schemas.openxmlformats.org/presentationml/2006/main" xmlns:r="http://schemas.openxmlformats.org/officeDocument/2006/relationships">
+  <p:cSld>
+    <p:spTree>
+      <p:nvGrpSpPr>
+        <p:cNvPr id="1" name=""/>
+        <p:cNvGrpSpPr/>
+        <p:nvPr/>
+      </p:nvGrpSpPr>
+      <p:grpSpPr>
+        <a:xfrm>
+          <a:off x="0" y="0"/>
+          <a:ext cx="0" cy="0"/>
+          <a:chOff x="0" y="0"/>
+          <a:chExt cx="0" cy="0"/>
+        </a:xfrm>
+      </p:grpSpPr>
+      <p:sp>
+        <p:nvSpPr>
+          <p:cNvPr id="2" name="Slide Image Placeholder 1"/>
+          <p:cNvSpPr>
+            <a:spLocks noGrp="1"/>
+          </p:cNvSpPr>
+          <p:nvPr>
+            <p:ph type="sldImg" idx="2"/>
+          </p:nvPr>
+        </p:nvSpPr>
+        <p:spPr/>
+      </p:sp>
+      <p:sp>
+        <p:nvSpPr>
+          <p:cNvPr id="3" name="Notes Placeholder 2"/>
+          <p:cNvSpPr>
+            <a:spLocks noGrp="1"/>
+          </p:cNvSpPr>
+          <p:nvPr>
+            <p:ph type="body" idx="3" sz="quarter"/>
+          </p:nvPr>
+        </p:nvSpPr>
+        <p:spPr/>
+        <p:txBody>
+          <a:bodyPr/>
+          <a:lstStyle/>
+          <a:p>
+            <a:r>
+              <a:t>**Technical Presentation**</a:t>
+            </a:r>
+          </a:p>
+          <a:p>
+            <a:r>
+              <a:t>The dealer only relays: let the maker sell direct and Φ falls from 2.0 to 0.0. The clearinghouse keeps 2.0 under the same bypass. The brokerage types sort the same way, on constructed forms, not fitted markets.</a:t>
+            </a:r>
+          </a:p>
+          <a:p/>
+          <a:p>
+            <a:r>
+              <a:t>**Layman's Explanation**</a:t>
+            </a:r>
+          </a:p>
+          <a:p>
+            <a:r>
+              <a:t>A toll booth on the only bridge matters until a second bridge goes up. A translator between two people with no common language matters whatever you build. Our test builds the second bridge and asks who is still needed.</a:t>
+            </a:r>
+          </a:p>
+        </p:txBody>
+      </p:sp>
+      <p:sp>
+        <p:nvSpPr>
+          <p:cNvPr id="4" name="Slide Number Placeholder 3"/>
+          <p:cNvSpPr>
+            <a:spLocks noGrp="1"/>
+          </p:cNvSpPr>
+          <p:nvPr>
+            <p:ph type="sldNum" idx="5" sz="quarter"/>
+          </p:nvPr>
+        </p:nvSpPr>
+        <p:spPr/>
+      </p:sp>
+    </p:spTree>
+  </p:cSld>
+  <p:clrMapOvr>
+    <a:masterClrMapping/>
+  </p:clrMapOvr>
+</p:notes>
+</file>
+
+<file path=ppt/notesSlides/notesSlide19.xml><?xml version="1.0" encoding="utf-8"?>
+<p:notes xmlns:a="http://schemas.openxmlformats.org/drawingml/2006/main" xmlns:p="http://schemas.openxmlformats.org/presentationml/2006/main" xmlns:r="http://schemas.openxmlformats.org/officeDocument/2006/relationships">
+  <p:cSld>
+    <p:spTree>
+      <p:nvGrpSpPr>
+        <p:cNvPr id="1" name=""/>
+        <p:cNvGrpSpPr/>
+        <p:nvPr/>
+      </p:nvGrpSpPr>
+      <p:grpSpPr>
+        <a:xfrm>
+          <a:off x="0" y="0"/>
+          <a:ext cx="0" cy="0"/>
+          <a:chOff x="0" y="0"/>
+          <a:chExt cx="0" cy="0"/>
+        </a:xfrm>
+      </p:grpSpPr>
+      <p:sp>
+        <p:nvSpPr>
+          <p:cNvPr id="2" name="Slide Image Placeholder 1"/>
+          <p:cNvSpPr>
+            <a:spLocks noGrp="1"/>
+          </p:cNvSpPr>
+          <p:nvPr>
+            <p:ph type="sldImg" idx="2"/>
+          </p:nvPr>
+        </p:nvSpPr>
+        <p:spPr/>
+      </p:sp>
+      <p:sp>
+        <p:nvSpPr>
+          <p:cNvPr id="3" name="Notes Placeholder 2"/>
+          <p:cNvSpPr>
+            <a:spLocks noGrp="1"/>
+          </p:cNvSpPr>
+          <p:nvPr>
+            <p:ph type="body" idx="3" sz="quarter"/>
+          </p:nvPr>
+        </p:nvSpPr>
+        <p:spPr/>
+        <p:txBody>
+          <a:bodyPr/>
+          <a:lstStyle/>
+          <a:p>
+            <a:r>
+              <a:t>**Technical Presentation**</a:t>
+            </a:r>
+          </a:p>
+          <a:p>
+            <a:r>
+              <a:t>Validate on two controls before you trust a verdict. A new question scaffolds from a template, and CI re-derives every registered number on each pull request.</a:t>
+            </a:r>
+          </a:p>
+          <a:p/>
+          <a:p>
+            <a:r>
+              <a:t>**Layman's Explanation**</a:t>
+            </a:r>
+          </a:p>
+          <a:p>
+            <a:r>
+              <a:t>A kitchen with the recipes written down. Check the oven on a dish you know, then cook your own. Write down what you expect before you taste. A dish that comes out wrong still goes in the book.</a:t>
             </a:r>
           </a:p>
         </p:txBody>
@@ -1348,6 +1629,308 @@
           <a:p>
             <a:r>
               <a:t>Oracy is talking face-to-face. Literacy is writing a letter: the paper never edits what you wrote while the recipient reads it. But algorithmacy is dealing with an active middleman. Think of a passenger, an Uber driver, and the dispatch algorithm: the app is not a passive sheet of paper. It sets prices, decides routes, evaluates ratings, and steers both humans simultaneously. Algorithmacy is the skill of handling that active third party.</a:t>
+            </a:r>
+          </a:p>
+        </p:txBody>
+      </p:sp>
+      <p:sp>
+        <p:nvSpPr>
+          <p:cNvPr id="4" name="Slide Number Placeholder 3"/>
+          <p:cNvSpPr>
+            <a:spLocks noGrp="1"/>
+          </p:cNvSpPr>
+          <p:nvPr>
+            <p:ph type="sldNum" idx="5" sz="quarter"/>
+          </p:nvPr>
+        </p:nvSpPr>
+        <p:spPr/>
+      </p:sp>
+    </p:spTree>
+  </p:cSld>
+  <p:clrMapOvr>
+    <a:masterClrMapping/>
+  </p:clrMapOvr>
+</p:notes>
+</file>
+
+<file path=ppt/notesSlides/notesSlide20.xml><?xml version="1.0" encoding="utf-8"?>
+<p:notes xmlns:a="http://schemas.openxmlformats.org/drawingml/2006/main" xmlns:p="http://schemas.openxmlformats.org/presentationml/2006/main" xmlns:r="http://schemas.openxmlformats.org/officeDocument/2006/relationships">
+  <p:cSld>
+    <p:spTree>
+      <p:nvGrpSpPr>
+        <p:cNvPr id="1" name=""/>
+        <p:cNvGrpSpPr/>
+        <p:nvPr/>
+      </p:nvGrpSpPr>
+      <p:grpSpPr>
+        <a:xfrm>
+          <a:off x="0" y="0"/>
+          <a:ext cx="0" cy="0"/>
+          <a:chOff x="0" y="0"/>
+          <a:chExt cx="0" cy="0"/>
+        </a:xfrm>
+      </p:grpSpPr>
+      <p:sp>
+        <p:nvSpPr>
+          <p:cNvPr id="2" name="Slide Image Placeholder 1"/>
+          <p:cNvSpPr>
+            <a:spLocks noGrp="1"/>
+          </p:cNvSpPr>
+          <p:nvPr>
+            <p:ph type="sldImg" idx="2"/>
+          </p:nvPr>
+        </p:nvSpPr>
+        <p:spPr/>
+      </p:sp>
+      <p:sp>
+        <p:nvSpPr>
+          <p:cNvPr id="3" name="Notes Placeholder 2"/>
+          <p:cNvSpPr>
+            <a:spLocks noGrp="1"/>
+          </p:cNvSpPr>
+          <p:nvPr>
+            <p:ph type="body" idx="3" sz="quarter"/>
+          </p:nvPr>
+        </p:nvSpPr>
+        <p:spPr/>
+        <p:txBody>
+          <a:bodyPr/>
+          <a:lstStyle/>
+          <a:p>
+            <a:r>
+              <a:t>**Technical Presentation**</a:t>
+            </a:r>
+          </a:p>
+          <a:p>
+            <a:r>
+              <a:t>We have pointed the instrument at real people once: two people's gaze, one step at a time. Coded per person, the streams factor; coded as a shared region, they integrate. The registered result: the verdict depends on the coder.</a:t>
+            </a:r>
+          </a:p>
+          <a:p/>
+          <a:p>
+            <a:r>
+              <a:t>**Layman's Explanation**</a:t>
+            </a:r>
+          </a:p>
+          <a:p>
+            <a:r>
+              <a:t>Every line is a door. Bring a dataset, a workplace, a bigger committee.</a:t>
+            </a:r>
+          </a:p>
+        </p:txBody>
+      </p:sp>
+      <p:sp>
+        <p:nvSpPr>
+          <p:cNvPr id="4" name="Slide Number Placeholder 3"/>
+          <p:cNvSpPr>
+            <a:spLocks noGrp="1"/>
+          </p:cNvSpPr>
+          <p:nvPr>
+            <p:ph type="sldNum" idx="5" sz="quarter"/>
+          </p:nvPr>
+        </p:nvSpPr>
+        <p:spPr/>
+      </p:sp>
+    </p:spTree>
+  </p:cSld>
+  <p:clrMapOvr>
+    <a:masterClrMapping/>
+  </p:clrMapOvr>
+</p:notes>
+</file>
+
+<file path=ppt/notesSlides/notesSlide21.xml><?xml version="1.0" encoding="utf-8"?>
+<p:notes xmlns:a="http://schemas.openxmlformats.org/drawingml/2006/main" xmlns:p="http://schemas.openxmlformats.org/presentationml/2006/main" xmlns:r="http://schemas.openxmlformats.org/officeDocument/2006/relationships">
+  <p:cSld>
+    <p:spTree>
+      <p:nvGrpSpPr>
+        <p:cNvPr id="1" name=""/>
+        <p:cNvGrpSpPr/>
+        <p:nvPr/>
+      </p:nvGrpSpPr>
+      <p:grpSpPr>
+        <a:xfrm>
+          <a:off x="0" y="0"/>
+          <a:ext cx="0" cy="0"/>
+          <a:chOff x="0" y="0"/>
+          <a:chExt cx="0" cy="0"/>
+        </a:xfrm>
+      </p:grpSpPr>
+      <p:sp>
+        <p:nvSpPr>
+          <p:cNvPr id="2" name="Slide Image Placeholder 1"/>
+          <p:cNvSpPr>
+            <a:spLocks noGrp="1"/>
+          </p:cNvSpPr>
+          <p:nvPr>
+            <p:ph type="sldImg" idx="2"/>
+          </p:nvPr>
+        </p:nvSpPr>
+        <p:spPr/>
+      </p:sp>
+      <p:sp>
+        <p:nvSpPr>
+          <p:cNvPr id="3" name="Notes Placeholder 2"/>
+          <p:cNvSpPr>
+            <a:spLocks noGrp="1"/>
+          </p:cNvSpPr>
+          <p:nvPr>
+            <p:ph type="body" idx="3" sz="quarter"/>
+          </p:nvPr>
+        </p:nvSpPr>
+        <p:spPr/>
+        <p:txBody>
+          <a:bodyPr/>
+          <a:lstStyle/>
+          <a:p>
+            <a:r>
+              <a:t>[Live. Type the audience's sentence into Claude Code with talk/LIVE_SESSION.md loaded. Read three lines aloud: whole or factors, the core, who is set by two others. If the laptop or the network fails, show slide 22.]</a:t>
+            </a:r>
+          </a:p>
+          <a:p/>
+          <a:p>
+            <a:r>
+              <a:t>An arrangement from your own work: three or four parties, who acts on whom. What questions are you interested in?</a:t>
+            </a:r>
+          </a:p>
+        </p:txBody>
+      </p:sp>
+      <p:sp>
+        <p:nvSpPr>
+          <p:cNvPr id="4" name="Slide Number Placeholder 3"/>
+          <p:cNvSpPr>
+            <a:spLocks noGrp="1"/>
+          </p:cNvSpPr>
+          <p:nvPr>
+            <p:ph type="sldNum" idx="5" sz="quarter"/>
+          </p:nvPr>
+        </p:nvSpPr>
+        <p:spPr/>
+      </p:sp>
+    </p:spTree>
+  </p:cSld>
+  <p:clrMapOvr>
+    <a:masterClrMapping/>
+  </p:clrMapOvr>
+</p:notes>
+</file>
+
+<file path=ppt/notesSlides/notesSlide22.xml><?xml version="1.0" encoding="utf-8"?>
+<p:notes xmlns:a="http://schemas.openxmlformats.org/drawingml/2006/main" xmlns:p="http://schemas.openxmlformats.org/presentationml/2006/main" xmlns:r="http://schemas.openxmlformats.org/officeDocument/2006/relationships">
+  <p:cSld>
+    <p:spTree>
+      <p:nvGrpSpPr>
+        <p:cNvPr id="1" name=""/>
+        <p:cNvGrpSpPr/>
+        <p:nvPr/>
+      </p:nvGrpSpPr>
+      <p:grpSpPr>
+        <a:xfrm>
+          <a:off x="0" y="0"/>
+          <a:ext cx="0" cy="0"/>
+          <a:chOff x="0" y="0"/>
+          <a:chExt cx="0" cy="0"/>
+        </a:xfrm>
+      </p:grpSpPr>
+      <p:sp>
+        <p:nvSpPr>
+          <p:cNvPr id="2" name="Slide Image Placeholder 1"/>
+          <p:cNvSpPr>
+            <a:spLocks noGrp="1"/>
+          </p:cNvSpPr>
+          <p:nvPr>
+            <p:ph type="sldImg" idx="2"/>
+          </p:nvPr>
+        </p:nvSpPr>
+        <p:spPr/>
+      </p:sp>
+      <p:sp>
+        <p:nvSpPr>
+          <p:cNvPr id="3" name="Notes Placeholder 2"/>
+          <p:cNvSpPr>
+            <a:spLocks noGrp="1"/>
+          </p:cNvSpPr>
+          <p:nvPr>
+            <p:ph type="body" idx="3" sz="quarter"/>
+          </p:nvPr>
+        </p:nvSpPr>
+        <p:spPr/>
+        <p:txBody>
+          <a:bodyPr/>
+          <a:lstStyle/>
+          <a:p>
+            <a:r>
+              <a:t>[Not spoken unless the live session fails. Read the row that matches the question asked.]</a:t>
+            </a:r>
+          </a:p>
+        </p:txBody>
+      </p:sp>
+      <p:sp>
+        <p:nvSpPr>
+          <p:cNvPr id="4" name="Slide Number Placeholder 3"/>
+          <p:cNvSpPr>
+            <a:spLocks noGrp="1"/>
+          </p:cNvSpPr>
+          <p:nvPr>
+            <p:ph type="sldNum" idx="5" sz="quarter"/>
+          </p:nvPr>
+        </p:nvSpPr>
+        <p:spPr/>
+      </p:sp>
+    </p:spTree>
+  </p:cSld>
+  <p:clrMapOvr>
+    <a:masterClrMapping/>
+  </p:clrMapOvr>
+</p:notes>
+</file>
+
+<file path=ppt/notesSlides/notesSlide23.xml><?xml version="1.0" encoding="utf-8"?>
+<p:notes xmlns:a="http://schemas.openxmlformats.org/drawingml/2006/main" xmlns:p="http://schemas.openxmlformats.org/presentationml/2006/main" xmlns:r="http://schemas.openxmlformats.org/officeDocument/2006/relationships">
+  <p:cSld>
+    <p:spTree>
+      <p:nvGrpSpPr>
+        <p:cNvPr id="1" name=""/>
+        <p:cNvGrpSpPr/>
+        <p:nvPr/>
+      </p:nvGrpSpPr>
+      <p:grpSpPr>
+        <a:xfrm>
+          <a:off x="0" y="0"/>
+          <a:ext cx="0" cy="0"/>
+          <a:chOff x="0" y="0"/>
+          <a:chExt cx="0" cy="0"/>
+        </a:xfrm>
+      </p:grpSpPr>
+      <p:sp>
+        <p:nvSpPr>
+          <p:cNvPr id="2" name="Slide Image Placeholder 1"/>
+          <p:cNvSpPr>
+            <a:spLocks noGrp="1"/>
+          </p:cNvSpPr>
+          <p:nvPr>
+            <p:ph type="sldImg" idx="2"/>
+          </p:nvPr>
+        </p:nvSpPr>
+        <p:spPr/>
+      </p:sp>
+      <p:sp>
+        <p:nvSpPr>
+          <p:cNvPr id="3" name="Notes Placeholder 2"/>
+          <p:cNvSpPr>
+            <a:spLocks noGrp="1"/>
+          </p:cNvSpPr>
+          <p:nvPr>
+            <p:ph type="body" idx="3" sz="quarter"/>
+          </p:nvPr>
+        </p:nvSpPr>
+        <p:spPr/>
+        <p:txBody>
+          <a:bodyPr/>
+          <a:lstStyle/>
+          <a:p>
+            <a:r>
+              <a:t>[Not spoken. Leave this up during questions, or skip it.]</a:t>
             </a:r>
           </a:p>
         </p:txBody>
@@ -7553,6 +8136,45 @@
         </p:nvSpPr>
         <p:spPr>
           <a:xfrm>
+            <a:off x="822960" y="502920"/>
+            <a:ext cx="10545775" cy="274320"/>
+          </a:xfrm>
+          <a:prstGeom prst="rect">
+            <a:avLst/>
+          </a:prstGeom>
+          <a:noFill/>
+        </p:spPr>
+        <p:txBody>
+          <a:bodyPr wrap="square" anchor="t" lIns="0" rIns="0" tIns="0" bIns="0">
+            <a:spAutoFit/>
+          </a:bodyPr>
+          <a:lstStyle/>
+          <a:p>
+            <a:pPr algn="l">
+              <a:spcBef>
+                <a:spcPts val="0"/>
+              </a:spcBef>
+            </a:pPr>
+            <a:r>
+              <a:rPr sz="1400" b="0" i="0">
+                <a:solidFill>
+                  <a:srgbClr val="000000"/>
+                </a:solidFill>
+                <a:latin typeface="Arial"/>
+              </a:rPr>
+              <a:t>FROM THE LAB</a:t>
+            </a:r>
+          </a:p>
+        </p:txBody>
+      </p:sp>
+      <p:sp>
+        <p:nvSpPr>
+          <p:cNvPr id="3" name="TextBox 2"/>
+          <p:cNvSpPr txBox="1"/>
+          <p:nvPr/>
+        </p:nvSpPr>
+        <p:spPr>
+          <a:xfrm>
             <a:off x="822960" y="822960"/>
             <a:ext cx="10545775" cy="1005840"/>
           </a:xfrm>
@@ -7579,14 +8201,14 @@
                 </a:solidFill>
                 <a:latin typeface="Arial"/>
               </a:rPr>
-              <a:t>Image Sources</a:t>
-            </a:r>
-          </a:p>
-        </p:txBody>
-      </p:sp>
-      <p:sp>
-        <p:nvSpPr>
-          <p:cNvPr id="3" name="TextBox 2"/>
+              <a:t>Genuine Giving and Its Imitation</a:t>
+            </a:r>
+          </a:p>
+        </p:txBody>
+      </p:sp>
+      <p:sp>
+        <p:nvSpPr>
+          <p:cNvPr id="4" name="TextBox 3"/>
           <p:cNvSpPr txBox="1"/>
           <p:nvPr/>
         </p:nvSpPr>
@@ -7612,13 +8234,13 @@
               </a:spcBef>
             </a:pPr>
             <a:r>
-              <a:rPr sz="1200" b="0" i="0">
-                <a:solidFill>
-                  <a:srgbClr val="000000"/>
-                </a:solidFill>
-                <a:latin typeface="Arial"/>
-              </a:rPr>
-              <a:t>https://footnotes2plato.com/wp-content/uploads/2024/09/charles_sanders_peirce-colorized_cleanup-enhanced.jpg?w=640</a:t>
+              <a:rPr sz="2200" b="1" i="0">
+                <a:solidFill>
+                  <a:srgbClr val="000000"/>
+                </a:solidFill>
+                <a:latin typeface="Arial"/>
+              </a:rPr>
+              <a:t>Same Members, Same Φ</a:t>
             </a:r>
           </a:p>
           <a:p>
@@ -7634,7 +8256,7 @@
                 </a:solidFill>
                 <a:latin typeface="Arial"/>
               </a:rPr>
-              <a:t>Source: footnotes2plato.com</a:t>
+              <a:t>Giver, thing, receiver. Both circuits hold together as wholes: Φ = 2.0.</a:t>
             </a:r>
           </a:p>
           <a:p>
@@ -7644,13 +8266,13 @@
               </a:spcBef>
             </a:pPr>
             <a:r>
-              <a:rPr sz="1200" b="0" i="0">
-                <a:solidFill>
-                  <a:srgbClr val="000000"/>
-                </a:solidFill>
-                <a:latin typeface="Arial"/>
-              </a:rPr>
-              <a:t>https://cdn.britannica.com/33/171633-050-ED21E678/Willard-Van-Orman-Quine-1958.jpg</a:t>
+              <a:rPr sz="2200" b="1" i="0">
+                <a:solidFill>
+                  <a:srgbClr val="000000"/>
+                </a:solidFill>
+                <a:latin typeface="Arial"/>
+              </a:rPr>
+              <a:t>Genuine Giving</a:t>
             </a:r>
           </a:p>
           <a:p>
@@ -7666,7 +8288,804 @@
                 </a:solidFill>
                 <a:latin typeface="Arial"/>
               </a:rPr>
-              <a:t>Source: www.britannica.com</a:t>
+              <a:t>The receiver's possession is set by the giver and the thing together.</a:t>
+            </a:r>
+          </a:p>
+          <a:p>
+            <a:pPr algn="l">
+              <a:spcBef>
+                <a:spcPts val="1600"/>
+              </a:spcBef>
+            </a:pPr>
+            <a:r>
+              <a:rPr sz="2200" b="1" i="0">
+                <a:solidFill>
+                  <a:srgbClr val="000000"/>
+                </a:solidFill>
+                <a:latin typeface="Arial"/>
+              </a:rPr>
+              <a:t>The Imitation</a:t>
+            </a:r>
+          </a:p>
+          <a:p>
+            <a:pPr algn="l">
+              <a:spcBef>
+                <a:spcPts val="400"/>
+              </a:spcBef>
+            </a:pPr>
+            <a:r>
+              <a:rPr sz="2200" b="0" i="0">
+                <a:solidFill>
+                  <a:srgbClr val="000000"/>
+                </a:solidFill>
+                <a:latin typeface="Arial"/>
+              </a:rPr>
+              <a:t>Each member answers to one other. Φ cannot tell it from the real thing.</a:t>
+            </a:r>
+          </a:p>
+          <a:p>
+            <a:pPr algn="l">
+              <a:spcBef>
+                <a:spcPts val="1600"/>
+              </a:spcBef>
+            </a:pPr>
+            <a:r>
+              <a:rPr sz="2200" b="1" i="0">
+                <a:solidFill>
+                  <a:srgbClr val="000000"/>
+                </a:solidFill>
+                <a:latin typeface="Arial"/>
+              </a:rPr>
+              <a:t>The Difference</a:t>
+            </a:r>
+          </a:p>
+          <a:p>
+            <a:pPr algn="l">
+              <a:spcBef>
+                <a:spcPts val="400"/>
+              </a:spcBef>
+            </a:pPr>
+            <a:r>
+              <a:rPr sz="2200" b="0" i="0">
+                <a:solidFill>
+                  <a:srgbClr val="000000"/>
+                </a:solidFill>
+                <a:latin typeface="Arial"/>
+              </a:rPr>
+              <a:t>One member set by the other two, inside the whole. Only the gift has it.</a:t>
+            </a:r>
+          </a:p>
+        </p:txBody>
+      </p:sp>
+    </p:spTree>
+  </p:cSld>
+  <p:clrMapOvr>
+    <a:masterClrMapping/>
+  </p:clrMapOvr>
+</p:sld>
+</file>
+
+<file path=ppt/slides/slide17.xml><?xml version="1.0" encoding="utf-8"?>
+<p:sld xmlns:a="http://schemas.openxmlformats.org/drawingml/2006/main" xmlns:p="http://schemas.openxmlformats.org/presentationml/2006/main" xmlns:r="http://schemas.openxmlformats.org/officeDocument/2006/relationships">
+  <p:cSld>
+    <p:bg>
+      <p:bgPr>
+        <a:solidFill>
+          <a:srgbClr val="FFFFFF"/>
+        </a:solidFill>
+        <a:effectLst/>
+      </p:bgPr>
+    </p:bg>
+    <p:spTree>
+      <p:nvGrpSpPr>
+        <p:cNvPr id="1" name=""/>
+        <p:cNvGrpSpPr/>
+        <p:nvPr/>
+      </p:nvGrpSpPr>
+      <p:grpSpPr/>
+      <p:sp>
+        <p:nvSpPr>
+          <p:cNvPr id="2" name="TextBox 1"/>
+          <p:cNvSpPr txBox="1"/>
+          <p:nvPr/>
+        </p:nvSpPr>
+        <p:spPr>
+          <a:xfrm>
+            <a:off x="822960" y="502920"/>
+            <a:ext cx="10545775" cy="274320"/>
+          </a:xfrm>
+          <a:prstGeom prst="rect">
+            <a:avLst/>
+          </a:prstGeom>
+          <a:noFill/>
+        </p:spPr>
+        <p:txBody>
+          <a:bodyPr wrap="square" anchor="t" lIns="0" rIns="0" tIns="0" bIns="0">
+            <a:spAutoFit/>
+          </a:bodyPr>
+          <a:lstStyle/>
+          <a:p>
+            <a:pPr algn="l">
+              <a:spcBef>
+                <a:spcPts val="0"/>
+              </a:spcBef>
+            </a:pPr>
+            <a:r>
+              <a:rPr sz="1400" b="0" i="0">
+                <a:solidFill>
+                  <a:srgbClr val="000000"/>
+                </a:solidFill>
+                <a:latin typeface="Arial"/>
+              </a:rPr>
+              <a:t>FROM THE LAB</a:t>
+            </a:r>
+          </a:p>
+        </p:txBody>
+      </p:sp>
+      <p:sp>
+        <p:nvSpPr>
+          <p:cNvPr id="3" name="TextBox 2"/>
+          <p:cNvSpPr txBox="1"/>
+          <p:nvPr/>
+        </p:nvSpPr>
+        <p:spPr>
+          <a:xfrm>
+            <a:off x="822960" y="822960"/>
+            <a:ext cx="10545775" cy="1005840"/>
+          </a:xfrm>
+          <a:prstGeom prst="rect">
+            <a:avLst/>
+          </a:prstGeom>
+          <a:noFill/>
+        </p:spPr>
+        <p:txBody>
+          <a:bodyPr wrap="square" anchor="t" lIns="0" rIns="0" tIns="0" bIns="0">
+            <a:spAutoFit/>
+          </a:bodyPr>
+          <a:lstStyle/>
+          <a:p>
+            <a:pPr algn="l">
+              <a:spcBef>
+                <a:spcPts val="0"/>
+              </a:spcBef>
+            </a:pPr>
+            <a:r>
+              <a:rPr sz="3400" b="1" i="0">
+                <a:solidFill>
+                  <a:srgbClr val="000000"/>
+                </a:solidFill>
+                <a:latin typeface="Arial"/>
+              </a:rPr>
+              <a:t>A Vote Is Not Always a Whole</a:t>
+            </a:r>
+          </a:p>
+        </p:txBody>
+      </p:sp>
+      <p:sp>
+        <p:nvSpPr>
+          <p:cNvPr id="4" name="TextBox 3"/>
+          <p:cNvSpPr txBox="1"/>
+          <p:nvPr/>
+        </p:nvSpPr>
+        <p:spPr>
+          <a:xfrm>
+            <a:off x="822960" y="2011680"/>
+            <a:ext cx="10545775" cy="4297680"/>
+          </a:xfrm>
+          <a:prstGeom prst="rect">
+            <a:avLst/>
+          </a:prstGeom>
+          <a:noFill/>
+        </p:spPr>
+        <p:txBody>
+          <a:bodyPr wrap="square" anchor="t" lIns="0" rIns="0" tIns="0" bIns="0">
+            <a:spAutoFit/>
+          </a:bodyPr>
+          <a:lstStyle/>
+          <a:p>
+            <a:pPr algn="l">
+              <a:spcBef>
+                <a:spcPts val="0"/>
+              </a:spcBef>
+            </a:pPr>
+            <a:r>
+              <a:rPr sz="2200" b="1" i="0">
+                <a:solidFill>
+                  <a:srgbClr val="000000"/>
+                </a:solidFill>
+                <a:latin typeface="Arial"/>
+              </a:rPr>
+              <a:t>Majority Rule</a:t>
+            </a:r>
+          </a:p>
+          <a:p>
+            <a:pPr algn="l">
+              <a:spcBef>
+                <a:spcPts val="400"/>
+              </a:spcBef>
+            </a:pPr>
+            <a:r>
+              <a:rPr sz="2200" b="0" i="0">
+                <a:solidFill>
+                  <a:srgbClr val="000000"/>
+                </a:solidFill>
+                <a:latin typeface="Arial"/>
+              </a:rPr>
+              <a:t>Three members, each following the majority of the three: Φ = 0.0. The system factors.</a:t>
+            </a:r>
+          </a:p>
+          <a:p>
+            <a:pPr algn="l">
+              <a:spcBef>
+                <a:spcPts val="1600"/>
+              </a:spcBef>
+            </a:pPr>
+            <a:r>
+              <a:rPr sz="2200" b="1" i="0">
+                <a:solidFill>
+                  <a:srgbClr val="000000"/>
+                </a:solidFill>
+                <a:latin typeface="Arial"/>
+              </a:rPr>
+              <a:t>Unanimity Rule</a:t>
+            </a:r>
+          </a:p>
+          <a:p>
+            <a:pPr algn="l">
+              <a:spcBef>
+                <a:spcPts val="400"/>
+              </a:spcBef>
+            </a:pPr>
+            <a:r>
+              <a:rPr sz="2200" b="0" i="0">
+                <a:solidFill>
+                  <a:srgbClr val="000000"/>
+                </a:solidFill>
+                <a:latin typeface="Arial"/>
+              </a:rPr>
+              <a:t>Each member goes only when all three say yes: Φ = 6.0. No cut leaves it whole.</a:t>
+            </a:r>
+          </a:p>
+          <a:p>
+            <a:pPr algn="l">
+              <a:spcBef>
+                <a:spcPts val="1600"/>
+              </a:spcBef>
+            </a:pPr>
+            <a:r>
+              <a:rPr sz="2200" b="1" i="0">
+                <a:solidFill>
+                  <a:srgbClr val="000000"/>
+                </a:solidFill>
+                <a:latin typeface="Arial"/>
+              </a:rPr>
+              <a:t>A Caveat</a:t>
+            </a:r>
+          </a:p>
+          <a:p>
+            <a:pPr algn="l">
+              <a:spcBef>
+                <a:spcPts val="400"/>
+              </a:spcBef>
+            </a:pPr>
+            <a:r>
+              <a:rPr sz="2200" b="0" i="0">
+                <a:solidFill>
+                  <a:srgbClr val="000000"/>
+                </a:solidFill>
+                <a:latin typeface="Arial"/>
+              </a:rPr>
+              <a:t>A related quorum form, three parties reading a mediator that moves on any two, factors under IIT 4.0 and binds under IIT 3.0.</a:t>
+            </a:r>
+          </a:p>
+        </p:txBody>
+      </p:sp>
+    </p:spTree>
+  </p:cSld>
+  <p:clrMapOvr>
+    <a:masterClrMapping/>
+  </p:clrMapOvr>
+</p:sld>
+</file>
+
+<file path=ppt/slides/slide18.xml><?xml version="1.0" encoding="utf-8"?>
+<p:sld xmlns:a="http://schemas.openxmlformats.org/drawingml/2006/main" xmlns:p="http://schemas.openxmlformats.org/presentationml/2006/main" xmlns:r="http://schemas.openxmlformats.org/officeDocument/2006/relationships">
+  <p:cSld>
+    <p:bg>
+      <p:bgPr>
+        <a:solidFill>
+          <a:srgbClr val="FFFFFF"/>
+        </a:solidFill>
+        <a:effectLst/>
+      </p:bgPr>
+    </p:bg>
+    <p:spTree>
+      <p:nvGrpSpPr>
+        <p:cNvPr id="1" name=""/>
+        <p:cNvGrpSpPr/>
+        <p:nvPr/>
+      </p:nvGrpSpPr>
+      <p:grpSpPr/>
+      <p:sp>
+        <p:nvSpPr>
+          <p:cNvPr id="2" name="TextBox 1"/>
+          <p:cNvSpPr txBox="1"/>
+          <p:nvPr/>
+        </p:nvSpPr>
+        <p:spPr>
+          <a:xfrm>
+            <a:off x="822960" y="502920"/>
+            <a:ext cx="10545775" cy="274320"/>
+          </a:xfrm>
+          <a:prstGeom prst="rect">
+            <a:avLst/>
+          </a:prstGeom>
+          <a:noFill/>
+        </p:spPr>
+        <p:txBody>
+          <a:bodyPr wrap="square" anchor="t" lIns="0" rIns="0" tIns="0" bIns="0">
+            <a:spAutoFit/>
+          </a:bodyPr>
+          <a:lstStyle/>
+          <a:p>
+            <a:pPr algn="l">
+              <a:spcBef>
+                <a:spcPts val="0"/>
+              </a:spcBef>
+            </a:pPr>
+            <a:r>
+              <a:rPr sz="1400" b="0" i="0">
+                <a:solidFill>
+                  <a:srgbClr val="000000"/>
+                </a:solidFill>
+                <a:latin typeface="Arial"/>
+              </a:rPr>
+              <a:t>FROM THE LAB</a:t>
+            </a:r>
+          </a:p>
+        </p:txBody>
+      </p:sp>
+      <p:sp>
+        <p:nvSpPr>
+          <p:cNvPr id="3" name="TextBox 2"/>
+          <p:cNvSpPr txBox="1"/>
+          <p:nvPr/>
+        </p:nvSpPr>
+        <p:spPr>
+          <a:xfrm>
+            <a:off x="822960" y="822960"/>
+            <a:ext cx="10545775" cy="1005840"/>
+          </a:xfrm>
+          <a:prstGeom prst="rect">
+            <a:avLst/>
+          </a:prstGeom>
+          <a:noFill/>
+        </p:spPr>
+        <p:txBody>
+          <a:bodyPr wrap="square" anchor="t" lIns="0" rIns="0" tIns="0" bIns="0">
+            <a:spAutoFit/>
+          </a:bodyPr>
+          <a:lstStyle/>
+          <a:p>
+            <a:pPr algn="l">
+              <a:spcBef>
+                <a:spcPts val="0"/>
+              </a:spcBef>
+            </a:pPr>
+            <a:r>
+              <a:rPr sz="3400" b="1" i="0">
+                <a:solidFill>
+                  <a:srgbClr val="000000"/>
+                </a:solidFill>
+                <a:latin typeface="Arial"/>
+              </a:rPr>
+              <a:t>Irreducible by Law, or by Nature</a:t>
+            </a:r>
+          </a:p>
+        </p:txBody>
+      </p:sp>
+      <p:sp>
+        <p:nvSpPr>
+          <p:cNvPr id="4" name="TextBox 3"/>
+          <p:cNvSpPr txBox="1"/>
+          <p:nvPr/>
+        </p:nvSpPr>
+        <p:spPr>
+          <a:xfrm>
+            <a:off x="822960" y="2011680"/>
+            <a:ext cx="10545775" cy="4297680"/>
+          </a:xfrm>
+          <a:prstGeom prst="rect">
+            <a:avLst/>
+          </a:prstGeom>
+          <a:noFill/>
+        </p:spPr>
+        <p:txBody>
+          <a:bodyPr wrap="square" anchor="t" lIns="0" rIns="0" tIns="0" bIns="0">
+            <a:spAutoFit/>
+          </a:bodyPr>
+          <a:lstStyle/>
+          <a:p>
+            <a:pPr algn="l">
+              <a:spcBef>
+                <a:spcPts val="0"/>
+              </a:spcBef>
+            </a:pPr>
+            <a:r>
+              <a:rPr sz="2200" b="1" i="0">
+                <a:solidFill>
+                  <a:srgbClr val="000000"/>
+                </a:solidFill>
+                <a:latin typeface="Arial"/>
+              </a:rPr>
+              <a:t>The Car Dealer</a:t>
+            </a:r>
+          </a:p>
+          <a:p>
+            <a:pPr algn="l">
+              <a:spcBef>
+                <a:spcPts val="400"/>
+              </a:spcBef>
+            </a:pPr>
+            <a:r>
+              <a:rPr sz="2200" b="0" i="0">
+                <a:solidFill>
+                  <a:srgbClr val="000000"/>
+                </a:solidFill>
+                <a:latin typeface="Arial"/>
+              </a:rPr>
+              <a:t>Maker, dealer, buyer, in a ring franchise law closes. The dealer is inside: Φ = 2.0.</a:t>
+            </a:r>
+          </a:p>
+          <a:p>
+            <a:pPr algn="l">
+              <a:spcBef>
+                <a:spcPts val="1600"/>
+              </a:spcBef>
+            </a:pPr>
+            <a:r>
+              <a:rPr sz="2200" b="1" i="0">
+                <a:solidFill>
+                  <a:srgbClr val="000000"/>
+                </a:solidFill>
+                <a:latin typeface="Arial"/>
+              </a:rPr>
+              <a:t>Lift the Ban</a:t>
+            </a:r>
+          </a:p>
+          <a:p>
+            <a:pPr algn="l">
+              <a:spcBef>
+                <a:spcPts val="400"/>
+              </a:spcBef>
+            </a:pPr>
+            <a:r>
+              <a:rPr sz="2200" b="0" i="0">
+                <a:solidFill>
+                  <a:srgbClr val="000000"/>
+                </a:solidFill>
+                <a:latin typeface="Arial"/>
+              </a:rPr>
+              <a:t>Let the maker sell direct: Φ = 2.0 → 0.0. The dealer drops out.</a:t>
+            </a:r>
+          </a:p>
+          <a:p>
+            <a:pPr algn="l">
+              <a:spcBef>
+                <a:spcPts val="1600"/>
+              </a:spcBef>
+            </a:pPr>
+            <a:r>
+              <a:rPr sz="2200" b="1" i="0">
+                <a:solidFill>
+                  <a:srgbClr val="000000"/>
+                </a:solidFill>
+                <a:latin typeface="Arial"/>
+              </a:rPr>
+              <a:t>The Clearinghouse</a:t>
+            </a:r>
+          </a:p>
+          <a:p>
+            <a:pPr algn="l">
+              <a:spcBef>
+                <a:spcPts val="400"/>
+              </a:spcBef>
+            </a:pPr>
+            <a:r>
+              <a:rPr sz="2200" b="0" i="0">
+                <a:solidFill>
+                  <a:srgbClr val="000000"/>
+                </a:solidFill>
+                <a:latin typeface="Arial"/>
+              </a:rPr>
+              <a:t>A third that needs both sides to act keeps its place: Φ = 2.0 → 2.0.</a:t>
+            </a:r>
+          </a:p>
+          <a:p>
+            <a:pPr algn="l">
+              <a:spcBef>
+                <a:spcPts val="1600"/>
+              </a:spcBef>
+            </a:pPr>
+            <a:r>
+              <a:rPr sz="2200" b="1" i="0">
+                <a:solidFill>
+                  <a:srgbClr val="000000"/>
+                </a:solidFill>
+                <a:latin typeface="Arial"/>
+              </a:rPr>
+              <a:t>The Brokerage Types, Sorted the Same Way</a:t>
+            </a:r>
+          </a:p>
+          <a:p>
+            <a:pPr algn="l">
+              <a:spcBef>
+                <a:spcPts val="400"/>
+              </a:spcBef>
+            </a:pPr>
+            <a:r>
+              <a:rPr sz="2200" b="0" i="0">
+                <a:solidFill>
+                  <a:srgbClr val="000000"/>
+                </a:solidFill>
+                <a:latin typeface="Arial"/>
+              </a:rPr>
+              <a:t>Keeps two sides apart: contingent. Needs both sides: necessary. Introduces them, then steps aside: reducible.</a:t>
+            </a:r>
+          </a:p>
+        </p:txBody>
+      </p:sp>
+    </p:spTree>
+  </p:cSld>
+  <p:clrMapOvr>
+    <a:masterClrMapping/>
+  </p:clrMapOvr>
+</p:sld>
+</file>
+
+<file path=ppt/slides/slide19.xml><?xml version="1.0" encoding="utf-8"?>
+<p:sld xmlns:a="http://schemas.openxmlformats.org/drawingml/2006/main" xmlns:p="http://schemas.openxmlformats.org/presentationml/2006/main" xmlns:r="http://schemas.openxmlformats.org/officeDocument/2006/relationships">
+  <p:cSld>
+    <p:bg>
+      <p:bgPr>
+        <a:solidFill>
+          <a:srgbClr val="FFFFFF"/>
+        </a:solidFill>
+        <a:effectLst/>
+      </p:bgPr>
+    </p:bg>
+    <p:spTree>
+      <p:nvGrpSpPr>
+        <p:cNvPr id="1" name=""/>
+        <p:cNvGrpSpPr/>
+        <p:nvPr/>
+      </p:nvGrpSpPr>
+      <p:grpSpPr/>
+      <p:sp>
+        <p:nvSpPr>
+          <p:cNvPr id="2" name="TextBox 1"/>
+          <p:cNvSpPr txBox="1"/>
+          <p:nvPr/>
+        </p:nvSpPr>
+        <p:spPr>
+          <a:xfrm>
+            <a:off x="822960" y="502920"/>
+            <a:ext cx="10545775" cy="274320"/>
+          </a:xfrm>
+          <a:prstGeom prst="rect">
+            <a:avLst/>
+          </a:prstGeom>
+          <a:noFill/>
+        </p:spPr>
+        <p:txBody>
+          <a:bodyPr wrap="square" anchor="t" lIns="0" rIns="0" tIns="0" bIns="0">
+            <a:spAutoFit/>
+          </a:bodyPr>
+          <a:lstStyle/>
+          <a:p>
+            <a:pPr algn="l">
+              <a:spcBef>
+                <a:spcPts val="0"/>
+              </a:spcBef>
+            </a:pPr>
+            <a:r>
+              <a:rPr sz="1400" b="0" i="0">
+                <a:solidFill>
+                  <a:srgbClr val="000000"/>
+                </a:solidFill>
+                <a:latin typeface="Arial"/>
+              </a:rPr>
+              <a:t>JOIN THE LAB</a:t>
+            </a:r>
+          </a:p>
+        </p:txBody>
+      </p:sp>
+      <p:sp>
+        <p:nvSpPr>
+          <p:cNvPr id="3" name="TextBox 2"/>
+          <p:cNvSpPr txBox="1"/>
+          <p:nvPr/>
+        </p:nvSpPr>
+        <p:spPr>
+          <a:xfrm>
+            <a:off x="822960" y="822960"/>
+            <a:ext cx="10545775" cy="1005840"/>
+          </a:xfrm>
+          <a:prstGeom prst="rect">
+            <a:avLst/>
+          </a:prstGeom>
+          <a:noFill/>
+        </p:spPr>
+        <p:txBody>
+          <a:bodyPr wrap="square" anchor="t" lIns="0" rIns="0" tIns="0" bIns="0">
+            <a:spAutoFit/>
+          </a:bodyPr>
+          <a:lstStyle/>
+          <a:p>
+            <a:pPr algn="l">
+              <a:spcBef>
+                <a:spcPts val="0"/>
+              </a:spcBef>
+            </a:pPr>
+            <a:r>
+              <a:rPr sz="3400" b="1" i="0">
+                <a:solidFill>
+                  <a:srgbClr val="000000"/>
+                </a:solidFill>
+                <a:latin typeface="Arial"/>
+              </a:rPr>
+              <a:t>Fork the Repository</a:t>
+            </a:r>
+          </a:p>
+        </p:txBody>
+      </p:sp>
+      <p:sp>
+        <p:nvSpPr>
+          <p:cNvPr id="4" name="TextBox 3"/>
+          <p:cNvSpPr txBox="1"/>
+          <p:nvPr/>
+        </p:nvSpPr>
+        <p:spPr>
+          <a:xfrm>
+            <a:off x="822960" y="2011680"/>
+            <a:ext cx="10545775" cy="4297680"/>
+          </a:xfrm>
+          <a:prstGeom prst="rect">
+            <a:avLst/>
+          </a:prstGeom>
+          <a:noFill/>
+        </p:spPr>
+        <p:txBody>
+          <a:bodyPr wrap="square" anchor="t" lIns="0" rIns="0" tIns="0" bIns="0">
+            <a:spAutoFit/>
+          </a:bodyPr>
+          <a:lstStyle/>
+          <a:p>
+            <a:pPr algn="l">
+              <a:spcBef>
+                <a:spcPts val="0"/>
+              </a:spcBef>
+            </a:pPr>
+            <a:r>
+              <a:rPr sz="2200" b="0" i="0">
+                <a:solidFill>
+                  <a:srgbClr val="000000"/>
+                </a:solidFill>
+                <a:latin typeface="Arial"/>
+              </a:rPr>
+              <a:t>github.com/rogerSuperBuilderAlpha/algorithmacy-lab — MIT license, Python 3.10+</a:t>
+            </a:r>
+          </a:p>
+          <a:p>
+            <a:pPr algn="l">
+              <a:spcBef>
+                <a:spcPts val="1600"/>
+              </a:spcBef>
+            </a:pPr>
+            <a:r>
+              <a:rPr sz="2200" b="1" i="0">
+                <a:solidFill>
+                  <a:srgbClr val="000000"/>
+                </a:solidFill>
+                <a:latin typeface="Arial"/>
+              </a:rPr>
+              <a:t>Validate, Then Run One</a:t>
+            </a:r>
+          </a:p>
+          <a:p>
+            <a:pPr algn="l">
+              <a:spcBef>
+                <a:spcPts val="400"/>
+              </a:spcBef>
+            </a:pPr>
+            <a:r>
+              <a:rPr sz="2200" b="0" i="0">
+                <a:solidFill>
+                  <a:srgbClr val="000000"/>
+                </a:solidFill>
+                <a:latin typeface="Arial"/>
+              </a:rPr>
+              <a:t>python -m org_frontier.classifier.validate</a:t>
+            </a:r>
+          </a:p>
+          <a:p>
+            <a:pPr algn="l">
+              <a:spcBef>
+                <a:spcPts val="400"/>
+              </a:spcBef>
+            </a:pPr>
+            <a:r>
+              <a:rPr sz="2200" b="0" i="0">
+                <a:solidFill>
+                  <a:srgbClr val="000000"/>
+                </a:solidFill>
+                <a:latin typeface="Arial"/>
+              </a:rPr>
+              <a:t>python -m org_frontier.probes.probe_conjunctive_law</a:t>
+            </a:r>
+          </a:p>
+          <a:p>
+            <a:pPr algn="l">
+              <a:spcBef>
+                <a:spcPts val="1600"/>
+              </a:spcBef>
+            </a:pPr>
+            <a:r>
+              <a:rPr sz="2200" b="1" i="0">
+                <a:solidFill>
+                  <a:srgbClr val="000000"/>
+                </a:solidFill>
+                <a:latin typeface="Arial"/>
+              </a:rPr>
+              <a:t>Ask Your Own Question</a:t>
+            </a:r>
+          </a:p>
+          <a:p>
+            <a:pPr algn="l">
+              <a:spcBef>
+                <a:spcPts val="400"/>
+              </a:spcBef>
+            </a:pPr>
+            <a:r>
+              <a:rPr sz="2200" b="0" i="0">
+                <a:solidFill>
+                  <a:srgbClr val="000000"/>
+                </a:solidFill>
+                <a:latin typeface="Arial"/>
+              </a:rPr>
+              <a:t>python -m org_frontier.protocol.new_question, then commit hypotheses.md first.</a:t>
+            </a:r>
+          </a:p>
+          <a:p>
+            <a:pPr algn="l">
+              <a:spcBef>
+                <a:spcPts val="1600"/>
+              </a:spcBef>
+            </a:pPr>
+            <a:r>
+              <a:rPr sz="2200" b="1" i="0">
+                <a:solidFill>
+                  <a:srgbClr val="000000"/>
+                </a:solidFill>
+                <a:latin typeface="Arial"/>
+              </a:rPr>
+              <a:t>Publish</a:t>
+            </a:r>
+          </a:p>
+          <a:p>
+            <a:pPr algn="l">
+              <a:spcBef>
+                <a:spcPts val="400"/>
+              </a:spcBef>
+            </a:pPr>
+            <a:r>
+              <a:rPr sz="2200" b="0" i="0">
+                <a:solidFill>
+                  <a:srgbClr val="000000"/>
+                </a:solidFill>
+                <a:latin typeface="Arial"/>
+              </a:rPr>
+              <a:t>Register every number in ci/reproduce.json. Pull request into contrib. Nulls count.</a:t>
             </a:r>
           </a:p>
         </p:txBody>
@@ -7958,6 +9377,1546 @@
                 <a:latin typeface="Arial"/>
               </a:rPr>
               <a:t>Autonomous synthetic mediation.</a:t>
+            </a:r>
+          </a:p>
+        </p:txBody>
+      </p:sp>
+    </p:spTree>
+  </p:cSld>
+  <p:clrMapOvr>
+    <a:masterClrMapping/>
+  </p:clrMapOvr>
+</p:sld>
+</file>
+
+<file path=ppt/slides/slide20.xml><?xml version="1.0" encoding="utf-8"?>
+<p:sld xmlns:a="http://schemas.openxmlformats.org/drawingml/2006/main" xmlns:p="http://schemas.openxmlformats.org/presentationml/2006/main" xmlns:r="http://schemas.openxmlformats.org/officeDocument/2006/relationships">
+  <p:cSld>
+    <p:bg>
+      <p:bgPr>
+        <a:solidFill>
+          <a:srgbClr val="FFFFFF"/>
+        </a:solidFill>
+        <a:effectLst/>
+      </p:bgPr>
+    </p:bg>
+    <p:spTree>
+      <p:nvGrpSpPr>
+        <p:cNvPr id="1" name=""/>
+        <p:cNvGrpSpPr/>
+        <p:nvPr/>
+      </p:nvGrpSpPr>
+      <p:grpSpPr/>
+      <p:sp>
+        <p:nvSpPr>
+          <p:cNvPr id="2" name="TextBox 1"/>
+          <p:cNvSpPr txBox="1"/>
+          <p:nvPr/>
+        </p:nvSpPr>
+        <p:spPr>
+          <a:xfrm>
+            <a:off x="822960" y="502920"/>
+            <a:ext cx="10545775" cy="274320"/>
+          </a:xfrm>
+          <a:prstGeom prst="rect">
+            <a:avLst/>
+          </a:prstGeom>
+          <a:noFill/>
+        </p:spPr>
+        <p:txBody>
+          <a:bodyPr wrap="square" anchor="t" lIns="0" rIns="0" tIns="0" bIns="0">
+            <a:spAutoFit/>
+          </a:bodyPr>
+          <a:lstStyle/>
+          <a:p>
+            <a:pPr algn="l">
+              <a:spcBef>
+                <a:spcPts val="0"/>
+              </a:spcBef>
+            </a:pPr>
+            <a:r>
+              <a:rPr sz="1400" b="0" i="0">
+                <a:solidFill>
+                  <a:srgbClr val="000000"/>
+                </a:solidFill>
+                <a:latin typeface="Arial"/>
+              </a:rPr>
+              <a:t>JOIN THE LAB</a:t>
+            </a:r>
+          </a:p>
+        </p:txBody>
+      </p:sp>
+      <p:sp>
+        <p:nvSpPr>
+          <p:cNvPr id="3" name="TextBox 2"/>
+          <p:cNvSpPr txBox="1"/>
+          <p:nvPr/>
+        </p:nvSpPr>
+        <p:spPr>
+          <a:xfrm>
+            <a:off x="822960" y="822960"/>
+            <a:ext cx="10545775" cy="1005840"/>
+          </a:xfrm>
+          <a:prstGeom prst="rect">
+            <a:avLst/>
+          </a:prstGeom>
+          <a:noFill/>
+        </p:spPr>
+        <p:txBody>
+          <a:bodyPr wrap="square" anchor="t" lIns="0" rIns="0" tIns="0" bIns="0">
+            <a:spAutoFit/>
+          </a:bodyPr>
+          <a:lstStyle/>
+          <a:p>
+            <a:pPr algn="l">
+              <a:spcBef>
+                <a:spcPts val="0"/>
+              </a:spcBef>
+            </a:pPr>
+            <a:r>
+              <a:rPr sz="3400" b="1" i="0">
+                <a:solidFill>
+                  <a:srgbClr val="000000"/>
+                </a:solidFill>
+                <a:latin typeface="Arial"/>
+              </a:rPr>
+              <a:t>Questions Waiting for Someone</a:t>
+            </a:r>
+          </a:p>
+        </p:txBody>
+      </p:sp>
+      <p:sp>
+        <p:nvSpPr>
+          <p:cNvPr id="4" name="TextBox 3"/>
+          <p:cNvSpPr txBox="1"/>
+          <p:nvPr/>
+        </p:nvSpPr>
+        <p:spPr>
+          <a:xfrm>
+            <a:off x="822960" y="2011680"/>
+            <a:ext cx="10545775" cy="4297680"/>
+          </a:xfrm>
+          <a:prstGeom prst="rect">
+            <a:avLst/>
+          </a:prstGeom>
+          <a:noFill/>
+        </p:spPr>
+        <p:txBody>
+          <a:bodyPr wrap="square" anchor="t" lIns="0" rIns="0" tIns="0" bIns="0">
+            <a:spAutoFit/>
+          </a:bodyPr>
+          <a:lstStyle/>
+          <a:p>
+            <a:pPr algn="l">
+              <a:spcBef>
+                <a:spcPts val="0"/>
+              </a:spcBef>
+            </a:pPr>
+            <a:r>
+              <a:rPr sz="2200" b="1" i="0">
+                <a:solidFill>
+                  <a:srgbClr val="000000"/>
+                </a:solidFill>
+                <a:latin typeface="Arial"/>
+              </a:rPr>
+              <a:t>Real People</a:t>
+            </a:r>
+          </a:p>
+          <a:p>
+            <a:pPr algn="l">
+              <a:spcBef>
+                <a:spcPts val="400"/>
+              </a:spcBef>
+            </a:pPr>
+            <a:r>
+              <a:rPr sz="2200" b="0" i="0">
+                <a:solidFill>
+                  <a:srgbClr val="000000"/>
+                </a:solidFill>
+                <a:latin typeface="Arial"/>
+              </a:rPr>
+              <a:t>Our one verdict on real gaze data changes with the coding. Which coding is right?</a:t>
+            </a:r>
+          </a:p>
+          <a:p>
+            <a:pPr algn="l">
+              <a:spcBef>
+                <a:spcPts val="1600"/>
+              </a:spcBef>
+            </a:pPr>
+            <a:r>
+              <a:rPr sz="2200" b="1" i="0">
+                <a:solidFill>
+                  <a:srgbClr val="000000"/>
+                </a:solidFill>
+                <a:latin typeface="Arial"/>
+              </a:rPr>
+              <a:t>Real Rules</a:t>
+            </a:r>
+          </a:p>
+          <a:p>
+            <a:pPr algn="l">
+              <a:spcBef>
+                <a:spcPts val="400"/>
+              </a:spcBef>
+            </a:pPr>
+            <a:r>
+              <a:rPr sz="2200" b="0" i="0">
+                <a:solidFill>
+                  <a:srgbClr val="000000"/>
+                </a:solidFill>
+                <a:latin typeface="Arial"/>
+              </a:rPr>
+              <a:t>A field case with two coders agreeing on what sets each action. Nobody has run one.</a:t>
+            </a:r>
+          </a:p>
+          <a:p>
+            <a:pPr algn="l">
+              <a:spcBef>
+                <a:spcPts val="1600"/>
+              </a:spcBef>
+            </a:pPr>
+            <a:r>
+              <a:rPr sz="2200" b="1" i="0">
+                <a:solidFill>
+                  <a:srgbClr val="000000"/>
+                </a:solidFill>
+                <a:latin typeface="Arial"/>
+              </a:rPr>
+              <a:t>Bigger Forms</a:t>
+            </a:r>
+          </a:p>
+          <a:p>
+            <a:pPr algn="l">
+              <a:spcBef>
+                <a:spcPts val="400"/>
+              </a:spcBef>
+            </a:pPr>
+            <a:r>
+              <a:rPr sz="2200" b="0" i="0">
+                <a:solidFill>
+                  <a:srgbClr val="000000"/>
+                </a:solidFill>
+                <a:latin typeface="Arial"/>
+              </a:rPr>
+              <a:t>Cliques of two to five read Φ = 2, 6, 12, 20. Six and up, and Shapley membership on larger forms: open.</a:t>
+            </a:r>
+          </a:p>
+          <a:p>
+            <a:pPr algn="l">
+              <a:spcBef>
+                <a:spcPts val="1600"/>
+              </a:spcBef>
+            </a:pPr>
+            <a:r>
+              <a:rPr sz="2200" b="1" i="0">
+                <a:solidFill>
+                  <a:srgbClr val="000000"/>
+                </a:solidFill>
+                <a:latin typeface="Arial"/>
+              </a:rPr>
+              <a:t>Softer Channels</a:t>
+            </a:r>
+          </a:p>
+          <a:p>
+            <a:pPr algn="l">
+              <a:spcBef>
+                <a:spcPts val="400"/>
+              </a:spcBef>
+            </a:pPr>
+            <a:r>
+              <a:rPr sz="2200" b="0" i="0">
+                <a:solidFill>
+                  <a:srgbClr val="000000"/>
+                </a:solidFill>
+                <a:latin typeface="Arial"/>
+              </a:rPr>
+              <a:t>A graded channel. Weighted or noisy quorums. An arrangement that is algorithmacy but not directive algorithmic management.</a:t>
+            </a:r>
+          </a:p>
+        </p:txBody>
+      </p:sp>
+    </p:spTree>
+  </p:cSld>
+  <p:clrMapOvr>
+    <a:masterClrMapping/>
+  </p:clrMapOvr>
+</p:sld>
+</file>
+
+<file path=ppt/slides/slide21.xml><?xml version="1.0" encoding="utf-8"?>
+<p:sld xmlns:a="http://schemas.openxmlformats.org/drawingml/2006/main" xmlns:p="http://schemas.openxmlformats.org/presentationml/2006/main" xmlns:r="http://schemas.openxmlformats.org/officeDocument/2006/relationships">
+  <p:cSld>
+    <p:bg>
+      <p:bgPr>
+        <a:solidFill>
+          <a:srgbClr val="FFFFFF"/>
+        </a:solidFill>
+        <a:effectLst/>
+      </p:bgPr>
+    </p:bg>
+    <p:spTree>
+      <p:nvGrpSpPr>
+        <p:cNvPr id="1" name=""/>
+        <p:cNvGrpSpPr/>
+        <p:nvPr/>
+      </p:nvGrpSpPr>
+      <p:grpSpPr/>
+      <p:sp>
+        <p:nvSpPr>
+          <p:cNvPr id="2" name="TextBox 1"/>
+          <p:cNvSpPr txBox="1"/>
+          <p:nvPr/>
+        </p:nvSpPr>
+        <p:spPr>
+          <a:xfrm>
+            <a:off x="822960" y="502920"/>
+            <a:ext cx="10545775" cy="274320"/>
+          </a:xfrm>
+          <a:prstGeom prst="rect">
+            <a:avLst/>
+          </a:prstGeom>
+          <a:noFill/>
+        </p:spPr>
+        <p:txBody>
+          <a:bodyPr wrap="square" anchor="t" lIns="0" rIns="0" tIns="0" bIns="0">
+            <a:spAutoFit/>
+          </a:bodyPr>
+          <a:lstStyle/>
+          <a:p>
+            <a:pPr algn="l">
+              <a:spcBef>
+                <a:spcPts val="0"/>
+              </a:spcBef>
+            </a:pPr>
+            <a:r>
+              <a:rPr sz="1400" b="0" i="0">
+                <a:solidFill>
+                  <a:srgbClr val="000000"/>
+                </a:solidFill>
+                <a:latin typeface="Arial"/>
+              </a:rPr>
+              <a:t>LIVE</a:t>
+            </a:r>
+          </a:p>
+        </p:txBody>
+      </p:sp>
+      <p:sp>
+        <p:nvSpPr>
+          <p:cNvPr id="3" name="TextBox 2"/>
+          <p:cNvSpPr txBox="1"/>
+          <p:nvPr/>
+        </p:nvSpPr>
+        <p:spPr>
+          <a:xfrm>
+            <a:off x="822960" y="822960"/>
+            <a:ext cx="10545775" cy="1005840"/>
+          </a:xfrm>
+          <a:prstGeom prst="rect">
+            <a:avLst/>
+          </a:prstGeom>
+          <a:noFill/>
+        </p:spPr>
+        <p:txBody>
+          <a:bodyPr wrap="square" anchor="t" lIns="0" rIns="0" tIns="0" bIns="0">
+            <a:spAutoFit/>
+          </a:bodyPr>
+          <a:lstStyle/>
+          <a:p>
+            <a:pPr algn="l">
+              <a:spcBef>
+                <a:spcPts val="0"/>
+              </a:spcBef>
+            </a:pPr>
+            <a:r>
+              <a:rPr sz="3400" b="1" i="0">
+                <a:solidFill>
+                  <a:srgbClr val="000000"/>
+                </a:solidFill>
+                <a:latin typeface="Arial"/>
+              </a:rPr>
+              <a:t>What Questions Are You Interested In?</a:t>
+            </a:r>
+          </a:p>
+        </p:txBody>
+      </p:sp>
+      <p:sp>
+        <p:nvSpPr>
+          <p:cNvPr id="4" name="TextBox 3"/>
+          <p:cNvSpPr txBox="1"/>
+          <p:nvPr/>
+        </p:nvSpPr>
+        <p:spPr>
+          <a:xfrm>
+            <a:off x="822960" y="2011680"/>
+            <a:ext cx="10545775" cy="4297680"/>
+          </a:xfrm>
+          <a:prstGeom prst="rect">
+            <a:avLst/>
+          </a:prstGeom>
+          <a:noFill/>
+        </p:spPr>
+        <p:txBody>
+          <a:bodyPr wrap="square" anchor="t" lIns="0" rIns="0" tIns="0" bIns="0">
+            <a:spAutoFit/>
+          </a:bodyPr>
+          <a:lstStyle/>
+          <a:p>
+            <a:pPr algn="l">
+              <a:spcBef>
+                <a:spcPts val="0"/>
+              </a:spcBef>
+            </a:pPr>
+            <a:r>
+              <a:rPr sz="2200" b="0" i="0">
+                <a:solidFill>
+                  <a:srgbClr val="000000"/>
+                </a:solidFill>
+                <a:latin typeface="Arial"/>
+              </a:rPr>
+              <a:t>Name three or four parties and say who acts on whom.</a:t>
+            </a:r>
+          </a:p>
+          <a:p>
+            <a:pPr algn="l">
+              <a:spcBef>
+                <a:spcPts val="1600"/>
+              </a:spcBef>
+            </a:pPr>
+            <a:r>
+              <a:rPr sz="2200" b="0" i="0">
+                <a:solidFill>
+                  <a:srgbClr val="000000"/>
+                </a:solidFill>
+                <a:latin typeface="Arial"/>
+              </a:rPr>
+              <a:t>A plain sentence is enough: "The dispatcher assigns a job only when a driver and a rider both accept."</a:t>
+            </a:r>
+          </a:p>
+          <a:p>
+            <a:pPr algn="l">
+              <a:spcBef>
+                <a:spcPts val="1600"/>
+              </a:spcBef>
+            </a:pPr>
+            <a:r>
+              <a:rPr sz="2200" b="0" i="0">
+                <a:solidFill>
+                  <a:srgbClr val="000000"/>
+                </a:solidFill>
+                <a:latin typeface="Arial"/>
+              </a:rPr>
+              <a:t>We build it as a small circuit, compute Φ and the core, and read who is set by two others.</a:t>
+            </a:r>
+          </a:p>
+          <a:p>
+            <a:pPr algn="l">
+              <a:spcBef>
+                <a:spcPts val="1600"/>
+              </a:spcBef>
+            </a:pPr>
+            <a:r>
+              <a:rPr sz="2200" b="0" i="0">
+                <a:solidFill>
+                  <a:srgbClr val="000000"/>
+                </a:solidFill>
+                <a:latin typeface="Arial"/>
+              </a:rPr>
+              <a:t>A few seconds per form. A zero is a result too. Small Boolean models, not people.</a:t>
+            </a:r>
+          </a:p>
+        </p:txBody>
+      </p:sp>
+    </p:spTree>
+  </p:cSld>
+  <p:clrMapOvr>
+    <a:masterClrMapping/>
+  </p:clrMapOvr>
+</p:sld>
+</file>
+
+<file path=ppt/slides/slide22.xml><?xml version="1.0" encoding="utf-8"?>
+<p:sld xmlns:a="http://schemas.openxmlformats.org/drawingml/2006/main" xmlns:p="http://schemas.openxmlformats.org/presentationml/2006/main" xmlns:r="http://schemas.openxmlformats.org/officeDocument/2006/relationships">
+  <p:cSld>
+    <p:bg>
+      <p:bgPr>
+        <a:solidFill>
+          <a:srgbClr val="FFFFFF"/>
+        </a:solidFill>
+        <a:effectLst/>
+      </p:bgPr>
+    </p:bg>
+    <p:spTree>
+      <p:nvGrpSpPr>
+        <p:cNvPr id="1" name=""/>
+        <p:cNvGrpSpPr/>
+        <p:nvPr/>
+      </p:nvGrpSpPr>
+      <p:grpSpPr/>
+      <p:sp>
+        <p:nvSpPr>
+          <p:cNvPr id="2" name="TextBox 1"/>
+          <p:cNvSpPr txBox="1"/>
+          <p:nvPr/>
+        </p:nvSpPr>
+        <p:spPr>
+          <a:xfrm>
+            <a:off x="822960" y="502920"/>
+            <a:ext cx="10545775" cy="274320"/>
+          </a:xfrm>
+          <a:prstGeom prst="rect">
+            <a:avLst/>
+          </a:prstGeom>
+          <a:noFill/>
+        </p:spPr>
+        <p:txBody>
+          <a:bodyPr wrap="square" anchor="t" lIns="0" rIns="0" tIns="0" bIns="0">
+            <a:spAutoFit/>
+          </a:bodyPr>
+          <a:lstStyle/>
+          <a:p>
+            <a:pPr algn="l">
+              <a:spcBef>
+                <a:spcPts val="0"/>
+              </a:spcBef>
+            </a:pPr>
+            <a:r>
+              <a:rPr sz="1400" b="0" i="0">
+                <a:solidFill>
+                  <a:srgbClr val="000000"/>
+                </a:solidFill>
+                <a:latin typeface="Arial"/>
+              </a:rPr>
+              <a:t>LIVE</a:t>
+            </a:r>
+          </a:p>
+        </p:txBody>
+      </p:sp>
+      <p:sp>
+        <p:nvSpPr>
+          <p:cNvPr id="3" name="TextBox 2"/>
+          <p:cNvSpPr txBox="1"/>
+          <p:nvPr/>
+        </p:nvSpPr>
+        <p:spPr>
+          <a:xfrm>
+            <a:off x="822960" y="822960"/>
+            <a:ext cx="10545775" cy="1005840"/>
+          </a:xfrm>
+          <a:prstGeom prst="rect">
+            <a:avLst/>
+          </a:prstGeom>
+          <a:noFill/>
+        </p:spPr>
+        <p:txBody>
+          <a:bodyPr wrap="square" anchor="t" lIns="0" rIns="0" tIns="0" bIns="0">
+            <a:spAutoFit/>
+          </a:bodyPr>
+          <a:lstStyle/>
+          <a:p>
+            <a:pPr algn="l">
+              <a:spcBef>
+                <a:spcPts val="0"/>
+              </a:spcBef>
+            </a:pPr>
+            <a:r>
+              <a:rPr sz="3400" b="1" i="0">
+                <a:solidFill>
+                  <a:srgbClr val="000000"/>
+                </a:solidFill>
+                <a:latin typeface="Arial"/>
+              </a:rPr>
+              <a:t>If the Laptop Fails</a:t>
+            </a:r>
+          </a:p>
+        </p:txBody>
+      </p:sp>
+      <p:graphicFrame>
+        <p:nvGraphicFramePr>
+          <p:cNvPr id="4" name="Table 3"/>
+          <p:cNvGraphicFramePr>
+            <a:graphicFrameLocks noGrp="1"/>
+          </p:cNvGraphicFramePr>
+          <p:nvPr/>
+        </p:nvGraphicFramePr>
+        <p:xfrm>
+          <a:off x="822960" y="2286000"/>
+          <a:ext cx="10545775" cy="2514600"/>
+        </p:xfrm>
+        <a:graphic>
+          <a:graphicData uri="http://schemas.openxmlformats.org/drawingml/2006/table">
+            <a:tbl>
+              <a:tblPr firstRow="0" bandRow="0">
+                <a:tableStyleId>{5940675A-B579-460E-94D1-54222C63F5DA}</a:tableStyleId>
+              </a:tblPr>
+              <a:tblGrid>
+                <a:gridCol w="2636443"/>
+                <a:gridCol w="2636443"/>
+                <a:gridCol w="2636443"/>
+                <a:gridCol w="2636446"/>
+              </a:tblGrid>
+              <a:tr h="502920">
+                <a:tc>
+                  <a:txBody>
+                    <a:bodyPr wrap="square"/>
+                    <a:lstStyle/>
+                    <a:p>
+                      <a:r>
+                        <a:rPr sz="1600" b="1" i="0">
+                          <a:solidFill>
+                            <a:srgbClr val="000000"/>
+                          </a:solidFill>
+                          <a:latin typeface="Arial"/>
+                        </a:rPr>
+                        <a:t>The sentence</a:t>
+                      </a:r>
+                    </a:p>
+                  </a:txBody>
+                  <a:tcPr marL="73152" marR="73152">
+                    <a:noFill/>
+                    <a:lnL w="9525">
+                      <a:solidFill>
+                        <a:srgbClr val="000000"/>
+                      </a:solidFill>
+                    </a:lnL>
+                    <a:lnR w="9525">
+                      <a:solidFill>
+                        <a:srgbClr val="000000"/>
+                      </a:solidFill>
+                    </a:lnR>
+                    <a:lnT w="9525">
+                      <a:solidFill>
+                        <a:srgbClr val="000000"/>
+                      </a:solidFill>
+                    </a:lnT>
+                    <a:lnB w="9525">
+                      <a:solidFill>
+                        <a:srgbClr val="000000"/>
+                      </a:solidFill>
+                    </a:lnB>
+                  </a:tcPr>
+                </a:tc>
+                <a:tc>
+                  <a:txBody>
+                    <a:bodyPr wrap="square"/>
+                    <a:lstStyle/>
+                    <a:p>
+                      <a:r>
+                        <a:rPr sz="1600" b="1" i="0">
+                          <a:solidFill>
+                            <a:srgbClr val="000000"/>
+                          </a:solidFill>
+                          <a:latin typeface="Arial"/>
+                        </a:rPr>
+                        <a:t>Φ</a:t>
+                      </a:r>
+                    </a:p>
+                  </a:txBody>
+                  <a:tcPr marL="73152" marR="73152">
+                    <a:noFill/>
+                    <a:lnL w="9525">
+                      <a:solidFill>
+                        <a:srgbClr val="000000"/>
+                      </a:solidFill>
+                    </a:lnL>
+                    <a:lnR w="9525">
+                      <a:solidFill>
+                        <a:srgbClr val="000000"/>
+                      </a:solidFill>
+                    </a:lnR>
+                    <a:lnT w="9525">
+                      <a:solidFill>
+                        <a:srgbClr val="000000"/>
+                      </a:solidFill>
+                    </a:lnT>
+                    <a:lnB w="9525">
+                      <a:solidFill>
+                        <a:srgbClr val="000000"/>
+                      </a:solidFill>
+                    </a:lnB>
+                  </a:tcPr>
+                </a:tc>
+                <a:tc>
+                  <a:txBody>
+                    <a:bodyPr wrap="square"/>
+                    <a:lstStyle/>
+                    <a:p>
+                      <a:r>
+                        <a:rPr sz="1600" b="1" i="0">
+                          <a:solidFill>
+                            <a:srgbClr val="000000"/>
+                          </a:solidFill>
+                          <a:latin typeface="Arial"/>
+                        </a:rPr>
+                        <a:t>Verdict</a:t>
+                      </a:r>
+                    </a:p>
+                  </a:txBody>
+                  <a:tcPr marL="73152" marR="73152">
+                    <a:noFill/>
+                    <a:lnL w="9525">
+                      <a:solidFill>
+                        <a:srgbClr val="000000"/>
+                      </a:solidFill>
+                    </a:lnL>
+                    <a:lnR w="9525">
+                      <a:solidFill>
+                        <a:srgbClr val="000000"/>
+                      </a:solidFill>
+                    </a:lnR>
+                    <a:lnT w="9525">
+                      <a:solidFill>
+                        <a:srgbClr val="000000"/>
+                      </a:solidFill>
+                    </a:lnT>
+                    <a:lnB w="9525">
+                      <a:solidFill>
+                        <a:srgbClr val="000000"/>
+                      </a:solidFill>
+                    </a:lnB>
+                  </a:tcPr>
+                </a:tc>
+                <a:tc>
+                  <a:txBody>
+                    <a:bodyPr wrap="square"/>
+                    <a:lstStyle/>
+                    <a:p>
+                      <a:r>
+                        <a:rPr sz="1600" b="1" i="0">
+                          <a:solidFill>
+                            <a:srgbClr val="000000"/>
+                          </a:solidFill>
+                          <a:latin typeface="Arial"/>
+                        </a:rPr>
+                        <a:t>Core</a:t>
+                      </a:r>
+                    </a:p>
+                  </a:txBody>
+                  <a:tcPr marL="73152" marR="73152">
+                    <a:noFill/>
+                    <a:lnL w="9525">
+                      <a:solidFill>
+                        <a:srgbClr val="000000"/>
+                      </a:solidFill>
+                    </a:lnL>
+                    <a:lnR w="9525">
+                      <a:solidFill>
+                        <a:srgbClr val="000000"/>
+                      </a:solidFill>
+                    </a:lnR>
+                    <a:lnT w="9525">
+                      <a:solidFill>
+                        <a:srgbClr val="000000"/>
+                      </a:solidFill>
+                    </a:lnT>
+                    <a:lnB w="9525">
+                      <a:solidFill>
+                        <a:srgbClr val="000000"/>
+                      </a:solidFill>
+                    </a:lnB>
+                  </a:tcPr>
+                </a:tc>
+              </a:tr>
+              <a:tr h="502920">
+                <a:tc>
+                  <a:txBody>
+                    <a:bodyPr wrap="square"/>
+                    <a:lstStyle/>
+                    <a:p>
+                      <a:r>
+                        <a:rPr sz="1600" b="0" i="0">
+                          <a:solidFill>
+                            <a:srgbClr val="000000"/>
+                          </a:solidFill>
+                          <a:latin typeface="Arial"/>
+                        </a:rPr>
+                        <a:t>Dispatcher assigns only when driver and rider both accept; both wait on it</a:t>
+                      </a:r>
+                    </a:p>
+                  </a:txBody>
+                  <a:tcPr marL="73152" marR="73152">
+                    <a:noFill/>
+                    <a:lnL w="9525">
+                      <a:solidFill>
+                        <a:srgbClr val="000000"/>
+                      </a:solidFill>
+                    </a:lnL>
+                    <a:lnR w="9525">
+                      <a:solidFill>
+                        <a:srgbClr val="000000"/>
+                      </a:solidFill>
+                    </a:lnR>
+                    <a:lnT w="9525">
+                      <a:solidFill>
+                        <a:srgbClr val="000000"/>
+                      </a:solidFill>
+                    </a:lnT>
+                    <a:lnB w="9525">
+                      <a:solidFill>
+                        <a:srgbClr val="000000"/>
+                      </a:solidFill>
+                    </a:lnB>
+                  </a:tcPr>
+                </a:tc>
+                <a:tc>
+                  <a:txBody>
+                    <a:bodyPr wrap="square"/>
+                    <a:lstStyle/>
+                    <a:p>
+                      <a:r>
+                        <a:rPr sz="1600" b="0" i="0">
+                          <a:solidFill>
+                            <a:srgbClr val="000000"/>
+                          </a:solidFill>
+                          <a:latin typeface="Arial"/>
+                        </a:rPr>
+                        <a:t>2.0</a:t>
+                      </a:r>
+                    </a:p>
+                  </a:txBody>
+                  <a:tcPr marL="73152" marR="73152">
+                    <a:noFill/>
+                    <a:lnL w="9525">
+                      <a:solidFill>
+                        <a:srgbClr val="000000"/>
+                      </a:solidFill>
+                    </a:lnL>
+                    <a:lnR w="9525">
+                      <a:solidFill>
+                        <a:srgbClr val="000000"/>
+                      </a:solidFill>
+                    </a:lnR>
+                    <a:lnT w="9525">
+                      <a:solidFill>
+                        <a:srgbClr val="000000"/>
+                      </a:solidFill>
+                    </a:lnT>
+                    <a:lnB w="9525">
+                      <a:solidFill>
+                        <a:srgbClr val="000000"/>
+                      </a:solidFill>
+                    </a:lnB>
+                  </a:tcPr>
+                </a:tc>
+                <a:tc>
+                  <a:txBody>
+                    <a:bodyPr wrap="square"/>
+                    <a:lstStyle/>
+                    <a:p>
+                      <a:r>
+                        <a:rPr sz="1600" b="0" i="0">
+                          <a:solidFill>
+                            <a:srgbClr val="000000"/>
+                          </a:solidFill>
+                          <a:latin typeface="Arial"/>
+                        </a:rPr>
+                        <a:t>whole</a:t>
+                      </a:r>
+                    </a:p>
+                  </a:txBody>
+                  <a:tcPr marL="73152" marR="73152">
+                    <a:noFill/>
+                    <a:lnL w="9525">
+                      <a:solidFill>
+                        <a:srgbClr val="000000"/>
+                      </a:solidFill>
+                    </a:lnL>
+                    <a:lnR w="9525">
+                      <a:solidFill>
+                        <a:srgbClr val="000000"/>
+                      </a:solidFill>
+                    </a:lnR>
+                    <a:lnT w="9525">
+                      <a:solidFill>
+                        <a:srgbClr val="000000"/>
+                      </a:solidFill>
+                    </a:lnT>
+                    <a:lnB w="9525">
+                      <a:solidFill>
+                        <a:srgbClr val="000000"/>
+                      </a:solidFill>
+                    </a:lnB>
+                  </a:tcPr>
+                </a:tc>
+                <a:tc>
+                  <a:txBody>
+                    <a:bodyPr wrap="square"/>
+                    <a:lstStyle/>
+                    <a:p>
+                      <a:r>
+                        <a:rPr sz="1600" b="0" i="0">
+                          <a:solidFill>
+                            <a:srgbClr val="000000"/>
+                          </a:solidFill>
+                          <a:latin typeface="Arial"/>
+                        </a:rPr>
+                        <a:t>all three; dispatcher set by driver and rider</a:t>
+                      </a:r>
+                    </a:p>
+                  </a:txBody>
+                  <a:tcPr marL="73152" marR="73152">
+                    <a:noFill/>
+                    <a:lnL w="9525">
+                      <a:solidFill>
+                        <a:srgbClr val="000000"/>
+                      </a:solidFill>
+                    </a:lnL>
+                    <a:lnR w="9525">
+                      <a:solidFill>
+                        <a:srgbClr val="000000"/>
+                      </a:solidFill>
+                    </a:lnR>
+                    <a:lnT w="9525">
+                      <a:solidFill>
+                        <a:srgbClr val="000000"/>
+                      </a:solidFill>
+                    </a:lnT>
+                    <a:lnB w="9525">
+                      <a:solidFill>
+                        <a:srgbClr val="000000"/>
+                      </a:solidFill>
+                    </a:lnB>
+                  </a:tcPr>
+                </a:tc>
+              </a:tr>
+              <a:tr h="502920">
+                <a:tc>
+                  <a:txBody>
+                    <a:bodyPr wrap="square"/>
+                    <a:lstStyle/>
+                    <a:p>
+                      <a:r>
+                        <a:rPr sz="1600" b="0" i="0">
+                          <a:solidFill>
+                            <a:srgbClr val="000000"/>
+                          </a:solidFill>
+                          <a:latin typeface="Arial"/>
+                        </a:rPr>
+                        <a:t>Client and worker now answer each other directly; the manager still hears both, but nobody waits on the manager</a:t>
+                      </a:r>
+                    </a:p>
+                  </a:txBody>
+                  <a:tcPr marL="73152" marR="73152">
+                    <a:noFill/>
+                    <a:lnL w="9525">
+                      <a:solidFill>
+                        <a:srgbClr val="000000"/>
+                      </a:solidFill>
+                    </a:lnL>
+                    <a:lnR w="9525">
+                      <a:solidFill>
+                        <a:srgbClr val="000000"/>
+                      </a:solidFill>
+                    </a:lnR>
+                    <a:lnT w="9525">
+                      <a:solidFill>
+                        <a:srgbClr val="000000"/>
+                      </a:solidFill>
+                    </a:lnT>
+                    <a:lnB w="9525">
+                      <a:solidFill>
+                        <a:srgbClr val="000000"/>
+                      </a:solidFill>
+                    </a:lnB>
+                  </a:tcPr>
+                </a:tc>
+                <a:tc>
+                  <a:txBody>
+                    <a:bodyPr wrap="square"/>
+                    <a:lstStyle/>
+                    <a:p>
+                      <a:r>
+                        <a:rPr sz="1600" b="0" i="0">
+                          <a:solidFill>
+                            <a:srgbClr val="000000"/>
+                          </a:solidFill>
+                          <a:latin typeface="Arial"/>
+                        </a:rPr>
+                        <a:t>0.0</a:t>
+                      </a:r>
+                    </a:p>
+                  </a:txBody>
+                  <a:tcPr marL="73152" marR="73152">
+                    <a:noFill/>
+                    <a:lnL w="9525">
+                      <a:solidFill>
+                        <a:srgbClr val="000000"/>
+                      </a:solidFill>
+                    </a:lnL>
+                    <a:lnR w="9525">
+                      <a:solidFill>
+                        <a:srgbClr val="000000"/>
+                      </a:solidFill>
+                    </a:lnR>
+                    <a:lnT w="9525">
+                      <a:solidFill>
+                        <a:srgbClr val="000000"/>
+                      </a:solidFill>
+                    </a:lnT>
+                    <a:lnB w="9525">
+                      <a:solidFill>
+                        <a:srgbClr val="000000"/>
+                      </a:solidFill>
+                    </a:lnB>
+                  </a:tcPr>
+                </a:tc>
+                <a:tc>
+                  <a:txBody>
+                    <a:bodyPr wrap="square"/>
+                    <a:lstStyle/>
+                    <a:p>
+                      <a:r>
+                        <a:rPr sz="1600" b="0" i="0">
+                          <a:solidFill>
+                            <a:srgbClr val="000000"/>
+                          </a:solidFill>
+                          <a:latin typeface="Arial"/>
+                        </a:rPr>
+                        <a:t>factors</a:t>
+                      </a:r>
+                    </a:p>
+                  </a:txBody>
+                  <a:tcPr marL="73152" marR="73152">
+                    <a:noFill/>
+                    <a:lnL w="9525">
+                      <a:solidFill>
+                        <a:srgbClr val="000000"/>
+                      </a:solidFill>
+                    </a:lnL>
+                    <a:lnR w="9525">
+                      <a:solidFill>
+                        <a:srgbClr val="000000"/>
+                      </a:solidFill>
+                    </a:lnR>
+                    <a:lnT w="9525">
+                      <a:solidFill>
+                        <a:srgbClr val="000000"/>
+                      </a:solidFill>
+                    </a:lnT>
+                    <a:lnB w="9525">
+                      <a:solidFill>
+                        <a:srgbClr val="000000"/>
+                      </a:solidFill>
+                    </a:lnB>
+                  </a:tcPr>
+                </a:tc>
+                <a:tc>
+                  <a:txBody>
+                    <a:bodyPr wrap="square"/>
+                    <a:lstStyle/>
+                    <a:p>
+                      <a:r>
+                        <a:rPr sz="1600" b="0" i="0">
+                          <a:solidFill>
+                            <a:srgbClr val="000000"/>
+                          </a:solidFill>
+                          <a:latin typeface="Arial"/>
+                        </a:rPr>
+                        <a:t>client and worker</a:t>
+                      </a:r>
+                    </a:p>
+                  </a:txBody>
+                  <a:tcPr marL="73152" marR="73152">
+                    <a:noFill/>
+                    <a:lnL w="9525">
+                      <a:solidFill>
+                        <a:srgbClr val="000000"/>
+                      </a:solidFill>
+                    </a:lnL>
+                    <a:lnR w="9525">
+                      <a:solidFill>
+                        <a:srgbClr val="000000"/>
+                      </a:solidFill>
+                    </a:lnR>
+                    <a:lnT w="9525">
+                      <a:solidFill>
+                        <a:srgbClr val="000000"/>
+                      </a:solidFill>
+                    </a:lnT>
+                    <a:lnB w="9525">
+                      <a:solidFill>
+                        <a:srgbClr val="000000"/>
+                      </a:solidFill>
+                    </a:lnB>
+                  </a:tcPr>
+                </a:tc>
+              </a:tr>
+              <a:tr h="502920">
+                <a:tc>
+                  <a:txBody>
+                    <a:bodyPr wrap="square"/>
+                    <a:lstStyle/>
+                    <a:p>
+                      <a:r>
+                        <a:rPr sz="1600" b="0" i="0">
+                          <a:solidFill>
+                            <a:srgbClr val="000000"/>
+                          </a:solidFill>
+                          <a:latin typeface="Arial"/>
+                        </a:rPr>
+                        <a:t>Committee of three: by majority, then by unanimity</a:t>
+                      </a:r>
+                    </a:p>
+                  </a:txBody>
+                  <a:tcPr marL="73152" marR="73152">
+                    <a:noFill/>
+                    <a:lnL w="9525">
+                      <a:solidFill>
+                        <a:srgbClr val="000000"/>
+                      </a:solidFill>
+                    </a:lnL>
+                    <a:lnR w="9525">
+                      <a:solidFill>
+                        <a:srgbClr val="000000"/>
+                      </a:solidFill>
+                    </a:lnR>
+                    <a:lnT w="9525">
+                      <a:solidFill>
+                        <a:srgbClr val="000000"/>
+                      </a:solidFill>
+                    </a:lnT>
+                    <a:lnB w="9525">
+                      <a:solidFill>
+                        <a:srgbClr val="000000"/>
+                      </a:solidFill>
+                    </a:lnB>
+                  </a:tcPr>
+                </a:tc>
+                <a:tc>
+                  <a:txBody>
+                    <a:bodyPr wrap="square"/>
+                    <a:lstStyle/>
+                    <a:p>
+                      <a:r>
+                        <a:rPr sz="1600" b="0" i="0">
+                          <a:solidFill>
+                            <a:srgbClr val="000000"/>
+                          </a:solidFill>
+                          <a:latin typeface="Arial"/>
+                        </a:rPr>
+                        <a:t>0.0, then 6.0</a:t>
+                      </a:r>
+                    </a:p>
+                  </a:txBody>
+                  <a:tcPr marL="73152" marR="73152">
+                    <a:noFill/>
+                    <a:lnL w="9525">
+                      <a:solidFill>
+                        <a:srgbClr val="000000"/>
+                      </a:solidFill>
+                    </a:lnL>
+                    <a:lnR w="9525">
+                      <a:solidFill>
+                        <a:srgbClr val="000000"/>
+                      </a:solidFill>
+                    </a:lnR>
+                    <a:lnT w="9525">
+                      <a:solidFill>
+                        <a:srgbClr val="000000"/>
+                      </a:solidFill>
+                    </a:lnT>
+                    <a:lnB w="9525">
+                      <a:solidFill>
+                        <a:srgbClr val="000000"/>
+                      </a:solidFill>
+                    </a:lnB>
+                  </a:tcPr>
+                </a:tc>
+                <a:tc>
+                  <a:txBody>
+                    <a:bodyPr wrap="square"/>
+                    <a:lstStyle/>
+                    <a:p>
+                      <a:r>
+                        <a:rPr sz="1600" b="0" i="0">
+                          <a:solidFill>
+                            <a:srgbClr val="000000"/>
+                          </a:solidFill>
+                          <a:latin typeface="Arial"/>
+                        </a:rPr>
+                        <a:t>factors, then whole</a:t>
+                      </a:r>
+                    </a:p>
+                  </a:txBody>
+                  <a:tcPr marL="73152" marR="73152">
+                    <a:noFill/>
+                    <a:lnL w="9525">
+                      <a:solidFill>
+                        <a:srgbClr val="000000"/>
+                      </a:solidFill>
+                    </a:lnL>
+                    <a:lnR w="9525">
+                      <a:solidFill>
+                        <a:srgbClr val="000000"/>
+                      </a:solidFill>
+                    </a:lnR>
+                    <a:lnT w="9525">
+                      <a:solidFill>
+                        <a:srgbClr val="000000"/>
+                      </a:solidFill>
+                    </a:lnT>
+                    <a:lnB w="9525">
+                      <a:solidFill>
+                        <a:srgbClr val="000000"/>
+                      </a:solidFill>
+                    </a:lnB>
+                  </a:tcPr>
+                </a:tc>
+                <a:tc>
+                  <a:txBody>
+                    <a:bodyPr wrap="square"/>
+                    <a:lstStyle/>
+                    <a:p>
+                      <a:r>
+                        <a:rPr sz="1600" b="0" i="0">
+                          <a:solidFill>
+                            <a:srgbClr val="000000"/>
+                          </a:solidFill>
+                          <a:latin typeface="Arial"/>
+                        </a:rPr>
+                        <a:t>none, then all three</a:t>
+                      </a:r>
+                    </a:p>
+                  </a:txBody>
+                  <a:tcPr marL="73152" marR="73152">
+                    <a:noFill/>
+                    <a:lnL w="9525">
+                      <a:solidFill>
+                        <a:srgbClr val="000000"/>
+                      </a:solidFill>
+                    </a:lnL>
+                    <a:lnR w="9525">
+                      <a:solidFill>
+                        <a:srgbClr val="000000"/>
+                      </a:solidFill>
+                    </a:lnR>
+                    <a:lnT w="9525">
+                      <a:solidFill>
+                        <a:srgbClr val="000000"/>
+                      </a:solidFill>
+                    </a:lnT>
+                    <a:lnB w="9525">
+                      <a:solidFill>
+                        <a:srgbClr val="000000"/>
+                      </a:solidFill>
+                    </a:lnB>
+                  </a:tcPr>
+                </a:tc>
+              </a:tr>
+              <a:tr h="502920">
+                <a:tc>
+                  <a:txBody>
+                    <a:bodyPr wrap="square"/>
+                    <a:lstStyle/>
+                    <a:p>
+                      <a:r>
+                        <a:rPr sz="1600" b="0" i="0">
+                          <a:solidFill>
+                            <a:srgbClr val="000000"/>
+                          </a:solidFill>
+                          <a:latin typeface="Arial"/>
+                        </a:rPr>
+                        <a:t>Dealer between maker and buyer; then the maker may sell direct</a:t>
+                      </a:r>
+                    </a:p>
+                  </a:txBody>
+                  <a:tcPr marL="73152" marR="73152">
+                    <a:noFill/>
+                    <a:lnL w="9525">
+                      <a:solidFill>
+                        <a:srgbClr val="000000"/>
+                      </a:solidFill>
+                    </a:lnL>
+                    <a:lnR w="9525">
+                      <a:solidFill>
+                        <a:srgbClr val="000000"/>
+                      </a:solidFill>
+                    </a:lnR>
+                    <a:lnT w="9525">
+                      <a:solidFill>
+                        <a:srgbClr val="000000"/>
+                      </a:solidFill>
+                    </a:lnT>
+                    <a:lnB w="9525">
+                      <a:solidFill>
+                        <a:srgbClr val="000000"/>
+                      </a:solidFill>
+                    </a:lnB>
+                  </a:tcPr>
+                </a:tc>
+                <a:tc>
+                  <a:txBody>
+                    <a:bodyPr wrap="square"/>
+                    <a:lstStyle/>
+                    <a:p>
+                      <a:r>
+                        <a:rPr sz="1600" b="0" i="0">
+                          <a:solidFill>
+                            <a:srgbClr val="000000"/>
+                          </a:solidFill>
+                          <a:latin typeface="Arial"/>
+                        </a:rPr>
+                        <a:t>2.0, then 0.0</a:t>
+                      </a:r>
+                    </a:p>
+                  </a:txBody>
+                  <a:tcPr marL="73152" marR="73152">
+                    <a:noFill/>
+                    <a:lnL w="9525">
+                      <a:solidFill>
+                        <a:srgbClr val="000000"/>
+                      </a:solidFill>
+                    </a:lnL>
+                    <a:lnR w="9525">
+                      <a:solidFill>
+                        <a:srgbClr val="000000"/>
+                      </a:solidFill>
+                    </a:lnR>
+                    <a:lnT w="9525">
+                      <a:solidFill>
+                        <a:srgbClr val="000000"/>
+                      </a:solidFill>
+                    </a:lnT>
+                    <a:lnB w="9525">
+                      <a:solidFill>
+                        <a:srgbClr val="000000"/>
+                      </a:solidFill>
+                    </a:lnB>
+                  </a:tcPr>
+                </a:tc>
+                <a:tc>
+                  <a:txBody>
+                    <a:bodyPr wrap="square"/>
+                    <a:lstStyle/>
+                    <a:p>
+                      <a:r>
+                        <a:rPr sz="1600" b="0" i="0">
+                          <a:solidFill>
+                            <a:srgbClr val="000000"/>
+                          </a:solidFill>
+                          <a:latin typeface="Arial"/>
+                        </a:rPr>
+                        <a:t>whole, then factors</a:t>
+                      </a:r>
+                    </a:p>
+                  </a:txBody>
+                  <a:tcPr marL="73152" marR="73152">
+                    <a:noFill/>
+                    <a:lnL w="9525">
+                      <a:solidFill>
+                        <a:srgbClr val="000000"/>
+                      </a:solidFill>
+                    </a:lnL>
+                    <a:lnR w="9525">
+                      <a:solidFill>
+                        <a:srgbClr val="000000"/>
+                      </a:solidFill>
+                    </a:lnR>
+                    <a:lnT w="9525">
+                      <a:solidFill>
+                        <a:srgbClr val="000000"/>
+                      </a:solidFill>
+                    </a:lnT>
+                    <a:lnB w="9525">
+                      <a:solidFill>
+                        <a:srgbClr val="000000"/>
+                      </a:solidFill>
+                    </a:lnB>
+                  </a:tcPr>
+                </a:tc>
+                <a:tc>
+                  <a:txBody>
+                    <a:bodyPr wrap="square"/>
+                    <a:lstStyle/>
+                    <a:p>
+                      <a:r>
+                        <a:rPr sz="1600" b="0" i="0">
+                          <a:solidFill>
+                            <a:srgbClr val="000000"/>
+                          </a:solidFill>
+                          <a:latin typeface="Arial"/>
+                        </a:rPr>
+                        <a:t>all three; then the dealer drops out</a:t>
+                      </a:r>
+                    </a:p>
+                  </a:txBody>
+                  <a:tcPr marL="73152" marR="73152">
+                    <a:noFill/>
+                    <a:lnL w="9525">
+                      <a:solidFill>
+                        <a:srgbClr val="000000"/>
+                      </a:solidFill>
+                    </a:lnL>
+                    <a:lnR w="9525">
+                      <a:solidFill>
+                        <a:srgbClr val="000000"/>
+                      </a:solidFill>
+                    </a:lnR>
+                    <a:lnT w="9525">
+                      <a:solidFill>
+                        <a:srgbClr val="000000"/>
+                      </a:solidFill>
+                    </a:lnT>
+                    <a:lnB w="9525">
+                      <a:solidFill>
+                        <a:srgbClr val="000000"/>
+                      </a:solidFill>
+                    </a:lnB>
+                  </a:tcPr>
+                </a:tc>
+              </a:tr>
+            </a:tbl>
+          </a:graphicData>
+        </a:graphic>
+      </p:graphicFrame>
+    </p:spTree>
+  </p:cSld>
+  <p:clrMapOvr>
+    <a:masterClrMapping/>
+  </p:clrMapOvr>
+</p:sld>
+</file>
+
+<file path=ppt/slides/slide23.xml><?xml version="1.0" encoding="utf-8"?>
+<p:sld xmlns:a="http://schemas.openxmlformats.org/drawingml/2006/main" xmlns:p="http://schemas.openxmlformats.org/presentationml/2006/main" xmlns:r="http://schemas.openxmlformats.org/officeDocument/2006/relationships">
+  <p:cSld>
+    <p:bg>
+      <p:bgPr>
+        <a:solidFill>
+          <a:srgbClr val="FFFFFF"/>
+        </a:solidFill>
+        <a:effectLst/>
+      </p:bgPr>
+    </p:bg>
+    <p:spTree>
+      <p:nvGrpSpPr>
+        <p:cNvPr id="1" name=""/>
+        <p:cNvGrpSpPr/>
+        <p:nvPr/>
+      </p:nvGrpSpPr>
+      <p:grpSpPr/>
+      <p:sp>
+        <p:nvSpPr>
+          <p:cNvPr id="2" name="TextBox 1"/>
+          <p:cNvSpPr txBox="1"/>
+          <p:nvPr/>
+        </p:nvSpPr>
+        <p:spPr>
+          <a:xfrm>
+            <a:off x="822960" y="822960"/>
+            <a:ext cx="10545775" cy="1005840"/>
+          </a:xfrm>
+          <a:prstGeom prst="rect">
+            <a:avLst/>
+          </a:prstGeom>
+          <a:noFill/>
+        </p:spPr>
+        <p:txBody>
+          <a:bodyPr wrap="square" anchor="t" lIns="0" rIns="0" tIns="0" bIns="0">
+            <a:spAutoFit/>
+          </a:bodyPr>
+          <a:lstStyle/>
+          <a:p>
+            <a:pPr algn="l">
+              <a:spcBef>
+                <a:spcPts val="0"/>
+              </a:spcBef>
+            </a:pPr>
+            <a:r>
+              <a:rPr sz="3400" b="1" i="0">
+                <a:solidFill>
+                  <a:srgbClr val="000000"/>
+                </a:solidFill>
+                <a:latin typeface="Arial"/>
+              </a:rPr>
+              <a:t>Image Sources</a:t>
+            </a:r>
+          </a:p>
+        </p:txBody>
+      </p:sp>
+      <p:sp>
+        <p:nvSpPr>
+          <p:cNvPr id="3" name="TextBox 2"/>
+          <p:cNvSpPr txBox="1"/>
+          <p:nvPr/>
+        </p:nvSpPr>
+        <p:spPr>
+          <a:xfrm>
+            <a:off x="822960" y="2011680"/>
+            <a:ext cx="10545775" cy="4297680"/>
+          </a:xfrm>
+          <a:prstGeom prst="rect">
+            <a:avLst/>
+          </a:prstGeom>
+          <a:noFill/>
+        </p:spPr>
+        <p:txBody>
+          <a:bodyPr wrap="square" anchor="t" lIns="0" rIns="0" tIns="0" bIns="0">
+            <a:spAutoFit/>
+          </a:bodyPr>
+          <a:lstStyle/>
+          <a:p>
+            <a:pPr algn="l">
+              <a:spcBef>
+                <a:spcPts val="0"/>
+              </a:spcBef>
+            </a:pPr>
+            <a:r>
+              <a:rPr sz="1200" b="0" i="0">
+                <a:solidFill>
+                  <a:srgbClr val="000000"/>
+                </a:solidFill>
+                <a:latin typeface="Arial"/>
+              </a:rPr>
+              <a:t>https://footnotes2plato.com/wp-content/uploads/2024/09/charles_sanders_peirce-colorized_cleanup-enhanced.jpg?w=640</a:t>
+            </a:r>
+          </a:p>
+          <a:p>
+            <a:pPr algn="l">
+              <a:spcBef>
+                <a:spcPts val="400"/>
+              </a:spcBef>
+            </a:pPr>
+            <a:r>
+              <a:rPr sz="2200" b="0" i="0">
+                <a:solidFill>
+                  <a:srgbClr val="000000"/>
+                </a:solidFill>
+                <a:latin typeface="Arial"/>
+              </a:rPr>
+              <a:t>Source: footnotes2plato.com</a:t>
+            </a:r>
+          </a:p>
+          <a:p>
+            <a:pPr algn="l">
+              <a:spcBef>
+                <a:spcPts val="1600"/>
+              </a:spcBef>
+            </a:pPr>
+            <a:r>
+              <a:rPr sz="1200" b="0" i="0">
+                <a:solidFill>
+                  <a:srgbClr val="000000"/>
+                </a:solidFill>
+                <a:latin typeface="Arial"/>
+              </a:rPr>
+              <a:t>https://cdn.britannica.com/33/171633-050-ED21E678/Willard-Van-Orman-Quine-1958.jpg</a:t>
+            </a:r>
+          </a:p>
+          <a:p>
+            <a:pPr algn="l">
+              <a:spcBef>
+                <a:spcPts val="400"/>
+              </a:spcBef>
+            </a:pPr>
+            <a:r>
+              <a:rPr sz="2200" b="0" i="0">
+                <a:solidFill>
+                  <a:srgbClr val="000000"/>
+                </a:solidFill>
+                <a:latin typeface="Arial"/>
+              </a:rPr>
+              <a:t>Source: www.britannica.com</a:t>
             </a:r>
           </a:p>
         </p:txBody>

--- a/submissions/triadic_reduction/talk/deck.pptx
+++ b/submissions/triadic_reduction/talk/deck.pptx
@@ -1013,7 +1013,7 @@
           </a:p>
           <a:p>
             <a:r>
-              <a:t>An **irreducible triad** is a mechanism jointly determined by two other elements, with all three belonging to an integrated complex ($\Phi &gt; 0$). In our minimal control circuit ($M' = A \land B$; $A' = M$; $B' = M$), IIT 4.0 yields $\Phi = 2.0$, with all three nodes in the core complex. Under Partial Information Decomposition (PID), this configuration exhibits pure causal synergy ($\text{Syn} &gt; 0$).</a:t>
+              <a:t>An **irreducible triad** is a mechanism jointly determined by two other elements, with all three belonging to an integrated complex ($\Phi &gt; 0$). In our minimal control circuit ($M' = A \land B$; $A' = M$; $B' = M$), IIT 4.0 yields $\Phi = 2.0$, with all three nodes in the core complex.</a:t>
             </a:r>
           </a:p>
           <a:p/>
@@ -1025,7 +1025,7 @@
           <a:p/>
           <a:p>
             <a:r>
-              <a:t>1. **Dyadic Wirings Conserve Dyads:** Testing 89 discrete single-input copy architectures confirms Peirce's valency rule: pairwise connections produce only pairwise distinctions, generating zero triadic mechanisms.</a:t>
+              <a:t>1. **Dyadic Wirings Conserve Dyads:** Testing 89 discrete single-input copy architectures, no element is ever determined by two others: pairwise connections produce only pairwise determination. Our pre-registered hypothesis was refuted on the effect side, where one element can drive three; the cause-side reading is post hoc.</a:t>
             </a:r>
           </a:p>
           <a:p/>
@@ -1421,7 +1421,7 @@
           </a:p>
           <a:p>
             <a:r>
-              <a:t>The dealer only relays: let the maker sell direct and Φ falls from 2.0 to 0.0. The clearinghouse keeps 2.0 under the same bypass. The brokerage types sort the same way, on constructed forms, not fitted markets.</a:t>
+              <a:t>The dealer only relays: let the maker sell direct and Φ falls from 2.0 to 0.0. The clearinghouse keeps 2.0 under the same bypass. The brokerage types sort the same way. These are constructed forms, not markets.</a:t>
             </a:r>
           </a:p>
           <a:p/>
@@ -1432,7 +1432,7 @@
           </a:p>
           <a:p>
             <a:r>
-              <a:t>A toll booth on the only bridge matters until a second bridge goes up. A translator between two people with no common language matters whatever you build. Our test builds the second bridge and asks who is still needed.</a:t>
+              <a:t>A toll booth on the only bridge matters until a second bridge goes up. A translator between strangers matters whatever you build. Our test builds the second bridge and asks who is still needed.</a:t>
             </a:r>
           </a:p>
         </p:txBody>
@@ -1518,7 +1518,7 @@
           </a:p>
           <a:p>
             <a:r>
-              <a:t>A kitchen with the recipes written down. Check the oven on a dish you know, then cook your own. Write down what you expect before you taste. A dish that comes out wrong still goes in the book.</a:t>
+              <a:t>A kitchen with the recipes written down. Check the oven on a dish you know, then cook your own. Write down what you expect before you taste. A failed dish still goes in the book.</a:t>
             </a:r>
           </a:p>
         </p:txBody>
@@ -6676,7 +6676,7 @@
                 </a:solidFill>
                 <a:latin typeface="Arial"/>
               </a:rPr>
-              <a:t>Causal Collapse Theorem (IIT 4.0)</a:t>
+              <a:t>The Causal Test (IIT 4.0)</a:t>
             </a:r>
           </a:p>
         </p:txBody>
@@ -6717,6 +6717,15 @@
               </a:rPr>
               <a:t>Φ = 0</a:t>
             </a:r>
+            <a:r>
+              <a:rPr sz="2200" b="0" i="0">
+                <a:solidFill>
+                  <a:srgbClr val="000000"/>
+                </a:solidFill>
+                <a:latin typeface="Arial"/>
+              </a:rPr>
+              <a:t> — the system factors: cutting its weakest seam loses nothing.</a:t>
+            </a:r>
           </a:p>
           <a:p>
             <a:pPr algn="l">
@@ -6731,7 +6740,32 @@
                 </a:solidFill>
                 <a:latin typeface="Arial"/>
               </a:rPr>
-              <a:t>Extensional Dyadic Decomposition Erases System Synergy</a:t>
+              <a:t>Φ &gt; 0</a:t>
+            </a:r>
+            <a:r>
+              <a:rPr sz="2200" b="0" i="0">
+                <a:solidFill>
+                  <a:srgbClr val="000000"/>
+                </a:solidFill>
+                <a:latin typeface="Arial"/>
+              </a:rPr>
+              <a:t> — the system is a whole: no cut leaves it as it was.</a:t>
+            </a:r>
+          </a:p>
+          <a:p>
+            <a:pPr algn="l">
+              <a:spcBef>
+                <a:spcPts val="1600"/>
+              </a:spcBef>
+            </a:pPr>
+            <a:r>
+              <a:rPr sz="2200" b="1" i="0">
+                <a:solidFill>
+                  <a:srgbClr val="000000"/>
+                </a:solidFill>
+                <a:latin typeface="Arial"/>
+              </a:rPr>
+              <a:t>Wholeness Is Not Yet a Triad</a:t>
             </a:r>
           </a:p>
           <a:p>
@@ -6747,23 +6781,7 @@
                 </a:solidFill>
                 <a:latin typeface="Arial"/>
               </a:rPr>
-              <a:t>Forcing multi-input causal mechanisms into dyadic channels matches the partitioned repertoire with the whole.</a:t>
-            </a:r>
-          </a:p>
-          <a:p>
-            <a:pPr algn="l">
-              <a:spcBef>
-                <a:spcPts val="400"/>
-              </a:spcBef>
-            </a:pPr>
-            <a:r>
-              <a:rPr sz="2200" b="0" i="0">
-                <a:solidFill>
-                  <a:srgbClr val="000000"/>
-                </a:solidFill>
-                <a:latin typeface="Arial"/>
-              </a:rPr>
-              <a:t>Integrated information vanishes under the Minimum Information Partition (MIP).</a:t>
+              <a:t>Φ says whether the system factors, not whether any member is set by two others. A ring of one-input copies is a whole at Φ = 2.0.</a:t>
             </a:r>
           </a:p>
         </p:txBody>
@@ -7232,7 +7250,7 @@
                           </a:solidFill>
                           <a:latin typeface="Arial"/>
                         </a:rPr>
-                        <a:t>Φ = 0.0</a:t>
+                        <a:t>Φ &gt; 0 in 8</a:t>
                       </a:r>
                     </a:p>
                   </a:txBody>
@@ -7272,7 +7290,7 @@
                           </a:solidFill>
                           <a:latin typeface="Arial"/>
                         </a:rPr>
-                        <a:t>No Complex</a:t>
+                        <a:t>No Member Set by Two Others</a:t>
                       </a:r>
                     </a:p>
                   </a:txBody>
@@ -7354,7 +7372,7 @@
                           </a:solidFill>
                           <a:latin typeface="Arial"/>
                         </a:rPr>
-                        <a:t>Feedback Loop</a:t>
+                        <a:t>One of the 89</a:t>
                       </a:r>
                     </a:p>
                   </a:txBody>
@@ -7474,7 +7492,7 @@
                           </a:solidFill>
                           <a:latin typeface="Arial"/>
                         </a:rPr>
-                        <a:t>Whole Without Synergy</a:t>
+                        <a:t>Whole Without a Triad</a:t>
                       </a:r>
                     </a:p>
                   </a:txBody>
@@ -7596,7 +7614,7 @@
                           </a:solidFill>
                           <a:latin typeface="Arial"/>
                         </a:rPr>
-                        <a:t>Synergistic gate</a:t>
+                        <a:t>Two-input gate</a:t>
                       </a:r>
                     </a:p>
                   </a:txBody>
@@ -7676,7 +7694,7 @@
                           </a:solidFill>
                           <a:latin typeface="Arial"/>
                         </a:rPr>
-                        <a:t>Synergy Without Whole</a:t>
+                        <a:t>Triad Without a Whole</a:t>
                       </a:r>
                     </a:p>
                   </a:txBody>
@@ -7798,7 +7816,7 @@
                           </a:solidFill>
                           <a:latin typeface="Arial"/>
                         </a:rPr>
-                        <a:t>Teridentity in loop</a:t>
+                        <a:t>Two-input gate in the loop</a:t>
                       </a:r>
                     </a:p>
                   </a:txBody>
@@ -7838,7 +7856,7 @@
                           </a:solidFill>
                           <a:latin typeface="Arial"/>
                         </a:rPr>
-                        <a:t>Φ = 2.0</a:t>
+                        <a:t>Φ &gt; 0</a:t>
                       </a:r>
                     </a:p>
                   </a:txBody>

--- a/submissions/triadic_reduction/talk/deck.pptx
+++ b/submissions/triadic_reduction/talk/deck.pptx
@@ -23,6 +23,11 @@
     <p:sldId id="271" r:id="rId23"/>
     <p:sldId id="272" r:id="rId24"/>
     <p:sldId id="273" r:id="rId25"/>
+    <p:sldId id="274" r:id="rId26"/>
+    <p:sldId id="275" r:id="rId27"/>
+    <p:sldId id="276" r:id="rId28"/>
+    <p:sldId id="277" r:id="rId29"/>
+    <p:sldId id="278" r:id="rId30"/>
   </p:sldIdLst>
   <p:sldSz cx="12191695" cy="6858000" type="screen4x3"/>
   <p:notesSz cx="6858000" cy="9144000"/>
@@ -519,12 +524,23 @@
           <a:lstStyle/>
           <a:p>
             <a:r>
-              <a:t>Thank you. I want to ask an old question from logic, because I think its answer decides whether</a:t>
-            </a:r>
-          </a:p>
-          <a:p>
-            <a:r>
-              <a:t>algorithmacy names anything at all.</a:t>
+              <a:t>**Technical Presentation**</a:t>
+            </a:r>
+          </a:p>
+          <a:p>
+            <a:r>
+              <a:t>This presentation investigates a foundational problem at the intersection of mathematical logic, universal algebra, and causal dynamical systems: whether triadic relations possess ontological autonomy or factorize into compositions of dyadic relations. The resolution of this question determines whether *algorithmacy* constitutes an independent communicative and cognitive competency, or whether it collapses into an extensional variant of conventional literacy.</a:t>
+            </a:r>
+          </a:p>
+          <a:p/>
+          <a:p>
+            <a:r>
+              <a:t>**Layman's Explanation**</a:t>
+            </a:r>
+          </a:p>
+          <a:p>
+            <a:r>
+              <a:t>When you interact with another person through an algorithm—such as hailing a ride, trading on a platform, or scrolling a curated social feed—is that algorithm merely an inert digital wire connecting two people, or is it an active third party in the room? If it is just a wire, you only need standard reading skills to navigate it. But if the three-way interaction cannot be sliced into two separate two-way conversations, we are dealing with a completely new medium that requires a distinct human capability.</a:t>
             </a:r>
           </a:p>
         </p:txBody>
@@ -594,33 +610,47 @@
           <a:lstStyle/>
           <a:p>
             <a:r>
-              <a:t>In 1954 W. V. Quine proved a striking result. Take any theory written in ordinary first-order logic, with</a:t>
-            </a:r>
-          </a:p>
-          <a:p>
-            <a:r>
-              <a:t>as many relations of as many places as you like. It can be rewritten as a theory in which "there is only</a:t>
-            </a:r>
-          </a:p>
-          <a:p>
-            <a:r>
-              <a:t>one predicate letter, and it a dyadic one". One two-place relation is enough for everything.</a:t>
+              <a:t>**Technical Presentation**</a:t>
+            </a:r>
+          </a:p>
+          <a:p>
+            <a:r>
+              <a:t>Quine's proof led twentieth-century logicians to conclude that Peirce's Reduction Thesis was mistaken. If any triadic relation can be represented as dyadic membership over a universe of pairs, Thirdness is not an autonomous category of being, but a syntactic convenience eliminated by set-theoretic packaging. If that conclusion holds, triadic interaction is an illusion: coordinating through an algorithm is just two chained dyadic steps, collapsing algorithmacy into conventional literacy.</a:t>
             </a:r>
           </a:p>
           <a:p/>
           <a:p>
             <a:r>
-              <a:t>His tools were "a fragment of set theory" and the ordered pair: a way to package two things as one thing.</a:t>
-            </a:r>
-          </a:p>
-          <a:p>
-            <a:r>
-              <a:t>And one more move, which matters: the new theory's universe is enlarged to contain all those pairs.</a:t>
-            </a:r>
-          </a:p>
-          <a:p>
-            <a:r>
-              <a:t>Leopold Löwenheim had done something similar with pairs in 1915.</a:t>
+              <a:t>Universal algebra resolves this conflict by demonstrating that the outcome depends strictly on the constructive operations permitted:</a:t>
+            </a:r>
+          </a:p>
+          <a:p/>
+          <a:p>
+            <a:r>
+              <a:t>* Hans Herzberger (1981) proved that Peirce’s thesis holds as an exact theorem for valency-regular constructions under relative products, while confirming that under standard extensional definability over inflated domains, the thesis collapses.</a:t>
+            </a:r>
+          </a:p>
+          <a:p/>
+          <a:p>
+            <a:r>
+              <a:t>* Dau and Hereth Correia (2006) showed that standard relational algebra generates $=_3$ only by covertly smuggling it into variable identification operations ($\Delta$).</a:t>
+            </a:r>
+          </a:p>
+          <a:p/>
+          <a:p>
+            <a:r>
+              <a:t>**Layman's Explanation**</a:t>
+            </a:r>
+          </a:p>
+          <a:p>
+            <a:r>
+              <a:t>If Quine is right, "three-way coordination" does not exist in nature—it is just lazy grammar that computer code can dismantle into pairs. And if that is true, you don't need any special skill to deal with algorithms; interacting with an AI or a platform is no different from reading two text messages one after the other.</a:t>
+            </a:r>
+          </a:p>
+          <a:p/>
+          <a:p>
+            <a:r>
+              <a:t>Logicians eventually realized both thinkers were right, but under different rules. If you are building a real machine out of a fixed set of physical parts, Peirce is completely right: you cannot build a three-way switch out of two-way switches. Quine only "won" on paper by assuming you have access to an infinite warehouse of magic envelopes to stuff things into.</a:t>
             </a:r>
           </a:p>
         </p:txBody>
@@ -690,28 +720,41 @@
           <a:lstStyle/>
           <a:p>
             <a:r>
-              <a:t>Here is how it works. Take the relation "A gives B to C". First package B and C into a pair. Then</a:t>
-            </a:r>
-          </a:p>
-          <a:p>
-            <a:r>
-              <a:t>package A with that pair, and tag the result with which relation it belongs to. Now "A, B, C" is one new</a:t>
-            </a:r>
-          </a:p>
-          <a:p>
-            <a:r>
-              <a:t>object in the enlarged universe. And "A gives B to C" becomes a single two-place fact about that object.</a:t>
+              <a:t>**Technical Presentation**</a:t>
+            </a:r>
+          </a:p>
+          <a:p>
+            <a:r>
+              <a:t>Relational clone theory formalizes the precise mathematical barrier. Hereth Correia and Pöschel (2006) proved that for any base domain $\vert{}A\vert{} \ge 2$, the clone generated by monadic and dyadic relations strictly excludes the **teridentity relation**:</a:t>
             </a:r>
           </a:p>
           <a:p/>
           <a:p>
             <a:r>
-              <a:t>Do that for every relation, of any number of places, and every relation in the theory has become</a:t>
-            </a:r>
-          </a:p>
-          <a:p>
-            <a:r>
-              <a:t>two-place. The triad has disappeared into a tuple.</a:t>
+              <a:t>$$=_3 \; \equiv \{(x, x, x) \mid x \in A\}$$</a:t>
+            </a:r>
+          </a:p>
+          <a:p/>
+          <a:p>
+            <a:r>
+              <a:t>Koshkin (2024) proved that on infinite domains, non-degenerate relations have a strict lower bound of ternarity ($\text{ter}(R) \ge n - 2$).</a:t>
+            </a:r>
+          </a:p>
+          <a:p/>
+          <a:p>
+            <a:r>
+              <a:t>Robert Burch concluded in the *Stanford Encyclopedia of Philosophy* that both Peirce and Quine are correct relative to their premises: the outcome depends on the allowable constructive resources. Sergiy Koshkin showed that once the ternary junction is acknowledged as an explicit relation, Peirce’s claim is mathematically validated. However, static algebraic logic evaluates relations extensionally as frozen sets of tuples. It cannot evaluate real-time coordination within dynamic, running systems. To differentiate genuine triadic coordination from disguised dyadic transmission, we must employ causal information theory.</a:t>
+            </a:r>
+          </a:p>
+          <a:p/>
+          <a:p>
+            <a:r>
+              <a:t>**Layman's Explanation**</a:t>
+            </a:r>
+          </a:p>
+          <a:p>
+            <a:r>
+              <a:t>On paper, if you allow infinite math tricks, Quine works; in physical geometry, Peirce works. But algorithms and humans do not live on paper as frozen database tables. We interact in real time with running software. We don't need another chalkboard proof; we need a physical test to determine whether a running computer system is genuinely triadic or just pretending to be one.</a:t>
             </a:r>
           </a:p>
         </p:txBody>
@@ -781,28 +824,23 @@
           <a:lstStyle/>
           <a:p>
             <a:r>
-              <a:t>To be exact about the history: Quine never named Peirce in this paper, and never drew the conclusion</a:t>
-            </a:r>
-          </a:p>
-          <a:p>
-            <a:r>
-              <a:t>himself. Others did. Robert Burch reports that after Quine's proof, many doubted Peirce's thesis. And you</a:t>
-            </a:r>
-          </a:p>
-          <a:p>
-            <a:r>
-              <a:t>can see why. If any triad can be rewritten as pairs, then Thirdness is not a kind of being. It is a</a:t>
-            </a:r>
-          </a:p>
-          <a:p>
-            <a:r>
-              <a:t>feature of our notation, which set theory can remove.</a:t>
+              <a:t>**Technical Presentation**</a:t>
+            </a:r>
+          </a:p>
+          <a:p>
+            <a:r>
+              <a:t>Partial Information Decomposition, due to Williams and Beer (2010), splits the information two sources carry about a target into four parts: what both carry (redundancy), what each carries alone (two unique terms), and what only the pair carries together (synergy). Exclusive-or is the canonical case. With $Y = X_1 \oplus X_2$, neither input alone tells you anything about $Y$, yet the two together fix it, and all of the information is synergy: one bit.</a:t>
             </a:r>
           </a:p>
           <a:p/>
           <a:p>
             <a:r>
-              <a:t>And if that is right, then algorithmacy is not a thing. So who is right?</a:t>
+              <a:t>**Layman's Explanation**</a:t>
+            </a:r>
+          </a:p>
+          <a:p>
+            <a:r>
+              <a:t>Take two light switches wired so the lamp is on when exactly one of them is up. Look at either switch alone and you learn nothing about the lamp. Look at both and you know it for certain. That kind of information lives only in the pair, never in either part.</a:t>
             </a:r>
           </a:p>
         </p:txBody>
@@ -872,32 +910,35 @@
           <a:lstStyle/>
           <a:p>
             <a:r>
-              <a:t>The logicians who came after both of them made the question precise, and the answer turned on the</a:t>
-            </a:r>
-          </a:p>
-          <a:p>
-            <a:r>
-              <a:t>operations you allow. Hans Herzberger showed in 1981 that Peirce's thesis holds as a theorem for</a:t>
-            </a:r>
-          </a:p>
-          <a:p>
-            <a:r>
-              <a:t>constructions that obey Peirce's valency rule, the tail-counting of slide seven, and that can form relative</a:t>
-            </a:r>
-          </a:p>
-          <a:p>
-            <a:r>
-              <a:t>products. He also showed the other side: under standard notions of definability, "the reduction thesis</a:t>
-            </a:r>
-          </a:p>
-          <a:p>
-            <a:r>
-              <a:t>collapses". Same author, same paper, two theorems. Robert Burch then built a whole Peircean algebra in 1991</a:t>
-            </a:r>
-          </a:p>
-          <a:p>
-            <a:r>
-              <a:t>and proved the thesis inside it, under a restriction on how relations may be combined.</a:t>
+              <a:t>**Technical Presentation**</a:t>
+            </a:r>
+          </a:p>
+          <a:p>
+            <a:r>
+              <a:t>Integrated Information Theory (IIT 4.0) provides an operational test for dynamic irreducibility. IIT evaluates a system’s Transition Probability Matrix (TPM) across all bipartitions to determine the Minimum Information Partition (MIP):</a:t>
+            </a:r>
+          </a:p>
+          <a:p/>
+          <a:p>
+            <a:r>
+              <a:t>$$\Phi = \text{ID}\left(p \parallel p^{P_{\text{MIP}}}\right)$$</a:t>
+            </a:r>
+          </a:p>
+          <a:p/>
+          <a:p>
+            <a:r>
+              <a:t>If $\Phi = 0$, the system factorizes cleanly into independent components. If $\Phi &gt; 0$, causal interactions are irreducible.</a:t>
+            </a:r>
+          </a:p>
+          <a:p/>
+          <a:p>
+            <a:r>
+              <a:t>**Layman's Explanation**</a:t>
+            </a:r>
+          </a:p>
+          <a:p>
+            <a:r>
+              <a:t>We found our test in neuroscience: Integrated Information Theory. It asks a simple question: "If you take a pair of scissors and cut this system along its weakest seam, how much information is lost?" If cutting it loses nothing ($\Phi = 0$), it was just independent wires. If cutting it destroys the system's behavior ($\Phi &gt; 0$), it is an indivisible whole.</a:t>
             </a:r>
           </a:p>
         </p:txBody>
@@ -967,43 +1008,75 @@
           <a:lstStyle/>
           <a:p>
             <a:r>
-              <a:t>Later work located the difference exactly. Joachim Hereth Correia and Reinhard Pöschel proved in 2006</a:t>
-            </a:r>
-          </a:p>
-          <a:p>
-            <a:r>
-              <a:t>that in Peirce's own algebra, on any domain of two or more things, one- and two-place relations never build</a:t>
-            </a:r>
-          </a:p>
-          <a:p>
-            <a:r>
-              <a:t>the three-way identity: the relation that says three things are one and the same. Frithjof Dau and Hereth</a:t>
-            </a:r>
-          </a:p>
-          <a:p>
-            <a:r>
-              <a:t>Correia pointed out that ordinary relational algebra can build it, but only because it is "hidden in the</a:t>
-            </a:r>
-          </a:p>
-          <a:p>
-            <a:r>
-              <a:t>operations", in the step that lets one variable stand in three places. And Sergiy Koshkin has shown that</a:t>
-            </a:r>
-          </a:p>
-          <a:p>
-            <a:r>
-              <a:t>when a variable may be shared freely, three-place relations do reduce to two-place ones on any finite</a:t>
-            </a:r>
-          </a:p>
-          <a:p>
-            <a:r>
-              <a:t>domain of three or more values, while on two-valued domains some do not.</a:t>
+              <a:t>**Technical Presentation**</a:t>
+            </a:r>
+          </a:p>
+          <a:p>
+            <a:r>
+              <a:t>An **irreducible triad** is a mechanism jointly determined by two other elements, with all three belonging to an integrated complex ($\Phi &gt; 0$). In our minimal control circuit ($M' = A \land B$; $A' = M$; $B' = M$), IIT 4.0 yields $\Phi = 2.0$, with all three nodes in the core complex.</a:t>
             </a:r>
           </a:p>
           <a:p/>
           <a:p>
             <a:r>
-              <a:t>Notice where every one of these results lands: on Peirce's third argument, the junction.</a:t>
+              <a:t>Applying this causal test across dynamical architectures resolves the structural taxonomy:</a:t>
+            </a:r>
+          </a:p>
+          <a:p/>
+          <a:p>
+            <a:r>
+              <a:t>1. **Dyadic Wirings Conserve Dyads:** Testing 89 discrete single-input copy architectures, no element is ever determined by two others: pairwise connections produce only pairwise determination. Our pre-registered hypothesis was refuted on the effect side, where one element can drive three; the cause-side reading is post hoc.</a:t>
+            </a:r>
+          </a:p>
+          <a:p/>
+          <a:p>
+            <a:r>
+              <a:t>2. **Wholeness and Triadicity Are Orthogonal:** Testing 30 four-element networks driven by two-input mechanisms proves that system-level integration and local triadic irreducibility do not always coincide:</a:t>
+            </a:r>
+          </a:p>
+          <a:p/>
+          <a:p>
+            <a:r>
+              <a:t>* *A whole without a triad:* A cyclic ring of pairwise copy elements achieves $\Phi = 2.0$ purely via feedback return, containing zero triadic mechanisms.</a:t>
+            </a:r>
+          </a:p>
+          <a:p/>
+          <a:p>
+            <a:r>
+              <a:t>* *A triad without a whole:* In 11 of the 30 networks, an element is jointly determined by two others, yet the system factorizes globally across its MIP ($\Phi = 0$).</a:t>
+            </a:r>
+          </a:p>
+          <a:p/>
+          <a:p>
+            <a:r>
+              <a:t>* *A triad integrated within a whole:* In 5 of the 30 networks—matching our control circuit and Peirce's model of genuine giving—the triadic mechanism resides inside an irreducible complex ($\Phi &gt; 0$).</a:t>
+            </a:r>
+          </a:p>
+          <a:p/>
+          <a:p>
+            <a:r>
+              <a:t>**Layman's Explanation**</a:t>
+            </a:r>
+          </a:p>
+          <a:p>
+            <a:r>
+              <a:t>In our circuit—where a mediator $M$ only triggers when both $A$ and $B$ act together, and both $A$ and $B$ listen to $M$—cutting the system destroys its function completely ($\Phi = 2.0$). It is a true, irreducible triad.</a:t>
+            </a:r>
+          </a:p>
+          <a:p/>
+          <a:p>
+            <a:r>
+              <a:t>We tested this across dozens of computational network designs and discovered two critical facts:</a:t>
+            </a:r>
+          </a:p>
+          <a:p>
+            <a:r>
+              <a:t>First, connecting single-input wires end-to-end never creates a three-way decision—pairs only make pairs.</a:t>
+            </a:r>
+          </a:p>
+          <a:p>
+            <a:r>
+              <a:t>Second, being a "unified system" is not the same as being a "triad". A circle of people whispering a rumor around a ring is a unified loop ($\Phi = 2.0$), but every step is still just a two-person exchange! Genuine triadicity requires an active coordinator that combines two inputs simultaneously inside that loop—which occurred in only 5 of our 30 test networks.</a:t>
             </a:r>
           </a:p>
         </p:txBody>
@@ -1073,48 +1146,35 @@
           <a:lstStyle/>
           <a:p>
             <a:r>
-              <a:t>So what is the verdict? Burch, writing in the Stanford Encyclopedia, puts it this way: "both Peirce and</a:t>
-            </a:r>
-          </a:p>
-          <a:p>
-            <a:r>
-              <a:t>Quine were correct: the issue entirely depends on exactly what constructive resources are to be allowed".</a:t>
-            </a:r>
-          </a:p>
-          <a:p>
-            <a:r>
-              <a:t>Koshkin is less comfortable with a truce: "It cannot simply be that Peirce and Quine are both right." His</a:t>
-            </a:r>
-          </a:p>
-          <a:p>
-            <a:r>
-              <a:t>view is that once you count each three-way junction as a triad, Peirce comes out right.</a:t>
+              <a:t>**Technical Presentation**</a:t>
+            </a:r>
+          </a:p>
+          <a:p>
+            <a:r>
+              <a:t>Triads do not universally reduce to dyads. A genuine triadic system is one where an active third party is jointly determined by two participants and dynamically couples them within an integrated cause-effect structure ($\Phi &gt; 0$). These non-factorizable systems are the specific operational targets of algorithmacy.</a:t>
             </a:r>
           </a:p>
           <a:p/>
           <a:p>
             <a:r>
-              <a:t>For our purposes, the upshot is this. Some triads reduce, and some do not, and the logicians have exact</a:t>
-            </a:r>
-          </a:p>
-          <a:p>
-            <a:r>
-              <a:t>tests for which: but their tests apply to relations as sets of tuples, and they depend on the operations</a:t>
-            </a:r>
-          </a:p>
-          <a:p>
-            <a:r>
-              <a:t>you allow. What algorithmacy needs is different. It needs a test for coordination as a running system:</a:t>
-            </a:r>
-          </a:p>
-          <a:p>
-            <a:r>
-              <a:t>for a given form of coordination, is its third genuine, or two pairs in disguise? Koshkin himself pointed</a:t>
-            </a:r>
-          </a:p>
-          <a:p>
-            <a:r>
-              <a:t>toward information integration as the place to look.</a:t>
+              <a:t>While literacy parses feedforward, passive symbolic inscriptions, algorithmacy provides the cognitive capacity to model, interrogate, and negotiate the active, synergistic intent of an algorithmic third party. This structural form is not unique to artificial intelligence—it exists historically in legal arbitration and shared physical tallies. What is unprecedented is its automated deployment at societal scale through machine-learning platforms.</a:t>
+            </a:r>
+          </a:p>
+          <a:p/>
+          <a:p>
+            <a:r>
+              <a:t>Our current models are grounded in discrete Boolean state spaces, leaving continuous human behavior and the empirical identification of observational unit boundaries as our next investigative phase.</a:t>
+            </a:r>
+          </a:p>
+          <a:p/>
+          <a:p>
+            <a:r>
+              <a:t>**Layman's Explanation**</a:t>
+            </a:r>
+          </a:p>
+          <a:p>
+            <a:r>
+              <a:t>The verdict is in: triads are real, physical, and cannot be broken down. When you read a book or an email, you use literacy to interpret static text that does not react to you. But when you drive for an app, manage an AI assistant, or interact through a platform, you are locked into an irreducible triad. The algorithm is an active player with its own incentives, measuring both sides at once. Basic literacy cannot protect you from being manipulated in this environment. Only algorithmacy—the ability to understand, question, and steer the active third party—allows humans to maintain agency in an automated world.</a:t>
             </a:r>
           </a:p>
         </p:txBody>
@@ -1184,58 +1244,23 @@
           <a:lstStyle/>
           <a:p>
             <a:r>
-              <a:t>Our argument is that integrated information theory, IIT, supplies a causal version of that test. IIT asks</a:t>
-            </a:r>
-          </a:p>
-          <a:p>
-            <a:r>
-              <a:t>one question of a system: if you cut it into independent parts, what do you lose? Φ measures what is lost</a:t>
-            </a:r>
-          </a:p>
-          <a:p>
-            <a:r>
-              <a:t>under the least damaging cut. If Φ is zero, the system splits at some cut. If Φ is above zero, every cut</a:t>
-            </a:r>
-          </a:p>
-          <a:p>
-            <a:r>
-              <a:t>loses something. IIT also tells us, element by element, which other elements each one depends on</a:t>
-            </a:r>
-          </a:p>
-          <a:p>
-            <a:r>
-              <a:t>irreducibly.</a:t>
+              <a:t>**Technical Presentation**</a:t>
+            </a:r>
+          </a:p>
+          <a:p>
+            <a:r>
+              <a:t>Same three members, two circuits: giver's act, thing, receiver's possession. In the gift, possession is set by giver and thing together; in the imitation, each member answers to one other. Both are wholes at Φ = 2.0.</a:t>
             </a:r>
           </a:p>
           <a:p/>
           <a:p>
             <a:r>
-              <a:t>That gives us a precise meaning for an irreducible triad: a party whose state depends irreducibly on two</a:t>
-            </a:r>
-          </a:p>
-          <a:p>
-            <a:r>
-              <a:t>others at once, with all three inside one whole. Here is the smallest example. M turns on only when A and</a:t>
-            </a:r>
-          </a:p>
-          <a:p>
-            <a:r>
-              <a:t>B are both on, like a deal that closes only when both sign, and A and B each follow M. IIT finds the whole</a:t>
-            </a:r>
-          </a:p>
-          <a:p>
-            <a:r>
-              <a:t>irreducible, Φ equal to 2.0, with all three in the core, the largest part that is itself a whole. And M</a:t>
-            </a:r>
-          </a:p>
-          <a:p>
-            <a:r>
-              <a:t>depends on A and B together; its rule cannot be split into a part that answers to A and a part that</a:t>
-            </a:r>
-          </a:p>
-          <a:p>
-            <a:r>
-              <a:t>answers to B.</a:t>
+              <a:t>**Layman's Explanation**</a:t>
+            </a:r>
+          </a:p>
+          <a:p>
+            <a:r>
+              <a:t>Back to the gift and the apple. Ask "is this one whole?" and both say yes. Ask "is anyone set by two others at once?" and only the gift says yes.</a:t>
             </a:r>
           </a:p>
         </p:txBody>
@@ -1305,63 +1330,23 @@
           <a:lstStyle/>
           <a:p>
             <a:r>
-              <a:t>We then used this test to sort cases. First, Peirce's side of the question. We built every system in</a:t>
-            </a:r>
-          </a:p>
-          <a:p>
-            <a:r>
-              <a:t>which each element simply copies one other: 89 wirings at three and four elements, chained, looped or</a:t>
-            </a:r>
-          </a:p>
-          <a:p>
-            <a:r>
-              <a:t>branched. No element in any of them depends on two others at once. Pairs make pairs, as Peirce said. I</a:t>
-            </a:r>
-          </a:p>
-          <a:p>
-            <a:r>
-              <a:t>should say plainly that we split cause from effect after seeing the result, and that a copying element</a:t>
-            </a:r>
-          </a:p>
-          <a:p>
-            <a:r>
-              <a:t>has only one cause, so this is close to true by construction. We also checked the instrument on thirteen</a:t>
-            </a:r>
-          </a:p>
-          <a:p>
-            <a:r>
-              <a:t>kinds of wiring at five elements, with the same result.</a:t>
+              <a:t>**Technical Presentation**</a:t>
+            </a:r>
+          </a:p>
+          <a:p>
+            <a:r>
+              <a:t>Each member following the majority: Φ = 0.0, the system factors. We had pre-registered the opposite. Unanimity instead: Φ = 6.0, all three in the core. On a related quorum form, IIT 3.0 says binds where IIT 4.0 says factors.</a:t>
             </a:r>
           </a:p>
           <a:p/>
           <a:p>
             <a:r>
-              <a:t>Second, the sorting itself. We fixed the criterion in advance and tested it on thirty four-element systems</a:t>
-            </a:r>
-          </a:p>
-          <a:p>
-            <a:r>
-              <a:t>nobody had read under it, each element driven by two others. Wholes can lack a triad: a ring of pairs is</a:t>
-            </a:r>
-          </a:p>
-          <a:p>
-            <a:r>
-              <a:t>one whole, at Φ equal to 2.0, with no one depending on two others. Triads can lack a whole: in eleven of</a:t>
-            </a:r>
-          </a:p>
-          <a:p>
-            <a:r>
-              <a:t>the thirty, a party depends on two others at once while the system splits. And in five of the thirty, as in</a:t>
-            </a:r>
-          </a:p>
-          <a:p>
-            <a:r>
-              <a:t>the control and in genuine giving, the triad sits inside the whole. The rest have neither, or a triad</a:t>
-            </a:r>
-          </a:p>
-          <a:p>
-            <a:r>
-              <a:t>outside the core. So IIT gives a causal version of the line the logicians drew.</a:t>
+              <a:t>**Layman's Explanation**</a:t>
+            </a:r>
+          </a:p>
+          <a:p>
+            <a:r>
+              <a:t>A committee that goes with any two: any one of you can be outvoted, so cutting one away changes nothing. Make it all three or nothing, and cutting anyone stops it.</a:t>
             </a:r>
           </a:p>
         </p:txBody>
@@ -1431,54 +1416,109 @@
           <a:lstStyle/>
           <a:p>
             <a:r>
-              <a:t>So here is the answer to the ontological question. Triads do not all reduce to dyads. The ones that do</a:t>
-            </a:r>
-          </a:p>
-          <a:p>
-            <a:r>
-              <a:t>not, in these models, are a third fixed by two parties jointly, inside one whole with them. Those are</a:t>
-            </a:r>
-          </a:p>
-          <a:p>
-            <a:r>
-              <a:t>algorithmacy's targets. Literacy is the sensibility for chains, where one person fixes a text and another</a:t>
-            </a:r>
-          </a:p>
-          <a:p>
-            <a:r>
-              <a:t>reads it. Algorithmacy is the sensibility for these.</a:t>
+              <a:t>**Technical Presentation**</a:t>
+            </a:r>
+          </a:p>
+          <a:p>
+            <a:r>
+              <a:t>The dealer only relays: let the maker sell direct and Φ falls from 2.0 to 0.0. The clearinghouse keeps 2.0 under the same bypass. The brokerage types sort the same way. These are constructed forms, not markets.</a:t>
             </a:r>
           </a:p>
           <a:p/>
           <a:p>
             <a:r>
-              <a:t>The target is older than AI. An arbitrator has this form, deciding from both sides and binding both; so</a:t>
-            </a:r>
-          </a:p>
-          <a:p>
-            <a:r>
-              <a:t>does a tally that both sides write and both read. What is new is that this form now runs through ordinary</a:t>
-            </a:r>
-          </a:p>
-          <a:p>
-            <a:r>
-              <a:t>work and life at scale, mostly through algorithms, and that is why the sensibility needs a name.</a:t>
+              <a:t>**Layman's Explanation**</a:t>
+            </a:r>
+          </a:p>
+          <a:p>
+            <a:r>
+              <a:t>A toll booth on the only bridge matters until a second bridge goes up. A translator between strangers matters whatever you build. Our test builds the second bridge and asks who is still needed.</a:t>
+            </a:r>
+          </a:p>
+        </p:txBody>
+      </p:sp>
+      <p:sp>
+        <p:nvSpPr>
+          <p:cNvPr id="4" name="Slide Number Placeholder 3"/>
+          <p:cNvSpPr>
+            <a:spLocks noGrp="1"/>
+          </p:cNvSpPr>
+          <p:nvPr>
+            <p:ph type="sldNum" idx="5" sz="quarter"/>
+          </p:nvPr>
+        </p:nvSpPr>
+        <p:spPr/>
+      </p:sp>
+    </p:spTree>
+  </p:cSld>
+  <p:clrMapOvr>
+    <a:masterClrMapping/>
+  </p:clrMapOvr>
+</p:notes>
+</file>
+
+<file path=ppt/notesSlides/notesSlide19.xml><?xml version="1.0" encoding="utf-8"?>
+<p:notes xmlns:a="http://schemas.openxmlformats.org/drawingml/2006/main" xmlns:p="http://schemas.openxmlformats.org/presentationml/2006/main" xmlns:r="http://schemas.openxmlformats.org/officeDocument/2006/relationships">
+  <p:cSld>
+    <p:spTree>
+      <p:nvGrpSpPr>
+        <p:cNvPr id="1" name=""/>
+        <p:cNvGrpSpPr/>
+        <p:nvPr/>
+      </p:nvGrpSpPr>
+      <p:grpSpPr>
+        <a:xfrm>
+          <a:off x="0" y="0"/>
+          <a:ext cx="0" cy="0"/>
+          <a:chOff x="0" y="0"/>
+          <a:chExt cx="0" cy="0"/>
+        </a:xfrm>
+      </p:grpSpPr>
+      <p:sp>
+        <p:nvSpPr>
+          <p:cNvPr id="2" name="Slide Image Placeholder 1"/>
+          <p:cNvSpPr>
+            <a:spLocks noGrp="1"/>
+          </p:cNvSpPr>
+          <p:nvPr>
+            <p:ph type="sldImg" idx="2"/>
+          </p:nvPr>
+        </p:nvSpPr>
+        <p:spPr/>
+      </p:sp>
+      <p:sp>
+        <p:nvSpPr>
+          <p:cNvPr id="3" name="Notes Placeholder 2"/>
+          <p:cNvSpPr>
+            <a:spLocks noGrp="1"/>
+          </p:cNvSpPr>
+          <p:nvPr>
+            <p:ph type="body" idx="3" sz="quarter"/>
+          </p:nvPr>
+        </p:nvSpPr>
+        <p:spPr/>
+        <p:txBody>
+          <a:bodyPr/>
+          <a:lstStyle/>
+          <a:p>
+            <a:r>
+              <a:t>**Technical Presentation**</a:t>
+            </a:r>
+          </a:p>
+          <a:p>
+            <a:r>
+              <a:t>Validate on two controls before you trust a verdict. A new question scaffolds from a template, and CI re-derives every registered number on each pull request.</a:t>
             </a:r>
           </a:p>
           <a:p/>
           <a:p>
             <a:r>
-              <a:t>Two limits. These are models, not people: we have measured no worker and modelled no platform's rule.</a:t>
-            </a:r>
-          </a:p>
-          <a:p>
-            <a:r>
-              <a:t>And whether two parties count as separate units is itself a choice; IIT has its own test for that, and</a:t>
-            </a:r>
-          </a:p>
-          <a:p>
-            <a:r>
-              <a:t>running it is our next step. Thank you.</a:t>
+              <a:t>**Layman's Explanation**</a:t>
+            </a:r>
+          </a:p>
+          <a:p>
+            <a:r>
+              <a:t>A kitchen with the recipes written down. Check the oven on a dish you know, then cook your own. Write down what you expect before you taste. A failed dish still goes in the book.</a:t>
             </a:r>
           </a:p>
         </p:txBody>
@@ -1548,33 +1588,349 @@
           <a:lstStyle/>
           <a:p>
             <a:r>
-              <a:t>Start with the word. We already have names for the sensibilities a medium demands. Oracy is the ability</a:t>
-            </a:r>
-          </a:p>
-          <a:p>
-            <a:r>
-              <a:t>to understand commands, spoken and heard. Literacy is the sensibility to navigate a text. Numeracy is the</a:t>
-            </a:r>
-          </a:p>
-          <a:p>
-            <a:r>
-              <a:t>sensibility to navigate numbers. Each names a competence that a new medium made necessary.</a:t>
+              <a:t>**Technical Presentation**</a:t>
+            </a:r>
+          </a:p>
+          <a:p>
+            <a:r>
+              <a:t>Human communication evolves through discrete phase shifts in coordination media:</a:t>
             </a:r>
           </a:p>
           <a:p/>
           <a:p>
             <a:r>
-              <a:t>Algorithmacy, as I use it, is the sensibility to navigate triadic coordination: coordinating with someone</a:t>
-            </a:r>
-          </a:p>
-          <a:p>
-            <a:r>
-              <a:t>through a third that both of you shape and that shapes you both. The platform between a driver and a</a:t>
-            </a:r>
-          </a:p>
-          <a:p>
-            <a:r>
-              <a:t>rider is the picture most of us have in mind.</a:t>
+              <a:t>* **Oracy** emerged to govern synchronous, co-located spoken interaction, structured as an immediate acoustic dyad.</a:t>
+            </a:r>
+          </a:p>
+          <a:p/>
+          <a:p>
+            <a:r>
+              <a:t>* **Literacy** decoupled author from reader across space and time via a passive symbolic conduit, establishing an asynchronous, feedforward dyadic architecture.</a:t>
+            </a:r>
+          </a:p>
+          <a:p/>
+          <a:p>
+            <a:r>
+              <a:t>* **Numeracy** formalized quantitative invariants and abstract mapping.</a:t>
+            </a:r>
+          </a:p>
+          <a:p/>
+          <a:p>
+            <a:r>
+              <a:t>* **Algorithmacy** denotes the cognitive competency required to navigate triadic cooptive coordination: interacting with a counterpart through an active algorithmic mediator—a discourse deputy—that enforces its own objective function and continuously transforms the interaction space.</a:t>
+            </a:r>
+          </a:p>
+          <a:p/>
+          <a:p>
+            <a:r>
+              <a:t>**Layman's Explanation**</a:t>
+            </a:r>
+          </a:p>
+          <a:p>
+            <a:r>
+              <a:t>Oracy is talking face-to-face. Literacy is writing a letter: the paper never edits what you wrote while the recipient reads it. But algorithmacy is dealing with an active middleman. Think of a passenger, an Uber driver, and the dispatch algorithm: the app is not a passive sheet of paper. It sets prices, decides routes, evaluates ratings, and steers both humans simultaneously. Algorithmacy is the skill of handling that active third party.</a:t>
+            </a:r>
+          </a:p>
+        </p:txBody>
+      </p:sp>
+      <p:sp>
+        <p:nvSpPr>
+          <p:cNvPr id="4" name="Slide Number Placeholder 3"/>
+          <p:cNvSpPr>
+            <a:spLocks noGrp="1"/>
+          </p:cNvSpPr>
+          <p:nvPr>
+            <p:ph type="sldNum" idx="5" sz="quarter"/>
+          </p:nvPr>
+        </p:nvSpPr>
+        <p:spPr/>
+      </p:sp>
+    </p:spTree>
+  </p:cSld>
+  <p:clrMapOvr>
+    <a:masterClrMapping/>
+  </p:clrMapOvr>
+</p:notes>
+</file>
+
+<file path=ppt/notesSlides/notesSlide20.xml><?xml version="1.0" encoding="utf-8"?>
+<p:notes xmlns:a="http://schemas.openxmlformats.org/drawingml/2006/main" xmlns:p="http://schemas.openxmlformats.org/presentationml/2006/main" xmlns:r="http://schemas.openxmlformats.org/officeDocument/2006/relationships">
+  <p:cSld>
+    <p:spTree>
+      <p:nvGrpSpPr>
+        <p:cNvPr id="1" name=""/>
+        <p:cNvGrpSpPr/>
+        <p:nvPr/>
+      </p:nvGrpSpPr>
+      <p:grpSpPr>
+        <a:xfrm>
+          <a:off x="0" y="0"/>
+          <a:ext cx="0" cy="0"/>
+          <a:chOff x="0" y="0"/>
+          <a:chExt cx="0" cy="0"/>
+        </a:xfrm>
+      </p:grpSpPr>
+      <p:sp>
+        <p:nvSpPr>
+          <p:cNvPr id="2" name="Slide Image Placeholder 1"/>
+          <p:cNvSpPr>
+            <a:spLocks noGrp="1"/>
+          </p:cNvSpPr>
+          <p:nvPr>
+            <p:ph type="sldImg" idx="2"/>
+          </p:nvPr>
+        </p:nvSpPr>
+        <p:spPr/>
+      </p:sp>
+      <p:sp>
+        <p:nvSpPr>
+          <p:cNvPr id="3" name="Notes Placeholder 2"/>
+          <p:cNvSpPr>
+            <a:spLocks noGrp="1"/>
+          </p:cNvSpPr>
+          <p:nvPr>
+            <p:ph type="body" idx="3" sz="quarter"/>
+          </p:nvPr>
+        </p:nvSpPr>
+        <p:spPr/>
+        <p:txBody>
+          <a:bodyPr/>
+          <a:lstStyle/>
+          <a:p>
+            <a:r>
+              <a:t>**Technical Presentation**</a:t>
+            </a:r>
+          </a:p>
+          <a:p>
+            <a:r>
+              <a:t>We have pointed the instrument at real people once: two people's gaze, one step at a time. Coded per person, the streams factor; coded as a shared region, they integrate. The registered result: the verdict depends on the coder.</a:t>
+            </a:r>
+          </a:p>
+          <a:p/>
+          <a:p>
+            <a:r>
+              <a:t>**Layman's Explanation**</a:t>
+            </a:r>
+          </a:p>
+          <a:p>
+            <a:r>
+              <a:t>Every line is a door. Bring a dataset, a workplace, a bigger committee.</a:t>
+            </a:r>
+          </a:p>
+        </p:txBody>
+      </p:sp>
+      <p:sp>
+        <p:nvSpPr>
+          <p:cNvPr id="4" name="Slide Number Placeholder 3"/>
+          <p:cNvSpPr>
+            <a:spLocks noGrp="1"/>
+          </p:cNvSpPr>
+          <p:nvPr>
+            <p:ph type="sldNum" idx="5" sz="quarter"/>
+          </p:nvPr>
+        </p:nvSpPr>
+        <p:spPr/>
+      </p:sp>
+    </p:spTree>
+  </p:cSld>
+  <p:clrMapOvr>
+    <a:masterClrMapping/>
+  </p:clrMapOvr>
+</p:notes>
+</file>
+
+<file path=ppt/notesSlides/notesSlide21.xml><?xml version="1.0" encoding="utf-8"?>
+<p:notes xmlns:a="http://schemas.openxmlformats.org/drawingml/2006/main" xmlns:p="http://schemas.openxmlformats.org/presentationml/2006/main" xmlns:r="http://schemas.openxmlformats.org/officeDocument/2006/relationships">
+  <p:cSld>
+    <p:spTree>
+      <p:nvGrpSpPr>
+        <p:cNvPr id="1" name=""/>
+        <p:cNvGrpSpPr/>
+        <p:nvPr/>
+      </p:nvGrpSpPr>
+      <p:grpSpPr>
+        <a:xfrm>
+          <a:off x="0" y="0"/>
+          <a:ext cx="0" cy="0"/>
+          <a:chOff x="0" y="0"/>
+          <a:chExt cx="0" cy="0"/>
+        </a:xfrm>
+      </p:grpSpPr>
+      <p:sp>
+        <p:nvSpPr>
+          <p:cNvPr id="2" name="Slide Image Placeholder 1"/>
+          <p:cNvSpPr>
+            <a:spLocks noGrp="1"/>
+          </p:cNvSpPr>
+          <p:nvPr>
+            <p:ph type="sldImg" idx="2"/>
+          </p:nvPr>
+        </p:nvSpPr>
+        <p:spPr/>
+      </p:sp>
+      <p:sp>
+        <p:nvSpPr>
+          <p:cNvPr id="3" name="Notes Placeholder 2"/>
+          <p:cNvSpPr>
+            <a:spLocks noGrp="1"/>
+          </p:cNvSpPr>
+          <p:nvPr>
+            <p:ph type="body" idx="3" sz="quarter"/>
+          </p:nvPr>
+        </p:nvSpPr>
+        <p:spPr/>
+        <p:txBody>
+          <a:bodyPr/>
+          <a:lstStyle/>
+          <a:p>
+            <a:r>
+              <a:t>[Live. Type the audience's sentence into Claude Code with talk/LIVE_SESSION.md loaded. Read three lines aloud: whole or factors, the core, who is set by two others. If the laptop or the network fails, show slide 22.]</a:t>
+            </a:r>
+          </a:p>
+          <a:p/>
+          <a:p>
+            <a:r>
+              <a:t>An arrangement from your own work: three or four parties, who acts on whom. What questions are you interested in?</a:t>
+            </a:r>
+          </a:p>
+        </p:txBody>
+      </p:sp>
+      <p:sp>
+        <p:nvSpPr>
+          <p:cNvPr id="4" name="Slide Number Placeholder 3"/>
+          <p:cNvSpPr>
+            <a:spLocks noGrp="1"/>
+          </p:cNvSpPr>
+          <p:nvPr>
+            <p:ph type="sldNum" idx="5" sz="quarter"/>
+          </p:nvPr>
+        </p:nvSpPr>
+        <p:spPr/>
+      </p:sp>
+    </p:spTree>
+  </p:cSld>
+  <p:clrMapOvr>
+    <a:masterClrMapping/>
+  </p:clrMapOvr>
+</p:notes>
+</file>
+
+<file path=ppt/notesSlides/notesSlide22.xml><?xml version="1.0" encoding="utf-8"?>
+<p:notes xmlns:a="http://schemas.openxmlformats.org/drawingml/2006/main" xmlns:p="http://schemas.openxmlformats.org/presentationml/2006/main" xmlns:r="http://schemas.openxmlformats.org/officeDocument/2006/relationships">
+  <p:cSld>
+    <p:spTree>
+      <p:nvGrpSpPr>
+        <p:cNvPr id="1" name=""/>
+        <p:cNvGrpSpPr/>
+        <p:nvPr/>
+      </p:nvGrpSpPr>
+      <p:grpSpPr>
+        <a:xfrm>
+          <a:off x="0" y="0"/>
+          <a:ext cx="0" cy="0"/>
+          <a:chOff x="0" y="0"/>
+          <a:chExt cx="0" cy="0"/>
+        </a:xfrm>
+      </p:grpSpPr>
+      <p:sp>
+        <p:nvSpPr>
+          <p:cNvPr id="2" name="Slide Image Placeholder 1"/>
+          <p:cNvSpPr>
+            <a:spLocks noGrp="1"/>
+          </p:cNvSpPr>
+          <p:nvPr>
+            <p:ph type="sldImg" idx="2"/>
+          </p:nvPr>
+        </p:nvSpPr>
+        <p:spPr/>
+      </p:sp>
+      <p:sp>
+        <p:nvSpPr>
+          <p:cNvPr id="3" name="Notes Placeholder 2"/>
+          <p:cNvSpPr>
+            <a:spLocks noGrp="1"/>
+          </p:cNvSpPr>
+          <p:nvPr>
+            <p:ph type="body" idx="3" sz="quarter"/>
+          </p:nvPr>
+        </p:nvSpPr>
+        <p:spPr/>
+        <p:txBody>
+          <a:bodyPr/>
+          <a:lstStyle/>
+          <a:p>
+            <a:r>
+              <a:t>[Not spoken unless the live session fails. Read the row that matches the question asked.]</a:t>
+            </a:r>
+          </a:p>
+        </p:txBody>
+      </p:sp>
+      <p:sp>
+        <p:nvSpPr>
+          <p:cNvPr id="4" name="Slide Number Placeholder 3"/>
+          <p:cNvSpPr>
+            <a:spLocks noGrp="1"/>
+          </p:cNvSpPr>
+          <p:nvPr>
+            <p:ph type="sldNum" idx="5" sz="quarter"/>
+          </p:nvPr>
+        </p:nvSpPr>
+        <p:spPr/>
+      </p:sp>
+    </p:spTree>
+  </p:cSld>
+  <p:clrMapOvr>
+    <a:masterClrMapping/>
+  </p:clrMapOvr>
+</p:notes>
+</file>
+
+<file path=ppt/notesSlides/notesSlide23.xml><?xml version="1.0" encoding="utf-8"?>
+<p:notes xmlns:a="http://schemas.openxmlformats.org/drawingml/2006/main" xmlns:p="http://schemas.openxmlformats.org/presentationml/2006/main" xmlns:r="http://schemas.openxmlformats.org/officeDocument/2006/relationships">
+  <p:cSld>
+    <p:spTree>
+      <p:nvGrpSpPr>
+        <p:cNvPr id="1" name=""/>
+        <p:cNvGrpSpPr/>
+        <p:nvPr/>
+      </p:nvGrpSpPr>
+      <p:grpSpPr>
+        <a:xfrm>
+          <a:off x="0" y="0"/>
+          <a:ext cx="0" cy="0"/>
+          <a:chOff x="0" y="0"/>
+          <a:chExt cx="0" cy="0"/>
+        </a:xfrm>
+      </p:grpSpPr>
+      <p:sp>
+        <p:nvSpPr>
+          <p:cNvPr id="2" name="Slide Image Placeholder 1"/>
+          <p:cNvSpPr>
+            <a:spLocks noGrp="1"/>
+          </p:cNvSpPr>
+          <p:nvPr>
+            <p:ph type="sldImg" idx="2"/>
+          </p:nvPr>
+        </p:nvSpPr>
+        <p:spPr/>
+      </p:sp>
+      <p:sp>
+        <p:nvSpPr>
+          <p:cNvPr id="3" name="Notes Placeholder 2"/>
+          <p:cNvSpPr>
+            <a:spLocks noGrp="1"/>
+          </p:cNvSpPr>
+          <p:nvPr>
+            <p:ph type="body" idx="3" sz="quarter"/>
+          </p:nvPr>
+        </p:nvSpPr>
+        <p:spPr/>
+        <p:txBody>
+          <a:bodyPr/>
+          <a:lstStyle/>
+          <a:p>
+            <a:r>
+              <a:t>[Not spoken. Leave this up during questions, or skip it.]</a:t>
             </a:r>
           </a:p>
         </p:txBody>
@@ -1644,49 +2000,23 @@
           <a:lstStyle/>
           <a:p>
             <a:r>
-              <a:t>Every one of those words rests on a claim about what exists. Literacy only makes sense if texts are a</a:t>
-            </a:r>
-          </a:p>
-          <a:p>
-            <a:r>
-              <a:t>kind of thing. Algorithmacy only makes sense if triads are a kind of thing. So the question is</a:t>
-            </a:r>
-          </a:p>
-          <a:p>
-            <a:r>
-              <a:t>ontological. Do triads reduce to dyads?</a:t>
+              <a:t>**Technical Presentation**</a:t>
+            </a:r>
+          </a:p>
+          <a:p>
+            <a:r>
+              <a:t>Every communicative competency presupposes the ontological autonomy of its target medium: literacy is meaningful only because texts are physically and semiotically real. Consequently, algorithmacy is coherent only if genuine triadic relations constitute an irreducible category of being. If all triadic coordination factorizes into compositions of dyadic projections, algorithmic mediation dissolves into pairwise transmission channels, leaving algorithmacy without an autonomous target. We trace this boundary across Charles Sanders Peirce, Willard Van Orman Quine, relational clone theory, and causal information theory.</a:t>
             </a:r>
           </a:p>
           <a:p/>
           <a:p>
             <a:r>
-              <a:t>If they do, then any three-way coordination is just two pairs stacked together. Navigating it takes</a:t>
-            </a:r>
-          </a:p>
-          <a:p>
-            <a:r>
-              <a:t>nothing more than navigating pairs, and algorithmacy is not a thing. If some triads do not reduce, then</a:t>
-            </a:r>
-          </a:p>
-          <a:p>
-            <a:r>
-              <a:t>algorithmacy has a target of its own.</a:t>
-            </a:r>
-          </a:p>
-          <a:p/>
-          <a:p>
-            <a:r>
-              <a:t>Philosophy has argued about exactly this question. I'll take you through Peirce, who said triads are</a:t>
-            </a:r>
-          </a:p>
-          <a:p>
-            <a:r>
-              <a:t>irreducible; Quine, whose logic seemed to show they are not; the logicians who worked out who was right;</a:t>
-            </a:r>
-          </a:p>
-          <a:p>
-            <a:r>
-              <a:t>and then our own argument.</a:t>
+              <a:t>**Layman's Explanation**</a:t>
+            </a:r>
+          </a:p>
+          <a:p>
+            <a:r>
+              <a:t>Does a three-way relationship actually exist on its own, or is it just two pairs glued together? Consider a three-legged stool: you cannot explain why it stands by testing pairs of legs in isolation; the stability exists only when all three work together at once. If three-way coordination is just two pairs stacked together, then learning to read text is all we need. If genuine three-way coordination is real and indivisible, we need a new framework.</a:t>
             </a:r>
           </a:p>
         </p:txBody>
@@ -1756,27 +2086,41 @@
           <a:lstStyle/>
           <a:p>
             <a:r>
-              <a:t>Charles Sanders Peirce built his philosophy on three categories. Firstness is quality, what a thing is</a:t>
-            </a:r>
-          </a:p>
-          <a:p>
-            <a:r>
-              <a:t>"regardless of aught else" — the redness of red, before it touches anything. Secondness is reaction, one</a:t>
-            </a:r>
-          </a:p>
-          <a:p>
-            <a:r>
-              <a:t>thing pushing against another: "cause and effect are two", he wrote. Thirdness is mediation, "the medium</a:t>
-            </a:r>
-          </a:p>
-          <a:p>
-            <a:r>
-              <a:t>or connecting bond between the absolute first and last". A sign that stands between a thing and the mind</a:t>
-            </a:r>
-          </a:p>
-          <a:p>
-            <a:r>
-              <a:t>that reads it. A law that connects a cause to its effect. A contract that binds two people to each other.</a:t>
+              <a:t>**Technical Presentation**</a:t>
+            </a:r>
+          </a:p>
+          <a:p>
+            <a:r>
+              <a:t>Charles Sanders Peirce structured his phenomenological and relational ontology upon three universal categories:</a:t>
+            </a:r>
+          </a:p>
+          <a:p/>
+          <a:p>
+            <a:r>
+              <a:t>* **Firstness** is monadic potentiality and immediate quality—what an entity is "regardless of aught else," formalizable as unary selection or uncoupled entropy.</a:t>
+            </a:r>
+          </a:p>
+          <a:p/>
+          <a:p>
+            <a:r>
+              <a:t>* **Secondness** is dyadic actuality and brute physical reaction—two terms locked in direct reciprocal resistance, where "cause and effect are two".</a:t>
+            </a:r>
+          </a:p>
+          <a:p/>
+          <a:p>
+            <a:r>
+              <a:t>* **Thirdness** is triadic mediation, law, and representation—"the medium or connecting bond between the absolute first and last," instantiated by the irreducible sign-object-interpretant relation.</a:t>
+            </a:r>
+          </a:p>
+          <a:p/>
+          <a:p>
+            <a:r>
+              <a:t>**Layman's Explanation**</a:t>
+            </a:r>
+          </a:p>
+          <a:p>
+            <a:r>
+              <a:t>Peirce argued that everything in reality falls into three buckets. Firstness is a pure, isolated quality, like seeing the color red in a dream. Secondness is direct, physical collision, like your bumper hitting a brick wall—two things pushing on each other. Thirdness is a traffic rule: the legal requirement that connects the red light to your foot pressing the brake. A law or a meaning cannot be described by raw collisions alone; the connecting rule is real.</a:t>
             </a:r>
           </a:p>
         </p:txBody>
@@ -1846,33 +2190,40 @@
           <a:lstStyle/>
           <a:p>
             <a:r>
-              <a:t>Peirce's central claim is that Thirdness is its own kind of being. A genuine triad, he wrote, is one whose</a:t>
-            </a:r>
-          </a:p>
-          <a:p>
-            <a:r>
-              <a:t>"three members are bound together by it in a way that does not consist in any complexus of dyadic</a:t>
-            </a:r>
-          </a:p>
-          <a:p>
-            <a:r>
-              <a:t>relations". You cannot build it out of pairs.</a:t>
+              <a:t>**Technical Presentation**</a:t>
+            </a:r>
+          </a:p>
+          <a:p>
+            <a:r>
+              <a:t>In 1870, Peirce formulated the Peircean Reduction Thesis (PRT): a genuine triad binds its members "in a way that does not consist in any complexus of dyadic relations". The thesis asserts two asymmetric claims:</a:t>
             </a:r>
           </a:p>
           <a:p/>
           <a:p>
             <a:r>
-              <a:t>He first stated the thesis, without proof, in 1870, and it has two halves. No triad can be built from</a:t>
-            </a:r>
-          </a:p>
-          <a:p>
-            <a:r>
-              <a:t>dyads. And every relation among four or more things can be built from triads. So three is enough to build</a:t>
-            </a:r>
-          </a:p>
-          <a:p>
-            <a:r>
-              <a:t>everything, and nothing less will do. He argued for it later, in three ways.</a:t>
+              <a:t>1. No genuine triadic relation can be synthesized solely from monadic and dyadic relations.</a:t>
+            </a:r>
+          </a:p>
+          <a:p/>
+          <a:p>
+            <a:r>
+              <a:t>2. Every polyadic relation of arity $n \ge 3$ can be generated by compositions of triads.</a:t>
+            </a:r>
+          </a:p>
+          <a:p>
+            <a:r>
+              <a:t>Triadicity is generative, universal, and join-complete; relations of arity $n \ge 4$ require no primitive higher-order operations beyond triadic branching.</a:t>
+            </a:r>
+          </a:p>
+          <a:p/>
+          <a:p>
+            <a:r>
+              <a:t>**Layman's Explanation**</a:t>
+            </a:r>
+          </a:p>
+          <a:p>
+            <a:r>
+              <a:t>Peirce claimed that "three" is the magic number of the universe. You can never build a genuine three-way relationship out of simple two-way connections. But once you have true three-way connectors, you can assemble networks of any size or complexity—four-way, ten-way, or a million-way. Three is the fundamental building block; anything less is insufficient.</a:t>
             </a:r>
           </a:p>
         </p:txBody>
@@ -1942,28 +2293,23 @@
           <a:lstStyle/>
           <a:p>
             <a:r>
-              <a:t>The first argument is an example. "A gives B to C." Peirce writes: "This does not consist in A's throwing</a:t>
-            </a:r>
-          </a:p>
-          <a:p>
-            <a:r>
-              <a:t>B away and its accidentally hitting C". If that were all that happened, it would be "merely one dyadic</a:t>
-            </a:r>
-          </a:p>
-          <a:p>
-            <a:r>
-              <a:t>relation followed by another". A throws. The thing hits. Two pairs.</a:t>
+              <a:t>**Technical Presentation**</a:t>
+            </a:r>
+          </a:p>
+          <a:p>
+            <a:r>
+              <a:t>Peirce illustrates the irreducibility of Thirdness using the ternary proposition $\text{gives}(A, B, C)$. He demonstrates that an intentional transaction cannot be decomposed into sequential dyadic physical events, such as $A$ throwing object $B$ and $B$ subsequently colliding with recipient $C$. That physical sequence constitutes "merely one dyadic relation followed by another". Genuine giving transfers legal rights and intentional status, binding giver, gift, and recipient into a single non-factorizable fact.</a:t>
             </a:r>
           </a:p>
           <a:p/>
           <a:p>
             <a:r>
-              <a:t>Giving is different. Giving transfers a right. The giver, the gift and the receiver are held in one fact,</a:t>
-            </a:r>
-          </a:p>
-          <a:p>
-            <a:r>
-              <a:t>and no sequence of two-party events adds up to it.</a:t>
+              <a:t>**Layman's Explanation**</a:t>
+            </a:r>
+          </a:p>
+          <a:p>
+            <a:r>
+              <a:t>Imagine I hand you a gift. That is a legal and social transfer of ownership. Now imagine I toss an apple out of a window, and it accidentally bounces off your head. In both cases, an apple left my hand and touched you. But the second scenario is just two physical accidents chained together. Genuine gift-giving requires all three parties—giver, gift, and receiver—to be united under a single mutual understanding.</a:t>
             </a:r>
           </a:p>
         </p:txBody>
@@ -2033,38 +2379,59 @@
           <a:lstStyle/>
           <a:p>
             <a:r>
-              <a:t>The second argument is arithmetic. Peirce drew relations as spots with tails, one tail for each place.</a:t>
-            </a:r>
-          </a:p>
-          <a:p>
-            <a:r>
-              <a:t>A quality has one tail. A pair has two. When you join two relations, you tie a tail of one to a tail of</a:t>
-            </a:r>
-          </a:p>
-          <a:p>
-            <a:r>
-              <a:t>the other, and those two tails disappear. So joining two pairs gives two plus two minus two: a pair</a:t>
-            </a:r>
-          </a:p>
-          <a:p>
-            <a:r>
-              <a:t>again. However many pairs you chain, "you can never by such joining make a graph with three tails".</a:t>
+              <a:t>**Technical Presentation**</a:t>
+            </a:r>
+          </a:p>
+          <a:p>
+            <a:r>
+              <a:t>Peirce formalized his topological valency calculus using graphical representations of relations. A monadic property possesses one external bond, a dyad possesses two, and a triad possesses three. Splicing two relations via relative product consumes two free bonds—one from each factor:</a:t>
             </a:r>
           </a:p>
           <a:p/>
           <a:p>
             <a:r>
-              <a:t>Triads behave differently. Three plus three minus two is four, and from there you can reach anything. In</a:t>
-            </a:r>
-          </a:p>
-          <a:p>
-            <a:r>
-              <a:t>1897 he put it in one line: "artiads, or even-ads, can produce only artiads". Even plus even minus two</a:t>
-            </a:r>
-          </a:p>
-          <a:p>
-            <a:r>
-              <a:t>stays even, forever.</a:t>
+              <a:t>$$2 + 2 - 2 = 2$$</a:t>
+            </a:r>
+          </a:p>
+          <a:p/>
+          <a:p>
+            <a:r>
+              <a:t>Chaining arbitrary even-valency relations ("artiads") strictly conserves even valency, permanently restricting compositions to linear paths or isolated cycles. Triadic composition, however, yields:</a:t>
+            </a:r>
+          </a:p>
+          <a:p/>
+          <a:p>
+            <a:r>
+              <a:t>$$3 + 3 - 2 = 4$$</a:t>
+            </a:r>
+          </a:p>
+          <a:p/>
+          <a:p>
+            <a:r>
+              <a:t>This allows the construction of arbitrary relational topologies.</a:t>
+            </a:r>
+          </a:p>
+          <a:p/>
+          <a:p>
+            <a:r>
+              <a:t>A classical mechanical counterargument suggests that allowing three dyadic bonds to intersect at a shared point generates a triad from binary lines. Peirce refuted this by showing that the intersection node is itself an active relation: "every node of bonds is equivalent to a relative". Alfred Kempe attempted to eliminate triads in 1886 by replacing them with configurations of binary links. Peirce demonstrated that Kempe had merely relocated the triad into the graphic attachment points—the primitive teridentity operator that synchronizes three distinct coordinates.</a:t>
+            </a:r>
+          </a:p>
+          <a:p/>
+          <a:p>
+            <a:r>
+              <a:t>**Layman's Explanation**</a:t>
+            </a:r>
+          </a:p>
+          <a:p>
+            <a:r>
+              <a:t>Think of plumbing pipes. If you take straight pipes that each have two open ends, no matter how many you glue together, the finished line still only has two open ends. You can make long lines or closed loops, but you can never make a branch. To split a water line into a new direction, you need a T-junction pipe with three openings. Two-ended parts only produce two-ended systems.</a:t>
+            </a:r>
+          </a:p>
+          <a:p/>
+          <a:p>
+            <a:r>
+              <a:t>A skeptic might argue: "Look at a three-way road intersection; it is just three separate roads meeting in the middle!" Peirce responded that the middle of the intersection is not empty space—it is a roundabout or traffic light that coordinates all three roads simultaneously. You did not eliminate the triad; you just swept it into the middle of the intersection.</a:t>
             </a:r>
           </a:p>
         </p:txBody>
@@ -2134,48 +2501,41 @@
           <a:lstStyle/>
           <a:p>
             <a:r>
-              <a:t>The third argument concerns a place where three lines meet. If you let three tails meet at one point,</a:t>
-            </a:r>
-          </a:p>
-          <a:p>
-            <a:r>
-              <a:t>haven't you built a triad out of pairs? Peirce's answer: the meeting point is itself a relation. "Every</a:t>
-            </a:r>
-          </a:p>
-          <a:p>
-            <a:r>
-              <a:t>node of bonds is equivalent to a relative."</a:t>
+              <a:t>**Technical Presentation**</a:t>
+            </a:r>
+          </a:p>
+          <a:p>
+            <a:r>
+              <a:t>That junction has an algebraic name, the **teridentity relation**:</a:t>
             </a:r>
           </a:p>
           <a:p/>
           <a:p>
             <a:r>
-              <a:t>Alfred Kempe's memoir of 1886 did exactly what that question suggests. It redrew a triad as a small unit</a:t>
-            </a:r>
-          </a:p>
-          <a:p>
-            <a:r>
-              <a:t>with three plain links, so that nothing three-place appears. Kempe never mentioned Peirce, but Peirce saw</a:t>
-            </a:r>
-          </a:p>
-          <a:p>
-            <a:r>
-              <a:t>the danger and called it "a formidable objection". In 1892 he conceded that Kempe's diagrams could express</a:t>
-            </a:r>
-          </a:p>
-          <a:p>
-            <a:r>
-              <a:t>giving, and modified his position without surrendering it: the mediation is still there, in "the</a:t>
-            </a:r>
-          </a:p>
-          <a:p>
-            <a:r>
-              <a:t>attachment of lines to spots", and in an abstraction the diagram never shows being made. Hold on to that</a:t>
-            </a:r>
-          </a:p>
-          <a:p>
-            <a:r>
-              <a:t>point about the junction. It comes back.</a:t>
+              <a:t>$$=_3 \; \equiv \{(x, x, x) \mid x \in A\}$$</a:t>
+            </a:r>
+          </a:p>
+          <a:p/>
+          <a:p>
+            <a:r>
+              <a:t>Robert Burch (1991) formalized Peircean Algebraic Logic (PAL), demonstrating algebraically that over a closed, fixed universe without domain expansion, dyadic relations cannot generate ternary relations under primitive positive logic.</a:t>
+            </a:r>
+          </a:p>
+          <a:p/>
+          <a:p>
+            <a:r>
+              <a:t>Over fixed domains, the three-way junction is join-irreducible.</a:t>
+            </a:r>
+          </a:p>
+          <a:p/>
+          <a:p>
+            <a:r>
+              <a:t>**Layman's Explanation**</a:t>
+            </a:r>
+          </a:p>
+          <a:p>
+            <a:r>
+              <a:t>Modern algebra proved the exact mechanism. To coordinate three things, you need a "three-way identity switch"—a rule saying three different points must hold the exact same value simultaneously. Standard math formulas cheat by writing the variable letter $x$ three times in one equation and pretending that is not a three-way relation. It is. The moment you forbid that hidden trick, two-way wires can never build a three-way junction.</a:t>
             </a:r>
           </a:p>
         </p:txBody>
@@ -2245,27 +2605,65 @@
           <a:lstStyle/>
           <a:p>
             <a:r>
-              <a:t>Georg Simmel reached the same step from the sociology of groups. In a pair, when one member refuses,</a:t>
-            </a:r>
-          </a:p>
-          <a:p>
-            <a:r>
-              <a:t>"only the other remains". Add a third and something new appears: "each pair of elements are now joined by</a:t>
-            </a:r>
-          </a:p>
-          <a:p>
-            <a:r>
-              <a:t>a broken line", a route that runs through the third. But Simmel also saw that three people are not</a:t>
-            </a:r>
-          </a:p>
-          <a:p>
-            <a:r>
-              <a:t>automatically a triad. A third too distant from the other two leaves only "configurations of twos". So the</a:t>
-            </a:r>
-          </a:p>
-          <a:p>
-            <a:r>
-              <a:t>count of three is necessary, and it is not enough. That was the case for triads. Now the case against.</a:t>
+              <a:t>**Technical Presentation**</a:t>
+            </a:r>
+          </a:p>
+          <a:p>
+            <a:r>
+              <a:t>In 1954, Willard Van Orman Quine published a mathematical proof demonstrating that any formal theory expressible in first-order logic can be rewritten using only a single dyadic predicate, denoted $J$. Quine accomplished this by:</a:t>
+            </a:r>
+          </a:p>
+          <a:p/>
+          <a:p>
+            <a:r>
+              <a:t>* Compressing arguments into nested ordered pairs via Wiener-Kuratowski definitions.</a:t>
+            </a:r>
+          </a:p>
+          <a:p/>
+          <a:p>
+            <a:r>
+              <a:t>* Reifying polyadic relations as abstract individuals.</a:t>
+            </a:r>
+          </a:p>
+          <a:p/>
+          <a:p>
+            <a:r>
+              <a:t>* Expanding the universe of discourse to include an infinite hierarchy of sets of pairs, paralleling Leopold Löwenheim’s 1915 construction.</a:t>
+            </a:r>
+          </a:p>
+          <a:p/>
+          <a:p>
+            <a:r>
+              <a:t>The mechanics of Quine's translation are transparent. A ternary proposition like $\text{gives}(A, B, C)$ is packed as:</a:t>
+            </a:r>
+          </a:p>
+          <a:p/>
+          <a:p>
+            <a:r>
+              <a:t>$$\langle\text{tag}, A, \langle B, C\rangle\rangle \in J$$</a:t>
+            </a:r>
+          </a:p>
+          <a:p/>
+          <a:p>
+            <a:r>
+              <a:t>The original triadic fact is converted into an assertion of dyadic membership over an inflated domain. By recursively applying this procedure across all relations, every polyadic structure dissolves into an individual tuple embedded within an expanded universe of sets.</a:t>
+            </a:r>
+          </a:p>
+          <a:p/>
+          <a:p>
+            <a:r>
+              <a:t>**Layman's Explanation**</a:t>
+            </a:r>
+          </a:p>
+          <a:p>
+            <a:r>
+              <a:t>In 1954, the famous philosopher Willard Van Orman Quine delivered what looked like a fatal blow to Peirce's theory. He showed a clever mathematical trick: if you bundle multiple pieces of information into pairs of nested envelopes, you can re-write any complex relationship in the world using just a single two-place relationship: "Does Envelope X contain Envelope Y?" It appeared that three-way relationships had been eliminated.</a:t>
+            </a:r>
+          </a:p>
+          <a:p/>
+          <a:p>
+            <a:r>
+              <a:t>Here is how Quine pulled it off: take "Alice gives a book to Bob". First, he packs "the book" and "Bob" into an envelope labeled "Target". Then he packs "Alice" and the "Target" envelope into a bigger envelope labeled "Giving Event". Now, you only ever ask two-item questions: "Is Alice inside the Giving envelope?" Quine replaced genuine three-way coordination with nested Russian nesting dolls.</a:t>
             </a:r>
           </a:p>
         </p:txBody>
@@ -5287,8 +5685,8 @@
         </p:nvSpPr>
         <p:spPr>
           <a:xfrm>
-            <a:off x="822960" y="2011680"/>
-            <a:ext cx="10545775" cy="1463040"/>
+            <a:off x="822960" y="1463040"/>
+            <a:ext cx="10545775" cy="365760"/>
           </a:xfrm>
           <a:prstGeom prst="rect">
             <a:avLst/>
@@ -5307,13 +5705,13 @@
               </a:spcBef>
             </a:pPr>
             <a:r>
-              <a:rPr sz="4400" b="1" i="0">
-                <a:solidFill>
-                  <a:srgbClr val="000000"/>
-                </a:solidFill>
-                <a:latin typeface="Arial"/>
-              </a:rPr>
-              <a:t>Do Triads Reduce to Dyads?</a:t>
+              <a:rPr sz="1400" b="0" i="0">
+                <a:solidFill>
+                  <a:srgbClr val="000000"/>
+                </a:solidFill>
+                <a:latin typeface="Arial"/>
+              </a:rPr>
+              <a:t>RELATIONAL ALGEBRA • IIT 4.0 • PID</a:t>
             </a:r>
           </a:p>
         </p:txBody>
@@ -5326,8 +5724,8 @@
         </p:nvSpPr>
         <p:spPr>
           <a:xfrm>
-            <a:off x="822960" y="3749039"/>
-            <a:ext cx="10545775" cy="2194560"/>
+            <a:off x="822960" y="1920240"/>
+            <a:ext cx="10545775" cy="1097280"/>
           </a:xfrm>
           <a:prstGeom prst="rect">
             <a:avLst/>
@@ -5335,6 +5733,45 @@
           <a:noFill/>
         </p:spPr>
         <p:txBody>
+          <a:bodyPr wrap="square" anchor="b" lIns="0" rIns="0" tIns="0" bIns="0">
+            <a:spAutoFit/>
+          </a:bodyPr>
+          <a:lstStyle/>
+          <a:p>
+            <a:pPr algn="l">
+              <a:spcBef>
+                <a:spcPts val="0"/>
+              </a:spcBef>
+            </a:pPr>
+            <a:r>
+              <a:rPr sz="4400" b="1" i="0">
+                <a:solidFill>
+                  <a:srgbClr val="000000"/>
+                </a:solidFill>
+                <a:latin typeface="Arial"/>
+              </a:rPr>
+              <a:t>Do Triads Reduce to Dyads?</a:t>
+            </a:r>
+          </a:p>
+        </p:txBody>
+      </p:sp>
+      <p:sp>
+        <p:nvSpPr>
+          <p:cNvPr id="4" name="TextBox 3"/>
+          <p:cNvSpPr txBox="1"/>
+          <p:nvPr/>
+        </p:nvSpPr>
+        <p:spPr>
+          <a:xfrm>
+            <a:off x="822960" y="3291840"/>
+            <a:ext cx="10545775" cy="2743200"/>
+          </a:xfrm>
+          <a:prstGeom prst="rect">
+            <a:avLst/>
+          </a:prstGeom>
+          <a:noFill/>
+        </p:spPr>
+        <p:txBody>
           <a:bodyPr wrap="square" anchor="t" lIns="0" rIns="0" tIns="0" bIns="0">
             <a:spAutoFit/>
           </a:bodyPr>
@@ -5352,13 +5789,13 @@
                 </a:solidFill>
                 <a:latin typeface="Arial"/>
               </a:rPr>
-              <a:t>The Ontology of Algorithmacy</a:t>
-            </a:r>
-          </a:p>
-          <a:p>
-            <a:pPr algn="l">
-              <a:spcBef>
-                <a:spcPts val="1400"/>
+              <a:t>The Peircean Reduction Thesis, Quine’s Fallacy, and the Mathematical Foundations of Algorithmacy.</a:t>
+            </a:r>
+          </a:p>
+          <a:p>
+            <a:pPr algn="l">
+              <a:spcBef>
+                <a:spcPts val="1600"/>
               </a:spcBef>
             </a:pPr>
             <a:r>
@@ -5368,7 +5805,23 @@
                 </a:solidFill>
                 <a:latin typeface="Arial"/>
               </a:rPr>
-              <a:t>ALGOCON · Port of Spain · October 2026</a:t>
+              <a:t>ALGOCON • Port of Spain • October 2026</a:t>
+            </a:r>
+          </a:p>
+          <a:p>
+            <a:pPr algn="l">
+              <a:spcBef>
+                <a:spcPts val="400"/>
+              </a:spcBef>
+            </a:pPr>
+            <a:r>
+              <a:rPr sz="2200" b="0" i="0">
+                <a:solidFill>
+                  <a:srgbClr val="000000"/>
+                </a:solidFill>
+                <a:latin typeface="Arial"/>
+              </a:rPr>
+              <a:t>Theoretical Computing Group</a:t>
             </a:r>
           </a:p>
         </p:txBody>
@@ -5407,8 +5860,8 @@
         </p:nvSpPr>
         <p:spPr>
           <a:xfrm>
-            <a:off x="822960" y="640080"/>
-            <a:ext cx="10545775" cy="1188720"/>
+            <a:off x="822960" y="502920"/>
+            <a:ext cx="10545775" cy="274320"/>
           </a:xfrm>
           <a:prstGeom prst="rect">
             <a:avLst/>
@@ -5416,7 +5869,7 @@
           <a:noFill/>
         </p:spPr>
         <p:txBody>
-          <a:bodyPr wrap="square" anchor="b" lIns="0" rIns="0" tIns="0" bIns="0">
+          <a:bodyPr wrap="square" anchor="t" lIns="0" rIns="0" tIns="0" bIns="0">
             <a:spAutoFit/>
           </a:bodyPr>
           <a:lstStyle/>
@@ -5427,13 +5880,13 @@
               </a:spcBef>
             </a:pPr>
             <a:r>
-              <a:rPr sz="3600" b="1" i="0">
-                <a:solidFill>
-                  <a:srgbClr val="000000"/>
-                </a:solidFill>
-                <a:latin typeface="Arial"/>
-              </a:rPr>
-              <a:t>Quine: one two-place predicate is enough</a:t>
+              <a:rPr sz="1400" b="0" i="0">
+                <a:solidFill>
+                  <a:srgbClr val="000000"/>
+                </a:solidFill>
+                <a:latin typeface="Arial"/>
+              </a:rPr>
+              <a:t>CRITICAL EXPOSURE</a:t>
             </a:r>
           </a:p>
         </p:txBody>
@@ -5446,8 +5899,8 @@
         </p:nvSpPr>
         <p:spPr>
           <a:xfrm>
-            <a:off x="822960" y="2103120"/>
-            <a:ext cx="10545775" cy="3931920"/>
+            <a:off x="822960" y="822960"/>
+            <a:ext cx="10545775" cy="1005840"/>
           </a:xfrm>
           <a:prstGeom prst="rect">
             <a:avLst/>
@@ -5466,61 +5919,132 @@
               </a:spcBef>
             </a:pPr>
             <a:r>
-              <a:rPr sz="2400" b="0" i="1">
-                <a:solidFill>
-                  <a:srgbClr val="000000"/>
-                </a:solidFill>
-                <a:latin typeface="Arial"/>
-              </a:rPr>
-              <a:t>there is only one predicate letter, and it a dyadic one</a:t>
-            </a:r>
-          </a:p>
-          <a:p>
-            <a:pPr algn="l">
-              <a:spcBef>
-                <a:spcPts val="1400"/>
-              </a:spcBef>
-            </a:pPr>
-            <a:r>
-              <a:rPr sz="1800" b="0" i="0">
-                <a:solidFill>
-                  <a:srgbClr val="000000"/>
-                </a:solidFill>
-                <a:latin typeface="Arial"/>
-              </a:rPr>
-              <a:t>— Quine, 1954</a:t>
-            </a:r>
-          </a:p>
-          <a:p>
-            <a:pPr algn="l">
-              <a:spcBef>
-                <a:spcPts val="1400"/>
-              </a:spcBef>
-            </a:pPr>
-            <a:r>
-              <a:rPr sz="2400" b="0" i="0">
-                <a:solidFill>
-                  <a:srgbClr val="000000"/>
-                </a:solidFill>
-                <a:latin typeface="Arial"/>
-              </a:rPr>
-              <a:t>Tools: "a fragment of set theory", ordered pairs, and a universe enlarged to contain them</a:t>
-            </a:r>
-          </a:p>
-          <a:p>
-            <a:pPr algn="l">
-              <a:spcBef>
-                <a:spcPts val="1400"/>
-              </a:spcBef>
-            </a:pPr>
-            <a:r>
-              <a:rPr sz="2400" b="0" i="0">
-                <a:solidFill>
-                  <a:srgbClr val="000000"/>
-                </a:solidFill>
-                <a:latin typeface="Arial"/>
-              </a:rPr>
-              <a:t>Löwenheim had done something similar in 1915.</a:t>
+              <a:rPr sz="3400" b="1" i="0">
+                <a:solidFill>
+                  <a:srgbClr val="000000"/>
+                </a:solidFill>
+                <a:latin typeface="Arial"/>
+              </a:rPr>
+              <a:t>Deconstructing Quine’s Fallacy</a:t>
+            </a:r>
+          </a:p>
+        </p:txBody>
+      </p:sp>
+      <p:sp>
+        <p:nvSpPr>
+          <p:cNvPr id="4" name="TextBox 3"/>
+          <p:cNvSpPr txBox="1"/>
+          <p:nvPr/>
+        </p:nvSpPr>
+        <p:spPr>
+          <a:xfrm>
+            <a:off x="822960" y="2011680"/>
+            <a:ext cx="10545775" cy="4297680"/>
+          </a:xfrm>
+          <a:prstGeom prst="rect">
+            <a:avLst/>
+          </a:prstGeom>
+          <a:noFill/>
+        </p:spPr>
+        <p:txBody>
+          <a:bodyPr wrap="square" anchor="t" lIns="0" rIns="0" tIns="0" bIns="0">
+            <a:spAutoFit/>
+          </a:bodyPr>
+          <a:lstStyle/>
+          <a:p>
+            <a:pPr algn="l">
+              <a:spcBef>
+                <a:spcPts val="0"/>
+              </a:spcBef>
+            </a:pPr>
+            <a:r>
+              <a:rPr sz="2200" b="1" i="0">
+                <a:solidFill>
+                  <a:srgbClr val="000000"/>
+                </a:solidFill>
+                <a:latin typeface="Arial"/>
+              </a:rPr>
+              <a:t>Domain Escalation</a:t>
+            </a:r>
+          </a:p>
+          <a:p>
+            <a:pPr algn="l">
+              <a:spcBef>
+                <a:spcPts val="400"/>
+              </a:spcBef>
+            </a:pPr>
+            <a:r>
+              <a:rPr sz="2200" b="0" i="0">
+                <a:solidFill>
+                  <a:srgbClr val="000000"/>
+                </a:solidFill>
+                <a:latin typeface="Arial"/>
+              </a:rPr>
+              <a:t>Infinite set-theoretic universes required.</a:t>
+            </a:r>
+          </a:p>
+          <a:p>
+            <a:pPr algn="l">
+              <a:spcBef>
+                <a:spcPts val="1600"/>
+              </a:spcBef>
+            </a:pPr>
+            <a:r>
+              <a:rPr sz="2200" b="1" i="0">
+                <a:solidFill>
+                  <a:srgbClr val="000000"/>
+                </a:solidFill>
+                <a:latin typeface="Arial"/>
+              </a:rPr>
+              <a:t>Smuggled Teridentity</a:t>
+            </a:r>
+          </a:p>
+          <a:p>
+            <a:pPr algn="l">
+              <a:spcBef>
+                <a:spcPts val="400"/>
+              </a:spcBef>
+            </a:pPr>
+            <a:r>
+              <a:rPr sz="2200" b="0" i="0">
+                <a:solidFill>
+                  <a:srgbClr val="000000"/>
+                </a:solidFill>
+                <a:latin typeface="Arial"/>
+              </a:rPr>
+              <a:t>Pairing functions hide teridentity.</a:t>
+            </a:r>
+          </a:p>
+          <a:p>
+            <a:pPr algn="l">
+              <a:spcBef>
+                <a:spcPts val="1600"/>
+              </a:spcBef>
+            </a:pPr>
+            <a:r>
+              <a:rPr sz="2200" b="1" i="0">
+                <a:solidFill>
+                  <a:srgbClr val="000000"/>
+                </a:solidFill>
+                <a:latin typeface="Arial"/>
+              </a:rPr>
+              <a:t>Fixed-Domain Failure</a:t>
+            </a:r>
+          </a:p>
+          <a:p>
+            <a:pPr algn="l">
+              <a:spcBef>
+                <a:spcPts val="400"/>
+              </a:spcBef>
+            </a:pPr>
+            <a:r>
+              <a:rPr sz="2200" b="0" i="0">
+                <a:solidFill>
+                  <a:srgbClr val="000000"/>
+                </a:solidFill>
+                <a:latin typeface="Arial"/>
+              </a:rPr>
+              <a:t>Reduction fails on domains.</a:t>
             </a:r>
           </a:p>
         </p:txBody>
@@ -5559,8 +6083,8 @@
         </p:nvSpPr>
         <p:spPr>
           <a:xfrm>
-            <a:off x="822960" y="640080"/>
-            <a:ext cx="10545775" cy="1188720"/>
+            <a:off x="822960" y="502920"/>
+            <a:ext cx="10545775" cy="274320"/>
           </a:xfrm>
           <a:prstGeom prst="rect">
             <a:avLst/>
@@ -5568,7 +6092,7 @@
           <a:noFill/>
         </p:spPr>
         <p:txBody>
-          <a:bodyPr wrap="square" anchor="b" lIns="0" rIns="0" tIns="0" bIns="0">
+          <a:bodyPr wrap="square" anchor="t" lIns="0" rIns="0" tIns="0" bIns="0">
             <a:spAutoFit/>
           </a:bodyPr>
           <a:lstStyle/>
@@ -5579,13 +6103,13 @@
               </a:spcBef>
             </a:pPr>
             <a:r>
-              <a:rPr sz="3600" b="1" i="0">
-                <a:solidFill>
-                  <a:srgbClr val="000000"/>
-                </a:solidFill>
-                <a:latin typeface="Arial"/>
-              </a:rPr>
-              <a:t>How the reduction works</a:t>
+              <a:rPr sz="1400" b="0" i="0">
+                <a:solidFill>
+                  <a:srgbClr val="000000"/>
+                </a:solidFill>
+                <a:latin typeface="Arial"/>
+              </a:rPr>
+              <a:t>MATHEMATICAL RESOLUTION</a:t>
             </a:r>
           </a:p>
         </p:txBody>
@@ -5598,8 +6122,8 @@
         </p:nvSpPr>
         <p:spPr>
           <a:xfrm>
-            <a:off x="822960" y="2103120"/>
-            <a:ext cx="10545775" cy="3931920"/>
+            <a:off x="822960" y="822960"/>
+            <a:ext cx="10545775" cy="1005840"/>
           </a:xfrm>
           <a:prstGeom prst="rect">
             <a:avLst/>
@@ -5618,19 +6142,90 @@
               </a:spcBef>
             </a:pPr>
             <a:r>
+              <a:rPr sz="3400" b="1" i="0">
+                <a:solidFill>
+                  <a:srgbClr val="000000"/>
+                </a:solidFill>
+                <a:latin typeface="Arial"/>
+              </a:rPr>
+              <a:t>Relational Co-Clones and Expressive Power</a:t>
+            </a:r>
+          </a:p>
+        </p:txBody>
+      </p:sp>
+      <p:sp>
+        <p:nvSpPr>
+          <p:cNvPr id="4" name="TextBox 3"/>
+          <p:cNvSpPr txBox="1"/>
+          <p:nvPr/>
+        </p:nvSpPr>
+        <p:spPr>
+          <a:xfrm>
+            <a:off x="822960" y="2011680"/>
+            <a:ext cx="10545775" cy="4297680"/>
+          </a:xfrm>
+          <a:prstGeom prst="rect">
+            <a:avLst/>
+          </a:prstGeom>
+          <a:noFill/>
+        </p:spPr>
+        <p:txBody>
+          <a:bodyPr wrap="square" anchor="t" lIns="0" rIns="0" tIns="0" bIns="0">
+            <a:spAutoFit/>
+          </a:bodyPr>
+          <a:lstStyle/>
+          <a:p>
+            <a:pPr algn="l">
+              <a:spcBef>
+                <a:spcPts val="0"/>
+              </a:spcBef>
+            </a:pPr>
+            <a:r>
+              <a:rPr sz="2200" b="1" i="0">
+                <a:solidFill>
+                  <a:srgbClr val="000000"/>
+                </a:solidFill>
+                <a:latin typeface="Arial"/>
+              </a:rPr>
+              <a:t>BURCH (1991) — Peircean Algebra</a:t>
+            </a:r>
+          </a:p>
+          <a:p>
+            <a:pPr algn="l">
+              <a:spcBef>
+                <a:spcPts val="400"/>
+              </a:spcBef>
+            </a:pPr>
+            <a:r>
               <a:rPr sz="2200" b="0" i="0">
                 <a:solidFill>
                   <a:srgbClr val="000000"/>
                 </a:solidFill>
-                <a:latin typeface="Courier New"/>
-              </a:rPr>
-              <a:t>gives(A, B, C)</a:t>
-            </a:r>
-          </a:p>
-          <a:p>
-            <a:pPr algn="l">
-              <a:spcBef>
-                <a:spcPts val="0"/>
+                <a:latin typeface="Arial"/>
+              </a:rPr>
+              <a:t>Irreducible under project-join operations.</a:t>
+            </a:r>
+          </a:p>
+          <a:p>
+            <a:pPr algn="l">
+              <a:spcBef>
+                <a:spcPts val="1600"/>
+              </a:spcBef>
+            </a:pPr>
+            <a:r>
+              <a:rPr sz="2200" b="1" i="0">
+                <a:solidFill>
+                  <a:srgbClr val="000000"/>
+                </a:solidFill>
+                <a:latin typeface="Arial"/>
+              </a:rPr>
+              <a:t>HERETH &amp; PÖSCHEL (2006) — Clone Independence</a:t>
+            </a:r>
+          </a:p>
+          <a:p>
+            <a:pPr algn="l">
+              <a:spcBef>
+                <a:spcPts val="400"/>
               </a:spcBef>
             </a:pPr>
             <a:r>
@@ -5638,15 +6233,31 @@
                 <a:solidFill>
                   <a:srgbClr val="000000"/>
                 </a:solidFill>
-                <a:latin typeface="Courier New"/>
-              </a:rPr>
-              <a:t>  becomes one new object:  (tag, A, (B, C))</a:t>
-            </a:r>
-          </a:p>
-          <a:p>
-            <a:pPr algn="l">
-              <a:spcBef>
-                <a:spcPts val="0"/>
+                <a:latin typeface="Arial"/>
+              </a:rPr>
+              <a:t>Teridentity cannot be generated.</a:t>
+            </a:r>
+          </a:p>
+          <a:p>
+            <a:pPr algn="l">
+              <a:spcBef>
+                <a:spcPts val="1600"/>
+              </a:spcBef>
+            </a:pPr>
+            <a:r>
+              <a:rPr sz="2200" b="1" i="0">
+                <a:solidFill>
+                  <a:srgbClr val="000000"/>
+                </a:solidFill>
+                <a:latin typeface="Arial"/>
+              </a:rPr>
+              <a:t>KOSHKIN (2024) — Domain Thresholds</a:t>
+            </a:r>
+          </a:p>
+          <a:p>
+            <a:pPr algn="l">
+              <a:spcBef>
+                <a:spcPts val="400"/>
               </a:spcBef>
             </a:pPr>
             <a:r>
@@ -5654,25 +6265,41 @@
                 <a:solidFill>
                   <a:srgbClr val="000000"/>
                 </a:solidFill>
-                <a:latin typeface="Courier New"/>
-              </a:rPr>
-              <a:t>  and one two-place fact about it</a:t>
-            </a:r>
-          </a:p>
-          <a:p>
-            <a:pPr algn="l">
-              <a:spcBef>
-                <a:spcPts val="1400"/>
-              </a:spcBef>
-            </a:pPr>
-            <a:r>
-              <a:rPr sz="2400" b="0" i="0">
-                <a:solidFill>
-                  <a:srgbClr val="000000"/>
-                </a:solidFill>
-                <a:latin typeface="Arial"/>
-              </a:rPr>
-              <a:t>Every relation becomes dyadic, over a larger universe.</a:t>
+                <a:latin typeface="Arial"/>
+              </a:rPr>
+              <a:t>Full predicate calculus analysis.</a:t>
+            </a:r>
+          </a:p>
+          <a:p>
+            <a:pPr algn="l">
+              <a:spcBef>
+                <a:spcPts val="1600"/>
+              </a:spcBef>
+            </a:pPr>
+            <a:r>
+              <a:rPr sz="2200" b="1" i="0">
+                <a:solidFill>
+                  <a:srgbClr val="000000"/>
+                </a:solidFill>
+                <a:latin typeface="Arial"/>
+              </a:rPr>
+              <a:t>BOOLEAN HORIZON — Two-Valued Space</a:t>
+            </a:r>
+          </a:p>
+          <a:p>
+            <a:pPr algn="l">
+              <a:spcBef>
+                <a:spcPts val="400"/>
+              </a:spcBef>
+            </a:pPr>
+            <a:r>
+              <a:rPr sz="2200" b="0" i="0">
+                <a:solidFill>
+                  <a:srgbClr val="000000"/>
+                </a:solidFill>
+                <a:latin typeface="Arial"/>
+              </a:rPr>
+              <a:t>Non-factorizable gates stay irreducible.</a:t>
             </a:r>
           </a:p>
         </p:txBody>
@@ -5711,8 +6338,8 @@
         </p:nvSpPr>
         <p:spPr>
           <a:xfrm>
-            <a:off x="822960" y="640080"/>
-            <a:ext cx="10545775" cy="1188720"/>
+            <a:off x="822960" y="502920"/>
+            <a:ext cx="10545775" cy="274320"/>
           </a:xfrm>
           <a:prstGeom prst="rect">
             <a:avLst/>
@@ -5720,7 +6347,7 @@
           <a:noFill/>
         </p:spPr>
         <p:txBody>
-          <a:bodyPr wrap="square" anchor="b" lIns="0" rIns="0" tIns="0" bIns="0">
+          <a:bodyPr wrap="square" anchor="t" lIns="0" rIns="0" tIns="0" bIns="0">
             <a:spAutoFit/>
           </a:bodyPr>
           <a:lstStyle/>
@@ -5731,13 +6358,13 @@
               </a:spcBef>
             </a:pPr>
             <a:r>
-              <a:rPr sz="3600" b="1" i="0">
-                <a:solidFill>
-                  <a:srgbClr val="000000"/>
-                </a:solidFill>
-                <a:latin typeface="Arial"/>
-              </a:rPr>
-              <a:t>If Quine is right, Thirdness is notation</a:t>
+              <a:rPr sz="1400" b="0" i="0">
+                <a:solidFill>
+                  <a:srgbClr val="000000"/>
+                </a:solidFill>
+                <a:latin typeface="Arial"/>
+              </a:rPr>
+              <a:t>INFORMATION DECOMPOSITION</a:t>
             </a:r>
           </a:p>
         </p:txBody>
@@ -5750,8 +6377,8 @@
         </p:nvSpPr>
         <p:spPr>
           <a:xfrm>
-            <a:off x="822960" y="2103120"/>
-            <a:ext cx="10545775" cy="3931920"/>
+            <a:off x="822960" y="822960"/>
+            <a:ext cx="10545775" cy="1005840"/>
           </a:xfrm>
           <a:prstGeom prst="rect">
             <a:avLst/>
@@ -5770,45 +6397,182 @@
               </a:spcBef>
             </a:pPr>
             <a:r>
-              <a:rPr sz="2400" b="0" i="0">
-                <a:solidFill>
-                  <a:srgbClr val="000000"/>
-                </a:solidFill>
-                <a:latin typeface="Arial"/>
-              </a:rPr>
-              <a:t>Any triad can be rewritten as pairs.</a:t>
-            </a:r>
-          </a:p>
-          <a:p>
-            <a:pPr algn="l">
-              <a:spcBef>
-                <a:spcPts val="1400"/>
-              </a:spcBef>
-            </a:pPr>
-            <a:r>
-              <a:rPr sz="2400" b="0" i="0">
-                <a:solidFill>
-                  <a:srgbClr val="000000"/>
-                </a:solidFill>
-                <a:latin typeface="Arial"/>
-              </a:rPr>
-              <a:t>Then Thirdness is not a kind of being.</a:t>
-            </a:r>
-          </a:p>
-          <a:p>
-            <a:pPr algn="l">
-              <a:spcBef>
-                <a:spcPts val="1400"/>
-              </a:spcBef>
-            </a:pPr>
-            <a:r>
-              <a:rPr sz="2400" b="0" i="0">
-                <a:solidFill>
-                  <a:srgbClr val="000000"/>
-                </a:solidFill>
-                <a:latin typeface="Arial"/>
-              </a:rPr>
-              <a:t>Then algorithmacy is not a thing.</a:t>
+              <a:rPr sz="3400" b="1" i="0">
+                <a:solidFill>
+                  <a:srgbClr val="000000"/>
+                </a:solidFill>
+                <a:latin typeface="Arial"/>
+              </a:rPr>
+              <a:t>The Synergistic Teridentity Correspondence</a:t>
+            </a:r>
+          </a:p>
+        </p:txBody>
+      </p:sp>
+      <p:sp>
+        <p:nvSpPr>
+          <p:cNvPr id="4" name="TextBox 3"/>
+          <p:cNvSpPr txBox="1"/>
+          <p:nvPr/>
+        </p:nvSpPr>
+        <p:spPr>
+          <a:xfrm>
+            <a:off x="822960" y="2011680"/>
+            <a:ext cx="10545775" cy="4297680"/>
+          </a:xfrm>
+          <a:prstGeom prst="rect">
+            <a:avLst/>
+          </a:prstGeom>
+          <a:noFill/>
+        </p:spPr>
+        <p:txBody>
+          <a:bodyPr wrap="square" anchor="t" lIns="0" rIns="0" tIns="0" bIns="0">
+            <a:spAutoFit/>
+          </a:bodyPr>
+          <a:lstStyle/>
+          <a:p>
+            <a:pPr algn="l">
+              <a:spcBef>
+                <a:spcPts val="0"/>
+              </a:spcBef>
+            </a:pPr>
+            <a:r>
+              <a:rPr sz="2200" b="1" i="0">
+                <a:solidFill>
+                  <a:srgbClr val="000000"/>
+                </a:solidFill>
+                <a:latin typeface="Arial"/>
+              </a:rPr>
+              <a:t>WILLIAMS &amp; BEER (2010) PID</a:t>
+            </a:r>
+          </a:p>
+          <a:p>
+            <a:pPr algn="l">
+              <a:spcBef>
+                <a:spcPts val="400"/>
+              </a:spcBef>
+            </a:pPr>
+            <a:r>
+              <a:rPr sz="2200" b="0" i="0">
+                <a:solidFill>
+                  <a:srgbClr val="000000"/>
+                </a:solidFill>
+                <a:latin typeface="Arial"/>
+              </a:rPr>
+              <a:t>I(X1, X2; Y) = Red + Un1 + Un2 + Syn</a:t>
+            </a:r>
+          </a:p>
+          <a:p>
+            <a:pPr algn="l">
+              <a:spcBef>
+                <a:spcPts val="400"/>
+              </a:spcBef>
+            </a:pPr>
+            <a:r>
+              <a:rPr sz="2200" b="0" i="0">
+                <a:solidFill>
+                  <a:srgbClr val="000000"/>
+                </a:solidFill>
+                <a:latin typeface="Arial"/>
+              </a:rPr>
+              <a:t>Synergy is the dynamic, measure-theoretic manifestation of teridentity =_3.</a:t>
+            </a:r>
+          </a:p>
+          <a:p>
+            <a:pPr algn="l">
+              <a:spcBef>
+                <a:spcPts val="1600"/>
+              </a:spcBef>
+            </a:pPr>
+            <a:r>
+              <a:rPr sz="2200" b="1" i="0">
+                <a:solidFill>
+                  <a:srgbClr val="000000"/>
+                </a:solidFill>
+                <a:latin typeface="Arial"/>
+              </a:rPr>
+              <a:t>Canonical Case: 2-Input XOR</a:t>
+            </a:r>
+          </a:p>
+          <a:p>
+            <a:pPr algn="l">
+              <a:spcBef>
+                <a:spcPts val="400"/>
+              </a:spcBef>
+            </a:pPr>
+            <a:r>
+              <a:rPr sz="2200" b="0" i="0">
+                <a:solidFill>
+                  <a:srgbClr val="000000"/>
+                </a:solidFill>
+                <a:latin typeface="Arial"/>
+              </a:rPr>
+              <a:t>Y = X1 </a:t>
+            </a:r>
+            <a:r>
+              <a:rPr sz="2200" b="0" i="0">
+                <a:solidFill>
+                  <a:srgbClr val="000000"/>
+                </a:solidFill>
+                <a:latin typeface="Cambria Math"/>
+              </a:rPr>
+              <a:t>⊕</a:t>
+            </a:r>
+            <a:r>
+              <a:rPr sz="2200" b="0" i="0">
+                <a:solidFill>
+                  <a:srgbClr val="000000"/>
+                </a:solidFill>
+                <a:latin typeface="Arial"/>
+              </a:rPr>
+              <a:t> X2 • Syn(X1, X2; Y) = 1.0 bit</a:t>
+            </a:r>
+          </a:p>
+          <a:p>
+            <a:pPr algn="l">
+              <a:spcBef>
+                <a:spcPts val="400"/>
+              </a:spcBef>
+            </a:pPr>
+            <a:r>
+              <a:rPr sz="2200" b="0" i="0">
+                <a:solidFill>
+                  <a:srgbClr val="000000"/>
+                </a:solidFill>
+                <a:latin typeface="Arial"/>
+              </a:rPr>
+              <a:t>Marginal Vanishing: Individual mutual informations I(Xi; Y) = 0.</a:t>
+            </a:r>
+          </a:p>
+          <a:p>
+            <a:pPr algn="l">
+              <a:spcBef>
+                <a:spcPts val="400"/>
+              </a:spcBef>
+            </a:pPr>
+            <a:r>
+              <a:rPr sz="2200" b="0" i="0">
+                <a:solidFill>
+                  <a:srgbClr val="000000"/>
+                </a:solidFill>
+                <a:latin typeface="Arial"/>
+              </a:rPr>
+              <a:t>Joint Determination: Knowledge of both sources uniquely determines output.</a:t>
+            </a:r>
+          </a:p>
+          <a:p>
+            <a:pPr algn="l">
+              <a:spcBef>
+                <a:spcPts val="400"/>
+              </a:spcBef>
+            </a:pPr>
+            <a:r>
+              <a:rPr sz="2200" b="0" i="0">
+                <a:solidFill>
+                  <a:srgbClr val="000000"/>
+                </a:solidFill>
+                <a:latin typeface="Arial"/>
+              </a:rPr>
+              <a:t>Join-Irreducible Support: Parity forms non-factorizable relational subset.</a:t>
             </a:r>
           </a:p>
         </p:txBody>
@@ -5847,8 +6611,8 @@
         </p:nvSpPr>
         <p:spPr>
           <a:xfrm>
-            <a:off x="822960" y="640080"/>
-            <a:ext cx="10545775" cy="1188720"/>
+            <a:off x="822960" y="502920"/>
+            <a:ext cx="10545775" cy="274320"/>
           </a:xfrm>
           <a:prstGeom prst="rect">
             <a:avLst/>
@@ -5856,7 +6620,7 @@
           <a:noFill/>
         </p:spPr>
         <p:txBody>
-          <a:bodyPr wrap="square" anchor="b" lIns="0" rIns="0" tIns="0" bIns="0">
+          <a:bodyPr wrap="square" anchor="t" lIns="0" rIns="0" tIns="0" bIns="0">
             <a:spAutoFit/>
           </a:bodyPr>
           <a:lstStyle/>
@@ -5867,13 +6631,13 @@
               </a:spcBef>
             </a:pPr>
             <a:r>
-              <a:rPr sz="3600" b="1" i="0">
-                <a:solidFill>
-                  <a:srgbClr val="000000"/>
-                </a:solidFill>
-                <a:latin typeface="Arial"/>
-              </a:rPr>
-              <a:t>The logicians: it depends on the operations</a:t>
+              <a:rPr sz="1400" b="0" i="0">
+                <a:solidFill>
+                  <a:srgbClr val="000000"/>
+                </a:solidFill>
+                <a:latin typeface="Arial"/>
+              </a:rPr>
+              <a:t>CAUSAL INTEGRATION</a:t>
             </a:r>
           </a:p>
         </p:txBody>
@@ -5886,8 +6650,8 @@
         </p:nvSpPr>
         <p:spPr>
           <a:xfrm>
-            <a:off x="822960" y="2103120"/>
-            <a:ext cx="10545775" cy="3931920"/>
+            <a:off x="822960" y="822960"/>
+            <a:ext cx="10545775" cy="1005840"/>
           </a:xfrm>
           <a:prstGeom prst="rect">
             <a:avLst/>
@@ -5906,61 +6670,118 @@
               </a:spcBef>
             </a:pPr>
             <a:r>
-              <a:rPr sz="2400" b="0" i="0">
-                <a:solidFill>
-                  <a:srgbClr val="000000"/>
-                </a:solidFill>
-                <a:latin typeface="Arial"/>
-              </a:rPr>
-              <a:t>Herzberger 1981: the thesis holds for valency-regular constructions with relative products</a:t>
-            </a:r>
-          </a:p>
-          <a:p>
-            <a:pPr algn="l">
-              <a:spcBef>
-                <a:spcPts val="1400"/>
-              </a:spcBef>
-            </a:pPr>
-            <a:r>
-              <a:rPr sz="2400" b="0" i="1">
-                <a:solidFill>
-                  <a:srgbClr val="000000"/>
-                </a:solidFill>
-                <a:latin typeface="Arial"/>
-              </a:rPr>
-              <a:t>the reduction thesis collapses under standard notions of definability</a:t>
-            </a:r>
-          </a:p>
-          <a:p>
-            <a:pPr algn="l">
-              <a:spcBef>
-                <a:spcPts val="1400"/>
-              </a:spcBef>
-            </a:pPr>
-            <a:r>
-              <a:rPr sz="1800" b="0" i="0">
-                <a:solidFill>
-                  <a:srgbClr val="000000"/>
-                </a:solidFill>
-                <a:latin typeface="Arial"/>
-              </a:rPr>
-              <a:t>— Herzberger, 1981</a:t>
-            </a:r>
-          </a:p>
-          <a:p>
-            <a:pPr algn="l">
-              <a:spcBef>
-                <a:spcPts val="1400"/>
-              </a:spcBef>
-            </a:pPr>
-            <a:r>
-              <a:rPr sz="2400" b="0" i="0">
-                <a:solidFill>
-                  <a:srgbClr val="000000"/>
-                </a:solidFill>
-                <a:latin typeface="Arial"/>
-              </a:rPr>
-              <a:t>Burch 1991: a proof inside Peircean algebra, under a restriction</a:t>
+              <a:rPr sz="3400" b="1" i="0">
+                <a:solidFill>
+                  <a:srgbClr val="000000"/>
+                </a:solidFill>
+                <a:latin typeface="Arial"/>
+              </a:rPr>
+              <a:t>The Causal Test (IIT 4.0)</a:t>
+            </a:r>
+          </a:p>
+        </p:txBody>
+      </p:sp>
+      <p:sp>
+        <p:nvSpPr>
+          <p:cNvPr id="4" name="TextBox 3"/>
+          <p:cNvSpPr txBox="1"/>
+          <p:nvPr/>
+        </p:nvSpPr>
+        <p:spPr>
+          <a:xfrm>
+            <a:off x="822960" y="2011680"/>
+            <a:ext cx="10545775" cy="4297680"/>
+          </a:xfrm>
+          <a:prstGeom prst="rect">
+            <a:avLst/>
+          </a:prstGeom>
+          <a:noFill/>
+        </p:spPr>
+        <p:txBody>
+          <a:bodyPr wrap="square" anchor="t" lIns="0" rIns="0" tIns="0" bIns="0">
+            <a:spAutoFit/>
+          </a:bodyPr>
+          <a:lstStyle/>
+          <a:p>
+            <a:pPr algn="l">
+              <a:spcBef>
+                <a:spcPts val="0"/>
+              </a:spcBef>
+            </a:pPr>
+            <a:r>
+              <a:rPr sz="2200" b="1" i="0">
+                <a:solidFill>
+                  <a:srgbClr val="000000"/>
+                </a:solidFill>
+                <a:latin typeface="Arial"/>
+              </a:rPr>
+              <a:t>Φ = 0</a:t>
+            </a:r>
+            <a:r>
+              <a:rPr sz="2200" b="0" i="0">
+                <a:solidFill>
+                  <a:srgbClr val="000000"/>
+                </a:solidFill>
+                <a:latin typeface="Arial"/>
+              </a:rPr>
+              <a:t> — the system factors: cutting its weakest seam loses nothing.</a:t>
+            </a:r>
+          </a:p>
+          <a:p>
+            <a:pPr algn="l">
+              <a:spcBef>
+                <a:spcPts val="1600"/>
+              </a:spcBef>
+            </a:pPr>
+            <a:r>
+              <a:rPr sz="2200" b="1" i="0">
+                <a:solidFill>
+                  <a:srgbClr val="000000"/>
+                </a:solidFill>
+                <a:latin typeface="Arial"/>
+              </a:rPr>
+              <a:t>Φ &gt; 0</a:t>
+            </a:r>
+            <a:r>
+              <a:rPr sz="2200" b="0" i="0">
+                <a:solidFill>
+                  <a:srgbClr val="000000"/>
+                </a:solidFill>
+                <a:latin typeface="Arial"/>
+              </a:rPr>
+              <a:t> — the system is a whole: no cut leaves it as it was.</a:t>
+            </a:r>
+          </a:p>
+          <a:p>
+            <a:pPr algn="l">
+              <a:spcBef>
+                <a:spcPts val="1600"/>
+              </a:spcBef>
+            </a:pPr>
+            <a:r>
+              <a:rPr sz="2200" b="1" i="0">
+                <a:solidFill>
+                  <a:srgbClr val="000000"/>
+                </a:solidFill>
+                <a:latin typeface="Arial"/>
+              </a:rPr>
+              <a:t>Wholeness Is Not Yet a Triad</a:t>
+            </a:r>
+          </a:p>
+          <a:p>
+            <a:pPr algn="l">
+              <a:spcBef>
+                <a:spcPts val="400"/>
+              </a:spcBef>
+            </a:pPr>
+            <a:r>
+              <a:rPr sz="2200" b="0" i="0">
+                <a:solidFill>
+                  <a:srgbClr val="000000"/>
+                </a:solidFill>
+                <a:latin typeface="Arial"/>
+              </a:rPr>
+              <a:t>Φ says whether the system factors, not whether any member is set by two others. A ring of one-input copies is a whole at Φ = 2.0.</a:t>
             </a:r>
           </a:p>
         </p:txBody>
@@ -5999,8 +6820,8 @@
         </p:nvSpPr>
         <p:spPr>
           <a:xfrm>
-            <a:off x="822960" y="640080"/>
-            <a:ext cx="10545775" cy="1188720"/>
+            <a:off x="822960" y="502920"/>
+            <a:ext cx="10545775" cy="274320"/>
           </a:xfrm>
           <a:prstGeom prst="rect">
             <a:avLst/>
@@ -6008,7 +6829,7 @@
           <a:noFill/>
         </p:spPr>
         <p:txBody>
-          <a:bodyPr wrap="square" anchor="b" lIns="0" rIns="0" tIns="0" bIns="0">
+          <a:bodyPr wrap="square" anchor="t" lIns="0" rIns="0" tIns="0" bIns="0">
             <a:spAutoFit/>
           </a:bodyPr>
           <a:lstStyle/>
@@ -6019,13 +6840,13 @@
               </a:spcBef>
             </a:pPr>
             <a:r>
-              <a:rPr sz="3600" b="1" i="0">
-                <a:solidFill>
-                  <a:srgbClr val="000000"/>
-                </a:solidFill>
-                <a:latin typeface="Arial"/>
-              </a:rPr>
-              <a:t>The three-way junction decides it</a:t>
+              <a:rPr sz="1400" b="0" i="0">
+                <a:solidFill>
+                  <a:srgbClr val="000000"/>
+                </a:solidFill>
+                <a:latin typeface="Arial"/>
+              </a:rPr>
+              <a:t>EMPIRICAL VERIFICATION</a:t>
             </a:r>
           </a:p>
         </p:txBody>
@@ -6038,8 +6859,8 @@
         </p:nvSpPr>
         <p:spPr>
           <a:xfrm>
-            <a:off x="822960" y="2103120"/>
-            <a:ext cx="10545775" cy="3931920"/>
+            <a:off x="822960" y="822960"/>
+            <a:ext cx="10545775" cy="1005840"/>
           </a:xfrm>
           <a:prstGeom prst="rect">
             <a:avLst/>
@@ -6058,49 +6879,1056 @@
               </a:spcBef>
             </a:pPr>
             <a:r>
-              <a:rPr sz="2400" b="0" i="0">
-                <a:solidFill>
-                  <a:srgbClr val="000000"/>
-                </a:solidFill>
-                <a:latin typeface="Arial"/>
-              </a:rPr>
-              <a:t>Hereth Correia &amp; Pöschel 2006: in Peirce's algebra, pairs alone never build the three-way identity</a:t>
-            </a:r>
-          </a:p>
-          <a:p>
-            <a:pPr algn="l">
-              <a:spcBef>
-                <a:spcPts val="1400"/>
-              </a:spcBef>
-            </a:pPr>
-            <a:r>
-              <a:rPr sz="2400" b="0" i="0">
-                <a:solidFill>
-                  <a:srgbClr val="000000"/>
-                </a:solidFill>
-                <a:latin typeface="Arial"/>
-              </a:rPr>
-              <a:t>Dau &amp; Hereth Correia 2006: in relational algebra it is "hidden in the operations"</a:t>
-            </a:r>
-          </a:p>
-          <a:p>
-            <a:pPr algn="l">
-              <a:spcBef>
-                <a:spcPts val="1400"/>
-              </a:spcBef>
-            </a:pPr>
-            <a:r>
-              <a:rPr sz="2400" b="0" i="0">
-                <a:solidFill>
-                  <a:srgbClr val="000000"/>
-                </a:solidFill>
-                <a:latin typeface="Arial"/>
-              </a:rPr>
-              <a:t>Koshkin 2025: with free variable-sharing, triads reduce to pairs on domains of 3+ values; on two-valued domains some do not</a:t>
-            </a:r>
-          </a:p>
-        </p:txBody>
-      </p:sp>
+              <a:rPr sz="3400" b="1" i="0">
+                <a:solidFill>
+                  <a:srgbClr val="000000"/>
+                </a:solidFill>
+                <a:latin typeface="Arial"/>
+              </a:rPr>
+              <a:t>IIT 4.0 Topological Architecture Sort</a:t>
+            </a:r>
+          </a:p>
+        </p:txBody>
+      </p:sp>
+      <p:graphicFrame>
+        <p:nvGraphicFramePr>
+          <p:cNvPr id="4" name="Table 3"/>
+          <p:cNvGraphicFramePr>
+            <a:graphicFrameLocks noGrp="1"/>
+          </p:cNvGraphicFramePr>
+          <p:nvPr/>
+        </p:nvGraphicFramePr>
+        <p:xfrm>
+          <a:off x="822960" y="2286000"/>
+          <a:ext cx="10545775" cy="2514600"/>
+        </p:xfrm>
+        <a:graphic>
+          <a:graphicData uri="http://schemas.openxmlformats.org/drawingml/2006/table">
+            <a:tbl>
+              <a:tblPr firstRow="0" bandRow="0">
+                <a:tableStyleId>{5940675A-B579-460E-94D1-54222C63F5DA}</a:tableStyleId>
+              </a:tblPr>
+              <a:tblGrid>
+                <a:gridCol w="2109155"/>
+                <a:gridCol w="2109155"/>
+                <a:gridCol w="2109155"/>
+                <a:gridCol w="2109155"/>
+                <a:gridCol w="2109155"/>
+              </a:tblGrid>
+              <a:tr h="502920">
+                <a:tc>
+                  <a:txBody>
+                    <a:bodyPr wrap="square"/>
+                    <a:lstStyle/>
+                    <a:p>
+                      <a:r>
+                        <a:rPr sz="1600" b="1" i="0">
+                          <a:solidFill>
+                            <a:srgbClr val="000000"/>
+                          </a:solidFill>
+                          <a:latin typeface="Arial"/>
+                        </a:rPr>
+                        <a:t>Topology Class</a:t>
+                      </a:r>
+                    </a:p>
+                  </a:txBody>
+                  <a:tcPr marL="73152" marR="73152">
+                    <a:noFill/>
+                    <a:lnL w="9525">
+                      <a:solidFill>
+                        <a:srgbClr val="000000"/>
+                      </a:solidFill>
+                    </a:lnL>
+                    <a:lnR w="9525">
+                      <a:solidFill>
+                        <a:srgbClr val="000000"/>
+                      </a:solidFill>
+                    </a:lnR>
+                    <a:lnT w="9525">
+                      <a:solidFill>
+                        <a:srgbClr val="000000"/>
+                      </a:solidFill>
+                    </a:lnT>
+                    <a:lnB w="9525">
+                      <a:solidFill>
+                        <a:srgbClr val="000000"/>
+                      </a:solidFill>
+                    </a:lnB>
+                  </a:tcPr>
+                </a:tc>
+                <a:tc>
+                  <a:txBody>
+                    <a:bodyPr wrap="square"/>
+                    <a:lstStyle/>
+                    <a:p>
+                      <a:r>
+                        <a:rPr sz="1600" b="1" i="0">
+                          <a:solidFill>
+                            <a:srgbClr val="000000"/>
+                          </a:solidFill>
+                          <a:latin typeface="Arial"/>
+                        </a:rPr>
+                        <a:t>Wiring Count</a:t>
+                      </a:r>
+                    </a:p>
+                  </a:txBody>
+                  <a:tcPr marL="73152" marR="73152">
+                    <a:noFill/>
+                    <a:lnL w="9525">
+                      <a:solidFill>
+                        <a:srgbClr val="000000"/>
+                      </a:solidFill>
+                    </a:lnL>
+                    <a:lnR w="9525">
+                      <a:solidFill>
+                        <a:srgbClr val="000000"/>
+                      </a:solidFill>
+                    </a:lnR>
+                    <a:lnT w="9525">
+                      <a:solidFill>
+                        <a:srgbClr val="000000"/>
+                      </a:solidFill>
+                    </a:lnT>
+                    <a:lnB w="9525">
+                      <a:solidFill>
+                        <a:srgbClr val="000000"/>
+                      </a:solidFill>
+                    </a:lnB>
+                  </a:tcPr>
+                </a:tc>
+                <a:tc>
+                  <a:txBody>
+                    <a:bodyPr wrap="square"/>
+                    <a:lstStyle/>
+                    <a:p>
+                      <a:r>
+                        <a:rPr sz="1600" b="1" i="0">
+                          <a:solidFill>
+                            <a:srgbClr val="000000"/>
+                          </a:solidFill>
+                          <a:latin typeface="Arial"/>
+                        </a:rPr>
+                        <a:t>Mechanism Support</a:t>
+                      </a:r>
+                    </a:p>
+                  </a:txBody>
+                  <a:tcPr marL="73152" marR="73152">
+                    <a:noFill/>
+                    <a:lnL w="9525">
+                      <a:solidFill>
+                        <a:srgbClr val="000000"/>
+                      </a:solidFill>
+                    </a:lnL>
+                    <a:lnR w="9525">
+                      <a:solidFill>
+                        <a:srgbClr val="000000"/>
+                      </a:solidFill>
+                    </a:lnR>
+                    <a:lnT w="9525">
+                      <a:solidFill>
+                        <a:srgbClr val="000000"/>
+                      </a:solidFill>
+                    </a:lnT>
+                    <a:lnB w="9525">
+                      <a:solidFill>
+                        <a:srgbClr val="000000"/>
+                      </a:solidFill>
+                    </a:lnB>
+                  </a:tcPr>
+                </a:tc>
+                <a:tc>
+                  <a:txBody>
+                    <a:bodyPr wrap="square"/>
+                    <a:lstStyle/>
+                    <a:p>
+                      <a:r>
+                        <a:rPr sz="1600" b="1" i="0">
+                          <a:solidFill>
+                            <a:srgbClr val="000000"/>
+                          </a:solidFill>
+                          <a:latin typeface="Arial"/>
+                        </a:rPr>
+                        <a:t>System Φ</a:t>
+                      </a:r>
+                    </a:p>
+                  </a:txBody>
+                  <a:tcPr marL="73152" marR="73152">
+                    <a:noFill/>
+                    <a:lnL w="9525">
+                      <a:solidFill>
+                        <a:srgbClr val="000000"/>
+                      </a:solidFill>
+                    </a:lnL>
+                    <a:lnR w="9525">
+                      <a:solidFill>
+                        <a:srgbClr val="000000"/>
+                      </a:solidFill>
+                    </a:lnR>
+                    <a:lnT w="9525">
+                      <a:solidFill>
+                        <a:srgbClr val="000000"/>
+                      </a:solidFill>
+                    </a:lnT>
+                    <a:lnB w="9525">
+                      <a:solidFill>
+                        <a:srgbClr val="000000"/>
+                      </a:solidFill>
+                    </a:lnB>
+                  </a:tcPr>
+                </a:tc>
+                <a:tc>
+                  <a:txBody>
+                    <a:bodyPr wrap="square"/>
+                    <a:lstStyle/>
+                    <a:p>
+                      <a:r>
+                        <a:rPr sz="1600" b="1" i="0">
+                          <a:solidFill>
+                            <a:srgbClr val="000000"/>
+                          </a:solidFill>
+                          <a:latin typeface="Arial"/>
+                        </a:rPr>
+                        <a:t>Causal Status</a:t>
+                      </a:r>
+                    </a:p>
+                  </a:txBody>
+                  <a:tcPr marL="73152" marR="73152">
+                    <a:noFill/>
+                    <a:lnL w="9525">
+                      <a:solidFill>
+                        <a:srgbClr val="000000"/>
+                      </a:solidFill>
+                    </a:lnL>
+                    <a:lnR w="9525">
+                      <a:solidFill>
+                        <a:srgbClr val="000000"/>
+                      </a:solidFill>
+                    </a:lnR>
+                    <a:lnT w="9525">
+                      <a:solidFill>
+                        <a:srgbClr val="000000"/>
+                      </a:solidFill>
+                    </a:lnT>
+                    <a:lnB w="9525">
+                      <a:solidFill>
+                        <a:srgbClr val="000000"/>
+                      </a:solidFill>
+                    </a:lnB>
+                  </a:tcPr>
+                </a:tc>
+              </a:tr>
+              <a:tr h="502920">
+                <a:tc>
+                  <a:txBody>
+                    <a:bodyPr wrap="square"/>
+                    <a:lstStyle/>
+                    <a:p>
+                      <a:r>
+                        <a:rPr sz="1600" b="0" i="0">
+                          <a:solidFill>
+                            <a:srgbClr val="000000"/>
+                          </a:solidFill>
+                          <a:latin typeface="Arial"/>
+                        </a:rPr>
+                        <a:t>Dyadic Cascade</a:t>
+                      </a:r>
+                    </a:p>
+                  </a:txBody>
+                  <a:tcPr marL="73152" marR="73152">
+                    <a:noFill/>
+                    <a:lnL w="9525">
+                      <a:solidFill>
+                        <a:srgbClr val="000000"/>
+                      </a:solidFill>
+                    </a:lnL>
+                    <a:lnR w="9525">
+                      <a:solidFill>
+                        <a:srgbClr val="000000"/>
+                      </a:solidFill>
+                    </a:lnR>
+                    <a:lnT w="9525">
+                      <a:solidFill>
+                        <a:srgbClr val="000000"/>
+                      </a:solidFill>
+                    </a:lnT>
+                    <a:lnB w="9525">
+                      <a:solidFill>
+                        <a:srgbClr val="000000"/>
+                      </a:solidFill>
+                    </a:lnB>
+                  </a:tcPr>
+                </a:tc>
+                <a:tc>
+                  <a:txBody>
+                    <a:bodyPr wrap="square"/>
+                    <a:lstStyle/>
+                    <a:p>
+                      <a:r>
+                        <a:rPr sz="1600" b="0" i="0">
+                          <a:solidFill>
+                            <a:srgbClr val="000000"/>
+                          </a:solidFill>
+                          <a:latin typeface="Arial"/>
+                        </a:rPr>
+                        <a:t>89 Wirings</a:t>
+                      </a:r>
+                    </a:p>
+                  </a:txBody>
+                  <a:tcPr marL="73152" marR="73152">
+                    <a:noFill/>
+                    <a:lnL w="9525">
+                      <a:solidFill>
+                        <a:srgbClr val="000000"/>
+                      </a:solidFill>
+                    </a:lnL>
+                    <a:lnR w="9525">
+                      <a:solidFill>
+                        <a:srgbClr val="000000"/>
+                      </a:solidFill>
+                    </a:lnR>
+                    <a:lnT w="9525">
+                      <a:solidFill>
+                        <a:srgbClr val="000000"/>
+                      </a:solidFill>
+                    </a:lnT>
+                    <a:lnB w="9525">
+                      <a:solidFill>
+                        <a:srgbClr val="000000"/>
+                      </a:solidFill>
+                    </a:lnB>
+                  </a:tcPr>
+                </a:tc>
+                <a:tc>
+                  <a:txBody>
+                    <a:bodyPr wrap="square"/>
+                    <a:lstStyle/>
+                    <a:p>
+                      <a:r>
+                        <a:rPr sz="1600" b="0" i="0">
+                          <a:solidFill>
+                            <a:srgbClr val="000000"/>
+                          </a:solidFill>
+                          <a:latin typeface="Arial"/>
+                        </a:rPr>
+                        <a:t>Point-to-point lines</a:t>
+                      </a:r>
+                    </a:p>
+                  </a:txBody>
+                  <a:tcPr marL="73152" marR="73152">
+                    <a:noFill/>
+                    <a:lnL w="9525">
+                      <a:solidFill>
+                        <a:srgbClr val="000000"/>
+                      </a:solidFill>
+                    </a:lnL>
+                    <a:lnR w="9525">
+                      <a:solidFill>
+                        <a:srgbClr val="000000"/>
+                      </a:solidFill>
+                    </a:lnR>
+                    <a:lnT w="9525">
+                      <a:solidFill>
+                        <a:srgbClr val="000000"/>
+                      </a:solidFill>
+                    </a:lnT>
+                    <a:lnB w="9525">
+                      <a:solidFill>
+                        <a:srgbClr val="000000"/>
+                      </a:solidFill>
+                    </a:lnB>
+                  </a:tcPr>
+                </a:tc>
+                <a:tc>
+                  <a:txBody>
+                    <a:bodyPr wrap="square"/>
+                    <a:lstStyle/>
+                    <a:p>
+                      <a:r>
+                        <a:rPr sz="1600" b="0" i="0">
+                          <a:solidFill>
+                            <a:srgbClr val="000000"/>
+                          </a:solidFill>
+                          <a:latin typeface="Arial"/>
+                        </a:rPr>
+                        <a:t>Φ &gt; 0 in 8</a:t>
+                      </a:r>
+                    </a:p>
+                  </a:txBody>
+                  <a:tcPr marL="73152" marR="73152">
+                    <a:noFill/>
+                    <a:lnL w="9525">
+                      <a:solidFill>
+                        <a:srgbClr val="000000"/>
+                      </a:solidFill>
+                    </a:lnL>
+                    <a:lnR w="9525">
+                      <a:solidFill>
+                        <a:srgbClr val="000000"/>
+                      </a:solidFill>
+                    </a:lnR>
+                    <a:lnT w="9525">
+                      <a:solidFill>
+                        <a:srgbClr val="000000"/>
+                      </a:solidFill>
+                    </a:lnT>
+                    <a:lnB w="9525">
+                      <a:solidFill>
+                        <a:srgbClr val="000000"/>
+                      </a:solidFill>
+                    </a:lnB>
+                  </a:tcPr>
+                </a:tc>
+                <a:tc>
+                  <a:txBody>
+                    <a:bodyPr wrap="square"/>
+                    <a:lstStyle/>
+                    <a:p>
+                      <a:r>
+                        <a:rPr sz="1600" b="0" i="0">
+                          <a:solidFill>
+                            <a:srgbClr val="000000"/>
+                          </a:solidFill>
+                          <a:latin typeface="Arial"/>
+                        </a:rPr>
+                        <a:t>No Member Set by Two Others</a:t>
+                      </a:r>
+                    </a:p>
+                  </a:txBody>
+                  <a:tcPr marL="73152" marR="73152">
+                    <a:noFill/>
+                    <a:lnL w="9525">
+                      <a:solidFill>
+                        <a:srgbClr val="000000"/>
+                      </a:solidFill>
+                    </a:lnL>
+                    <a:lnR w="9525">
+                      <a:solidFill>
+                        <a:srgbClr val="000000"/>
+                      </a:solidFill>
+                    </a:lnR>
+                    <a:lnT w="9525">
+                      <a:solidFill>
+                        <a:srgbClr val="000000"/>
+                      </a:solidFill>
+                    </a:lnT>
+                    <a:lnB w="9525">
+                      <a:solidFill>
+                        <a:srgbClr val="000000"/>
+                      </a:solidFill>
+                    </a:lnB>
+                  </a:tcPr>
+                </a:tc>
+              </a:tr>
+              <a:tr h="502920">
+                <a:tc>
+                  <a:txBody>
+                    <a:bodyPr wrap="square"/>
+                    <a:lstStyle/>
+                    <a:p>
+                      <a:r>
+                        <a:rPr sz="1600" b="0" i="0">
+                          <a:solidFill>
+                            <a:srgbClr val="000000"/>
+                          </a:solidFill>
+                          <a:latin typeface="Arial"/>
+                        </a:rPr>
+                        <a:t>Dyadic Ring</a:t>
+                      </a:r>
+                    </a:p>
+                  </a:txBody>
+                  <a:tcPr marL="73152" marR="73152">
+                    <a:noFill/>
+                    <a:lnL w="9525">
+                      <a:solidFill>
+                        <a:srgbClr val="000000"/>
+                      </a:solidFill>
+                    </a:lnL>
+                    <a:lnR w="9525">
+                      <a:solidFill>
+                        <a:srgbClr val="000000"/>
+                      </a:solidFill>
+                    </a:lnR>
+                    <a:lnT w="9525">
+                      <a:solidFill>
+                        <a:srgbClr val="000000"/>
+                      </a:solidFill>
+                    </a:lnT>
+                    <a:lnB w="9525">
+                      <a:solidFill>
+                        <a:srgbClr val="000000"/>
+                      </a:solidFill>
+                    </a:lnB>
+                  </a:tcPr>
+                </a:tc>
+                <a:tc>
+                  <a:txBody>
+                    <a:bodyPr wrap="square"/>
+                    <a:lstStyle/>
+                    <a:p>
+                      <a:r>
+                        <a:rPr sz="1600" b="0" i="0">
+                          <a:solidFill>
+                            <a:srgbClr val="000000"/>
+                          </a:solidFill>
+                          <a:latin typeface="Arial"/>
+                        </a:rPr>
+                        <a:t>One of the 89</a:t>
+                      </a:r>
+                    </a:p>
+                  </a:txBody>
+                  <a:tcPr marL="73152" marR="73152">
+                    <a:noFill/>
+                    <a:lnL w="9525">
+                      <a:solidFill>
+                        <a:srgbClr val="000000"/>
+                      </a:solidFill>
+                    </a:lnL>
+                    <a:lnR w="9525">
+                      <a:solidFill>
+                        <a:srgbClr val="000000"/>
+                      </a:solidFill>
+                    </a:lnR>
+                    <a:lnT w="9525">
+                      <a:solidFill>
+                        <a:srgbClr val="000000"/>
+                      </a:solidFill>
+                    </a:lnT>
+                    <a:lnB w="9525">
+                      <a:solidFill>
+                        <a:srgbClr val="000000"/>
+                      </a:solidFill>
+                    </a:lnB>
+                  </a:tcPr>
+                </a:tc>
+                <a:tc>
+                  <a:txBody>
+                    <a:bodyPr wrap="square"/>
+                    <a:lstStyle/>
+                    <a:p>
+                      <a:r>
+                        <a:rPr sz="1600" b="0" i="0">
+                          <a:solidFill>
+                            <a:srgbClr val="000000"/>
+                          </a:solidFill>
+                          <a:latin typeface="Arial"/>
+                        </a:rPr>
+                        <a:t>Recurrent pairs</a:t>
+                      </a:r>
+                    </a:p>
+                  </a:txBody>
+                  <a:tcPr marL="73152" marR="73152">
+                    <a:noFill/>
+                    <a:lnL w="9525">
+                      <a:solidFill>
+                        <a:srgbClr val="000000"/>
+                      </a:solidFill>
+                    </a:lnL>
+                    <a:lnR w="9525">
+                      <a:solidFill>
+                        <a:srgbClr val="000000"/>
+                      </a:solidFill>
+                    </a:lnR>
+                    <a:lnT w="9525">
+                      <a:solidFill>
+                        <a:srgbClr val="000000"/>
+                      </a:solidFill>
+                    </a:lnT>
+                    <a:lnB w="9525">
+                      <a:solidFill>
+                        <a:srgbClr val="000000"/>
+                      </a:solidFill>
+                    </a:lnB>
+                  </a:tcPr>
+                </a:tc>
+                <a:tc>
+                  <a:txBody>
+                    <a:bodyPr wrap="square"/>
+                    <a:lstStyle/>
+                    <a:p>
+                      <a:r>
+                        <a:rPr sz="1600" b="0" i="0">
+                          <a:solidFill>
+                            <a:srgbClr val="000000"/>
+                          </a:solidFill>
+                          <a:latin typeface="Arial"/>
+                        </a:rPr>
+                        <a:t>Φ = 2.0</a:t>
+                      </a:r>
+                    </a:p>
+                  </a:txBody>
+                  <a:tcPr marL="73152" marR="73152">
+                    <a:noFill/>
+                    <a:lnL w="9525">
+                      <a:solidFill>
+                        <a:srgbClr val="000000"/>
+                      </a:solidFill>
+                    </a:lnL>
+                    <a:lnR w="9525">
+                      <a:solidFill>
+                        <a:srgbClr val="000000"/>
+                      </a:solidFill>
+                    </a:lnR>
+                    <a:lnT w="9525">
+                      <a:solidFill>
+                        <a:srgbClr val="000000"/>
+                      </a:solidFill>
+                    </a:lnT>
+                    <a:lnB w="9525">
+                      <a:solidFill>
+                        <a:srgbClr val="000000"/>
+                      </a:solidFill>
+                    </a:lnB>
+                  </a:tcPr>
+                </a:tc>
+                <a:tc>
+                  <a:txBody>
+                    <a:bodyPr wrap="square"/>
+                    <a:lstStyle/>
+                    <a:p>
+                      <a:r>
+                        <a:rPr sz="1600" b="0" i="0">
+                          <a:solidFill>
+                            <a:srgbClr val="000000"/>
+                          </a:solidFill>
+                          <a:latin typeface="Arial"/>
+                        </a:rPr>
+                        <a:t>Whole Without a Triad</a:t>
+                      </a:r>
+                    </a:p>
+                  </a:txBody>
+                  <a:tcPr marL="73152" marR="73152">
+                    <a:noFill/>
+                    <a:lnL w="9525">
+                      <a:solidFill>
+                        <a:srgbClr val="000000"/>
+                      </a:solidFill>
+                    </a:lnL>
+                    <a:lnR w="9525">
+                      <a:solidFill>
+                        <a:srgbClr val="000000"/>
+                      </a:solidFill>
+                    </a:lnR>
+                    <a:lnT w="9525">
+                      <a:solidFill>
+                        <a:srgbClr val="000000"/>
+                      </a:solidFill>
+                    </a:lnT>
+                    <a:lnB w="9525">
+                      <a:solidFill>
+                        <a:srgbClr val="000000"/>
+                      </a:solidFill>
+                    </a:lnB>
+                  </a:tcPr>
+                </a:tc>
+              </a:tr>
+              <a:tr h="502920">
+                <a:tc>
+                  <a:txBody>
+                    <a:bodyPr wrap="square"/>
+                    <a:lstStyle/>
+                    <a:p>
+                      <a:r>
+                        <a:rPr sz="1600" b="0" i="0">
+                          <a:solidFill>
+                            <a:srgbClr val="000000"/>
+                          </a:solidFill>
+                          <a:latin typeface="Arial"/>
+                        </a:rPr>
+                        <a:t>Uncoupled Triad</a:t>
+                      </a:r>
+                    </a:p>
+                  </a:txBody>
+                  <a:tcPr marL="73152" marR="73152">
+                    <a:noFill/>
+                    <a:lnL w="9525">
+                      <a:solidFill>
+                        <a:srgbClr val="000000"/>
+                      </a:solidFill>
+                    </a:lnL>
+                    <a:lnR w="9525">
+                      <a:solidFill>
+                        <a:srgbClr val="000000"/>
+                      </a:solidFill>
+                    </a:lnR>
+                    <a:lnT w="9525">
+                      <a:solidFill>
+                        <a:srgbClr val="000000"/>
+                      </a:solidFill>
+                    </a:lnT>
+                    <a:lnB w="9525">
+                      <a:solidFill>
+                        <a:srgbClr val="000000"/>
+                      </a:solidFill>
+                    </a:lnB>
+                  </a:tcPr>
+                </a:tc>
+                <a:tc>
+                  <a:txBody>
+                    <a:bodyPr wrap="square"/>
+                    <a:lstStyle/>
+                    <a:p>
+                      <a:r>
+                        <a:rPr sz="1600" b="0" i="0">
+                          <a:solidFill>
+                            <a:srgbClr val="000000"/>
+                          </a:solidFill>
+                          <a:latin typeface="Arial"/>
+                        </a:rPr>
+                        <a:t>11 / 30 Systems</a:t>
+                      </a:r>
+                    </a:p>
+                  </a:txBody>
+                  <a:tcPr marL="73152" marR="73152">
+                    <a:noFill/>
+                    <a:lnL w="9525">
+                      <a:solidFill>
+                        <a:srgbClr val="000000"/>
+                      </a:solidFill>
+                    </a:lnL>
+                    <a:lnR w="9525">
+                      <a:solidFill>
+                        <a:srgbClr val="000000"/>
+                      </a:solidFill>
+                    </a:lnR>
+                    <a:lnT w="9525">
+                      <a:solidFill>
+                        <a:srgbClr val="000000"/>
+                      </a:solidFill>
+                    </a:lnT>
+                    <a:lnB w="9525">
+                      <a:solidFill>
+                        <a:srgbClr val="000000"/>
+                      </a:solidFill>
+                    </a:lnB>
+                  </a:tcPr>
+                </a:tc>
+                <a:tc>
+                  <a:txBody>
+                    <a:bodyPr wrap="square"/>
+                    <a:lstStyle/>
+                    <a:p>
+                      <a:r>
+                        <a:rPr sz="1600" b="0" i="0">
+                          <a:solidFill>
+                            <a:srgbClr val="000000"/>
+                          </a:solidFill>
+                          <a:latin typeface="Arial"/>
+                        </a:rPr>
+                        <a:t>Two-input gate</a:t>
+                      </a:r>
+                    </a:p>
+                  </a:txBody>
+                  <a:tcPr marL="73152" marR="73152">
+                    <a:noFill/>
+                    <a:lnL w="9525">
+                      <a:solidFill>
+                        <a:srgbClr val="000000"/>
+                      </a:solidFill>
+                    </a:lnL>
+                    <a:lnR w="9525">
+                      <a:solidFill>
+                        <a:srgbClr val="000000"/>
+                      </a:solidFill>
+                    </a:lnR>
+                    <a:lnT w="9525">
+                      <a:solidFill>
+                        <a:srgbClr val="000000"/>
+                      </a:solidFill>
+                    </a:lnT>
+                    <a:lnB w="9525">
+                      <a:solidFill>
+                        <a:srgbClr val="000000"/>
+                      </a:solidFill>
+                    </a:lnB>
+                  </a:tcPr>
+                </a:tc>
+                <a:tc>
+                  <a:txBody>
+                    <a:bodyPr wrap="square"/>
+                    <a:lstStyle/>
+                    <a:p>
+                      <a:r>
+                        <a:rPr sz="1600" b="0" i="0">
+                          <a:solidFill>
+                            <a:srgbClr val="000000"/>
+                          </a:solidFill>
+                          <a:latin typeface="Arial"/>
+                        </a:rPr>
+                        <a:t>Φ = 0.0</a:t>
+                      </a:r>
+                    </a:p>
+                  </a:txBody>
+                  <a:tcPr marL="73152" marR="73152">
+                    <a:noFill/>
+                    <a:lnL w="9525">
+                      <a:solidFill>
+                        <a:srgbClr val="000000"/>
+                      </a:solidFill>
+                    </a:lnL>
+                    <a:lnR w="9525">
+                      <a:solidFill>
+                        <a:srgbClr val="000000"/>
+                      </a:solidFill>
+                    </a:lnR>
+                    <a:lnT w="9525">
+                      <a:solidFill>
+                        <a:srgbClr val="000000"/>
+                      </a:solidFill>
+                    </a:lnT>
+                    <a:lnB w="9525">
+                      <a:solidFill>
+                        <a:srgbClr val="000000"/>
+                      </a:solidFill>
+                    </a:lnB>
+                  </a:tcPr>
+                </a:tc>
+                <a:tc>
+                  <a:txBody>
+                    <a:bodyPr wrap="square"/>
+                    <a:lstStyle/>
+                    <a:p>
+                      <a:r>
+                        <a:rPr sz="1600" b="0" i="0">
+                          <a:solidFill>
+                            <a:srgbClr val="000000"/>
+                          </a:solidFill>
+                          <a:latin typeface="Arial"/>
+                        </a:rPr>
+                        <a:t>Triad Without a Whole</a:t>
+                      </a:r>
+                    </a:p>
+                  </a:txBody>
+                  <a:tcPr marL="73152" marR="73152">
+                    <a:noFill/>
+                    <a:lnL w="9525">
+                      <a:solidFill>
+                        <a:srgbClr val="000000"/>
+                      </a:solidFill>
+                    </a:lnL>
+                    <a:lnR w="9525">
+                      <a:solidFill>
+                        <a:srgbClr val="000000"/>
+                      </a:solidFill>
+                    </a:lnR>
+                    <a:lnT w="9525">
+                      <a:solidFill>
+                        <a:srgbClr val="000000"/>
+                      </a:solidFill>
+                    </a:lnT>
+                    <a:lnB w="9525">
+                      <a:solidFill>
+                        <a:srgbClr val="000000"/>
+                      </a:solidFill>
+                    </a:lnB>
+                  </a:tcPr>
+                </a:tc>
+              </a:tr>
+              <a:tr h="502920">
+                <a:tc>
+                  <a:txBody>
+                    <a:bodyPr wrap="square"/>
+                    <a:lstStyle/>
+                    <a:p>
+                      <a:r>
+                        <a:rPr sz="1600" b="0" i="0">
+                          <a:solidFill>
+                            <a:srgbClr val="000000"/>
+                          </a:solidFill>
+                          <a:latin typeface="Arial"/>
+                        </a:rPr>
+                        <a:t>Integrated Triad</a:t>
+                      </a:r>
+                    </a:p>
+                  </a:txBody>
+                  <a:tcPr marL="73152" marR="73152">
+                    <a:noFill/>
+                    <a:lnL w="9525">
+                      <a:solidFill>
+                        <a:srgbClr val="000000"/>
+                      </a:solidFill>
+                    </a:lnL>
+                    <a:lnR w="9525">
+                      <a:solidFill>
+                        <a:srgbClr val="000000"/>
+                      </a:solidFill>
+                    </a:lnR>
+                    <a:lnT w="9525">
+                      <a:solidFill>
+                        <a:srgbClr val="000000"/>
+                      </a:solidFill>
+                    </a:lnT>
+                    <a:lnB w="9525">
+                      <a:solidFill>
+                        <a:srgbClr val="000000"/>
+                      </a:solidFill>
+                    </a:lnB>
+                  </a:tcPr>
+                </a:tc>
+                <a:tc>
+                  <a:txBody>
+                    <a:bodyPr wrap="square"/>
+                    <a:lstStyle/>
+                    <a:p>
+                      <a:r>
+                        <a:rPr sz="1600" b="0" i="0">
+                          <a:solidFill>
+                            <a:srgbClr val="000000"/>
+                          </a:solidFill>
+                          <a:latin typeface="Arial"/>
+                        </a:rPr>
+                        <a:t>5 / 30 Systems</a:t>
+                      </a:r>
+                    </a:p>
+                  </a:txBody>
+                  <a:tcPr marL="73152" marR="73152">
+                    <a:noFill/>
+                    <a:lnL w="9525">
+                      <a:solidFill>
+                        <a:srgbClr val="000000"/>
+                      </a:solidFill>
+                    </a:lnL>
+                    <a:lnR w="9525">
+                      <a:solidFill>
+                        <a:srgbClr val="000000"/>
+                      </a:solidFill>
+                    </a:lnR>
+                    <a:lnT w="9525">
+                      <a:solidFill>
+                        <a:srgbClr val="000000"/>
+                      </a:solidFill>
+                    </a:lnT>
+                    <a:lnB w="9525">
+                      <a:solidFill>
+                        <a:srgbClr val="000000"/>
+                      </a:solidFill>
+                    </a:lnB>
+                  </a:tcPr>
+                </a:tc>
+                <a:tc>
+                  <a:txBody>
+                    <a:bodyPr wrap="square"/>
+                    <a:lstStyle/>
+                    <a:p>
+                      <a:r>
+                        <a:rPr sz="1600" b="0" i="0">
+                          <a:solidFill>
+                            <a:srgbClr val="000000"/>
+                          </a:solidFill>
+                          <a:latin typeface="Arial"/>
+                        </a:rPr>
+                        <a:t>Two-input gate in the loop</a:t>
+                      </a:r>
+                    </a:p>
+                  </a:txBody>
+                  <a:tcPr marL="73152" marR="73152">
+                    <a:noFill/>
+                    <a:lnL w="9525">
+                      <a:solidFill>
+                        <a:srgbClr val="000000"/>
+                      </a:solidFill>
+                    </a:lnL>
+                    <a:lnR w="9525">
+                      <a:solidFill>
+                        <a:srgbClr val="000000"/>
+                      </a:solidFill>
+                    </a:lnR>
+                    <a:lnT w="9525">
+                      <a:solidFill>
+                        <a:srgbClr val="000000"/>
+                      </a:solidFill>
+                    </a:lnT>
+                    <a:lnB w="9525">
+                      <a:solidFill>
+                        <a:srgbClr val="000000"/>
+                      </a:solidFill>
+                    </a:lnB>
+                  </a:tcPr>
+                </a:tc>
+                <a:tc>
+                  <a:txBody>
+                    <a:bodyPr wrap="square"/>
+                    <a:lstStyle/>
+                    <a:p>
+                      <a:r>
+                        <a:rPr sz="1600" b="0" i="0">
+                          <a:solidFill>
+                            <a:srgbClr val="000000"/>
+                          </a:solidFill>
+                          <a:latin typeface="Arial"/>
+                        </a:rPr>
+                        <a:t>Φ &gt; 0</a:t>
+                      </a:r>
+                    </a:p>
+                  </a:txBody>
+                  <a:tcPr marL="73152" marR="73152">
+                    <a:noFill/>
+                    <a:lnL w="9525">
+                      <a:solidFill>
+                        <a:srgbClr val="000000"/>
+                      </a:solidFill>
+                    </a:lnL>
+                    <a:lnR w="9525">
+                      <a:solidFill>
+                        <a:srgbClr val="000000"/>
+                      </a:solidFill>
+                    </a:lnR>
+                    <a:lnT w="9525">
+                      <a:solidFill>
+                        <a:srgbClr val="000000"/>
+                      </a:solidFill>
+                    </a:lnT>
+                    <a:lnB w="9525">
+                      <a:solidFill>
+                        <a:srgbClr val="000000"/>
+                      </a:solidFill>
+                    </a:lnB>
+                  </a:tcPr>
+                </a:tc>
+                <a:tc>
+                  <a:txBody>
+                    <a:bodyPr wrap="square"/>
+                    <a:lstStyle/>
+                    <a:p>
+                      <a:r>
+                        <a:rPr sz="1600" b="0" i="0">
+                          <a:solidFill>
+                            <a:srgbClr val="000000"/>
+                          </a:solidFill>
+                          <a:latin typeface="Arial"/>
+                        </a:rPr>
+                        <a:t>Genuine Triadic Complex</a:t>
+                      </a:r>
+                    </a:p>
+                  </a:txBody>
+                  <a:tcPr marL="73152" marR="73152">
+                    <a:noFill/>
+                    <a:lnL w="9525">
+                      <a:solidFill>
+                        <a:srgbClr val="000000"/>
+                      </a:solidFill>
+                    </a:lnL>
+                    <a:lnR w="9525">
+                      <a:solidFill>
+                        <a:srgbClr val="000000"/>
+                      </a:solidFill>
+                    </a:lnR>
+                    <a:lnT w="9525">
+                      <a:solidFill>
+                        <a:srgbClr val="000000"/>
+                      </a:solidFill>
+                    </a:lnT>
+                    <a:lnB w="9525">
+                      <a:solidFill>
+                        <a:srgbClr val="000000"/>
+                      </a:solidFill>
+                    </a:lnB>
+                  </a:tcPr>
+                </a:tc>
+              </a:tr>
+            </a:tbl>
+          </a:graphicData>
+        </a:graphic>
+      </p:graphicFrame>
     </p:spTree>
   </p:cSld>
   <p:clrMapOvr>
@@ -6135,8 +7963,8 @@
         </p:nvSpPr>
         <p:spPr>
           <a:xfrm>
-            <a:off x="822960" y="640080"/>
-            <a:ext cx="10545775" cy="1188720"/>
+            <a:off x="822960" y="502920"/>
+            <a:ext cx="10545775" cy="274320"/>
           </a:xfrm>
           <a:prstGeom prst="rect">
             <a:avLst/>
@@ -6144,7 +7972,7 @@
           <a:noFill/>
         </p:spPr>
         <p:txBody>
-          <a:bodyPr wrap="square" anchor="b" lIns="0" rIns="0" tIns="0" bIns="0">
+          <a:bodyPr wrap="square" anchor="t" lIns="0" rIns="0" tIns="0" bIns="0">
             <a:spAutoFit/>
           </a:bodyPr>
           <a:lstStyle/>
@@ -6155,13 +7983,13 @@
               </a:spcBef>
             </a:pPr>
             <a:r>
-              <a:rPr sz="3600" b="1" i="0">
-                <a:solidFill>
-                  <a:srgbClr val="000000"/>
-                </a:solidFill>
-                <a:latin typeface="Arial"/>
-              </a:rPr>
-              <a:t>Both correct</a:t>
+              <a:rPr sz="1400" b="0" i="0">
+                <a:solidFill>
+                  <a:srgbClr val="000000"/>
+                </a:solidFill>
+                <a:latin typeface="Arial"/>
+              </a:rPr>
+              <a:t>SYNTHESIS &amp; CONCLUSION</a:t>
             </a:r>
           </a:p>
         </p:txBody>
@@ -6174,8 +8002,8 @@
         </p:nvSpPr>
         <p:spPr>
           <a:xfrm>
-            <a:off x="822960" y="2103120"/>
-            <a:ext cx="10545775" cy="3931920"/>
+            <a:off x="822960" y="822960"/>
+            <a:ext cx="10545775" cy="1005840"/>
           </a:xfrm>
           <a:prstGeom prst="rect">
             <a:avLst/>
@@ -6194,77 +8022,100 @@
               </a:spcBef>
             </a:pPr>
             <a:r>
-              <a:rPr sz="2400" b="0" i="1">
-                <a:solidFill>
-                  <a:srgbClr val="000000"/>
-                </a:solidFill>
-                <a:latin typeface="Arial"/>
-              </a:rPr>
-              <a:t>both Peirce and Quine were correct: the issue entirely depends on exactly what constructive resources are to be allowed</a:t>
-            </a:r>
-          </a:p>
-          <a:p>
-            <a:pPr algn="l">
-              <a:spcBef>
-                <a:spcPts val="1400"/>
-              </a:spcBef>
-            </a:pPr>
-            <a:r>
-              <a:rPr sz="1800" b="0" i="0">
-                <a:solidFill>
-                  <a:srgbClr val="000000"/>
-                </a:solidFill>
-                <a:latin typeface="Arial"/>
-              </a:rPr>
-              <a:t>— Burch, Stanford Encyclopedia of Philosophy</a:t>
-            </a:r>
-          </a:p>
-          <a:p>
-            <a:pPr algn="l">
-              <a:spcBef>
-                <a:spcPts val="1400"/>
-              </a:spcBef>
-            </a:pPr>
-            <a:r>
-              <a:rPr sz="2400" b="0" i="1">
-                <a:solidFill>
-                  <a:srgbClr val="000000"/>
-                </a:solidFill>
-                <a:latin typeface="Arial"/>
-              </a:rPr>
-              <a:t>It cannot simply be that Peirce and Quine are both right.</a:t>
-            </a:r>
-          </a:p>
-          <a:p>
-            <a:pPr algn="l">
-              <a:spcBef>
-                <a:spcPts val="1400"/>
-              </a:spcBef>
-            </a:pPr>
-            <a:r>
-              <a:rPr sz="1800" b="0" i="0">
-                <a:solidFill>
-                  <a:srgbClr val="000000"/>
-                </a:solidFill>
-                <a:latin typeface="Arial"/>
-              </a:rPr>
-              <a:t>— Koshkin, 2022</a:t>
-            </a:r>
-          </a:p>
-          <a:p>
-            <a:pPr algn="l">
-              <a:spcBef>
-                <a:spcPts val="1400"/>
-              </a:spcBef>
-            </a:pPr>
-            <a:r>
-              <a:rPr sz="2400" b="0" i="0">
-                <a:solidFill>
-                  <a:srgbClr val="000000"/>
-                </a:solidFill>
-                <a:latin typeface="Arial"/>
-              </a:rPr>
-              <a:t>Logic tests relations as sets of tuples. It has no test for coordination as a running system.</a:t>
+              <a:rPr sz="3400" b="1" i="0">
+                <a:solidFill>
+                  <a:srgbClr val="000000"/>
+                </a:solidFill>
+                <a:latin typeface="Arial"/>
+              </a:rPr>
+              <a:t>The Ontological Reality of Algorithmacy</a:t>
+            </a:r>
+          </a:p>
+        </p:txBody>
+      </p:sp>
+      <p:sp>
+        <p:nvSpPr>
+          <p:cNvPr id="4" name="TextBox 3"/>
+          <p:cNvSpPr txBox="1"/>
+          <p:nvPr/>
+        </p:nvSpPr>
+        <p:spPr>
+          <a:xfrm>
+            <a:off x="822960" y="2011680"/>
+            <a:ext cx="10545775" cy="4297680"/>
+          </a:xfrm>
+          <a:prstGeom prst="rect">
+            <a:avLst/>
+          </a:prstGeom>
+          <a:noFill/>
+        </p:spPr>
+        <p:txBody>
+          <a:bodyPr wrap="square" anchor="t" lIns="0" rIns="0" tIns="0" bIns="0">
+            <a:spAutoFit/>
+          </a:bodyPr>
+          <a:lstStyle/>
+          <a:p>
+            <a:pPr algn="l">
+              <a:spcBef>
+                <a:spcPts val="0"/>
+              </a:spcBef>
+            </a:pPr>
+            <a:r>
+              <a:rPr sz="2200" b="0" i="0">
+                <a:solidFill>
+                  <a:srgbClr val="000000"/>
+                </a:solidFill>
+                <a:latin typeface="Arial"/>
+              </a:rPr>
+              <a:t>Algorithmacy is the epistemic and systemic facility required to model, audit, and navigate irreducible triadic causal systems that cannot be decomposed into dyadic communication channels.</a:t>
+            </a:r>
+          </a:p>
+          <a:p>
+            <a:pPr algn="l">
+              <a:spcBef>
+                <a:spcPts val="1600"/>
+              </a:spcBef>
+            </a:pPr>
+            <a:r>
+              <a:rPr sz="2200" b="0" i="0">
+                <a:solidFill>
+                  <a:srgbClr val="000000"/>
+                </a:solidFill>
+                <a:latin typeface="Arial"/>
+              </a:rPr>
+              <a:t>Join-Irreducible Thirdness</a:t>
+            </a:r>
+          </a:p>
+          <a:p>
+            <a:pPr algn="l">
+              <a:spcBef>
+                <a:spcPts val="400"/>
+              </a:spcBef>
+            </a:pPr>
+            <a:r>
+              <a:rPr sz="2200" b="0" i="0">
+                <a:solidFill>
+                  <a:srgbClr val="000000"/>
+                </a:solidFill>
+                <a:latin typeface="Arial"/>
+              </a:rPr>
+              <a:t>Measure-Theoretic Synergy</a:t>
+            </a:r>
+          </a:p>
+          <a:p>
+            <a:pPr algn="l">
+              <a:spcBef>
+                <a:spcPts val="400"/>
+              </a:spcBef>
+            </a:pPr>
+            <a:r>
+              <a:rPr sz="2200" b="0" i="0">
+                <a:solidFill>
+                  <a:srgbClr val="000000"/>
+                </a:solidFill>
+                <a:latin typeface="Arial"/>
+              </a:rPr>
+              <a:t>Positive Causal Integration (Φ &gt; 0)</a:t>
             </a:r>
           </a:p>
         </p:txBody>
@@ -6303,8 +8154,8 @@
         </p:nvSpPr>
         <p:spPr>
           <a:xfrm>
-            <a:off x="822960" y="640080"/>
-            <a:ext cx="10545775" cy="1188720"/>
+            <a:off x="822960" y="502920"/>
+            <a:ext cx="10545775" cy="274320"/>
           </a:xfrm>
           <a:prstGeom prst="rect">
             <a:avLst/>
@@ -6312,7 +8163,7 @@
           <a:noFill/>
         </p:spPr>
         <p:txBody>
-          <a:bodyPr wrap="square" anchor="b" lIns="0" rIns="0" tIns="0" bIns="0">
+          <a:bodyPr wrap="square" anchor="t" lIns="0" rIns="0" tIns="0" bIns="0">
             <a:spAutoFit/>
           </a:bodyPr>
           <a:lstStyle/>
@@ -6323,13 +8174,13 @@
               </a:spcBef>
             </a:pPr>
             <a:r>
-              <a:rPr sz="3600" b="1" i="0">
-                <a:solidFill>
-                  <a:srgbClr val="000000"/>
-                </a:solidFill>
-                <a:latin typeface="Arial"/>
-              </a:rPr>
-              <a:t>Our argument: a causal test for irreducible triads</a:t>
+              <a:rPr sz="1400" b="0" i="0">
+                <a:solidFill>
+                  <a:srgbClr val="000000"/>
+                </a:solidFill>
+                <a:latin typeface="Arial"/>
+              </a:rPr>
+              <a:t>FROM THE LAB</a:t>
             </a:r>
           </a:p>
         </p:txBody>
@@ -6342,8 +8193,8 @@
         </p:nvSpPr>
         <p:spPr>
           <a:xfrm>
-            <a:off x="822960" y="2103120"/>
-            <a:ext cx="10545775" cy="3931920"/>
+            <a:off x="822960" y="822960"/>
+            <a:ext cx="10545775" cy="1005840"/>
           </a:xfrm>
           <a:prstGeom prst="rect">
             <a:avLst/>
@@ -6362,51 +8213,58 @@
               </a:spcBef>
             </a:pPr>
             <a:r>
-              <a:rPr sz="2400" b="0" i="0">
-                <a:solidFill>
-                  <a:srgbClr val="000000"/>
-                </a:solidFill>
-                <a:latin typeface="Arial"/>
-              </a:rPr>
-              <a:t>Φ: what a system loses under its weakest cut. Φ = 0: it splits at some cut.</a:t>
-            </a:r>
-          </a:p>
-          <a:p>
-            <a:pPr algn="l">
-              <a:spcBef>
-                <a:spcPts val="1400"/>
-              </a:spcBef>
-            </a:pPr>
-            <a:r>
-              <a:rPr sz="2400" b="0" i="0">
-                <a:solidFill>
-                  <a:srgbClr val="000000"/>
-                </a:solidFill>
-                <a:latin typeface="Arial"/>
-              </a:rPr>
-              <a:t>IIT also reads, element by element, what each depends on irreducibly.</a:t>
-            </a:r>
-          </a:p>
-          <a:p>
-            <a:pPr algn="l">
-              <a:spcBef>
-                <a:spcPts val="1400"/>
-              </a:spcBef>
-            </a:pPr>
-            <a:r>
-              <a:rPr sz="2400" b="0" i="0">
-                <a:solidFill>
-                  <a:srgbClr val="000000"/>
-                </a:solidFill>
-                <a:latin typeface="Arial"/>
-              </a:rPr>
-              <a:t>Irreducible triad: a party jointly determined by two others, all three inside one whole.</a:t>
-            </a:r>
-          </a:p>
-          <a:p>
-            <a:pPr algn="l">
-              <a:spcBef>
-                <a:spcPts val="1400"/>
+              <a:rPr sz="3400" b="1" i="0">
+                <a:solidFill>
+                  <a:srgbClr val="000000"/>
+                </a:solidFill>
+                <a:latin typeface="Arial"/>
+              </a:rPr>
+              <a:t>Genuine Giving and Its Imitation</a:t>
+            </a:r>
+          </a:p>
+        </p:txBody>
+      </p:sp>
+      <p:sp>
+        <p:nvSpPr>
+          <p:cNvPr id="4" name="TextBox 3"/>
+          <p:cNvSpPr txBox="1"/>
+          <p:nvPr/>
+        </p:nvSpPr>
+        <p:spPr>
+          <a:xfrm>
+            <a:off x="822960" y="2011680"/>
+            <a:ext cx="10545775" cy="4297680"/>
+          </a:xfrm>
+          <a:prstGeom prst="rect">
+            <a:avLst/>
+          </a:prstGeom>
+          <a:noFill/>
+        </p:spPr>
+        <p:txBody>
+          <a:bodyPr wrap="square" anchor="t" lIns="0" rIns="0" tIns="0" bIns="0">
+            <a:spAutoFit/>
+          </a:bodyPr>
+          <a:lstStyle/>
+          <a:p>
+            <a:pPr algn="l">
+              <a:spcBef>
+                <a:spcPts val="0"/>
+              </a:spcBef>
+            </a:pPr>
+            <a:r>
+              <a:rPr sz="2200" b="1" i="0">
+                <a:solidFill>
+                  <a:srgbClr val="000000"/>
+                </a:solidFill>
+                <a:latin typeface="Arial"/>
+              </a:rPr>
+              <a:t>Same Members, Same Φ</a:t>
+            </a:r>
+          </a:p>
+          <a:p>
+            <a:pPr algn="l">
+              <a:spcBef>
+                <a:spcPts val="400"/>
               </a:spcBef>
             </a:pPr>
             <a:r>
@@ -6414,15 +8272,31 @@
                 <a:solidFill>
                   <a:srgbClr val="000000"/>
                 </a:solidFill>
-                <a:latin typeface="Courier New"/>
-              </a:rPr>
-              <a:t>M' = A and B;  A' = M;  B' = M</a:t>
-            </a:r>
-          </a:p>
-          <a:p>
-            <a:pPr algn="l">
-              <a:spcBef>
-                <a:spcPts val="0"/>
+                <a:latin typeface="Arial"/>
+              </a:rPr>
+              <a:t>Giver, thing, receiver. Both circuits hold together as wholes: Φ = 2.0.</a:t>
+            </a:r>
+          </a:p>
+          <a:p>
+            <a:pPr algn="l">
+              <a:spcBef>
+                <a:spcPts val="1600"/>
+              </a:spcBef>
+            </a:pPr>
+            <a:r>
+              <a:rPr sz="2200" b="1" i="0">
+                <a:solidFill>
+                  <a:srgbClr val="000000"/>
+                </a:solidFill>
+                <a:latin typeface="Arial"/>
+              </a:rPr>
+              <a:t>Genuine Giving</a:t>
+            </a:r>
+          </a:p>
+          <a:p>
+            <a:pPr algn="l">
+              <a:spcBef>
+                <a:spcPts val="400"/>
               </a:spcBef>
             </a:pPr>
             <a:r>
@@ -6430,9 +8304,73 @@
                 <a:solidFill>
                   <a:srgbClr val="000000"/>
                 </a:solidFill>
-                <a:latin typeface="Courier New"/>
-              </a:rPr>
-              <a:t>Φ = 2.0, all three in the core</a:t>
+                <a:latin typeface="Arial"/>
+              </a:rPr>
+              <a:t>The receiver's possession is set by the giver and the thing together.</a:t>
+            </a:r>
+          </a:p>
+          <a:p>
+            <a:pPr algn="l">
+              <a:spcBef>
+                <a:spcPts val="1600"/>
+              </a:spcBef>
+            </a:pPr>
+            <a:r>
+              <a:rPr sz="2200" b="1" i="0">
+                <a:solidFill>
+                  <a:srgbClr val="000000"/>
+                </a:solidFill>
+                <a:latin typeface="Arial"/>
+              </a:rPr>
+              <a:t>The Imitation</a:t>
+            </a:r>
+          </a:p>
+          <a:p>
+            <a:pPr algn="l">
+              <a:spcBef>
+                <a:spcPts val="400"/>
+              </a:spcBef>
+            </a:pPr>
+            <a:r>
+              <a:rPr sz="2200" b="0" i="0">
+                <a:solidFill>
+                  <a:srgbClr val="000000"/>
+                </a:solidFill>
+                <a:latin typeface="Arial"/>
+              </a:rPr>
+              <a:t>Each member answers to one other. Φ cannot tell it from the real thing.</a:t>
+            </a:r>
+          </a:p>
+          <a:p>
+            <a:pPr algn="l">
+              <a:spcBef>
+                <a:spcPts val="1600"/>
+              </a:spcBef>
+            </a:pPr>
+            <a:r>
+              <a:rPr sz="2200" b="1" i="0">
+                <a:solidFill>
+                  <a:srgbClr val="000000"/>
+                </a:solidFill>
+                <a:latin typeface="Arial"/>
+              </a:rPr>
+              <a:t>The Difference</a:t>
+            </a:r>
+          </a:p>
+          <a:p>
+            <a:pPr algn="l">
+              <a:spcBef>
+                <a:spcPts val="400"/>
+              </a:spcBef>
+            </a:pPr>
+            <a:r>
+              <a:rPr sz="2200" b="0" i="0">
+                <a:solidFill>
+                  <a:srgbClr val="000000"/>
+                </a:solidFill>
+                <a:latin typeface="Arial"/>
+              </a:rPr>
+              <a:t>One member set by the other two, inside the whole. Only the gift has it.</a:t>
             </a:r>
           </a:p>
         </p:txBody>
@@ -6471,8 +8409,8 @@
         </p:nvSpPr>
         <p:spPr>
           <a:xfrm>
-            <a:off x="822960" y="640080"/>
-            <a:ext cx="10545775" cy="1188720"/>
+            <a:off x="822960" y="502920"/>
+            <a:ext cx="10545775" cy="274320"/>
           </a:xfrm>
           <a:prstGeom prst="rect">
             <a:avLst/>
@@ -6480,7 +8418,7 @@
           <a:noFill/>
         </p:spPr>
         <p:txBody>
-          <a:bodyPr wrap="square" anchor="b" lIns="0" rIns="0" tIns="0" bIns="0">
+          <a:bodyPr wrap="square" anchor="t" lIns="0" rIns="0" tIns="0" bIns="0">
             <a:spAutoFit/>
           </a:bodyPr>
           <a:lstStyle/>
@@ -6491,13 +8429,13 @@
               </a:spcBef>
             </a:pPr>
             <a:r>
-              <a:rPr sz="3600" b="1" i="0">
-                <a:solidFill>
-                  <a:srgbClr val="000000"/>
-                </a:solidFill>
-                <a:latin typeface="Arial"/>
-              </a:rPr>
-              <a:t>What IIT sorts</a:t>
+              <a:rPr sz="1400" b="0" i="0">
+                <a:solidFill>
+                  <a:srgbClr val="000000"/>
+                </a:solidFill>
+                <a:latin typeface="Arial"/>
+              </a:rPr>
+              <a:t>FROM THE LAB</a:t>
             </a:r>
           </a:p>
         </p:txBody>
@@ -6510,8 +8448,8 @@
         </p:nvSpPr>
         <p:spPr>
           <a:xfrm>
-            <a:off x="822960" y="2103120"/>
-            <a:ext cx="10545775" cy="3931920"/>
+            <a:off x="822960" y="822960"/>
+            <a:ext cx="10545775" cy="1005840"/>
           </a:xfrm>
           <a:prstGeom prst="rect">
             <a:avLst/>
@@ -6530,61 +8468,132 @@
               </a:spcBef>
             </a:pPr>
             <a:r>
-              <a:rPr sz="2400" b="0" i="0">
-                <a:solidFill>
-                  <a:srgbClr val="000000"/>
-                </a:solidFill>
-                <a:latin typeface="Arial"/>
-              </a:rPr>
-              <a:t>Pairs chained, looped or branched: no one jointly determined (89 wirings; post hoc)</a:t>
-            </a:r>
-          </a:p>
-          <a:p>
-            <a:pPr algn="l">
-              <a:spcBef>
-                <a:spcPts val="1400"/>
-              </a:spcBef>
-            </a:pPr>
-            <a:r>
-              <a:rPr sz="2400" b="0" i="0">
-                <a:solidFill>
-                  <a:srgbClr val="000000"/>
-                </a:solidFill>
-                <a:latin typeface="Arial"/>
-              </a:rPr>
-              <a:t>A whole, no triad: a ring of pairs, Φ = 2.0</a:t>
-            </a:r>
-          </a:p>
-          <a:p>
-            <a:pPr algn="l">
-              <a:spcBef>
-                <a:spcPts val="1400"/>
-              </a:spcBef>
-            </a:pPr>
-            <a:r>
-              <a:rPr sz="2400" b="0" i="0">
-                <a:solidFill>
-                  <a:srgbClr val="000000"/>
-                </a:solidFill>
-                <a:latin typeface="Arial"/>
-              </a:rPr>
-              <a:t>A triad, no whole: 11 of 30 fresh four-element systems, Φ = 0</a:t>
-            </a:r>
-          </a:p>
-          <a:p>
-            <a:pPr algn="l">
-              <a:spcBef>
-                <a:spcPts val="1400"/>
-              </a:spcBef>
-            </a:pPr>
-            <a:r>
-              <a:rPr sz="2400" b="0" i="0">
-                <a:solidFill>
-                  <a:srgbClr val="000000"/>
-                </a:solidFill>
-                <a:latin typeface="Arial"/>
-              </a:rPr>
-              <a:t>A triad in a whole: the control, genuine giving; 5 of 30</a:t>
+              <a:rPr sz="3400" b="1" i="0">
+                <a:solidFill>
+                  <a:srgbClr val="000000"/>
+                </a:solidFill>
+                <a:latin typeface="Arial"/>
+              </a:rPr>
+              <a:t>A Vote Is Not Always a Whole</a:t>
+            </a:r>
+          </a:p>
+        </p:txBody>
+      </p:sp>
+      <p:sp>
+        <p:nvSpPr>
+          <p:cNvPr id="4" name="TextBox 3"/>
+          <p:cNvSpPr txBox="1"/>
+          <p:nvPr/>
+        </p:nvSpPr>
+        <p:spPr>
+          <a:xfrm>
+            <a:off x="822960" y="2011680"/>
+            <a:ext cx="10545775" cy="4297680"/>
+          </a:xfrm>
+          <a:prstGeom prst="rect">
+            <a:avLst/>
+          </a:prstGeom>
+          <a:noFill/>
+        </p:spPr>
+        <p:txBody>
+          <a:bodyPr wrap="square" anchor="t" lIns="0" rIns="0" tIns="0" bIns="0">
+            <a:spAutoFit/>
+          </a:bodyPr>
+          <a:lstStyle/>
+          <a:p>
+            <a:pPr algn="l">
+              <a:spcBef>
+                <a:spcPts val="0"/>
+              </a:spcBef>
+            </a:pPr>
+            <a:r>
+              <a:rPr sz="2200" b="1" i="0">
+                <a:solidFill>
+                  <a:srgbClr val="000000"/>
+                </a:solidFill>
+                <a:latin typeface="Arial"/>
+              </a:rPr>
+              <a:t>Majority Rule</a:t>
+            </a:r>
+          </a:p>
+          <a:p>
+            <a:pPr algn="l">
+              <a:spcBef>
+                <a:spcPts val="400"/>
+              </a:spcBef>
+            </a:pPr>
+            <a:r>
+              <a:rPr sz="2200" b="0" i="0">
+                <a:solidFill>
+                  <a:srgbClr val="000000"/>
+                </a:solidFill>
+                <a:latin typeface="Arial"/>
+              </a:rPr>
+              <a:t>Three members, each following the majority of the three: Φ = 0.0. The system factors.</a:t>
+            </a:r>
+          </a:p>
+          <a:p>
+            <a:pPr algn="l">
+              <a:spcBef>
+                <a:spcPts val="1600"/>
+              </a:spcBef>
+            </a:pPr>
+            <a:r>
+              <a:rPr sz="2200" b="1" i="0">
+                <a:solidFill>
+                  <a:srgbClr val="000000"/>
+                </a:solidFill>
+                <a:latin typeface="Arial"/>
+              </a:rPr>
+              <a:t>Unanimity Rule</a:t>
+            </a:r>
+          </a:p>
+          <a:p>
+            <a:pPr algn="l">
+              <a:spcBef>
+                <a:spcPts val="400"/>
+              </a:spcBef>
+            </a:pPr>
+            <a:r>
+              <a:rPr sz="2200" b="0" i="0">
+                <a:solidFill>
+                  <a:srgbClr val="000000"/>
+                </a:solidFill>
+                <a:latin typeface="Arial"/>
+              </a:rPr>
+              <a:t>Each member goes only when all three say yes: Φ = 6.0. No cut leaves it whole.</a:t>
+            </a:r>
+          </a:p>
+          <a:p>
+            <a:pPr algn="l">
+              <a:spcBef>
+                <a:spcPts val="1600"/>
+              </a:spcBef>
+            </a:pPr>
+            <a:r>
+              <a:rPr sz="2200" b="1" i="0">
+                <a:solidFill>
+                  <a:srgbClr val="000000"/>
+                </a:solidFill>
+                <a:latin typeface="Arial"/>
+              </a:rPr>
+              <a:t>A Caveat</a:t>
+            </a:r>
+          </a:p>
+          <a:p>
+            <a:pPr algn="l">
+              <a:spcBef>
+                <a:spcPts val="400"/>
+              </a:spcBef>
+            </a:pPr>
+            <a:r>
+              <a:rPr sz="2200" b="0" i="0">
+                <a:solidFill>
+                  <a:srgbClr val="000000"/>
+                </a:solidFill>
+                <a:latin typeface="Arial"/>
+              </a:rPr>
+              <a:t>A related quorum form, three parties reading a mediator that moves on any two, factors under IIT 4.0 and binds under IIT 3.0.</a:t>
             </a:r>
           </a:p>
         </p:txBody>
@@ -6623,8 +8632,8 @@
         </p:nvSpPr>
         <p:spPr>
           <a:xfrm>
-            <a:off x="822960" y="640080"/>
-            <a:ext cx="10545775" cy="1188720"/>
+            <a:off x="822960" y="502920"/>
+            <a:ext cx="10545775" cy="274320"/>
           </a:xfrm>
           <a:prstGeom prst="rect">
             <a:avLst/>
@@ -6632,7 +8641,7 @@
           <a:noFill/>
         </p:spPr>
         <p:txBody>
-          <a:bodyPr wrap="square" anchor="b" lIns="0" rIns="0" tIns="0" bIns="0">
+          <a:bodyPr wrap="square" anchor="t" lIns="0" rIns="0" tIns="0" bIns="0">
             <a:spAutoFit/>
           </a:bodyPr>
           <a:lstStyle/>
@@ -6643,13 +8652,13 @@
               </a:spcBef>
             </a:pPr>
             <a:r>
-              <a:rPr sz="3600" b="1" i="0">
-                <a:solidFill>
-                  <a:srgbClr val="000000"/>
-                </a:solidFill>
-                <a:latin typeface="Arial"/>
-              </a:rPr>
-              <a:t>Algorithmacy's targets</a:t>
+              <a:rPr sz="1400" b="0" i="0">
+                <a:solidFill>
+                  <a:srgbClr val="000000"/>
+                </a:solidFill>
+                <a:latin typeface="Arial"/>
+              </a:rPr>
+              <a:t>FROM THE LAB</a:t>
             </a:r>
           </a:p>
         </p:txBody>
@@ -6662,8 +8671,8 @@
         </p:nvSpPr>
         <p:spPr>
           <a:xfrm>
-            <a:off x="822960" y="2103120"/>
-            <a:ext cx="10545775" cy="3931920"/>
+            <a:off x="822960" y="822960"/>
+            <a:ext cx="10545775" cy="1005840"/>
           </a:xfrm>
           <a:prstGeom prst="rect">
             <a:avLst/>
@@ -6682,61 +8691,419 @@
               </a:spcBef>
             </a:pPr>
             <a:r>
-              <a:rPr sz="2400" b="0" i="0">
-                <a:solidFill>
-                  <a:srgbClr val="000000"/>
-                </a:solidFill>
-                <a:latin typeface="Arial"/>
-              </a:rPr>
-              <a:t>The irreducible triads: a third fixed by two parties jointly, inside one whole with them.</a:t>
-            </a:r>
-          </a:p>
-          <a:p>
-            <a:pPr algn="l">
-              <a:spcBef>
-                <a:spcPts val="1400"/>
-              </a:spcBef>
-            </a:pPr>
-            <a:r>
-              <a:rPr sz="2400" b="0" i="0">
-                <a:solidFill>
-                  <a:srgbClr val="000000"/>
-                </a:solidFill>
-                <a:latin typeface="Arial"/>
-              </a:rPr>
-              <a:t>Older than AI: an arbitrator, a shared tally. Now at scale, through algorithms.</a:t>
-            </a:r>
-          </a:p>
-          <a:p>
-            <a:pPr algn="l">
-              <a:spcBef>
-                <a:spcPts val="1400"/>
-              </a:spcBef>
-            </a:pPr>
-            <a:r>
-              <a:rPr sz="2400" b="0" i="0">
-                <a:solidFill>
-                  <a:srgbClr val="000000"/>
-                </a:solidFill>
-                <a:latin typeface="Arial"/>
-              </a:rPr>
-              <a:t>Literacy handles chains. Algorithmacy handles these.</a:t>
-            </a:r>
-          </a:p>
-          <a:p>
-            <a:pPr algn="l">
-              <a:spcBef>
-                <a:spcPts val="1400"/>
-              </a:spcBef>
-            </a:pPr>
-            <a:r>
-              <a:rPr sz="2400" b="0" i="0">
-                <a:solidFill>
-                  <a:srgbClr val="000000"/>
-                </a:solidFill>
-                <a:latin typeface="Arial"/>
-              </a:rPr>
-              <a:t>Boolean models, not people. No platform's rule modelled.</a:t>
+              <a:rPr sz="3400" b="1" i="0">
+                <a:solidFill>
+                  <a:srgbClr val="000000"/>
+                </a:solidFill>
+                <a:latin typeface="Arial"/>
+              </a:rPr>
+              <a:t>Irreducible by Law, or by Nature</a:t>
+            </a:r>
+          </a:p>
+        </p:txBody>
+      </p:sp>
+      <p:sp>
+        <p:nvSpPr>
+          <p:cNvPr id="4" name="TextBox 3"/>
+          <p:cNvSpPr txBox="1"/>
+          <p:nvPr/>
+        </p:nvSpPr>
+        <p:spPr>
+          <a:xfrm>
+            <a:off x="822960" y="2011680"/>
+            <a:ext cx="10545775" cy="4297680"/>
+          </a:xfrm>
+          <a:prstGeom prst="rect">
+            <a:avLst/>
+          </a:prstGeom>
+          <a:noFill/>
+        </p:spPr>
+        <p:txBody>
+          <a:bodyPr wrap="square" anchor="t" lIns="0" rIns="0" tIns="0" bIns="0">
+            <a:spAutoFit/>
+          </a:bodyPr>
+          <a:lstStyle/>
+          <a:p>
+            <a:pPr algn="l">
+              <a:spcBef>
+                <a:spcPts val="0"/>
+              </a:spcBef>
+            </a:pPr>
+            <a:r>
+              <a:rPr sz="2200" b="1" i="0">
+                <a:solidFill>
+                  <a:srgbClr val="000000"/>
+                </a:solidFill>
+                <a:latin typeface="Arial"/>
+              </a:rPr>
+              <a:t>The Car Dealer</a:t>
+            </a:r>
+          </a:p>
+          <a:p>
+            <a:pPr algn="l">
+              <a:spcBef>
+                <a:spcPts val="400"/>
+              </a:spcBef>
+            </a:pPr>
+            <a:r>
+              <a:rPr sz="2200" b="0" i="0">
+                <a:solidFill>
+                  <a:srgbClr val="000000"/>
+                </a:solidFill>
+                <a:latin typeface="Arial"/>
+              </a:rPr>
+              <a:t>Maker, dealer, buyer, in a ring franchise law closes. The dealer is inside: Φ = 2.0.</a:t>
+            </a:r>
+          </a:p>
+          <a:p>
+            <a:pPr algn="l">
+              <a:spcBef>
+                <a:spcPts val="1600"/>
+              </a:spcBef>
+            </a:pPr>
+            <a:r>
+              <a:rPr sz="2200" b="1" i="0">
+                <a:solidFill>
+                  <a:srgbClr val="000000"/>
+                </a:solidFill>
+                <a:latin typeface="Arial"/>
+              </a:rPr>
+              <a:t>Lift the Ban</a:t>
+            </a:r>
+          </a:p>
+          <a:p>
+            <a:pPr algn="l">
+              <a:spcBef>
+                <a:spcPts val="400"/>
+              </a:spcBef>
+            </a:pPr>
+            <a:r>
+              <a:rPr sz="2200" b="0" i="0">
+                <a:solidFill>
+                  <a:srgbClr val="000000"/>
+                </a:solidFill>
+                <a:latin typeface="Arial"/>
+              </a:rPr>
+              <a:t>Let the maker sell direct: Φ = 2.0 → 0.0. The dealer drops out.</a:t>
+            </a:r>
+          </a:p>
+          <a:p>
+            <a:pPr algn="l">
+              <a:spcBef>
+                <a:spcPts val="1600"/>
+              </a:spcBef>
+            </a:pPr>
+            <a:r>
+              <a:rPr sz="2200" b="1" i="0">
+                <a:solidFill>
+                  <a:srgbClr val="000000"/>
+                </a:solidFill>
+                <a:latin typeface="Arial"/>
+              </a:rPr>
+              <a:t>The Clearinghouse</a:t>
+            </a:r>
+          </a:p>
+          <a:p>
+            <a:pPr algn="l">
+              <a:spcBef>
+                <a:spcPts val="400"/>
+              </a:spcBef>
+            </a:pPr>
+            <a:r>
+              <a:rPr sz="2200" b="0" i="0">
+                <a:solidFill>
+                  <a:srgbClr val="000000"/>
+                </a:solidFill>
+                <a:latin typeface="Arial"/>
+              </a:rPr>
+              <a:t>A third that needs both sides to act keeps its place: Φ = 2.0 → 2.0.</a:t>
+            </a:r>
+          </a:p>
+          <a:p>
+            <a:pPr algn="l">
+              <a:spcBef>
+                <a:spcPts val="1600"/>
+              </a:spcBef>
+            </a:pPr>
+            <a:r>
+              <a:rPr sz="2200" b="1" i="0">
+                <a:solidFill>
+                  <a:srgbClr val="000000"/>
+                </a:solidFill>
+                <a:latin typeface="Arial"/>
+              </a:rPr>
+              <a:t>The Brokerage Types, Sorted the Same Way</a:t>
+            </a:r>
+          </a:p>
+          <a:p>
+            <a:pPr algn="l">
+              <a:spcBef>
+                <a:spcPts val="400"/>
+              </a:spcBef>
+            </a:pPr>
+            <a:r>
+              <a:rPr sz="2200" b="0" i="0">
+                <a:solidFill>
+                  <a:srgbClr val="000000"/>
+                </a:solidFill>
+                <a:latin typeface="Arial"/>
+              </a:rPr>
+              <a:t>Keeps two sides apart: contingent. Needs both sides: necessary. Introduces them, then steps aside: reducible.</a:t>
+            </a:r>
+          </a:p>
+        </p:txBody>
+      </p:sp>
+    </p:spTree>
+  </p:cSld>
+  <p:clrMapOvr>
+    <a:masterClrMapping/>
+  </p:clrMapOvr>
+</p:sld>
+</file>
+
+<file path=ppt/slides/slide19.xml><?xml version="1.0" encoding="utf-8"?>
+<p:sld xmlns:a="http://schemas.openxmlformats.org/drawingml/2006/main" xmlns:p="http://schemas.openxmlformats.org/presentationml/2006/main" xmlns:r="http://schemas.openxmlformats.org/officeDocument/2006/relationships">
+  <p:cSld>
+    <p:bg>
+      <p:bgPr>
+        <a:solidFill>
+          <a:srgbClr val="FFFFFF"/>
+        </a:solidFill>
+        <a:effectLst/>
+      </p:bgPr>
+    </p:bg>
+    <p:spTree>
+      <p:nvGrpSpPr>
+        <p:cNvPr id="1" name=""/>
+        <p:cNvGrpSpPr/>
+        <p:nvPr/>
+      </p:nvGrpSpPr>
+      <p:grpSpPr/>
+      <p:sp>
+        <p:nvSpPr>
+          <p:cNvPr id="2" name="TextBox 1"/>
+          <p:cNvSpPr txBox="1"/>
+          <p:nvPr/>
+        </p:nvSpPr>
+        <p:spPr>
+          <a:xfrm>
+            <a:off x="822960" y="502920"/>
+            <a:ext cx="10545775" cy="274320"/>
+          </a:xfrm>
+          <a:prstGeom prst="rect">
+            <a:avLst/>
+          </a:prstGeom>
+          <a:noFill/>
+        </p:spPr>
+        <p:txBody>
+          <a:bodyPr wrap="square" anchor="t" lIns="0" rIns="0" tIns="0" bIns="0">
+            <a:spAutoFit/>
+          </a:bodyPr>
+          <a:lstStyle/>
+          <a:p>
+            <a:pPr algn="l">
+              <a:spcBef>
+                <a:spcPts val="0"/>
+              </a:spcBef>
+            </a:pPr>
+            <a:r>
+              <a:rPr sz="1400" b="0" i="0">
+                <a:solidFill>
+                  <a:srgbClr val="000000"/>
+                </a:solidFill>
+                <a:latin typeface="Arial"/>
+              </a:rPr>
+              <a:t>JOIN THE LAB</a:t>
+            </a:r>
+          </a:p>
+        </p:txBody>
+      </p:sp>
+      <p:sp>
+        <p:nvSpPr>
+          <p:cNvPr id="3" name="TextBox 2"/>
+          <p:cNvSpPr txBox="1"/>
+          <p:nvPr/>
+        </p:nvSpPr>
+        <p:spPr>
+          <a:xfrm>
+            <a:off x="822960" y="822960"/>
+            <a:ext cx="10545775" cy="1005840"/>
+          </a:xfrm>
+          <a:prstGeom prst="rect">
+            <a:avLst/>
+          </a:prstGeom>
+          <a:noFill/>
+        </p:spPr>
+        <p:txBody>
+          <a:bodyPr wrap="square" anchor="t" lIns="0" rIns="0" tIns="0" bIns="0">
+            <a:spAutoFit/>
+          </a:bodyPr>
+          <a:lstStyle/>
+          <a:p>
+            <a:pPr algn="l">
+              <a:spcBef>
+                <a:spcPts val="0"/>
+              </a:spcBef>
+            </a:pPr>
+            <a:r>
+              <a:rPr sz="3400" b="1" i="0">
+                <a:solidFill>
+                  <a:srgbClr val="000000"/>
+                </a:solidFill>
+                <a:latin typeface="Arial"/>
+              </a:rPr>
+              <a:t>Fork the Repository</a:t>
+            </a:r>
+          </a:p>
+        </p:txBody>
+      </p:sp>
+      <p:sp>
+        <p:nvSpPr>
+          <p:cNvPr id="4" name="TextBox 3"/>
+          <p:cNvSpPr txBox="1"/>
+          <p:nvPr/>
+        </p:nvSpPr>
+        <p:spPr>
+          <a:xfrm>
+            <a:off x="822960" y="2011680"/>
+            <a:ext cx="10545775" cy="4297680"/>
+          </a:xfrm>
+          <a:prstGeom prst="rect">
+            <a:avLst/>
+          </a:prstGeom>
+          <a:noFill/>
+        </p:spPr>
+        <p:txBody>
+          <a:bodyPr wrap="square" anchor="t" lIns="0" rIns="0" tIns="0" bIns="0">
+            <a:spAutoFit/>
+          </a:bodyPr>
+          <a:lstStyle/>
+          <a:p>
+            <a:pPr algn="l">
+              <a:spcBef>
+                <a:spcPts val="0"/>
+              </a:spcBef>
+            </a:pPr>
+            <a:r>
+              <a:rPr sz="2200" b="0" i="0">
+                <a:solidFill>
+                  <a:srgbClr val="000000"/>
+                </a:solidFill>
+                <a:latin typeface="Arial"/>
+              </a:rPr>
+              <a:t>github.com/rogerSuperBuilderAlpha/algorithmacy-lab — MIT license, Python 3.10+</a:t>
+            </a:r>
+          </a:p>
+          <a:p>
+            <a:pPr algn="l">
+              <a:spcBef>
+                <a:spcPts val="1600"/>
+              </a:spcBef>
+            </a:pPr>
+            <a:r>
+              <a:rPr sz="2200" b="1" i="0">
+                <a:solidFill>
+                  <a:srgbClr val="000000"/>
+                </a:solidFill>
+                <a:latin typeface="Arial"/>
+              </a:rPr>
+              <a:t>Validate, Then Run One</a:t>
+            </a:r>
+          </a:p>
+          <a:p>
+            <a:pPr algn="l">
+              <a:spcBef>
+                <a:spcPts val="400"/>
+              </a:spcBef>
+            </a:pPr>
+            <a:r>
+              <a:rPr sz="2200" b="0" i="0">
+                <a:solidFill>
+                  <a:srgbClr val="000000"/>
+                </a:solidFill>
+                <a:latin typeface="Arial"/>
+              </a:rPr>
+              <a:t>python -m org_frontier.classifier.validate</a:t>
+            </a:r>
+          </a:p>
+          <a:p>
+            <a:pPr algn="l">
+              <a:spcBef>
+                <a:spcPts val="400"/>
+              </a:spcBef>
+            </a:pPr>
+            <a:r>
+              <a:rPr sz="2200" b="0" i="0">
+                <a:solidFill>
+                  <a:srgbClr val="000000"/>
+                </a:solidFill>
+                <a:latin typeface="Arial"/>
+              </a:rPr>
+              <a:t>python -m org_frontier.probes.probe_conjunctive_law</a:t>
+            </a:r>
+          </a:p>
+          <a:p>
+            <a:pPr algn="l">
+              <a:spcBef>
+                <a:spcPts val="1600"/>
+              </a:spcBef>
+            </a:pPr>
+            <a:r>
+              <a:rPr sz="2200" b="1" i="0">
+                <a:solidFill>
+                  <a:srgbClr val="000000"/>
+                </a:solidFill>
+                <a:latin typeface="Arial"/>
+              </a:rPr>
+              <a:t>Ask Your Own Question</a:t>
+            </a:r>
+          </a:p>
+          <a:p>
+            <a:pPr algn="l">
+              <a:spcBef>
+                <a:spcPts val="400"/>
+              </a:spcBef>
+            </a:pPr>
+            <a:r>
+              <a:rPr sz="2200" b="0" i="0">
+                <a:solidFill>
+                  <a:srgbClr val="000000"/>
+                </a:solidFill>
+                <a:latin typeface="Arial"/>
+              </a:rPr>
+              <a:t>python -m org_frontier.protocol.new_question, then commit hypotheses.md first.</a:t>
+            </a:r>
+          </a:p>
+          <a:p>
+            <a:pPr algn="l">
+              <a:spcBef>
+                <a:spcPts val="1600"/>
+              </a:spcBef>
+            </a:pPr>
+            <a:r>
+              <a:rPr sz="2200" b="1" i="0">
+                <a:solidFill>
+                  <a:srgbClr val="000000"/>
+                </a:solidFill>
+                <a:latin typeface="Arial"/>
+              </a:rPr>
+              <a:t>Publish</a:t>
+            </a:r>
+          </a:p>
+          <a:p>
+            <a:pPr algn="l">
+              <a:spcBef>
+                <a:spcPts val="400"/>
+              </a:spcBef>
+            </a:pPr>
+            <a:r>
+              <a:rPr sz="2200" b="0" i="0">
+                <a:solidFill>
+                  <a:srgbClr val="000000"/>
+                </a:solidFill>
+                <a:latin typeface="Arial"/>
+              </a:rPr>
+              <a:t>Register every number in ci/reproduce.json. Pull request into contrib. Nulls count.</a:t>
             </a:r>
           </a:p>
         </p:txBody>
@@ -6775,8 +9142,8 @@
         </p:nvSpPr>
         <p:spPr>
           <a:xfrm>
-            <a:off x="822960" y="640080"/>
-            <a:ext cx="10545775" cy="1188720"/>
+            <a:off x="822960" y="502920"/>
+            <a:ext cx="10545775" cy="274320"/>
           </a:xfrm>
           <a:prstGeom prst="rect">
             <a:avLst/>
@@ -6784,7 +9151,7 @@
           <a:noFill/>
         </p:spPr>
         <p:txBody>
-          <a:bodyPr wrap="square" anchor="b" lIns="0" rIns="0" tIns="0" bIns="0">
+          <a:bodyPr wrap="square" anchor="t" lIns="0" rIns="0" tIns="0" bIns="0">
             <a:spAutoFit/>
           </a:bodyPr>
           <a:lstStyle/>
@@ -6795,13 +9162,13 @@
               </a:spcBef>
             </a:pPr>
             <a:r>
-              <a:rPr sz="3600" b="1" i="0">
-                <a:solidFill>
-                  <a:srgbClr val="000000"/>
-                </a:solidFill>
-                <a:latin typeface="Arial"/>
-              </a:rPr>
-              <a:t>Four sensibilities</a:t>
+              <a:rPr sz="1400" b="0" i="0">
+                <a:solidFill>
+                  <a:srgbClr val="000000"/>
+                </a:solidFill>
+                <a:latin typeface="Arial"/>
+              </a:rPr>
+              <a:t>EPISTEMIC EVOLUTION</a:t>
             </a:r>
           </a:p>
         </p:txBody>
@@ -6814,8 +9181,8 @@
         </p:nvSpPr>
         <p:spPr>
           <a:xfrm>
-            <a:off x="822960" y="2103120"/>
-            <a:ext cx="10545775" cy="3931920"/>
+            <a:off x="822960" y="822960"/>
+            <a:ext cx="10545775" cy="1005840"/>
           </a:xfrm>
           <a:prstGeom prst="rect">
             <a:avLst/>
@@ -6834,61 +9201,1740 @@
               </a:spcBef>
             </a:pPr>
             <a:r>
-              <a:rPr sz="2400" b="0" i="0">
-                <a:solidFill>
-                  <a:srgbClr val="000000"/>
-                </a:solidFill>
-                <a:latin typeface="Arial"/>
-              </a:rPr>
-              <a:t>Oracy: understanding commands</a:t>
-            </a:r>
-          </a:p>
-          <a:p>
-            <a:pPr algn="l">
-              <a:spcBef>
-                <a:spcPts val="1400"/>
-              </a:spcBef>
-            </a:pPr>
-            <a:r>
-              <a:rPr sz="2400" b="0" i="0">
-                <a:solidFill>
-                  <a:srgbClr val="000000"/>
-                </a:solidFill>
-                <a:latin typeface="Arial"/>
-              </a:rPr>
-              <a:t>Literacy: navigating a text</a:t>
-            </a:r>
-          </a:p>
-          <a:p>
-            <a:pPr algn="l">
-              <a:spcBef>
-                <a:spcPts val="1400"/>
-              </a:spcBef>
-            </a:pPr>
-            <a:r>
-              <a:rPr sz="2400" b="0" i="0">
-                <a:solidFill>
-                  <a:srgbClr val="000000"/>
-                </a:solidFill>
-                <a:latin typeface="Arial"/>
-              </a:rPr>
-              <a:t>Numeracy: navigating numbers</a:t>
-            </a:r>
-          </a:p>
-          <a:p>
-            <a:pPr algn="l">
-              <a:spcBef>
-                <a:spcPts val="1400"/>
-              </a:spcBef>
-            </a:pPr>
-            <a:r>
-              <a:rPr sz="2400" b="0" i="0">
-                <a:solidFill>
-                  <a:srgbClr val="000000"/>
-                </a:solidFill>
-                <a:latin typeface="Arial"/>
-              </a:rPr>
-              <a:t>Algorithmacy: navigating triadic coordination</a:t>
+              <a:rPr sz="3400" b="1" i="0">
+                <a:solidFill>
+                  <a:srgbClr val="000000"/>
+                </a:solidFill>
+                <a:latin typeface="Arial"/>
+              </a:rPr>
+              <a:t>The Four Relational Sensibilities</a:t>
+            </a:r>
+          </a:p>
+        </p:txBody>
+      </p:sp>
+      <p:sp>
+        <p:nvSpPr>
+          <p:cNvPr id="4" name="TextBox 3"/>
+          <p:cNvSpPr txBox="1"/>
+          <p:nvPr/>
+        </p:nvSpPr>
+        <p:spPr>
+          <a:xfrm>
+            <a:off x="822960" y="2011680"/>
+            <a:ext cx="10545775" cy="4297680"/>
+          </a:xfrm>
+          <a:prstGeom prst="rect">
+            <a:avLst/>
+          </a:prstGeom>
+          <a:noFill/>
+        </p:spPr>
+        <p:txBody>
+          <a:bodyPr wrap="square" anchor="t" lIns="0" rIns="0" tIns="0" bIns="0">
+            <a:spAutoFit/>
+          </a:bodyPr>
+          <a:lstStyle/>
+          <a:p>
+            <a:pPr algn="l">
+              <a:spcBef>
+                <a:spcPts val="0"/>
+              </a:spcBef>
+            </a:pPr>
+            <a:r>
+              <a:rPr sz="2200" b="1" i="0">
+                <a:solidFill>
+                  <a:srgbClr val="000000"/>
+                </a:solidFill>
+                <a:latin typeface="Arial"/>
+              </a:rPr>
+              <a:t>Oracy</a:t>
+            </a:r>
+            <a:r>
+              <a:rPr sz="2200" b="0" i="0">
+                <a:solidFill>
+                  <a:srgbClr val="000000"/>
+                </a:solidFill>
+                <a:latin typeface="Arial"/>
+              </a:rPr>
+              <a:t> — ARITY: 1 • MONADIC</a:t>
+            </a:r>
+          </a:p>
+          <a:p>
+            <a:pPr algn="l">
+              <a:spcBef>
+                <a:spcPts val="400"/>
+              </a:spcBef>
+            </a:pPr>
+            <a:r>
+              <a:rPr sz="2200" b="0" i="0">
+                <a:solidFill>
+                  <a:srgbClr val="000000"/>
+                </a:solidFill>
+                <a:latin typeface="Arial"/>
+              </a:rPr>
+              <a:t>Synchronous acoustic presence.</a:t>
+            </a:r>
+          </a:p>
+          <a:p>
+            <a:pPr algn="l">
+              <a:spcBef>
+                <a:spcPts val="1600"/>
+              </a:spcBef>
+            </a:pPr>
+            <a:r>
+              <a:rPr sz="2200" b="1" i="0">
+                <a:solidFill>
+                  <a:srgbClr val="000000"/>
+                </a:solidFill>
+                <a:latin typeface="Arial"/>
+              </a:rPr>
+              <a:t>Literacy</a:t>
+            </a:r>
+            <a:r>
+              <a:rPr sz="2200" b="0" i="0">
+                <a:solidFill>
+                  <a:srgbClr val="000000"/>
+                </a:solidFill>
+                <a:latin typeface="Arial"/>
+              </a:rPr>
+              <a:t> — ARITY: 2 • DYADIC</a:t>
+            </a:r>
+          </a:p>
+          <a:p>
+            <a:pPr algn="l">
+              <a:spcBef>
+                <a:spcPts val="400"/>
+              </a:spcBef>
+            </a:pPr>
+            <a:r>
+              <a:rPr sz="2200" b="0" i="0">
+                <a:solidFill>
+                  <a:srgbClr val="000000"/>
+                </a:solidFill>
+                <a:latin typeface="Arial"/>
+              </a:rPr>
+              <a:t>Asynchronous document transmission.</a:t>
+            </a:r>
+          </a:p>
+          <a:p>
+            <a:pPr algn="l">
+              <a:spcBef>
+                <a:spcPts val="1600"/>
+              </a:spcBef>
+            </a:pPr>
+            <a:r>
+              <a:rPr sz="2200" b="1" i="0">
+                <a:solidFill>
+                  <a:srgbClr val="000000"/>
+                </a:solidFill>
+                <a:latin typeface="Arial"/>
+              </a:rPr>
+              <a:t>Numeracy</a:t>
+            </a:r>
+            <a:r>
+              <a:rPr sz="2200" b="0" i="0">
+                <a:solidFill>
+                  <a:srgbClr val="000000"/>
+                </a:solidFill>
+                <a:latin typeface="Arial"/>
+              </a:rPr>
+              <a:t> — ARITY: 2 • FORMAL</a:t>
+            </a:r>
+          </a:p>
+          <a:p>
+            <a:pPr algn="l">
+              <a:spcBef>
+                <a:spcPts val="400"/>
+              </a:spcBef>
+            </a:pPr>
+            <a:r>
+              <a:rPr sz="2200" b="0" i="0">
+                <a:solidFill>
+                  <a:srgbClr val="000000"/>
+                </a:solidFill>
+                <a:latin typeface="Arial"/>
+              </a:rPr>
+              <a:t>Symbolic quantitative mapping.</a:t>
+            </a:r>
+          </a:p>
+          <a:p>
+            <a:pPr algn="l">
+              <a:spcBef>
+                <a:spcPts val="1600"/>
+              </a:spcBef>
+            </a:pPr>
+            <a:r>
+              <a:rPr sz="2200" b="1" i="0">
+                <a:solidFill>
+                  <a:srgbClr val="000000"/>
+                </a:solidFill>
+                <a:latin typeface="Arial"/>
+              </a:rPr>
+              <a:t>Algorithmacy</a:t>
+            </a:r>
+            <a:r>
+              <a:rPr sz="2200" b="0" i="0">
+                <a:solidFill>
+                  <a:srgbClr val="000000"/>
+                </a:solidFill>
+                <a:latin typeface="Arial"/>
+              </a:rPr>
+              <a:t> — ARITY: 3 • TRIADIC</a:t>
+            </a:r>
+          </a:p>
+          <a:p>
+            <a:pPr algn="l">
+              <a:spcBef>
+                <a:spcPts val="400"/>
+              </a:spcBef>
+            </a:pPr>
+            <a:r>
+              <a:rPr sz="2200" b="0" i="0">
+                <a:solidFill>
+                  <a:srgbClr val="000000"/>
+                </a:solidFill>
+                <a:latin typeface="Arial"/>
+              </a:rPr>
+              <a:t>Autonomous synthetic mediation.</a:t>
+            </a:r>
+          </a:p>
+        </p:txBody>
+      </p:sp>
+    </p:spTree>
+  </p:cSld>
+  <p:clrMapOvr>
+    <a:masterClrMapping/>
+  </p:clrMapOvr>
+</p:sld>
+</file>
+
+<file path=ppt/slides/slide20.xml><?xml version="1.0" encoding="utf-8"?>
+<p:sld xmlns:a="http://schemas.openxmlformats.org/drawingml/2006/main" xmlns:p="http://schemas.openxmlformats.org/presentationml/2006/main" xmlns:r="http://schemas.openxmlformats.org/officeDocument/2006/relationships">
+  <p:cSld>
+    <p:bg>
+      <p:bgPr>
+        <a:solidFill>
+          <a:srgbClr val="FFFFFF"/>
+        </a:solidFill>
+        <a:effectLst/>
+      </p:bgPr>
+    </p:bg>
+    <p:spTree>
+      <p:nvGrpSpPr>
+        <p:cNvPr id="1" name=""/>
+        <p:cNvGrpSpPr/>
+        <p:nvPr/>
+      </p:nvGrpSpPr>
+      <p:grpSpPr/>
+      <p:sp>
+        <p:nvSpPr>
+          <p:cNvPr id="2" name="TextBox 1"/>
+          <p:cNvSpPr txBox="1"/>
+          <p:nvPr/>
+        </p:nvSpPr>
+        <p:spPr>
+          <a:xfrm>
+            <a:off x="822960" y="502920"/>
+            <a:ext cx="10545775" cy="274320"/>
+          </a:xfrm>
+          <a:prstGeom prst="rect">
+            <a:avLst/>
+          </a:prstGeom>
+          <a:noFill/>
+        </p:spPr>
+        <p:txBody>
+          <a:bodyPr wrap="square" anchor="t" lIns="0" rIns="0" tIns="0" bIns="0">
+            <a:spAutoFit/>
+          </a:bodyPr>
+          <a:lstStyle/>
+          <a:p>
+            <a:pPr algn="l">
+              <a:spcBef>
+                <a:spcPts val="0"/>
+              </a:spcBef>
+            </a:pPr>
+            <a:r>
+              <a:rPr sz="1400" b="0" i="0">
+                <a:solidFill>
+                  <a:srgbClr val="000000"/>
+                </a:solidFill>
+                <a:latin typeface="Arial"/>
+              </a:rPr>
+              <a:t>JOIN THE LAB</a:t>
+            </a:r>
+          </a:p>
+        </p:txBody>
+      </p:sp>
+      <p:sp>
+        <p:nvSpPr>
+          <p:cNvPr id="3" name="TextBox 2"/>
+          <p:cNvSpPr txBox="1"/>
+          <p:nvPr/>
+        </p:nvSpPr>
+        <p:spPr>
+          <a:xfrm>
+            <a:off x="822960" y="822960"/>
+            <a:ext cx="10545775" cy="1005840"/>
+          </a:xfrm>
+          <a:prstGeom prst="rect">
+            <a:avLst/>
+          </a:prstGeom>
+          <a:noFill/>
+        </p:spPr>
+        <p:txBody>
+          <a:bodyPr wrap="square" anchor="t" lIns="0" rIns="0" tIns="0" bIns="0">
+            <a:spAutoFit/>
+          </a:bodyPr>
+          <a:lstStyle/>
+          <a:p>
+            <a:pPr algn="l">
+              <a:spcBef>
+                <a:spcPts val="0"/>
+              </a:spcBef>
+            </a:pPr>
+            <a:r>
+              <a:rPr sz="3400" b="1" i="0">
+                <a:solidFill>
+                  <a:srgbClr val="000000"/>
+                </a:solidFill>
+                <a:latin typeface="Arial"/>
+              </a:rPr>
+              <a:t>Questions Waiting for Someone</a:t>
+            </a:r>
+          </a:p>
+        </p:txBody>
+      </p:sp>
+      <p:sp>
+        <p:nvSpPr>
+          <p:cNvPr id="4" name="TextBox 3"/>
+          <p:cNvSpPr txBox="1"/>
+          <p:nvPr/>
+        </p:nvSpPr>
+        <p:spPr>
+          <a:xfrm>
+            <a:off x="822960" y="2011680"/>
+            <a:ext cx="10545775" cy="4297680"/>
+          </a:xfrm>
+          <a:prstGeom prst="rect">
+            <a:avLst/>
+          </a:prstGeom>
+          <a:noFill/>
+        </p:spPr>
+        <p:txBody>
+          <a:bodyPr wrap="square" anchor="t" lIns="0" rIns="0" tIns="0" bIns="0">
+            <a:spAutoFit/>
+          </a:bodyPr>
+          <a:lstStyle/>
+          <a:p>
+            <a:pPr algn="l">
+              <a:spcBef>
+                <a:spcPts val="0"/>
+              </a:spcBef>
+            </a:pPr>
+            <a:r>
+              <a:rPr sz="2200" b="1" i="0">
+                <a:solidFill>
+                  <a:srgbClr val="000000"/>
+                </a:solidFill>
+                <a:latin typeface="Arial"/>
+              </a:rPr>
+              <a:t>Real People</a:t>
+            </a:r>
+          </a:p>
+          <a:p>
+            <a:pPr algn="l">
+              <a:spcBef>
+                <a:spcPts val="400"/>
+              </a:spcBef>
+            </a:pPr>
+            <a:r>
+              <a:rPr sz="2200" b="0" i="0">
+                <a:solidFill>
+                  <a:srgbClr val="000000"/>
+                </a:solidFill>
+                <a:latin typeface="Arial"/>
+              </a:rPr>
+              <a:t>Our one verdict on real gaze data changes with the coding. Which coding is right?</a:t>
+            </a:r>
+          </a:p>
+          <a:p>
+            <a:pPr algn="l">
+              <a:spcBef>
+                <a:spcPts val="1600"/>
+              </a:spcBef>
+            </a:pPr>
+            <a:r>
+              <a:rPr sz="2200" b="1" i="0">
+                <a:solidFill>
+                  <a:srgbClr val="000000"/>
+                </a:solidFill>
+                <a:latin typeface="Arial"/>
+              </a:rPr>
+              <a:t>Real Rules</a:t>
+            </a:r>
+          </a:p>
+          <a:p>
+            <a:pPr algn="l">
+              <a:spcBef>
+                <a:spcPts val="400"/>
+              </a:spcBef>
+            </a:pPr>
+            <a:r>
+              <a:rPr sz="2200" b="0" i="0">
+                <a:solidFill>
+                  <a:srgbClr val="000000"/>
+                </a:solidFill>
+                <a:latin typeface="Arial"/>
+              </a:rPr>
+              <a:t>A field case with two coders agreeing on what sets each action. Nobody has run one.</a:t>
+            </a:r>
+          </a:p>
+          <a:p>
+            <a:pPr algn="l">
+              <a:spcBef>
+                <a:spcPts val="1600"/>
+              </a:spcBef>
+            </a:pPr>
+            <a:r>
+              <a:rPr sz="2200" b="1" i="0">
+                <a:solidFill>
+                  <a:srgbClr val="000000"/>
+                </a:solidFill>
+                <a:latin typeface="Arial"/>
+              </a:rPr>
+              <a:t>Bigger Forms</a:t>
+            </a:r>
+          </a:p>
+          <a:p>
+            <a:pPr algn="l">
+              <a:spcBef>
+                <a:spcPts val="400"/>
+              </a:spcBef>
+            </a:pPr>
+            <a:r>
+              <a:rPr sz="2200" b="0" i="0">
+                <a:solidFill>
+                  <a:srgbClr val="000000"/>
+                </a:solidFill>
+                <a:latin typeface="Arial"/>
+              </a:rPr>
+              <a:t>Cliques of two to five read Φ = 2, 6, 12, 20. Six and up, and Shapley membership on larger forms: open.</a:t>
+            </a:r>
+          </a:p>
+          <a:p>
+            <a:pPr algn="l">
+              <a:spcBef>
+                <a:spcPts val="1600"/>
+              </a:spcBef>
+            </a:pPr>
+            <a:r>
+              <a:rPr sz="2200" b="1" i="0">
+                <a:solidFill>
+                  <a:srgbClr val="000000"/>
+                </a:solidFill>
+                <a:latin typeface="Arial"/>
+              </a:rPr>
+              <a:t>Softer Channels</a:t>
+            </a:r>
+          </a:p>
+          <a:p>
+            <a:pPr algn="l">
+              <a:spcBef>
+                <a:spcPts val="400"/>
+              </a:spcBef>
+            </a:pPr>
+            <a:r>
+              <a:rPr sz="2200" b="0" i="0">
+                <a:solidFill>
+                  <a:srgbClr val="000000"/>
+                </a:solidFill>
+                <a:latin typeface="Arial"/>
+              </a:rPr>
+              <a:t>A graded channel. Weighted or noisy quorums. An arrangement that is algorithmacy but not directive algorithmic management.</a:t>
+            </a:r>
+          </a:p>
+        </p:txBody>
+      </p:sp>
+    </p:spTree>
+  </p:cSld>
+  <p:clrMapOvr>
+    <a:masterClrMapping/>
+  </p:clrMapOvr>
+</p:sld>
+</file>
+
+<file path=ppt/slides/slide21.xml><?xml version="1.0" encoding="utf-8"?>
+<p:sld xmlns:a="http://schemas.openxmlformats.org/drawingml/2006/main" xmlns:p="http://schemas.openxmlformats.org/presentationml/2006/main" xmlns:r="http://schemas.openxmlformats.org/officeDocument/2006/relationships">
+  <p:cSld>
+    <p:bg>
+      <p:bgPr>
+        <a:solidFill>
+          <a:srgbClr val="FFFFFF"/>
+        </a:solidFill>
+        <a:effectLst/>
+      </p:bgPr>
+    </p:bg>
+    <p:spTree>
+      <p:nvGrpSpPr>
+        <p:cNvPr id="1" name=""/>
+        <p:cNvGrpSpPr/>
+        <p:nvPr/>
+      </p:nvGrpSpPr>
+      <p:grpSpPr/>
+      <p:sp>
+        <p:nvSpPr>
+          <p:cNvPr id="2" name="TextBox 1"/>
+          <p:cNvSpPr txBox="1"/>
+          <p:nvPr/>
+        </p:nvSpPr>
+        <p:spPr>
+          <a:xfrm>
+            <a:off x="822960" y="502920"/>
+            <a:ext cx="10545775" cy="274320"/>
+          </a:xfrm>
+          <a:prstGeom prst="rect">
+            <a:avLst/>
+          </a:prstGeom>
+          <a:noFill/>
+        </p:spPr>
+        <p:txBody>
+          <a:bodyPr wrap="square" anchor="t" lIns="0" rIns="0" tIns="0" bIns="0">
+            <a:spAutoFit/>
+          </a:bodyPr>
+          <a:lstStyle/>
+          <a:p>
+            <a:pPr algn="l">
+              <a:spcBef>
+                <a:spcPts val="0"/>
+              </a:spcBef>
+            </a:pPr>
+            <a:r>
+              <a:rPr sz="1400" b="0" i="0">
+                <a:solidFill>
+                  <a:srgbClr val="000000"/>
+                </a:solidFill>
+                <a:latin typeface="Arial"/>
+              </a:rPr>
+              <a:t>LIVE</a:t>
+            </a:r>
+          </a:p>
+        </p:txBody>
+      </p:sp>
+      <p:sp>
+        <p:nvSpPr>
+          <p:cNvPr id="3" name="TextBox 2"/>
+          <p:cNvSpPr txBox="1"/>
+          <p:nvPr/>
+        </p:nvSpPr>
+        <p:spPr>
+          <a:xfrm>
+            <a:off x="822960" y="822960"/>
+            <a:ext cx="10545775" cy="1005840"/>
+          </a:xfrm>
+          <a:prstGeom prst="rect">
+            <a:avLst/>
+          </a:prstGeom>
+          <a:noFill/>
+        </p:spPr>
+        <p:txBody>
+          <a:bodyPr wrap="square" anchor="t" lIns="0" rIns="0" tIns="0" bIns="0">
+            <a:spAutoFit/>
+          </a:bodyPr>
+          <a:lstStyle/>
+          <a:p>
+            <a:pPr algn="l">
+              <a:spcBef>
+                <a:spcPts val="0"/>
+              </a:spcBef>
+            </a:pPr>
+            <a:r>
+              <a:rPr sz="3400" b="1" i="0">
+                <a:solidFill>
+                  <a:srgbClr val="000000"/>
+                </a:solidFill>
+                <a:latin typeface="Arial"/>
+              </a:rPr>
+              <a:t>What Questions Are You Interested In?</a:t>
+            </a:r>
+          </a:p>
+        </p:txBody>
+      </p:sp>
+      <p:sp>
+        <p:nvSpPr>
+          <p:cNvPr id="4" name="TextBox 3"/>
+          <p:cNvSpPr txBox="1"/>
+          <p:nvPr/>
+        </p:nvSpPr>
+        <p:spPr>
+          <a:xfrm>
+            <a:off x="822960" y="2011680"/>
+            <a:ext cx="10545775" cy="4297680"/>
+          </a:xfrm>
+          <a:prstGeom prst="rect">
+            <a:avLst/>
+          </a:prstGeom>
+          <a:noFill/>
+        </p:spPr>
+        <p:txBody>
+          <a:bodyPr wrap="square" anchor="t" lIns="0" rIns="0" tIns="0" bIns="0">
+            <a:spAutoFit/>
+          </a:bodyPr>
+          <a:lstStyle/>
+          <a:p>
+            <a:pPr algn="l">
+              <a:spcBef>
+                <a:spcPts val="0"/>
+              </a:spcBef>
+            </a:pPr>
+            <a:r>
+              <a:rPr sz="2200" b="0" i="0">
+                <a:solidFill>
+                  <a:srgbClr val="000000"/>
+                </a:solidFill>
+                <a:latin typeface="Arial"/>
+              </a:rPr>
+              <a:t>Name three or four parties and say who acts on whom.</a:t>
+            </a:r>
+          </a:p>
+          <a:p>
+            <a:pPr algn="l">
+              <a:spcBef>
+                <a:spcPts val="1600"/>
+              </a:spcBef>
+            </a:pPr>
+            <a:r>
+              <a:rPr sz="2200" b="0" i="0">
+                <a:solidFill>
+                  <a:srgbClr val="000000"/>
+                </a:solidFill>
+                <a:latin typeface="Arial"/>
+              </a:rPr>
+              <a:t>A plain sentence is enough: "The dispatcher assigns a job only when a driver and a rider both accept."</a:t>
+            </a:r>
+          </a:p>
+          <a:p>
+            <a:pPr algn="l">
+              <a:spcBef>
+                <a:spcPts val="1600"/>
+              </a:spcBef>
+            </a:pPr>
+            <a:r>
+              <a:rPr sz="2200" b="0" i="0">
+                <a:solidFill>
+                  <a:srgbClr val="000000"/>
+                </a:solidFill>
+                <a:latin typeface="Arial"/>
+              </a:rPr>
+              <a:t>We build it as a small circuit, compute Φ and the core, and read who is set by two others.</a:t>
+            </a:r>
+          </a:p>
+          <a:p>
+            <a:pPr algn="l">
+              <a:spcBef>
+                <a:spcPts val="1600"/>
+              </a:spcBef>
+            </a:pPr>
+            <a:r>
+              <a:rPr sz="2200" b="0" i="0">
+                <a:solidFill>
+                  <a:srgbClr val="000000"/>
+                </a:solidFill>
+                <a:latin typeface="Arial"/>
+              </a:rPr>
+              <a:t>A few seconds per form. A zero is a result too. Small Boolean models, not people.</a:t>
+            </a:r>
+          </a:p>
+        </p:txBody>
+      </p:sp>
+    </p:spTree>
+  </p:cSld>
+  <p:clrMapOvr>
+    <a:masterClrMapping/>
+  </p:clrMapOvr>
+</p:sld>
+</file>
+
+<file path=ppt/slides/slide22.xml><?xml version="1.0" encoding="utf-8"?>
+<p:sld xmlns:a="http://schemas.openxmlformats.org/drawingml/2006/main" xmlns:p="http://schemas.openxmlformats.org/presentationml/2006/main" xmlns:r="http://schemas.openxmlformats.org/officeDocument/2006/relationships">
+  <p:cSld>
+    <p:bg>
+      <p:bgPr>
+        <a:solidFill>
+          <a:srgbClr val="FFFFFF"/>
+        </a:solidFill>
+        <a:effectLst/>
+      </p:bgPr>
+    </p:bg>
+    <p:spTree>
+      <p:nvGrpSpPr>
+        <p:cNvPr id="1" name=""/>
+        <p:cNvGrpSpPr/>
+        <p:nvPr/>
+      </p:nvGrpSpPr>
+      <p:grpSpPr/>
+      <p:sp>
+        <p:nvSpPr>
+          <p:cNvPr id="2" name="TextBox 1"/>
+          <p:cNvSpPr txBox="1"/>
+          <p:nvPr/>
+        </p:nvSpPr>
+        <p:spPr>
+          <a:xfrm>
+            <a:off x="822960" y="502920"/>
+            <a:ext cx="10545775" cy="274320"/>
+          </a:xfrm>
+          <a:prstGeom prst="rect">
+            <a:avLst/>
+          </a:prstGeom>
+          <a:noFill/>
+        </p:spPr>
+        <p:txBody>
+          <a:bodyPr wrap="square" anchor="t" lIns="0" rIns="0" tIns="0" bIns="0">
+            <a:spAutoFit/>
+          </a:bodyPr>
+          <a:lstStyle/>
+          <a:p>
+            <a:pPr algn="l">
+              <a:spcBef>
+                <a:spcPts val="0"/>
+              </a:spcBef>
+            </a:pPr>
+            <a:r>
+              <a:rPr sz="1400" b="0" i="0">
+                <a:solidFill>
+                  <a:srgbClr val="000000"/>
+                </a:solidFill>
+                <a:latin typeface="Arial"/>
+              </a:rPr>
+              <a:t>LIVE</a:t>
+            </a:r>
+          </a:p>
+        </p:txBody>
+      </p:sp>
+      <p:sp>
+        <p:nvSpPr>
+          <p:cNvPr id="3" name="TextBox 2"/>
+          <p:cNvSpPr txBox="1"/>
+          <p:nvPr/>
+        </p:nvSpPr>
+        <p:spPr>
+          <a:xfrm>
+            <a:off x="822960" y="822960"/>
+            <a:ext cx="10545775" cy="1005840"/>
+          </a:xfrm>
+          <a:prstGeom prst="rect">
+            <a:avLst/>
+          </a:prstGeom>
+          <a:noFill/>
+        </p:spPr>
+        <p:txBody>
+          <a:bodyPr wrap="square" anchor="t" lIns="0" rIns="0" tIns="0" bIns="0">
+            <a:spAutoFit/>
+          </a:bodyPr>
+          <a:lstStyle/>
+          <a:p>
+            <a:pPr algn="l">
+              <a:spcBef>
+                <a:spcPts val="0"/>
+              </a:spcBef>
+            </a:pPr>
+            <a:r>
+              <a:rPr sz="3400" b="1" i="0">
+                <a:solidFill>
+                  <a:srgbClr val="000000"/>
+                </a:solidFill>
+                <a:latin typeface="Arial"/>
+              </a:rPr>
+              <a:t>If the Laptop Fails</a:t>
+            </a:r>
+          </a:p>
+        </p:txBody>
+      </p:sp>
+      <p:graphicFrame>
+        <p:nvGraphicFramePr>
+          <p:cNvPr id="4" name="Table 3"/>
+          <p:cNvGraphicFramePr>
+            <a:graphicFrameLocks noGrp="1"/>
+          </p:cNvGraphicFramePr>
+          <p:nvPr/>
+        </p:nvGraphicFramePr>
+        <p:xfrm>
+          <a:off x="822960" y="2286000"/>
+          <a:ext cx="10545775" cy="2514600"/>
+        </p:xfrm>
+        <a:graphic>
+          <a:graphicData uri="http://schemas.openxmlformats.org/drawingml/2006/table">
+            <a:tbl>
+              <a:tblPr firstRow="0" bandRow="0">
+                <a:tableStyleId>{5940675A-B579-460E-94D1-54222C63F5DA}</a:tableStyleId>
+              </a:tblPr>
+              <a:tblGrid>
+                <a:gridCol w="2636443"/>
+                <a:gridCol w="2636443"/>
+                <a:gridCol w="2636443"/>
+                <a:gridCol w="2636446"/>
+              </a:tblGrid>
+              <a:tr h="502920">
+                <a:tc>
+                  <a:txBody>
+                    <a:bodyPr wrap="square"/>
+                    <a:lstStyle/>
+                    <a:p>
+                      <a:r>
+                        <a:rPr sz="1600" b="1" i="0">
+                          <a:solidFill>
+                            <a:srgbClr val="000000"/>
+                          </a:solidFill>
+                          <a:latin typeface="Arial"/>
+                        </a:rPr>
+                        <a:t>The sentence</a:t>
+                      </a:r>
+                    </a:p>
+                  </a:txBody>
+                  <a:tcPr marL="73152" marR="73152">
+                    <a:noFill/>
+                    <a:lnL w="9525">
+                      <a:solidFill>
+                        <a:srgbClr val="000000"/>
+                      </a:solidFill>
+                    </a:lnL>
+                    <a:lnR w="9525">
+                      <a:solidFill>
+                        <a:srgbClr val="000000"/>
+                      </a:solidFill>
+                    </a:lnR>
+                    <a:lnT w="9525">
+                      <a:solidFill>
+                        <a:srgbClr val="000000"/>
+                      </a:solidFill>
+                    </a:lnT>
+                    <a:lnB w="9525">
+                      <a:solidFill>
+                        <a:srgbClr val="000000"/>
+                      </a:solidFill>
+                    </a:lnB>
+                  </a:tcPr>
+                </a:tc>
+                <a:tc>
+                  <a:txBody>
+                    <a:bodyPr wrap="square"/>
+                    <a:lstStyle/>
+                    <a:p>
+                      <a:r>
+                        <a:rPr sz="1600" b="1" i="0">
+                          <a:solidFill>
+                            <a:srgbClr val="000000"/>
+                          </a:solidFill>
+                          <a:latin typeface="Arial"/>
+                        </a:rPr>
+                        <a:t>Φ</a:t>
+                      </a:r>
+                    </a:p>
+                  </a:txBody>
+                  <a:tcPr marL="73152" marR="73152">
+                    <a:noFill/>
+                    <a:lnL w="9525">
+                      <a:solidFill>
+                        <a:srgbClr val="000000"/>
+                      </a:solidFill>
+                    </a:lnL>
+                    <a:lnR w="9525">
+                      <a:solidFill>
+                        <a:srgbClr val="000000"/>
+                      </a:solidFill>
+                    </a:lnR>
+                    <a:lnT w="9525">
+                      <a:solidFill>
+                        <a:srgbClr val="000000"/>
+                      </a:solidFill>
+                    </a:lnT>
+                    <a:lnB w="9525">
+                      <a:solidFill>
+                        <a:srgbClr val="000000"/>
+                      </a:solidFill>
+                    </a:lnB>
+                  </a:tcPr>
+                </a:tc>
+                <a:tc>
+                  <a:txBody>
+                    <a:bodyPr wrap="square"/>
+                    <a:lstStyle/>
+                    <a:p>
+                      <a:r>
+                        <a:rPr sz="1600" b="1" i="0">
+                          <a:solidFill>
+                            <a:srgbClr val="000000"/>
+                          </a:solidFill>
+                          <a:latin typeface="Arial"/>
+                        </a:rPr>
+                        <a:t>Verdict</a:t>
+                      </a:r>
+                    </a:p>
+                  </a:txBody>
+                  <a:tcPr marL="73152" marR="73152">
+                    <a:noFill/>
+                    <a:lnL w="9525">
+                      <a:solidFill>
+                        <a:srgbClr val="000000"/>
+                      </a:solidFill>
+                    </a:lnL>
+                    <a:lnR w="9525">
+                      <a:solidFill>
+                        <a:srgbClr val="000000"/>
+                      </a:solidFill>
+                    </a:lnR>
+                    <a:lnT w="9525">
+                      <a:solidFill>
+                        <a:srgbClr val="000000"/>
+                      </a:solidFill>
+                    </a:lnT>
+                    <a:lnB w="9525">
+                      <a:solidFill>
+                        <a:srgbClr val="000000"/>
+                      </a:solidFill>
+                    </a:lnB>
+                  </a:tcPr>
+                </a:tc>
+                <a:tc>
+                  <a:txBody>
+                    <a:bodyPr wrap="square"/>
+                    <a:lstStyle/>
+                    <a:p>
+                      <a:r>
+                        <a:rPr sz="1600" b="1" i="0">
+                          <a:solidFill>
+                            <a:srgbClr val="000000"/>
+                          </a:solidFill>
+                          <a:latin typeface="Arial"/>
+                        </a:rPr>
+                        <a:t>Core</a:t>
+                      </a:r>
+                    </a:p>
+                  </a:txBody>
+                  <a:tcPr marL="73152" marR="73152">
+                    <a:noFill/>
+                    <a:lnL w="9525">
+                      <a:solidFill>
+                        <a:srgbClr val="000000"/>
+                      </a:solidFill>
+                    </a:lnL>
+                    <a:lnR w="9525">
+                      <a:solidFill>
+                        <a:srgbClr val="000000"/>
+                      </a:solidFill>
+                    </a:lnR>
+                    <a:lnT w="9525">
+                      <a:solidFill>
+                        <a:srgbClr val="000000"/>
+                      </a:solidFill>
+                    </a:lnT>
+                    <a:lnB w="9525">
+                      <a:solidFill>
+                        <a:srgbClr val="000000"/>
+                      </a:solidFill>
+                    </a:lnB>
+                  </a:tcPr>
+                </a:tc>
+              </a:tr>
+              <a:tr h="502920">
+                <a:tc>
+                  <a:txBody>
+                    <a:bodyPr wrap="square"/>
+                    <a:lstStyle/>
+                    <a:p>
+                      <a:r>
+                        <a:rPr sz="1600" b="0" i="0">
+                          <a:solidFill>
+                            <a:srgbClr val="000000"/>
+                          </a:solidFill>
+                          <a:latin typeface="Arial"/>
+                        </a:rPr>
+                        <a:t>Dispatcher assigns only when driver and rider both accept; both wait on it</a:t>
+                      </a:r>
+                    </a:p>
+                  </a:txBody>
+                  <a:tcPr marL="73152" marR="73152">
+                    <a:noFill/>
+                    <a:lnL w="9525">
+                      <a:solidFill>
+                        <a:srgbClr val="000000"/>
+                      </a:solidFill>
+                    </a:lnL>
+                    <a:lnR w="9525">
+                      <a:solidFill>
+                        <a:srgbClr val="000000"/>
+                      </a:solidFill>
+                    </a:lnR>
+                    <a:lnT w="9525">
+                      <a:solidFill>
+                        <a:srgbClr val="000000"/>
+                      </a:solidFill>
+                    </a:lnT>
+                    <a:lnB w="9525">
+                      <a:solidFill>
+                        <a:srgbClr val="000000"/>
+                      </a:solidFill>
+                    </a:lnB>
+                  </a:tcPr>
+                </a:tc>
+                <a:tc>
+                  <a:txBody>
+                    <a:bodyPr wrap="square"/>
+                    <a:lstStyle/>
+                    <a:p>
+                      <a:r>
+                        <a:rPr sz="1600" b="0" i="0">
+                          <a:solidFill>
+                            <a:srgbClr val="000000"/>
+                          </a:solidFill>
+                          <a:latin typeface="Arial"/>
+                        </a:rPr>
+                        <a:t>2.0</a:t>
+                      </a:r>
+                    </a:p>
+                  </a:txBody>
+                  <a:tcPr marL="73152" marR="73152">
+                    <a:noFill/>
+                    <a:lnL w="9525">
+                      <a:solidFill>
+                        <a:srgbClr val="000000"/>
+                      </a:solidFill>
+                    </a:lnL>
+                    <a:lnR w="9525">
+                      <a:solidFill>
+                        <a:srgbClr val="000000"/>
+                      </a:solidFill>
+                    </a:lnR>
+                    <a:lnT w="9525">
+                      <a:solidFill>
+                        <a:srgbClr val="000000"/>
+                      </a:solidFill>
+                    </a:lnT>
+                    <a:lnB w="9525">
+                      <a:solidFill>
+                        <a:srgbClr val="000000"/>
+                      </a:solidFill>
+                    </a:lnB>
+                  </a:tcPr>
+                </a:tc>
+                <a:tc>
+                  <a:txBody>
+                    <a:bodyPr wrap="square"/>
+                    <a:lstStyle/>
+                    <a:p>
+                      <a:r>
+                        <a:rPr sz="1600" b="0" i="0">
+                          <a:solidFill>
+                            <a:srgbClr val="000000"/>
+                          </a:solidFill>
+                          <a:latin typeface="Arial"/>
+                        </a:rPr>
+                        <a:t>whole</a:t>
+                      </a:r>
+                    </a:p>
+                  </a:txBody>
+                  <a:tcPr marL="73152" marR="73152">
+                    <a:noFill/>
+                    <a:lnL w="9525">
+                      <a:solidFill>
+                        <a:srgbClr val="000000"/>
+                      </a:solidFill>
+                    </a:lnL>
+                    <a:lnR w="9525">
+                      <a:solidFill>
+                        <a:srgbClr val="000000"/>
+                      </a:solidFill>
+                    </a:lnR>
+                    <a:lnT w="9525">
+                      <a:solidFill>
+                        <a:srgbClr val="000000"/>
+                      </a:solidFill>
+                    </a:lnT>
+                    <a:lnB w="9525">
+                      <a:solidFill>
+                        <a:srgbClr val="000000"/>
+                      </a:solidFill>
+                    </a:lnB>
+                  </a:tcPr>
+                </a:tc>
+                <a:tc>
+                  <a:txBody>
+                    <a:bodyPr wrap="square"/>
+                    <a:lstStyle/>
+                    <a:p>
+                      <a:r>
+                        <a:rPr sz="1600" b="0" i="0">
+                          <a:solidFill>
+                            <a:srgbClr val="000000"/>
+                          </a:solidFill>
+                          <a:latin typeface="Arial"/>
+                        </a:rPr>
+                        <a:t>all three; dispatcher set by driver and rider</a:t>
+                      </a:r>
+                    </a:p>
+                  </a:txBody>
+                  <a:tcPr marL="73152" marR="73152">
+                    <a:noFill/>
+                    <a:lnL w="9525">
+                      <a:solidFill>
+                        <a:srgbClr val="000000"/>
+                      </a:solidFill>
+                    </a:lnL>
+                    <a:lnR w="9525">
+                      <a:solidFill>
+                        <a:srgbClr val="000000"/>
+                      </a:solidFill>
+                    </a:lnR>
+                    <a:lnT w="9525">
+                      <a:solidFill>
+                        <a:srgbClr val="000000"/>
+                      </a:solidFill>
+                    </a:lnT>
+                    <a:lnB w="9525">
+                      <a:solidFill>
+                        <a:srgbClr val="000000"/>
+                      </a:solidFill>
+                    </a:lnB>
+                  </a:tcPr>
+                </a:tc>
+              </a:tr>
+              <a:tr h="502920">
+                <a:tc>
+                  <a:txBody>
+                    <a:bodyPr wrap="square"/>
+                    <a:lstStyle/>
+                    <a:p>
+                      <a:r>
+                        <a:rPr sz="1600" b="0" i="0">
+                          <a:solidFill>
+                            <a:srgbClr val="000000"/>
+                          </a:solidFill>
+                          <a:latin typeface="Arial"/>
+                        </a:rPr>
+                        <a:t>Client and worker now answer each other directly; the manager still hears both, but nobody waits on the manager</a:t>
+                      </a:r>
+                    </a:p>
+                  </a:txBody>
+                  <a:tcPr marL="73152" marR="73152">
+                    <a:noFill/>
+                    <a:lnL w="9525">
+                      <a:solidFill>
+                        <a:srgbClr val="000000"/>
+                      </a:solidFill>
+                    </a:lnL>
+                    <a:lnR w="9525">
+                      <a:solidFill>
+                        <a:srgbClr val="000000"/>
+                      </a:solidFill>
+                    </a:lnR>
+                    <a:lnT w="9525">
+                      <a:solidFill>
+                        <a:srgbClr val="000000"/>
+                      </a:solidFill>
+                    </a:lnT>
+                    <a:lnB w="9525">
+                      <a:solidFill>
+                        <a:srgbClr val="000000"/>
+                      </a:solidFill>
+                    </a:lnB>
+                  </a:tcPr>
+                </a:tc>
+                <a:tc>
+                  <a:txBody>
+                    <a:bodyPr wrap="square"/>
+                    <a:lstStyle/>
+                    <a:p>
+                      <a:r>
+                        <a:rPr sz="1600" b="0" i="0">
+                          <a:solidFill>
+                            <a:srgbClr val="000000"/>
+                          </a:solidFill>
+                          <a:latin typeface="Arial"/>
+                        </a:rPr>
+                        <a:t>0.0</a:t>
+                      </a:r>
+                    </a:p>
+                  </a:txBody>
+                  <a:tcPr marL="73152" marR="73152">
+                    <a:noFill/>
+                    <a:lnL w="9525">
+                      <a:solidFill>
+                        <a:srgbClr val="000000"/>
+                      </a:solidFill>
+                    </a:lnL>
+                    <a:lnR w="9525">
+                      <a:solidFill>
+                        <a:srgbClr val="000000"/>
+                      </a:solidFill>
+                    </a:lnR>
+                    <a:lnT w="9525">
+                      <a:solidFill>
+                        <a:srgbClr val="000000"/>
+                      </a:solidFill>
+                    </a:lnT>
+                    <a:lnB w="9525">
+                      <a:solidFill>
+                        <a:srgbClr val="000000"/>
+                      </a:solidFill>
+                    </a:lnB>
+                  </a:tcPr>
+                </a:tc>
+                <a:tc>
+                  <a:txBody>
+                    <a:bodyPr wrap="square"/>
+                    <a:lstStyle/>
+                    <a:p>
+                      <a:r>
+                        <a:rPr sz="1600" b="0" i="0">
+                          <a:solidFill>
+                            <a:srgbClr val="000000"/>
+                          </a:solidFill>
+                          <a:latin typeface="Arial"/>
+                        </a:rPr>
+                        <a:t>factors</a:t>
+                      </a:r>
+                    </a:p>
+                  </a:txBody>
+                  <a:tcPr marL="73152" marR="73152">
+                    <a:noFill/>
+                    <a:lnL w="9525">
+                      <a:solidFill>
+                        <a:srgbClr val="000000"/>
+                      </a:solidFill>
+                    </a:lnL>
+                    <a:lnR w="9525">
+                      <a:solidFill>
+                        <a:srgbClr val="000000"/>
+                      </a:solidFill>
+                    </a:lnR>
+                    <a:lnT w="9525">
+                      <a:solidFill>
+                        <a:srgbClr val="000000"/>
+                      </a:solidFill>
+                    </a:lnT>
+                    <a:lnB w="9525">
+                      <a:solidFill>
+                        <a:srgbClr val="000000"/>
+                      </a:solidFill>
+                    </a:lnB>
+                  </a:tcPr>
+                </a:tc>
+                <a:tc>
+                  <a:txBody>
+                    <a:bodyPr wrap="square"/>
+                    <a:lstStyle/>
+                    <a:p>
+                      <a:r>
+                        <a:rPr sz="1600" b="0" i="0">
+                          <a:solidFill>
+                            <a:srgbClr val="000000"/>
+                          </a:solidFill>
+                          <a:latin typeface="Arial"/>
+                        </a:rPr>
+                        <a:t>client and worker</a:t>
+                      </a:r>
+                    </a:p>
+                  </a:txBody>
+                  <a:tcPr marL="73152" marR="73152">
+                    <a:noFill/>
+                    <a:lnL w="9525">
+                      <a:solidFill>
+                        <a:srgbClr val="000000"/>
+                      </a:solidFill>
+                    </a:lnL>
+                    <a:lnR w="9525">
+                      <a:solidFill>
+                        <a:srgbClr val="000000"/>
+                      </a:solidFill>
+                    </a:lnR>
+                    <a:lnT w="9525">
+                      <a:solidFill>
+                        <a:srgbClr val="000000"/>
+                      </a:solidFill>
+                    </a:lnT>
+                    <a:lnB w="9525">
+                      <a:solidFill>
+                        <a:srgbClr val="000000"/>
+                      </a:solidFill>
+                    </a:lnB>
+                  </a:tcPr>
+                </a:tc>
+              </a:tr>
+              <a:tr h="502920">
+                <a:tc>
+                  <a:txBody>
+                    <a:bodyPr wrap="square"/>
+                    <a:lstStyle/>
+                    <a:p>
+                      <a:r>
+                        <a:rPr sz="1600" b="0" i="0">
+                          <a:solidFill>
+                            <a:srgbClr val="000000"/>
+                          </a:solidFill>
+                          <a:latin typeface="Arial"/>
+                        </a:rPr>
+                        <a:t>Committee of three: by majority, then by unanimity</a:t>
+                      </a:r>
+                    </a:p>
+                  </a:txBody>
+                  <a:tcPr marL="73152" marR="73152">
+                    <a:noFill/>
+                    <a:lnL w="9525">
+                      <a:solidFill>
+                        <a:srgbClr val="000000"/>
+                      </a:solidFill>
+                    </a:lnL>
+                    <a:lnR w="9525">
+                      <a:solidFill>
+                        <a:srgbClr val="000000"/>
+                      </a:solidFill>
+                    </a:lnR>
+                    <a:lnT w="9525">
+                      <a:solidFill>
+                        <a:srgbClr val="000000"/>
+                      </a:solidFill>
+                    </a:lnT>
+                    <a:lnB w="9525">
+                      <a:solidFill>
+                        <a:srgbClr val="000000"/>
+                      </a:solidFill>
+                    </a:lnB>
+                  </a:tcPr>
+                </a:tc>
+                <a:tc>
+                  <a:txBody>
+                    <a:bodyPr wrap="square"/>
+                    <a:lstStyle/>
+                    <a:p>
+                      <a:r>
+                        <a:rPr sz="1600" b="0" i="0">
+                          <a:solidFill>
+                            <a:srgbClr val="000000"/>
+                          </a:solidFill>
+                          <a:latin typeface="Arial"/>
+                        </a:rPr>
+                        <a:t>0.0, then 6.0</a:t>
+                      </a:r>
+                    </a:p>
+                  </a:txBody>
+                  <a:tcPr marL="73152" marR="73152">
+                    <a:noFill/>
+                    <a:lnL w="9525">
+                      <a:solidFill>
+                        <a:srgbClr val="000000"/>
+                      </a:solidFill>
+                    </a:lnL>
+                    <a:lnR w="9525">
+                      <a:solidFill>
+                        <a:srgbClr val="000000"/>
+                      </a:solidFill>
+                    </a:lnR>
+                    <a:lnT w="9525">
+                      <a:solidFill>
+                        <a:srgbClr val="000000"/>
+                      </a:solidFill>
+                    </a:lnT>
+                    <a:lnB w="9525">
+                      <a:solidFill>
+                        <a:srgbClr val="000000"/>
+                      </a:solidFill>
+                    </a:lnB>
+                  </a:tcPr>
+                </a:tc>
+                <a:tc>
+                  <a:txBody>
+                    <a:bodyPr wrap="square"/>
+                    <a:lstStyle/>
+                    <a:p>
+                      <a:r>
+                        <a:rPr sz="1600" b="0" i="0">
+                          <a:solidFill>
+                            <a:srgbClr val="000000"/>
+                          </a:solidFill>
+                          <a:latin typeface="Arial"/>
+                        </a:rPr>
+                        <a:t>factors, then whole</a:t>
+                      </a:r>
+                    </a:p>
+                  </a:txBody>
+                  <a:tcPr marL="73152" marR="73152">
+                    <a:noFill/>
+                    <a:lnL w="9525">
+                      <a:solidFill>
+                        <a:srgbClr val="000000"/>
+                      </a:solidFill>
+                    </a:lnL>
+                    <a:lnR w="9525">
+                      <a:solidFill>
+                        <a:srgbClr val="000000"/>
+                      </a:solidFill>
+                    </a:lnR>
+                    <a:lnT w="9525">
+                      <a:solidFill>
+                        <a:srgbClr val="000000"/>
+                      </a:solidFill>
+                    </a:lnT>
+                    <a:lnB w="9525">
+                      <a:solidFill>
+                        <a:srgbClr val="000000"/>
+                      </a:solidFill>
+                    </a:lnB>
+                  </a:tcPr>
+                </a:tc>
+                <a:tc>
+                  <a:txBody>
+                    <a:bodyPr wrap="square"/>
+                    <a:lstStyle/>
+                    <a:p>
+                      <a:r>
+                        <a:rPr sz="1600" b="0" i="0">
+                          <a:solidFill>
+                            <a:srgbClr val="000000"/>
+                          </a:solidFill>
+                          <a:latin typeface="Arial"/>
+                        </a:rPr>
+                        <a:t>none, then all three</a:t>
+                      </a:r>
+                    </a:p>
+                  </a:txBody>
+                  <a:tcPr marL="73152" marR="73152">
+                    <a:noFill/>
+                    <a:lnL w="9525">
+                      <a:solidFill>
+                        <a:srgbClr val="000000"/>
+                      </a:solidFill>
+                    </a:lnL>
+                    <a:lnR w="9525">
+                      <a:solidFill>
+                        <a:srgbClr val="000000"/>
+                      </a:solidFill>
+                    </a:lnR>
+                    <a:lnT w="9525">
+                      <a:solidFill>
+                        <a:srgbClr val="000000"/>
+                      </a:solidFill>
+                    </a:lnT>
+                    <a:lnB w="9525">
+                      <a:solidFill>
+                        <a:srgbClr val="000000"/>
+                      </a:solidFill>
+                    </a:lnB>
+                  </a:tcPr>
+                </a:tc>
+              </a:tr>
+              <a:tr h="502920">
+                <a:tc>
+                  <a:txBody>
+                    <a:bodyPr wrap="square"/>
+                    <a:lstStyle/>
+                    <a:p>
+                      <a:r>
+                        <a:rPr sz="1600" b="0" i="0">
+                          <a:solidFill>
+                            <a:srgbClr val="000000"/>
+                          </a:solidFill>
+                          <a:latin typeface="Arial"/>
+                        </a:rPr>
+                        <a:t>Dealer between maker and buyer; then the maker may sell direct</a:t>
+                      </a:r>
+                    </a:p>
+                  </a:txBody>
+                  <a:tcPr marL="73152" marR="73152">
+                    <a:noFill/>
+                    <a:lnL w="9525">
+                      <a:solidFill>
+                        <a:srgbClr val="000000"/>
+                      </a:solidFill>
+                    </a:lnL>
+                    <a:lnR w="9525">
+                      <a:solidFill>
+                        <a:srgbClr val="000000"/>
+                      </a:solidFill>
+                    </a:lnR>
+                    <a:lnT w="9525">
+                      <a:solidFill>
+                        <a:srgbClr val="000000"/>
+                      </a:solidFill>
+                    </a:lnT>
+                    <a:lnB w="9525">
+                      <a:solidFill>
+                        <a:srgbClr val="000000"/>
+                      </a:solidFill>
+                    </a:lnB>
+                  </a:tcPr>
+                </a:tc>
+                <a:tc>
+                  <a:txBody>
+                    <a:bodyPr wrap="square"/>
+                    <a:lstStyle/>
+                    <a:p>
+                      <a:r>
+                        <a:rPr sz="1600" b="0" i="0">
+                          <a:solidFill>
+                            <a:srgbClr val="000000"/>
+                          </a:solidFill>
+                          <a:latin typeface="Arial"/>
+                        </a:rPr>
+                        <a:t>2.0, then 0.0</a:t>
+                      </a:r>
+                    </a:p>
+                  </a:txBody>
+                  <a:tcPr marL="73152" marR="73152">
+                    <a:noFill/>
+                    <a:lnL w="9525">
+                      <a:solidFill>
+                        <a:srgbClr val="000000"/>
+                      </a:solidFill>
+                    </a:lnL>
+                    <a:lnR w="9525">
+                      <a:solidFill>
+                        <a:srgbClr val="000000"/>
+                      </a:solidFill>
+                    </a:lnR>
+                    <a:lnT w="9525">
+                      <a:solidFill>
+                        <a:srgbClr val="000000"/>
+                      </a:solidFill>
+                    </a:lnT>
+                    <a:lnB w="9525">
+                      <a:solidFill>
+                        <a:srgbClr val="000000"/>
+                      </a:solidFill>
+                    </a:lnB>
+                  </a:tcPr>
+                </a:tc>
+                <a:tc>
+                  <a:txBody>
+                    <a:bodyPr wrap="square"/>
+                    <a:lstStyle/>
+                    <a:p>
+                      <a:r>
+                        <a:rPr sz="1600" b="0" i="0">
+                          <a:solidFill>
+                            <a:srgbClr val="000000"/>
+                          </a:solidFill>
+                          <a:latin typeface="Arial"/>
+                        </a:rPr>
+                        <a:t>whole, then factors</a:t>
+                      </a:r>
+                    </a:p>
+                  </a:txBody>
+                  <a:tcPr marL="73152" marR="73152">
+                    <a:noFill/>
+                    <a:lnL w="9525">
+                      <a:solidFill>
+                        <a:srgbClr val="000000"/>
+                      </a:solidFill>
+                    </a:lnL>
+                    <a:lnR w="9525">
+                      <a:solidFill>
+                        <a:srgbClr val="000000"/>
+                      </a:solidFill>
+                    </a:lnR>
+                    <a:lnT w="9525">
+                      <a:solidFill>
+                        <a:srgbClr val="000000"/>
+                      </a:solidFill>
+                    </a:lnT>
+                    <a:lnB w="9525">
+                      <a:solidFill>
+                        <a:srgbClr val="000000"/>
+                      </a:solidFill>
+                    </a:lnB>
+                  </a:tcPr>
+                </a:tc>
+                <a:tc>
+                  <a:txBody>
+                    <a:bodyPr wrap="square"/>
+                    <a:lstStyle/>
+                    <a:p>
+                      <a:r>
+                        <a:rPr sz="1600" b="0" i="0">
+                          <a:solidFill>
+                            <a:srgbClr val="000000"/>
+                          </a:solidFill>
+                          <a:latin typeface="Arial"/>
+                        </a:rPr>
+                        <a:t>all three; then the dealer drops out</a:t>
+                      </a:r>
+                    </a:p>
+                  </a:txBody>
+                  <a:tcPr marL="73152" marR="73152">
+                    <a:noFill/>
+                    <a:lnL w="9525">
+                      <a:solidFill>
+                        <a:srgbClr val="000000"/>
+                      </a:solidFill>
+                    </a:lnL>
+                    <a:lnR w="9525">
+                      <a:solidFill>
+                        <a:srgbClr val="000000"/>
+                      </a:solidFill>
+                    </a:lnR>
+                    <a:lnT w="9525">
+                      <a:solidFill>
+                        <a:srgbClr val="000000"/>
+                      </a:solidFill>
+                    </a:lnT>
+                    <a:lnB w="9525">
+                      <a:solidFill>
+                        <a:srgbClr val="000000"/>
+                      </a:solidFill>
+                    </a:lnB>
+                  </a:tcPr>
+                </a:tc>
+              </a:tr>
+            </a:tbl>
+          </a:graphicData>
+        </a:graphic>
+      </p:graphicFrame>
+    </p:spTree>
+  </p:cSld>
+  <p:clrMapOvr>
+    <a:masterClrMapping/>
+  </p:clrMapOvr>
+</p:sld>
+</file>
+
+<file path=ppt/slides/slide23.xml><?xml version="1.0" encoding="utf-8"?>
+<p:sld xmlns:a="http://schemas.openxmlformats.org/drawingml/2006/main" xmlns:p="http://schemas.openxmlformats.org/presentationml/2006/main" xmlns:r="http://schemas.openxmlformats.org/officeDocument/2006/relationships">
+  <p:cSld>
+    <p:bg>
+      <p:bgPr>
+        <a:solidFill>
+          <a:srgbClr val="FFFFFF"/>
+        </a:solidFill>
+        <a:effectLst/>
+      </p:bgPr>
+    </p:bg>
+    <p:spTree>
+      <p:nvGrpSpPr>
+        <p:cNvPr id="1" name=""/>
+        <p:cNvGrpSpPr/>
+        <p:nvPr/>
+      </p:nvGrpSpPr>
+      <p:grpSpPr/>
+      <p:sp>
+        <p:nvSpPr>
+          <p:cNvPr id="2" name="TextBox 1"/>
+          <p:cNvSpPr txBox="1"/>
+          <p:nvPr/>
+        </p:nvSpPr>
+        <p:spPr>
+          <a:xfrm>
+            <a:off x="822960" y="822960"/>
+            <a:ext cx="10545775" cy="1005840"/>
+          </a:xfrm>
+          <a:prstGeom prst="rect">
+            <a:avLst/>
+          </a:prstGeom>
+          <a:noFill/>
+        </p:spPr>
+        <p:txBody>
+          <a:bodyPr wrap="square" anchor="t" lIns="0" rIns="0" tIns="0" bIns="0">
+            <a:spAutoFit/>
+          </a:bodyPr>
+          <a:lstStyle/>
+          <a:p>
+            <a:pPr algn="l">
+              <a:spcBef>
+                <a:spcPts val="0"/>
+              </a:spcBef>
+            </a:pPr>
+            <a:r>
+              <a:rPr sz="3400" b="1" i="0">
+                <a:solidFill>
+                  <a:srgbClr val="000000"/>
+                </a:solidFill>
+                <a:latin typeface="Arial"/>
+              </a:rPr>
+              <a:t>Image Sources</a:t>
+            </a:r>
+          </a:p>
+        </p:txBody>
+      </p:sp>
+      <p:sp>
+        <p:nvSpPr>
+          <p:cNvPr id="3" name="TextBox 2"/>
+          <p:cNvSpPr txBox="1"/>
+          <p:nvPr/>
+        </p:nvSpPr>
+        <p:spPr>
+          <a:xfrm>
+            <a:off x="822960" y="2011680"/>
+            <a:ext cx="10545775" cy="4297680"/>
+          </a:xfrm>
+          <a:prstGeom prst="rect">
+            <a:avLst/>
+          </a:prstGeom>
+          <a:noFill/>
+        </p:spPr>
+        <p:txBody>
+          <a:bodyPr wrap="square" anchor="t" lIns="0" rIns="0" tIns="0" bIns="0">
+            <a:spAutoFit/>
+          </a:bodyPr>
+          <a:lstStyle/>
+          <a:p>
+            <a:pPr algn="l">
+              <a:spcBef>
+                <a:spcPts val="0"/>
+              </a:spcBef>
+            </a:pPr>
+            <a:r>
+              <a:rPr sz="1200" b="0" i="0">
+                <a:solidFill>
+                  <a:srgbClr val="000000"/>
+                </a:solidFill>
+                <a:latin typeface="Arial"/>
+              </a:rPr>
+              <a:t>https://footnotes2plato.com/wp-content/uploads/2024/09/charles_sanders_peirce-colorized_cleanup-enhanced.jpg?w=640</a:t>
+            </a:r>
+          </a:p>
+          <a:p>
+            <a:pPr algn="l">
+              <a:spcBef>
+                <a:spcPts val="400"/>
+              </a:spcBef>
+            </a:pPr>
+            <a:r>
+              <a:rPr sz="2200" b="0" i="0">
+                <a:solidFill>
+                  <a:srgbClr val="000000"/>
+                </a:solidFill>
+                <a:latin typeface="Arial"/>
+              </a:rPr>
+              <a:t>Source: footnotes2plato.com</a:t>
+            </a:r>
+          </a:p>
+          <a:p>
+            <a:pPr algn="l">
+              <a:spcBef>
+                <a:spcPts val="1600"/>
+              </a:spcBef>
+            </a:pPr>
+            <a:r>
+              <a:rPr sz="1200" b="0" i="0">
+                <a:solidFill>
+                  <a:srgbClr val="000000"/>
+                </a:solidFill>
+                <a:latin typeface="Arial"/>
+              </a:rPr>
+              <a:t>https://cdn.britannica.com/33/171633-050-ED21E678/Willard-Van-Orman-Quine-1958.jpg</a:t>
+            </a:r>
+          </a:p>
+          <a:p>
+            <a:pPr algn="l">
+              <a:spcBef>
+                <a:spcPts val="400"/>
+              </a:spcBef>
+            </a:pPr>
+            <a:r>
+              <a:rPr sz="2200" b="0" i="0">
+                <a:solidFill>
+                  <a:srgbClr val="000000"/>
+                </a:solidFill>
+                <a:latin typeface="Arial"/>
+              </a:rPr>
+              <a:t>Source: www.britannica.com</a:t>
             </a:r>
           </a:p>
         </p:txBody>
@@ -6927,8 +10973,8 @@
         </p:nvSpPr>
         <p:spPr>
           <a:xfrm>
-            <a:off x="822960" y="640080"/>
-            <a:ext cx="10545775" cy="1188720"/>
+            <a:off x="822960" y="502920"/>
+            <a:ext cx="10545775" cy="274320"/>
           </a:xfrm>
           <a:prstGeom prst="rect">
             <a:avLst/>
@@ -6936,7 +10982,7 @@
           <a:noFill/>
         </p:spPr>
         <p:txBody>
-          <a:bodyPr wrap="square" anchor="b" lIns="0" rIns="0" tIns="0" bIns="0">
+          <a:bodyPr wrap="square" anchor="t" lIns="0" rIns="0" tIns="0" bIns="0">
             <a:spAutoFit/>
           </a:bodyPr>
           <a:lstStyle/>
@@ -6947,13 +10993,13 @@
               </a:spcBef>
             </a:pPr>
             <a:r>
-              <a:rPr sz="3600" b="1" i="0">
-                <a:solidFill>
-                  <a:srgbClr val="000000"/>
-                </a:solidFill>
-                <a:latin typeface="Arial"/>
-              </a:rPr>
-              <a:t>The ontological question</a:t>
+              <a:rPr sz="1400" b="0" i="0">
+                <a:solidFill>
+                  <a:srgbClr val="000000"/>
+                </a:solidFill>
+                <a:latin typeface="Arial"/>
+              </a:rPr>
+              <a:t>FOUNDATIONAL PROBLEM</a:t>
             </a:r>
           </a:p>
         </p:txBody>
@@ -6966,8 +11012,8 @@
         </p:nvSpPr>
         <p:spPr>
           <a:xfrm>
-            <a:off x="822960" y="2103120"/>
-            <a:ext cx="10545775" cy="3931920"/>
+            <a:off x="822960" y="822960"/>
+            <a:ext cx="10545775" cy="1005840"/>
           </a:xfrm>
           <a:prstGeom prst="rect">
             <a:avLst/>
@@ -6986,61 +11032,189 @@
               </a:spcBef>
             </a:pPr>
             <a:r>
-              <a:rPr sz="2400" b="0" i="0">
-                <a:solidFill>
-                  <a:srgbClr val="000000"/>
-                </a:solidFill>
-                <a:latin typeface="Arial"/>
-              </a:rPr>
-              <a:t>Do triads reduce to dyads?</a:t>
-            </a:r>
-          </a:p>
-          <a:p>
-            <a:pPr algn="l">
-              <a:spcBef>
-                <a:spcPts val="1400"/>
-              </a:spcBef>
-            </a:pPr>
-            <a:r>
-              <a:rPr sz="2400" b="0" i="0">
-                <a:solidFill>
-                  <a:srgbClr val="000000"/>
-                </a:solidFill>
-                <a:latin typeface="Arial"/>
-              </a:rPr>
-              <a:t>If they do, algorithmacy is not a thing.</a:t>
-            </a:r>
-          </a:p>
-          <a:p>
-            <a:pPr algn="l">
-              <a:spcBef>
-                <a:spcPts val="1400"/>
-              </a:spcBef>
-            </a:pPr>
-            <a:r>
-              <a:rPr sz="2400" b="0" i="0">
-                <a:solidFill>
-                  <a:srgbClr val="000000"/>
-                </a:solidFill>
-                <a:latin typeface="Arial"/>
-              </a:rPr>
-              <a:t>If some do not, algorithmacy has a target.</a:t>
-            </a:r>
-          </a:p>
-          <a:p>
-            <a:pPr algn="l">
-              <a:spcBef>
-                <a:spcPts val="1400"/>
-              </a:spcBef>
-            </a:pPr>
-            <a:r>
-              <a:rPr sz="2400" b="0" i="0">
-                <a:solidFill>
-                  <a:srgbClr val="000000"/>
-                </a:solidFill>
-                <a:latin typeface="Arial"/>
-              </a:rPr>
-              <a:t>Peirce · Quine · the logicians · our argument</a:t>
+              <a:rPr sz="3400" b="1" i="0">
+                <a:solidFill>
+                  <a:srgbClr val="000000"/>
+                </a:solidFill>
+                <a:latin typeface="Arial"/>
+              </a:rPr>
+              <a:t>The Ontological Reducibility Dilemma</a:t>
+            </a:r>
+          </a:p>
+        </p:txBody>
+      </p:sp>
+      <p:sp>
+        <p:nvSpPr>
+          <p:cNvPr id="4" name="TextBox 3"/>
+          <p:cNvSpPr txBox="1"/>
+          <p:nvPr/>
+        </p:nvSpPr>
+        <p:spPr>
+          <a:xfrm>
+            <a:off x="822960" y="2011680"/>
+            <a:ext cx="10545775" cy="4297680"/>
+          </a:xfrm>
+          <a:prstGeom prst="rect">
+            <a:avLst/>
+          </a:prstGeom>
+          <a:noFill/>
+        </p:spPr>
+        <p:txBody>
+          <a:bodyPr wrap="square" anchor="t" lIns="0" rIns="0" tIns="0" bIns="0">
+            <a:spAutoFit/>
+          </a:bodyPr>
+          <a:lstStyle/>
+          <a:p>
+            <a:pPr algn="l">
+              <a:spcBef>
+                <a:spcPts val="0"/>
+              </a:spcBef>
+            </a:pPr>
+            <a:r>
+              <a:rPr sz="2200" b="1" i="0">
+                <a:solidFill>
+                  <a:srgbClr val="000000"/>
+                </a:solidFill>
+                <a:latin typeface="Arial"/>
+              </a:rPr>
+              <a:t>Clone Question:</a:t>
+            </a:r>
+            <a:r>
+              <a:rPr sz="2200" b="0" i="0">
+                <a:solidFill>
+                  <a:srgbClr val="000000"/>
+                </a:solidFill>
+                <a:latin typeface="Arial"/>
+              </a:rPr>
+              <a:t> Does the dyadic clone generate all ternary relations: [R(2)] = R(3)?</a:t>
+            </a:r>
+          </a:p>
+          <a:p>
+            <a:pPr algn="l">
+              <a:spcBef>
+                <a:spcPts val="1600"/>
+              </a:spcBef>
+            </a:pPr>
+            <a:r>
+              <a:rPr sz="2200" b="1" i="0">
+                <a:solidFill>
+                  <a:srgbClr val="000000"/>
+                </a:solidFill>
+                <a:latin typeface="Arial"/>
+              </a:rPr>
+              <a:t>Hypothesis A: Total Reducibility</a:t>
+            </a:r>
+          </a:p>
+          <a:p>
+            <a:pPr algn="l">
+              <a:spcBef>
+                <a:spcPts val="400"/>
+              </a:spcBef>
+            </a:pPr>
+            <a:r>
+              <a:rPr sz="2200" b="0" i="0">
+                <a:solidFill>
+                  <a:srgbClr val="000000"/>
+                </a:solidFill>
+                <a:latin typeface="Arial"/>
+              </a:rPr>
+              <a:t>Dyadic Collapse: All systems reduce to pairs.</a:t>
+            </a:r>
+          </a:p>
+          <a:p>
+            <a:pPr algn="l">
+              <a:spcBef>
+                <a:spcPts val="400"/>
+              </a:spcBef>
+            </a:pPr>
+            <a:r>
+              <a:rPr sz="2200" b="0" i="0">
+                <a:solidFill>
+                  <a:srgbClr val="000000"/>
+                </a:solidFill>
+                <a:latin typeface="Arial"/>
+              </a:rPr>
+              <a:t>Zero Synergy: Multi-party interaction is nominal.</a:t>
+            </a:r>
+          </a:p>
+          <a:p>
+            <a:pPr algn="l">
+              <a:spcBef>
+                <a:spcPts val="400"/>
+              </a:spcBef>
+            </a:pPr>
+            <a:r>
+              <a:rPr sz="2200" b="0" i="0">
+                <a:solidFill>
+                  <a:srgbClr val="000000"/>
+                </a:solidFill>
+                <a:latin typeface="Arial"/>
+              </a:rPr>
+              <a:t>Null Target: Algorithmacy lacks distinctive ontology.</a:t>
+            </a:r>
+          </a:p>
+          <a:p>
+            <a:pPr algn="l">
+              <a:spcBef>
+                <a:spcPts val="1600"/>
+              </a:spcBef>
+            </a:pPr>
+            <a:r>
+              <a:rPr sz="2200" b="1" i="0">
+                <a:solidFill>
+                  <a:srgbClr val="000000"/>
+                </a:solidFill>
+                <a:latin typeface="Arial"/>
+              </a:rPr>
+              <a:t>Hypothesis B: Genuine Irreducibility</a:t>
+            </a:r>
+          </a:p>
+          <a:p>
+            <a:pPr algn="l">
+              <a:spcBef>
+                <a:spcPts val="400"/>
+              </a:spcBef>
+            </a:pPr>
+            <a:r>
+              <a:rPr sz="2200" b="0" i="0">
+                <a:solidFill>
+                  <a:srgbClr val="000000"/>
+                </a:solidFill>
+                <a:latin typeface="Arial"/>
+              </a:rPr>
+              <a:t>Strict Thirdness: Triads resist pairwise factorization.</a:t>
+            </a:r>
+          </a:p>
+          <a:p>
+            <a:pPr algn="l">
+              <a:spcBef>
+                <a:spcPts val="400"/>
+              </a:spcBef>
+            </a:pPr>
+            <a:r>
+              <a:rPr sz="2200" b="0" i="0">
+                <a:solidFill>
+                  <a:srgbClr val="000000"/>
+                </a:solidFill>
+                <a:latin typeface="Arial"/>
+              </a:rPr>
+              <a:t>Positive Φ: Causal systems exhibit integration.</a:t>
+            </a:r>
+          </a:p>
+          <a:p>
+            <a:pPr algn="l">
+              <a:spcBef>
+                <a:spcPts val="400"/>
+              </a:spcBef>
+            </a:pPr>
+            <a:r>
+              <a:rPr sz="2200" b="0" i="0">
+                <a:solidFill>
+                  <a:srgbClr val="000000"/>
+                </a:solidFill>
+                <a:latin typeface="Arial"/>
+              </a:rPr>
+              <a:t>Real Target: Algorithmacy governs irreducible mediation.</a:t>
             </a:r>
           </a:p>
         </p:txBody>
@@ -7079,8 +11253,8 @@
         </p:nvSpPr>
         <p:spPr>
           <a:xfrm>
-            <a:off x="822960" y="640080"/>
-            <a:ext cx="10545775" cy="1188720"/>
+            <a:off x="822960" y="502920"/>
+            <a:ext cx="10545775" cy="274320"/>
           </a:xfrm>
           <a:prstGeom prst="rect">
             <a:avLst/>
@@ -7088,7 +11262,7 @@
           <a:noFill/>
         </p:spPr>
         <p:txBody>
-          <a:bodyPr wrap="square" anchor="b" lIns="0" rIns="0" tIns="0" bIns="0">
+          <a:bodyPr wrap="square" anchor="t" lIns="0" rIns="0" tIns="0" bIns="0">
             <a:spAutoFit/>
           </a:bodyPr>
           <a:lstStyle/>
@@ -7099,13 +11273,13 @@
               </a:spcBef>
             </a:pPr>
             <a:r>
-              <a:rPr sz="3600" b="1" i="0">
-                <a:solidFill>
-                  <a:srgbClr val="000000"/>
-                </a:solidFill>
-                <a:latin typeface="Arial"/>
-              </a:rPr>
-              <a:t>Peirce: three categories</a:t>
+              <a:rPr sz="1400" b="0" i="0">
+                <a:solidFill>
+                  <a:srgbClr val="000000"/>
+                </a:solidFill>
+                <a:latin typeface="Arial"/>
+              </a:rPr>
+              <a:t>PHANEROSCOPY &amp; LOGIC</a:t>
             </a:r>
           </a:p>
         </p:txBody>
@@ -7118,8 +11292,8 @@
         </p:nvSpPr>
         <p:spPr>
           <a:xfrm>
-            <a:off x="822960" y="2103120"/>
-            <a:ext cx="10545775" cy="3931920"/>
+            <a:off x="822960" y="822960"/>
+            <a:ext cx="10545775" cy="1005840"/>
           </a:xfrm>
           <a:prstGeom prst="rect">
             <a:avLst/>
@@ -7138,45 +11312,156 @@
               </a:spcBef>
             </a:pPr>
             <a:r>
-              <a:rPr sz="2400" b="0" i="0">
-                <a:solidFill>
-                  <a:srgbClr val="000000"/>
-                </a:solidFill>
-                <a:latin typeface="Arial"/>
-              </a:rPr>
-              <a:t>Firstness: "such as it is regardless of aught else" (CP 1.25)</a:t>
-            </a:r>
-          </a:p>
-          <a:p>
-            <a:pPr algn="l">
-              <a:spcBef>
-                <a:spcPts val="1400"/>
-              </a:spcBef>
-            </a:pPr>
-            <a:r>
-              <a:rPr sz="2400" b="0" i="0">
-                <a:solidFill>
-                  <a:srgbClr val="000000"/>
-                </a:solidFill>
-                <a:latin typeface="Arial"/>
-              </a:rPr>
-              <a:t>Secondness: "cause and effect are two" (CP 1.325)</a:t>
-            </a:r>
-          </a:p>
-          <a:p>
-            <a:pPr algn="l">
-              <a:spcBef>
-                <a:spcPts val="1400"/>
-              </a:spcBef>
-            </a:pPr>
-            <a:r>
-              <a:rPr sz="2400" b="0" i="0">
-                <a:solidFill>
-                  <a:srgbClr val="000000"/>
-                </a:solidFill>
-                <a:latin typeface="Arial"/>
-              </a:rPr>
-              <a:t>Thirdness: "the medium or connecting bond between the absolute first and last" (CP 1.337)</a:t>
+              <a:rPr sz="3400" b="1" i="0">
+                <a:solidFill>
+                  <a:srgbClr val="000000"/>
+                </a:solidFill>
+                <a:latin typeface="Arial"/>
+              </a:rPr>
+              <a:t>Peirce: The Three Irreducible Categories</a:t>
+            </a:r>
+          </a:p>
+        </p:txBody>
+      </p:sp>
+      <p:pic>
+        <p:nvPicPr>
+          <p:cNvPr id="4" name="Picture 3" descr="peirce.png"/>
+          <p:cNvPicPr>
+            <a:picLocks noChangeAspect="1"/>
+          </p:cNvPicPr>
+          <p:nvPr/>
+        </p:nvPicPr>
+        <p:blipFill>
+          <a:blip r:embed="rId2"/>
+          <a:stretch>
+            <a:fillRect/>
+          </a:stretch>
+        </p:blipFill>
+        <p:spPr>
+          <a:xfrm>
+            <a:off x="822960" y="2011680"/>
+            <a:ext cx="2771029" cy="3749040"/>
+          </a:xfrm>
+          <a:prstGeom prst="rect">
+            <a:avLst/>
+          </a:prstGeom>
+        </p:spPr>
+      </p:pic>
+      <p:sp>
+        <p:nvSpPr>
+          <p:cNvPr id="5" name="TextBox 4"/>
+          <p:cNvSpPr txBox="1"/>
+          <p:nvPr/>
+        </p:nvSpPr>
+        <p:spPr>
+          <a:xfrm>
+            <a:off x="4389120" y="2011680"/>
+            <a:ext cx="6979615" cy="4297680"/>
+          </a:xfrm>
+          <a:prstGeom prst="rect">
+            <a:avLst/>
+          </a:prstGeom>
+          <a:noFill/>
+        </p:spPr>
+        <p:txBody>
+          <a:bodyPr wrap="square" anchor="t" lIns="0" rIns="0" tIns="0" bIns="0">
+            <a:spAutoFit/>
+          </a:bodyPr>
+          <a:lstStyle/>
+          <a:p>
+            <a:pPr algn="l">
+              <a:spcBef>
+                <a:spcPts val="0"/>
+              </a:spcBef>
+            </a:pPr>
+            <a:r>
+              <a:rPr sz="2200" b="1" i="0">
+                <a:solidFill>
+                  <a:srgbClr val="000000"/>
+                </a:solidFill>
+                <a:latin typeface="Arial"/>
+              </a:rPr>
+              <a:t>Firstness (Monadic)</a:t>
+            </a:r>
+          </a:p>
+          <a:p>
+            <a:pPr algn="l">
+              <a:spcBef>
+                <a:spcPts val="400"/>
+              </a:spcBef>
+            </a:pPr>
+            <a:r>
+              <a:rPr sz="2200" b="0" i="0">
+                <a:solidFill>
+                  <a:srgbClr val="000000"/>
+                </a:solidFill>
+                <a:latin typeface="Arial"/>
+              </a:rPr>
+              <a:t>Immediate monadic potentiality without external relation.</a:t>
+            </a:r>
+          </a:p>
+          <a:p>
+            <a:pPr algn="l">
+              <a:spcBef>
+                <a:spcPts val="1600"/>
+              </a:spcBef>
+            </a:pPr>
+            <a:r>
+              <a:rPr sz="2200" b="1" i="0">
+                <a:solidFill>
+                  <a:srgbClr val="000000"/>
+                </a:solidFill>
+                <a:latin typeface="Arial"/>
+              </a:rPr>
+              <a:t>Secondness (Dyadic)</a:t>
+            </a:r>
+          </a:p>
+          <a:p>
+            <a:pPr algn="l">
+              <a:spcBef>
+                <a:spcPts val="400"/>
+              </a:spcBef>
+            </a:pPr>
+            <a:r>
+              <a:rPr sz="2200" b="0" i="0">
+                <a:solidFill>
+                  <a:srgbClr val="000000"/>
+                </a:solidFill>
+                <a:latin typeface="Arial"/>
+              </a:rPr>
+              <a:t>Direct dyadic action-reaction across points.</a:t>
+            </a:r>
+          </a:p>
+          <a:p>
+            <a:pPr algn="l">
+              <a:spcBef>
+                <a:spcPts val="1600"/>
+              </a:spcBef>
+            </a:pPr>
+            <a:r>
+              <a:rPr sz="2200" b="1" i="0">
+                <a:solidFill>
+                  <a:srgbClr val="000000"/>
+                </a:solidFill>
+                <a:latin typeface="Arial"/>
+              </a:rPr>
+              <a:t>Thirdness (Triadic)</a:t>
+            </a:r>
+          </a:p>
+          <a:p>
+            <a:pPr algn="l">
+              <a:spcBef>
+                <a:spcPts val="400"/>
+              </a:spcBef>
+            </a:pPr>
+            <a:r>
+              <a:rPr sz="2200" b="0" i="0">
+                <a:solidFill>
+                  <a:srgbClr val="000000"/>
+                </a:solidFill>
+                <a:latin typeface="Arial"/>
+              </a:rPr>
+              <a:t>Genuine synthetic mediation uniting distinct terms.</a:t>
             </a:r>
           </a:p>
         </p:txBody>
@@ -7215,8 +11500,8 @@
         </p:nvSpPr>
         <p:spPr>
           <a:xfrm>
-            <a:off x="822960" y="640080"/>
-            <a:ext cx="10545775" cy="1188720"/>
+            <a:off x="822960" y="502920"/>
+            <a:ext cx="10545775" cy="274320"/>
           </a:xfrm>
           <a:prstGeom prst="rect">
             <a:avLst/>
@@ -7224,7 +11509,7 @@
           <a:noFill/>
         </p:spPr>
         <p:txBody>
-          <a:bodyPr wrap="square" anchor="b" lIns="0" rIns="0" tIns="0" bIns="0">
+          <a:bodyPr wrap="square" anchor="t" lIns="0" rIns="0" tIns="0" bIns="0">
             <a:spAutoFit/>
           </a:bodyPr>
           <a:lstStyle/>
@@ -7235,13 +11520,13 @@
               </a:spcBef>
             </a:pPr>
             <a:r>
-              <a:rPr sz="3600" b="1" i="0">
-                <a:solidFill>
-                  <a:srgbClr val="000000"/>
-                </a:solidFill>
-                <a:latin typeface="Arial"/>
-              </a:rPr>
-              <a:t>Thirdness is its own kind of being</a:t>
+              <a:rPr sz="1400" b="0" i="0">
+                <a:solidFill>
+                  <a:srgbClr val="000000"/>
+                </a:solidFill>
+                <a:latin typeface="Arial"/>
+              </a:rPr>
+              <a:t>THEOREM FORMULATION</a:t>
             </a:r>
           </a:p>
         </p:txBody>
@@ -7254,8 +11539,8 @@
         </p:nvSpPr>
         <p:spPr>
           <a:xfrm>
-            <a:off x="822960" y="2103120"/>
-            <a:ext cx="10545775" cy="3931920"/>
+            <a:off x="822960" y="822960"/>
+            <a:ext cx="10545775" cy="1005840"/>
           </a:xfrm>
           <a:prstGeom prst="rect">
             <a:avLst/>
@@ -7274,45 +11559,189 @@
               </a:spcBef>
             </a:pPr>
             <a:r>
-              <a:rPr sz="2400" b="0" i="1">
-                <a:solidFill>
-                  <a:srgbClr val="000000"/>
-                </a:solidFill>
-                <a:latin typeface="Arial"/>
-              </a:rPr>
-              <a:t>its three members are bound together by it in a way that does not consist in any complexus of dyadic relations</a:t>
-            </a:r>
-          </a:p>
-          <a:p>
-            <a:pPr algn="l">
-              <a:spcBef>
-                <a:spcPts val="1400"/>
-              </a:spcBef>
-            </a:pPr>
-            <a:r>
-              <a:rPr sz="1800" b="0" i="0">
-                <a:solidFill>
-                  <a:srgbClr val="000000"/>
-                </a:solidFill>
-                <a:latin typeface="Arial"/>
-              </a:rPr>
-              <a:t>— Peirce, CP 2.274</a:t>
-            </a:r>
-          </a:p>
-          <a:p>
-            <a:pPr algn="l">
-              <a:spcBef>
-                <a:spcPts val="1400"/>
-              </a:spcBef>
-            </a:pPr>
-            <a:r>
-              <a:rPr sz="2400" b="0" i="0">
-                <a:solidFill>
-                  <a:srgbClr val="000000"/>
-                </a:solidFill>
-                <a:latin typeface="Arial"/>
-              </a:rPr>
-              <a:t>The reduction thesis, first stated without proof in 1870: no triad from dyads; every higher relation from triads.</a:t>
+              <a:rPr sz="3400" b="1" i="0">
+                <a:solidFill>
+                  <a:srgbClr val="000000"/>
+                </a:solidFill>
+                <a:latin typeface="Arial"/>
+              </a:rPr>
+              <a:t>Peircean Reduction Thesis (PRT)</a:t>
+            </a:r>
+          </a:p>
+        </p:txBody>
+      </p:sp>
+      <p:sp>
+        <p:nvSpPr>
+          <p:cNvPr id="4" name="TextBox 3"/>
+          <p:cNvSpPr txBox="1"/>
+          <p:nvPr/>
+        </p:nvSpPr>
+        <p:spPr>
+          <a:xfrm>
+            <a:off x="822960" y="2011680"/>
+            <a:ext cx="10545775" cy="4297680"/>
+          </a:xfrm>
+          <a:prstGeom prst="rect">
+            <a:avLst/>
+          </a:prstGeom>
+          <a:noFill/>
+        </p:spPr>
+        <p:txBody>
+          <a:bodyPr wrap="square" anchor="t" lIns="0" rIns="0" tIns="0" bIns="0">
+            <a:spAutoFit/>
+          </a:bodyPr>
+          <a:lstStyle/>
+          <a:p>
+            <a:pPr algn="l">
+              <a:spcBef>
+                <a:spcPts val="0"/>
+              </a:spcBef>
+            </a:pPr>
+            <a:r>
+              <a:rPr sz="2200" b="1" i="0">
+                <a:solidFill>
+                  <a:srgbClr val="000000"/>
+                </a:solidFill>
+                <a:latin typeface="Arial"/>
+              </a:rPr>
+              <a:t>Thesis:</a:t>
+            </a:r>
+            <a:r>
+              <a:rPr sz="2200" b="0" i="0">
+                <a:solidFill>
+                  <a:srgbClr val="000000"/>
+                </a:solidFill>
+                <a:latin typeface="Arial"/>
+              </a:rPr>
+              <a:t> Triads do not reduce; polyads (n ≥ 4) reduce to triads.</a:t>
+            </a:r>
+          </a:p>
+          <a:p>
+            <a:pPr algn="l">
+              <a:spcBef>
+                <a:spcPts val="1600"/>
+              </a:spcBef>
+            </a:pPr>
+            <a:r>
+              <a:rPr sz="2200" b="1" i="0">
+                <a:solidFill>
+                  <a:srgbClr val="000000"/>
+                </a:solidFill>
+                <a:latin typeface="Arial"/>
+              </a:rPr>
+              <a:t>PART 1 • NEGATIVE CLAIM — Negative Thesis</a:t>
+            </a:r>
+          </a:p>
+          <a:p>
+            <a:pPr algn="l">
+              <a:spcBef>
+                <a:spcPts val="400"/>
+              </a:spcBef>
+            </a:pPr>
+            <a:r>
+              <a:rPr sz="2200" b="0" i="0">
+                <a:solidFill>
+                  <a:srgbClr val="000000"/>
+                </a:solidFill>
+                <a:latin typeface="Arial"/>
+              </a:rPr>
+              <a:t>Closure Property: Dyads cannot synthesize triads.</a:t>
+            </a:r>
+          </a:p>
+          <a:p>
+            <a:pPr algn="l">
+              <a:spcBef>
+                <a:spcPts val="400"/>
+              </a:spcBef>
+            </a:pPr>
+            <a:r>
+              <a:rPr sz="2200" b="0" i="0">
+                <a:solidFill>
+                  <a:srgbClr val="000000"/>
+                </a:solidFill>
+                <a:latin typeface="Arial"/>
+              </a:rPr>
+              <a:t>Relational Gap: Pairwise projections lose join-irreducibility.</a:t>
+            </a:r>
+          </a:p>
+          <a:p>
+            <a:pPr algn="l">
+              <a:spcBef>
+                <a:spcPts val="400"/>
+              </a:spcBef>
+            </a:pPr>
+            <a:r>
+              <a:rPr sz="2200" b="0" i="0">
+                <a:solidFill>
+                  <a:srgbClr val="000000"/>
+                </a:solidFill>
+                <a:latin typeface="Arial"/>
+              </a:rPr>
+              <a:t>Universal Algebra: Strict non-generation over closed domains.</a:t>
+            </a:r>
+          </a:p>
+          <a:p>
+            <a:pPr algn="l">
+              <a:spcBef>
+                <a:spcPts val="1600"/>
+              </a:spcBef>
+            </a:pPr>
+            <a:r>
+              <a:rPr sz="2200" b="1" i="0">
+                <a:solidFill>
+                  <a:srgbClr val="000000"/>
+                </a:solidFill>
+                <a:latin typeface="Arial"/>
+              </a:rPr>
+              <a:t>PART 2 • POSITIVE CLAIM — Positive Thesis</a:t>
+            </a:r>
+          </a:p>
+          <a:p>
+            <a:pPr algn="l">
+              <a:spcBef>
+                <a:spcPts val="400"/>
+              </a:spcBef>
+            </a:pPr>
+            <a:r>
+              <a:rPr sz="2200" b="0" i="0">
+                <a:solidFill>
+                  <a:srgbClr val="000000"/>
+                </a:solidFill>
+                <a:latin typeface="Arial"/>
+              </a:rPr>
+              <a:t>Subcubic Networks: All polyads form via triads.</a:t>
+            </a:r>
+          </a:p>
+          <a:p>
+            <a:pPr algn="l">
+              <a:spcBef>
+                <a:spcPts val="400"/>
+              </a:spcBef>
+            </a:pPr>
+            <a:r>
+              <a:rPr sz="2200" b="0" i="0">
+                <a:solidFill>
+                  <a:srgbClr val="000000"/>
+                </a:solidFill>
+                <a:latin typeface="Arial"/>
+              </a:rPr>
+              <a:t>Universal Basis: Degree-three hypergraphs span all arities.</a:t>
+            </a:r>
+          </a:p>
+          <a:p>
+            <a:pPr algn="l">
+              <a:spcBef>
+                <a:spcPts val="400"/>
+              </a:spcBef>
+            </a:pPr>
+            <a:r>
+              <a:rPr sz="2200" b="0" i="0">
+                <a:solidFill>
+                  <a:srgbClr val="000000"/>
+                </a:solidFill>
+                <a:latin typeface="Arial"/>
+              </a:rPr>
+              <a:t>Ternary Bound: Zero primitives required beyond triads.</a:t>
             </a:r>
           </a:p>
         </p:txBody>
@@ -7351,8 +11780,8 @@
         </p:nvSpPr>
         <p:spPr>
           <a:xfrm>
-            <a:off x="822960" y="640080"/>
-            <a:ext cx="10545775" cy="1188720"/>
+            <a:off x="822960" y="502920"/>
+            <a:ext cx="10545775" cy="274320"/>
           </a:xfrm>
           <a:prstGeom prst="rect">
             <a:avLst/>
@@ -7360,7 +11789,7 @@
           <a:noFill/>
         </p:spPr>
         <p:txBody>
-          <a:bodyPr wrap="square" anchor="b" lIns="0" rIns="0" tIns="0" bIns="0">
+          <a:bodyPr wrap="square" anchor="t" lIns="0" rIns="0" tIns="0" bIns="0">
             <a:spAutoFit/>
           </a:bodyPr>
           <a:lstStyle/>
@@ -7371,13 +11800,13 @@
               </a:spcBef>
             </a:pPr>
             <a:r>
-              <a:rPr sz="3600" b="1" i="0">
-                <a:solidFill>
-                  <a:srgbClr val="000000"/>
-                </a:solidFill>
-                <a:latin typeface="Arial"/>
-              </a:rPr>
-              <a:t>Argument 1: giving is not throwing</a:t>
+              <a:rPr sz="1400" b="0" i="0">
+                <a:solidFill>
+                  <a:srgbClr val="000000"/>
+                </a:solidFill>
+                <a:latin typeface="Arial"/>
+              </a:rPr>
+              <a:t>SEMIOTIC ANALYSIS</a:t>
             </a:r>
           </a:p>
         </p:txBody>
@@ -7390,8 +11819,8 @@
         </p:nvSpPr>
         <p:spPr>
           <a:xfrm>
-            <a:off x="822960" y="2103120"/>
-            <a:ext cx="10545775" cy="3931920"/>
+            <a:off x="822960" y="822960"/>
+            <a:ext cx="10545775" cy="1005840"/>
           </a:xfrm>
           <a:prstGeom prst="rect">
             <a:avLst/>
@@ -7410,45 +11839,196 @@
               </a:spcBef>
             </a:pPr>
             <a:r>
-              <a:rPr sz="2400" b="0" i="1">
-                <a:solidFill>
-                  <a:srgbClr val="000000"/>
-                </a:solidFill>
-                <a:latin typeface="Arial"/>
-              </a:rPr>
-              <a:t>A gives B to C. This does not consist in A's throwing B away and its accidentally hitting C</a:t>
-            </a:r>
-          </a:p>
-          <a:p>
-            <a:pPr algn="l">
-              <a:spcBef>
-                <a:spcPts val="1400"/>
-              </a:spcBef>
-            </a:pPr>
-            <a:r>
-              <a:rPr sz="2400" b="0" i="1">
-                <a:solidFill>
-                  <a:srgbClr val="000000"/>
-                </a:solidFill>
-                <a:latin typeface="Arial"/>
-              </a:rPr>
-              <a:t>… merely one dyadic relation followed by another</a:t>
-            </a:r>
-          </a:p>
-          <a:p>
-            <a:pPr algn="l">
-              <a:spcBef>
-                <a:spcPts val="1400"/>
-              </a:spcBef>
-            </a:pPr>
-            <a:r>
-              <a:rPr sz="1800" b="0" i="0">
-                <a:solidFill>
-                  <a:srgbClr val="000000"/>
-                </a:solidFill>
-                <a:latin typeface="Arial"/>
-              </a:rPr>
-              <a:t>— Peirce, CP 1.345</a:t>
+              <a:rPr sz="3400" b="1" i="0">
+                <a:solidFill>
+                  <a:srgbClr val="000000"/>
+                </a:solidFill>
+                <a:latin typeface="Arial"/>
+              </a:rPr>
+              <a:t>Autonomous Mediation vs. Dyadic Cascades</a:t>
+            </a:r>
+          </a:p>
+        </p:txBody>
+      </p:sp>
+      <p:sp>
+        <p:nvSpPr>
+          <p:cNvPr id="4" name="TextBox 3"/>
+          <p:cNvSpPr txBox="1"/>
+          <p:nvPr/>
+        </p:nvSpPr>
+        <p:spPr>
+          <a:xfrm>
+            <a:off x="822960" y="2011680"/>
+            <a:ext cx="10545775" cy="4297680"/>
+          </a:xfrm>
+          <a:prstGeom prst="rect">
+            <a:avLst/>
+          </a:prstGeom>
+          <a:noFill/>
+        </p:spPr>
+        <p:txBody>
+          <a:bodyPr wrap="square" anchor="t" lIns="0" rIns="0" tIns="0" bIns="0">
+            <a:spAutoFit/>
+          </a:bodyPr>
+          <a:lstStyle/>
+          <a:p>
+            <a:pPr algn="l">
+              <a:spcBef>
+                <a:spcPts val="0"/>
+              </a:spcBef>
+            </a:pPr>
+            <a:r>
+              <a:rPr sz="2200" b="1" i="0">
+                <a:solidFill>
+                  <a:srgbClr val="000000"/>
+                </a:solidFill>
+                <a:latin typeface="Arial"/>
+              </a:rPr>
+              <a:t>FACTORIZABLE — Chained Dyadic Pipeline</a:t>
+            </a:r>
+          </a:p>
+          <a:p>
+            <a:pPr algn="l">
+              <a:spcBef>
+                <a:spcPts val="400"/>
+              </a:spcBef>
+            </a:pPr>
+            <a:r>
+              <a:rPr sz="2200" b="0" i="0">
+                <a:solidFill>
+                  <a:srgbClr val="000000"/>
+                </a:solidFill>
+                <a:latin typeface="Arial"/>
+              </a:rPr>
+              <a:t>R(A, B) • R(B, C) → Dyadic Sequence</a:t>
+            </a:r>
+          </a:p>
+          <a:p>
+            <a:pPr algn="l">
+              <a:spcBef>
+                <a:spcPts val="400"/>
+              </a:spcBef>
+            </a:pPr>
+            <a:r>
+              <a:rPr sz="2200" b="0" i="0">
+                <a:solidFill>
+                  <a:srgbClr val="000000"/>
+                </a:solidFill>
+                <a:latin typeface="Arial"/>
+              </a:rPr>
+              <a:t>Independent Stages: First relation completes before second.</a:t>
+            </a:r>
+          </a:p>
+          <a:p>
+            <a:pPr algn="l">
+              <a:spcBef>
+                <a:spcPts val="400"/>
+              </a:spcBef>
+            </a:pPr>
+            <a:r>
+              <a:rPr sz="2200" b="0" i="0">
+                <a:solidFill>
+                  <a:srgbClr val="000000"/>
+                </a:solidFill>
+                <a:latin typeface="Arial"/>
+              </a:rPr>
+              <a:t>Markov Property: Intermediate node screens off origin.</a:t>
+            </a:r>
+          </a:p>
+          <a:p>
+            <a:pPr algn="l">
+              <a:spcBef>
+                <a:spcPts val="400"/>
+              </a:spcBef>
+            </a:pPr>
+            <a:r>
+              <a:rPr sz="2200" b="0" i="0">
+                <a:solidFill>
+                  <a:srgbClr val="000000"/>
+                </a:solidFill>
+                <a:latin typeface="Arial"/>
+              </a:rPr>
+              <a:t>Zero Integration: Total relation factors into projections.</a:t>
+            </a:r>
+          </a:p>
+          <a:p>
+            <a:pPr algn="l">
+              <a:spcBef>
+                <a:spcPts val="1600"/>
+              </a:spcBef>
+            </a:pPr>
+            <a:r>
+              <a:rPr sz="2200" b="1" i="0">
+                <a:solidFill>
+                  <a:srgbClr val="000000"/>
+                </a:solidFill>
+                <a:latin typeface="Arial"/>
+              </a:rPr>
+              <a:t>NON-FACTORIZABLE — Genuine Triadic Transaction</a:t>
+            </a:r>
+          </a:p>
+          <a:p>
+            <a:pPr algn="l">
+              <a:spcBef>
+                <a:spcPts val="400"/>
+              </a:spcBef>
+            </a:pPr>
+            <a:r>
+              <a:rPr sz="2200" b="0" i="0">
+                <a:solidFill>
+                  <a:srgbClr val="000000"/>
+                </a:solidFill>
+                <a:latin typeface="Arial"/>
+              </a:rPr>
+              <a:t>G(A, B, C) ≠ R1(A, B) × R2(B, C)</a:t>
+            </a:r>
+          </a:p>
+          <a:p>
+            <a:pPr algn="l">
+              <a:spcBef>
+                <a:spcPts val="400"/>
+              </a:spcBef>
+            </a:pPr>
+            <a:r>
+              <a:rPr sz="2200" b="0" i="0">
+                <a:solidFill>
+                  <a:srgbClr val="000000"/>
+                </a:solidFill>
+                <a:latin typeface="Arial"/>
+              </a:rPr>
+              <a:t>Simultaneous Binding: Third party mutually constitutes event.</a:t>
+            </a:r>
+          </a:p>
+          <a:p>
+            <a:pPr algn="l">
+              <a:spcBef>
+                <a:spcPts val="400"/>
+              </a:spcBef>
+            </a:pPr>
+            <a:r>
+              <a:rPr sz="2200" b="0" i="0">
+                <a:solidFill>
+                  <a:srgbClr val="000000"/>
+                </a:solidFill>
+                <a:latin typeface="Arial"/>
+              </a:rPr>
+              <a:t>Irreducible Mediant: Lawful bond precedes pairwise parts.</a:t>
+            </a:r>
+          </a:p>
+          <a:p>
+            <a:pPr algn="l">
+              <a:spcBef>
+                <a:spcPts val="400"/>
+              </a:spcBef>
+            </a:pPr>
+            <a:r>
+              <a:rPr sz="2200" b="0" i="0">
+                <a:solidFill>
+                  <a:srgbClr val="000000"/>
+                </a:solidFill>
+                <a:latin typeface="Arial"/>
+              </a:rPr>
+              <a:t>Triadic Wholeness: Interaction collapses upon decomposition.</a:t>
             </a:r>
           </a:p>
         </p:txBody>
@@ -7487,8 +12067,8 @@
         </p:nvSpPr>
         <p:spPr>
           <a:xfrm>
-            <a:off x="822960" y="640080"/>
-            <a:ext cx="10545775" cy="1188720"/>
+            <a:off x="822960" y="502920"/>
+            <a:ext cx="10545775" cy="274320"/>
           </a:xfrm>
           <a:prstGeom prst="rect">
             <a:avLst/>
@@ -7496,7 +12076,7 @@
           <a:noFill/>
         </p:spPr>
         <p:txBody>
-          <a:bodyPr wrap="square" anchor="b" lIns="0" rIns="0" tIns="0" bIns="0">
+          <a:bodyPr wrap="square" anchor="t" lIns="0" rIns="0" tIns="0" bIns="0">
             <a:spAutoFit/>
           </a:bodyPr>
           <a:lstStyle/>
@@ -7507,13 +12087,13 @@
               </a:spcBef>
             </a:pPr>
             <a:r>
-              <a:rPr sz="3600" b="1" i="0">
-                <a:solidFill>
-                  <a:srgbClr val="000000"/>
-                </a:solidFill>
-                <a:latin typeface="Arial"/>
-              </a:rPr>
-              <a:t>Argument 2: pairs only make pairs</a:t>
+              <a:rPr sz="1400" b="0" i="0">
+                <a:solidFill>
+                  <a:srgbClr val="000000"/>
+                </a:solidFill>
+                <a:latin typeface="Arial"/>
+              </a:rPr>
+              <a:t>TOPOLOGICAL PROOF</a:t>
             </a:r>
           </a:p>
         </p:txBody>
@@ -7526,8 +12106,8 @@
         </p:nvSpPr>
         <p:spPr>
           <a:xfrm>
-            <a:off x="822960" y="2103120"/>
-            <a:ext cx="10545775" cy="3931920"/>
+            <a:off x="822960" y="822960"/>
+            <a:ext cx="10545775" cy="1005840"/>
           </a:xfrm>
           <a:prstGeom prst="rect">
             <a:avLst/>
@@ -7546,35 +12126,121 @@
               </a:spcBef>
             </a:pPr>
             <a:r>
-              <a:rPr sz="2400" b="0" i="1">
-                <a:solidFill>
-                  <a:srgbClr val="000000"/>
-                </a:solidFill>
-                <a:latin typeface="Arial"/>
-              </a:rPr>
-              <a:t>you can never by such joining make a graph with three tails</a:t>
-            </a:r>
-          </a:p>
-          <a:p>
-            <a:pPr algn="l">
-              <a:spcBef>
-                <a:spcPts val="1400"/>
-              </a:spcBef>
-            </a:pPr>
-            <a:r>
-              <a:rPr sz="1800" b="0" i="0">
-                <a:solidFill>
-                  <a:srgbClr val="000000"/>
-                </a:solidFill>
-                <a:latin typeface="Arial"/>
-              </a:rPr>
-              <a:t>— Peirce, CP 1.346</a:t>
-            </a:r>
-          </a:p>
-          <a:p>
-            <a:pPr algn="l">
-              <a:spcBef>
-                <a:spcPts val="1400"/>
+              <a:rPr sz="3400" b="1" i="0">
+                <a:solidFill>
+                  <a:srgbClr val="000000"/>
+                </a:solidFill>
+                <a:latin typeface="Arial"/>
+              </a:rPr>
+              <a:t>Topological Obstructions to Dyadic Synthesis</a:t>
+            </a:r>
+          </a:p>
+        </p:txBody>
+      </p:sp>
+      <p:pic>
+        <p:nvPicPr>
+          <p:cNvPr id="4" name="Picture 3" descr="valency.png"/>
+          <p:cNvPicPr>
+            <a:picLocks noChangeAspect="1"/>
+          </p:cNvPicPr>
+          <p:nvPr/>
+        </p:nvPicPr>
+        <p:blipFill>
+          <a:blip r:embed="rId2"/>
+          <a:stretch>
+            <a:fillRect/>
+          </a:stretch>
+        </p:blipFill>
+        <p:spPr>
+          <a:xfrm>
+            <a:off x="822960" y="2011680"/>
+            <a:ext cx="3108960" cy="1650210"/>
+          </a:xfrm>
+          <a:prstGeom prst="rect">
+            <a:avLst/>
+          </a:prstGeom>
+        </p:spPr>
+      </p:pic>
+      <p:sp>
+        <p:nvSpPr>
+          <p:cNvPr id="5" name="TextBox 4"/>
+          <p:cNvSpPr txBox="1"/>
+          <p:nvPr/>
+        </p:nvSpPr>
+        <p:spPr>
+          <a:xfrm>
+            <a:off x="822960" y="3799050"/>
+            <a:ext cx="3108960" cy="548640"/>
+          </a:xfrm>
+          <a:prstGeom prst="rect">
+            <a:avLst/>
+          </a:prstGeom>
+          <a:noFill/>
+        </p:spPr>
+        <p:txBody>
+          <a:bodyPr wrap="square" anchor="t" lIns="0" rIns="0" tIns="0" bIns="0">
+            <a:spAutoFit/>
+          </a:bodyPr>
+          <a:lstStyle/>
+          <a:p>
+            <a:pPr algn="l">
+              <a:spcBef>
+                <a:spcPts val="0"/>
+              </a:spcBef>
+            </a:pPr>
+            <a:r>
+              <a:rPr sz="1600" b="0" i="0">
+                <a:solidFill>
+                  <a:srgbClr val="000000"/>
+                </a:solidFill>
+                <a:latin typeface="Arial"/>
+              </a:rPr>
+              <a:t>Bonding Rule: 2 + 2 - 2 = 2</a:t>
+            </a:r>
+          </a:p>
+        </p:txBody>
+      </p:sp>
+      <p:sp>
+        <p:nvSpPr>
+          <p:cNvPr id="6" name="TextBox 5"/>
+          <p:cNvSpPr txBox="1"/>
+          <p:nvPr/>
+        </p:nvSpPr>
+        <p:spPr>
+          <a:xfrm>
+            <a:off x="4389120" y="2011680"/>
+            <a:ext cx="6979615" cy="4297680"/>
+          </a:xfrm>
+          <a:prstGeom prst="rect">
+            <a:avLst/>
+          </a:prstGeom>
+          <a:noFill/>
+        </p:spPr>
+        <p:txBody>
+          <a:bodyPr wrap="square" anchor="t" lIns="0" rIns="0" tIns="0" bIns="0">
+            <a:spAutoFit/>
+          </a:bodyPr>
+          <a:lstStyle/>
+          <a:p>
+            <a:pPr algn="l">
+              <a:spcBef>
+                <a:spcPts val="0"/>
+              </a:spcBef>
+            </a:pPr>
+            <a:r>
+              <a:rPr sz="2200" b="1" i="0">
+                <a:solidFill>
+                  <a:srgbClr val="000000"/>
+                </a:solidFill>
+                <a:latin typeface="Arial"/>
+              </a:rPr>
+              <a:t>Valency Conservation</a:t>
+            </a:r>
+          </a:p>
+          <a:p>
+            <a:pPr algn="l">
+              <a:spcBef>
+                <a:spcPts val="400"/>
               </a:spcBef>
             </a:pPr>
             <a:r>
@@ -7582,15 +12248,31 @@
                 <a:solidFill>
                   <a:srgbClr val="000000"/>
                 </a:solidFill>
-                <a:latin typeface="Courier New"/>
-              </a:rPr>
-              <a:t>2 + 2 − 2 = 2</a:t>
-            </a:r>
-          </a:p>
-          <a:p>
-            <a:pPr algn="l">
-              <a:spcBef>
-                <a:spcPts val="0"/>
+                <a:latin typeface="Arial"/>
+              </a:rPr>
+              <a:t>Connecting dyadic relations yields purely linear paths.</a:t>
+            </a:r>
+          </a:p>
+          <a:p>
+            <a:pPr algn="l">
+              <a:spcBef>
+                <a:spcPts val="1600"/>
+              </a:spcBef>
+            </a:pPr>
+            <a:r>
+              <a:rPr sz="2200" b="1" i="0">
+                <a:solidFill>
+                  <a:srgbClr val="000000"/>
+                </a:solidFill>
+                <a:latin typeface="Arial"/>
+              </a:rPr>
+              <a:t>Topological Barrier</a:t>
+            </a:r>
+          </a:p>
+          <a:p>
+            <a:pPr algn="l">
+              <a:spcBef>
+                <a:spcPts val="400"/>
               </a:spcBef>
             </a:pPr>
             <a:r>
@@ -7598,41 +12280,41 @@
                 <a:solidFill>
                   <a:srgbClr val="000000"/>
                 </a:solidFill>
-                <a:latin typeface="Courier New"/>
-              </a:rPr>
-              <a:t>3 + 3 − 2 = 4</a:t>
-            </a:r>
-          </a:p>
-          <a:p>
-            <a:pPr algn="l">
-              <a:spcBef>
-                <a:spcPts val="1400"/>
-              </a:spcBef>
-            </a:pPr>
-            <a:r>
-              <a:rPr sz="2400" b="0" i="1">
-                <a:solidFill>
-                  <a:srgbClr val="000000"/>
-                </a:solidFill>
-                <a:latin typeface="Arial"/>
-              </a:rPr>
-              <a:t>artiads, or even-ads, can produce only artiads</a:t>
-            </a:r>
-          </a:p>
-          <a:p>
-            <a:pPr algn="l">
-              <a:spcBef>
-                <a:spcPts val="1400"/>
-              </a:spcBef>
-            </a:pPr>
-            <a:r>
-              <a:rPr sz="1800" b="0" i="0">
-                <a:solidFill>
-                  <a:srgbClr val="000000"/>
-                </a:solidFill>
-                <a:latin typeface="Arial"/>
-              </a:rPr>
-              <a:t>— Peirce, 1897</a:t>
+                <a:latin typeface="Arial"/>
+              </a:rPr>
+              <a:t>Degree-two vertices cannot construct a branch.</a:t>
+            </a:r>
+          </a:p>
+          <a:p>
+            <a:pPr algn="l">
+              <a:spcBef>
+                <a:spcPts val="1600"/>
+              </a:spcBef>
+            </a:pPr>
+            <a:r>
+              <a:rPr sz="2200" b="1" i="0">
+                <a:solidFill>
+                  <a:srgbClr val="000000"/>
+                </a:solidFill>
+                <a:latin typeface="Arial"/>
+              </a:rPr>
+              <a:t>Trivalent Junction</a:t>
+            </a:r>
+          </a:p>
+          <a:p>
+            <a:pPr algn="l">
+              <a:spcBef>
+                <a:spcPts val="400"/>
+              </a:spcBef>
+            </a:pPr>
+            <a:r>
+              <a:rPr sz="2200" b="0" i="0">
+                <a:solidFill>
+                  <a:srgbClr val="000000"/>
+                </a:solidFill>
+                <a:latin typeface="Arial"/>
+              </a:rPr>
+              <a:t>Every branching junction is intrinsically triadic.</a:t>
             </a:r>
           </a:p>
         </p:txBody>
@@ -7671,8 +12353,8 @@
         </p:nvSpPr>
         <p:spPr>
           <a:xfrm>
-            <a:off x="822960" y="640080"/>
-            <a:ext cx="10545775" cy="1188720"/>
+            <a:off x="822960" y="502920"/>
+            <a:ext cx="10545775" cy="274320"/>
           </a:xfrm>
           <a:prstGeom prst="rect">
             <a:avLst/>
@@ -7680,7 +12362,7 @@
           <a:noFill/>
         </p:spPr>
         <p:txBody>
-          <a:bodyPr wrap="square" anchor="b" lIns="0" rIns="0" tIns="0" bIns="0">
+          <a:bodyPr wrap="square" anchor="t" lIns="0" rIns="0" tIns="0" bIns="0">
             <a:spAutoFit/>
           </a:bodyPr>
           <a:lstStyle/>
@@ -7691,13 +12373,13 @@
               </a:spcBef>
             </a:pPr>
             <a:r>
-              <a:rPr sz="3600" b="1" i="0">
-                <a:solidFill>
-                  <a:srgbClr val="000000"/>
-                </a:solidFill>
-                <a:latin typeface="Arial"/>
-              </a:rPr>
-              <a:t>Argument 3: the junction is a triad</a:t>
+              <a:rPr sz="1400" b="0" i="0">
+                <a:solidFill>
+                  <a:srgbClr val="000000"/>
+                </a:solidFill>
+                <a:latin typeface="Arial"/>
+              </a:rPr>
+              <a:t>ALGEBRAIC PRIMITIVE</a:t>
             </a:r>
           </a:p>
         </p:txBody>
@@ -7710,8 +12392,8 @@
         </p:nvSpPr>
         <p:spPr>
           <a:xfrm>
-            <a:off x="822960" y="2103120"/>
-            <a:ext cx="10545775" cy="3931920"/>
+            <a:off x="822960" y="822960"/>
+            <a:ext cx="10545775" cy="1005840"/>
           </a:xfrm>
           <a:prstGeom prst="rect">
             <a:avLst/>
@@ -7730,61 +12412,184 @@
               </a:spcBef>
             </a:pPr>
             <a:r>
-              <a:rPr sz="2400" b="0" i="1">
-                <a:solidFill>
-                  <a:srgbClr val="000000"/>
-                </a:solidFill>
-                <a:latin typeface="Arial"/>
-              </a:rPr>
-              <a:t>every node of bonds is equivalent to a relative</a:t>
-            </a:r>
-          </a:p>
-          <a:p>
-            <a:pPr algn="l">
-              <a:spcBef>
-                <a:spcPts val="1400"/>
-              </a:spcBef>
-            </a:pPr>
-            <a:r>
-              <a:rPr sz="1800" b="0" i="0">
-                <a:solidFill>
-                  <a:srgbClr val="000000"/>
-                </a:solidFill>
-                <a:latin typeface="Arial"/>
-              </a:rPr>
-              <a:t>— Peirce, 1897</a:t>
-            </a:r>
-          </a:p>
-          <a:p>
-            <a:pPr algn="l">
-              <a:spcBef>
-                <a:spcPts val="1400"/>
-              </a:spcBef>
-            </a:pPr>
-            <a:r>
-              <a:rPr sz="2400" b="0" i="0">
-                <a:solidFill>
-                  <a:srgbClr val="000000"/>
-                </a:solidFill>
-                <a:latin typeface="Arial"/>
-              </a:rPr>
-              <a:t>Kempe, 1886: redraw a triad as a unit with three links.</a:t>
-            </a:r>
-          </a:p>
-          <a:p>
-            <a:pPr algn="l">
-              <a:spcBef>
-                <a:spcPts val="1400"/>
-              </a:spcBef>
-            </a:pPr>
-            <a:r>
-              <a:rPr sz="2400" b="0" i="0">
-                <a:solidFill>
-                  <a:srgbClr val="000000"/>
-                </a:solidFill>
-                <a:latin typeface="Arial"/>
-              </a:rPr>
-              <a:t>Peirce, 1892: "a formidable objection" — yet the mediation is still there, in "the attachment of lines to spots"</a:t>
+              <a:rPr sz="3400" b="1" i="0">
+                <a:solidFill>
+                  <a:srgbClr val="000000"/>
+                </a:solidFill>
+                <a:latin typeface="Arial"/>
+              </a:rPr>
+              <a:t>The Teridentity Relation: =_3</a:t>
+            </a:r>
+          </a:p>
+        </p:txBody>
+      </p:sp>
+      <p:sp>
+        <p:nvSpPr>
+          <p:cNvPr id="4" name="TextBox 3"/>
+          <p:cNvSpPr txBox="1"/>
+          <p:nvPr/>
+        </p:nvSpPr>
+        <p:spPr>
+          <a:xfrm>
+            <a:off x="822960" y="2011680"/>
+            <a:ext cx="10545775" cy="4297680"/>
+          </a:xfrm>
+          <a:prstGeom prst="rect">
+            <a:avLst/>
+          </a:prstGeom>
+          <a:noFill/>
+        </p:spPr>
+        <p:txBody>
+          <a:bodyPr wrap="square" anchor="t" lIns="0" rIns="0" tIns="0" bIns="0">
+            <a:spAutoFit/>
+          </a:bodyPr>
+          <a:lstStyle/>
+          <a:p>
+            <a:pPr algn="l">
+              <a:spcBef>
+                <a:spcPts val="0"/>
+              </a:spcBef>
+            </a:pPr>
+            <a:r>
+              <a:rPr sz="2200" b="0" i="0">
+                <a:solidFill>
+                  <a:srgbClr val="000000"/>
+                </a:solidFill>
+                <a:latin typeface="Arial"/>
+              </a:rPr>
+              <a:t>=_3 = {(x, x, x) </a:t>
+            </a:r>
+            <a:r>
+              <a:rPr sz="2200" b="0" i="0">
+                <a:solidFill>
+                  <a:srgbClr val="000000"/>
+                </a:solidFill>
+                <a:latin typeface="Cambria Math"/>
+              </a:rPr>
+              <a:t>∈</a:t>
+            </a:r>
+            <a:r>
+              <a:rPr sz="2200" b="0" i="0">
+                <a:solidFill>
+                  <a:srgbClr val="000000"/>
+                </a:solidFill>
+                <a:latin typeface="Arial"/>
+              </a:rPr>
+              <a:t> X³ | x </a:t>
+            </a:r>
+            <a:r>
+              <a:rPr sz="2200" b="0" i="0">
+                <a:solidFill>
+                  <a:srgbClr val="000000"/>
+                </a:solidFill>
+                <a:latin typeface="Cambria Math"/>
+              </a:rPr>
+              <a:t>∈</a:t>
+            </a:r>
+            <a:r>
+              <a:rPr sz="2200" b="0" i="0">
+                <a:solidFill>
+                  <a:srgbClr val="000000"/>
+                </a:solidFill>
+                <a:latin typeface="Arial"/>
+              </a:rPr>
+              <a:t> X}</a:t>
+            </a:r>
+          </a:p>
+          <a:p>
+            <a:pPr algn="l">
+              <a:spcBef>
+                <a:spcPts val="1600"/>
+              </a:spcBef>
+            </a:pPr>
+            <a:r>
+              <a:rPr sz="2200" b="1" i="0">
+                <a:solidFill>
+                  <a:srgbClr val="000000"/>
+                </a:solidFill>
+                <a:latin typeface="Arial"/>
+              </a:rPr>
+              <a:t>Branching Identity</a:t>
+            </a:r>
+          </a:p>
+          <a:p>
+            <a:pPr algn="l">
+              <a:spcBef>
+                <a:spcPts val="400"/>
+              </a:spcBef>
+            </a:pPr>
+            <a:r>
+              <a:rPr sz="2200" b="0" i="0">
+                <a:solidFill>
+                  <a:srgbClr val="000000"/>
+                </a:solidFill>
+                <a:latin typeface="Arial"/>
+              </a:rPr>
+              <a:t>Variable duplication across lines.</a:t>
+            </a:r>
+          </a:p>
+          <a:p>
+            <a:pPr algn="l">
+              <a:spcBef>
+                <a:spcPts val="1600"/>
+              </a:spcBef>
+            </a:pPr>
+            <a:r>
+              <a:rPr sz="2200" b="1" i="0">
+                <a:solidFill>
+                  <a:srgbClr val="000000"/>
+                </a:solidFill>
+                <a:latin typeface="Arial"/>
+              </a:rPr>
+              <a:t>Burch's Proof (1991)</a:t>
+            </a:r>
+          </a:p>
+          <a:p>
+            <a:pPr algn="l">
+              <a:spcBef>
+                <a:spcPts val="400"/>
+              </a:spcBef>
+            </a:pPr>
+            <a:r>
+              <a:rPr sz="2200" b="0" i="0">
+                <a:solidFill>
+                  <a:srgbClr val="000000"/>
+                </a:solidFill>
+                <a:latin typeface="Arial"/>
+              </a:rPr>
+              <a:t>Unprovable from binary identity.</a:t>
+            </a:r>
+          </a:p>
+          <a:p>
+            <a:pPr algn="l">
+              <a:spcBef>
+                <a:spcPts val="1600"/>
+              </a:spcBef>
+            </a:pPr>
+            <a:r>
+              <a:rPr sz="2200" b="1" i="0">
+                <a:solidFill>
+                  <a:srgbClr val="000000"/>
+                </a:solidFill>
+                <a:latin typeface="Arial"/>
+              </a:rPr>
+              <a:t>Join-Irreducible</a:t>
+            </a:r>
+          </a:p>
+          <a:p>
+            <a:pPr algn="l">
+              <a:spcBef>
+                <a:spcPts val="400"/>
+              </a:spcBef>
+            </a:pPr>
+            <a:r>
+              <a:rPr sz="2200" b="0" i="0">
+                <a:solidFill>
+                  <a:srgbClr val="000000"/>
+                </a:solidFill>
+                <a:latin typeface="Arial"/>
+              </a:rPr>
+              <a:t>Minimal algebraic generator.</a:t>
             </a:r>
           </a:p>
         </p:txBody>
@@ -7823,8 +12628,8 @@
         </p:nvSpPr>
         <p:spPr>
           <a:xfrm>
-            <a:off x="822960" y="640080"/>
-            <a:ext cx="10545775" cy="1188720"/>
+            <a:off x="822960" y="502920"/>
+            <a:ext cx="10545775" cy="274320"/>
           </a:xfrm>
           <a:prstGeom prst="rect">
             <a:avLst/>
@@ -7832,7 +12637,7 @@
           <a:noFill/>
         </p:spPr>
         <p:txBody>
-          <a:bodyPr wrap="square" anchor="b" lIns="0" rIns="0" tIns="0" bIns="0">
+          <a:bodyPr wrap="square" anchor="t" lIns="0" rIns="0" tIns="0" bIns="0">
             <a:spAutoFit/>
           </a:bodyPr>
           <a:lstStyle/>
@@ -7843,13 +12648,13 @@
               </a:spcBef>
             </a:pPr>
             <a:r>
-              <a:rPr sz="3600" b="1" i="0">
-                <a:solidFill>
-                  <a:srgbClr val="000000"/>
-                </a:solidFill>
-                <a:latin typeface="Arial"/>
-              </a:rPr>
-              <a:t>Simmel: the third changes the group</a:t>
+              <a:rPr sz="1400" b="0" i="0">
+                <a:solidFill>
+                  <a:srgbClr val="000000"/>
+                </a:solidFill>
+                <a:latin typeface="Arial"/>
+              </a:rPr>
+              <a:t>NOMINALIST CHALLENGE</a:t>
             </a:r>
           </a:p>
         </p:txBody>
@@ -7862,8 +12667,8 @@
         </p:nvSpPr>
         <p:spPr>
           <a:xfrm>
-            <a:off x="822960" y="2103120"/>
-            <a:ext cx="10545775" cy="3931920"/>
+            <a:off x="822960" y="822960"/>
+            <a:ext cx="10545775" cy="1005840"/>
           </a:xfrm>
           <a:prstGeom prst="rect">
             <a:avLst/>
@@ -7882,61 +12687,158 @@
               </a:spcBef>
             </a:pPr>
             <a:r>
-              <a:rPr sz="2400" b="0" i="0">
-                <a:solidFill>
-                  <a:srgbClr val="000000"/>
-                </a:solidFill>
-                <a:latin typeface="Arial"/>
-              </a:rPr>
-              <a:t>Two: when one refuses, "only the other remains"</a:t>
-            </a:r>
-          </a:p>
-          <a:p>
-            <a:pPr algn="l">
-              <a:spcBef>
-                <a:spcPts val="1400"/>
-              </a:spcBef>
-            </a:pPr>
-            <a:r>
-              <a:rPr sz="2400" b="0" i="0">
-                <a:solidFill>
-                  <a:srgbClr val="000000"/>
-                </a:solidFill>
-                <a:latin typeface="Arial"/>
-              </a:rPr>
-              <a:t>Three: "each pair of elements are now joined by a broken line"</a:t>
-            </a:r>
-          </a:p>
-          <a:p>
-            <a:pPr algn="l">
-              <a:spcBef>
-                <a:spcPts val="1400"/>
-              </a:spcBef>
-            </a:pPr>
-            <a:r>
-              <a:rPr sz="2400" b="0" i="0">
-                <a:solidFill>
-                  <a:srgbClr val="000000"/>
-                </a:solidFill>
-                <a:latin typeface="Arial"/>
-              </a:rPr>
-              <a:t>But a distant third leaves "configurations of twos"</a:t>
-            </a:r>
-          </a:p>
-          <a:p>
-            <a:pPr algn="l">
-              <a:spcBef>
-                <a:spcPts val="1400"/>
-              </a:spcBef>
-            </a:pPr>
-            <a:r>
-              <a:rPr sz="1800" b="0" i="0">
-                <a:solidFill>
-                  <a:srgbClr val="000000"/>
-                </a:solidFill>
-                <a:latin typeface="Arial"/>
-              </a:rPr>
-              <a:t>— Simmel, 1902</a:t>
+              <a:rPr sz="3400" b="1" i="0">
+                <a:solidFill>
+                  <a:srgbClr val="000000"/>
+                </a:solidFill>
+                <a:latin typeface="Arial"/>
+              </a:rPr>
+              <a:t>Quine’s Dyadic Translation (1954)</a:t>
+            </a:r>
+          </a:p>
+        </p:txBody>
+      </p:sp>
+      <p:pic>
+        <p:nvPicPr>
+          <p:cNvPr id="4" name="Picture 3" descr="quine.png"/>
+          <p:cNvPicPr>
+            <a:picLocks noChangeAspect="1"/>
+          </p:cNvPicPr>
+          <p:nvPr/>
+        </p:nvPicPr>
+        <p:blipFill>
+          <a:blip r:embed="rId2"/>
+          <a:stretch>
+            <a:fillRect/>
+          </a:stretch>
+        </p:blipFill>
+        <p:spPr>
+          <a:xfrm>
+            <a:off x="822960" y="2011680"/>
+            <a:ext cx="2771029" cy="3749040"/>
+          </a:xfrm>
+          <a:prstGeom prst="rect">
+            <a:avLst/>
+          </a:prstGeom>
+        </p:spPr>
+      </p:pic>
+      <p:sp>
+        <p:nvSpPr>
+          <p:cNvPr id="5" name="TextBox 4"/>
+          <p:cNvSpPr txBox="1"/>
+          <p:nvPr/>
+        </p:nvSpPr>
+        <p:spPr>
+          <a:xfrm>
+            <a:off x="4389120" y="2011680"/>
+            <a:ext cx="6979615" cy="4297680"/>
+          </a:xfrm>
+          <a:prstGeom prst="rect">
+            <a:avLst/>
+          </a:prstGeom>
+          <a:noFill/>
+        </p:spPr>
+        <p:txBody>
+          <a:bodyPr wrap="square" anchor="t" lIns="0" rIns="0" tIns="0" bIns="0">
+            <a:spAutoFit/>
+          </a:bodyPr>
+          <a:lstStyle/>
+          <a:p>
+            <a:pPr algn="l">
+              <a:spcBef>
+                <a:spcPts val="0"/>
+              </a:spcBef>
+            </a:pPr>
+            <a:r>
+              <a:rPr sz="2200" b="0" i="0">
+                <a:solidFill>
+                  <a:srgbClr val="000000"/>
+                </a:solidFill>
+                <a:latin typeface="Arial"/>
+              </a:rPr>
+              <a:t>Quine: “There is only one predicate letter, and it a dyadic one.”</a:t>
+            </a:r>
+          </a:p>
+          <a:p>
+            <a:pPr algn="l">
+              <a:spcBef>
+                <a:spcPts val="1600"/>
+              </a:spcBef>
+            </a:pPr>
+            <a:r>
+              <a:rPr sz="2200" b="1" i="0">
+                <a:solidFill>
+                  <a:srgbClr val="000000"/>
+                </a:solidFill>
+                <a:latin typeface="Arial"/>
+              </a:rPr>
+              <a:t>Extensional Translation</a:t>
+            </a:r>
+          </a:p>
+          <a:p>
+            <a:pPr algn="l">
+              <a:spcBef>
+                <a:spcPts val="400"/>
+              </a:spcBef>
+            </a:pPr>
+            <a:r>
+              <a:rPr sz="2200" b="0" i="0">
+                <a:solidFill>
+                  <a:srgbClr val="000000"/>
+                </a:solidFill>
+                <a:latin typeface="Arial"/>
+              </a:rPr>
+              <a:t>Encodes ternary predicates into binary membership over tuples.</a:t>
+            </a:r>
+          </a:p>
+          <a:p>
+            <a:pPr algn="l">
+              <a:spcBef>
+                <a:spcPts val="1600"/>
+              </a:spcBef>
+            </a:pPr>
+            <a:r>
+              <a:rPr sz="2200" b="1" i="0">
+                <a:solidFill>
+                  <a:srgbClr val="000000"/>
+                </a:solidFill>
+                <a:latin typeface="Arial"/>
+              </a:rPr>
+              <a:t>Tuple Stratification</a:t>
+            </a:r>
+          </a:p>
+          <a:p>
+            <a:pPr algn="l">
+              <a:spcBef>
+                <a:spcPts val="400"/>
+              </a:spcBef>
+            </a:pPr>
+            <a:r>
+              <a:rPr sz="2200" b="0" i="0">
+                <a:solidFill>
+                  <a:srgbClr val="000000"/>
+                </a:solidFill>
+                <a:latin typeface="Arial"/>
+              </a:rPr>
+              <a:t>R(x, y, z) maps to dyadic predicate </a:t>
+            </a:r>
+            <a:r>
+              <a:rPr sz="2200" b="0" i="0">
+                <a:solidFill>
+                  <a:srgbClr val="000000"/>
+                </a:solidFill>
+                <a:latin typeface="Cambria Math"/>
+              </a:rPr>
+              <a:t>∈</a:t>
+            </a:r>
+            <a:r>
+              <a:rPr sz="2200" b="0" i="0">
+                <a:solidFill>
+                  <a:srgbClr val="000000"/>
+                </a:solidFill>
+                <a:latin typeface="Arial"/>
+              </a:rPr>
+              <a:t> over pairs.</a:t>
             </a:r>
           </a:p>
         </p:txBody>
